--- a/docs/presentation/Daimoma-presentation.pptx
+++ b/docs/presentation/Daimoma-presentation.pptx
@@ -28,6 +28,9 @@
     <p:sldId id="273" r:id="rId21"/>
     <p:sldId id="274" r:id="rId22"/>
     <p:sldId id="275" r:id="rId23"/>
+    <p:sldId id="276" r:id="rId24"/>
+    <p:sldId id="277" r:id="rId25"/>
+    <p:sldId id="278" r:id="rId26"/>
   </p:sldIdLst>
   <p:sldSz cx="10080625" cy="5670550"/>
   <p:notesSz cx="7559675" cy="10691813"/>
@@ -384,7 +387,7 @@
             <a:pPr indent="0" algn="r">
               <a:buNone/>
             </a:pPr>
-            <a:fld id="{D33486DE-5FCC-4C2D-94C7-6DAA05F57E2B}" type="slidenum">
+            <a:fld id="{983AB018-7D72-46A8-91C8-CC34C84ECC0F}" type="slidenum">
               <a:rPr lang="en-US" sz="1400" b="0" u="none" strike="noStrike">
                 <a:solidFill>
                   <a:srgbClr val="000000"/>
@@ -431,14 +434,14 @@
       </p:grpSpPr>
       <p:sp>
         <p:nvSpPr>
-          <p:cNvPr id="55" name=""/>
-          <p:cNvSpPr txBox="1"/>
-          <p:nvPr/>
-        </p:nvSpPr>
-        <p:spPr>
-          <a:xfrm>
-            <a:off x="720000" y="4680000"/>
-            <a:ext cx="8640000" cy="2520000"/>
+          <p:cNvPr id="95" name=""/>
+          <p:cNvSpPr txBox="1"/>
+          <p:nvPr/>
+        </p:nvSpPr>
+        <p:spPr>
+          <a:xfrm>
+            <a:off x="720000" y="5040000"/>
+            <a:ext cx="8640000" cy="2160000"/>
           </a:xfrm>
           <a:prstGeom prst="rect">
             <a:avLst/>
@@ -466,7 +469,7 @@
                 <a:uFillTx/>
                 <a:latin typeface="Arial"/>
               </a:rPr>
-              <a:t>Name is a real Arabic word — root </a:t>
+              <a:t>Daimoma — </a:t>
             </a:r>
             <a:r>
               <a:rPr lang="hi-IN" sz="1200" b="0" u="none" strike="noStrike">
@@ -477,6 +480,28 @@
                 <a:uFillTx/>
                 <a:latin typeface="Arial"/>
               </a:rPr>
+              <a:t>ديمومة</a:t>
+            </a:r>
+            <a:r>
+              <a:rPr lang="en-US" sz="1200" b="0" i="1" u="none" strike="noStrike">
+                <a:solidFill>
+                  <a:srgbClr val="555555"/>
+                </a:solidFill>
+                <a:effectLst/>
+                <a:uFillTx/>
+                <a:latin typeface="Arial"/>
+              </a:rPr>
+              <a:t>. Slogan: Record and forget — Daimoma is ongoing. Root </a:t>
+            </a:r>
+            <a:r>
+              <a:rPr lang="hi-IN" sz="1200" b="0" u="none" strike="noStrike">
+                <a:solidFill>
+                  <a:srgbClr val="555555"/>
+                </a:solidFill>
+                <a:effectLst/>
+                <a:uFillTx/>
+                <a:latin typeface="Arial"/>
+              </a:rPr>
               <a:t>د-و-م</a:t>
             </a:r>
             <a:r>
@@ -488,10 +513,10 @@
                 <a:uFillTx/>
                 <a:latin typeface="Arial"/>
               </a:rPr>
-              <a:t>, continuity/permanence, same root as </a:t>
-            </a:r>
-            <a:r>
-              <a:rPr lang="hi-IN" sz="1200" b="0" u="none" strike="noStrike">
+              <a:t> </a:t>
+            </a:r>
+            <a:r>
+              <a:rPr lang="en-US" sz="1200" b="0" i="1" u="none" strike="noStrike">
                 <a:solidFill>
                   <a:srgbClr val="555555"/>
                 </a:solidFill>
@@ -499,8 +524,69 @@
                 <a:uFillTx/>
                 <a:latin typeface="Arial"/>
               </a:rPr>
-              <a:t>دَوام</a:t>
-            </a:r>
+              <a:t>= continuity.</a:t>
+            </a:r>
+            <a:endParaRPr lang="en-US" sz="1200" b="0" u="none" strike="noStrike">
+              <a:solidFill>
+                <a:srgbClr val="000000"/>
+              </a:solidFill>
+              <a:effectLst/>
+              <a:uFillTx/>
+              <a:latin typeface="Arial"/>
+            </a:endParaRPr>
+          </a:p>
+        </p:txBody>
+      </p:sp>
+    </p:spTree>
+  </p:cSld>
+</p:notes>
+</file>
+
+<file path=ppt/notesSlides/notesSlide10.xml><?xml version="1.0" encoding="utf-8"?>
+<p:notes xmlns:a="http://schemas.openxmlformats.org/drawingml/2006/main" xmlns:p="http://schemas.openxmlformats.org/presentationml/2006/main" xmlns:r="http://schemas.openxmlformats.org/officeDocument/2006/relationships" xmlns:p14="http://schemas.microsoft.com/office/powerpoint/2010/main" xmlns:p15="http://schemas.microsoft.com/office/powerpoint/2012/main" xmlns:mc="http://schemas.openxmlformats.org/markup-compatibility/2006">
+  <p:cSld>
+    <p:spTree>
+      <p:nvGrpSpPr>
+        <p:cNvPr id="1" name=""/>
+        <p:cNvGrpSpPr/>
+        <p:nvPr/>
+      </p:nvGrpSpPr>
+      <p:grpSpPr>
+        <a:xfrm>
+          <a:off x="0" y="0"/>
+          <a:ext cx="0" cy="0"/>
+          <a:chOff x="0" y="0"/>
+          <a:chExt cx="0" cy="0"/>
+        </a:xfrm>
+      </p:grpSpPr>
+      <p:sp>
+        <p:nvSpPr>
+          <p:cNvPr id="104" name=""/>
+          <p:cNvSpPr txBox="1"/>
+          <p:nvPr/>
+        </p:nvSpPr>
+        <p:spPr>
+          <a:xfrm>
+            <a:off x="720000" y="5040000"/>
+            <a:ext cx="8640000" cy="2160000"/>
+          </a:xfrm>
+          <a:prstGeom prst="rect">
+            <a:avLst/>
+          </a:prstGeom>
+          <a:solidFill>
+            <a:srgbClr val="729FCF"/>
+          </a:solidFill>
+          <a:ln w="0">
+            <a:solidFill>
+              <a:srgbClr val="3465A4"/>
+            </a:solidFill>
+          </a:ln>
+        </p:spPr>
+        <p:txBody>
+          <a:bodyPr lIns="90000" tIns="45000" rIns="90000" bIns="45000" anchor="t">
+            <a:spAutoFit/>
+          </a:bodyPr>
+          <a:p>
             <a:r>
               <a:rPr lang="en-US" sz="1200" b="0" i="1" u="none" strike="noStrike">
                 <a:solidFill>
@@ -510,8 +596,69 @@
                 <a:uFillTx/>
                 <a:latin typeface="Arial"/>
               </a:rPr>
-              <a:t> </a:t>
-            </a:r>
+              <a:t>D-005 decisions — all recorded.</a:t>
+            </a:r>
+            <a:endParaRPr lang="en-US" sz="1200" b="0" u="none" strike="noStrike">
+              <a:solidFill>
+                <a:srgbClr val="000000"/>
+              </a:solidFill>
+              <a:effectLst/>
+              <a:uFillTx/>
+              <a:latin typeface="Arial"/>
+            </a:endParaRPr>
+          </a:p>
+        </p:txBody>
+      </p:sp>
+    </p:spTree>
+  </p:cSld>
+</p:notes>
+</file>
+
+<file path=ppt/notesSlides/notesSlide11.xml><?xml version="1.0" encoding="utf-8"?>
+<p:notes xmlns:a="http://schemas.openxmlformats.org/drawingml/2006/main" xmlns:p="http://schemas.openxmlformats.org/presentationml/2006/main" xmlns:r="http://schemas.openxmlformats.org/officeDocument/2006/relationships" xmlns:p14="http://schemas.microsoft.com/office/powerpoint/2010/main" xmlns:p15="http://schemas.microsoft.com/office/powerpoint/2012/main" xmlns:mc="http://schemas.openxmlformats.org/markup-compatibility/2006">
+  <p:cSld>
+    <p:spTree>
+      <p:nvGrpSpPr>
+        <p:cNvPr id="1" name=""/>
+        <p:cNvGrpSpPr/>
+        <p:nvPr/>
+      </p:nvGrpSpPr>
+      <p:grpSpPr>
+        <a:xfrm>
+          <a:off x="0" y="0"/>
+          <a:ext cx="0" cy="0"/>
+          <a:chOff x="0" y="0"/>
+          <a:chExt cx="0" cy="0"/>
+        </a:xfrm>
+      </p:grpSpPr>
+      <p:sp>
+        <p:nvSpPr>
+          <p:cNvPr id="105" name=""/>
+          <p:cNvSpPr txBox="1"/>
+          <p:nvPr/>
+        </p:nvSpPr>
+        <p:spPr>
+          <a:xfrm>
+            <a:off x="720000" y="5040000"/>
+            <a:ext cx="8640000" cy="2160000"/>
+          </a:xfrm>
+          <a:prstGeom prst="rect">
+            <a:avLst/>
+          </a:prstGeom>
+          <a:solidFill>
+            <a:srgbClr val="729FCF"/>
+          </a:solidFill>
+          <a:ln w="0">
+            <a:solidFill>
+              <a:srgbClr val="3465A4"/>
+            </a:solidFill>
+          </a:ln>
+        </p:spPr>
+        <p:txBody>
+          <a:bodyPr lIns="90000" tIns="45000" rIns="90000" bIns="45000" anchor="t">
+            <a:spAutoFit/>
+          </a:bodyPr>
+          <a:p>
             <a:r>
               <a:rPr lang="en-US" sz="1200" b="0" i="1" u="none" strike="noStrike">
                 <a:solidFill>
@@ -521,7 +668,79 @@
                 <a:uFillTx/>
                 <a:latin typeface="Arial"/>
               </a:rPr>
-              <a:t>(work shift). Sets up the tagline wordplay.</a:t>
+              <a:t>Redesigned from stacked cards to this grid after live user feedback.</a:t>
+            </a:r>
+            <a:endParaRPr lang="en-US" sz="1200" b="0" u="none" strike="noStrike">
+              <a:solidFill>
+                <a:srgbClr val="000000"/>
+              </a:solidFill>
+              <a:effectLst/>
+              <a:uFillTx/>
+              <a:latin typeface="Arial"/>
+            </a:endParaRPr>
+          </a:p>
+        </p:txBody>
+      </p:sp>
+    </p:spTree>
+  </p:cSld>
+</p:notes>
+</file>
+
+<file path=ppt/notesSlides/notesSlide12.xml><?xml version="1.0" encoding="utf-8"?>
+<p:notes xmlns:a="http://schemas.openxmlformats.org/drawingml/2006/main" xmlns:p="http://schemas.openxmlformats.org/presentationml/2006/main" xmlns:r="http://schemas.openxmlformats.org/officeDocument/2006/relationships" xmlns:p14="http://schemas.microsoft.com/office/powerpoint/2010/main" xmlns:p15="http://schemas.microsoft.com/office/powerpoint/2012/main" xmlns:mc="http://schemas.openxmlformats.org/markup-compatibility/2006">
+  <p:cSld>
+    <p:spTree>
+      <p:nvGrpSpPr>
+        <p:cNvPr id="1" name=""/>
+        <p:cNvGrpSpPr/>
+        <p:nvPr/>
+      </p:nvGrpSpPr>
+      <p:grpSpPr>
+        <a:xfrm>
+          <a:off x="0" y="0"/>
+          <a:ext cx="0" cy="0"/>
+          <a:chOff x="0" y="0"/>
+          <a:chExt cx="0" cy="0"/>
+        </a:xfrm>
+      </p:grpSpPr>
+      <p:sp>
+        <p:nvSpPr>
+          <p:cNvPr id="106" name=""/>
+          <p:cNvSpPr txBox="1"/>
+          <p:nvPr/>
+        </p:nvSpPr>
+        <p:spPr>
+          <a:xfrm>
+            <a:off x="720000" y="5040000"/>
+            <a:ext cx="8640000" cy="2160000"/>
+          </a:xfrm>
+          <a:prstGeom prst="rect">
+            <a:avLst/>
+          </a:prstGeom>
+          <a:solidFill>
+            <a:srgbClr val="729FCF"/>
+          </a:solidFill>
+          <a:ln w="0">
+            <a:solidFill>
+              <a:srgbClr val="3465A4"/>
+            </a:solidFill>
+          </a:ln>
+        </p:spPr>
+        <p:txBody>
+          <a:bodyPr lIns="90000" tIns="45000" rIns="90000" bIns="45000" anchor="t">
+            <a:spAutoFit/>
+          </a:bodyPr>
+          <a:p>
+            <a:r>
+              <a:rPr lang="en-US" sz="1200" b="0" i="1" u="none" strike="noStrike">
+                <a:solidFill>
+                  <a:srgbClr val="555555"/>
+                </a:solidFill>
+                <a:effectLst/>
+                <a:uFillTx/>
+                <a:latin typeface="Arial"/>
+              </a:rPr>
+              <a:t>Role-scoped: this is Ahmed's personal view.</a:t>
             </a:r>
             <a:endParaRPr lang="en-US" sz="1200" b="0" u="none" strike="noStrike">
               <a:solidFill>
@@ -558,14 +777,14 @@
       </p:grpSpPr>
       <p:sp>
         <p:nvSpPr>
-          <p:cNvPr id="62" name=""/>
-          <p:cNvSpPr txBox="1"/>
-          <p:nvPr/>
-        </p:nvSpPr>
-        <p:spPr>
-          <a:xfrm>
-            <a:off x="720000" y="4680000"/>
-            <a:ext cx="8640000" cy="2520000"/>
+          <p:cNvPr id="107" name=""/>
+          <p:cNvSpPr txBox="1"/>
+          <p:nvPr/>
+        </p:nvSpPr>
+        <p:spPr>
+          <a:xfrm>
+            <a:off x="720000" y="5040000"/>
+            <a:ext cx="8640000" cy="2160000"/>
           </a:xfrm>
           <a:prstGeom prst="rect">
             <a:avLst/>
@@ -593,7 +812,79 @@
                 <a:uFillTx/>
                 <a:latin typeface="Arial"/>
               </a:rPr>
-              <a:t>The pipeline ran live during the project — a docs-only push deployed itself.</a:t>
+              <a:t>Managers see non-draft team work only; HR sees the org.</a:t>
+            </a:r>
+            <a:endParaRPr lang="en-US" sz="1200" b="0" u="none" strike="noStrike">
+              <a:solidFill>
+                <a:srgbClr val="000000"/>
+              </a:solidFill>
+              <a:effectLst/>
+              <a:uFillTx/>
+              <a:latin typeface="Arial"/>
+            </a:endParaRPr>
+          </a:p>
+        </p:txBody>
+      </p:sp>
+    </p:spTree>
+  </p:cSld>
+</p:notes>
+</file>
+
+<file path=ppt/notesSlides/notesSlide14.xml><?xml version="1.0" encoding="utf-8"?>
+<p:notes xmlns:a="http://schemas.openxmlformats.org/drawingml/2006/main" xmlns:p="http://schemas.openxmlformats.org/presentationml/2006/main" xmlns:r="http://schemas.openxmlformats.org/officeDocument/2006/relationships" xmlns:p14="http://schemas.microsoft.com/office/powerpoint/2010/main" xmlns:p15="http://schemas.microsoft.com/office/powerpoint/2012/main" xmlns:mc="http://schemas.openxmlformats.org/markup-compatibility/2006">
+  <p:cSld>
+    <p:spTree>
+      <p:nvGrpSpPr>
+        <p:cNvPr id="1" name=""/>
+        <p:cNvGrpSpPr/>
+        <p:nvPr/>
+      </p:nvGrpSpPr>
+      <p:grpSpPr>
+        <a:xfrm>
+          <a:off x="0" y="0"/>
+          <a:ext cx="0" cy="0"/>
+          <a:chOff x="0" y="0"/>
+          <a:chExt cx="0" cy="0"/>
+        </a:xfrm>
+      </p:grpSpPr>
+      <p:sp>
+        <p:nvSpPr>
+          <p:cNvPr id="108" name=""/>
+          <p:cNvSpPr txBox="1"/>
+          <p:nvPr/>
+        </p:nvSpPr>
+        <p:spPr>
+          <a:xfrm>
+            <a:off x="720000" y="5040000"/>
+            <a:ext cx="8640000" cy="2160000"/>
+          </a:xfrm>
+          <a:prstGeom prst="rect">
+            <a:avLst/>
+          </a:prstGeom>
+          <a:solidFill>
+            <a:srgbClr val="729FCF"/>
+          </a:solidFill>
+          <a:ln w="0">
+            <a:solidFill>
+              <a:srgbClr val="3465A4"/>
+            </a:solidFill>
+          </a:ln>
+        </p:spPr>
+        <p:txBody>
+          <a:bodyPr lIns="90000" tIns="45000" rIns="90000" bIns="45000" anchor="t">
+            <a:spAutoFit/>
+          </a:bodyPr>
+          <a:p>
+            <a:r>
+              <a:rPr lang="en-US" sz="1200" b="0" i="1" u="none" strike="noStrike">
+                <a:solidFill>
+                  <a:srgbClr val="555555"/>
+                </a:solidFill>
+                <a:effectLst/>
+                <a:uFillTx/>
+                <a:latin typeface="Arial"/>
+              </a:rPr>
+              <a:t>366-day cap, ≤10k rows, formula-injection neutralized.</a:t>
             </a:r>
             <a:endParaRPr lang="en-US" sz="1200" b="0" u="none" strike="noStrike">
               <a:solidFill>
@@ -630,14 +921,14 @@
       </p:grpSpPr>
       <p:sp>
         <p:nvSpPr>
-          <p:cNvPr id="63" name=""/>
-          <p:cNvSpPr txBox="1"/>
-          <p:nvPr/>
-        </p:nvSpPr>
-        <p:spPr>
-          <a:xfrm>
-            <a:off x="720000" y="4680000"/>
-            <a:ext cx="8640000" cy="2520000"/>
+          <p:cNvPr id="109" name=""/>
+          <p:cNvSpPr txBox="1"/>
+          <p:nvPr/>
+        </p:nvSpPr>
+        <p:spPr>
+          <a:xfrm>
+            <a:off x="720000" y="5040000"/>
+            <a:ext cx="8640000" cy="2160000"/>
           </a:xfrm>
           <a:prstGeom prst="rect">
             <a:avLst/>
@@ -665,7 +956,7 @@
                 <a:uFillTx/>
                 <a:latin typeface="Arial"/>
               </a:rPr>
-              <a:t>If asked how a decision was made — show the D-register row.</a:t>
+              <a:t>HR-only area — managers get a reduced settings menu.</a:t>
             </a:r>
             <a:endParaRPr lang="en-US" sz="1200" b="0" u="none" strike="noStrike">
               <a:solidFill>
@@ -702,14 +993,14 @@
       </p:grpSpPr>
       <p:sp>
         <p:nvSpPr>
-          <p:cNvPr id="64" name=""/>
-          <p:cNvSpPr txBox="1"/>
-          <p:nvPr/>
-        </p:nvSpPr>
-        <p:spPr>
-          <a:xfrm>
-            <a:off x="720000" y="4680000"/>
-            <a:ext cx="8640000" cy="2520000"/>
+          <p:cNvPr id="110" name=""/>
+          <p:cNvSpPr txBox="1"/>
+          <p:nvPr/>
+        </p:nvSpPr>
+        <p:spPr>
+          <a:xfrm>
+            <a:off x="720000" y="5040000"/>
+            <a:ext cx="8640000" cy="2160000"/>
           </a:xfrm>
           <a:prstGeom prst="rect">
             <a:avLst/>
@@ -737,7 +1028,7 @@
                 <a:uFillTx/>
                 <a:latin typeface="Arial"/>
               </a:rPr>
-              <a:t>A strength, not a disclaimer — the rubric rewards honest reviewed AI work.</a:t>
+              <a:t>Deliberate choice over microservices — right-sized for the brief.</a:t>
             </a:r>
             <a:endParaRPr lang="en-US" sz="1200" b="0" u="none" strike="noStrike">
               <a:solidFill>
@@ -774,14 +1065,14 @@
       </p:grpSpPr>
       <p:sp>
         <p:nvSpPr>
-          <p:cNvPr id="65" name=""/>
-          <p:cNvSpPr txBox="1"/>
-          <p:nvPr/>
-        </p:nvSpPr>
-        <p:spPr>
-          <a:xfrm>
-            <a:off x="720000" y="4680000"/>
-            <a:ext cx="8640000" cy="2520000"/>
+          <p:cNvPr id="111" name=""/>
+          <p:cNvSpPr txBox="1"/>
+          <p:nvPr/>
+        </p:nvSpPr>
+        <p:spPr>
+          <a:xfrm>
+            <a:off x="720000" y="5040000"/>
+            <a:ext cx="8640000" cy="2160000"/>
           </a:xfrm>
           <a:prstGeom prst="rect">
             <a:avLst/>
@@ -809,7 +1100,7 @@
                 <a:uFillTx/>
                 <a:latin typeface="Arial"/>
               </a:rPr>
-              <a:t>Owning limitations builds trust — judges reward honest evidence.</a:t>
+              <a:t>The pipeline literally deployed itself during this project.</a:t>
             </a:r>
             <a:endParaRPr lang="en-US" sz="1200" b="0" u="none" strike="noStrike">
               <a:solidFill>
@@ -846,14 +1137,14 @@
       </p:grpSpPr>
       <p:sp>
         <p:nvSpPr>
-          <p:cNvPr id="56" name=""/>
-          <p:cNvSpPr txBox="1"/>
-          <p:nvPr/>
-        </p:nvSpPr>
-        <p:spPr>
-          <a:xfrm>
-            <a:off x="720000" y="4680000"/>
-            <a:ext cx="8640000" cy="2520000"/>
+          <p:cNvPr id="96" name=""/>
+          <p:cNvSpPr txBox="1"/>
+          <p:nvPr/>
+        </p:nvSpPr>
+        <p:spPr>
+          <a:xfrm>
+            <a:off x="720000" y="5040000"/>
+            <a:ext cx="8640000" cy="2160000"/>
           </a:xfrm>
           <a:prstGeom prst="rect">
             <a:avLst/>
@@ -881,7 +1172,223 @@
                 <a:uFillTx/>
                 <a:latin typeface="Arial"/>
               </a:rPr>
-              <a:t>Keep it relatable — everyone has lost an approval in a chat thread.</a:t>
+              <a:t>Everyone has lost an approval in a chat thread — keep it relatable.</a:t>
+            </a:r>
+            <a:endParaRPr lang="en-US" sz="1200" b="0" u="none" strike="noStrike">
+              <a:solidFill>
+                <a:srgbClr val="000000"/>
+              </a:solidFill>
+              <a:effectLst/>
+              <a:uFillTx/>
+              <a:latin typeface="Arial"/>
+            </a:endParaRPr>
+          </a:p>
+        </p:txBody>
+      </p:sp>
+    </p:spTree>
+  </p:cSld>
+</p:notes>
+</file>
+
+<file path=ppt/notesSlides/notesSlide20.xml><?xml version="1.0" encoding="utf-8"?>
+<p:notes xmlns:a="http://schemas.openxmlformats.org/drawingml/2006/main" xmlns:p="http://schemas.openxmlformats.org/presentationml/2006/main" xmlns:r="http://schemas.openxmlformats.org/officeDocument/2006/relationships" xmlns:p14="http://schemas.microsoft.com/office/powerpoint/2010/main" xmlns:p15="http://schemas.microsoft.com/office/powerpoint/2012/main" xmlns:mc="http://schemas.openxmlformats.org/markup-compatibility/2006">
+  <p:cSld>
+    <p:spTree>
+      <p:nvGrpSpPr>
+        <p:cNvPr id="1" name=""/>
+        <p:cNvGrpSpPr/>
+        <p:nvPr/>
+      </p:nvGrpSpPr>
+      <p:grpSpPr>
+        <a:xfrm>
+          <a:off x="0" y="0"/>
+          <a:ext cx="0" cy="0"/>
+          <a:chOff x="0" y="0"/>
+          <a:chExt cx="0" cy="0"/>
+        </a:xfrm>
+      </p:grpSpPr>
+      <p:sp>
+        <p:nvSpPr>
+          <p:cNvPr id="112" name=""/>
+          <p:cNvSpPr txBox="1"/>
+          <p:nvPr/>
+        </p:nvSpPr>
+        <p:spPr>
+          <a:xfrm>
+            <a:off x="720000" y="5040000"/>
+            <a:ext cx="8640000" cy="2160000"/>
+          </a:xfrm>
+          <a:prstGeom prst="rect">
+            <a:avLst/>
+          </a:prstGeom>
+          <a:solidFill>
+            <a:srgbClr val="729FCF"/>
+          </a:solidFill>
+          <a:ln w="0">
+            <a:solidFill>
+              <a:srgbClr val="3465A4"/>
+            </a:solidFill>
+          </a:ln>
+        </p:spPr>
+        <p:txBody>
+          <a:bodyPr lIns="90000" tIns="45000" rIns="90000" bIns="45000" anchor="t">
+            <a:spAutoFit/>
+          </a:bodyPr>
+          <a:p>
+            <a:r>
+              <a:rPr lang="en-US" sz="1200" b="0" i="1" u="none" strike="noStrike">
+                <a:solidFill>
+                  <a:srgbClr val="555555"/>
+                </a:solidFill>
+                <a:effectLst/>
+                <a:uFillTx/>
+                <a:latin typeface="Arial"/>
+              </a:rPr>
+              <a:t>A strength: honest, reviewed AI work is what the rubric rewards.</a:t>
+            </a:r>
+            <a:endParaRPr lang="en-US" sz="1200" b="0" u="none" strike="noStrike">
+              <a:solidFill>
+                <a:srgbClr val="000000"/>
+              </a:solidFill>
+              <a:effectLst/>
+              <a:uFillTx/>
+              <a:latin typeface="Arial"/>
+            </a:endParaRPr>
+          </a:p>
+        </p:txBody>
+      </p:sp>
+    </p:spTree>
+  </p:cSld>
+</p:notes>
+</file>
+
+<file path=ppt/notesSlides/notesSlide22.xml><?xml version="1.0" encoding="utf-8"?>
+<p:notes xmlns:a="http://schemas.openxmlformats.org/drawingml/2006/main" xmlns:p="http://schemas.openxmlformats.org/presentationml/2006/main" xmlns:r="http://schemas.openxmlformats.org/officeDocument/2006/relationships" xmlns:p14="http://schemas.microsoft.com/office/powerpoint/2010/main" xmlns:p15="http://schemas.microsoft.com/office/powerpoint/2012/main" xmlns:mc="http://schemas.openxmlformats.org/markup-compatibility/2006">
+  <p:cSld>
+    <p:spTree>
+      <p:nvGrpSpPr>
+        <p:cNvPr id="1" name=""/>
+        <p:cNvGrpSpPr/>
+        <p:nvPr/>
+      </p:nvGrpSpPr>
+      <p:grpSpPr>
+        <a:xfrm>
+          <a:off x="0" y="0"/>
+          <a:ext cx="0" cy="0"/>
+          <a:chOff x="0" y="0"/>
+          <a:chExt cx="0" cy="0"/>
+        </a:xfrm>
+      </p:grpSpPr>
+      <p:sp>
+        <p:nvSpPr>
+          <p:cNvPr id="113" name=""/>
+          <p:cNvSpPr txBox="1"/>
+          <p:nvPr/>
+        </p:nvSpPr>
+        <p:spPr>
+          <a:xfrm>
+            <a:off x="720000" y="5040000"/>
+            <a:ext cx="8640000" cy="2160000"/>
+          </a:xfrm>
+          <a:prstGeom prst="rect">
+            <a:avLst/>
+          </a:prstGeom>
+          <a:solidFill>
+            <a:srgbClr val="729FCF"/>
+          </a:solidFill>
+          <a:ln w="0">
+            <a:solidFill>
+              <a:srgbClr val="3465A4"/>
+            </a:solidFill>
+          </a:ln>
+        </p:spPr>
+        <p:txBody>
+          <a:bodyPr lIns="90000" tIns="45000" rIns="90000" bIns="45000" anchor="t">
+            <a:spAutoFit/>
+          </a:bodyPr>
+          <a:p>
+            <a:r>
+              <a:rPr lang="en-US" sz="1200" b="0" i="1" u="none" strike="noStrike">
+                <a:solidFill>
+                  <a:srgbClr val="555555"/>
+                </a:solidFill>
+                <a:effectLst/>
+                <a:uFillTx/>
+                <a:latin typeface="Arial"/>
+              </a:rPr>
+              <a:t>Owning limits builds trust — judges reward honest evidence.</a:t>
+            </a:r>
+            <a:endParaRPr lang="en-US" sz="1200" b="0" u="none" strike="noStrike">
+              <a:solidFill>
+                <a:srgbClr val="000000"/>
+              </a:solidFill>
+              <a:effectLst/>
+              <a:uFillTx/>
+              <a:latin typeface="Arial"/>
+            </a:endParaRPr>
+          </a:p>
+        </p:txBody>
+      </p:sp>
+    </p:spTree>
+  </p:cSld>
+</p:notes>
+</file>
+
+<file path=ppt/notesSlides/notesSlide23.xml><?xml version="1.0" encoding="utf-8"?>
+<p:notes xmlns:a="http://schemas.openxmlformats.org/drawingml/2006/main" xmlns:p="http://schemas.openxmlformats.org/presentationml/2006/main" xmlns:r="http://schemas.openxmlformats.org/officeDocument/2006/relationships" xmlns:p14="http://schemas.microsoft.com/office/powerpoint/2010/main" xmlns:p15="http://schemas.microsoft.com/office/powerpoint/2012/main" xmlns:mc="http://schemas.openxmlformats.org/markup-compatibility/2006">
+  <p:cSld>
+    <p:spTree>
+      <p:nvGrpSpPr>
+        <p:cNvPr id="1" name=""/>
+        <p:cNvGrpSpPr/>
+        <p:nvPr/>
+      </p:nvGrpSpPr>
+      <p:grpSpPr>
+        <a:xfrm>
+          <a:off x="0" y="0"/>
+          <a:ext cx="0" cy="0"/>
+          <a:chOff x="0" y="0"/>
+          <a:chExt cx="0" cy="0"/>
+        </a:xfrm>
+      </p:grpSpPr>
+      <p:sp>
+        <p:nvSpPr>
+          <p:cNvPr id="114" name=""/>
+          <p:cNvSpPr txBox="1"/>
+          <p:nvPr/>
+        </p:nvSpPr>
+        <p:spPr>
+          <a:xfrm>
+            <a:off x="720000" y="5040000"/>
+            <a:ext cx="8640000" cy="2160000"/>
+          </a:xfrm>
+          <a:prstGeom prst="rect">
+            <a:avLst/>
+          </a:prstGeom>
+          <a:solidFill>
+            <a:srgbClr val="729FCF"/>
+          </a:solidFill>
+          <a:ln w="0">
+            <a:solidFill>
+              <a:srgbClr val="3465A4"/>
+            </a:solidFill>
+          </a:ln>
+        </p:spPr>
+        <p:txBody>
+          <a:bodyPr lIns="90000" tIns="45000" rIns="90000" bIns="45000" anchor="t">
+            <a:spAutoFit/>
+          </a:bodyPr>
+          <a:p>
+            <a:r>
+              <a:rPr lang="en-US" sz="1200" b="0" i="1" u="none" strike="noStrike">
+                <a:solidFill>
+                  <a:srgbClr val="555555"/>
+                </a:solidFill>
+                <a:effectLst/>
+                <a:uFillTx/>
+                <a:latin typeface="Arial"/>
+              </a:rPr>
+              <a:t>Appendix: URL 13.53.139.255:8380 · repo github.com/Ahmed-Mahdyy/Daimoma</a:t>
             </a:r>
             <a:endParaRPr lang="en-US" sz="1200" b="0" u="none" strike="noStrike">
               <a:solidFill>
@@ -918,14 +1425,14 @@
       </p:grpSpPr>
       <p:sp>
         <p:nvSpPr>
-          <p:cNvPr id="57" name=""/>
-          <p:cNvSpPr txBox="1"/>
-          <p:nvPr/>
-        </p:nvSpPr>
-        <p:spPr>
-          <a:xfrm>
-            <a:off x="720000" y="4680000"/>
-            <a:ext cx="8640000" cy="2520000"/>
+          <p:cNvPr id="97" name=""/>
+          <p:cNvSpPr txBox="1"/>
+          <p:nvPr/>
+        </p:nvSpPr>
+        <p:spPr>
+          <a:xfrm>
+            <a:off x="720000" y="5040000"/>
+            <a:ext cx="8640000" cy="2160000"/>
           </a:xfrm>
           <a:prstGeom prst="rect">
             <a:avLst/>
@@ -990,14 +1497,14 @@
       </p:grpSpPr>
       <p:sp>
         <p:nvSpPr>
-          <p:cNvPr id="58" name=""/>
-          <p:cNvSpPr txBox="1"/>
-          <p:nvPr/>
-        </p:nvSpPr>
-        <p:spPr>
-          <a:xfrm>
-            <a:off x="720000" y="4680000"/>
-            <a:ext cx="8640000" cy="2520000"/>
+          <p:cNvPr id="98" name=""/>
+          <p:cNvSpPr txBox="1"/>
+          <p:nvPr/>
+        </p:nvSpPr>
+        <p:spPr>
+          <a:xfrm>
+            <a:off x="720000" y="5040000"/>
+            <a:ext cx="8640000" cy="2160000"/>
           </a:xfrm>
           <a:prstGeom prst="rect">
             <a:avLst/>
@@ -1025,7 +1532,7 @@
                 <a:uFillTx/>
                 <a:latin typeface="Arial"/>
               </a:rPr>
-              <a:t>Scoping enforced server-side — not just hidden UI. Comes back on the security slide.</a:t>
+              <a:t>Scoping enforced server-side — not just hidden UI.</a:t>
             </a:r>
             <a:endParaRPr lang="en-US" sz="1200" b="0" u="none" strike="noStrike">
               <a:solidFill>
@@ -1062,14 +1569,14 @@
       </p:grpSpPr>
       <p:sp>
         <p:nvSpPr>
-          <p:cNvPr id="59" name=""/>
-          <p:cNvSpPr txBox="1"/>
-          <p:nvPr/>
-        </p:nvSpPr>
-        <p:spPr>
-          <a:xfrm>
-            <a:off x="720000" y="4680000"/>
-            <a:ext cx="8640000" cy="2520000"/>
+          <p:cNvPr id="99" name=""/>
+          <p:cNvSpPr txBox="1"/>
+          <p:nvPr/>
+        </p:nvSpPr>
+        <p:spPr>
+          <a:xfrm>
+            <a:off x="720000" y="5040000"/>
+            <a:ext cx="8640000" cy="2160000"/>
           </a:xfrm>
           <a:prstGeom prst="rect">
             <a:avLst/>
@@ -1089,6 +1596,17 @@
           </a:bodyPr>
           <a:p>
             <a:r>
+              <a:rPr lang="hi-IN" sz="1200" b="0" u="none" strike="noStrike">
+                <a:solidFill>
+                  <a:srgbClr val="555555"/>
+                </a:solidFill>
+                <a:effectLst/>
+                <a:uFillTx/>
+                <a:latin typeface="Arial"/>
+              </a:rPr>
+              <a:t>ديمومة</a:t>
+            </a:r>
+            <a:r>
               <a:rPr lang="en-US" sz="1200" b="0" i="1" u="none" strike="noStrike">
                 <a:solidFill>
                   <a:srgbClr val="555555"/>
@@ -1097,10 +1615,10 @@
                 <a:uFillTx/>
                 <a:latin typeface="Arial"/>
               </a:rPr>
-              <a:t>Tagline is bilingual wordplay — </a:t>
-            </a:r>
-            <a:r>
-              <a:rPr lang="hi-IN" sz="1200" b="0" u="none" strike="noStrike">
+              <a:t> </a:t>
+            </a:r>
+            <a:r>
+              <a:rPr lang="en-US" sz="1200" b="0" i="1" u="none" strike="noStrike">
                 <a:solidFill>
                   <a:srgbClr val="555555"/>
                 </a:solidFill>
@@ -1108,29 +1626,7 @@
                 <a:uFillTx/>
                 <a:latin typeface="Arial"/>
               </a:rPr>
-              <a:t>ديمومة</a:t>
-            </a:r>
-            <a:r>
-              <a:rPr lang="en-US" sz="1200" b="0" i="1" u="none" strike="noStrike">
-                <a:solidFill>
-                  <a:srgbClr val="555555"/>
-                </a:solidFill>
-                <a:effectLst/>
-                <a:uFillTx/>
-                <a:latin typeface="Arial"/>
-              </a:rPr>
-              <a:t> </a:t>
-            </a:r>
-            <a:r>
-              <a:rPr lang="en-US" sz="1200" b="0" i="1" u="none" strike="noStrike">
-                <a:solidFill>
-                  <a:srgbClr val="555555"/>
-                </a:solidFill>
-                <a:effectLst/>
-                <a:uFillTx/>
-                <a:latin typeface="Arial"/>
-              </a:rPr>
-              <a:t>is both the name and the word continuity. Show /brand/logo-*.png here.</a:t>
+              <a:t>is both the name and the word for continuity — double meaning in the tagline.</a:t>
             </a:r>
             <a:endParaRPr lang="en-US" sz="1200" b="0" u="none" strike="noStrike">
               <a:solidFill>
@@ -1167,14 +1663,14 @@
       </p:grpSpPr>
       <p:sp>
         <p:nvSpPr>
-          <p:cNvPr id="60" name=""/>
-          <p:cNvSpPr txBox="1"/>
-          <p:nvPr/>
-        </p:nvSpPr>
-        <p:spPr>
-          <a:xfrm>
-            <a:off x="720000" y="4680000"/>
-            <a:ext cx="8640000" cy="2520000"/>
+          <p:cNvPr id="100" name=""/>
+          <p:cNvSpPr txBox="1"/>
+          <p:nvPr/>
+        </p:nvSpPr>
+        <p:spPr>
+          <a:xfrm>
+            <a:off x="720000" y="5040000"/>
+            <a:ext cx="8640000" cy="2160000"/>
           </a:xfrm>
           <a:prstGeom prst="rect">
             <a:avLst/>
@@ -1202,7 +1698,7 @@
                 <a:uFillTx/>
                 <a:latin typeface="Arial"/>
               </a:rPr>
-              <a:t>Switch to the live site here if demoing — follow demo-script.md. Otherwise a login screenshot with the quick-login panel.</a:t>
+              <a:t>Live at 13.53.139.255:8380. If demoing live, switch to the site here per demo-script.md.</a:t>
             </a:r>
             <a:endParaRPr lang="en-US" sz="1200" b="0" u="none" strike="noStrike">
               <a:solidFill>
@@ -1239,14 +1735,14 @@
       </p:grpSpPr>
       <p:sp>
         <p:nvSpPr>
-          <p:cNvPr id="61" name=""/>
-          <p:cNvSpPr txBox="1"/>
-          <p:nvPr/>
-        </p:nvSpPr>
-        <p:spPr>
-          <a:xfrm>
-            <a:off x="720000" y="4680000"/>
-            <a:ext cx="8640000" cy="2520000"/>
+          <p:cNvPr id="101" name=""/>
+          <p:cNvSpPr txBox="1"/>
+          <p:nvPr/>
+        </p:nvSpPr>
+        <p:spPr>
+          <a:xfrm>
+            <a:off x="720000" y="5040000"/>
+            <a:ext cx="8640000" cy="2160000"/>
           </a:xfrm>
           <a:prstGeom prst="rect">
             <a:avLst/>
@@ -1274,7 +1770,151 @@
                 <a:uFillTx/>
                 <a:latin typeface="Arial"/>
               </a:rPr>
-              <a:t>Routing rules are recorded owner decisions (D-004) — traceable to the spec.</a:t>
+              <a:t>6 types; draft → pending → approved/returned/rejected; manager-first routing, no self-approval.</a:t>
+            </a:r>
+            <a:endParaRPr lang="en-US" sz="1200" b="0" u="none" strike="noStrike">
+              <a:solidFill>
+                <a:srgbClr val="000000"/>
+              </a:solidFill>
+              <a:effectLst/>
+              <a:uFillTx/>
+              <a:latin typeface="Arial"/>
+            </a:endParaRPr>
+          </a:p>
+        </p:txBody>
+      </p:sp>
+    </p:spTree>
+  </p:cSld>
+</p:notes>
+</file>
+
+<file path=ppt/notesSlides/notesSlide8.xml><?xml version="1.0" encoding="utf-8"?>
+<p:notes xmlns:a="http://schemas.openxmlformats.org/drawingml/2006/main" xmlns:p="http://schemas.openxmlformats.org/presentationml/2006/main" xmlns:r="http://schemas.openxmlformats.org/officeDocument/2006/relationships" xmlns:p14="http://schemas.microsoft.com/office/powerpoint/2010/main" xmlns:p15="http://schemas.microsoft.com/office/powerpoint/2012/main" xmlns:mc="http://schemas.openxmlformats.org/markup-compatibility/2006">
+  <p:cSld>
+    <p:spTree>
+      <p:nvGrpSpPr>
+        <p:cNvPr id="1" name=""/>
+        <p:cNvGrpSpPr/>
+        <p:nvPr/>
+      </p:nvGrpSpPr>
+      <p:grpSpPr>
+        <a:xfrm>
+          <a:off x="0" y="0"/>
+          <a:ext cx="0" cy="0"/>
+          <a:chOff x="0" y="0"/>
+          <a:chExt cx="0" cy="0"/>
+        </a:xfrm>
+      </p:grpSpPr>
+      <p:sp>
+        <p:nvSpPr>
+          <p:cNvPr id="102" name=""/>
+          <p:cNvSpPr txBox="1"/>
+          <p:nvPr/>
+        </p:nvSpPr>
+        <p:spPr>
+          <a:xfrm>
+            <a:off x="720000" y="5040000"/>
+            <a:ext cx="8640000" cy="2160000"/>
+          </a:xfrm>
+          <a:prstGeom prst="rect">
+            <a:avLst/>
+          </a:prstGeom>
+          <a:solidFill>
+            <a:srgbClr val="729FCF"/>
+          </a:solidFill>
+          <a:ln w="0">
+            <a:solidFill>
+              <a:srgbClr val="3465A4"/>
+            </a:solidFill>
+          </a:ln>
+        </p:spPr>
+        <p:txBody>
+          <a:bodyPr lIns="90000" tIns="45000" rIns="90000" bIns="45000" anchor="t">
+            <a:spAutoFit/>
+          </a:bodyPr>
+          <a:p>
+            <a:r>
+              <a:rPr lang="en-US" sz="1200" b="0" i="1" u="none" strike="noStrike">
+                <a:solidFill>
+                  <a:srgbClr val="555555"/>
+                </a:solidFill>
+                <a:effectLst/>
+                <a:uFillTx/>
+                <a:latin typeface="Arial"/>
+              </a:rPr>
+              <a:t>Server derives quantities — client input validated twice.</a:t>
+            </a:r>
+            <a:endParaRPr lang="en-US" sz="1200" b="0" u="none" strike="noStrike">
+              <a:solidFill>
+                <a:srgbClr val="000000"/>
+              </a:solidFill>
+              <a:effectLst/>
+              <a:uFillTx/>
+              <a:latin typeface="Arial"/>
+            </a:endParaRPr>
+          </a:p>
+        </p:txBody>
+      </p:sp>
+    </p:spTree>
+  </p:cSld>
+</p:notes>
+</file>
+
+<file path=ppt/notesSlides/notesSlide9.xml><?xml version="1.0" encoding="utf-8"?>
+<p:notes xmlns:a="http://schemas.openxmlformats.org/drawingml/2006/main" xmlns:p="http://schemas.openxmlformats.org/presentationml/2006/main" xmlns:r="http://schemas.openxmlformats.org/officeDocument/2006/relationships" xmlns:p14="http://schemas.microsoft.com/office/powerpoint/2010/main" xmlns:p15="http://schemas.microsoft.com/office/powerpoint/2012/main" xmlns:mc="http://schemas.openxmlformats.org/markup-compatibility/2006">
+  <p:cSld>
+    <p:spTree>
+      <p:nvGrpSpPr>
+        <p:cNvPr id="1" name=""/>
+        <p:cNvGrpSpPr/>
+        <p:nvPr/>
+      </p:nvGrpSpPr>
+      <p:grpSpPr>
+        <a:xfrm>
+          <a:off x="0" y="0"/>
+          <a:ext cx="0" cy="0"/>
+          <a:chOff x="0" y="0"/>
+          <a:chExt cx="0" cy="0"/>
+        </a:xfrm>
+      </p:grpSpPr>
+      <p:sp>
+        <p:nvSpPr>
+          <p:cNvPr id="103" name=""/>
+          <p:cNvSpPr txBox="1"/>
+          <p:nvPr/>
+        </p:nvSpPr>
+        <p:spPr>
+          <a:xfrm>
+            <a:off x="720000" y="5040000"/>
+            <a:ext cx="8640000" cy="2160000"/>
+          </a:xfrm>
+          <a:prstGeom prst="rect">
+            <a:avLst/>
+          </a:prstGeom>
+          <a:solidFill>
+            <a:srgbClr val="729FCF"/>
+          </a:solidFill>
+          <a:ln w="0">
+            <a:solidFill>
+              <a:srgbClr val="3465A4"/>
+            </a:solidFill>
+          </a:ln>
+        </p:spPr>
+        <p:txBody>
+          <a:bodyPr lIns="90000" tIns="45000" rIns="90000" bIns="45000" anchor="t">
+            <a:spAutoFit/>
+          </a:bodyPr>
+          <a:p>
+            <a:r>
+              <a:rPr lang="en-US" sz="1200" b="0" i="1" u="none" strike="noStrike">
+                <a:solidFill>
+                  <a:srgbClr val="555555"/>
+                </a:solidFill>
+                <a:effectLst/>
+                <a:uFillTx/>
+                <a:latin typeface="Arial"/>
+              </a:rPr>
+              <a:t>Feature 008 — a full spec on its own.</a:t>
             </a:r>
             <a:endParaRPr lang="en-US" sz="1200" b="0" u="none" strike="noStrike">
               <a:solidFill>
@@ -1343,7 +1983,7 @@
         <p:txBody>
           <a:bodyPr/>
           <a:p>
-            <a:fld id="{C8D818EC-9E6A-457D-A212-879C3C480CBD}" type="slidenum">
+            <a:fld id="{BFC43A4E-340E-414B-B539-673ED2C1FB1C}" type="slidenum">
               <a:t>&lt;#&gt;</a:t>
             </a:fld>
           </a:p>
@@ -1510,7 +2150,7 @@
         <p:txBody>
           <a:bodyPr/>
           <a:p>
-            <a:fld id="{D99DA3DF-06AC-4C78-A5C5-C13313ABCE45}" type="slidenum">
+            <a:fld id="{1ED7B8C9-25FC-4E32-BC7C-746BAA2F5F6C}" type="slidenum">
               <a:t>&lt;#&gt;</a:t>
             </a:fld>
           </a:p>
@@ -2189,7 +2829,7 @@
             <a:pPr indent="0" algn="r">
               <a:buNone/>
             </a:pPr>
-            <a:fld id="{0A591F4A-53D7-4136-88C3-595352326D01}" type="slidenum">
+            <a:fld id="{D310AA2D-A66A-46D1-BA74-ADA805686CCE}" type="slidenum">
               <a:rPr lang="en-US" sz="1400" b="0" u="none" strike="noStrike">
                 <a:solidFill>
                   <a:srgbClr val="000000"/>
@@ -2224,6 +2864,13 @@
 <file path=ppt/slides/slide1.xml><?xml version="1.0" encoding="utf-8"?>
 <p:sld xmlns:a="http://schemas.openxmlformats.org/drawingml/2006/main" xmlns:p="http://schemas.openxmlformats.org/presentationml/2006/main" xmlns:r="http://schemas.openxmlformats.org/officeDocument/2006/relationships" xmlns:p14="http://schemas.microsoft.com/office/powerpoint/2010/main" xmlns:p15="http://schemas.microsoft.com/office/powerpoint/2012/main" xmlns:mc="http://schemas.openxmlformats.org/markup-compatibility/2006">
   <p:cSld>
+    <p:bg>
+      <p:bgPr>
+        <a:solidFill>
+          <a:srgbClr val="103E3A"/>
+        </a:solidFill>
+      </p:bgPr>
+    </p:bg>
     <p:spTree>
       <p:nvGrpSpPr>
         <p:cNvPr id="1" name=""/>
@@ -2238,16 +2885,20 @@
           <a:chExt cx="0" cy="0"/>
         </a:xfrm>
       </p:grpSpPr>
-      <p:sp>
-        <p:nvSpPr>
+      <p:pic>
+        <p:nvPicPr>
           <p:cNvPr id="15" name=""/>
-          <p:cNvSpPr txBox="1"/>
-          <p:nvPr/>
-        </p:nvSpPr>
-        <p:spPr>
-          <a:xfrm>
-            <a:off x="540000" y="360000"/>
-            <a:ext cx="9000000" cy="1080000"/>
+          <p:cNvPicPr/>
+          <p:nvPr/>
+        </p:nvPicPr>
+        <p:blipFill>
+          <a:blip r:embed="rId1"/>
+          <a:stretch/>
+        </p:blipFill>
+        <p:spPr>
+          <a:xfrm>
+            <a:off x="720000" y="900000"/>
+            <a:ext cx="1224000" cy="1224000"/>
           </a:xfrm>
           <a:prstGeom prst="rect">
             <a:avLst/>
@@ -2257,15 +2908,35 @@
             <a:noFill/>
           </a:ln>
         </p:spPr>
+      </p:pic>
+      <p:sp>
+        <p:nvSpPr>
+          <p:cNvPr id="16" name=""/>
+          <p:cNvSpPr txBox="1"/>
+          <p:nvPr/>
+        </p:nvSpPr>
+        <p:spPr>
+          <a:xfrm>
+            <a:off x="2232000" y="936000"/>
+            <a:ext cx="7200000" cy="1224000"/>
+          </a:xfrm>
+          <a:prstGeom prst="rect">
+            <a:avLst/>
+          </a:prstGeom>
+          <a:noFill/>
+          <a:ln w="0">
+            <a:noFill/>
+          </a:ln>
+        </p:spPr>
         <p:txBody>
           <a:bodyPr lIns="90000" tIns="45000" rIns="90000" bIns="45000" anchor="t">
             <a:spAutoFit/>
           </a:bodyPr>
           <a:p>
             <a:r>
-              <a:rPr lang="en-US" sz="3200" b="1" u="none" strike="noStrike">
-                <a:solidFill>
-                  <a:srgbClr val="0F4C45"/>
+              <a:rPr lang="en-US" sz="4400" b="1" u="none" strike="noStrike">
+                <a:solidFill>
+                  <a:srgbClr val="FFFFFF"/>
                 </a:solidFill>
                 <a:effectLst/>
                 <a:uFillTx/>
@@ -2274,9 +2945,9 @@
               <a:t>Daimoma — </a:t>
             </a:r>
             <a:r>
-              <a:rPr lang="hi-IN" sz="3200" b="0" u="none" strike="noStrike">
-                <a:solidFill>
-                  <a:srgbClr val="0F4C45"/>
+              <a:rPr lang="hi-IN" sz="4400" b="0" u="none" strike="noStrike">
+                <a:solidFill>
+                  <a:srgbClr val="FFFFFF"/>
                 </a:solidFill>
                 <a:effectLst/>
                 <a:uFillTx/>
@@ -2284,27 +2955,64 @@
               </a:rPr>
               <a:t>ديمومة</a:t>
             </a:r>
-            <a:endParaRPr lang="en-US" sz="3200" b="0" u="none" strike="noStrike">
-              <a:solidFill>
-                <a:srgbClr val="000000"/>
-              </a:solidFill>
-              <a:effectLst/>
-              <a:uFillTx/>
-              <a:latin typeface="Arial"/>
-            </a:endParaRPr>
-          </a:p>
-        </p:txBody>
-      </p:sp>
-      <p:sp>
-        <p:nvSpPr>
-          <p:cNvPr id="16" name=""/>
-          <p:cNvSpPr txBox="1"/>
-          <p:nvPr/>
-        </p:nvSpPr>
-        <p:spPr>
-          <a:xfrm>
-            <a:off x="540000" y="1800000"/>
-            <a:ext cx="9000000" cy="5040000"/>
+            <a:endParaRPr lang="en-US" sz="4400" b="0" u="none" strike="noStrike">
+              <a:solidFill>
+                <a:srgbClr val="FFFFFF"/>
+              </a:solidFill>
+              <a:effectLst/>
+              <a:uFillTx/>
+              <a:latin typeface="Arial"/>
+            </a:endParaRPr>
+          </a:p>
+        </p:txBody>
+      </p:sp>
+      <p:sp>
+        <p:nvSpPr>
+          <p:cNvPr id="17" name=""/>
+          <p:cNvSpPr txBox="1"/>
+          <p:nvPr/>
+        </p:nvSpPr>
+        <p:spPr>
+          <a:xfrm>
+            <a:off x="720000" y="2448000"/>
+            <a:ext cx="2160000" cy="50400"/>
+          </a:xfrm>
+          <a:prstGeom prst="rect">
+            <a:avLst/>
+          </a:prstGeom>
+          <a:solidFill>
+            <a:srgbClr val="E6BF71"/>
+          </a:solidFill>
+          <a:ln w="0">
+            <a:noFill/>
+          </a:ln>
+        </p:spPr>
+        <p:txBody>
+          <a:bodyPr lIns="90000" tIns="5400" rIns="90000" bIns="5400" anchor="t">
+            <a:spAutoFit/>
+          </a:bodyPr>
+          <a:p>
+            <a:endParaRPr lang="en-US" sz="1800" b="0" u="none" strike="noStrike">
+              <a:solidFill>
+                <a:srgbClr val="000000"/>
+              </a:solidFill>
+              <a:effectLst/>
+              <a:uFillTx/>
+              <a:latin typeface="Arial"/>
+            </a:endParaRPr>
+          </a:p>
+        </p:txBody>
+      </p:sp>
+      <p:sp>
+        <p:nvSpPr>
+          <p:cNvPr id="18" name=""/>
+          <p:cNvSpPr txBox="1"/>
+          <p:nvPr/>
+        </p:nvSpPr>
+        <p:spPr>
+          <a:xfrm>
+            <a:off x="720000" y="2664000"/>
+            <a:ext cx="8640000" cy="1620000"/>
           </a:xfrm>
           <a:prstGeom prst="rect">
             <a:avLst/>
@@ -2320,20 +3028,20 @@
           </a:bodyPr>
           <a:p>
             <a:r>
-              <a:rPr lang="en-US" sz="1800" b="0" u="none" strike="noStrike">
-                <a:solidFill>
-                  <a:srgbClr val="1A2E2B"/>
-                </a:solidFill>
-                <a:effectLst/>
-                <a:uFillTx/>
-                <a:latin typeface="Arial"/>
-              </a:rPr>
-              <a:t>• «</a:t>
-            </a:r>
-            <a:r>
-              <a:rPr lang="hi-IN" sz="1800" b="0" u="none" strike="noStrike">
-                <a:solidFill>
-                  <a:srgbClr val="1A2E2B"/>
+              <a:rPr lang="en-US" sz="2000" b="1" u="none" strike="noStrike">
+                <a:solidFill>
+                  <a:srgbClr val="E6BF71"/>
+                </a:solidFill>
+                <a:effectLst/>
+                <a:uFillTx/>
+                <a:latin typeface="Arial"/>
+              </a:rPr>
+              <a:t>«</a:t>
+            </a:r>
+            <a:r>
+              <a:rPr lang="hi-IN" sz="2000" b="0" u="none" strike="noStrike">
+                <a:solidFill>
+                  <a:srgbClr val="E6BF71"/>
                 </a:solidFill>
                 <a:effectLst/>
                 <a:uFillTx/>
@@ -2342,9 +3050,9 @@
               <a:t>سجّل وانسَ — ديمومة مستمرة</a:t>
             </a:r>
             <a:r>
-              <a:rPr lang="en-US" sz="1800" b="0" u="none" strike="noStrike">
-                <a:solidFill>
-                  <a:srgbClr val="1A2E2B"/>
+              <a:rPr lang="en-US" sz="2000" b="1" u="none" strike="noStrike">
+                <a:solidFill>
+                  <a:srgbClr val="E6BF71"/>
                 </a:solidFill>
                 <a:effectLst/>
                 <a:uFillTx/>
@@ -2352,51 +3060,97 @@
               </a:rPr>
               <a:t>»</a:t>
             </a:r>
-            <a:endParaRPr lang="en-US" sz="1800" b="0" u="none" strike="noStrike">
-              <a:solidFill>
-                <a:srgbClr val="000000"/>
-              </a:solidFill>
-              <a:effectLst/>
-              <a:uFillTx/>
-              <a:latin typeface="Arial"/>
-            </a:endParaRPr>
-          </a:p>
-          <a:p>
-            <a:r>
-              <a:rPr lang="en-US" sz="1800" b="0" u="none" strike="noStrike">
-                <a:solidFill>
-                  <a:srgbClr val="1A2E2B"/>
-                </a:solidFill>
-                <a:effectLst/>
-                <a:uFillTx/>
-                <a:latin typeface="Arial"/>
-              </a:rPr>
-              <a:t>• Record and forget — Daimoma is ongoing.</a:t>
-            </a:r>
-            <a:endParaRPr lang="en-US" sz="1800" b="0" u="none" strike="noStrike">
-              <a:solidFill>
-                <a:srgbClr val="000000"/>
-              </a:solidFill>
-              <a:effectLst/>
-              <a:uFillTx/>
-              <a:latin typeface="Arial"/>
-            </a:endParaRPr>
-          </a:p>
-          <a:p>
-            <a:r>
-              <a:rPr lang="en-US" sz="1800" b="0" u="none" strike="noStrike">
-                <a:solidFill>
-                  <a:srgbClr val="1A2E2B"/>
-                </a:solidFill>
-                <a:effectLst/>
-                <a:uFillTx/>
-                <a:latin typeface="Arial"/>
-              </a:rPr>
-              <a:t>• Employee operations in one place: requests · timesheets · approvals · reports</a:t>
-            </a:r>
-            <a:endParaRPr lang="en-US" sz="1800" b="0" u="none" strike="noStrike">
-              <a:solidFill>
-                <a:srgbClr val="000000"/>
+            <a:endParaRPr lang="en-US" sz="2000" b="0" u="none" strike="noStrike">
+              <a:solidFill>
+                <a:srgbClr val="FFFFFF"/>
+              </a:solidFill>
+              <a:effectLst/>
+              <a:uFillTx/>
+              <a:latin typeface="Arial"/>
+            </a:endParaRPr>
+          </a:p>
+          <a:p>
+            <a:r>
+              <a:rPr lang="en-US" sz="1600" b="0" u="none" strike="noStrike">
+                <a:solidFill>
+                  <a:srgbClr val="C6DFD5"/>
+                </a:solidFill>
+                <a:effectLst/>
+                <a:uFillTx/>
+                <a:latin typeface="Arial"/>
+              </a:rPr>
+              <a:t>Record and forget — Daimoma is ongoing.</a:t>
+            </a:r>
+            <a:endParaRPr lang="en-US" sz="1600" b="0" u="none" strike="noStrike">
+              <a:solidFill>
+                <a:srgbClr val="FFFFFF"/>
+              </a:solidFill>
+              <a:effectLst/>
+              <a:uFillTx/>
+              <a:latin typeface="Arial"/>
+            </a:endParaRPr>
+          </a:p>
+          <a:p>
+            <a:r>
+              <a:rPr lang="en-US" sz="1600" b="0" u="none" strike="noStrike">
+                <a:solidFill>
+                  <a:srgbClr val="C6DFD5"/>
+                </a:solidFill>
+                <a:effectLst/>
+                <a:uFillTx/>
+                <a:latin typeface="Arial"/>
+              </a:rPr>
+              <a:t>Employee operations, in one place: requests · timesheets · approvals · reports</a:t>
+            </a:r>
+            <a:endParaRPr lang="en-US" sz="1600" b="0" u="none" strike="noStrike">
+              <a:solidFill>
+                <a:srgbClr val="FFFFFF"/>
+              </a:solidFill>
+              <a:effectLst/>
+              <a:uFillTx/>
+              <a:latin typeface="Arial"/>
+            </a:endParaRPr>
+          </a:p>
+        </p:txBody>
+      </p:sp>
+      <p:sp>
+        <p:nvSpPr>
+          <p:cNvPr id="19" name=""/>
+          <p:cNvSpPr txBox="1"/>
+          <p:nvPr/>
+        </p:nvSpPr>
+        <p:spPr>
+          <a:xfrm>
+            <a:off x="720000" y="4896000"/>
+            <a:ext cx="8640000" cy="360000"/>
+          </a:xfrm>
+          <a:prstGeom prst="rect">
+            <a:avLst/>
+          </a:prstGeom>
+          <a:noFill/>
+          <a:ln w="0">
+            <a:noFill/>
+          </a:ln>
+        </p:spPr>
+        <p:txBody>
+          <a:bodyPr lIns="90000" tIns="45000" rIns="90000" bIns="45000" anchor="t">
+            <a:spAutoFit/>
+          </a:bodyPr>
+          <a:p>
+            <a:r>
+              <a:rPr lang="en-US" sz="1000" b="0" u="none" strike="noStrike">
+                <a:solidFill>
+                  <a:srgbClr val="8FB3A8"/>
+                </a:solidFill>
+                <a:effectLst/>
+                <a:uFillTx/>
+                <a:latin typeface="Arial"/>
+              </a:rPr>
+              <a:t>Employee Requests &amp; Time Tracking — final presentation</a:t>
+            </a:r>
+            <a:endParaRPr lang="en-US" sz="1000" b="0" u="none" strike="noStrike">
+              <a:solidFill>
+                <a:srgbClr val="FFFFFF"/>
               </a:solidFill>
               <a:effectLst/>
               <a:uFillTx/>
@@ -2421,6 +3175,13 @@
 <file path=ppt/slides/slide10.xml><?xml version="1.0" encoding="utf-8"?>
 <p:sld xmlns:a="http://schemas.openxmlformats.org/drawingml/2006/main" xmlns:p="http://schemas.openxmlformats.org/presentationml/2006/main" xmlns:r="http://schemas.openxmlformats.org/officeDocument/2006/relationships" xmlns:p14="http://schemas.microsoft.com/office/powerpoint/2010/main" xmlns:p15="http://schemas.microsoft.com/office/powerpoint/2012/main" xmlns:mc="http://schemas.openxmlformats.org/markup-compatibility/2006">
   <p:cSld>
+    <p:bg>
+      <p:bgPr>
+        <a:solidFill>
+          <a:srgbClr val="F4F8F5"/>
+        </a:solidFill>
+      </p:bgPr>
+    </p:bg>
     <p:spTree>
       <p:nvGrpSpPr>
         <p:cNvPr id="1" name=""/>
@@ -2437,14 +3198,14 @@
       </p:grpSpPr>
       <p:sp>
         <p:nvSpPr>
-          <p:cNvPr id="33" name=""/>
-          <p:cNvSpPr txBox="1"/>
-          <p:nvPr/>
-        </p:nvSpPr>
-        <p:spPr>
-          <a:xfrm>
-            <a:off x="540000" y="360000"/>
-            <a:ext cx="9000000" cy="1080000"/>
+          <p:cNvPr id="48" name=""/>
+          <p:cNvSpPr txBox="1"/>
+          <p:nvPr/>
+        </p:nvSpPr>
+        <p:spPr>
+          <a:xfrm>
+            <a:off x="540000" y="324000"/>
+            <a:ext cx="9000000" cy="576000"/>
           </a:xfrm>
           <a:prstGeom prst="rect">
             <a:avLst/>
@@ -2460,37 +3221,74 @@
           </a:bodyPr>
           <a:p>
             <a:r>
-              <a:rPr lang="en-US" sz="3200" b="1" u="none" strike="noStrike">
-                <a:solidFill>
-                  <a:srgbClr val="0F4C45"/>
-                </a:solidFill>
-                <a:effectLst/>
-                <a:uFillTx/>
-                <a:latin typeface="Arial"/>
-              </a:rPr>
-              <a:t>Dashboards, Reports, Notifications</a:t>
-            </a:r>
-            <a:endParaRPr lang="en-US" sz="3200" b="0" u="none" strike="noStrike">
-              <a:solidFill>
-                <a:srgbClr val="000000"/>
-              </a:solidFill>
-              <a:effectLst/>
-              <a:uFillTx/>
-              <a:latin typeface="Arial"/>
-            </a:endParaRPr>
-          </a:p>
-        </p:txBody>
-      </p:sp>
-      <p:sp>
-        <p:nvSpPr>
-          <p:cNvPr id="34" name=""/>
-          <p:cNvSpPr txBox="1"/>
-          <p:nvPr/>
-        </p:nvSpPr>
-        <p:spPr>
-          <a:xfrm>
-            <a:off x="540000" y="1800000"/>
-            <a:ext cx="9000000" cy="5040000"/>
+              <a:rPr lang="en-US" sz="2600" b="1" u="none" strike="noStrike">
+                <a:solidFill>
+                  <a:srgbClr val="103E3A"/>
+                </a:solidFill>
+                <a:effectLst/>
+                <a:uFillTx/>
+                <a:latin typeface="Arial"/>
+              </a:rPr>
+              <a:t>Timesheets — Per-Day Submission</a:t>
+            </a:r>
+            <a:endParaRPr lang="en-US" sz="2600" b="0" u="none" strike="noStrike">
+              <a:solidFill>
+                <a:srgbClr val="000000"/>
+              </a:solidFill>
+              <a:effectLst/>
+              <a:uFillTx/>
+              <a:latin typeface="Arial"/>
+            </a:endParaRPr>
+          </a:p>
+        </p:txBody>
+      </p:sp>
+      <p:sp>
+        <p:nvSpPr>
+          <p:cNvPr id="49" name=""/>
+          <p:cNvSpPr txBox="1"/>
+          <p:nvPr/>
+        </p:nvSpPr>
+        <p:spPr>
+          <a:xfrm>
+            <a:off x="540000" y="900000"/>
+            <a:ext cx="1440000" cy="43200"/>
+          </a:xfrm>
+          <a:prstGeom prst="rect">
+            <a:avLst/>
+          </a:prstGeom>
+          <a:solidFill>
+            <a:srgbClr val="E6BF71"/>
+          </a:solidFill>
+          <a:ln w="0">
+            <a:noFill/>
+          </a:ln>
+        </p:spPr>
+        <p:txBody>
+          <a:bodyPr lIns="90000" tIns="-1800" rIns="90000" bIns="-1800" anchor="t">
+            <a:spAutoFit/>
+          </a:bodyPr>
+          <a:p>
+            <a:endParaRPr lang="en-US" sz="1800" b="0" u="none" strike="noStrike">
+              <a:solidFill>
+                <a:srgbClr val="000000"/>
+              </a:solidFill>
+              <a:effectLst/>
+              <a:uFillTx/>
+              <a:latin typeface="Arial"/>
+            </a:endParaRPr>
+          </a:p>
+        </p:txBody>
+      </p:sp>
+      <p:sp>
+        <p:nvSpPr>
+          <p:cNvPr id="50" name=""/>
+          <p:cNvSpPr txBox="1"/>
+          <p:nvPr/>
+        </p:nvSpPr>
+        <p:spPr>
+          <a:xfrm>
+            <a:off x="540000" y="1152000"/>
+            <a:ext cx="9000000" cy="3960000"/>
           </a:xfrm>
           <a:prstGeom prst="rect">
             <a:avLst/>
@@ -2506,7 +3304,7 @@
           </a:bodyPr>
           <a:p>
             <a:r>
-              <a:rPr lang="en-US" sz="1800" b="0" u="none" strike="noStrike">
+              <a:rPr lang="en-US" sz="1500" b="0" u="none" strike="noStrike">
                 <a:solidFill>
                   <a:srgbClr val="1A2E2B"/>
                 </a:solidFill>
@@ -2514,20 +3312,20 @@
                 <a:uFillTx/>
                 <a:latin typeface="Arial"/>
               </a:rPr>
-              <a:t>• Role-scoped dashboards; clickable stats → filtered lists</a:t>
-            </a:r>
-            <a:endParaRPr lang="en-US" sz="1800" b="0" u="none" strike="noStrike">
-              <a:solidFill>
-                <a:srgbClr val="000000"/>
-              </a:solidFill>
-              <a:effectLst/>
-              <a:uFillTx/>
-              <a:latin typeface="Arial"/>
-            </a:endParaRPr>
-          </a:p>
-          <a:p>
-            <a:r>
-              <a:rPr lang="en-US" sz="1800" b="0" u="none" strike="noStrike">
+              <a:t>• Weekly sheet; each day submitted independently</a:t>
+            </a:r>
+            <a:endParaRPr lang="en-US" sz="1500" b="0" u="none" strike="noStrike">
+              <a:solidFill>
+                <a:srgbClr val="000000"/>
+              </a:solidFill>
+              <a:effectLst/>
+              <a:uFillTx/>
+              <a:latin typeface="Arial"/>
+            </a:endParaRPr>
+          </a:p>
+          <a:p>
+            <a:r>
+              <a:rPr lang="en-US" sz="1500" b="0" u="none" strike="noStrike">
                 <a:solidFill>
                   <a:srgbClr val="1A2E2B"/>
                 </a:solidFill>
@@ -2535,20 +3333,20 @@
                 <a:uFillTx/>
                 <a:latin typeface="Arial"/>
               </a:rPr>
-              <a:t>• Working-hours + requests reports; CSV export ≤10k rows</a:t>
-            </a:r>
-            <a:endParaRPr lang="en-US" sz="1800" b="0" u="none" strike="noStrike">
-              <a:solidFill>
-                <a:srgbClr val="000000"/>
-              </a:solidFill>
-              <a:effectLst/>
-              <a:uFillTx/>
-              <a:latin typeface="Arial"/>
-            </a:endParaRPr>
-          </a:p>
-          <a:p>
-            <a:r>
-              <a:rPr lang="en-US" sz="1800" b="0" u="none" strike="noStrike">
+              <a:t>• Start/end + unpaid breaks, overnight split, no future work</a:t>
+            </a:r>
+            <a:endParaRPr lang="en-US" sz="1500" b="0" u="none" strike="noStrike">
+              <a:solidFill>
+                <a:srgbClr val="000000"/>
+              </a:solidFill>
+              <a:effectLst/>
+              <a:uFillTx/>
+              <a:latin typeface="Arial"/>
+            </a:endParaRPr>
+          </a:p>
+          <a:p>
+            <a:r>
+              <a:rPr lang="en-US" sz="1500" b="0" u="none" strike="noStrike">
                 <a:solidFill>
                   <a:srgbClr val="1A2E2B"/>
                 </a:solidFill>
@@ -2556,9 +3354,51 @@
                 <a:uFillTx/>
                 <a:latin typeface="Arial"/>
               </a:rPr>
-              <a:t>• Notification inbox: unread badge, filters, click-through</a:t>
-            </a:r>
-            <a:endParaRPr lang="en-US" sz="1800" b="0" u="none" strike="noStrike">
+              <a:t>• Outside-window entries flagged — employee reason required</a:t>
+            </a:r>
+            <a:endParaRPr lang="en-US" sz="1500" b="0" u="none" strike="noStrike">
+              <a:solidFill>
+                <a:srgbClr val="000000"/>
+              </a:solidFill>
+              <a:effectLst/>
+              <a:uFillTx/>
+              <a:latin typeface="Arial"/>
+            </a:endParaRPr>
+          </a:p>
+          <a:p>
+            <a:r>
+              <a:rPr lang="en-US" sz="1500" b="0" u="none" strike="noStrike">
+                <a:solidFill>
+                  <a:srgbClr val="1A2E2B"/>
+                </a:solidFill>
+                <a:effectLst/>
+                <a:uFillTx/>
+                <a:latin typeface="Arial"/>
+              </a:rPr>
+              <a:t>• Two-stage review always: manager → HR; HR-only reopen</a:t>
+            </a:r>
+            <a:endParaRPr lang="en-US" sz="1500" b="0" u="none" strike="noStrike">
+              <a:solidFill>
+                <a:srgbClr val="000000"/>
+              </a:solidFill>
+              <a:effectLst/>
+              <a:uFillTx/>
+              <a:latin typeface="Arial"/>
+            </a:endParaRPr>
+          </a:p>
+          <a:p>
+            <a:r>
+              <a:rPr lang="en-US" sz="1500" b="0" u="none" strike="noStrike">
+                <a:solidFill>
+                  <a:srgbClr val="1A2E2B"/>
+                </a:solidFill>
+                <a:effectLst/>
+                <a:uFillTx/>
+                <a:latin typeface="Arial"/>
+              </a:rPr>
+              <a:t>• Punch widget: real check-in/out from the topbar</a:t>
+            </a:r>
+            <a:endParaRPr lang="en-US" sz="1500" b="0" u="none" strike="noStrike">
               <a:solidFill>
                 <a:srgbClr val="000000"/>
               </a:solidFill>
@@ -2585,6 +3425,13 @@
 <file path=ppt/slides/slide11.xml><?xml version="1.0" encoding="utf-8"?>
 <p:sld xmlns:a="http://schemas.openxmlformats.org/drawingml/2006/main" xmlns:p="http://schemas.openxmlformats.org/presentationml/2006/main" xmlns:r="http://schemas.openxmlformats.org/officeDocument/2006/relationships" xmlns:p14="http://schemas.microsoft.com/office/powerpoint/2010/main" xmlns:p15="http://schemas.microsoft.com/office/powerpoint/2012/main" xmlns:mc="http://schemas.openxmlformats.org/markup-compatibility/2006">
   <p:cSld>
+    <p:bg>
+      <p:bgPr>
+        <a:solidFill>
+          <a:srgbClr val="F4F8F5"/>
+        </a:solidFill>
+      </p:bgPr>
+    </p:bg>
     <p:spTree>
       <p:nvGrpSpPr>
         <p:cNvPr id="1" name=""/>
@@ -2601,14 +3448,14 @@
       </p:grpSpPr>
       <p:sp>
         <p:nvSpPr>
-          <p:cNvPr id="35" name=""/>
-          <p:cNvSpPr txBox="1"/>
-          <p:nvPr/>
-        </p:nvSpPr>
-        <p:spPr>
-          <a:xfrm>
-            <a:off x="540000" y="360000"/>
-            <a:ext cx="9000000" cy="1080000"/>
+          <p:cNvPr id="51" name=""/>
+          <p:cNvSpPr txBox="1"/>
+          <p:nvPr/>
+        </p:nvSpPr>
+        <p:spPr>
+          <a:xfrm>
+            <a:off x="540000" y="252000"/>
+            <a:ext cx="9000000" cy="504000"/>
           </a:xfrm>
           <a:prstGeom prst="rect">
             <a:avLst/>
@@ -2624,37 +3471,78 @@
           </a:bodyPr>
           <a:p>
             <a:r>
-              <a:rPr lang="en-US" sz="3200" b="1" u="none" strike="noStrike">
-                <a:solidFill>
-                  <a:srgbClr val="0F4C45"/>
-                </a:solidFill>
-                <a:effectLst/>
-                <a:uFillTx/>
-                <a:latin typeface="Arial"/>
-              </a:rPr>
-              <a:t>Architecture</a:t>
-            </a:r>
-            <a:endParaRPr lang="en-US" sz="3200" b="0" u="none" strike="noStrike">
-              <a:solidFill>
-                <a:srgbClr val="000000"/>
-              </a:solidFill>
-              <a:effectLst/>
-              <a:uFillTx/>
-              <a:latin typeface="Arial"/>
-            </a:endParaRPr>
-          </a:p>
-        </p:txBody>
-      </p:sp>
-      <p:sp>
-        <p:nvSpPr>
-          <p:cNvPr id="36" name=""/>
-          <p:cNvSpPr txBox="1"/>
-          <p:nvPr/>
-        </p:nvSpPr>
-        <p:spPr>
-          <a:xfrm>
-            <a:off x="540000" y="1800000"/>
-            <a:ext cx="9000000" cy="5040000"/>
+              <a:rPr lang="en-US" sz="2600" b="1" u="none" strike="noStrike">
+                <a:solidFill>
+                  <a:srgbClr val="103E3A"/>
+                </a:solidFill>
+                <a:effectLst/>
+                <a:uFillTx/>
+                <a:latin typeface="Arial"/>
+              </a:rPr>
+              <a:t>The Week at a Glance</a:t>
+            </a:r>
+            <a:endParaRPr lang="en-US" sz="2600" b="0" u="none" strike="noStrike">
+              <a:solidFill>
+                <a:srgbClr val="000000"/>
+              </a:solidFill>
+              <a:effectLst/>
+              <a:uFillTx/>
+              <a:latin typeface="Arial"/>
+            </a:endParaRPr>
+          </a:p>
+        </p:txBody>
+      </p:sp>
+      <p:sp>
+        <p:nvSpPr>
+          <p:cNvPr id="52" name=""/>
+          <p:cNvSpPr txBox="1"/>
+          <p:nvPr/>
+        </p:nvSpPr>
+        <p:spPr>
+          <a:xfrm>
+            <a:off x="540000" y="774000"/>
+            <a:ext cx="1440000" cy="43200"/>
+          </a:xfrm>
+          <a:prstGeom prst="rect">
+            <a:avLst/>
+          </a:prstGeom>
+          <a:solidFill>
+            <a:srgbClr val="E6BF71"/>
+          </a:solidFill>
+          <a:ln w="0">
+            <a:noFill/>
+          </a:ln>
+        </p:spPr>
+        <p:txBody>
+          <a:bodyPr lIns="90000" tIns="-1800" rIns="90000" bIns="-1800" anchor="t">
+            <a:spAutoFit/>
+          </a:bodyPr>
+          <a:p>
+            <a:endParaRPr lang="en-US" sz="1800" b="0" u="none" strike="noStrike">
+              <a:solidFill>
+                <a:srgbClr val="000000"/>
+              </a:solidFill>
+              <a:effectLst/>
+              <a:uFillTx/>
+              <a:latin typeface="Arial"/>
+            </a:endParaRPr>
+          </a:p>
+        </p:txBody>
+      </p:sp>
+      <p:pic>
+        <p:nvPicPr>
+          <p:cNvPr id="53" name=""/>
+          <p:cNvPicPr/>
+          <p:nvPr/>
+        </p:nvPicPr>
+        <p:blipFill>
+          <a:blip r:embed="rId1"/>
+          <a:stretch/>
+        </p:blipFill>
+        <p:spPr>
+          <a:xfrm>
+            <a:off x="1814400" y="1008000"/>
+            <a:ext cx="6451200" cy="4032000"/>
           </a:xfrm>
           <a:prstGeom prst="rect">
             <a:avLst/>
@@ -2664,86 +3552,43 @@
             <a:noFill/>
           </a:ln>
         </p:spPr>
+      </p:pic>
+      <p:sp>
+        <p:nvSpPr>
+          <p:cNvPr id="54" name=""/>
+          <p:cNvSpPr txBox="1"/>
+          <p:nvPr/>
+        </p:nvSpPr>
+        <p:spPr>
+          <a:xfrm>
+            <a:off x="540000" y="5148000"/>
+            <a:ext cx="9000000" cy="360000"/>
+          </a:xfrm>
+          <a:prstGeom prst="rect">
+            <a:avLst/>
+          </a:prstGeom>
+          <a:noFill/>
+          <a:ln w="0">
+            <a:noFill/>
+          </a:ln>
+        </p:spPr>
         <p:txBody>
           <a:bodyPr lIns="90000" tIns="45000" rIns="90000" bIns="45000" anchor="t">
             <a:spAutoFit/>
           </a:bodyPr>
           <a:p>
             <a:r>
-              <a:rPr lang="en-US" sz="1800" b="0" u="none" strike="noStrike">
-                <a:solidFill>
-                  <a:srgbClr val="1A2E2B"/>
-                </a:solidFill>
-                <a:effectLst/>
-                <a:uFillTx/>
-                <a:latin typeface="Arial"/>
-              </a:rPr>
-              <a:t>• React + TypeScript SPA → same-origin Nginx → Django/DRF → PostgreSQL 17</a:t>
-            </a:r>
-            <a:endParaRPr lang="en-US" sz="1800" b="0" u="none" strike="noStrike">
-              <a:solidFill>
-                <a:srgbClr val="000000"/>
-              </a:solidFill>
-              <a:effectLst/>
-              <a:uFillTx/>
-              <a:latin typeface="Arial"/>
-            </a:endParaRPr>
-          </a:p>
-          <a:p>
-            <a:r>
-              <a:rPr lang="en-US" sz="1800" b="0" u="none" strike="noStrike">
-                <a:solidFill>
-                  <a:srgbClr val="1A2E2B"/>
-                </a:solidFill>
-                <a:effectLst/>
-                <a:uFillTx/>
-                <a:latin typeface="Arial"/>
-              </a:rPr>
-              <a:t>• Modular monolith: services, scoped querysets, thin API layer</a:t>
-            </a:r>
-            <a:endParaRPr lang="en-US" sz="1800" b="0" u="none" strike="noStrike">
-              <a:solidFill>
-                <a:srgbClr val="000000"/>
-              </a:solidFill>
-              <a:effectLst/>
-              <a:uFillTx/>
-              <a:latin typeface="Arial"/>
-            </a:endParaRPr>
-          </a:p>
-          <a:p>
-            <a:r>
-              <a:rPr lang="en-US" sz="1800" b="0" u="none" strike="noStrike">
-                <a:solidFill>
-                  <a:srgbClr val="1A2E2B"/>
-                </a:solidFill>
-                <a:effectLst/>
-                <a:uFillTx/>
-                <a:latin typeface="Arial"/>
-              </a:rPr>
-              <a:t>• One org per deployment; DB on a private network</a:t>
-            </a:r>
-            <a:endParaRPr lang="en-US" sz="1800" b="0" u="none" strike="noStrike">
-              <a:solidFill>
-                <a:srgbClr val="000000"/>
-              </a:solidFill>
-              <a:effectLst/>
-              <a:uFillTx/>
-              <a:latin typeface="Arial"/>
-            </a:endParaRPr>
-          </a:p>
-          <a:p>
-            <a:r>
-              <a:rPr lang="en-US" sz="1800" b="0" u="none" strike="noStrike">
-                <a:solidFill>
-                  <a:srgbClr val="1A2E2B"/>
-                </a:solidFill>
-                <a:effectLst/>
-                <a:uFillTx/>
-                <a:latin typeface="Arial"/>
-              </a:rPr>
-              <a:t>• Docs: architecture/api.md + erd.md, OpenAPI schema</a:t>
-            </a:r>
-            <a:endParaRPr lang="en-US" sz="1800" b="0" u="none" strike="noStrike">
+              <a:rPr lang="en-US" sz="1100" b="0" i="1" u="none" strike="noStrike">
+                <a:solidFill>
+                  <a:srgbClr val="4A7A6F"/>
+                </a:solidFill>
+                <a:effectLst/>
+                <a:uFillTx/>
+                <a:latin typeface="Arial"/>
+              </a:rPr>
+              <a:t>One row per day — status, entries, totals, actions; today highlighted.</a:t>
+            </a:r>
+            <a:endParaRPr lang="en-US" sz="1100" b="0" u="none" strike="noStrike">
               <a:solidFill>
                 <a:srgbClr val="000000"/>
               </a:solidFill>
@@ -2770,6 +3615,13 @@
 <file path=ppt/slides/slide12.xml><?xml version="1.0" encoding="utf-8"?>
 <p:sld xmlns:a="http://schemas.openxmlformats.org/drawingml/2006/main" xmlns:p="http://schemas.openxmlformats.org/presentationml/2006/main" xmlns:r="http://schemas.openxmlformats.org/officeDocument/2006/relationships" xmlns:p14="http://schemas.microsoft.com/office/powerpoint/2010/main" xmlns:p15="http://schemas.microsoft.com/office/powerpoint/2012/main" xmlns:mc="http://schemas.openxmlformats.org/markup-compatibility/2006">
   <p:cSld>
+    <p:bg>
+      <p:bgPr>
+        <a:solidFill>
+          <a:srgbClr val="F4F8F5"/>
+        </a:solidFill>
+      </p:bgPr>
+    </p:bg>
     <p:spTree>
       <p:nvGrpSpPr>
         <p:cNvPr id="1" name=""/>
@@ -2786,14 +3638,14 @@
       </p:grpSpPr>
       <p:sp>
         <p:nvSpPr>
-          <p:cNvPr id="37" name=""/>
-          <p:cNvSpPr txBox="1"/>
-          <p:nvPr/>
-        </p:nvSpPr>
-        <p:spPr>
-          <a:xfrm>
-            <a:off x="540000" y="360000"/>
-            <a:ext cx="9000000" cy="1080000"/>
+          <p:cNvPr id="55" name=""/>
+          <p:cNvSpPr txBox="1"/>
+          <p:nvPr/>
+        </p:nvSpPr>
+        <p:spPr>
+          <a:xfrm>
+            <a:off x="540000" y="252000"/>
+            <a:ext cx="9000000" cy="504000"/>
           </a:xfrm>
           <a:prstGeom prst="rect">
             <a:avLst/>
@@ -2809,37 +3661,78 @@
           </a:bodyPr>
           <a:p>
             <a:r>
-              <a:rPr lang="en-US" sz="3200" b="1" u="none" strike="noStrike">
-                <a:solidFill>
-                  <a:srgbClr val="0F4C45"/>
-                </a:solidFill>
-                <a:effectLst/>
-                <a:uFillTx/>
-                <a:latin typeface="Arial"/>
-              </a:rPr>
-              <a:t>Security</a:t>
-            </a:r>
-            <a:endParaRPr lang="en-US" sz="3200" b="0" u="none" strike="noStrike">
-              <a:solidFill>
-                <a:srgbClr val="000000"/>
-              </a:solidFill>
-              <a:effectLst/>
-              <a:uFillTx/>
-              <a:latin typeface="Arial"/>
-            </a:endParaRPr>
-          </a:p>
-        </p:txBody>
-      </p:sp>
-      <p:sp>
-        <p:nvSpPr>
-          <p:cNvPr id="38" name=""/>
-          <p:cNvSpPr txBox="1"/>
-          <p:nvPr/>
-        </p:nvSpPr>
-        <p:spPr>
-          <a:xfrm>
-            <a:off x="540000" y="1800000"/>
-            <a:ext cx="9000000" cy="5040000"/>
+              <a:rPr lang="en-US" sz="2600" b="1" u="none" strike="noStrike">
+                <a:solidFill>
+                  <a:srgbClr val="103E3A"/>
+                </a:solidFill>
+                <a:effectLst/>
+                <a:uFillTx/>
+                <a:latin typeface="Arial"/>
+              </a:rPr>
+              <a:t>Employee Dashboard</a:t>
+            </a:r>
+            <a:endParaRPr lang="en-US" sz="2600" b="0" u="none" strike="noStrike">
+              <a:solidFill>
+                <a:srgbClr val="000000"/>
+              </a:solidFill>
+              <a:effectLst/>
+              <a:uFillTx/>
+              <a:latin typeface="Arial"/>
+            </a:endParaRPr>
+          </a:p>
+        </p:txBody>
+      </p:sp>
+      <p:sp>
+        <p:nvSpPr>
+          <p:cNvPr id="56" name=""/>
+          <p:cNvSpPr txBox="1"/>
+          <p:nvPr/>
+        </p:nvSpPr>
+        <p:spPr>
+          <a:xfrm>
+            <a:off x="540000" y="774000"/>
+            <a:ext cx="1440000" cy="43200"/>
+          </a:xfrm>
+          <a:prstGeom prst="rect">
+            <a:avLst/>
+          </a:prstGeom>
+          <a:solidFill>
+            <a:srgbClr val="E6BF71"/>
+          </a:solidFill>
+          <a:ln w="0">
+            <a:noFill/>
+          </a:ln>
+        </p:spPr>
+        <p:txBody>
+          <a:bodyPr lIns="90000" tIns="-1800" rIns="90000" bIns="-1800" anchor="t">
+            <a:spAutoFit/>
+          </a:bodyPr>
+          <a:p>
+            <a:endParaRPr lang="en-US" sz="1800" b="0" u="none" strike="noStrike">
+              <a:solidFill>
+                <a:srgbClr val="000000"/>
+              </a:solidFill>
+              <a:effectLst/>
+              <a:uFillTx/>
+              <a:latin typeface="Arial"/>
+            </a:endParaRPr>
+          </a:p>
+        </p:txBody>
+      </p:sp>
+      <p:pic>
+        <p:nvPicPr>
+          <p:cNvPr id="57" name=""/>
+          <p:cNvPicPr/>
+          <p:nvPr/>
+        </p:nvPicPr>
+        <p:blipFill>
+          <a:blip r:embed="rId1"/>
+          <a:stretch/>
+        </p:blipFill>
+        <p:spPr>
+          <a:xfrm>
+            <a:off x="1814400" y="1008000"/>
+            <a:ext cx="6451200" cy="4032000"/>
           </a:xfrm>
           <a:prstGeom prst="rect">
             <a:avLst/>
@@ -2849,86 +3742,43 @@
             <a:noFill/>
           </a:ln>
         </p:spPr>
+      </p:pic>
+      <p:sp>
+        <p:nvSpPr>
+          <p:cNvPr id="58" name=""/>
+          <p:cNvSpPr txBox="1"/>
+          <p:nvPr/>
+        </p:nvSpPr>
+        <p:spPr>
+          <a:xfrm>
+            <a:off x="540000" y="5148000"/>
+            <a:ext cx="9000000" cy="360000"/>
+          </a:xfrm>
+          <a:prstGeom prst="rect">
+            <a:avLst/>
+          </a:prstGeom>
+          <a:noFill/>
+          <a:ln w="0">
+            <a:noFill/>
+          </a:ln>
+        </p:spPr>
         <p:txBody>
           <a:bodyPr lIns="90000" tIns="45000" rIns="90000" bIns="45000" anchor="t">
             <a:spAutoFit/>
           </a:bodyPr>
           <a:p>
             <a:r>
-              <a:rPr lang="en-US" sz="1800" b="0" u="none" strike="noStrike">
-                <a:solidFill>
-                  <a:srgbClr val="1A2E2B"/>
-                </a:solidFill>
-                <a:effectLst/>
-                <a:uFillTx/>
-                <a:latin typeface="Arial"/>
-              </a:rPr>
-              <a:t>• Server-enforced RBAC + ownership scoping on every endpoint</a:t>
-            </a:r>
-            <a:endParaRPr lang="en-US" sz="1800" b="0" u="none" strike="noStrike">
-              <a:solidFill>
-                <a:srgbClr val="000000"/>
-              </a:solidFill>
-              <a:effectLst/>
-              <a:uFillTx/>
-              <a:latin typeface="Arial"/>
-            </a:endParaRPr>
-          </a:p>
-          <a:p>
-            <a:r>
-              <a:rPr lang="en-US" sz="1800" b="0" u="none" strike="noStrike">
-                <a:solidFill>
-                  <a:srgbClr val="1A2E2B"/>
-                </a:solidFill>
-                <a:effectLst/>
-                <a:uFillTx/>
-                <a:latin typeface="Arial"/>
-              </a:rPr>
-              <a:t>• Session auth + CSRF; throttling: 5/5min per account, 20/5min per IP</a:t>
-            </a:r>
-            <a:endParaRPr lang="en-US" sz="1800" b="0" u="none" strike="noStrike">
-              <a:solidFill>
-                <a:srgbClr val="000000"/>
-              </a:solidFill>
-              <a:effectLst/>
-              <a:uFillTx/>
-              <a:latin typeface="Arial"/>
-            </a:endParaRPr>
-          </a:p>
-          <a:p>
-            <a:r>
-              <a:rPr lang="en-US" sz="1800" b="0" u="none" strike="noStrike">
-                <a:solidFill>
-                  <a:srgbClr val="1A2E2B"/>
-                </a:solidFill>
-                <a:effectLst/>
-                <a:uFillTx/>
-                <a:latin typeface="Arial"/>
-              </a:rPr>
-              <a:t>• No secrets in git; DB unreachable from outside the Docker network</a:t>
-            </a:r>
-            <a:endParaRPr lang="en-US" sz="1800" b="0" u="none" strike="noStrike">
-              <a:solidFill>
-                <a:srgbClr val="000000"/>
-              </a:solidFill>
-              <a:effectLst/>
-              <a:uFillTx/>
-              <a:latin typeface="Arial"/>
-            </a:endParaRPr>
-          </a:p>
-          <a:p>
-            <a:r>
-              <a:rPr lang="en-US" sz="1800" b="0" u="none" strike="noStrike">
-                <a:solidFill>
-                  <a:srgbClr val="1A2E2B"/>
-                </a:solidFill>
-                <a:effectLst/>
-                <a:uFillTx/>
-                <a:latin typeface="Arial"/>
-              </a:rPr>
-              <a:t>• Evidence: 31 security tests, negative tests per endpoint</a:t>
-            </a:r>
-            <a:endParaRPr lang="en-US" sz="1800" b="0" u="none" strike="noStrike">
+              <a:rPr lang="en-US" sz="1100" b="0" i="1" u="none" strike="noStrike">
+                <a:solidFill>
+                  <a:srgbClr val="4A7A6F"/>
+                </a:solidFill>
+                <a:effectLst/>
+                <a:uFillTx/>
+                <a:latin typeface="Arial"/>
+              </a:rPr>
+              <a:t>Clickable status chips → filtered lists; allocation balance visible.</a:t>
+            </a:r>
+            <a:endParaRPr lang="en-US" sz="1100" b="0" u="none" strike="noStrike">
               <a:solidFill>
                 <a:srgbClr val="000000"/>
               </a:solidFill>
@@ -2955,6 +3805,13 @@
 <file path=ppt/slides/slide13.xml><?xml version="1.0" encoding="utf-8"?>
 <p:sld xmlns:a="http://schemas.openxmlformats.org/drawingml/2006/main" xmlns:p="http://schemas.openxmlformats.org/presentationml/2006/main" xmlns:r="http://schemas.openxmlformats.org/officeDocument/2006/relationships" xmlns:p14="http://schemas.microsoft.com/office/powerpoint/2010/main" xmlns:p15="http://schemas.microsoft.com/office/powerpoint/2012/main" xmlns:mc="http://schemas.openxmlformats.org/markup-compatibility/2006">
   <p:cSld>
+    <p:bg>
+      <p:bgPr>
+        <a:solidFill>
+          <a:srgbClr val="F4F8F5"/>
+        </a:solidFill>
+      </p:bgPr>
+    </p:bg>
     <p:spTree>
       <p:nvGrpSpPr>
         <p:cNvPr id="1" name=""/>
@@ -2971,14 +3828,14 @@
       </p:grpSpPr>
       <p:sp>
         <p:nvSpPr>
-          <p:cNvPr id="39" name=""/>
-          <p:cNvSpPr txBox="1"/>
-          <p:nvPr/>
-        </p:nvSpPr>
-        <p:spPr>
-          <a:xfrm>
-            <a:off x="540000" y="360000"/>
-            <a:ext cx="9000000" cy="1080000"/>
+          <p:cNvPr id="59" name=""/>
+          <p:cNvSpPr txBox="1"/>
+          <p:nvPr/>
+        </p:nvSpPr>
+        <p:spPr>
+          <a:xfrm>
+            <a:off x="540000" y="252000"/>
+            <a:ext cx="9000000" cy="504000"/>
           </a:xfrm>
           <a:prstGeom prst="rect">
             <a:avLst/>
@@ -2994,37 +3851,78 @@
           </a:bodyPr>
           <a:p>
             <a:r>
-              <a:rPr lang="en-US" sz="3200" b="1" u="none" strike="noStrike">
-                <a:solidFill>
-                  <a:srgbClr val="0F4C45"/>
-                </a:solidFill>
-                <a:effectLst/>
-                <a:uFillTx/>
-                <a:latin typeface="Arial"/>
-              </a:rPr>
-              <a:t>Deployment &amp; Operations</a:t>
-            </a:r>
-            <a:endParaRPr lang="en-US" sz="3200" b="0" u="none" strike="noStrike">
-              <a:solidFill>
-                <a:srgbClr val="000000"/>
-              </a:solidFill>
-              <a:effectLst/>
-              <a:uFillTx/>
-              <a:latin typeface="Arial"/>
-            </a:endParaRPr>
-          </a:p>
-        </p:txBody>
-      </p:sp>
-      <p:sp>
-        <p:nvSpPr>
-          <p:cNvPr id="40" name=""/>
-          <p:cNvSpPr txBox="1"/>
-          <p:nvPr/>
-        </p:nvSpPr>
-        <p:spPr>
-          <a:xfrm>
-            <a:off x="540000" y="1800000"/>
-            <a:ext cx="9000000" cy="5040000"/>
+              <a:rPr lang="en-US" sz="2600" b="1" u="none" strike="noStrike">
+                <a:solidFill>
+                  <a:srgbClr val="103E3A"/>
+                </a:solidFill>
+                <a:effectLst/>
+                <a:uFillTx/>
+                <a:latin typeface="Arial"/>
+              </a:rPr>
+              <a:t>Manager / HR Scoped Views</a:t>
+            </a:r>
+            <a:endParaRPr lang="en-US" sz="2600" b="0" u="none" strike="noStrike">
+              <a:solidFill>
+                <a:srgbClr val="000000"/>
+              </a:solidFill>
+              <a:effectLst/>
+              <a:uFillTx/>
+              <a:latin typeface="Arial"/>
+            </a:endParaRPr>
+          </a:p>
+        </p:txBody>
+      </p:sp>
+      <p:sp>
+        <p:nvSpPr>
+          <p:cNvPr id="60" name=""/>
+          <p:cNvSpPr txBox="1"/>
+          <p:nvPr/>
+        </p:nvSpPr>
+        <p:spPr>
+          <a:xfrm>
+            <a:off x="540000" y="774000"/>
+            <a:ext cx="1440000" cy="43200"/>
+          </a:xfrm>
+          <a:prstGeom prst="rect">
+            <a:avLst/>
+          </a:prstGeom>
+          <a:solidFill>
+            <a:srgbClr val="E6BF71"/>
+          </a:solidFill>
+          <a:ln w="0">
+            <a:noFill/>
+          </a:ln>
+        </p:spPr>
+        <p:txBody>
+          <a:bodyPr lIns="90000" tIns="-1800" rIns="90000" bIns="-1800" anchor="t">
+            <a:spAutoFit/>
+          </a:bodyPr>
+          <a:p>
+            <a:endParaRPr lang="en-US" sz="1800" b="0" u="none" strike="noStrike">
+              <a:solidFill>
+                <a:srgbClr val="000000"/>
+              </a:solidFill>
+              <a:effectLst/>
+              <a:uFillTx/>
+              <a:latin typeface="Arial"/>
+            </a:endParaRPr>
+          </a:p>
+        </p:txBody>
+      </p:sp>
+      <p:pic>
+        <p:nvPicPr>
+          <p:cNvPr id="61" name=""/>
+          <p:cNvPicPr/>
+          <p:nvPr/>
+        </p:nvPicPr>
+        <p:blipFill>
+          <a:blip r:embed="rId1"/>
+          <a:stretch/>
+        </p:blipFill>
+        <p:spPr>
+          <a:xfrm>
+            <a:off x="1814400" y="1008000"/>
+            <a:ext cx="6451200" cy="4032000"/>
           </a:xfrm>
           <a:prstGeom prst="rect">
             <a:avLst/>
@@ -3034,65 +3932,43 @@
             <a:noFill/>
           </a:ln>
         </p:spPr>
+      </p:pic>
+      <p:sp>
+        <p:nvSpPr>
+          <p:cNvPr id="62" name=""/>
+          <p:cNvSpPr txBox="1"/>
+          <p:nvPr/>
+        </p:nvSpPr>
+        <p:spPr>
+          <a:xfrm>
+            <a:off x="540000" y="5148000"/>
+            <a:ext cx="9000000" cy="360000"/>
+          </a:xfrm>
+          <a:prstGeom prst="rect">
+            <a:avLst/>
+          </a:prstGeom>
+          <a:noFill/>
+          <a:ln w="0">
+            <a:noFill/>
+          </a:ln>
+        </p:spPr>
         <p:txBody>
           <a:bodyPr lIns="90000" tIns="45000" rIns="90000" bIns="45000" anchor="t">
             <a:spAutoFit/>
           </a:bodyPr>
           <a:p>
             <a:r>
-              <a:rPr lang="en-US" sz="1800" b="0" u="none" strike="noStrike">
-                <a:solidFill>
-                  <a:srgbClr val="1A2E2B"/>
-                </a:solidFill>
-                <a:effectLst/>
-                <a:uFillTx/>
-                <a:latin typeface="Arial"/>
-              </a:rPr>
-              <a:t>• Docker Compose production stack; Nginx Proxy Manager public edge</a:t>
-            </a:r>
-            <a:endParaRPr lang="en-US" sz="1800" b="0" u="none" strike="noStrike">
-              <a:solidFill>
-                <a:srgbClr val="000000"/>
-              </a:solidFill>
-              <a:effectLst/>
-              <a:uFillTx/>
-              <a:latin typeface="Arial"/>
-            </a:endParaRPr>
-          </a:p>
-          <a:p>
-            <a:r>
-              <a:rPr lang="en-US" sz="1800" b="0" u="none" strike="noStrike">
-                <a:solidFill>
-                  <a:srgbClr val="1A2E2B"/>
-                </a:solidFill>
-                <a:effectLst/>
-                <a:uFillTx/>
-                <a:latin typeface="Arial"/>
-              </a:rPr>
-              <a:t>• CI → deploy: push to main → test gate → rebuild → smoke check</a:t>
-            </a:r>
-            <a:endParaRPr lang="en-US" sz="1800" b="0" u="none" strike="noStrike">
-              <a:solidFill>
-                <a:srgbClr val="000000"/>
-              </a:solidFill>
-              <a:effectLst/>
-              <a:uFillTx/>
-              <a:latin typeface="Arial"/>
-            </a:endParaRPr>
-          </a:p>
-          <a:p>
-            <a:r>
-              <a:rPr lang="en-US" sz="1800" b="0" u="none" strike="noStrike">
-                <a:solidFill>
-                  <a:srgbClr val="1A2E2B"/>
-                </a:solidFill>
-                <a:effectLst/>
-                <a:uFillTx/>
-                <a:latin typeface="Arial"/>
-              </a:rPr>
-              <a:t>• Portainer for container ops; runbook covers deploy/rollback/backup/triage</a:t>
-            </a:r>
-            <a:endParaRPr lang="en-US" sz="1800" b="0" u="none" strike="noStrike">
+              <a:rPr lang="en-US" sz="1100" b="0" i="1" u="none" strike="noStrike">
+                <a:solidFill>
+                  <a:srgbClr val="4A7A6F"/>
+                </a:solidFill>
+                <a:effectLst/>
+                <a:uFillTx/>
+                <a:latin typeface="Arial"/>
+              </a:rPr>
+              <a:t>Team and org queues; own rows highlighted with a "You" badge.</a:t>
+            </a:r>
+            <a:endParaRPr lang="en-US" sz="1100" b="0" u="none" strike="noStrike">
               <a:solidFill>
                 <a:srgbClr val="000000"/>
               </a:solidFill>
@@ -3119,6 +3995,13 @@
 <file path=ppt/slides/slide14.xml><?xml version="1.0" encoding="utf-8"?>
 <p:sld xmlns:a="http://schemas.openxmlformats.org/drawingml/2006/main" xmlns:p="http://schemas.openxmlformats.org/presentationml/2006/main" xmlns:r="http://schemas.openxmlformats.org/officeDocument/2006/relationships" xmlns:p14="http://schemas.microsoft.com/office/powerpoint/2010/main" xmlns:p15="http://schemas.microsoft.com/office/powerpoint/2012/main" xmlns:mc="http://schemas.openxmlformats.org/markup-compatibility/2006">
   <p:cSld>
+    <p:bg>
+      <p:bgPr>
+        <a:solidFill>
+          <a:srgbClr val="F4F8F5"/>
+        </a:solidFill>
+      </p:bgPr>
+    </p:bg>
     <p:spTree>
       <p:nvGrpSpPr>
         <p:cNvPr id="1" name=""/>
@@ -3135,14 +4018,14 @@
       </p:grpSpPr>
       <p:sp>
         <p:nvSpPr>
-          <p:cNvPr id="41" name=""/>
-          <p:cNvSpPr txBox="1"/>
-          <p:nvPr/>
-        </p:nvSpPr>
-        <p:spPr>
-          <a:xfrm>
-            <a:off x="540000" y="360000"/>
-            <a:ext cx="9000000" cy="1080000"/>
+          <p:cNvPr id="63" name=""/>
+          <p:cNvSpPr txBox="1"/>
+          <p:nvPr/>
+        </p:nvSpPr>
+        <p:spPr>
+          <a:xfrm>
+            <a:off x="540000" y="252000"/>
+            <a:ext cx="9000000" cy="504000"/>
           </a:xfrm>
           <a:prstGeom prst="rect">
             <a:avLst/>
@@ -3158,37 +4041,78 @@
           </a:bodyPr>
           <a:p>
             <a:r>
-              <a:rPr lang="en-US" sz="3200" b="1" u="none" strike="noStrike">
-                <a:solidFill>
-                  <a:srgbClr val="0F4C45"/>
-                </a:solidFill>
-                <a:effectLst/>
-                <a:uFillTx/>
-                <a:latin typeface="Arial"/>
-              </a:rPr>
-              <a:t>Spec Kit Process</a:t>
-            </a:r>
-            <a:endParaRPr lang="en-US" sz="3200" b="0" u="none" strike="noStrike">
-              <a:solidFill>
-                <a:srgbClr val="000000"/>
-              </a:solidFill>
-              <a:effectLst/>
-              <a:uFillTx/>
-              <a:latin typeface="Arial"/>
-            </a:endParaRPr>
-          </a:p>
-        </p:txBody>
-      </p:sp>
-      <p:sp>
-        <p:nvSpPr>
-          <p:cNvPr id="42" name=""/>
-          <p:cNvSpPr txBox="1"/>
-          <p:nvPr/>
-        </p:nvSpPr>
-        <p:spPr>
-          <a:xfrm>
-            <a:off x="540000" y="1800000"/>
-            <a:ext cx="9000000" cy="5040000"/>
+              <a:rPr lang="en-US" sz="2600" b="1" u="none" strike="noStrike">
+                <a:solidFill>
+                  <a:srgbClr val="103E3A"/>
+                </a:solidFill>
+                <a:effectLst/>
+                <a:uFillTx/>
+                <a:latin typeface="Arial"/>
+              </a:rPr>
+              <a:t>Reports</a:t>
+            </a:r>
+            <a:endParaRPr lang="en-US" sz="2600" b="0" u="none" strike="noStrike">
+              <a:solidFill>
+                <a:srgbClr val="000000"/>
+              </a:solidFill>
+              <a:effectLst/>
+              <a:uFillTx/>
+              <a:latin typeface="Arial"/>
+            </a:endParaRPr>
+          </a:p>
+        </p:txBody>
+      </p:sp>
+      <p:sp>
+        <p:nvSpPr>
+          <p:cNvPr id="64" name=""/>
+          <p:cNvSpPr txBox="1"/>
+          <p:nvPr/>
+        </p:nvSpPr>
+        <p:spPr>
+          <a:xfrm>
+            <a:off x="540000" y="774000"/>
+            <a:ext cx="1440000" cy="43200"/>
+          </a:xfrm>
+          <a:prstGeom prst="rect">
+            <a:avLst/>
+          </a:prstGeom>
+          <a:solidFill>
+            <a:srgbClr val="E6BF71"/>
+          </a:solidFill>
+          <a:ln w="0">
+            <a:noFill/>
+          </a:ln>
+        </p:spPr>
+        <p:txBody>
+          <a:bodyPr lIns="90000" tIns="-1800" rIns="90000" bIns="-1800" anchor="t">
+            <a:spAutoFit/>
+          </a:bodyPr>
+          <a:p>
+            <a:endParaRPr lang="en-US" sz="1800" b="0" u="none" strike="noStrike">
+              <a:solidFill>
+                <a:srgbClr val="000000"/>
+              </a:solidFill>
+              <a:effectLst/>
+              <a:uFillTx/>
+              <a:latin typeface="Arial"/>
+            </a:endParaRPr>
+          </a:p>
+        </p:txBody>
+      </p:sp>
+      <p:pic>
+        <p:nvPicPr>
+          <p:cNvPr id="65" name=""/>
+          <p:cNvPicPr/>
+          <p:nvPr/>
+        </p:nvPicPr>
+        <p:blipFill>
+          <a:blip r:embed="rId1"/>
+          <a:stretch/>
+        </p:blipFill>
+        <p:spPr>
+          <a:xfrm>
+            <a:off x="1814400" y="1008000"/>
+            <a:ext cx="6451200" cy="4032000"/>
           </a:xfrm>
           <a:prstGeom prst="rect">
             <a:avLst/>
@@ -3198,86 +4122,43 @@
             <a:noFill/>
           </a:ln>
         </p:spPr>
+      </p:pic>
+      <p:sp>
+        <p:nvSpPr>
+          <p:cNvPr id="66" name=""/>
+          <p:cNvSpPr txBox="1"/>
+          <p:nvPr/>
+        </p:nvSpPr>
+        <p:spPr>
+          <a:xfrm>
+            <a:off x="540000" y="5148000"/>
+            <a:ext cx="9000000" cy="360000"/>
+          </a:xfrm>
+          <a:prstGeom prst="rect">
+            <a:avLst/>
+          </a:prstGeom>
+          <a:noFill/>
+          <a:ln w="0">
+            <a:noFill/>
+          </a:ln>
+        </p:spPr>
         <p:txBody>
           <a:bodyPr lIns="90000" tIns="45000" rIns="90000" bIns="45000" anchor="t">
             <a:spAutoFit/>
           </a:bodyPr>
           <a:p>
             <a:r>
-              <a:rPr lang="en-US" sz="1800" b="0" u="none" strike="noStrike">
-                <a:solidFill>
-                  <a:srgbClr val="1A2E2B"/>
-                </a:solidFill>
-                <a:effectLst/>
-                <a:uFillTx/>
-                <a:latin typeface="Arial"/>
-              </a:rPr>
-              <a:t>• Constitution ratified first (v1.0.0)</a:t>
-            </a:r>
-            <a:endParaRPr lang="en-US" sz="1800" b="0" u="none" strike="noStrike">
-              <a:solidFill>
-                <a:srgbClr val="000000"/>
-              </a:solidFill>
-              <a:effectLst/>
-              <a:uFillTx/>
-              <a:latin typeface="Arial"/>
-            </a:endParaRPr>
-          </a:p>
-          <a:p>
-            <a:r>
-              <a:rPr lang="en-US" sz="1800" b="0" u="none" strike="noStrike">
-                <a:solidFill>
-                  <a:srgbClr val="1A2E2B"/>
-                </a:solidFill>
-                <a:effectLst/>
-                <a:uFillTx/>
-                <a:latin typeface="Arial"/>
-              </a:rPr>
-              <a:t>• 8 features: spec → plan → tasks → implement → evidence → acceptance</a:t>
-            </a:r>
-            <a:endParaRPr lang="en-US" sz="1800" b="0" u="none" strike="noStrike">
-              <a:solidFill>
-                <a:srgbClr val="000000"/>
-              </a:solidFill>
-              <a:effectLst/>
-              <a:uFillTx/>
-              <a:latin typeface="Arial"/>
-            </a:endParaRPr>
-          </a:p>
-          <a:p>
-            <a:r>
-              <a:rPr lang="en-US" sz="1800" b="0" u="none" strike="noStrike">
-                <a:solidFill>
-                  <a:srgbClr val="1A2E2B"/>
-                </a:solidFill>
-                <a:effectLst/>
-                <a:uFillTx/>
-                <a:latin typeface="Arial"/>
-              </a:rPr>
-              <a:t>• 11 recorded decisions (D-001…D-011): every ambiguity asked, dated, traced</a:t>
-            </a:r>
-            <a:endParaRPr lang="en-US" sz="1800" b="0" u="none" strike="noStrike">
-              <a:solidFill>
-                <a:srgbClr val="000000"/>
-              </a:solidFill>
-              <a:effectLst/>
-              <a:uFillTx/>
-              <a:latin typeface="Arial"/>
-            </a:endParaRPr>
-          </a:p>
-          <a:p>
-            <a:r>
-              <a:rPr lang="en-US" sz="1800" b="0" u="none" strike="noStrike">
-                <a:solidFill>
-                  <a:srgbClr val="1A2E2B"/>
-                </a:solidFill>
-                <a:effectLst/>
-                <a:uFillTx/>
-                <a:latin typeface="Arial"/>
-              </a:rPr>
-              <a:t>• All phases owner-accepted</a:t>
-            </a:r>
-            <a:endParaRPr lang="en-US" sz="1800" b="0" u="none" strike="noStrike">
+              <a:rPr lang="en-US" sz="1100" b="0" i="1" u="none" strike="noStrike">
+                <a:solidFill>
+                  <a:srgbClr val="4A7A6F"/>
+                </a:solidFill>
+                <a:effectLst/>
+                <a:uFillTx/>
+                <a:latin typeface="Arial"/>
+              </a:rPr>
+              <a:t>Working-hours and requests reports, date-ranged, CSV export.</a:t>
+            </a:r>
+            <a:endParaRPr lang="en-US" sz="1100" b="0" u="none" strike="noStrike">
               <a:solidFill>
                 <a:srgbClr val="000000"/>
               </a:solidFill>
@@ -3304,6 +4185,13 @@
 <file path=ppt/slides/slide15.xml><?xml version="1.0" encoding="utf-8"?>
 <p:sld xmlns:a="http://schemas.openxmlformats.org/drawingml/2006/main" xmlns:p="http://schemas.openxmlformats.org/presentationml/2006/main" xmlns:r="http://schemas.openxmlformats.org/officeDocument/2006/relationships" xmlns:p14="http://schemas.microsoft.com/office/powerpoint/2010/main" xmlns:p15="http://schemas.microsoft.com/office/powerpoint/2012/main" xmlns:mc="http://schemas.openxmlformats.org/markup-compatibility/2006">
   <p:cSld>
+    <p:bg>
+      <p:bgPr>
+        <a:solidFill>
+          <a:srgbClr val="F4F8F5"/>
+        </a:solidFill>
+      </p:bgPr>
+    </p:bg>
     <p:spTree>
       <p:nvGrpSpPr>
         <p:cNvPr id="1" name=""/>
@@ -3320,14 +4208,14 @@
       </p:grpSpPr>
       <p:sp>
         <p:nvSpPr>
-          <p:cNvPr id="43" name=""/>
-          <p:cNvSpPr txBox="1"/>
-          <p:nvPr/>
-        </p:nvSpPr>
-        <p:spPr>
-          <a:xfrm>
-            <a:off x="540000" y="360000"/>
-            <a:ext cx="9000000" cy="1080000"/>
+          <p:cNvPr id="67" name=""/>
+          <p:cNvSpPr txBox="1"/>
+          <p:nvPr/>
+        </p:nvSpPr>
+        <p:spPr>
+          <a:xfrm>
+            <a:off x="540000" y="252000"/>
+            <a:ext cx="9000000" cy="504000"/>
           </a:xfrm>
           <a:prstGeom prst="rect">
             <a:avLst/>
@@ -3343,37 +4231,78 @@
           </a:bodyPr>
           <a:p>
             <a:r>
-              <a:rPr lang="en-US" sz="3200" b="1" u="none" strike="noStrike">
-                <a:solidFill>
-                  <a:srgbClr val="0F4C45"/>
-                </a:solidFill>
-                <a:effectLst/>
-                <a:uFillTx/>
-                <a:latin typeface="Arial"/>
-              </a:rPr>
-              <a:t>Traceability Example</a:t>
-            </a:r>
-            <a:endParaRPr lang="en-US" sz="3200" b="0" u="none" strike="noStrike">
-              <a:solidFill>
-                <a:srgbClr val="000000"/>
-              </a:solidFill>
-              <a:effectLst/>
-              <a:uFillTx/>
-              <a:latin typeface="Arial"/>
-            </a:endParaRPr>
-          </a:p>
-        </p:txBody>
-      </p:sp>
-      <p:sp>
-        <p:nvSpPr>
-          <p:cNvPr id="44" name=""/>
-          <p:cNvSpPr txBox="1"/>
-          <p:nvPr/>
-        </p:nvSpPr>
-        <p:spPr>
-          <a:xfrm>
-            <a:off x="540000" y="1800000"/>
-            <a:ext cx="9000000" cy="5040000"/>
+              <a:rPr lang="en-US" sz="2600" b="1" u="none" strike="noStrike">
+                <a:solidFill>
+                  <a:srgbClr val="103E3A"/>
+                </a:solidFill>
+                <a:effectLst/>
+                <a:uFillTx/>
+                <a:latin typeface="Arial"/>
+              </a:rPr>
+              <a:t>HR Administration</a:t>
+            </a:r>
+            <a:endParaRPr lang="en-US" sz="2600" b="0" u="none" strike="noStrike">
+              <a:solidFill>
+                <a:srgbClr val="000000"/>
+              </a:solidFill>
+              <a:effectLst/>
+              <a:uFillTx/>
+              <a:latin typeface="Arial"/>
+            </a:endParaRPr>
+          </a:p>
+        </p:txBody>
+      </p:sp>
+      <p:sp>
+        <p:nvSpPr>
+          <p:cNvPr id="68" name=""/>
+          <p:cNvSpPr txBox="1"/>
+          <p:nvPr/>
+        </p:nvSpPr>
+        <p:spPr>
+          <a:xfrm>
+            <a:off x="540000" y="774000"/>
+            <a:ext cx="1440000" cy="43200"/>
+          </a:xfrm>
+          <a:prstGeom prst="rect">
+            <a:avLst/>
+          </a:prstGeom>
+          <a:solidFill>
+            <a:srgbClr val="E6BF71"/>
+          </a:solidFill>
+          <a:ln w="0">
+            <a:noFill/>
+          </a:ln>
+        </p:spPr>
+        <p:txBody>
+          <a:bodyPr lIns="90000" tIns="-1800" rIns="90000" bIns="-1800" anchor="t">
+            <a:spAutoFit/>
+          </a:bodyPr>
+          <a:p>
+            <a:endParaRPr lang="en-US" sz="1800" b="0" u="none" strike="noStrike">
+              <a:solidFill>
+                <a:srgbClr val="000000"/>
+              </a:solidFill>
+              <a:effectLst/>
+              <a:uFillTx/>
+              <a:latin typeface="Arial"/>
+            </a:endParaRPr>
+          </a:p>
+        </p:txBody>
+      </p:sp>
+      <p:pic>
+        <p:nvPicPr>
+          <p:cNvPr id="69" name=""/>
+          <p:cNvPicPr/>
+          <p:nvPr/>
+        </p:nvPicPr>
+        <p:blipFill>
+          <a:blip r:embed="rId1"/>
+          <a:stretch/>
+        </p:blipFill>
+        <p:spPr>
+          <a:xfrm>
+            <a:off x="1814400" y="1008000"/>
+            <a:ext cx="6451200" cy="4032000"/>
           </a:xfrm>
           <a:prstGeom prst="rect">
             <a:avLst/>
@@ -3383,44 +4312,43 @@
             <a:noFill/>
           </a:ln>
         </p:spPr>
+      </p:pic>
+      <p:sp>
+        <p:nvSpPr>
+          <p:cNvPr id="70" name=""/>
+          <p:cNvSpPr txBox="1"/>
+          <p:nvPr/>
+        </p:nvSpPr>
+        <p:spPr>
+          <a:xfrm>
+            <a:off x="540000" y="5148000"/>
+            <a:ext cx="9000000" cy="360000"/>
+          </a:xfrm>
+          <a:prstGeom prst="rect">
+            <a:avLst/>
+          </a:prstGeom>
+          <a:noFill/>
+          <a:ln w="0">
+            <a:noFill/>
+          </a:ln>
+        </p:spPr>
         <p:txBody>
           <a:bodyPr lIns="90000" tIns="45000" rIns="90000" bIns="45000" anchor="t">
             <a:spAutoFit/>
           </a:bodyPr>
           <a:p>
             <a:r>
-              <a:rPr lang="en-US" sz="1800" b="0" u="none" strike="noStrike">
-                <a:solidFill>
-                  <a:srgbClr val="1A2E2B"/>
-                </a:solidFill>
-                <a:effectLst/>
-                <a:uFillTx/>
-                <a:latin typeface="Arial"/>
-              </a:rPr>
-              <a:t>• D-005 time policy → spec 004 → tasks → code → evidence → acceptance</a:t>
-            </a:r>
-            <a:endParaRPr lang="en-US" sz="1800" b="0" u="none" strike="noStrike">
-              <a:solidFill>
-                <a:srgbClr val="000000"/>
-              </a:solidFill>
-              <a:effectLst/>
-              <a:uFillTx/>
-              <a:latin typeface="Arial"/>
-            </a:endParaRPr>
-          </a:p>
-          <a:p>
-            <a:r>
-              <a:rPr lang="en-US" sz="1800" b="0" u="none" strike="noStrike">
-                <a:solidFill>
-                  <a:srgbClr val="1A2E2B"/>
-                </a:solidFill>
-                <a:effectLst/>
-                <a:uFillTx/>
-                <a:latin typeface="Arial"/>
-              </a:rPr>
-              <a:t>• Same chain for every feature — auditable end to end</a:t>
-            </a:r>
-            <a:endParaRPr lang="en-US" sz="1800" b="0" u="none" strike="noStrike">
+              <a:rPr lang="en-US" sz="1100" b="0" i="1" u="none" strike="noStrike">
+                <a:solidFill>
+                  <a:srgbClr val="4A7A6F"/>
+                </a:solidFill>
+                <a:effectLst/>
+                <a:uFillTx/>
+                <a:latin typeface="Arial"/>
+              </a:rPr>
+              <a:t>Request types, review stages, allocations, departments, audit.</a:t>
+            </a:r>
+            <a:endParaRPr lang="en-US" sz="1100" b="0" u="none" strike="noStrike">
               <a:solidFill>
                 <a:srgbClr val="000000"/>
               </a:solidFill>
@@ -3447,6 +4375,13 @@
 <file path=ppt/slides/slide16.xml><?xml version="1.0" encoding="utf-8"?>
 <p:sld xmlns:a="http://schemas.openxmlformats.org/drawingml/2006/main" xmlns:p="http://schemas.openxmlformats.org/presentationml/2006/main" xmlns:r="http://schemas.openxmlformats.org/officeDocument/2006/relationships" xmlns:p14="http://schemas.microsoft.com/office/powerpoint/2010/main" xmlns:p15="http://schemas.microsoft.com/office/powerpoint/2012/main" xmlns:mc="http://schemas.openxmlformats.org/markup-compatibility/2006">
   <p:cSld>
+    <p:bg>
+      <p:bgPr>
+        <a:solidFill>
+          <a:srgbClr val="F4F8F5"/>
+        </a:solidFill>
+      </p:bgPr>
+    </p:bg>
     <p:spTree>
       <p:nvGrpSpPr>
         <p:cNvPr id="1" name=""/>
@@ -3463,14 +4398,14 @@
       </p:grpSpPr>
       <p:sp>
         <p:nvSpPr>
-          <p:cNvPr id="45" name=""/>
-          <p:cNvSpPr txBox="1"/>
-          <p:nvPr/>
-        </p:nvSpPr>
-        <p:spPr>
-          <a:xfrm>
-            <a:off x="540000" y="360000"/>
-            <a:ext cx="9000000" cy="1080000"/>
+          <p:cNvPr id="71" name=""/>
+          <p:cNvSpPr txBox="1"/>
+          <p:nvPr/>
+        </p:nvSpPr>
+        <p:spPr>
+          <a:xfrm>
+            <a:off x="540000" y="324000"/>
+            <a:ext cx="9000000" cy="576000"/>
           </a:xfrm>
           <a:prstGeom prst="rect">
             <a:avLst/>
@@ -3486,37 +4421,74 @@
           </a:bodyPr>
           <a:p>
             <a:r>
-              <a:rPr lang="en-US" sz="3200" b="1" u="none" strike="noStrike">
-                <a:solidFill>
-                  <a:srgbClr val="0F4C45"/>
-                </a:solidFill>
-                <a:effectLst/>
-                <a:uFillTx/>
-                <a:latin typeface="Arial"/>
-              </a:rPr>
-              <a:t>AI-Assisted Development (disclosed)</a:t>
-            </a:r>
-            <a:endParaRPr lang="en-US" sz="3200" b="0" u="none" strike="noStrike">
-              <a:solidFill>
-                <a:srgbClr val="000000"/>
-              </a:solidFill>
-              <a:effectLst/>
-              <a:uFillTx/>
-              <a:latin typeface="Arial"/>
-            </a:endParaRPr>
-          </a:p>
-        </p:txBody>
-      </p:sp>
-      <p:sp>
-        <p:nvSpPr>
-          <p:cNvPr id="46" name=""/>
-          <p:cNvSpPr txBox="1"/>
-          <p:nvPr/>
-        </p:nvSpPr>
-        <p:spPr>
-          <a:xfrm>
-            <a:off x="540000" y="1800000"/>
-            <a:ext cx="9000000" cy="5040000"/>
+              <a:rPr lang="en-US" sz="2600" b="1" u="none" strike="noStrike">
+                <a:solidFill>
+                  <a:srgbClr val="103E3A"/>
+                </a:solidFill>
+                <a:effectLst/>
+                <a:uFillTx/>
+                <a:latin typeface="Arial"/>
+              </a:rPr>
+              <a:t>Architecture</a:t>
+            </a:r>
+            <a:endParaRPr lang="en-US" sz="2600" b="0" u="none" strike="noStrike">
+              <a:solidFill>
+                <a:srgbClr val="000000"/>
+              </a:solidFill>
+              <a:effectLst/>
+              <a:uFillTx/>
+              <a:latin typeface="Arial"/>
+            </a:endParaRPr>
+          </a:p>
+        </p:txBody>
+      </p:sp>
+      <p:sp>
+        <p:nvSpPr>
+          <p:cNvPr id="72" name=""/>
+          <p:cNvSpPr txBox="1"/>
+          <p:nvPr/>
+        </p:nvSpPr>
+        <p:spPr>
+          <a:xfrm>
+            <a:off x="540000" y="900000"/>
+            <a:ext cx="1440000" cy="43200"/>
+          </a:xfrm>
+          <a:prstGeom prst="rect">
+            <a:avLst/>
+          </a:prstGeom>
+          <a:solidFill>
+            <a:srgbClr val="E6BF71"/>
+          </a:solidFill>
+          <a:ln w="0">
+            <a:noFill/>
+          </a:ln>
+        </p:spPr>
+        <p:txBody>
+          <a:bodyPr lIns="90000" tIns="-1800" rIns="90000" bIns="-1800" anchor="t">
+            <a:spAutoFit/>
+          </a:bodyPr>
+          <a:p>
+            <a:endParaRPr lang="en-US" sz="1800" b="0" u="none" strike="noStrike">
+              <a:solidFill>
+                <a:srgbClr val="000000"/>
+              </a:solidFill>
+              <a:effectLst/>
+              <a:uFillTx/>
+              <a:latin typeface="Arial"/>
+            </a:endParaRPr>
+          </a:p>
+        </p:txBody>
+      </p:sp>
+      <p:sp>
+        <p:nvSpPr>
+          <p:cNvPr id="73" name=""/>
+          <p:cNvSpPr txBox="1"/>
+          <p:nvPr/>
+        </p:nvSpPr>
+        <p:spPr>
+          <a:xfrm>
+            <a:off x="540000" y="1152000"/>
+            <a:ext cx="9000000" cy="3960000"/>
           </a:xfrm>
           <a:prstGeom prst="rect">
             <a:avLst/>
@@ -3532,7 +4504,7 @@
           </a:bodyPr>
           <a:p>
             <a:r>
-              <a:rPr lang="en-US" sz="1800" b="0" u="none" strike="noStrike">
+              <a:rPr lang="en-US" sz="1500" b="0" u="none" strike="noStrike">
                 <a:solidFill>
                   <a:srgbClr val="1A2E2B"/>
                 </a:solidFill>
@@ -3540,20 +4512,20 @@
                 <a:uFillTx/>
                 <a:latin typeface="Arial"/>
               </a:rPr>
-              <a:t>• Built by Devin (Cognition) under spec-kit discipline</a:t>
-            </a:r>
-            <a:endParaRPr lang="en-US" sz="1800" b="0" u="none" strike="noStrike">
-              <a:solidFill>
-                <a:srgbClr val="000000"/>
-              </a:solidFill>
-              <a:effectLst/>
-              <a:uFillTx/>
-              <a:latin typeface="Arial"/>
-            </a:endParaRPr>
-          </a:p>
-          <a:p>
-            <a:r>
-              <a:rPr lang="en-US" sz="1800" b="0" u="none" strike="noStrike">
+              <a:t>• React + TypeScript SPA → same-origin Nginx → Django/DRF → PostgreSQL 17</a:t>
+            </a:r>
+            <a:endParaRPr lang="en-US" sz="1500" b="0" u="none" strike="noStrike">
+              <a:solidFill>
+                <a:srgbClr val="000000"/>
+              </a:solidFill>
+              <a:effectLst/>
+              <a:uFillTx/>
+              <a:latin typeface="Arial"/>
+            </a:endParaRPr>
+          </a:p>
+          <a:p>
+            <a:r>
+              <a:rPr lang="en-US" sz="1500" b="0" u="none" strike="noStrike">
                 <a:solidFill>
                   <a:srgbClr val="1A2E2B"/>
                 </a:solidFill>
@@ -3561,20 +4533,20 @@
                 <a:uFillTx/>
                 <a:latin typeface="Arial"/>
               </a:rPr>
-              <a:t>• Humans approved every decision and every acceptance</a:t>
-            </a:r>
-            <a:endParaRPr lang="en-US" sz="1800" b="0" u="none" strike="noStrike">
-              <a:solidFill>
-                <a:srgbClr val="000000"/>
-              </a:solidFill>
-              <a:effectLst/>
-              <a:uFillTx/>
-              <a:latin typeface="Arial"/>
-            </a:endParaRPr>
-          </a:p>
-          <a:p>
-            <a:r>
-              <a:rPr lang="en-US" sz="1800" b="0" u="none" strike="noStrike">
+              <a:t>• Modular monolith: explicit services, scoped querysets, thin API layer</a:t>
+            </a:r>
+            <a:endParaRPr lang="en-US" sz="1500" b="0" u="none" strike="noStrike">
+              <a:solidFill>
+                <a:srgbClr val="000000"/>
+              </a:solidFill>
+              <a:effectLst/>
+              <a:uFillTx/>
+              <a:latin typeface="Arial"/>
+            </a:endParaRPr>
+          </a:p>
+          <a:p>
+            <a:r>
+              <a:rPr lang="en-US" sz="1500" b="0" u="none" strike="noStrike">
                 <a:solidFill>
                   <a:srgbClr val="1A2E2B"/>
                 </a:solidFill>
@@ -3582,9 +4554,30 @@
                 <a:uFillTx/>
                 <a:latin typeface="Arial"/>
               </a:rPr>
-              <a:t>• Evidence files separate verified checks from unrun ones — nothing fabricated</a:t>
-            </a:r>
-            <a:endParaRPr lang="en-US" sz="1800" b="0" u="none" strike="noStrike">
+              <a:t>• One org per deployment; database unreachable from outside Docker network</a:t>
+            </a:r>
+            <a:endParaRPr lang="en-US" sz="1500" b="0" u="none" strike="noStrike">
+              <a:solidFill>
+                <a:srgbClr val="000000"/>
+              </a:solidFill>
+              <a:effectLst/>
+              <a:uFillTx/>
+              <a:latin typeface="Arial"/>
+            </a:endParaRPr>
+          </a:p>
+          <a:p>
+            <a:r>
+              <a:rPr lang="en-US" sz="1500" b="0" u="none" strike="noStrike">
+                <a:solidFill>
+                  <a:srgbClr val="1A2E2B"/>
+                </a:solidFill>
+                <a:effectLst/>
+                <a:uFillTx/>
+                <a:latin typeface="Arial"/>
+              </a:rPr>
+              <a:t>• Documented: architecture/api.md + erd.md + OpenAPI schema</a:t>
+            </a:r>
+            <a:endParaRPr lang="en-US" sz="1500" b="0" u="none" strike="noStrike">
               <a:solidFill>
                 <a:srgbClr val="000000"/>
               </a:solidFill>
@@ -3611,6 +4604,13 @@
 <file path=ppt/slides/slide17.xml><?xml version="1.0" encoding="utf-8"?>
 <p:sld xmlns:a="http://schemas.openxmlformats.org/drawingml/2006/main" xmlns:p="http://schemas.openxmlformats.org/presentationml/2006/main" xmlns:r="http://schemas.openxmlformats.org/officeDocument/2006/relationships" xmlns:p14="http://schemas.microsoft.com/office/powerpoint/2010/main" xmlns:p15="http://schemas.microsoft.com/office/powerpoint/2012/main" xmlns:mc="http://schemas.openxmlformats.org/markup-compatibility/2006">
   <p:cSld>
+    <p:bg>
+      <p:bgPr>
+        <a:solidFill>
+          <a:srgbClr val="F4F8F5"/>
+        </a:solidFill>
+      </p:bgPr>
+    </p:bg>
     <p:spTree>
       <p:nvGrpSpPr>
         <p:cNvPr id="1" name=""/>
@@ -3627,14 +4627,14 @@
       </p:grpSpPr>
       <p:sp>
         <p:nvSpPr>
-          <p:cNvPr id="47" name=""/>
-          <p:cNvSpPr txBox="1"/>
-          <p:nvPr/>
-        </p:nvSpPr>
-        <p:spPr>
-          <a:xfrm>
-            <a:off x="540000" y="360000"/>
-            <a:ext cx="9000000" cy="1080000"/>
+          <p:cNvPr id="74" name=""/>
+          <p:cNvSpPr txBox="1"/>
+          <p:nvPr/>
+        </p:nvSpPr>
+        <p:spPr>
+          <a:xfrm>
+            <a:off x="540000" y="324000"/>
+            <a:ext cx="9000000" cy="576000"/>
           </a:xfrm>
           <a:prstGeom prst="rect">
             <a:avLst/>
@@ -3650,37 +4650,74 @@
           </a:bodyPr>
           <a:p>
             <a:r>
-              <a:rPr lang="en-US" sz="3200" b="1" u="none" strike="noStrike">
-                <a:solidFill>
-                  <a:srgbClr val="0F4C45"/>
-                </a:solidFill>
-                <a:effectLst/>
-                <a:uFillTx/>
-                <a:latin typeface="Arial"/>
-              </a:rPr>
-              <a:t>Quality Evidence</a:t>
-            </a:r>
-            <a:endParaRPr lang="en-US" sz="3200" b="0" u="none" strike="noStrike">
-              <a:solidFill>
-                <a:srgbClr val="000000"/>
-              </a:solidFill>
-              <a:effectLst/>
-              <a:uFillTx/>
-              <a:latin typeface="Arial"/>
-            </a:endParaRPr>
-          </a:p>
-        </p:txBody>
-      </p:sp>
-      <p:sp>
-        <p:nvSpPr>
-          <p:cNvPr id="48" name=""/>
-          <p:cNvSpPr txBox="1"/>
-          <p:nvPr/>
-        </p:nvSpPr>
-        <p:spPr>
-          <a:xfrm>
-            <a:off x="540000" y="1800000"/>
-            <a:ext cx="9000000" cy="5040000"/>
+              <a:rPr lang="en-US" sz="2600" b="1" u="none" strike="noStrike">
+                <a:solidFill>
+                  <a:srgbClr val="103E3A"/>
+                </a:solidFill>
+                <a:effectLst/>
+                <a:uFillTx/>
+                <a:latin typeface="Arial"/>
+              </a:rPr>
+              <a:t>Security</a:t>
+            </a:r>
+            <a:endParaRPr lang="en-US" sz="2600" b="0" u="none" strike="noStrike">
+              <a:solidFill>
+                <a:srgbClr val="000000"/>
+              </a:solidFill>
+              <a:effectLst/>
+              <a:uFillTx/>
+              <a:latin typeface="Arial"/>
+            </a:endParaRPr>
+          </a:p>
+        </p:txBody>
+      </p:sp>
+      <p:sp>
+        <p:nvSpPr>
+          <p:cNvPr id="75" name=""/>
+          <p:cNvSpPr txBox="1"/>
+          <p:nvPr/>
+        </p:nvSpPr>
+        <p:spPr>
+          <a:xfrm>
+            <a:off x="540000" y="900000"/>
+            <a:ext cx="1440000" cy="43200"/>
+          </a:xfrm>
+          <a:prstGeom prst="rect">
+            <a:avLst/>
+          </a:prstGeom>
+          <a:solidFill>
+            <a:srgbClr val="E6BF71"/>
+          </a:solidFill>
+          <a:ln w="0">
+            <a:noFill/>
+          </a:ln>
+        </p:spPr>
+        <p:txBody>
+          <a:bodyPr lIns="90000" tIns="-1800" rIns="90000" bIns="-1800" anchor="t">
+            <a:spAutoFit/>
+          </a:bodyPr>
+          <a:p>
+            <a:endParaRPr lang="en-US" sz="1800" b="0" u="none" strike="noStrike">
+              <a:solidFill>
+                <a:srgbClr val="000000"/>
+              </a:solidFill>
+              <a:effectLst/>
+              <a:uFillTx/>
+              <a:latin typeface="Arial"/>
+            </a:endParaRPr>
+          </a:p>
+        </p:txBody>
+      </p:sp>
+      <p:sp>
+        <p:nvSpPr>
+          <p:cNvPr id="76" name=""/>
+          <p:cNvSpPr txBox="1"/>
+          <p:nvPr/>
+        </p:nvSpPr>
+        <p:spPr>
+          <a:xfrm>
+            <a:off x="540000" y="1152000"/>
+            <a:ext cx="9000000" cy="3960000"/>
           </a:xfrm>
           <a:prstGeom prst="rect">
             <a:avLst/>
@@ -3696,7 +4733,7 @@
           </a:bodyPr>
           <a:p>
             <a:r>
-              <a:rPr lang="en-US" sz="1800" b="0" u="none" strike="noStrike">
+              <a:rPr lang="en-US" sz="1500" b="0" u="none" strike="noStrike">
                 <a:solidFill>
                   <a:srgbClr val="1A2E2B"/>
                 </a:solidFill>
@@ -3704,20 +4741,20 @@
                 <a:uFillTx/>
                 <a:latin typeface="Arial"/>
               </a:rPr>
-              <a:t>• 427 backend tests · 45 frontend tests · 60 e2e (13 accessibility)</a:t>
-            </a:r>
-            <a:endParaRPr lang="en-US" sz="1800" b="0" u="none" strike="noStrike">
-              <a:solidFill>
-                <a:srgbClr val="000000"/>
-              </a:solidFill>
-              <a:effectLst/>
-              <a:uFillTx/>
-              <a:latin typeface="Arial"/>
-            </a:endParaRPr>
-          </a:p>
-          <a:p>
-            <a:r>
-              <a:rPr lang="en-US" sz="1800" b="0" u="none" strike="noStrike">
+              <a:t>• Server-enforced RBAC + ownership scoping on every endpoint</a:t>
+            </a:r>
+            <a:endParaRPr lang="en-US" sz="1500" b="0" u="none" strike="noStrike">
+              <a:solidFill>
+                <a:srgbClr val="000000"/>
+              </a:solidFill>
+              <a:effectLst/>
+              <a:uFillTx/>
+              <a:latin typeface="Arial"/>
+            </a:endParaRPr>
+          </a:p>
+          <a:p>
+            <a:r>
+              <a:rPr lang="en-US" sz="1500" b="0" u="none" strike="noStrike">
                 <a:solidFill>
                   <a:srgbClr val="1A2E2B"/>
                 </a:solidFill>
@@ -3725,20 +4762,20 @@
                 <a:uFillTx/>
                 <a:latin typeface="Arial"/>
               </a:rPr>
-              <a:t>• Load: 500 employees, ~130k entries, 25 concurrent users — budgets pass</a:t>
-            </a:r>
-            <a:endParaRPr lang="en-US" sz="1800" b="0" u="none" strike="noStrike">
-              <a:solidFill>
-                <a:srgbClr val="000000"/>
-              </a:solidFill>
-              <a:effectLst/>
-              <a:uFillTx/>
-              <a:latin typeface="Arial"/>
-            </a:endParaRPr>
-          </a:p>
-          <a:p>
-            <a:r>
-              <a:rPr lang="en-US" sz="1800" b="0" u="none" strike="noStrike">
+              <a:t>• Session auth + CSRF; throttling: 5/5min per account, 20/5min per IP</a:t>
+            </a:r>
+            <a:endParaRPr lang="en-US" sz="1500" b="0" u="none" strike="noStrike">
+              <a:solidFill>
+                <a:srgbClr val="000000"/>
+              </a:solidFill>
+              <a:effectLst/>
+              <a:uFillTx/>
+              <a:latin typeface="Arial"/>
+            </a:endParaRPr>
+          </a:p>
+          <a:p>
+            <a:r>
+              <a:rPr lang="en-US" sz="1500" b="0" u="none" strike="noStrike">
                 <a:solidFill>
                   <a:srgbClr val="1A2E2B"/>
                 </a:solidFill>
@@ -3746,9 +4783,30 @@
                 <a:uFillTx/>
                 <a:latin typeface="Arial"/>
               </a:rPr>
-              <a:t>• Real bug found &amp; fixed under load: timesheet list N+1 (13.3s → 0.2s p95)</a:t>
-            </a:r>
-            <a:endParaRPr lang="en-US" sz="1800" b="0" u="none" strike="noStrike">
+              <a:t>• No secrets in git; encrypted-at-rest volumes, private DB network</a:t>
+            </a:r>
+            <a:endParaRPr lang="en-US" sz="1500" b="0" u="none" strike="noStrike">
+              <a:solidFill>
+                <a:srgbClr val="000000"/>
+              </a:solidFill>
+              <a:effectLst/>
+              <a:uFillTx/>
+              <a:latin typeface="Arial"/>
+            </a:endParaRPr>
+          </a:p>
+          <a:p>
+            <a:r>
+              <a:rPr lang="en-US" sz="1500" b="0" u="none" strike="noStrike">
+                <a:solidFill>
+                  <a:srgbClr val="1A2E2B"/>
+                </a:solidFill>
+                <a:effectLst/>
+                <a:uFillTx/>
+                <a:latin typeface="Arial"/>
+              </a:rPr>
+              <a:t>• Evidence: 31 security tests, negative tests per endpoint</a:t>
+            </a:r>
+            <a:endParaRPr lang="en-US" sz="1500" b="0" u="none" strike="noStrike">
               <a:solidFill>
                 <a:srgbClr val="000000"/>
               </a:solidFill>
@@ -3775,6 +4833,13 @@
 <file path=ppt/slides/slide18.xml><?xml version="1.0" encoding="utf-8"?>
 <p:sld xmlns:a="http://schemas.openxmlformats.org/drawingml/2006/main" xmlns:p="http://schemas.openxmlformats.org/presentationml/2006/main" xmlns:r="http://schemas.openxmlformats.org/officeDocument/2006/relationships" xmlns:p14="http://schemas.microsoft.com/office/powerpoint/2010/main" xmlns:p15="http://schemas.microsoft.com/office/powerpoint/2012/main" xmlns:mc="http://schemas.openxmlformats.org/markup-compatibility/2006">
   <p:cSld>
+    <p:bg>
+      <p:bgPr>
+        <a:solidFill>
+          <a:srgbClr val="F4F8F5"/>
+        </a:solidFill>
+      </p:bgPr>
+    </p:bg>
     <p:spTree>
       <p:nvGrpSpPr>
         <p:cNvPr id="1" name=""/>
@@ -3791,14 +4856,14 @@
       </p:grpSpPr>
       <p:sp>
         <p:nvSpPr>
-          <p:cNvPr id="49" name=""/>
-          <p:cNvSpPr txBox="1"/>
-          <p:nvPr/>
-        </p:nvSpPr>
-        <p:spPr>
-          <a:xfrm>
-            <a:off x="540000" y="360000"/>
-            <a:ext cx="9000000" cy="1080000"/>
+          <p:cNvPr id="77" name=""/>
+          <p:cNvSpPr txBox="1"/>
+          <p:nvPr/>
+        </p:nvSpPr>
+        <p:spPr>
+          <a:xfrm>
+            <a:off x="540000" y="324000"/>
+            <a:ext cx="9000000" cy="576000"/>
           </a:xfrm>
           <a:prstGeom prst="rect">
             <a:avLst/>
@@ -3814,37 +4879,74 @@
           </a:bodyPr>
           <a:p>
             <a:r>
-              <a:rPr lang="en-US" sz="3200" b="1" u="none" strike="noStrike">
-                <a:solidFill>
-                  <a:srgbClr val="0F4C45"/>
-                </a:solidFill>
-                <a:effectLst/>
-                <a:uFillTx/>
-                <a:latin typeface="Arial"/>
-              </a:rPr>
-              <a:t>Honest Limitations</a:t>
-            </a:r>
-            <a:endParaRPr lang="en-US" sz="3200" b="0" u="none" strike="noStrike">
-              <a:solidFill>
-                <a:srgbClr val="000000"/>
-              </a:solidFill>
-              <a:effectLst/>
-              <a:uFillTx/>
-              <a:latin typeface="Arial"/>
-            </a:endParaRPr>
-          </a:p>
-        </p:txBody>
-      </p:sp>
-      <p:sp>
-        <p:nvSpPr>
-          <p:cNvPr id="50" name=""/>
-          <p:cNvSpPr txBox="1"/>
-          <p:nvPr/>
-        </p:nvSpPr>
-        <p:spPr>
-          <a:xfrm>
-            <a:off x="540000" y="1800000"/>
-            <a:ext cx="9000000" cy="5040000"/>
+              <a:rPr lang="en-US" sz="2600" b="1" u="none" strike="noStrike">
+                <a:solidFill>
+                  <a:srgbClr val="103E3A"/>
+                </a:solidFill>
+                <a:effectLst/>
+                <a:uFillTx/>
+                <a:latin typeface="Arial"/>
+              </a:rPr>
+              <a:t>Deployment &amp; Operations</a:t>
+            </a:r>
+            <a:endParaRPr lang="en-US" sz="2600" b="0" u="none" strike="noStrike">
+              <a:solidFill>
+                <a:srgbClr val="000000"/>
+              </a:solidFill>
+              <a:effectLst/>
+              <a:uFillTx/>
+              <a:latin typeface="Arial"/>
+            </a:endParaRPr>
+          </a:p>
+        </p:txBody>
+      </p:sp>
+      <p:sp>
+        <p:nvSpPr>
+          <p:cNvPr id="78" name=""/>
+          <p:cNvSpPr txBox="1"/>
+          <p:nvPr/>
+        </p:nvSpPr>
+        <p:spPr>
+          <a:xfrm>
+            <a:off x="540000" y="900000"/>
+            <a:ext cx="1440000" cy="43200"/>
+          </a:xfrm>
+          <a:prstGeom prst="rect">
+            <a:avLst/>
+          </a:prstGeom>
+          <a:solidFill>
+            <a:srgbClr val="E6BF71"/>
+          </a:solidFill>
+          <a:ln w="0">
+            <a:noFill/>
+          </a:ln>
+        </p:spPr>
+        <p:txBody>
+          <a:bodyPr lIns="90000" tIns="-1800" rIns="90000" bIns="-1800" anchor="t">
+            <a:spAutoFit/>
+          </a:bodyPr>
+          <a:p>
+            <a:endParaRPr lang="en-US" sz="1800" b="0" u="none" strike="noStrike">
+              <a:solidFill>
+                <a:srgbClr val="000000"/>
+              </a:solidFill>
+              <a:effectLst/>
+              <a:uFillTx/>
+              <a:latin typeface="Arial"/>
+            </a:endParaRPr>
+          </a:p>
+        </p:txBody>
+      </p:sp>
+      <p:sp>
+        <p:nvSpPr>
+          <p:cNvPr id="79" name=""/>
+          <p:cNvSpPr txBox="1"/>
+          <p:nvPr/>
+        </p:nvSpPr>
+        <p:spPr>
+          <a:xfrm>
+            <a:off x="540000" y="1152000"/>
+            <a:ext cx="9000000" cy="3960000"/>
           </a:xfrm>
           <a:prstGeom prst="rect">
             <a:avLst/>
@@ -3860,7 +4962,7 @@
           </a:bodyPr>
           <a:p>
             <a:r>
-              <a:rPr lang="en-US" sz="1800" b="0" u="none" strike="noStrike">
+              <a:rPr lang="en-US" sz="1500" b="0" u="none" strike="noStrike">
                 <a:solidFill>
                   <a:srgbClr val="1A2E2B"/>
                 </a:solidFill>
@@ -3868,20 +4970,20 @@
                 <a:uFillTx/>
                 <a:latin typeface="Arial"/>
               </a:rPr>
-              <a:t>• HTTP only — domain + TLS pending (one click once a domain exists)</a:t>
-            </a:r>
-            <a:endParaRPr lang="en-US" sz="1800" b="0" u="none" strike="noStrike">
-              <a:solidFill>
-                <a:srgbClr val="000000"/>
-              </a:solidFill>
-              <a:effectLst/>
-              <a:uFillTx/>
-              <a:latin typeface="Arial"/>
-            </a:endParaRPr>
-          </a:p>
-          <a:p>
-            <a:r>
-              <a:rPr lang="en-US" sz="1800" b="0" u="none" strike="noStrike">
+              <a:t>• Docker Compose stack; Nginx Proxy Manager public edge</a:t>
+            </a:r>
+            <a:endParaRPr lang="en-US" sz="1500" b="0" u="none" strike="noStrike">
+              <a:solidFill>
+                <a:srgbClr val="000000"/>
+              </a:solidFill>
+              <a:effectLst/>
+              <a:uFillTx/>
+              <a:latin typeface="Arial"/>
+            </a:endParaRPr>
+          </a:p>
+          <a:p>
+            <a:r>
+              <a:rPr lang="en-US" sz="1500" b="0" u="none" strike="noStrike">
                 <a:solidFill>
                   <a:srgbClr val="1A2E2B"/>
                 </a:solidFill>
@@ -3889,20 +4991,20 @@
                 <a:uFillTx/>
                 <a:latin typeface="Arial"/>
               </a:rPr>
-              <a:t>• Demo quick-login shares a password — demo mode only, off before real data</a:t>
-            </a:r>
-            <a:endParaRPr lang="en-US" sz="1800" b="0" u="none" strike="noStrike">
-              <a:solidFill>
-                <a:srgbClr val="000000"/>
-              </a:solidFill>
-              <a:effectLst/>
-              <a:uFillTx/>
-              <a:latin typeface="Arial"/>
-            </a:endParaRPr>
-          </a:p>
-          <a:p>
-            <a:r>
-              <a:rPr lang="en-US" sz="1800" b="0" u="none" strike="noStrike">
+              <a:t>• CI → deploy: push to main → test gate → rebuild → smoke check</a:t>
+            </a:r>
+            <a:endParaRPr lang="en-US" sz="1500" b="0" u="none" strike="noStrike">
+              <a:solidFill>
+                <a:srgbClr val="000000"/>
+              </a:solidFill>
+              <a:effectLst/>
+              <a:uFillTx/>
+              <a:latin typeface="Arial"/>
+            </a:endParaRPr>
+          </a:p>
+          <a:p>
+            <a:r>
+              <a:rPr lang="en-US" sz="1500" b="0" u="none" strike="noStrike">
                 <a:solidFill>
                   <a:srgbClr val="1A2E2B"/>
                 </a:solidFill>
@@ -3910,9 +5012,9 @@
                 <a:uFillTx/>
                 <a:latin typeface="Arial"/>
               </a:rPr>
-              <a:t>• No automated backups (owner-waived, documented); attachments deferred</a:t>
-            </a:r>
-            <a:endParaRPr lang="en-US" sz="1800" b="0" u="none" strike="noStrike">
+              <a:t>• Portainer for container ops; runbook: deploy/rollback/backup/triage</a:t>
+            </a:r>
+            <a:endParaRPr lang="en-US" sz="1500" b="0" u="none" strike="noStrike">
               <a:solidFill>
                 <a:srgbClr val="000000"/>
               </a:solidFill>
@@ -3939,6 +5041,13 @@
 <file path=ppt/slides/slide19.xml><?xml version="1.0" encoding="utf-8"?>
 <p:sld xmlns:a="http://schemas.openxmlformats.org/drawingml/2006/main" xmlns:p="http://schemas.openxmlformats.org/presentationml/2006/main" xmlns:r="http://schemas.openxmlformats.org/officeDocument/2006/relationships" xmlns:p14="http://schemas.microsoft.com/office/powerpoint/2010/main" xmlns:p15="http://schemas.microsoft.com/office/powerpoint/2012/main" xmlns:mc="http://schemas.openxmlformats.org/markup-compatibility/2006">
   <p:cSld>
+    <p:bg>
+      <p:bgPr>
+        <a:solidFill>
+          <a:srgbClr val="F4F8F5"/>
+        </a:solidFill>
+      </p:bgPr>
+    </p:bg>
     <p:spTree>
       <p:nvGrpSpPr>
         <p:cNvPr id="1" name=""/>
@@ -3955,14 +5064,14 @@
       </p:grpSpPr>
       <p:sp>
         <p:nvSpPr>
-          <p:cNvPr id="51" name=""/>
-          <p:cNvSpPr txBox="1"/>
-          <p:nvPr/>
-        </p:nvSpPr>
-        <p:spPr>
-          <a:xfrm>
-            <a:off x="540000" y="360000"/>
-            <a:ext cx="9000000" cy="1080000"/>
+          <p:cNvPr id="80" name=""/>
+          <p:cNvSpPr txBox="1"/>
+          <p:nvPr/>
+        </p:nvSpPr>
+        <p:spPr>
+          <a:xfrm>
+            <a:off x="540000" y="324000"/>
+            <a:ext cx="9000000" cy="576000"/>
           </a:xfrm>
           <a:prstGeom prst="rect">
             <a:avLst/>
@@ -3978,37 +5087,74 @@
           </a:bodyPr>
           <a:p>
             <a:r>
-              <a:rPr lang="en-US" sz="3200" b="1" u="none" strike="noStrike">
-                <a:solidFill>
-                  <a:srgbClr val="0F4C45"/>
-                </a:solidFill>
-                <a:effectLst/>
-                <a:uFillTx/>
-                <a:latin typeface="Arial"/>
-              </a:rPr>
-              <a:t>Summary</a:t>
-            </a:r>
-            <a:endParaRPr lang="en-US" sz="3200" b="0" u="none" strike="noStrike">
-              <a:solidFill>
-                <a:srgbClr val="000000"/>
-              </a:solidFill>
-              <a:effectLst/>
-              <a:uFillTx/>
-              <a:latin typeface="Arial"/>
-            </a:endParaRPr>
-          </a:p>
-        </p:txBody>
-      </p:sp>
-      <p:sp>
-        <p:nvSpPr>
-          <p:cNvPr id="52" name=""/>
-          <p:cNvSpPr txBox="1"/>
-          <p:nvPr/>
-        </p:nvSpPr>
-        <p:spPr>
-          <a:xfrm>
-            <a:off x="540000" y="1800000"/>
-            <a:ext cx="9000000" cy="5040000"/>
+              <a:rPr lang="en-US" sz="2600" b="1" u="none" strike="noStrike">
+                <a:solidFill>
+                  <a:srgbClr val="103E3A"/>
+                </a:solidFill>
+                <a:effectLst/>
+                <a:uFillTx/>
+                <a:latin typeface="Arial"/>
+              </a:rPr>
+              <a:t>Spec Kit Process</a:t>
+            </a:r>
+            <a:endParaRPr lang="en-US" sz="2600" b="0" u="none" strike="noStrike">
+              <a:solidFill>
+                <a:srgbClr val="000000"/>
+              </a:solidFill>
+              <a:effectLst/>
+              <a:uFillTx/>
+              <a:latin typeface="Arial"/>
+            </a:endParaRPr>
+          </a:p>
+        </p:txBody>
+      </p:sp>
+      <p:sp>
+        <p:nvSpPr>
+          <p:cNvPr id="81" name=""/>
+          <p:cNvSpPr txBox="1"/>
+          <p:nvPr/>
+        </p:nvSpPr>
+        <p:spPr>
+          <a:xfrm>
+            <a:off x="540000" y="900000"/>
+            <a:ext cx="1440000" cy="43200"/>
+          </a:xfrm>
+          <a:prstGeom prst="rect">
+            <a:avLst/>
+          </a:prstGeom>
+          <a:solidFill>
+            <a:srgbClr val="E6BF71"/>
+          </a:solidFill>
+          <a:ln w="0">
+            <a:noFill/>
+          </a:ln>
+        </p:spPr>
+        <p:txBody>
+          <a:bodyPr lIns="90000" tIns="-1800" rIns="90000" bIns="-1800" anchor="t">
+            <a:spAutoFit/>
+          </a:bodyPr>
+          <a:p>
+            <a:endParaRPr lang="en-US" sz="1800" b="0" u="none" strike="noStrike">
+              <a:solidFill>
+                <a:srgbClr val="000000"/>
+              </a:solidFill>
+              <a:effectLst/>
+              <a:uFillTx/>
+              <a:latin typeface="Arial"/>
+            </a:endParaRPr>
+          </a:p>
+        </p:txBody>
+      </p:sp>
+      <p:sp>
+        <p:nvSpPr>
+          <p:cNvPr id="82" name=""/>
+          <p:cNvSpPr txBox="1"/>
+          <p:nvPr/>
+        </p:nvSpPr>
+        <p:spPr>
+          <a:xfrm>
+            <a:off x="540000" y="1152000"/>
+            <a:ext cx="9000000" cy="3960000"/>
           </a:xfrm>
           <a:prstGeom prst="rect">
             <a:avLst/>
@@ -4024,7 +5170,7 @@
           </a:bodyPr>
           <a:p>
             <a:r>
-              <a:rPr lang="en-US" sz="1800" b="0" u="none" strike="noStrike">
+              <a:rPr lang="en-US" sz="1500" b="0" u="none" strike="noStrike">
                 <a:solidFill>
                   <a:srgbClr val="1A2E2B"/>
                 </a:solidFill>
@@ -4032,20 +5178,20 @@
                 <a:uFillTx/>
                 <a:latin typeface="Arial"/>
               </a:rPr>
-              <a:t>• Complete, live, bilingual, accessible employee-operations product</a:t>
-            </a:r>
-            <a:endParaRPr lang="en-US" sz="1800" b="0" u="none" strike="noStrike">
-              <a:solidFill>
-                <a:srgbClr val="000000"/>
-              </a:solidFill>
-              <a:effectLst/>
-              <a:uFillTx/>
-              <a:latin typeface="Arial"/>
-            </a:endParaRPr>
-          </a:p>
-          <a:p>
-            <a:r>
-              <a:rPr lang="en-US" sz="1800" b="0" u="none" strike="noStrike">
+              <a:t>• Constitution ratified first (v1.0.0)</a:t>
+            </a:r>
+            <a:endParaRPr lang="en-US" sz="1500" b="0" u="none" strike="noStrike">
+              <a:solidFill>
+                <a:srgbClr val="000000"/>
+              </a:solidFill>
+              <a:effectLst/>
+              <a:uFillTx/>
+              <a:latin typeface="Arial"/>
+            </a:endParaRPr>
+          </a:p>
+          <a:p>
+            <a:r>
+              <a:rPr lang="en-US" sz="1500" b="0" u="none" strike="noStrike">
                 <a:solidFill>
                   <a:srgbClr val="1A2E2B"/>
                 </a:solidFill>
@@ -4053,20 +5199,20 @@
                 <a:uFillTx/>
                 <a:latin typeface="Arial"/>
               </a:rPr>
-              <a:t>• Spec-led, tested, deployed, operable</a:t>
-            </a:r>
-            <a:endParaRPr lang="en-US" sz="1800" b="0" u="none" strike="noStrike">
-              <a:solidFill>
-                <a:srgbClr val="000000"/>
-              </a:solidFill>
-              <a:effectLst/>
-              <a:uFillTx/>
-              <a:latin typeface="Arial"/>
-            </a:endParaRPr>
-          </a:p>
-          <a:p>
-            <a:r>
-              <a:rPr lang="en-US" sz="1800" b="0" u="none" strike="noStrike">
+              <a:t>• 8 features: spec → plan → tasks → implement → evidence → acceptance</a:t>
+            </a:r>
+            <a:endParaRPr lang="en-US" sz="1500" b="0" u="none" strike="noStrike">
+              <a:solidFill>
+                <a:srgbClr val="000000"/>
+              </a:solidFill>
+              <a:effectLst/>
+              <a:uFillTx/>
+              <a:latin typeface="Arial"/>
+            </a:endParaRPr>
+          </a:p>
+          <a:p>
+            <a:r>
+              <a:rPr lang="en-US" sz="1500" b="0" u="none" strike="noStrike">
                 <a:solidFill>
                   <a:srgbClr val="1A2E2B"/>
                 </a:solidFill>
@@ -4074,10 +5220,20 @@
                 <a:uFillTx/>
                 <a:latin typeface="Arial"/>
               </a:rPr>
-              <a:t>• </a:t>
-            </a:r>
-            <a:r>
-              <a:rPr lang="hi-IN" sz="1800" b="0" u="none" strike="noStrike">
+              <a:t>• 11 recorded decisions (D-001…D-011): asked, dated, traced</a:t>
+            </a:r>
+            <a:endParaRPr lang="en-US" sz="1500" b="0" u="none" strike="noStrike">
+              <a:solidFill>
+                <a:srgbClr val="000000"/>
+              </a:solidFill>
+              <a:effectLst/>
+              <a:uFillTx/>
+              <a:latin typeface="Arial"/>
+            </a:endParaRPr>
+          </a:p>
+          <a:p>
+            <a:r>
+              <a:rPr lang="en-US" sz="1500" b="0" u="none" strike="noStrike">
                 <a:solidFill>
                   <a:srgbClr val="1A2E2B"/>
                 </a:solidFill>
@@ -4085,31 +5241,9 @@
                 <a:uFillTx/>
                 <a:latin typeface="Arial"/>
               </a:rPr>
-              <a:t>شكراً</a:t>
-            </a:r>
-            <a:r>
-              <a:rPr lang="en-US" sz="1800" b="0" u="none" strike="noStrike">
-                <a:solidFill>
-                  <a:srgbClr val="1A2E2B"/>
-                </a:solidFill>
-                <a:effectLst/>
-                <a:uFillTx/>
-                <a:latin typeface="Arial"/>
-              </a:rPr>
-              <a:t> — </a:t>
-            </a:r>
-            <a:r>
-              <a:rPr lang="en-US" sz="1800" b="0" u="none" strike="noStrike">
-                <a:solidFill>
-                  <a:srgbClr val="1A2E2B"/>
-                </a:solidFill>
-                <a:effectLst/>
-                <a:uFillTx/>
-                <a:latin typeface="Arial"/>
-              </a:rPr>
-              <a:t>Thank you. Questions?</a:t>
-            </a:r>
-            <a:endParaRPr lang="en-US" sz="1800" b="0" u="none" strike="noStrike">
+              <a:t>• All phases owner-accepted — including the live deployment</a:t>
+            </a:r>
+            <a:endParaRPr lang="en-US" sz="1500" b="0" u="none" strike="noStrike">
               <a:solidFill>
                 <a:srgbClr val="000000"/>
               </a:solidFill>
@@ -4136,6 +5270,13 @@
 <file path=ppt/slides/slide2.xml><?xml version="1.0" encoding="utf-8"?>
 <p:sld xmlns:a="http://schemas.openxmlformats.org/drawingml/2006/main" xmlns:p="http://schemas.openxmlformats.org/presentationml/2006/main" xmlns:r="http://schemas.openxmlformats.org/officeDocument/2006/relationships" xmlns:p14="http://schemas.microsoft.com/office/powerpoint/2010/main" xmlns:p15="http://schemas.microsoft.com/office/powerpoint/2012/main" xmlns:mc="http://schemas.openxmlformats.org/markup-compatibility/2006">
   <p:cSld>
+    <p:bg>
+      <p:bgPr>
+        <a:solidFill>
+          <a:srgbClr val="F4F8F5"/>
+        </a:solidFill>
+      </p:bgPr>
+    </p:bg>
     <p:spTree>
       <p:nvGrpSpPr>
         <p:cNvPr id="1" name=""/>
@@ -4152,14 +5293,14 @@
       </p:grpSpPr>
       <p:sp>
         <p:nvSpPr>
-          <p:cNvPr id="17" name=""/>
-          <p:cNvSpPr txBox="1"/>
-          <p:nvPr/>
-        </p:nvSpPr>
-        <p:spPr>
-          <a:xfrm>
-            <a:off x="540000" y="360000"/>
-            <a:ext cx="9000000" cy="1080000"/>
+          <p:cNvPr id="20" name=""/>
+          <p:cNvSpPr txBox="1"/>
+          <p:nvPr/>
+        </p:nvSpPr>
+        <p:spPr>
+          <a:xfrm>
+            <a:off x="540000" y="324000"/>
+            <a:ext cx="9000000" cy="576000"/>
           </a:xfrm>
           <a:prstGeom prst="rect">
             <a:avLst/>
@@ -4175,9 +5316,9 @@
           </a:bodyPr>
           <a:p>
             <a:r>
-              <a:rPr lang="en-US" sz="3200" b="1" u="none" strike="noStrike">
-                <a:solidFill>
-                  <a:srgbClr val="0F4C45"/>
+              <a:rPr lang="en-US" sz="2600" b="1" u="none" strike="noStrike">
+                <a:solidFill>
+                  <a:srgbClr val="103E3A"/>
                 </a:solidFill>
                 <a:effectLst/>
                 <a:uFillTx/>
@@ -4185,27 +5326,64 @@
               </a:rPr>
               <a:t>The Problem</a:t>
             </a:r>
-            <a:endParaRPr lang="en-US" sz="3200" b="0" u="none" strike="noStrike">
-              <a:solidFill>
-                <a:srgbClr val="000000"/>
-              </a:solidFill>
-              <a:effectLst/>
-              <a:uFillTx/>
-              <a:latin typeface="Arial"/>
-            </a:endParaRPr>
-          </a:p>
-        </p:txBody>
-      </p:sp>
-      <p:sp>
-        <p:nvSpPr>
-          <p:cNvPr id="18" name=""/>
-          <p:cNvSpPr txBox="1"/>
-          <p:nvPr/>
-        </p:nvSpPr>
-        <p:spPr>
-          <a:xfrm>
-            <a:off x="540000" y="1800000"/>
-            <a:ext cx="9000000" cy="5040000"/>
+            <a:endParaRPr lang="en-US" sz="2600" b="0" u="none" strike="noStrike">
+              <a:solidFill>
+                <a:srgbClr val="000000"/>
+              </a:solidFill>
+              <a:effectLst/>
+              <a:uFillTx/>
+              <a:latin typeface="Arial"/>
+            </a:endParaRPr>
+          </a:p>
+        </p:txBody>
+      </p:sp>
+      <p:sp>
+        <p:nvSpPr>
+          <p:cNvPr id="21" name=""/>
+          <p:cNvSpPr txBox="1"/>
+          <p:nvPr/>
+        </p:nvSpPr>
+        <p:spPr>
+          <a:xfrm>
+            <a:off x="540000" y="900000"/>
+            <a:ext cx="1440000" cy="43200"/>
+          </a:xfrm>
+          <a:prstGeom prst="rect">
+            <a:avLst/>
+          </a:prstGeom>
+          <a:solidFill>
+            <a:srgbClr val="E6BF71"/>
+          </a:solidFill>
+          <a:ln w="0">
+            <a:noFill/>
+          </a:ln>
+        </p:spPr>
+        <p:txBody>
+          <a:bodyPr lIns="90000" tIns="-1800" rIns="90000" bIns="-1800" anchor="t">
+            <a:spAutoFit/>
+          </a:bodyPr>
+          <a:p>
+            <a:endParaRPr lang="en-US" sz="1800" b="0" u="none" strike="noStrike">
+              <a:solidFill>
+                <a:srgbClr val="000000"/>
+              </a:solidFill>
+              <a:effectLst/>
+              <a:uFillTx/>
+              <a:latin typeface="Arial"/>
+            </a:endParaRPr>
+          </a:p>
+        </p:txBody>
+      </p:sp>
+      <p:sp>
+        <p:nvSpPr>
+          <p:cNvPr id="22" name=""/>
+          <p:cNvSpPr txBox="1"/>
+          <p:nvPr/>
+        </p:nvSpPr>
+        <p:spPr>
+          <a:xfrm>
+            <a:off x="540000" y="1152000"/>
+            <a:ext cx="9000000" cy="3960000"/>
           </a:xfrm>
           <a:prstGeom prst="rect">
             <a:avLst/>
@@ -4221,7 +5399,7 @@
           </a:bodyPr>
           <a:p>
             <a:r>
-              <a:rPr lang="en-US" sz="1800" b="0" u="none" strike="noStrike">
+              <a:rPr lang="en-US" sz="1500" b="0" u="none" strike="noStrike">
                 <a:solidFill>
                   <a:srgbClr val="1A2E2B"/>
                 </a:solidFill>
@@ -4231,18 +5409,18 @@
               </a:rPr>
               <a:t>• Requests and hours scattered across chat, paper, spreadsheets</a:t>
             </a:r>
-            <a:endParaRPr lang="en-US" sz="1800" b="0" u="none" strike="noStrike">
-              <a:solidFill>
-                <a:srgbClr val="000000"/>
-              </a:solidFill>
-              <a:effectLst/>
-              <a:uFillTx/>
-              <a:latin typeface="Arial"/>
-            </a:endParaRPr>
-          </a:p>
-          <a:p>
-            <a:r>
-              <a:rPr lang="en-US" sz="1800" b="0" u="none" strike="noStrike">
+            <a:endParaRPr lang="en-US" sz="1500" b="0" u="none" strike="noStrike">
+              <a:solidFill>
+                <a:srgbClr val="000000"/>
+              </a:solidFill>
+              <a:effectLst/>
+              <a:uFillTx/>
+              <a:latin typeface="Arial"/>
+            </a:endParaRPr>
+          </a:p>
+          <a:p>
+            <a:r>
+              <a:rPr lang="en-US" sz="1500" b="0" u="none" strike="noStrike">
                 <a:solidFill>
                   <a:srgbClr val="1A2E2B"/>
                 </a:solidFill>
@@ -4250,20 +5428,20 @@
                 <a:uFillTx/>
                 <a:latin typeface="Arial"/>
               </a:rPr>
-              <a:t>• No answers to: who approved it? where did the hours go? what's pending?</a:t>
-            </a:r>
-            <a:endParaRPr lang="en-US" sz="1800" b="0" u="none" strike="noStrike">
-              <a:solidFill>
-                <a:srgbClr val="000000"/>
-              </a:solidFill>
-              <a:effectLst/>
-              <a:uFillTx/>
-              <a:latin typeface="Arial"/>
-            </a:endParaRPr>
-          </a:p>
-          <a:p>
-            <a:r>
-              <a:rPr lang="en-US" sz="1800" b="0" u="none" strike="noStrike">
+              <a:t>• No answers to: who approved it? where did the hours go? what is pending?</a:t>
+            </a:r>
+            <a:endParaRPr lang="en-US" sz="1500" b="0" u="none" strike="noStrike">
+              <a:solidFill>
+                <a:srgbClr val="000000"/>
+              </a:solidFill>
+              <a:effectLst/>
+              <a:uFillTx/>
+              <a:latin typeface="Arial"/>
+            </a:endParaRPr>
+          </a:p>
+          <a:p>
+            <a:r>
+              <a:rPr lang="en-US" sz="1500" b="0" u="none" strike="noStrike">
                 <a:solidFill>
                   <a:srgbClr val="1A2E2B"/>
                 </a:solidFill>
@@ -4273,7 +5451,7 @@
               </a:rPr>
               <a:t>• Result: lost requests, unverifiable timesheets, zero audit trail</a:t>
             </a:r>
-            <a:endParaRPr lang="en-US" sz="1800" b="0" u="none" strike="noStrike">
+            <a:endParaRPr lang="en-US" sz="1500" b="0" u="none" strike="noStrike">
               <a:solidFill>
                 <a:srgbClr val="000000"/>
               </a:solidFill>
@@ -4300,6 +5478,13 @@
 <file path=ppt/slides/slide20.xml><?xml version="1.0" encoding="utf-8"?>
 <p:sld xmlns:a="http://schemas.openxmlformats.org/drawingml/2006/main" xmlns:p="http://schemas.openxmlformats.org/presentationml/2006/main" xmlns:r="http://schemas.openxmlformats.org/officeDocument/2006/relationships" xmlns:p14="http://schemas.microsoft.com/office/powerpoint/2010/main" xmlns:p15="http://schemas.microsoft.com/office/powerpoint/2012/main" xmlns:mc="http://schemas.openxmlformats.org/markup-compatibility/2006">
   <p:cSld>
+    <p:bg>
+      <p:bgPr>
+        <a:solidFill>
+          <a:srgbClr val="F4F8F5"/>
+        </a:solidFill>
+      </p:bgPr>
+    </p:bg>
     <p:spTree>
       <p:nvGrpSpPr>
         <p:cNvPr id="1" name=""/>
@@ -4316,14 +5501,14 @@
       </p:grpSpPr>
       <p:sp>
         <p:nvSpPr>
-          <p:cNvPr id="53" name=""/>
-          <p:cNvSpPr txBox="1"/>
-          <p:nvPr/>
-        </p:nvSpPr>
-        <p:spPr>
-          <a:xfrm>
-            <a:off x="540000" y="360000"/>
-            <a:ext cx="9000000" cy="1080000"/>
+          <p:cNvPr id="83" name=""/>
+          <p:cNvSpPr txBox="1"/>
+          <p:nvPr/>
+        </p:nvSpPr>
+        <p:spPr>
+          <a:xfrm>
+            <a:off x="540000" y="324000"/>
+            <a:ext cx="9000000" cy="576000"/>
           </a:xfrm>
           <a:prstGeom prst="rect">
             <a:avLst/>
@@ -4339,37 +5524,74 @@
           </a:bodyPr>
           <a:p>
             <a:r>
-              <a:rPr lang="en-US" sz="3200" b="1" u="none" strike="noStrike">
-                <a:solidFill>
-                  <a:srgbClr val="0F4C45"/>
-                </a:solidFill>
-                <a:effectLst/>
-                <a:uFillTx/>
-                <a:latin typeface="Arial"/>
-              </a:rPr>
-              <a:t>Appendix</a:t>
-            </a:r>
-            <a:endParaRPr lang="en-US" sz="3200" b="0" u="none" strike="noStrike">
-              <a:solidFill>
-                <a:srgbClr val="000000"/>
-              </a:solidFill>
-              <a:effectLst/>
-              <a:uFillTx/>
-              <a:latin typeface="Arial"/>
-            </a:endParaRPr>
-          </a:p>
-        </p:txBody>
-      </p:sp>
-      <p:sp>
-        <p:nvSpPr>
-          <p:cNvPr id="54" name=""/>
-          <p:cNvSpPr txBox="1"/>
-          <p:nvPr/>
-        </p:nvSpPr>
-        <p:spPr>
-          <a:xfrm>
-            <a:off x="540000" y="1800000"/>
-            <a:ext cx="9000000" cy="5040000"/>
+              <a:rPr lang="en-US" sz="2600" b="1" u="none" strike="noStrike">
+                <a:solidFill>
+                  <a:srgbClr val="103E3A"/>
+                </a:solidFill>
+                <a:effectLst/>
+                <a:uFillTx/>
+                <a:latin typeface="Arial"/>
+              </a:rPr>
+              <a:t>AI-Assisted Development — Disclosed</a:t>
+            </a:r>
+            <a:endParaRPr lang="en-US" sz="2600" b="0" u="none" strike="noStrike">
+              <a:solidFill>
+                <a:srgbClr val="000000"/>
+              </a:solidFill>
+              <a:effectLst/>
+              <a:uFillTx/>
+              <a:latin typeface="Arial"/>
+            </a:endParaRPr>
+          </a:p>
+        </p:txBody>
+      </p:sp>
+      <p:sp>
+        <p:nvSpPr>
+          <p:cNvPr id="84" name=""/>
+          <p:cNvSpPr txBox="1"/>
+          <p:nvPr/>
+        </p:nvSpPr>
+        <p:spPr>
+          <a:xfrm>
+            <a:off x="540000" y="900000"/>
+            <a:ext cx="1440000" cy="43200"/>
+          </a:xfrm>
+          <a:prstGeom prst="rect">
+            <a:avLst/>
+          </a:prstGeom>
+          <a:solidFill>
+            <a:srgbClr val="E6BF71"/>
+          </a:solidFill>
+          <a:ln w="0">
+            <a:noFill/>
+          </a:ln>
+        </p:spPr>
+        <p:txBody>
+          <a:bodyPr lIns="90000" tIns="-1800" rIns="90000" bIns="-1800" anchor="t">
+            <a:spAutoFit/>
+          </a:bodyPr>
+          <a:p>
+            <a:endParaRPr lang="en-US" sz="1800" b="0" u="none" strike="noStrike">
+              <a:solidFill>
+                <a:srgbClr val="000000"/>
+              </a:solidFill>
+              <a:effectLst/>
+              <a:uFillTx/>
+              <a:latin typeface="Arial"/>
+            </a:endParaRPr>
+          </a:p>
+        </p:txBody>
+      </p:sp>
+      <p:sp>
+        <p:nvSpPr>
+          <p:cNvPr id="85" name=""/>
+          <p:cNvSpPr txBox="1"/>
+          <p:nvPr/>
+        </p:nvSpPr>
+        <p:spPr>
+          <a:xfrm>
+            <a:off x="540000" y="1152000"/>
+            <a:ext cx="9000000" cy="3960000"/>
           </a:xfrm>
           <a:prstGeom prst="rect">
             <a:avLst/>
@@ -4385,7 +5607,7 @@
           </a:bodyPr>
           <a:p>
             <a:r>
-              <a:rPr lang="en-US" sz="1800" b="0" u="none" strike="noStrike">
+              <a:rPr lang="en-US" sz="1500" b="0" u="none" strike="noStrike">
                 <a:solidFill>
                   <a:srgbClr val="1A2E2B"/>
                 </a:solidFill>
@@ -4393,8 +5615,170 @@
                 <a:uFillTx/>
                 <a:latin typeface="Arial"/>
               </a:rPr>
-              <a:t>• Live URL: http://13.53.139.255:8380 (demo quick-login on the page)</a:t>
-            </a:r>
+              <a:t>• Built by Devin (Cognition) under spec-kit discipline</a:t>
+            </a:r>
+            <a:endParaRPr lang="en-US" sz="1500" b="0" u="none" strike="noStrike">
+              <a:solidFill>
+                <a:srgbClr val="000000"/>
+              </a:solidFill>
+              <a:effectLst/>
+              <a:uFillTx/>
+              <a:latin typeface="Arial"/>
+            </a:endParaRPr>
+          </a:p>
+          <a:p>
+            <a:r>
+              <a:rPr lang="en-US" sz="1500" b="0" u="none" strike="noStrike">
+                <a:solidFill>
+                  <a:srgbClr val="1A2E2B"/>
+                </a:solidFill>
+                <a:effectLst/>
+                <a:uFillTx/>
+                <a:latin typeface="Arial"/>
+              </a:rPr>
+              <a:t>• Humans approved every decision and every phase acceptance</a:t>
+            </a:r>
+            <a:endParaRPr lang="en-US" sz="1500" b="0" u="none" strike="noStrike">
+              <a:solidFill>
+                <a:srgbClr val="000000"/>
+              </a:solidFill>
+              <a:effectLst/>
+              <a:uFillTx/>
+              <a:latin typeface="Arial"/>
+            </a:endParaRPr>
+          </a:p>
+          <a:p>
+            <a:r>
+              <a:rPr lang="en-US" sz="1500" b="0" u="none" strike="noStrike">
+                <a:solidFill>
+                  <a:srgbClr val="1A2E2B"/>
+                </a:solidFill>
+                <a:effectLst/>
+                <a:uFillTx/>
+                <a:latin typeface="Arial"/>
+              </a:rPr>
+              <a:t>• Evidence separates verified checks from unrun ones — nothing fabricated</a:t>
+            </a:r>
+            <a:endParaRPr lang="en-US" sz="1500" b="0" u="none" strike="noStrike">
+              <a:solidFill>
+                <a:srgbClr val="000000"/>
+              </a:solidFill>
+              <a:effectLst/>
+              <a:uFillTx/>
+              <a:latin typeface="Arial"/>
+            </a:endParaRPr>
+          </a:p>
+        </p:txBody>
+      </p:sp>
+    </p:spTree>
+  </p:cSld>
+  <mc:AlternateContent>
+    <mc:Choice Requires="p14">
+      <p:transition spd="slow" p14:dur="2000"/>
+    </mc:Choice>
+    <mc:Fallback>
+      <p:transition spd="slow"/>
+    </mc:Fallback>
+  </mc:AlternateContent>
+</p:sld>
+</file>
+
+<file path=ppt/slides/slide21.xml><?xml version="1.0" encoding="utf-8"?>
+<p:sld xmlns:a="http://schemas.openxmlformats.org/drawingml/2006/main" xmlns:p="http://schemas.openxmlformats.org/presentationml/2006/main" xmlns:r="http://schemas.openxmlformats.org/officeDocument/2006/relationships" xmlns:p14="http://schemas.microsoft.com/office/powerpoint/2010/main" xmlns:p15="http://schemas.microsoft.com/office/powerpoint/2012/main" xmlns:mc="http://schemas.openxmlformats.org/markup-compatibility/2006">
+  <p:cSld>
+    <p:bg>
+      <p:bgPr>
+        <a:solidFill>
+          <a:srgbClr val="F4F8F5"/>
+        </a:solidFill>
+      </p:bgPr>
+    </p:bg>
+    <p:spTree>
+      <p:nvGrpSpPr>
+        <p:cNvPr id="1" name=""/>
+        <p:cNvGrpSpPr/>
+        <p:nvPr/>
+      </p:nvGrpSpPr>
+      <p:grpSpPr>
+        <a:xfrm>
+          <a:off x="0" y="0"/>
+          <a:ext cx="0" cy="0"/>
+          <a:chOff x="0" y="0"/>
+          <a:chExt cx="0" cy="0"/>
+        </a:xfrm>
+      </p:grpSpPr>
+      <p:sp>
+        <p:nvSpPr>
+          <p:cNvPr id="86" name=""/>
+          <p:cNvSpPr txBox="1"/>
+          <p:nvPr/>
+        </p:nvSpPr>
+        <p:spPr>
+          <a:xfrm>
+            <a:off x="540000" y="324000"/>
+            <a:ext cx="9000000" cy="576000"/>
+          </a:xfrm>
+          <a:prstGeom prst="rect">
+            <a:avLst/>
+          </a:prstGeom>
+          <a:noFill/>
+          <a:ln w="0">
+            <a:noFill/>
+          </a:ln>
+        </p:spPr>
+        <p:txBody>
+          <a:bodyPr lIns="90000" tIns="45000" rIns="90000" bIns="45000" anchor="t">
+            <a:spAutoFit/>
+          </a:bodyPr>
+          <a:p>
+            <a:r>
+              <a:rPr lang="en-US" sz="2600" b="1" u="none" strike="noStrike">
+                <a:solidFill>
+                  <a:srgbClr val="103E3A"/>
+                </a:solidFill>
+                <a:effectLst/>
+                <a:uFillTx/>
+                <a:latin typeface="Arial"/>
+              </a:rPr>
+              <a:t>Quality Evidence</a:t>
+            </a:r>
+            <a:endParaRPr lang="en-US" sz="2600" b="0" u="none" strike="noStrike">
+              <a:solidFill>
+                <a:srgbClr val="000000"/>
+              </a:solidFill>
+              <a:effectLst/>
+              <a:uFillTx/>
+              <a:latin typeface="Arial"/>
+            </a:endParaRPr>
+          </a:p>
+        </p:txBody>
+      </p:sp>
+      <p:sp>
+        <p:nvSpPr>
+          <p:cNvPr id="87" name=""/>
+          <p:cNvSpPr txBox="1"/>
+          <p:nvPr/>
+        </p:nvSpPr>
+        <p:spPr>
+          <a:xfrm>
+            <a:off x="540000" y="900000"/>
+            <a:ext cx="1440000" cy="43200"/>
+          </a:xfrm>
+          <a:prstGeom prst="rect">
+            <a:avLst/>
+          </a:prstGeom>
+          <a:solidFill>
+            <a:srgbClr val="E6BF71"/>
+          </a:solidFill>
+          <a:ln w="0">
+            <a:noFill/>
+          </a:ln>
+        </p:spPr>
+        <p:txBody>
+          <a:bodyPr lIns="90000" tIns="-1800" rIns="90000" bIns="-1800" anchor="t">
+            <a:spAutoFit/>
+          </a:bodyPr>
+          <a:p>
             <a:endParaRPr lang="en-US" sz="1800" b="0" u="none" strike="noStrike">
               <a:solidFill>
                 <a:srgbClr val="000000"/>
@@ -4404,9 +5788,34 @@
               <a:latin typeface="Arial"/>
             </a:endParaRPr>
           </a:p>
-          <a:p>
-            <a:r>
-              <a:rPr lang="en-US" sz="1800" b="0" u="none" strike="noStrike">
+        </p:txBody>
+      </p:sp>
+      <p:sp>
+        <p:nvSpPr>
+          <p:cNvPr id="88" name=""/>
+          <p:cNvSpPr txBox="1"/>
+          <p:nvPr/>
+        </p:nvSpPr>
+        <p:spPr>
+          <a:xfrm>
+            <a:off x="540000" y="1152000"/>
+            <a:ext cx="9000000" cy="3960000"/>
+          </a:xfrm>
+          <a:prstGeom prst="rect">
+            <a:avLst/>
+          </a:prstGeom>
+          <a:noFill/>
+          <a:ln w="0">
+            <a:noFill/>
+          </a:ln>
+        </p:spPr>
+        <p:txBody>
+          <a:bodyPr lIns="90000" tIns="45000" rIns="90000" bIns="45000" anchor="t">
+            <a:spAutoFit/>
+          </a:bodyPr>
+          <a:p>
+            <a:r>
+              <a:rPr lang="en-US" sz="1500" b="0" u="none" strike="noStrike">
                 <a:solidFill>
                   <a:srgbClr val="1A2E2B"/>
                 </a:solidFill>
@@ -4414,8 +5823,170 @@
                 <a:uFillTx/>
                 <a:latin typeface="Arial"/>
               </a:rPr>
-              <a:t>• Repo: github.com/Ahmed-Mahdyy/Daimoma</a:t>
-            </a:r>
+              <a:t>• 427 backend tests · 45 frontend tests · 60 e2e (13 accessibility)</a:t>
+            </a:r>
+            <a:endParaRPr lang="en-US" sz="1500" b="0" u="none" strike="noStrike">
+              <a:solidFill>
+                <a:srgbClr val="000000"/>
+              </a:solidFill>
+              <a:effectLst/>
+              <a:uFillTx/>
+              <a:latin typeface="Arial"/>
+            </a:endParaRPr>
+          </a:p>
+          <a:p>
+            <a:r>
+              <a:rPr lang="en-US" sz="1500" b="0" u="none" strike="noStrike">
+                <a:solidFill>
+                  <a:srgbClr val="1A2E2B"/>
+                </a:solidFill>
+                <a:effectLst/>
+                <a:uFillTx/>
+                <a:latin typeface="Arial"/>
+              </a:rPr>
+              <a:t>• Load: 500 employees, ~130k entries, 25 users — all p95 budgets pass</a:t>
+            </a:r>
+            <a:endParaRPr lang="en-US" sz="1500" b="0" u="none" strike="noStrike">
+              <a:solidFill>
+                <a:srgbClr val="000000"/>
+              </a:solidFill>
+              <a:effectLst/>
+              <a:uFillTx/>
+              <a:latin typeface="Arial"/>
+            </a:endParaRPr>
+          </a:p>
+          <a:p>
+            <a:r>
+              <a:rPr lang="en-US" sz="1500" b="0" u="none" strike="noStrike">
+                <a:solidFill>
+                  <a:srgbClr val="1A2E2B"/>
+                </a:solidFill>
+                <a:effectLst/>
+                <a:uFillTx/>
+                <a:latin typeface="Arial"/>
+              </a:rPr>
+              <a:t>• Real N+1 found and fixed under load: 13.3 s → 0.2 s</a:t>
+            </a:r>
+            <a:endParaRPr lang="en-US" sz="1500" b="0" u="none" strike="noStrike">
+              <a:solidFill>
+                <a:srgbClr val="000000"/>
+              </a:solidFill>
+              <a:effectLst/>
+              <a:uFillTx/>
+              <a:latin typeface="Arial"/>
+            </a:endParaRPr>
+          </a:p>
+        </p:txBody>
+      </p:sp>
+    </p:spTree>
+  </p:cSld>
+  <mc:AlternateContent>
+    <mc:Choice Requires="p14">
+      <p:transition spd="slow" p14:dur="2000"/>
+    </mc:Choice>
+    <mc:Fallback>
+      <p:transition spd="slow"/>
+    </mc:Fallback>
+  </mc:AlternateContent>
+</p:sld>
+</file>
+
+<file path=ppt/slides/slide22.xml><?xml version="1.0" encoding="utf-8"?>
+<p:sld xmlns:a="http://schemas.openxmlformats.org/drawingml/2006/main" xmlns:p="http://schemas.openxmlformats.org/presentationml/2006/main" xmlns:r="http://schemas.openxmlformats.org/officeDocument/2006/relationships" xmlns:p14="http://schemas.microsoft.com/office/powerpoint/2010/main" xmlns:p15="http://schemas.microsoft.com/office/powerpoint/2012/main" xmlns:mc="http://schemas.openxmlformats.org/markup-compatibility/2006">
+  <p:cSld>
+    <p:bg>
+      <p:bgPr>
+        <a:solidFill>
+          <a:srgbClr val="F4F8F5"/>
+        </a:solidFill>
+      </p:bgPr>
+    </p:bg>
+    <p:spTree>
+      <p:nvGrpSpPr>
+        <p:cNvPr id="1" name=""/>
+        <p:cNvGrpSpPr/>
+        <p:nvPr/>
+      </p:nvGrpSpPr>
+      <p:grpSpPr>
+        <a:xfrm>
+          <a:off x="0" y="0"/>
+          <a:ext cx="0" cy="0"/>
+          <a:chOff x="0" y="0"/>
+          <a:chExt cx="0" cy="0"/>
+        </a:xfrm>
+      </p:grpSpPr>
+      <p:sp>
+        <p:nvSpPr>
+          <p:cNvPr id="89" name=""/>
+          <p:cNvSpPr txBox="1"/>
+          <p:nvPr/>
+        </p:nvSpPr>
+        <p:spPr>
+          <a:xfrm>
+            <a:off x="540000" y="324000"/>
+            <a:ext cx="9000000" cy="576000"/>
+          </a:xfrm>
+          <a:prstGeom prst="rect">
+            <a:avLst/>
+          </a:prstGeom>
+          <a:noFill/>
+          <a:ln w="0">
+            <a:noFill/>
+          </a:ln>
+        </p:spPr>
+        <p:txBody>
+          <a:bodyPr lIns="90000" tIns="45000" rIns="90000" bIns="45000" anchor="t">
+            <a:spAutoFit/>
+          </a:bodyPr>
+          <a:p>
+            <a:r>
+              <a:rPr lang="en-US" sz="2600" b="1" u="none" strike="noStrike">
+                <a:solidFill>
+                  <a:srgbClr val="103E3A"/>
+                </a:solidFill>
+                <a:effectLst/>
+                <a:uFillTx/>
+                <a:latin typeface="Arial"/>
+              </a:rPr>
+              <a:t>Honest Limitations</a:t>
+            </a:r>
+            <a:endParaRPr lang="en-US" sz="2600" b="0" u="none" strike="noStrike">
+              <a:solidFill>
+                <a:srgbClr val="000000"/>
+              </a:solidFill>
+              <a:effectLst/>
+              <a:uFillTx/>
+              <a:latin typeface="Arial"/>
+            </a:endParaRPr>
+          </a:p>
+        </p:txBody>
+      </p:sp>
+      <p:sp>
+        <p:nvSpPr>
+          <p:cNvPr id="90" name=""/>
+          <p:cNvSpPr txBox="1"/>
+          <p:nvPr/>
+        </p:nvSpPr>
+        <p:spPr>
+          <a:xfrm>
+            <a:off x="540000" y="900000"/>
+            <a:ext cx="1440000" cy="43200"/>
+          </a:xfrm>
+          <a:prstGeom prst="rect">
+            <a:avLst/>
+          </a:prstGeom>
+          <a:solidFill>
+            <a:srgbClr val="E6BF71"/>
+          </a:solidFill>
+          <a:ln w="0">
+            <a:noFill/>
+          </a:ln>
+        </p:spPr>
+        <p:txBody>
+          <a:bodyPr lIns="90000" tIns="-1800" rIns="90000" bIns="-1800" anchor="t">
+            <a:spAutoFit/>
+          </a:bodyPr>
+          <a:p>
             <a:endParaRPr lang="en-US" sz="1800" b="0" u="none" strike="noStrike">
               <a:solidFill>
                 <a:srgbClr val="000000"/>
@@ -4425,9 +5996,34 @@
               <a:latin typeface="Arial"/>
             </a:endParaRPr>
           </a:p>
-          <a:p>
-            <a:r>
-              <a:rPr lang="en-US" sz="1800" b="0" u="none" strike="noStrike">
+        </p:txBody>
+      </p:sp>
+      <p:sp>
+        <p:nvSpPr>
+          <p:cNvPr id="91" name=""/>
+          <p:cNvSpPr txBox="1"/>
+          <p:nvPr/>
+        </p:nvSpPr>
+        <p:spPr>
+          <a:xfrm>
+            <a:off x="540000" y="1152000"/>
+            <a:ext cx="9000000" cy="3960000"/>
+          </a:xfrm>
+          <a:prstGeom prst="rect">
+            <a:avLst/>
+          </a:prstGeom>
+          <a:noFill/>
+          <a:ln w="0">
+            <a:noFill/>
+          </a:ln>
+        </p:spPr>
+        <p:txBody>
+          <a:bodyPr lIns="90000" tIns="45000" rIns="90000" bIns="45000" anchor="t">
+            <a:spAutoFit/>
+          </a:bodyPr>
+          <a:p>
+            <a:r>
+              <a:rPr lang="en-US" sz="1500" b="0" u="none" strike="noStrike">
                 <a:solidFill>
                   <a:srgbClr val="1A2E2B"/>
                 </a:solidFill>
@@ -4435,11 +6031,294 @@
                 <a:uFillTx/>
                 <a:latin typeface="Arial"/>
               </a:rPr>
-              <a:t>• Docs: docs/architecture · docs/operations/runbook.md · docs/evidence/</a:t>
-            </a:r>
+              <a:t>• HTTP only — domain + TLS pending (one click once a domain exists)</a:t>
+            </a:r>
+            <a:endParaRPr lang="en-US" sz="1500" b="0" u="none" strike="noStrike">
+              <a:solidFill>
+                <a:srgbClr val="000000"/>
+              </a:solidFill>
+              <a:effectLst/>
+              <a:uFillTx/>
+              <a:latin typeface="Arial"/>
+            </a:endParaRPr>
+          </a:p>
+          <a:p>
+            <a:r>
+              <a:rPr lang="en-US" sz="1500" b="0" u="none" strike="noStrike">
+                <a:solidFill>
+                  <a:srgbClr val="1A2E2B"/>
+                </a:solidFill>
+                <a:effectLst/>
+                <a:uFillTx/>
+                <a:latin typeface="Arial"/>
+              </a:rPr>
+              <a:t>• Demo quick-login shares a password — demo mode, off before real data</a:t>
+            </a:r>
+            <a:endParaRPr lang="en-US" sz="1500" b="0" u="none" strike="noStrike">
+              <a:solidFill>
+                <a:srgbClr val="000000"/>
+              </a:solidFill>
+              <a:effectLst/>
+              <a:uFillTx/>
+              <a:latin typeface="Arial"/>
+            </a:endParaRPr>
+          </a:p>
+          <a:p>
+            <a:r>
+              <a:rPr lang="en-US" sz="1500" b="0" u="none" strike="noStrike">
+                <a:solidFill>
+                  <a:srgbClr val="1A2E2B"/>
+                </a:solidFill>
+                <a:effectLst/>
+                <a:uFillTx/>
+                <a:latin typeface="Arial"/>
+              </a:rPr>
+              <a:t>• No automated backups (owner-waived); attachments deferred</a:t>
+            </a:r>
+            <a:endParaRPr lang="en-US" sz="1500" b="0" u="none" strike="noStrike">
+              <a:solidFill>
+                <a:srgbClr val="000000"/>
+              </a:solidFill>
+              <a:effectLst/>
+              <a:uFillTx/>
+              <a:latin typeface="Arial"/>
+            </a:endParaRPr>
+          </a:p>
+        </p:txBody>
+      </p:sp>
+    </p:spTree>
+  </p:cSld>
+  <mc:AlternateContent>
+    <mc:Choice Requires="p14">
+      <p:transition spd="slow" p14:dur="2000"/>
+    </mc:Choice>
+    <mc:Fallback>
+      <p:transition spd="slow"/>
+    </mc:Fallback>
+  </mc:AlternateContent>
+</p:sld>
+</file>
+
+<file path=ppt/slides/slide23.xml><?xml version="1.0" encoding="utf-8"?>
+<p:sld xmlns:a="http://schemas.openxmlformats.org/drawingml/2006/main" xmlns:p="http://schemas.openxmlformats.org/presentationml/2006/main" xmlns:r="http://schemas.openxmlformats.org/officeDocument/2006/relationships" xmlns:p14="http://schemas.microsoft.com/office/powerpoint/2010/main" xmlns:p15="http://schemas.microsoft.com/office/powerpoint/2012/main" xmlns:mc="http://schemas.openxmlformats.org/markup-compatibility/2006">
+  <p:cSld>
+    <p:bg>
+      <p:bgPr>
+        <a:solidFill>
+          <a:srgbClr val="103E3A"/>
+        </a:solidFill>
+      </p:bgPr>
+    </p:bg>
+    <p:spTree>
+      <p:nvGrpSpPr>
+        <p:cNvPr id="1" name=""/>
+        <p:cNvGrpSpPr/>
+        <p:nvPr/>
+      </p:nvGrpSpPr>
+      <p:grpSpPr>
+        <a:xfrm>
+          <a:off x="0" y="0"/>
+          <a:ext cx="0" cy="0"/>
+          <a:chOff x="0" y="0"/>
+          <a:chExt cx="0" cy="0"/>
+        </a:xfrm>
+      </p:grpSpPr>
+      <p:sp>
+        <p:nvSpPr>
+          <p:cNvPr id="92" name=""/>
+          <p:cNvSpPr txBox="1"/>
+          <p:nvPr/>
+        </p:nvSpPr>
+        <p:spPr>
+          <a:xfrm>
+            <a:off x="720000" y="1440000"/>
+            <a:ext cx="8640000" cy="1080000"/>
+          </a:xfrm>
+          <a:prstGeom prst="rect">
+            <a:avLst/>
+          </a:prstGeom>
+          <a:noFill/>
+          <a:ln w="0">
+            <a:noFill/>
+          </a:ln>
+        </p:spPr>
+        <p:txBody>
+          <a:bodyPr lIns="90000" tIns="45000" rIns="90000" bIns="45000" anchor="t">
+            <a:spAutoFit/>
+          </a:bodyPr>
+          <a:p>
+            <a:r>
+              <a:rPr lang="en-US" sz="4400" b="1" u="none" strike="noStrike">
+                <a:solidFill>
+                  <a:srgbClr val="FFFFFF"/>
+                </a:solidFill>
+                <a:effectLst/>
+                <a:uFillTx/>
+                <a:latin typeface="Arial"/>
+              </a:rPr>
+              <a:t>Thank You — </a:t>
+            </a:r>
+            <a:r>
+              <a:rPr lang="hi-IN" sz="4400" b="0" u="none" strike="noStrike">
+                <a:solidFill>
+                  <a:srgbClr val="FFFFFF"/>
+                </a:solidFill>
+                <a:effectLst/>
+                <a:uFillTx/>
+                <a:latin typeface="Arial"/>
+              </a:rPr>
+              <a:t>شكراً</a:t>
+            </a:r>
+            <a:endParaRPr lang="en-US" sz="4400" b="0" u="none" strike="noStrike">
+              <a:solidFill>
+                <a:srgbClr val="FFFFFF"/>
+              </a:solidFill>
+              <a:effectLst/>
+              <a:uFillTx/>
+              <a:latin typeface="Arial"/>
+            </a:endParaRPr>
+          </a:p>
+        </p:txBody>
+      </p:sp>
+      <p:sp>
+        <p:nvSpPr>
+          <p:cNvPr id="93" name=""/>
+          <p:cNvSpPr txBox="1"/>
+          <p:nvPr/>
+        </p:nvSpPr>
+        <p:spPr>
+          <a:xfrm>
+            <a:off x="720000" y="2664000"/>
+            <a:ext cx="2160000" cy="50400"/>
+          </a:xfrm>
+          <a:prstGeom prst="rect">
+            <a:avLst/>
+          </a:prstGeom>
+          <a:solidFill>
+            <a:srgbClr val="E6BF71"/>
+          </a:solidFill>
+          <a:ln w="0">
+            <a:noFill/>
+          </a:ln>
+        </p:spPr>
+        <p:txBody>
+          <a:bodyPr lIns="90000" tIns="5400" rIns="90000" bIns="5400" anchor="t">
+            <a:spAutoFit/>
+          </a:bodyPr>
+          <a:p>
             <a:endParaRPr lang="en-US" sz="1800" b="0" u="none" strike="noStrike">
               <a:solidFill>
                 <a:srgbClr val="000000"/>
+              </a:solidFill>
+              <a:effectLst/>
+              <a:uFillTx/>
+              <a:latin typeface="Arial"/>
+            </a:endParaRPr>
+          </a:p>
+        </p:txBody>
+      </p:sp>
+      <p:sp>
+        <p:nvSpPr>
+          <p:cNvPr id="94" name=""/>
+          <p:cNvSpPr txBox="1"/>
+          <p:nvPr/>
+        </p:nvSpPr>
+        <p:spPr>
+          <a:xfrm>
+            <a:off x="720000" y="3024000"/>
+            <a:ext cx="8640000" cy="1620000"/>
+          </a:xfrm>
+          <a:prstGeom prst="rect">
+            <a:avLst/>
+          </a:prstGeom>
+          <a:noFill/>
+          <a:ln w="0">
+            <a:noFill/>
+          </a:ln>
+        </p:spPr>
+        <p:txBody>
+          <a:bodyPr lIns="90000" tIns="45000" rIns="90000" bIns="45000" anchor="t">
+            <a:spAutoFit/>
+          </a:bodyPr>
+          <a:p>
+            <a:r>
+              <a:rPr lang="en-US" sz="1600" b="0" u="none" strike="noStrike">
+                <a:solidFill>
+                  <a:srgbClr val="C6DFD5"/>
+                </a:solidFill>
+                <a:effectLst/>
+                <a:uFillTx/>
+                <a:latin typeface="Arial"/>
+              </a:rPr>
+              <a:t>Complete, live, bilingual, accessible employee-operations product</a:t>
+            </a:r>
+            <a:endParaRPr lang="en-US" sz="1600" b="0" u="none" strike="noStrike">
+              <a:solidFill>
+                <a:srgbClr val="FFFFFF"/>
+              </a:solidFill>
+              <a:effectLst/>
+              <a:uFillTx/>
+              <a:latin typeface="Arial"/>
+            </a:endParaRPr>
+          </a:p>
+          <a:p>
+            <a:r>
+              <a:rPr lang="en-US" sz="1600" b="0" u="none" strike="noStrike">
+                <a:solidFill>
+                  <a:srgbClr val="C6DFD5"/>
+                </a:solidFill>
+                <a:effectLst/>
+                <a:uFillTx/>
+                <a:latin typeface="Arial"/>
+              </a:rPr>
+              <a:t>Spec-led · tested · deployed · operable</a:t>
+            </a:r>
+            <a:endParaRPr lang="en-US" sz="1600" b="0" u="none" strike="noStrike">
+              <a:solidFill>
+                <a:srgbClr val="FFFFFF"/>
+              </a:solidFill>
+              <a:effectLst/>
+              <a:uFillTx/>
+              <a:latin typeface="Arial"/>
+            </a:endParaRPr>
+          </a:p>
+          <a:p>
+            <a:r>
+              <a:rPr lang="en-US" sz="1600" b="0" u="none" strike="noStrike">
+                <a:solidFill>
+                  <a:srgbClr val="C6DFD5"/>
+                </a:solidFill>
+                <a:effectLst/>
+                <a:uFillTx/>
+                <a:latin typeface="Arial"/>
+              </a:rPr>
+              <a:t>«</a:t>
+            </a:r>
+            <a:r>
+              <a:rPr lang="hi-IN" sz="1600" b="0" u="none" strike="noStrike">
+                <a:solidFill>
+                  <a:srgbClr val="C6DFD5"/>
+                </a:solidFill>
+                <a:effectLst/>
+                <a:uFillTx/>
+                <a:latin typeface="Arial"/>
+              </a:rPr>
+              <a:t>سجّل وانسَ — ديمومة مستمرة</a:t>
+            </a:r>
+            <a:r>
+              <a:rPr lang="en-US" sz="1600" b="0" u="none" strike="noStrike">
+                <a:solidFill>
+                  <a:srgbClr val="C6DFD5"/>
+                </a:solidFill>
+                <a:effectLst/>
+                <a:uFillTx/>
+                <a:latin typeface="Arial"/>
+              </a:rPr>
+              <a:t>»</a:t>
+            </a:r>
+            <a:endParaRPr lang="en-US" sz="1600" b="0" u="none" strike="noStrike">
+              <a:solidFill>
+                <a:srgbClr val="FFFFFF"/>
               </a:solidFill>
               <a:effectLst/>
               <a:uFillTx/>
@@ -4464,6 +6343,13 @@
 <file path=ppt/slides/slide3.xml><?xml version="1.0" encoding="utf-8"?>
 <p:sld xmlns:a="http://schemas.openxmlformats.org/drawingml/2006/main" xmlns:p="http://schemas.openxmlformats.org/presentationml/2006/main" xmlns:r="http://schemas.openxmlformats.org/officeDocument/2006/relationships" xmlns:p14="http://schemas.microsoft.com/office/powerpoint/2010/main" xmlns:p15="http://schemas.microsoft.com/office/powerpoint/2012/main" xmlns:mc="http://schemas.openxmlformats.org/markup-compatibility/2006">
   <p:cSld>
+    <p:bg>
+      <p:bgPr>
+        <a:solidFill>
+          <a:srgbClr val="F4F8F5"/>
+        </a:solidFill>
+      </p:bgPr>
+    </p:bg>
     <p:spTree>
       <p:nvGrpSpPr>
         <p:cNvPr id="1" name=""/>
@@ -4480,14 +6366,14 @@
       </p:grpSpPr>
       <p:sp>
         <p:nvSpPr>
-          <p:cNvPr id="19" name=""/>
-          <p:cNvSpPr txBox="1"/>
-          <p:nvPr/>
-        </p:nvSpPr>
-        <p:spPr>
-          <a:xfrm>
-            <a:off x="540000" y="360000"/>
-            <a:ext cx="9000000" cy="1080000"/>
+          <p:cNvPr id="23" name=""/>
+          <p:cNvSpPr txBox="1"/>
+          <p:nvPr/>
+        </p:nvSpPr>
+        <p:spPr>
+          <a:xfrm>
+            <a:off x="540000" y="324000"/>
+            <a:ext cx="9000000" cy="576000"/>
           </a:xfrm>
           <a:prstGeom prst="rect">
             <a:avLst/>
@@ -4503,9 +6389,9 @@
           </a:bodyPr>
           <a:p>
             <a:r>
-              <a:rPr lang="en-US" sz="3200" b="1" u="none" strike="noStrike">
-                <a:solidFill>
-                  <a:srgbClr val="0F4C45"/>
+              <a:rPr lang="en-US" sz="2600" b="1" u="none" strike="noStrike">
+                <a:solidFill>
+                  <a:srgbClr val="103E3A"/>
                 </a:solidFill>
                 <a:effectLst/>
                 <a:uFillTx/>
@@ -4513,27 +6399,64 @@
               </a:rPr>
               <a:t>What Daimoma Is</a:t>
             </a:r>
-            <a:endParaRPr lang="en-US" sz="3200" b="0" u="none" strike="noStrike">
-              <a:solidFill>
-                <a:srgbClr val="000000"/>
-              </a:solidFill>
-              <a:effectLst/>
-              <a:uFillTx/>
-              <a:latin typeface="Arial"/>
-            </a:endParaRPr>
-          </a:p>
-        </p:txBody>
-      </p:sp>
-      <p:sp>
-        <p:nvSpPr>
-          <p:cNvPr id="20" name=""/>
-          <p:cNvSpPr txBox="1"/>
-          <p:nvPr/>
-        </p:nvSpPr>
-        <p:spPr>
-          <a:xfrm>
-            <a:off x="540000" y="1800000"/>
-            <a:ext cx="9000000" cy="5040000"/>
+            <a:endParaRPr lang="en-US" sz="2600" b="0" u="none" strike="noStrike">
+              <a:solidFill>
+                <a:srgbClr val="000000"/>
+              </a:solidFill>
+              <a:effectLst/>
+              <a:uFillTx/>
+              <a:latin typeface="Arial"/>
+            </a:endParaRPr>
+          </a:p>
+        </p:txBody>
+      </p:sp>
+      <p:sp>
+        <p:nvSpPr>
+          <p:cNvPr id="24" name=""/>
+          <p:cNvSpPr txBox="1"/>
+          <p:nvPr/>
+        </p:nvSpPr>
+        <p:spPr>
+          <a:xfrm>
+            <a:off x="540000" y="900000"/>
+            <a:ext cx="1440000" cy="43200"/>
+          </a:xfrm>
+          <a:prstGeom prst="rect">
+            <a:avLst/>
+          </a:prstGeom>
+          <a:solidFill>
+            <a:srgbClr val="E6BF71"/>
+          </a:solidFill>
+          <a:ln w="0">
+            <a:noFill/>
+          </a:ln>
+        </p:spPr>
+        <p:txBody>
+          <a:bodyPr lIns="90000" tIns="-1800" rIns="90000" bIns="-1800" anchor="t">
+            <a:spAutoFit/>
+          </a:bodyPr>
+          <a:p>
+            <a:endParaRPr lang="en-US" sz="1800" b="0" u="none" strike="noStrike">
+              <a:solidFill>
+                <a:srgbClr val="000000"/>
+              </a:solidFill>
+              <a:effectLst/>
+              <a:uFillTx/>
+              <a:latin typeface="Arial"/>
+            </a:endParaRPr>
+          </a:p>
+        </p:txBody>
+      </p:sp>
+      <p:sp>
+        <p:nvSpPr>
+          <p:cNvPr id="25" name=""/>
+          <p:cNvSpPr txBox="1"/>
+          <p:nvPr/>
+        </p:nvSpPr>
+        <p:spPr>
+          <a:xfrm>
+            <a:off x="540000" y="1152000"/>
+            <a:ext cx="9000000" cy="3960000"/>
           </a:xfrm>
           <a:prstGeom prst="rect">
             <a:avLst/>
@@ -4549,7 +6472,7 @@
           </a:bodyPr>
           <a:p>
             <a:r>
-              <a:rPr lang="en-US" sz="1800" b="0" u="none" strike="noStrike">
+              <a:rPr lang="en-US" sz="1500" b="0" u="none" strike="noStrike">
                 <a:solidFill>
                   <a:srgbClr val="1A2E2B"/>
                 </a:solidFill>
@@ -4557,20 +6480,20 @@
                 <a:uFillTx/>
                 <a:latin typeface="Arial"/>
               </a:rPr>
-              <a:t>• One workspace: employees submit/track, managers review their team, HR runs the org</a:t>
-            </a:r>
-            <a:endParaRPr lang="en-US" sz="1800" b="0" u="none" strike="noStrike">
-              <a:solidFill>
-                <a:srgbClr val="000000"/>
-              </a:solidFill>
-              <a:effectLst/>
-              <a:uFillTx/>
-              <a:latin typeface="Arial"/>
-            </a:endParaRPr>
-          </a:p>
-          <a:p>
-            <a:r>
-              <a:rPr lang="en-US" sz="1800" b="0" u="none" strike="noStrike">
+              <a:t>• One workspace: employees submit and track, managers review their team, HR runs the organization</a:t>
+            </a:r>
+            <a:endParaRPr lang="en-US" sz="1500" b="0" u="none" strike="noStrike">
+              <a:solidFill>
+                <a:srgbClr val="000000"/>
+              </a:solidFill>
+              <a:effectLst/>
+              <a:uFillTx/>
+              <a:latin typeface="Arial"/>
+            </a:endParaRPr>
+          </a:p>
+          <a:p>
+            <a:r>
+              <a:rPr lang="en-US" sz="1500" b="0" u="none" strike="noStrike">
                 <a:solidFill>
                   <a:srgbClr val="1A2E2B"/>
                 </a:solidFill>
@@ -4580,18 +6503,18 @@
               </a:rPr>
               <a:t>• Ownership and status always visible — nothing disappears into a queue</a:t>
             </a:r>
-            <a:endParaRPr lang="en-US" sz="1800" b="0" u="none" strike="noStrike">
-              <a:solidFill>
-                <a:srgbClr val="000000"/>
-              </a:solidFill>
-              <a:effectLst/>
-              <a:uFillTx/>
-              <a:latin typeface="Arial"/>
-            </a:endParaRPr>
-          </a:p>
-          <a:p>
-            <a:r>
-              <a:rPr lang="en-US" sz="1800" b="0" u="none" strike="noStrike">
+            <a:endParaRPr lang="en-US" sz="1500" b="0" u="none" strike="noStrike">
+              <a:solidFill>
+                <a:srgbClr val="000000"/>
+              </a:solidFill>
+              <a:effectLst/>
+              <a:uFillTx/>
+              <a:latin typeface="Arial"/>
+            </a:endParaRPr>
+          </a:p>
+          <a:p>
+            <a:r>
+              <a:rPr lang="en-US" sz="1500" b="0" u="none" strike="noStrike">
                 <a:solidFill>
                   <a:srgbClr val="1A2E2B"/>
                 </a:solidFill>
@@ -4601,7 +6524,7 @@
               </a:rPr>
               <a:t>• Bilingual EN/AR, accessible, deployed and live</a:t>
             </a:r>
-            <a:endParaRPr lang="en-US" sz="1800" b="0" u="none" strike="noStrike">
+            <a:endParaRPr lang="en-US" sz="1500" b="0" u="none" strike="noStrike">
               <a:solidFill>
                 <a:srgbClr val="000000"/>
               </a:solidFill>
@@ -4628,6 +6551,13 @@
 <file path=ppt/slides/slide4.xml><?xml version="1.0" encoding="utf-8"?>
 <p:sld xmlns:a="http://schemas.openxmlformats.org/drawingml/2006/main" xmlns:p="http://schemas.openxmlformats.org/presentationml/2006/main" xmlns:r="http://schemas.openxmlformats.org/officeDocument/2006/relationships" xmlns:p14="http://schemas.microsoft.com/office/powerpoint/2010/main" xmlns:p15="http://schemas.microsoft.com/office/powerpoint/2012/main" xmlns:mc="http://schemas.openxmlformats.org/markup-compatibility/2006">
   <p:cSld>
+    <p:bg>
+      <p:bgPr>
+        <a:solidFill>
+          <a:srgbClr val="F4F8F5"/>
+        </a:solidFill>
+      </p:bgPr>
+    </p:bg>
     <p:spTree>
       <p:nvGrpSpPr>
         <p:cNvPr id="1" name=""/>
@@ -4644,14 +6574,14 @@
       </p:grpSpPr>
       <p:sp>
         <p:nvSpPr>
-          <p:cNvPr id="21" name=""/>
-          <p:cNvSpPr txBox="1"/>
-          <p:nvPr/>
-        </p:nvSpPr>
-        <p:spPr>
-          <a:xfrm>
-            <a:off x="540000" y="360000"/>
-            <a:ext cx="9000000" cy="1080000"/>
+          <p:cNvPr id="26" name=""/>
+          <p:cNvSpPr txBox="1"/>
+          <p:nvPr/>
+        </p:nvSpPr>
+        <p:spPr>
+          <a:xfrm>
+            <a:off x="540000" y="324000"/>
+            <a:ext cx="9000000" cy="576000"/>
           </a:xfrm>
           <a:prstGeom prst="rect">
             <a:avLst/>
@@ -4667,9 +6597,9 @@
           </a:bodyPr>
           <a:p>
             <a:r>
-              <a:rPr lang="en-US" sz="3200" b="1" u="none" strike="noStrike">
-                <a:solidFill>
-                  <a:srgbClr val="0F4C45"/>
+              <a:rPr lang="en-US" sz="2600" b="1" u="none" strike="noStrike">
+                <a:solidFill>
+                  <a:srgbClr val="103E3A"/>
                 </a:solidFill>
                 <a:effectLst/>
                 <a:uFillTx/>
@@ -4677,27 +6607,64 @@
               </a:rPr>
               <a:t>Users &amp; Roles</a:t>
             </a:r>
-            <a:endParaRPr lang="en-US" sz="3200" b="0" u="none" strike="noStrike">
-              <a:solidFill>
-                <a:srgbClr val="000000"/>
-              </a:solidFill>
-              <a:effectLst/>
-              <a:uFillTx/>
-              <a:latin typeface="Arial"/>
-            </a:endParaRPr>
-          </a:p>
-        </p:txBody>
-      </p:sp>
-      <p:sp>
-        <p:nvSpPr>
-          <p:cNvPr id="22" name=""/>
-          <p:cNvSpPr txBox="1"/>
-          <p:nvPr/>
-        </p:nvSpPr>
-        <p:spPr>
-          <a:xfrm>
-            <a:off x="540000" y="1800000"/>
-            <a:ext cx="9000000" cy="5040000"/>
+            <a:endParaRPr lang="en-US" sz="2600" b="0" u="none" strike="noStrike">
+              <a:solidFill>
+                <a:srgbClr val="000000"/>
+              </a:solidFill>
+              <a:effectLst/>
+              <a:uFillTx/>
+              <a:latin typeface="Arial"/>
+            </a:endParaRPr>
+          </a:p>
+        </p:txBody>
+      </p:sp>
+      <p:sp>
+        <p:nvSpPr>
+          <p:cNvPr id="27" name=""/>
+          <p:cNvSpPr txBox="1"/>
+          <p:nvPr/>
+        </p:nvSpPr>
+        <p:spPr>
+          <a:xfrm>
+            <a:off x="540000" y="900000"/>
+            <a:ext cx="1440000" cy="43200"/>
+          </a:xfrm>
+          <a:prstGeom prst="rect">
+            <a:avLst/>
+          </a:prstGeom>
+          <a:solidFill>
+            <a:srgbClr val="E6BF71"/>
+          </a:solidFill>
+          <a:ln w="0">
+            <a:noFill/>
+          </a:ln>
+        </p:spPr>
+        <p:txBody>
+          <a:bodyPr lIns="90000" tIns="-1800" rIns="90000" bIns="-1800" anchor="t">
+            <a:spAutoFit/>
+          </a:bodyPr>
+          <a:p>
+            <a:endParaRPr lang="en-US" sz="1800" b="0" u="none" strike="noStrike">
+              <a:solidFill>
+                <a:srgbClr val="000000"/>
+              </a:solidFill>
+              <a:effectLst/>
+              <a:uFillTx/>
+              <a:latin typeface="Arial"/>
+            </a:endParaRPr>
+          </a:p>
+        </p:txBody>
+      </p:sp>
+      <p:sp>
+        <p:nvSpPr>
+          <p:cNvPr id="28" name=""/>
+          <p:cNvSpPr txBox="1"/>
+          <p:nvPr/>
+        </p:nvSpPr>
+        <p:spPr>
+          <a:xfrm>
+            <a:off x="540000" y="1152000"/>
+            <a:ext cx="9000000" cy="3960000"/>
           </a:xfrm>
           <a:prstGeom prst="rect">
             <a:avLst/>
@@ -4713,7 +6680,7 @@
           </a:bodyPr>
           <a:p>
             <a:r>
-              <a:rPr lang="en-US" sz="1800" b="0" u="none" strike="noStrike">
+              <a:rPr lang="en-US" sz="1500" b="0" u="none" strike="noStrike">
                 <a:solidFill>
                   <a:srgbClr val="1A2E2B"/>
                 </a:solidFill>
@@ -4723,18 +6690,18 @@
               </a:rPr>
               <a:t>• Employee — own requests, timesheets, balances</a:t>
             </a:r>
-            <a:endParaRPr lang="en-US" sz="1800" b="0" u="none" strike="noStrike">
-              <a:solidFill>
-                <a:srgbClr val="000000"/>
-              </a:solidFill>
-              <a:effectLst/>
-              <a:uFillTx/>
-              <a:latin typeface="Arial"/>
-            </a:endParaRPr>
-          </a:p>
-          <a:p>
-            <a:r>
-              <a:rPr lang="en-US" sz="1800" b="0" u="none" strike="noStrike">
+            <a:endParaRPr lang="en-US" sz="1500" b="0" u="none" strike="noStrike">
+              <a:solidFill>
+                <a:srgbClr val="000000"/>
+              </a:solidFill>
+              <a:effectLst/>
+              <a:uFillTx/>
+              <a:latin typeface="Arial"/>
+            </a:endParaRPr>
+          </a:p>
+          <a:p>
+            <a:r>
+              <a:rPr lang="en-US" sz="1500" b="0" u="none" strike="noStrike">
                 <a:solidFill>
                   <a:srgbClr val="1A2E2B"/>
                 </a:solidFill>
@@ -4744,18 +6711,18 @@
               </a:rPr>
               <a:t>• Manager — direct team's non-draft work + own employee view</a:t>
             </a:r>
-            <a:endParaRPr lang="en-US" sz="1800" b="0" u="none" strike="noStrike">
-              <a:solidFill>
-                <a:srgbClr val="000000"/>
-              </a:solidFill>
-              <a:effectLst/>
-              <a:uFillTx/>
-              <a:latin typeface="Arial"/>
-            </a:endParaRPr>
-          </a:p>
-          <a:p>
-            <a:r>
-              <a:rPr lang="en-US" sz="1800" b="0" u="none" strike="noStrike">
+            <a:endParaRPr lang="en-US" sz="1500" b="0" u="none" strike="noStrike">
+              <a:solidFill>
+                <a:srgbClr val="000000"/>
+              </a:solidFill>
+              <a:effectLst/>
+              <a:uFillTx/>
+              <a:latin typeface="Arial"/>
+            </a:endParaRPr>
+          </a:p>
+          <a:p>
+            <a:r>
+              <a:rPr lang="en-US" sz="1500" b="0" u="none" strike="noStrike">
                 <a:solidFill>
                   <a:srgbClr val="1A2E2B"/>
                 </a:solidFill>
@@ -4765,7 +6732,7 @@
               </a:rPr>
               <a:t>• HR — organization-wide work, admin, request types, allocations</a:t>
             </a:r>
-            <a:endParaRPr lang="en-US" sz="1800" b="0" u="none" strike="noStrike">
+            <a:endParaRPr lang="en-US" sz="1500" b="0" u="none" strike="noStrike">
               <a:solidFill>
                 <a:srgbClr val="000000"/>
               </a:solidFill>
@@ -4792,6 +6759,13 @@
 <file path=ppt/slides/slide5.xml><?xml version="1.0" encoding="utf-8"?>
 <p:sld xmlns:a="http://schemas.openxmlformats.org/drawingml/2006/main" xmlns:p="http://schemas.openxmlformats.org/presentationml/2006/main" xmlns:r="http://schemas.openxmlformats.org/officeDocument/2006/relationships" xmlns:p14="http://schemas.microsoft.com/office/powerpoint/2010/main" xmlns:p15="http://schemas.microsoft.com/office/powerpoint/2012/main" xmlns:mc="http://schemas.openxmlformats.org/markup-compatibility/2006">
   <p:cSld>
+    <p:bg>
+      <p:bgPr>
+        <a:solidFill>
+          <a:srgbClr val="F4F8F5"/>
+        </a:solidFill>
+      </p:bgPr>
+    </p:bg>
     <p:spTree>
       <p:nvGrpSpPr>
         <p:cNvPr id="1" name=""/>
@@ -4808,14 +6782,14 @@
       </p:grpSpPr>
       <p:sp>
         <p:nvSpPr>
-          <p:cNvPr id="23" name=""/>
-          <p:cNvSpPr txBox="1"/>
-          <p:nvPr/>
-        </p:nvSpPr>
-        <p:spPr>
-          <a:xfrm>
-            <a:off x="540000" y="360000"/>
-            <a:ext cx="9000000" cy="1080000"/>
+          <p:cNvPr id="29" name=""/>
+          <p:cNvSpPr txBox="1"/>
+          <p:nvPr/>
+        </p:nvSpPr>
+        <p:spPr>
+          <a:xfrm>
+            <a:off x="540000" y="324000"/>
+            <a:ext cx="9000000" cy="576000"/>
           </a:xfrm>
           <a:prstGeom prst="rect">
             <a:avLst/>
@@ -4831,9 +6805,9 @@
           </a:bodyPr>
           <a:p>
             <a:r>
-              <a:rPr lang="en-US" sz="3200" b="1" u="none" strike="noStrike">
-                <a:solidFill>
-                  <a:srgbClr val="0F4C45"/>
+              <a:rPr lang="en-US" sz="2600" b="1" u="none" strike="noStrike">
+                <a:solidFill>
+                  <a:srgbClr val="103E3A"/>
                 </a:solidFill>
                 <a:effectLst/>
                 <a:uFillTx/>
@@ -4841,27 +6815,64 @@
               </a:rPr>
               <a:t>Brand</a:t>
             </a:r>
-            <a:endParaRPr lang="en-US" sz="3200" b="0" u="none" strike="noStrike">
-              <a:solidFill>
-                <a:srgbClr val="000000"/>
-              </a:solidFill>
-              <a:effectLst/>
-              <a:uFillTx/>
-              <a:latin typeface="Arial"/>
-            </a:endParaRPr>
-          </a:p>
-        </p:txBody>
-      </p:sp>
-      <p:sp>
-        <p:nvSpPr>
-          <p:cNvPr id="24" name=""/>
-          <p:cNvSpPr txBox="1"/>
-          <p:nvPr/>
-        </p:nvSpPr>
-        <p:spPr>
-          <a:xfrm>
-            <a:off x="540000" y="1800000"/>
-            <a:ext cx="9000000" cy="5040000"/>
+            <a:endParaRPr lang="en-US" sz="2600" b="0" u="none" strike="noStrike">
+              <a:solidFill>
+                <a:srgbClr val="000000"/>
+              </a:solidFill>
+              <a:effectLst/>
+              <a:uFillTx/>
+              <a:latin typeface="Arial"/>
+            </a:endParaRPr>
+          </a:p>
+        </p:txBody>
+      </p:sp>
+      <p:sp>
+        <p:nvSpPr>
+          <p:cNvPr id="30" name=""/>
+          <p:cNvSpPr txBox="1"/>
+          <p:nvPr/>
+        </p:nvSpPr>
+        <p:spPr>
+          <a:xfrm>
+            <a:off x="540000" y="900000"/>
+            <a:ext cx="1440000" cy="43200"/>
+          </a:xfrm>
+          <a:prstGeom prst="rect">
+            <a:avLst/>
+          </a:prstGeom>
+          <a:solidFill>
+            <a:srgbClr val="E6BF71"/>
+          </a:solidFill>
+          <a:ln w="0">
+            <a:noFill/>
+          </a:ln>
+        </p:spPr>
+        <p:txBody>
+          <a:bodyPr lIns="90000" tIns="-1800" rIns="90000" bIns="-1800" anchor="t">
+            <a:spAutoFit/>
+          </a:bodyPr>
+          <a:p>
+            <a:endParaRPr lang="en-US" sz="1800" b="0" u="none" strike="noStrike">
+              <a:solidFill>
+                <a:srgbClr val="000000"/>
+              </a:solidFill>
+              <a:effectLst/>
+              <a:uFillTx/>
+              <a:latin typeface="Arial"/>
+            </a:endParaRPr>
+          </a:p>
+        </p:txBody>
+      </p:sp>
+      <p:sp>
+        <p:nvSpPr>
+          <p:cNvPr id="31" name=""/>
+          <p:cNvSpPr txBox="1"/>
+          <p:nvPr/>
+        </p:nvSpPr>
+        <p:spPr>
+          <a:xfrm>
+            <a:off x="540000" y="1152000"/>
+            <a:ext cx="4140000" cy="3960000"/>
           </a:xfrm>
           <a:prstGeom prst="rect">
             <a:avLst/>
@@ -4877,7 +6888,7 @@
           </a:bodyPr>
           <a:p>
             <a:r>
-              <a:rPr lang="en-US" sz="1800" b="0" u="none" strike="noStrike">
+              <a:rPr lang="en-US" sz="1500" b="0" u="none" strike="noStrike">
                 <a:solidFill>
                   <a:srgbClr val="1A2E2B"/>
                 </a:solidFill>
@@ -4888,7 +6899,7 @@
               <a:t>• Name: Daimoma — </a:t>
             </a:r>
             <a:r>
-              <a:rPr lang="hi-IN" sz="1800" b="0" u="none" strike="noStrike">
+              <a:rPr lang="hi-IN" sz="1500" b="0" u="none" strike="noStrike">
                 <a:solidFill>
                   <a:srgbClr val="1A2E2B"/>
                 </a:solidFill>
@@ -4899,7 +6910,7 @@
               <a:t>ديمومة</a:t>
             </a:r>
             <a:r>
-              <a:rPr lang="en-US" sz="1800" b="0" u="none" strike="noStrike">
+              <a:rPr lang="en-US" sz="1500" b="0" u="none" strike="noStrike">
                 <a:solidFill>
                   <a:srgbClr val="1A2E2B"/>
                 </a:solidFill>
@@ -4910,7 +6921,7 @@
               <a:t> </a:t>
             </a:r>
             <a:r>
-              <a:rPr lang="en-US" sz="1800" b="0" u="none" strike="noStrike">
+              <a:rPr lang="en-US" sz="1500" b="0" u="none" strike="noStrike">
                 <a:solidFill>
                   <a:srgbClr val="1A2E2B"/>
                 </a:solidFill>
@@ -4920,18 +6931,18 @@
               </a:rPr>
               <a:t>(continuity)</a:t>
             </a:r>
-            <a:endParaRPr lang="en-US" sz="1800" b="0" u="none" strike="noStrike">
-              <a:solidFill>
-                <a:srgbClr val="000000"/>
-              </a:solidFill>
-              <a:effectLst/>
-              <a:uFillTx/>
-              <a:latin typeface="Arial"/>
-            </a:endParaRPr>
-          </a:p>
-          <a:p>
-            <a:r>
-              <a:rPr lang="en-US" sz="1800" b="0" u="none" strike="noStrike">
+            <a:endParaRPr lang="en-US" sz="1500" b="0" u="none" strike="noStrike">
+              <a:solidFill>
+                <a:srgbClr val="000000"/>
+              </a:solidFill>
+              <a:effectLst/>
+              <a:uFillTx/>
+              <a:latin typeface="Arial"/>
+            </a:endParaRPr>
+          </a:p>
+          <a:p>
+            <a:r>
+              <a:rPr lang="en-US" sz="1500" b="0" u="none" strike="noStrike">
                 <a:solidFill>
                   <a:srgbClr val="1A2E2B"/>
                 </a:solidFill>
@@ -4942,7 +6953,7 @@
               <a:t>• Tagline: «</a:t>
             </a:r>
             <a:r>
-              <a:rPr lang="hi-IN" sz="1800" b="0" u="none" strike="noStrike">
+              <a:rPr lang="hi-IN" sz="1500" b="0" u="none" strike="noStrike">
                 <a:solidFill>
                   <a:srgbClr val="1A2E2B"/>
                 </a:solidFill>
@@ -4953,7 +6964,7 @@
               <a:t>سجّل وانسَ — ديمومة مستمرة</a:t>
             </a:r>
             <a:r>
-              <a:rPr lang="en-US" sz="1800" b="0" u="none" strike="noStrike">
+              <a:rPr lang="en-US" sz="1500" b="0" u="none" strike="noStrike">
                 <a:solidFill>
                   <a:srgbClr val="1A2E2B"/>
                 </a:solidFill>
@@ -4963,18 +6974,18 @@
               </a:rPr>
               <a:t>»</a:t>
             </a:r>
-            <a:endParaRPr lang="en-US" sz="1800" b="0" u="none" strike="noStrike">
-              <a:solidFill>
-                <a:srgbClr val="000000"/>
-              </a:solidFill>
-              <a:effectLst/>
-              <a:uFillTx/>
-              <a:latin typeface="Arial"/>
-            </a:endParaRPr>
-          </a:p>
-          <a:p>
-            <a:r>
-              <a:rPr lang="en-US" sz="1800" b="0" u="none" strike="noStrike">
+            <a:endParaRPr lang="en-US" sz="1500" b="0" u="none" strike="noStrike">
+              <a:solidFill>
+                <a:srgbClr val="000000"/>
+              </a:solidFill>
+              <a:effectLst/>
+              <a:uFillTx/>
+              <a:latin typeface="Arial"/>
+            </a:endParaRPr>
+          </a:p>
+          <a:p>
+            <a:r>
+              <a:rPr lang="en-US" sz="1500" b="0" u="none" strike="noStrike">
                 <a:solidFill>
                   <a:srgbClr val="1A2E2B"/>
                 </a:solidFill>
@@ -4984,18 +6995,18 @@
               </a:rPr>
               <a:t>• Teal/gold palette, light + dark themes, approved logos</a:t>
             </a:r>
-            <a:endParaRPr lang="en-US" sz="1800" b="0" u="none" strike="noStrike">
-              <a:solidFill>
-                <a:srgbClr val="000000"/>
-              </a:solidFill>
-              <a:effectLst/>
-              <a:uFillTx/>
-              <a:latin typeface="Arial"/>
-            </a:endParaRPr>
-          </a:p>
-          <a:p>
-            <a:r>
-              <a:rPr lang="en-US" sz="1800" b="0" u="none" strike="noStrike">
+            <a:endParaRPr lang="en-US" sz="1500" b="0" u="none" strike="noStrike">
+              <a:solidFill>
+                <a:srgbClr val="000000"/>
+              </a:solidFill>
+              <a:effectLst/>
+              <a:uFillTx/>
+              <a:latin typeface="Arial"/>
+            </a:endParaRPr>
+          </a:p>
+          <a:p>
+            <a:r>
+              <a:rPr lang="en-US" sz="1500" b="0" u="none" strike="noStrike">
                 <a:solidFill>
                   <a:srgbClr val="1A2E2B"/>
                 </a:solidFill>
@@ -5005,17 +7016,41 @@
               </a:rPr>
               <a:t>• Full RTL Arabic — not a translation bolt-on</a:t>
             </a:r>
-            <a:endParaRPr lang="en-US" sz="1800" b="0" u="none" strike="noStrike">
-              <a:solidFill>
-                <a:srgbClr val="000000"/>
-              </a:solidFill>
-              <a:effectLst/>
-              <a:uFillTx/>
-              <a:latin typeface="Arial"/>
-            </a:endParaRPr>
-          </a:p>
-        </p:txBody>
-      </p:sp>
+            <a:endParaRPr lang="en-US" sz="1500" b="0" u="none" strike="noStrike">
+              <a:solidFill>
+                <a:srgbClr val="000000"/>
+              </a:solidFill>
+              <a:effectLst/>
+              <a:uFillTx/>
+              <a:latin typeface="Arial"/>
+            </a:endParaRPr>
+          </a:p>
+        </p:txBody>
+      </p:sp>
+      <p:pic>
+        <p:nvPicPr>
+          <p:cNvPr id="32" name=""/>
+          <p:cNvPicPr/>
+          <p:nvPr/>
+        </p:nvPicPr>
+        <p:blipFill>
+          <a:blip r:embed="rId1"/>
+          <a:stretch/>
+        </p:blipFill>
+        <p:spPr>
+          <a:xfrm>
+            <a:off x="5256000" y="1620000"/>
+            <a:ext cx="4536000" cy="1512000"/>
+          </a:xfrm>
+          <a:prstGeom prst="rect">
+            <a:avLst/>
+          </a:prstGeom>
+          <a:noFill/>
+          <a:ln w="0">
+            <a:noFill/>
+          </a:ln>
+        </p:spPr>
+      </p:pic>
     </p:spTree>
   </p:cSld>
   <mc:AlternateContent>
@@ -5032,6 +7067,13 @@
 <file path=ppt/slides/slide6.xml><?xml version="1.0" encoding="utf-8"?>
 <p:sld xmlns:a="http://schemas.openxmlformats.org/drawingml/2006/main" xmlns:p="http://schemas.openxmlformats.org/presentationml/2006/main" xmlns:r="http://schemas.openxmlformats.org/officeDocument/2006/relationships" xmlns:p14="http://schemas.microsoft.com/office/powerpoint/2010/main" xmlns:p15="http://schemas.microsoft.com/office/powerpoint/2012/main" xmlns:mc="http://schemas.openxmlformats.org/markup-compatibility/2006">
   <p:cSld>
+    <p:bg>
+      <p:bgPr>
+        <a:solidFill>
+          <a:srgbClr val="F4F8F5"/>
+        </a:solidFill>
+      </p:bgPr>
+    </p:bg>
     <p:spTree>
       <p:nvGrpSpPr>
         <p:cNvPr id="1" name=""/>
@@ -5048,14 +7090,14 @@
       </p:grpSpPr>
       <p:sp>
         <p:nvSpPr>
-          <p:cNvPr id="25" name=""/>
-          <p:cNvSpPr txBox="1"/>
-          <p:nvPr/>
-        </p:nvSpPr>
-        <p:spPr>
-          <a:xfrm>
-            <a:off x="540000" y="360000"/>
-            <a:ext cx="9000000" cy="1080000"/>
+          <p:cNvPr id="33" name=""/>
+          <p:cNvSpPr txBox="1"/>
+          <p:nvPr/>
+        </p:nvSpPr>
+        <p:spPr>
+          <a:xfrm>
+            <a:off x="540000" y="252000"/>
+            <a:ext cx="9000000" cy="504000"/>
           </a:xfrm>
           <a:prstGeom prst="rect">
             <a:avLst/>
@@ -5071,37 +7113,78 @@
           </a:bodyPr>
           <a:p>
             <a:r>
-              <a:rPr lang="en-US" sz="3200" b="1" u="none" strike="noStrike">
-                <a:solidFill>
-                  <a:srgbClr val="0F4C45"/>
-                </a:solidFill>
-                <a:effectLst/>
-                <a:uFillTx/>
-                <a:latin typeface="Arial"/>
-              </a:rPr>
-              <a:t>Live Demo</a:t>
-            </a:r>
-            <a:endParaRPr lang="en-US" sz="3200" b="0" u="none" strike="noStrike">
-              <a:solidFill>
-                <a:srgbClr val="000000"/>
-              </a:solidFill>
-              <a:effectLst/>
-              <a:uFillTx/>
-              <a:latin typeface="Arial"/>
-            </a:endParaRPr>
-          </a:p>
-        </p:txBody>
-      </p:sp>
-      <p:sp>
-        <p:nvSpPr>
-          <p:cNvPr id="26" name=""/>
-          <p:cNvSpPr txBox="1"/>
-          <p:nvPr/>
-        </p:nvSpPr>
-        <p:spPr>
-          <a:xfrm>
-            <a:off x="540000" y="1800000"/>
-            <a:ext cx="9000000" cy="5040000"/>
+              <a:rPr lang="en-US" sz="2600" b="1" u="none" strike="noStrike">
+                <a:solidFill>
+                  <a:srgbClr val="103E3A"/>
+                </a:solidFill>
+                <a:effectLst/>
+                <a:uFillTx/>
+                <a:latin typeface="Arial"/>
+              </a:rPr>
+              <a:t>Live &amp; Ready to Try</a:t>
+            </a:r>
+            <a:endParaRPr lang="en-US" sz="2600" b="0" u="none" strike="noStrike">
+              <a:solidFill>
+                <a:srgbClr val="000000"/>
+              </a:solidFill>
+              <a:effectLst/>
+              <a:uFillTx/>
+              <a:latin typeface="Arial"/>
+            </a:endParaRPr>
+          </a:p>
+        </p:txBody>
+      </p:sp>
+      <p:sp>
+        <p:nvSpPr>
+          <p:cNvPr id="34" name=""/>
+          <p:cNvSpPr txBox="1"/>
+          <p:nvPr/>
+        </p:nvSpPr>
+        <p:spPr>
+          <a:xfrm>
+            <a:off x="540000" y="774000"/>
+            <a:ext cx="1440000" cy="43200"/>
+          </a:xfrm>
+          <a:prstGeom prst="rect">
+            <a:avLst/>
+          </a:prstGeom>
+          <a:solidFill>
+            <a:srgbClr val="E6BF71"/>
+          </a:solidFill>
+          <a:ln w="0">
+            <a:noFill/>
+          </a:ln>
+        </p:spPr>
+        <p:txBody>
+          <a:bodyPr lIns="90000" tIns="-1800" rIns="90000" bIns="-1800" anchor="t">
+            <a:spAutoFit/>
+          </a:bodyPr>
+          <a:p>
+            <a:endParaRPr lang="en-US" sz="1800" b="0" u="none" strike="noStrike">
+              <a:solidFill>
+                <a:srgbClr val="000000"/>
+              </a:solidFill>
+              <a:effectLst/>
+              <a:uFillTx/>
+              <a:latin typeface="Arial"/>
+            </a:endParaRPr>
+          </a:p>
+        </p:txBody>
+      </p:sp>
+      <p:pic>
+        <p:nvPicPr>
+          <p:cNvPr id="35" name=""/>
+          <p:cNvPicPr/>
+          <p:nvPr/>
+        </p:nvPicPr>
+        <p:blipFill>
+          <a:blip r:embed="rId1"/>
+          <a:stretch/>
+        </p:blipFill>
+        <p:spPr>
+          <a:xfrm>
+            <a:off x="1814400" y="1008000"/>
+            <a:ext cx="6451200" cy="4032000"/>
           </a:xfrm>
           <a:prstGeom prst="rect">
             <a:avLst/>
@@ -5111,65 +7194,43 @@
             <a:noFill/>
           </a:ln>
         </p:spPr>
+      </p:pic>
+      <p:sp>
+        <p:nvSpPr>
+          <p:cNvPr id="36" name=""/>
+          <p:cNvSpPr txBox="1"/>
+          <p:nvPr/>
+        </p:nvSpPr>
+        <p:spPr>
+          <a:xfrm>
+            <a:off x="540000" y="5148000"/>
+            <a:ext cx="9000000" cy="360000"/>
+          </a:xfrm>
+          <a:prstGeom prst="rect">
+            <a:avLst/>
+          </a:prstGeom>
+          <a:noFill/>
+          <a:ln w="0">
+            <a:noFill/>
+          </a:ln>
+        </p:spPr>
         <p:txBody>
           <a:bodyPr lIns="90000" tIns="45000" rIns="90000" bIns="45000" anchor="t">
             <a:spAutoFit/>
           </a:bodyPr>
           <a:p>
             <a:r>
-              <a:rPr lang="en-US" sz="1800" b="0" u="none" strike="noStrike">
-                <a:solidFill>
-                  <a:srgbClr val="1A2E2B"/>
-                </a:solidFill>
-                <a:effectLst/>
-                <a:uFillTx/>
-                <a:latin typeface="Arial"/>
-              </a:rPr>
-              <a:t>• http://13.53.139.255:8380</a:t>
-            </a:r>
-            <a:endParaRPr lang="en-US" sz="1800" b="0" u="none" strike="noStrike">
-              <a:solidFill>
-                <a:srgbClr val="000000"/>
-              </a:solidFill>
-              <a:effectLst/>
-              <a:uFillTx/>
-              <a:latin typeface="Arial"/>
-            </a:endParaRPr>
-          </a:p>
-          <a:p>
-            <a:r>
-              <a:rPr lang="en-US" sz="1800" b="0" u="none" strike="noStrike">
-                <a:solidFill>
-                  <a:srgbClr val="1A2E2B"/>
-                </a:solidFill>
-                <a:effectLst/>
-                <a:uFillTx/>
-                <a:latin typeface="Arial"/>
-              </a:rPr>
-              <a:t>• Quick-login: Employee / Manager / HR — one click</a:t>
-            </a:r>
-            <a:endParaRPr lang="en-US" sz="1800" b="0" u="none" strike="noStrike">
-              <a:solidFill>
-                <a:srgbClr val="000000"/>
-              </a:solidFill>
-              <a:effectLst/>
-              <a:uFillTx/>
-              <a:latin typeface="Arial"/>
-            </a:endParaRPr>
-          </a:p>
-          <a:p>
-            <a:r>
-              <a:rPr lang="en-US" sz="1800" b="0" u="none" strike="noStrike">
-                <a:solidFill>
-                  <a:srgbClr val="1A2E2B"/>
-                </a:solidFill>
-                <a:effectLst/>
-                <a:uFillTx/>
-                <a:latin typeface="Arial"/>
-              </a:rPr>
-              <a:t>• Synthetic org: 16 people, 5 departments, 53 requests, 83 timesheets</a:t>
-            </a:r>
-            <a:endParaRPr lang="en-US" sz="1800" b="0" u="none" strike="noStrike">
+              <a:rPr lang="en-US" sz="1100" b="0" i="1" u="none" strike="noStrike">
+                <a:solidFill>
+                  <a:srgbClr val="4A7A6F"/>
+                </a:solidFill>
+                <a:effectLst/>
+                <a:uFillTx/>
+                <a:latin typeface="Arial"/>
+              </a:rPr>
+              <a:t>Quick-login panel: one click per role — no typing for judges.</a:t>
+            </a:r>
+            <a:endParaRPr lang="en-US" sz="1100" b="0" u="none" strike="noStrike">
               <a:solidFill>
                 <a:srgbClr val="000000"/>
               </a:solidFill>
@@ -5196,6 +7257,13 @@
 <file path=ppt/slides/slide7.xml><?xml version="1.0" encoding="utf-8"?>
 <p:sld xmlns:a="http://schemas.openxmlformats.org/drawingml/2006/main" xmlns:p="http://schemas.openxmlformats.org/presentationml/2006/main" xmlns:r="http://schemas.openxmlformats.org/officeDocument/2006/relationships" xmlns:p14="http://schemas.microsoft.com/office/powerpoint/2010/main" xmlns:p15="http://schemas.microsoft.com/office/powerpoint/2012/main" xmlns:mc="http://schemas.openxmlformats.org/markup-compatibility/2006">
   <p:cSld>
+    <p:bg>
+      <p:bgPr>
+        <a:solidFill>
+          <a:srgbClr val="F4F8F5"/>
+        </a:solidFill>
+      </p:bgPr>
+    </p:bg>
     <p:spTree>
       <p:nvGrpSpPr>
         <p:cNvPr id="1" name=""/>
@@ -5212,14 +7280,14 @@
       </p:grpSpPr>
       <p:sp>
         <p:nvSpPr>
-          <p:cNvPr id="27" name=""/>
-          <p:cNvSpPr txBox="1"/>
-          <p:nvPr/>
-        </p:nvSpPr>
-        <p:spPr>
-          <a:xfrm>
-            <a:off x="540000" y="360000"/>
-            <a:ext cx="9000000" cy="1080000"/>
+          <p:cNvPr id="37" name=""/>
+          <p:cNvSpPr txBox="1"/>
+          <p:nvPr/>
+        </p:nvSpPr>
+        <p:spPr>
+          <a:xfrm>
+            <a:off x="540000" y="252000"/>
+            <a:ext cx="9000000" cy="504000"/>
           </a:xfrm>
           <a:prstGeom prst="rect">
             <a:avLst/>
@@ -5235,37 +7303,78 @@
           </a:bodyPr>
           <a:p>
             <a:r>
-              <a:rPr lang="en-US" sz="3200" b="1" u="none" strike="noStrike">
-                <a:solidFill>
-                  <a:srgbClr val="0F4C45"/>
-                </a:solidFill>
-                <a:effectLst/>
-                <a:uFillTx/>
-                <a:latin typeface="Arial"/>
-              </a:rPr>
-              <a:t>Requests</a:t>
-            </a:r>
-            <a:endParaRPr lang="en-US" sz="3200" b="0" u="none" strike="noStrike">
-              <a:solidFill>
-                <a:srgbClr val="000000"/>
-              </a:solidFill>
-              <a:effectLst/>
-              <a:uFillTx/>
-              <a:latin typeface="Arial"/>
-            </a:endParaRPr>
-          </a:p>
-        </p:txBody>
-      </p:sp>
-      <p:sp>
-        <p:nvSpPr>
-          <p:cNvPr id="28" name=""/>
-          <p:cNvSpPr txBox="1"/>
-          <p:nvPr/>
-        </p:nvSpPr>
-        <p:spPr>
-          <a:xfrm>
-            <a:off x="540000" y="1800000"/>
-            <a:ext cx="9000000" cy="5040000"/>
+              <a:rPr lang="en-US" sz="2600" b="1" u="none" strike="noStrike">
+                <a:solidFill>
+                  <a:srgbClr val="103E3A"/>
+                </a:solidFill>
+                <a:effectLst/>
+                <a:uFillTx/>
+                <a:latin typeface="Arial"/>
+              </a:rPr>
+              <a:t>Requests — Every State Visible</a:t>
+            </a:r>
+            <a:endParaRPr lang="en-US" sz="2600" b="0" u="none" strike="noStrike">
+              <a:solidFill>
+                <a:srgbClr val="000000"/>
+              </a:solidFill>
+              <a:effectLst/>
+              <a:uFillTx/>
+              <a:latin typeface="Arial"/>
+            </a:endParaRPr>
+          </a:p>
+        </p:txBody>
+      </p:sp>
+      <p:sp>
+        <p:nvSpPr>
+          <p:cNvPr id="38" name=""/>
+          <p:cNvSpPr txBox="1"/>
+          <p:nvPr/>
+        </p:nvSpPr>
+        <p:spPr>
+          <a:xfrm>
+            <a:off x="540000" y="774000"/>
+            <a:ext cx="1440000" cy="43200"/>
+          </a:xfrm>
+          <a:prstGeom prst="rect">
+            <a:avLst/>
+          </a:prstGeom>
+          <a:solidFill>
+            <a:srgbClr val="E6BF71"/>
+          </a:solidFill>
+          <a:ln w="0">
+            <a:noFill/>
+          </a:ln>
+        </p:spPr>
+        <p:txBody>
+          <a:bodyPr lIns="90000" tIns="-1800" rIns="90000" bIns="-1800" anchor="t">
+            <a:spAutoFit/>
+          </a:bodyPr>
+          <a:p>
+            <a:endParaRPr lang="en-US" sz="1800" b="0" u="none" strike="noStrike">
+              <a:solidFill>
+                <a:srgbClr val="000000"/>
+              </a:solidFill>
+              <a:effectLst/>
+              <a:uFillTx/>
+              <a:latin typeface="Arial"/>
+            </a:endParaRPr>
+          </a:p>
+        </p:txBody>
+      </p:sp>
+      <p:pic>
+        <p:nvPicPr>
+          <p:cNvPr id="39" name=""/>
+          <p:cNvPicPr/>
+          <p:nvPr/>
+        </p:nvPicPr>
+        <p:blipFill>
+          <a:blip r:embed="rId1"/>
+          <a:stretch/>
+        </p:blipFill>
+        <p:spPr>
+          <a:xfrm>
+            <a:off x="1814400" y="1008000"/>
+            <a:ext cx="6451200" cy="4032000"/>
           </a:xfrm>
           <a:prstGeom prst="rect">
             <a:avLst/>
@@ -5275,86 +7384,43 @@
             <a:noFill/>
           </a:ln>
         </p:spPr>
+      </p:pic>
+      <p:sp>
+        <p:nvSpPr>
+          <p:cNvPr id="40" name=""/>
+          <p:cNvSpPr txBox="1"/>
+          <p:nvPr/>
+        </p:nvSpPr>
+        <p:spPr>
+          <a:xfrm>
+            <a:off x="540000" y="5148000"/>
+            <a:ext cx="9000000" cy="360000"/>
+          </a:xfrm>
+          <a:prstGeom prst="rect">
+            <a:avLst/>
+          </a:prstGeom>
+          <a:noFill/>
+          <a:ln w="0">
+            <a:noFill/>
+          </a:ln>
+        </p:spPr>
         <p:txBody>
           <a:bodyPr lIns="90000" tIns="45000" rIns="90000" bIns="45000" anchor="t">
             <a:spAutoFit/>
           </a:bodyPr>
           <a:p>
             <a:r>
-              <a:rPr lang="en-US" sz="1800" b="0" u="none" strike="noStrike">
-                <a:solidFill>
-                  <a:srgbClr val="1A2E2B"/>
-                </a:solidFill>
-                <a:effectLst/>
-                <a:uFillTx/>
-                <a:latin typeface="Arial"/>
-              </a:rPr>
-              <a:t>• 6 types: leave, work-from-home, equipment, HR service, general, early leave</a:t>
-            </a:r>
-            <a:endParaRPr lang="en-US" sz="1800" b="0" u="none" strike="noStrike">
-              <a:solidFill>
-                <a:srgbClr val="000000"/>
-              </a:solidFill>
-              <a:effectLst/>
-              <a:uFillTx/>
-              <a:latin typeface="Arial"/>
-            </a:endParaRPr>
-          </a:p>
-          <a:p>
-            <a:r>
-              <a:rPr lang="en-US" sz="1800" b="0" u="none" strike="noStrike">
-                <a:solidFill>
-                  <a:srgbClr val="1A2E2B"/>
-                </a:solidFill>
-                <a:effectLst/>
-                <a:uFillTx/>
-                <a:latin typeface="Arial"/>
-              </a:rPr>
-              <a:t>• Lifecycle: draft → pending → approved / returned / rejected → resubmit</a:t>
-            </a:r>
-            <a:endParaRPr lang="en-US" sz="1800" b="0" u="none" strike="noStrike">
-              <a:solidFill>
-                <a:srgbClr val="000000"/>
-              </a:solidFill>
-              <a:effectLst/>
-              <a:uFillTx/>
-              <a:latin typeface="Arial"/>
-            </a:endParaRPr>
-          </a:p>
-          <a:p>
-            <a:r>
-              <a:rPr lang="en-US" sz="1800" b="0" u="none" strike="noStrike">
-                <a:solidFill>
-                  <a:srgbClr val="1A2E2B"/>
-                </a:solidFill>
-                <a:effectLst/>
-                <a:uFillTx/>
-                <a:latin typeface="Arial"/>
-              </a:rPr>
-              <a:t>• Manager-first routing; HR stage only when the type requires it</a:t>
-            </a:r>
-            <a:endParaRPr lang="en-US" sz="1800" b="0" u="none" strike="noStrike">
-              <a:solidFill>
-                <a:srgbClr val="000000"/>
-              </a:solidFill>
-              <a:effectLst/>
-              <a:uFillTx/>
-              <a:latin typeface="Arial"/>
-            </a:endParaRPr>
-          </a:p>
-          <a:p>
-            <a:r>
-              <a:rPr lang="en-US" sz="1800" b="0" u="none" strike="noStrike">
-                <a:solidFill>
-                  <a:srgbClr val="1A2E2B"/>
-                </a:solidFill>
-                <a:effectLst/>
-                <a:uFillTx/>
-                <a:latin typeface="Arial"/>
-              </a:rPr>
-              <a:t>• No self-approval; HR fallback when no eligible manager exists</a:t>
-            </a:r>
-            <a:endParaRPr lang="en-US" sz="1800" b="0" u="none" strike="noStrike">
+              <a:rPr lang="en-US" sz="1100" b="0" i="1" u="none" strike="noStrike">
+                <a:solidFill>
+                  <a:srgbClr val="4A7A6F"/>
+                </a:solidFill>
+                <a:effectLst/>
+                <a:uFillTx/>
+                <a:latin typeface="Arial"/>
+              </a:rPr>
+              <a:t>Status badges, filters, "Only mine" toggle, bulk draft cleanup.</a:t>
+            </a:r>
+            <a:endParaRPr lang="en-US" sz="1100" b="0" u="none" strike="noStrike">
               <a:solidFill>
                 <a:srgbClr val="000000"/>
               </a:solidFill>
@@ -5381,6 +7447,13 @@
 <file path=ppt/slides/slide8.xml><?xml version="1.0" encoding="utf-8"?>
 <p:sld xmlns:a="http://schemas.openxmlformats.org/drawingml/2006/main" xmlns:p="http://schemas.openxmlformats.org/presentationml/2006/main" xmlns:r="http://schemas.openxmlformats.org/officeDocument/2006/relationships" xmlns:p14="http://schemas.microsoft.com/office/powerpoint/2010/main" xmlns:p15="http://schemas.microsoft.com/office/powerpoint/2012/main" xmlns:mc="http://schemas.openxmlformats.org/markup-compatibility/2006">
   <p:cSld>
+    <p:bg>
+      <p:bgPr>
+        <a:solidFill>
+          <a:srgbClr val="F4F8F5"/>
+        </a:solidFill>
+      </p:bgPr>
+    </p:bg>
     <p:spTree>
       <p:nvGrpSpPr>
         <p:cNvPr id="1" name=""/>
@@ -5397,14 +7470,14 @@
       </p:grpSpPr>
       <p:sp>
         <p:nvSpPr>
-          <p:cNvPr id="29" name=""/>
-          <p:cNvSpPr txBox="1"/>
-          <p:nvPr/>
-        </p:nvSpPr>
-        <p:spPr>
-          <a:xfrm>
-            <a:off x="540000" y="360000"/>
-            <a:ext cx="9000000" cy="1080000"/>
+          <p:cNvPr id="41" name=""/>
+          <p:cNvSpPr txBox="1"/>
+          <p:nvPr/>
+        </p:nvSpPr>
+        <p:spPr>
+          <a:xfrm>
+            <a:off x="540000" y="252000"/>
+            <a:ext cx="9000000" cy="504000"/>
           </a:xfrm>
           <a:prstGeom prst="rect">
             <a:avLst/>
@@ -5420,37 +7493,78 @@
           </a:bodyPr>
           <a:p>
             <a:r>
-              <a:rPr lang="en-US" sz="3200" b="1" u="none" strike="noStrike">
-                <a:solidFill>
-                  <a:srgbClr val="0F4C45"/>
-                </a:solidFill>
-                <a:effectLst/>
-                <a:uFillTx/>
-                <a:latin typeface="Arial"/>
-              </a:rPr>
-              <a:t>Allocations</a:t>
-            </a:r>
-            <a:endParaRPr lang="en-US" sz="3200" b="0" u="none" strike="noStrike">
-              <a:solidFill>
-                <a:srgbClr val="000000"/>
-              </a:solidFill>
-              <a:effectLst/>
-              <a:uFillTx/>
-              <a:latin typeface="Arial"/>
-            </a:endParaRPr>
-          </a:p>
-        </p:txBody>
-      </p:sp>
-      <p:sp>
-        <p:nvSpPr>
-          <p:cNvPr id="30" name=""/>
-          <p:cNvSpPr txBox="1"/>
-          <p:nvPr/>
-        </p:nvSpPr>
-        <p:spPr>
-          <a:xfrm>
-            <a:off x="540000" y="1800000"/>
-            <a:ext cx="9000000" cy="5040000"/>
+              <a:rPr lang="en-US" sz="2600" b="1" u="none" strike="noStrike">
+                <a:solidFill>
+                  <a:srgbClr val="103E3A"/>
+                </a:solidFill>
+                <a:effectLst/>
+                <a:uFillTx/>
+                <a:latin typeface="Arial"/>
+              </a:rPr>
+              <a:t>New Request</a:t>
+            </a:r>
+            <a:endParaRPr lang="en-US" sz="2600" b="0" u="none" strike="noStrike">
+              <a:solidFill>
+                <a:srgbClr val="000000"/>
+              </a:solidFill>
+              <a:effectLst/>
+              <a:uFillTx/>
+              <a:latin typeface="Arial"/>
+            </a:endParaRPr>
+          </a:p>
+        </p:txBody>
+      </p:sp>
+      <p:sp>
+        <p:nvSpPr>
+          <p:cNvPr id="42" name=""/>
+          <p:cNvSpPr txBox="1"/>
+          <p:nvPr/>
+        </p:nvSpPr>
+        <p:spPr>
+          <a:xfrm>
+            <a:off x="540000" y="774000"/>
+            <a:ext cx="1440000" cy="43200"/>
+          </a:xfrm>
+          <a:prstGeom prst="rect">
+            <a:avLst/>
+          </a:prstGeom>
+          <a:solidFill>
+            <a:srgbClr val="E6BF71"/>
+          </a:solidFill>
+          <a:ln w="0">
+            <a:noFill/>
+          </a:ln>
+        </p:spPr>
+        <p:txBody>
+          <a:bodyPr lIns="90000" tIns="-1800" rIns="90000" bIns="-1800" anchor="t">
+            <a:spAutoFit/>
+          </a:bodyPr>
+          <a:p>
+            <a:endParaRPr lang="en-US" sz="1800" b="0" u="none" strike="noStrike">
+              <a:solidFill>
+                <a:srgbClr val="000000"/>
+              </a:solidFill>
+              <a:effectLst/>
+              <a:uFillTx/>
+              <a:latin typeface="Arial"/>
+            </a:endParaRPr>
+          </a:p>
+        </p:txBody>
+      </p:sp>
+      <p:pic>
+        <p:nvPicPr>
+          <p:cNvPr id="43" name=""/>
+          <p:cNvPicPr/>
+          <p:nvPr/>
+        </p:nvPicPr>
+        <p:blipFill>
+          <a:blip r:embed="rId1"/>
+          <a:stretch/>
+        </p:blipFill>
+        <p:spPr>
+          <a:xfrm>
+            <a:off x="1814400" y="1008000"/>
+            <a:ext cx="6451200" cy="4032000"/>
           </a:xfrm>
           <a:prstGeom prst="rect">
             <a:avLst/>
@@ -5460,86 +7574,43 @@
             <a:noFill/>
           </a:ln>
         </p:spPr>
+      </p:pic>
+      <p:sp>
+        <p:nvSpPr>
+          <p:cNvPr id="44" name=""/>
+          <p:cNvSpPr txBox="1"/>
+          <p:nvPr/>
+        </p:nvSpPr>
+        <p:spPr>
+          <a:xfrm>
+            <a:off x="540000" y="5148000"/>
+            <a:ext cx="9000000" cy="360000"/>
+          </a:xfrm>
+          <a:prstGeom prst="rect">
+            <a:avLst/>
+          </a:prstGeom>
+          <a:noFill/>
+          <a:ln w="0">
+            <a:noFill/>
+          </a:ln>
+        </p:spPr>
         <p:txBody>
           <a:bodyPr lIns="90000" tIns="45000" rIns="90000" bIns="45000" anchor="t">
             <a:spAutoFit/>
           </a:bodyPr>
           <a:p>
             <a:r>
-              <a:rPr lang="en-US" sz="1800" b="0" u="none" strike="noStrike">
-                <a:solidFill>
-                  <a:srgbClr val="1A2E2B"/>
-                </a:solidFill>
-                <a:effectLst/>
-                <a:uFillTx/>
-                <a:latin typeface="Arial"/>
-              </a:rPr>
-              <a:t>• HR grants dated allowances per employee per request type</a:t>
-            </a:r>
-            <a:endParaRPr lang="en-US" sz="1800" b="0" u="none" strike="noStrike">
-              <a:solidFill>
-                <a:srgbClr val="000000"/>
-              </a:solidFill>
-              <a:effectLst/>
-              <a:uFillTx/>
-              <a:latin typeface="Arial"/>
-            </a:endParaRPr>
-          </a:p>
-          <a:p>
-            <a:r>
-              <a:rPr lang="en-US" sz="1800" b="0" u="none" strike="noStrike">
-                <a:solidFill>
-                  <a:srgbClr val="1A2E2B"/>
-                </a:solidFill>
-                <a:effectLst/>
-                <a:uFillTx/>
-                <a:latin typeface="Arial"/>
-              </a:rPr>
-              <a:t>• Reserve on submit → release on return/reject → settle on approve</a:t>
-            </a:r>
-            <a:endParaRPr lang="en-US" sz="1800" b="0" u="none" strike="noStrike">
-              <a:solidFill>
-                <a:srgbClr val="000000"/>
-              </a:solidFill>
-              <a:effectLst/>
-              <a:uFillTx/>
-              <a:latin typeface="Arial"/>
-            </a:endParaRPr>
-          </a:p>
-          <a:p>
-            <a:r>
-              <a:rPr lang="en-US" sz="1800" b="0" u="none" strike="noStrike">
-                <a:solidFill>
-                  <a:srgbClr val="1A2E2B"/>
-                </a:solidFill>
-                <a:effectLst/>
-                <a:uFillTx/>
-                <a:latin typeface="Arial"/>
-              </a:rPr>
-              <a:t>• Balances always reconcile; no overlapping grants</a:t>
-            </a:r>
-            <a:endParaRPr lang="en-US" sz="1800" b="0" u="none" strike="noStrike">
-              <a:solidFill>
-                <a:srgbClr val="000000"/>
-              </a:solidFill>
-              <a:effectLst/>
-              <a:uFillTx/>
-              <a:latin typeface="Arial"/>
-            </a:endParaRPr>
-          </a:p>
-          <a:p>
-            <a:r>
-              <a:rPr lang="en-US" sz="1800" b="0" u="none" strike="noStrike">
-                <a:solidFill>
-                  <a:srgbClr val="1A2E2B"/>
-                </a:solidFill>
-                <a:effectLst/>
-                <a:uFillTx/>
-                <a:latin typeface="Arial"/>
-              </a:rPr>
-              <a:t>• Early-leave billing: 15-minute blocks, 30-minute minimum</a:t>
-            </a:r>
-            <a:endParaRPr lang="en-US" sz="1800" b="0" u="none" strike="noStrike">
+              <a:rPr lang="en-US" sz="1100" b="0" i="1" u="none" strike="noStrike">
+                <a:solidFill>
+                  <a:srgbClr val="4A7A6F"/>
+                </a:solidFill>
+                <a:effectLst/>
+                <a:uFillTx/>
+                <a:latin typeface="Arial"/>
+              </a:rPr>
+              <a:t>Type-aware fields: dates, quantity, or same-day times for early leave.</a:t>
+            </a:r>
+            <a:endParaRPr lang="en-US" sz="1100" b="0" u="none" strike="noStrike">
               <a:solidFill>
                 <a:srgbClr val="000000"/>
               </a:solidFill>
@@ -5566,6 +7637,13 @@
 <file path=ppt/slides/slide9.xml><?xml version="1.0" encoding="utf-8"?>
 <p:sld xmlns:a="http://schemas.openxmlformats.org/drawingml/2006/main" xmlns:p="http://schemas.openxmlformats.org/presentationml/2006/main" xmlns:r="http://schemas.openxmlformats.org/officeDocument/2006/relationships" xmlns:p14="http://schemas.microsoft.com/office/powerpoint/2010/main" xmlns:p15="http://schemas.microsoft.com/office/powerpoint/2012/main" xmlns:mc="http://schemas.openxmlformats.org/markup-compatibility/2006">
   <p:cSld>
+    <p:bg>
+      <p:bgPr>
+        <a:solidFill>
+          <a:srgbClr val="F4F8F5"/>
+        </a:solidFill>
+      </p:bgPr>
+    </p:bg>
     <p:spTree>
       <p:nvGrpSpPr>
         <p:cNvPr id="1" name=""/>
@@ -5582,14 +7660,14 @@
       </p:grpSpPr>
       <p:sp>
         <p:nvSpPr>
-          <p:cNvPr id="31" name=""/>
-          <p:cNvSpPr txBox="1"/>
-          <p:nvPr/>
-        </p:nvSpPr>
-        <p:spPr>
-          <a:xfrm>
-            <a:off x="540000" y="360000"/>
-            <a:ext cx="9000000" cy="1080000"/>
+          <p:cNvPr id="45" name=""/>
+          <p:cNvSpPr txBox="1"/>
+          <p:nvPr/>
+        </p:nvSpPr>
+        <p:spPr>
+          <a:xfrm>
+            <a:off x="540000" y="324000"/>
+            <a:ext cx="9000000" cy="576000"/>
           </a:xfrm>
           <a:prstGeom prst="rect">
             <a:avLst/>
@@ -5605,37 +7683,74 @@
           </a:bodyPr>
           <a:p>
             <a:r>
-              <a:rPr lang="en-US" sz="3200" b="1" u="none" strike="noStrike">
-                <a:solidFill>
-                  <a:srgbClr val="0F4C45"/>
-                </a:solidFill>
-                <a:effectLst/>
-                <a:uFillTx/>
-                <a:latin typeface="Arial"/>
-              </a:rPr>
-              <a:t>Timesheets</a:t>
-            </a:r>
-            <a:endParaRPr lang="en-US" sz="3200" b="0" u="none" strike="noStrike">
-              <a:solidFill>
-                <a:srgbClr val="000000"/>
-              </a:solidFill>
-              <a:effectLst/>
-              <a:uFillTx/>
-              <a:latin typeface="Arial"/>
-            </a:endParaRPr>
-          </a:p>
-        </p:txBody>
-      </p:sp>
-      <p:sp>
-        <p:nvSpPr>
-          <p:cNvPr id="32" name=""/>
-          <p:cNvSpPr txBox="1"/>
-          <p:nvPr/>
-        </p:nvSpPr>
-        <p:spPr>
-          <a:xfrm>
-            <a:off x="540000" y="1800000"/>
-            <a:ext cx="9000000" cy="5040000"/>
+              <a:rPr lang="en-US" sz="2600" b="1" u="none" strike="noStrike">
+                <a:solidFill>
+                  <a:srgbClr val="103E3A"/>
+                </a:solidFill>
+                <a:effectLst/>
+                <a:uFillTx/>
+                <a:latin typeface="Arial"/>
+              </a:rPr>
+              <a:t>Allocations — Controlled Allowances</a:t>
+            </a:r>
+            <a:endParaRPr lang="en-US" sz="2600" b="0" u="none" strike="noStrike">
+              <a:solidFill>
+                <a:srgbClr val="000000"/>
+              </a:solidFill>
+              <a:effectLst/>
+              <a:uFillTx/>
+              <a:latin typeface="Arial"/>
+            </a:endParaRPr>
+          </a:p>
+        </p:txBody>
+      </p:sp>
+      <p:sp>
+        <p:nvSpPr>
+          <p:cNvPr id="46" name=""/>
+          <p:cNvSpPr txBox="1"/>
+          <p:nvPr/>
+        </p:nvSpPr>
+        <p:spPr>
+          <a:xfrm>
+            <a:off x="540000" y="900000"/>
+            <a:ext cx="1440000" cy="43200"/>
+          </a:xfrm>
+          <a:prstGeom prst="rect">
+            <a:avLst/>
+          </a:prstGeom>
+          <a:solidFill>
+            <a:srgbClr val="E6BF71"/>
+          </a:solidFill>
+          <a:ln w="0">
+            <a:noFill/>
+          </a:ln>
+        </p:spPr>
+        <p:txBody>
+          <a:bodyPr lIns="90000" tIns="-1800" rIns="90000" bIns="-1800" anchor="t">
+            <a:spAutoFit/>
+          </a:bodyPr>
+          <a:p>
+            <a:endParaRPr lang="en-US" sz="1800" b="0" u="none" strike="noStrike">
+              <a:solidFill>
+                <a:srgbClr val="000000"/>
+              </a:solidFill>
+              <a:effectLst/>
+              <a:uFillTx/>
+              <a:latin typeface="Arial"/>
+            </a:endParaRPr>
+          </a:p>
+        </p:txBody>
+      </p:sp>
+      <p:sp>
+        <p:nvSpPr>
+          <p:cNvPr id="47" name=""/>
+          <p:cNvSpPr txBox="1"/>
+          <p:nvPr/>
+        </p:nvSpPr>
+        <p:spPr>
+          <a:xfrm>
+            <a:off x="540000" y="1152000"/>
+            <a:ext cx="9000000" cy="3960000"/>
           </a:xfrm>
           <a:prstGeom prst="rect">
             <a:avLst/>
@@ -5651,7 +7766,7 @@
           </a:bodyPr>
           <a:p>
             <a:r>
-              <a:rPr lang="en-US" sz="1800" b="0" u="none" strike="noStrike">
+              <a:rPr lang="en-US" sz="1500" b="0" u="none" strike="noStrike">
                 <a:solidFill>
                   <a:srgbClr val="1A2E2B"/>
                 </a:solidFill>
@@ -5659,20 +7774,20 @@
                 <a:uFillTx/>
                 <a:latin typeface="Arial"/>
               </a:rPr>
-              <a:t>• Weekly sheet, per-day submission; compact week-grid view</a:t>
-            </a:r>
-            <a:endParaRPr lang="en-US" sz="1800" b="0" u="none" strike="noStrike">
-              <a:solidFill>
-                <a:srgbClr val="000000"/>
-              </a:solidFill>
-              <a:effectLst/>
-              <a:uFillTx/>
-              <a:latin typeface="Arial"/>
-            </a:endParaRPr>
-          </a:p>
-          <a:p>
-            <a:r>
-              <a:rPr lang="en-US" sz="1800" b="0" u="none" strike="noStrike">
+              <a:t>• HR grants dated allowances per employee per request type</a:t>
+            </a:r>
+            <a:endParaRPr lang="en-US" sz="1500" b="0" u="none" strike="noStrike">
+              <a:solidFill>
+                <a:srgbClr val="000000"/>
+              </a:solidFill>
+              <a:effectLst/>
+              <a:uFillTx/>
+              <a:latin typeface="Arial"/>
+            </a:endParaRPr>
+          </a:p>
+          <a:p>
+            <a:r>
+              <a:rPr lang="en-US" sz="1500" b="0" u="none" strike="noStrike">
                 <a:solidFill>
                   <a:srgbClr val="1A2E2B"/>
                 </a:solidFill>
@@ -5680,20 +7795,20 @@
                 <a:uFillTx/>
                 <a:latin typeface="Arial"/>
               </a:rPr>
-              <a:t>• Start/end + unpaid breaks, overnight split, no future work</a:t>
-            </a:r>
-            <a:endParaRPr lang="en-US" sz="1800" b="0" u="none" strike="noStrike">
-              <a:solidFill>
-                <a:srgbClr val="000000"/>
-              </a:solidFill>
-              <a:effectLst/>
-              <a:uFillTx/>
-              <a:latin typeface="Arial"/>
-            </a:endParaRPr>
-          </a:p>
-          <a:p>
-            <a:r>
-              <a:rPr lang="en-US" sz="1800" b="0" u="none" strike="noStrike">
+              <a:t>• Reserve on submit → release on return/reject → settle on approve</a:t>
+            </a:r>
+            <a:endParaRPr lang="en-US" sz="1500" b="0" u="none" strike="noStrike">
+              <a:solidFill>
+                <a:srgbClr val="000000"/>
+              </a:solidFill>
+              <a:effectLst/>
+              <a:uFillTx/>
+              <a:latin typeface="Arial"/>
+            </a:endParaRPr>
+          </a:p>
+          <a:p>
+            <a:r>
+              <a:rPr lang="en-US" sz="1500" b="0" u="none" strike="noStrike">
                 <a:solidFill>
                   <a:srgbClr val="1A2E2B"/>
                 </a:solidFill>
@@ -5701,20 +7816,20 @@
                 <a:uFillTx/>
                 <a:latin typeface="Arial"/>
               </a:rPr>
-              <a:t>• Outside-window entries flagged — reason required</a:t>
-            </a:r>
-            <a:endParaRPr lang="en-US" sz="1800" b="0" u="none" strike="noStrike">
-              <a:solidFill>
-                <a:srgbClr val="000000"/>
-              </a:solidFill>
-              <a:effectLst/>
-              <a:uFillTx/>
-              <a:latin typeface="Arial"/>
-            </a:endParaRPr>
-          </a:p>
-          <a:p>
-            <a:r>
-              <a:rPr lang="en-US" sz="1800" b="0" u="none" strike="noStrike">
+              <a:t>• Balances always reconcile; no overlapping grants</a:t>
+            </a:r>
+            <a:endParaRPr lang="en-US" sz="1500" b="0" u="none" strike="noStrike">
+              <a:solidFill>
+                <a:srgbClr val="000000"/>
+              </a:solidFill>
+              <a:effectLst/>
+              <a:uFillTx/>
+              <a:latin typeface="Arial"/>
+            </a:endParaRPr>
+          </a:p>
+          <a:p>
+            <a:r>
+              <a:rPr lang="en-US" sz="1500" b="0" u="none" strike="noStrike">
                 <a:solidFill>
                   <a:srgbClr val="1A2E2B"/>
                 </a:solidFill>
@@ -5722,30 +7837,9 @@
                 <a:uFillTx/>
                 <a:latin typeface="Arial"/>
               </a:rPr>
-              <a:t>• Always two-stage review: manager → HR; HR-only reopen</a:t>
-            </a:r>
-            <a:endParaRPr lang="en-US" sz="1800" b="0" u="none" strike="noStrike">
-              <a:solidFill>
-                <a:srgbClr val="000000"/>
-              </a:solidFill>
-              <a:effectLst/>
-              <a:uFillTx/>
-              <a:latin typeface="Arial"/>
-            </a:endParaRPr>
-          </a:p>
-          <a:p>
-            <a:r>
-              <a:rPr lang="en-US" sz="1800" b="0" u="none" strike="noStrike">
-                <a:solidFill>
-                  <a:srgbClr val="1A2E2B"/>
-                </a:solidFill>
-                <a:effectLst/>
-                <a:uFillTx/>
-                <a:latin typeface="Arial"/>
-              </a:rPr>
-              <a:t>• Punch widget: real check-in/out from the topbar</a:t>
-            </a:r>
-            <a:endParaRPr lang="en-US" sz="1800" b="0" u="none" strike="noStrike">
+              <a:t>• Early-leave billing: 15-minute blocks, 30-minute minimum</a:t>
+            </a:r>
+            <a:endParaRPr lang="en-US" sz="1500" b="0" u="none" strike="noStrike">
               <a:solidFill>
                 <a:srgbClr val="000000"/>
               </a:solidFill>

--- a/docs/presentation/Daimoma-presentation.pptx
+++ b/docs/presentation/Daimoma-presentation.pptx
@@ -31,6 +31,11 @@
     <p:sldId id="276" r:id="rId24"/>
     <p:sldId id="277" r:id="rId25"/>
     <p:sldId id="278" r:id="rId26"/>
+    <p:sldId id="279" r:id="rId27"/>
+    <p:sldId id="280" r:id="rId28"/>
+    <p:sldId id="281" r:id="rId29"/>
+    <p:sldId id="282" r:id="rId30"/>
+    <p:sldId id="283" r:id="rId31"/>
   </p:sldIdLst>
   <p:sldSz cx="10080625" cy="5670550"/>
   <p:notesSz cx="7559675" cy="10691813"/>
@@ -387,7 +392,7 @@
             <a:pPr indent="0" algn="r">
               <a:buNone/>
             </a:pPr>
-            <a:fld id="{983AB018-7D72-46A8-91C8-CC34C84ECC0F}" type="slidenum">
+            <a:fld id="{B92E7D73-8602-478B-9388-E2FEB5F032AA}" type="slidenum">
               <a:rPr lang="en-US" sz="1400" b="0" u="none" strike="noStrike">
                 <a:solidFill>
                   <a:srgbClr val="000000"/>
@@ -434,7 +439,7 @@
       </p:grpSpPr>
       <p:sp>
         <p:nvSpPr>
-          <p:cNvPr id="95" name=""/>
+          <p:cNvPr id="194" name=""/>
           <p:cNvSpPr txBox="1"/>
           <p:nvPr/>
         </p:nvSpPr>
@@ -561,7 +566,7 @@
       </p:grpSpPr>
       <p:sp>
         <p:nvSpPr>
-          <p:cNvPr id="104" name=""/>
+          <p:cNvPr id="203" name=""/>
           <p:cNvSpPr txBox="1"/>
           <p:nvPr/>
         </p:nvSpPr>
@@ -596,7 +601,7 @@
                 <a:uFillTx/>
                 <a:latin typeface="Arial"/>
               </a:rPr>
-              <a:t>D-005 decisions — all recorded.</a:t>
+              <a:t>Feature 008 — a full spec on its own.</a:t>
             </a:r>
             <a:endParaRPr lang="en-US" sz="1200" b="0" u="none" strike="noStrike">
               <a:solidFill>
@@ -633,7 +638,7 @@
       </p:grpSpPr>
       <p:sp>
         <p:nvSpPr>
-          <p:cNvPr id="105" name=""/>
+          <p:cNvPr id="204" name=""/>
           <p:cNvSpPr txBox="1"/>
           <p:nvPr/>
         </p:nvSpPr>
@@ -668,7 +673,7 @@
                 <a:uFillTx/>
                 <a:latin typeface="Arial"/>
               </a:rPr>
-              <a:t>Redesigned from stacked cards to this grid after live user feedback.</a:t>
+              <a:t>Expired grants keep history while pending reservations stay reserved.</a:t>
             </a:r>
             <a:endParaRPr lang="en-US" sz="1200" b="0" u="none" strike="noStrike">
               <a:solidFill>
@@ -705,7 +710,7 @@
       </p:grpSpPr>
       <p:sp>
         <p:nvSpPr>
-          <p:cNvPr id="106" name=""/>
+          <p:cNvPr id="205" name=""/>
           <p:cNvSpPr txBox="1"/>
           <p:nvPr/>
         </p:nvSpPr>
@@ -740,7 +745,7 @@
                 <a:uFillTx/>
                 <a:latin typeface="Arial"/>
               </a:rPr>
-              <a:t>Role-scoped: this is Ahmed's personal view.</a:t>
+              <a:t>D-005 decisions — all recorded.</a:t>
             </a:r>
             <a:endParaRPr lang="en-US" sz="1200" b="0" u="none" strike="noStrike">
               <a:solidFill>
@@ -777,7 +782,7 @@
       </p:grpSpPr>
       <p:sp>
         <p:nvSpPr>
-          <p:cNvPr id="107" name=""/>
+          <p:cNvPr id="206" name=""/>
           <p:cNvSpPr txBox="1"/>
           <p:nvPr/>
         </p:nvSpPr>
@@ -812,7 +817,7 @@
                 <a:uFillTx/>
                 <a:latin typeface="Arial"/>
               </a:rPr>
-              <a:t>Managers see non-draft team work only; HR sees the org.</a:t>
+              <a:t>Redesigned from stacked cards to this grid after live user feedback.</a:t>
             </a:r>
             <a:endParaRPr lang="en-US" sz="1200" b="0" u="none" strike="noStrike">
               <a:solidFill>
@@ -849,7 +854,7 @@
       </p:grpSpPr>
       <p:sp>
         <p:nvSpPr>
-          <p:cNvPr id="108" name=""/>
+          <p:cNvPr id="207" name=""/>
           <p:cNvSpPr txBox="1"/>
           <p:nvPr/>
         </p:nvSpPr>
@@ -884,7 +889,7 @@
                 <a:uFillTx/>
                 <a:latin typeface="Arial"/>
               </a:rPr>
-              <a:t>366-day cap, ≤10k rows, formula-injection neutralized.</a:t>
+              <a:t>Role-scoped: this is Ahmed's personal view.</a:t>
             </a:r>
             <a:endParaRPr lang="en-US" sz="1200" b="0" u="none" strike="noStrike">
               <a:solidFill>
@@ -921,7 +926,7 @@
       </p:grpSpPr>
       <p:sp>
         <p:nvSpPr>
-          <p:cNvPr id="109" name=""/>
+          <p:cNvPr id="208" name=""/>
           <p:cNvSpPr txBox="1"/>
           <p:nvPr/>
         </p:nvSpPr>
@@ -956,7 +961,7 @@
                 <a:uFillTx/>
                 <a:latin typeface="Arial"/>
               </a:rPr>
-              <a:t>HR-only area — managers get a reduced settings menu.</a:t>
+              <a:t>Managers see non-draft team work only; HR sees the org.</a:t>
             </a:r>
             <a:endParaRPr lang="en-US" sz="1200" b="0" u="none" strike="noStrike">
               <a:solidFill>
@@ -993,7 +998,7 @@
       </p:grpSpPr>
       <p:sp>
         <p:nvSpPr>
-          <p:cNvPr id="110" name=""/>
+          <p:cNvPr id="209" name=""/>
           <p:cNvSpPr txBox="1"/>
           <p:nvPr/>
         </p:nvSpPr>
@@ -1028,7 +1033,79 @@
                 <a:uFillTx/>
                 <a:latin typeface="Arial"/>
               </a:rPr>
-              <a:t>Deliberate choice over microservices — right-sized for the brief.</a:t>
+              <a:t>HR provisions accounts — no self-signup, per D-003.</a:t>
+            </a:r>
+            <a:endParaRPr lang="en-US" sz="1200" b="0" u="none" strike="noStrike">
+              <a:solidFill>
+                <a:srgbClr val="000000"/>
+              </a:solidFill>
+              <a:effectLst/>
+              <a:uFillTx/>
+              <a:latin typeface="Arial"/>
+            </a:endParaRPr>
+          </a:p>
+        </p:txBody>
+      </p:sp>
+    </p:spTree>
+  </p:cSld>
+</p:notes>
+</file>
+
+<file path=ppt/notesSlides/notesSlide17.xml><?xml version="1.0" encoding="utf-8"?>
+<p:notes xmlns:a="http://schemas.openxmlformats.org/drawingml/2006/main" xmlns:p="http://schemas.openxmlformats.org/presentationml/2006/main" xmlns:r="http://schemas.openxmlformats.org/officeDocument/2006/relationships" xmlns:p14="http://schemas.microsoft.com/office/powerpoint/2010/main" xmlns:p15="http://schemas.microsoft.com/office/powerpoint/2012/main" xmlns:mc="http://schemas.openxmlformats.org/markup-compatibility/2006">
+  <p:cSld>
+    <p:spTree>
+      <p:nvGrpSpPr>
+        <p:cNvPr id="1" name=""/>
+        <p:cNvGrpSpPr/>
+        <p:nvPr/>
+      </p:nvGrpSpPr>
+      <p:grpSpPr>
+        <a:xfrm>
+          <a:off x="0" y="0"/>
+          <a:ext cx="0" cy="0"/>
+          <a:chOff x="0" y="0"/>
+          <a:chExt cx="0" cy="0"/>
+        </a:xfrm>
+      </p:grpSpPr>
+      <p:sp>
+        <p:nvSpPr>
+          <p:cNvPr id="210" name=""/>
+          <p:cNvSpPr txBox="1"/>
+          <p:nvPr/>
+        </p:nvSpPr>
+        <p:spPr>
+          <a:xfrm>
+            <a:off x="720000" y="5040000"/>
+            <a:ext cx="8640000" cy="2160000"/>
+          </a:xfrm>
+          <a:prstGeom prst="rect">
+            <a:avLst/>
+          </a:prstGeom>
+          <a:solidFill>
+            <a:srgbClr val="729FCF"/>
+          </a:solidFill>
+          <a:ln w="0">
+            <a:solidFill>
+              <a:srgbClr val="3465A4"/>
+            </a:solidFill>
+          </a:ln>
+        </p:spPr>
+        <p:txBody>
+          <a:bodyPr lIns="90000" tIns="45000" rIns="90000" bIns="45000" anchor="t">
+            <a:spAutoFit/>
+          </a:bodyPr>
+          <a:p>
+            <a:r>
+              <a:rPr lang="en-US" sz="1200" b="0" i="1" u="none" strike="noStrike">
+                <a:solidFill>
+                  <a:srgbClr val="555555"/>
+                </a:solidFill>
+                <a:effectLst/>
+                <a:uFillTx/>
+                <a:latin typeface="Arial"/>
+              </a:rPr>
+              <a:t>Manager changes re-route pending reviews automatically (D-004).</a:t>
             </a:r>
             <a:endParaRPr lang="en-US" sz="1200" b="0" u="none" strike="noStrike">
               <a:solidFill>
@@ -1065,7 +1142,7 @@
       </p:grpSpPr>
       <p:sp>
         <p:nvSpPr>
-          <p:cNvPr id="111" name=""/>
+          <p:cNvPr id="211" name=""/>
           <p:cNvSpPr txBox="1"/>
           <p:nvPr/>
         </p:nvSpPr>
@@ -1100,7 +1177,79 @@
                 <a:uFillTx/>
                 <a:latin typeface="Arial"/>
               </a:rPr>
-              <a:t>The pipeline literally deployed itself during this project.</a:t>
+              <a:t>60-second polling paused while hidden — per D-009.</a:t>
+            </a:r>
+            <a:endParaRPr lang="en-US" sz="1200" b="0" u="none" strike="noStrike">
+              <a:solidFill>
+                <a:srgbClr val="000000"/>
+              </a:solidFill>
+              <a:effectLst/>
+              <a:uFillTx/>
+              <a:latin typeface="Arial"/>
+            </a:endParaRPr>
+          </a:p>
+        </p:txBody>
+      </p:sp>
+    </p:spTree>
+  </p:cSld>
+</p:notes>
+</file>
+
+<file path=ppt/notesSlides/notesSlide19.xml><?xml version="1.0" encoding="utf-8"?>
+<p:notes xmlns:a="http://schemas.openxmlformats.org/drawingml/2006/main" xmlns:p="http://schemas.openxmlformats.org/presentationml/2006/main" xmlns:r="http://schemas.openxmlformats.org/officeDocument/2006/relationships" xmlns:p14="http://schemas.microsoft.com/office/powerpoint/2010/main" xmlns:p15="http://schemas.microsoft.com/office/powerpoint/2012/main" xmlns:mc="http://schemas.openxmlformats.org/markup-compatibility/2006">
+  <p:cSld>
+    <p:spTree>
+      <p:nvGrpSpPr>
+        <p:cNvPr id="1" name=""/>
+        <p:cNvGrpSpPr/>
+        <p:nvPr/>
+      </p:nvGrpSpPr>
+      <p:grpSpPr>
+        <a:xfrm>
+          <a:off x="0" y="0"/>
+          <a:ext cx="0" cy="0"/>
+          <a:chOff x="0" y="0"/>
+          <a:chExt cx="0" cy="0"/>
+        </a:xfrm>
+      </p:grpSpPr>
+      <p:sp>
+        <p:nvSpPr>
+          <p:cNvPr id="212" name=""/>
+          <p:cNvSpPr txBox="1"/>
+          <p:nvPr/>
+        </p:nvSpPr>
+        <p:spPr>
+          <a:xfrm>
+            <a:off x="720000" y="5040000"/>
+            <a:ext cx="8640000" cy="2160000"/>
+          </a:xfrm>
+          <a:prstGeom prst="rect">
+            <a:avLst/>
+          </a:prstGeom>
+          <a:solidFill>
+            <a:srgbClr val="729FCF"/>
+          </a:solidFill>
+          <a:ln w="0">
+            <a:solidFill>
+              <a:srgbClr val="3465A4"/>
+            </a:solidFill>
+          </a:ln>
+        </p:spPr>
+        <p:txBody>
+          <a:bodyPr lIns="90000" tIns="45000" rIns="90000" bIns="45000" anchor="t">
+            <a:spAutoFit/>
+          </a:bodyPr>
+          <a:p>
+            <a:r>
+              <a:rPr lang="en-US" sz="1200" b="0" i="1" u="none" strike="noStrike">
+                <a:solidFill>
+                  <a:srgbClr val="555555"/>
+                </a:solidFill>
+                <a:effectLst/>
+                <a:uFillTx/>
+                <a:latin typeface="Arial"/>
+              </a:rPr>
+              <a:t>Requests tab is the default; 366-day cap, ≤10k rows, formula-injection neutralized.</a:t>
             </a:r>
             <a:endParaRPr lang="en-US" sz="1200" b="0" u="none" strike="noStrike">
               <a:solidFill>
@@ -1137,7 +1286,7 @@
       </p:grpSpPr>
       <p:sp>
         <p:nvSpPr>
-          <p:cNvPr id="96" name=""/>
+          <p:cNvPr id="195" name=""/>
           <p:cNvSpPr txBox="1"/>
           <p:nvPr/>
         </p:nvSpPr>
@@ -1209,7 +1358,7 @@
       </p:grpSpPr>
       <p:sp>
         <p:nvSpPr>
-          <p:cNvPr id="112" name=""/>
+          <p:cNvPr id="213" name=""/>
           <p:cNvSpPr txBox="1"/>
           <p:nvPr/>
         </p:nvSpPr>
@@ -1244,7 +1393,7 @@
                 <a:uFillTx/>
                 <a:latin typeface="Arial"/>
               </a:rPr>
-              <a:t>A strength: honest, reviewed AI work is what the rubric rewards.</a:t>
+              <a:t>HR-only area — managers get a reduced settings menu.</a:t>
             </a:r>
             <a:endParaRPr lang="en-US" sz="1200" b="0" u="none" strike="noStrike">
               <a:solidFill>
@@ -1262,7 +1411,7 @@
 </p:notes>
 </file>
 
-<file path=ppt/notesSlides/notesSlide22.xml><?xml version="1.0" encoding="utf-8"?>
+<file path=ppt/notesSlides/notesSlide21.xml><?xml version="1.0" encoding="utf-8"?>
 <p:notes xmlns:a="http://schemas.openxmlformats.org/drawingml/2006/main" xmlns:p="http://schemas.openxmlformats.org/presentationml/2006/main" xmlns:r="http://schemas.openxmlformats.org/officeDocument/2006/relationships" xmlns:p14="http://schemas.microsoft.com/office/powerpoint/2010/main" xmlns:p15="http://schemas.microsoft.com/office/powerpoint/2012/main" xmlns:mc="http://schemas.openxmlformats.org/markup-compatibility/2006">
   <p:cSld>
     <p:spTree>
@@ -1281,7 +1430,7 @@
       </p:grpSpPr>
       <p:sp>
         <p:nvSpPr>
-          <p:cNvPr id="113" name=""/>
+          <p:cNvPr id="214" name=""/>
           <p:cNvSpPr txBox="1"/>
           <p:nvPr/>
         </p:nvSpPr>
@@ -1316,7 +1465,7 @@
                 <a:uFillTx/>
                 <a:latin typeface="Arial"/>
               </a:rPr>
-              <a:t>Owning limits builds trust — judges reward honest evidence.</a:t>
+              <a:t>Deliberate choice over microservices — right-sized for the brief.</a:t>
             </a:r>
             <a:endParaRPr lang="en-US" sz="1200" b="0" u="none" strike="noStrike">
               <a:solidFill>
@@ -1353,7 +1502,223 @@
       </p:grpSpPr>
       <p:sp>
         <p:nvSpPr>
-          <p:cNvPr id="114" name=""/>
+          <p:cNvPr id="215" name=""/>
+          <p:cNvSpPr txBox="1"/>
+          <p:nvPr/>
+        </p:nvSpPr>
+        <p:spPr>
+          <a:xfrm>
+            <a:off x="720000" y="5040000"/>
+            <a:ext cx="8640000" cy="2160000"/>
+          </a:xfrm>
+          <a:prstGeom prst="rect">
+            <a:avLst/>
+          </a:prstGeom>
+          <a:solidFill>
+            <a:srgbClr val="729FCF"/>
+          </a:solidFill>
+          <a:ln w="0">
+            <a:solidFill>
+              <a:srgbClr val="3465A4"/>
+            </a:solidFill>
+          </a:ln>
+        </p:spPr>
+        <p:txBody>
+          <a:bodyPr lIns="90000" tIns="45000" rIns="90000" bIns="45000" anchor="t">
+            <a:spAutoFit/>
+          </a:bodyPr>
+          <a:p>
+            <a:r>
+              <a:rPr lang="en-US" sz="1200" b="0" i="1" u="none" strike="noStrike">
+                <a:solidFill>
+                  <a:srgbClr val="555555"/>
+                </a:solidFill>
+                <a:effectLst/>
+                <a:uFillTx/>
+                <a:latin typeface="Arial"/>
+              </a:rPr>
+              <a:t>The pipeline literally deployed itself during this project.</a:t>
+            </a:r>
+            <a:endParaRPr lang="en-US" sz="1200" b="0" u="none" strike="noStrike">
+              <a:solidFill>
+                <a:srgbClr val="000000"/>
+              </a:solidFill>
+              <a:effectLst/>
+              <a:uFillTx/>
+              <a:latin typeface="Arial"/>
+            </a:endParaRPr>
+          </a:p>
+        </p:txBody>
+      </p:sp>
+    </p:spTree>
+  </p:cSld>
+</p:notes>
+</file>
+
+<file path=ppt/notesSlides/notesSlide25.xml><?xml version="1.0" encoding="utf-8"?>
+<p:notes xmlns:a="http://schemas.openxmlformats.org/drawingml/2006/main" xmlns:p="http://schemas.openxmlformats.org/presentationml/2006/main" xmlns:r="http://schemas.openxmlformats.org/officeDocument/2006/relationships" xmlns:p14="http://schemas.microsoft.com/office/powerpoint/2010/main" xmlns:p15="http://schemas.microsoft.com/office/powerpoint/2012/main" xmlns:mc="http://schemas.openxmlformats.org/markup-compatibility/2006">
+  <p:cSld>
+    <p:spTree>
+      <p:nvGrpSpPr>
+        <p:cNvPr id="1" name=""/>
+        <p:cNvGrpSpPr/>
+        <p:nvPr/>
+      </p:nvGrpSpPr>
+      <p:grpSpPr>
+        <a:xfrm>
+          <a:off x="0" y="0"/>
+          <a:ext cx="0" cy="0"/>
+          <a:chOff x="0" y="0"/>
+          <a:chExt cx="0" cy="0"/>
+        </a:xfrm>
+      </p:grpSpPr>
+      <p:sp>
+        <p:nvSpPr>
+          <p:cNvPr id="216" name=""/>
+          <p:cNvSpPr txBox="1"/>
+          <p:nvPr/>
+        </p:nvSpPr>
+        <p:spPr>
+          <a:xfrm>
+            <a:off x="720000" y="5040000"/>
+            <a:ext cx="8640000" cy="2160000"/>
+          </a:xfrm>
+          <a:prstGeom prst="rect">
+            <a:avLst/>
+          </a:prstGeom>
+          <a:solidFill>
+            <a:srgbClr val="729FCF"/>
+          </a:solidFill>
+          <a:ln w="0">
+            <a:solidFill>
+              <a:srgbClr val="3465A4"/>
+            </a:solidFill>
+          </a:ln>
+        </p:spPr>
+        <p:txBody>
+          <a:bodyPr lIns="90000" tIns="45000" rIns="90000" bIns="45000" anchor="t">
+            <a:spAutoFit/>
+          </a:bodyPr>
+          <a:p>
+            <a:r>
+              <a:rPr lang="en-US" sz="1200" b="0" i="1" u="none" strike="noStrike">
+                <a:solidFill>
+                  <a:srgbClr val="555555"/>
+                </a:solidFill>
+                <a:effectLst/>
+                <a:uFillTx/>
+                <a:latin typeface="Arial"/>
+              </a:rPr>
+              <a:t>A strength: honest, reviewed AI work is what the rubric rewards.</a:t>
+            </a:r>
+            <a:endParaRPr lang="en-US" sz="1200" b="0" u="none" strike="noStrike">
+              <a:solidFill>
+                <a:srgbClr val="000000"/>
+              </a:solidFill>
+              <a:effectLst/>
+              <a:uFillTx/>
+              <a:latin typeface="Arial"/>
+            </a:endParaRPr>
+          </a:p>
+        </p:txBody>
+      </p:sp>
+    </p:spTree>
+  </p:cSld>
+</p:notes>
+</file>
+
+<file path=ppt/notesSlides/notesSlide27.xml><?xml version="1.0" encoding="utf-8"?>
+<p:notes xmlns:a="http://schemas.openxmlformats.org/drawingml/2006/main" xmlns:p="http://schemas.openxmlformats.org/presentationml/2006/main" xmlns:r="http://schemas.openxmlformats.org/officeDocument/2006/relationships" xmlns:p14="http://schemas.microsoft.com/office/powerpoint/2010/main" xmlns:p15="http://schemas.microsoft.com/office/powerpoint/2012/main" xmlns:mc="http://schemas.openxmlformats.org/markup-compatibility/2006">
+  <p:cSld>
+    <p:spTree>
+      <p:nvGrpSpPr>
+        <p:cNvPr id="1" name=""/>
+        <p:cNvGrpSpPr/>
+        <p:nvPr/>
+      </p:nvGrpSpPr>
+      <p:grpSpPr>
+        <a:xfrm>
+          <a:off x="0" y="0"/>
+          <a:ext cx="0" cy="0"/>
+          <a:chOff x="0" y="0"/>
+          <a:chExt cx="0" cy="0"/>
+        </a:xfrm>
+      </p:grpSpPr>
+      <p:sp>
+        <p:nvSpPr>
+          <p:cNvPr id="217" name=""/>
+          <p:cNvSpPr txBox="1"/>
+          <p:nvPr/>
+        </p:nvSpPr>
+        <p:spPr>
+          <a:xfrm>
+            <a:off x="720000" y="5040000"/>
+            <a:ext cx="8640000" cy="2160000"/>
+          </a:xfrm>
+          <a:prstGeom prst="rect">
+            <a:avLst/>
+          </a:prstGeom>
+          <a:solidFill>
+            <a:srgbClr val="729FCF"/>
+          </a:solidFill>
+          <a:ln w="0">
+            <a:solidFill>
+              <a:srgbClr val="3465A4"/>
+            </a:solidFill>
+          </a:ln>
+        </p:spPr>
+        <p:txBody>
+          <a:bodyPr lIns="90000" tIns="45000" rIns="90000" bIns="45000" anchor="t">
+            <a:spAutoFit/>
+          </a:bodyPr>
+          <a:p>
+            <a:r>
+              <a:rPr lang="en-US" sz="1200" b="0" i="1" u="none" strike="noStrike">
+                <a:solidFill>
+                  <a:srgbClr val="555555"/>
+                </a:solidFill>
+                <a:effectLst/>
+                <a:uFillTx/>
+                <a:latin typeface="Arial"/>
+              </a:rPr>
+              <a:t>Owning limits builds trust — judges reward honest evidence.</a:t>
+            </a:r>
+            <a:endParaRPr lang="en-US" sz="1200" b="0" u="none" strike="noStrike">
+              <a:solidFill>
+                <a:srgbClr val="000000"/>
+              </a:solidFill>
+              <a:effectLst/>
+              <a:uFillTx/>
+              <a:latin typeface="Arial"/>
+            </a:endParaRPr>
+          </a:p>
+        </p:txBody>
+      </p:sp>
+    </p:spTree>
+  </p:cSld>
+</p:notes>
+</file>
+
+<file path=ppt/notesSlides/notesSlide28.xml><?xml version="1.0" encoding="utf-8"?>
+<p:notes xmlns:a="http://schemas.openxmlformats.org/drawingml/2006/main" xmlns:p="http://schemas.openxmlformats.org/presentationml/2006/main" xmlns:r="http://schemas.openxmlformats.org/officeDocument/2006/relationships" xmlns:p14="http://schemas.microsoft.com/office/powerpoint/2010/main" xmlns:p15="http://schemas.microsoft.com/office/powerpoint/2012/main" xmlns:mc="http://schemas.openxmlformats.org/markup-compatibility/2006">
+  <p:cSld>
+    <p:spTree>
+      <p:nvGrpSpPr>
+        <p:cNvPr id="1" name=""/>
+        <p:cNvGrpSpPr/>
+        <p:nvPr/>
+      </p:nvGrpSpPr>
+      <p:grpSpPr>
+        <a:xfrm>
+          <a:off x="0" y="0"/>
+          <a:ext cx="0" cy="0"/>
+          <a:chOff x="0" y="0"/>
+          <a:chExt cx="0" cy="0"/>
+        </a:xfrm>
+      </p:grpSpPr>
+      <p:sp>
+        <p:nvSpPr>
+          <p:cNvPr id="218" name=""/>
           <p:cNvSpPr txBox="1"/>
           <p:nvPr/>
         </p:nvSpPr>
@@ -1425,7 +1790,7 @@
       </p:grpSpPr>
       <p:sp>
         <p:nvSpPr>
-          <p:cNvPr id="97" name=""/>
+          <p:cNvPr id="196" name=""/>
           <p:cNvSpPr txBox="1"/>
           <p:nvPr/>
         </p:nvSpPr>
@@ -1497,7 +1862,7 @@
       </p:grpSpPr>
       <p:sp>
         <p:nvSpPr>
-          <p:cNvPr id="98" name=""/>
+          <p:cNvPr id="197" name=""/>
           <p:cNvSpPr txBox="1"/>
           <p:nvPr/>
         </p:nvSpPr>
@@ -1569,7 +1934,7 @@
       </p:grpSpPr>
       <p:sp>
         <p:nvSpPr>
-          <p:cNvPr id="99" name=""/>
+          <p:cNvPr id="198" name=""/>
           <p:cNvSpPr txBox="1"/>
           <p:nvPr/>
         </p:nvSpPr>
@@ -1663,7 +2028,7 @@
       </p:grpSpPr>
       <p:sp>
         <p:nvSpPr>
-          <p:cNvPr id="100" name=""/>
+          <p:cNvPr id="199" name=""/>
           <p:cNvSpPr txBox="1"/>
           <p:nvPr/>
         </p:nvSpPr>
@@ -1735,7 +2100,7 @@
       </p:grpSpPr>
       <p:sp>
         <p:nvSpPr>
-          <p:cNvPr id="101" name=""/>
+          <p:cNvPr id="200" name=""/>
           <p:cNvSpPr txBox="1"/>
           <p:nvPr/>
         </p:nvSpPr>
@@ -1807,7 +2172,7 @@
       </p:grpSpPr>
       <p:sp>
         <p:nvSpPr>
-          <p:cNvPr id="102" name=""/>
+          <p:cNvPr id="201" name=""/>
           <p:cNvSpPr txBox="1"/>
           <p:nvPr/>
         </p:nvSpPr>
@@ -1879,7 +2244,7 @@
       </p:grpSpPr>
       <p:sp>
         <p:nvSpPr>
-          <p:cNvPr id="103" name=""/>
+          <p:cNvPr id="202" name=""/>
           <p:cNvSpPr txBox="1"/>
           <p:nvPr/>
         </p:nvSpPr>
@@ -1914,7 +2279,7 @@
                 <a:uFillTx/>
                 <a:latin typeface="Arial"/>
               </a:rPr>
-              <a:t>Feature 008 — a full spec on its own.</a:t>
+              <a:t>Return/reject require a reason; decisions are audited.</a:t>
             </a:r>
             <a:endParaRPr lang="en-US" sz="1200" b="0" u="none" strike="noStrike">
               <a:solidFill>
@@ -1983,7 +2348,7 @@
         <p:txBody>
           <a:bodyPr/>
           <a:p>
-            <a:fld id="{BFC43A4E-340E-414B-B539-673ED2C1FB1C}" type="slidenum">
+            <a:fld id="{F51B8770-EC9F-4881-8387-52527B10297D}" type="slidenum">
               <a:t>&lt;#&gt;</a:t>
             </a:fld>
           </a:p>
@@ -2150,7 +2515,7 @@
         <p:txBody>
           <a:bodyPr/>
           <a:p>
-            <a:fld id="{1ED7B8C9-25FC-4E32-BC7C-746BAA2F5F6C}" type="slidenum">
+            <a:fld id="{DF43C1D7-CEAC-406A-A517-9D197F5F12BD}" type="slidenum">
               <a:t>&lt;#&gt;</a:t>
             </a:fld>
           </a:p>
@@ -2829,7 +3194,7 @@
             <a:pPr indent="0" algn="r">
               <a:buNone/>
             </a:pPr>
-            <a:fld id="{D310AA2D-A66A-46D1-BA74-ADA805686CCE}" type="slidenum">
+            <a:fld id="{66B7A874-B9AB-4106-A737-ECBD466B4DB9}" type="slidenum">
               <a:rPr lang="en-US" sz="1400" b="0" u="none" strike="noStrike">
                 <a:solidFill>
                   <a:srgbClr val="000000"/>
@@ -3198,7 +3563,7 @@
       </p:grpSpPr>
       <p:sp>
         <p:nvSpPr>
-          <p:cNvPr id="48" name=""/>
+          <p:cNvPr id="71" name=""/>
           <p:cNvSpPr txBox="1"/>
           <p:nvPr/>
         </p:nvSpPr>
@@ -3229,7 +3594,7 @@
                 <a:uFillTx/>
                 <a:latin typeface="Arial"/>
               </a:rPr>
-              <a:t>Timesheets — Per-Day Submission</a:t>
+              <a:t>Allocations — Controlled Allowances</a:t>
             </a:r>
             <a:endParaRPr lang="en-US" sz="2600" b="0" u="none" strike="noStrike">
               <a:solidFill>
@@ -3244,7 +3609,7 @@
       </p:sp>
       <p:sp>
         <p:nvSpPr>
-          <p:cNvPr id="49" name=""/>
+          <p:cNvPr id="72" name=""/>
           <p:cNvSpPr txBox="1"/>
           <p:nvPr/>
         </p:nvSpPr>
@@ -3281,19 +3646,21 @@
       </p:sp>
       <p:sp>
         <p:nvSpPr>
-          <p:cNvPr id="50" name=""/>
-          <p:cNvSpPr txBox="1"/>
-          <p:nvPr/>
-        </p:nvSpPr>
-        <p:spPr>
-          <a:xfrm>
-            <a:off x="540000" y="1152000"/>
-            <a:ext cx="9000000" cy="3960000"/>
-          </a:xfrm>
-          <a:prstGeom prst="rect">
-            <a:avLst/>
-          </a:prstGeom>
-          <a:noFill/>
+          <p:cNvPr id="73" name=""/>
+          <p:cNvSpPr txBox="1"/>
+          <p:nvPr/>
+        </p:nvSpPr>
+        <p:spPr>
+          <a:xfrm>
+            <a:off x="540000" y="2030400"/>
+            <a:ext cx="50400" cy="493200"/>
+          </a:xfrm>
+          <a:prstGeom prst="rect">
+            <a:avLst/>
+          </a:prstGeom>
+          <a:solidFill>
+            <a:srgbClr val="E6BF71"/>
+          </a:solidFill>
           <a:ln w="0">
             <a:noFill/>
           </a:ln>
@@ -3303,8 +3670,48 @@
             <a:spAutoFit/>
           </a:bodyPr>
           <a:p>
-            <a:r>
-              <a:rPr lang="en-US" sz="1500" b="0" u="none" strike="noStrike">
+            <a:endParaRPr lang="en-US" sz="1800" b="0" u="none" strike="noStrike">
+              <a:solidFill>
+                <a:srgbClr val="000000"/>
+              </a:solidFill>
+              <a:effectLst/>
+              <a:uFillTx/>
+              <a:latin typeface="Arial"/>
+            </a:endParaRPr>
+          </a:p>
+        </p:txBody>
+      </p:sp>
+      <p:sp>
+        <p:nvSpPr>
+          <p:cNvPr id="74" name=""/>
+          <p:cNvSpPr txBox="1"/>
+          <p:nvPr/>
+        </p:nvSpPr>
+        <p:spPr>
+          <a:xfrm>
+            <a:off x="540000" y="2030400"/>
+            <a:ext cx="9000000" cy="493200"/>
+          </a:xfrm>
+          <a:prstGeom prst="rect">
+            <a:avLst/>
+          </a:prstGeom>
+          <a:solidFill>
+            <a:srgbClr val="FFFFFF"/>
+          </a:solidFill>
+          <a:ln w="7200">
+            <a:solidFill>
+              <a:srgbClr val="DFE9E4"/>
+            </a:solidFill>
+            <a:round/>
+          </a:ln>
+        </p:spPr>
+        <p:txBody>
+          <a:bodyPr lIns="198000" tIns="115200" rIns="126000" bIns="115200" anchor="ctr">
+            <a:normAutofit/>
+          </a:bodyPr>
+          <a:p>
+            <a:r>
+              <a:rPr lang="en-US" sz="1550" b="0" u="none" strike="noStrike">
                 <a:solidFill>
                   <a:srgbClr val="1A2E2B"/>
                 </a:solidFill>
@@ -3312,20 +3719,87 @@
                 <a:uFillTx/>
                 <a:latin typeface="Arial"/>
               </a:rPr>
-              <a:t>• Weekly sheet; each day submitted independently</a:t>
-            </a:r>
-            <a:endParaRPr lang="en-US" sz="1500" b="0" u="none" strike="noStrike">
-              <a:solidFill>
-                <a:srgbClr val="000000"/>
-              </a:solidFill>
-              <a:effectLst/>
-              <a:uFillTx/>
-              <a:latin typeface="Arial"/>
-            </a:endParaRPr>
-          </a:p>
-          <a:p>
-            <a:r>
-              <a:rPr lang="en-US" sz="1500" b="0" u="none" strike="noStrike">
+              <a:t>HR grants dated allowances per employee per request type</a:t>
+            </a:r>
+            <a:endParaRPr lang="en-US" sz="1550" b="0" u="none" strike="noStrike">
+              <a:solidFill>
+                <a:srgbClr val="000000"/>
+              </a:solidFill>
+              <a:effectLst/>
+              <a:uFillTx/>
+              <a:latin typeface="Arial"/>
+            </a:endParaRPr>
+          </a:p>
+        </p:txBody>
+      </p:sp>
+      <p:sp>
+        <p:nvSpPr>
+          <p:cNvPr id="75" name=""/>
+          <p:cNvSpPr txBox="1"/>
+          <p:nvPr/>
+        </p:nvSpPr>
+        <p:spPr>
+          <a:xfrm>
+            <a:off x="540000" y="2674800"/>
+            <a:ext cx="50400" cy="493200"/>
+          </a:xfrm>
+          <a:prstGeom prst="rect">
+            <a:avLst/>
+          </a:prstGeom>
+          <a:solidFill>
+            <a:srgbClr val="E6BF71"/>
+          </a:solidFill>
+          <a:ln w="0">
+            <a:noFill/>
+          </a:ln>
+        </p:spPr>
+        <p:txBody>
+          <a:bodyPr lIns="90000" tIns="45000" rIns="90000" bIns="45000" anchor="t">
+            <a:spAutoFit/>
+          </a:bodyPr>
+          <a:p>
+            <a:endParaRPr lang="en-US" sz="1800" b="0" u="none" strike="noStrike">
+              <a:solidFill>
+                <a:srgbClr val="000000"/>
+              </a:solidFill>
+              <a:effectLst/>
+              <a:uFillTx/>
+              <a:latin typeface="Arial"/>
+            </a:endParaRPr>
+          </a:p>
+        </p:txBody>
+      </p:sp>
+      <p:sp>
+        <p:nvSpPr>
+          <p:cNvPr id="76" name=""/>
+          <p:cNvSpPr txBox="1"/>
+          <p:nvPr/>
+        </p:nvSpPr>
+        <p:spPr>
+          <a:xfrm>
+            <a:off x="540000" y="2674800"/>
+            <a:ext cx="9000000" cy="493200"/>
+          </a:xfrm>
+          <a:prstGeom prst="rect">
+            <a:avLst/>
+          </a:prstGeom>
+          <a:solidFill>
+            <a:srgbClr val="FFFFFF"/>
+          </a:solidFill>
+          <a:ln w="7200">
+            <a:solidFill>
+              <a:srgbClr val="DFE9E4"/>
+            </a:solidFill>
+            <a:round/>
+          </a:ln>
+        </p:spPr>
+        <p:txBody>
+          <a:bodyPr lIns="198000" tIns="115200" rIns="126000" bIns="115200" anchor="ctr">
+            <a:normAutofit/>
+          </a:bodyPr>
+          <a:p>
+            <a:r>
+              <a:rPr lang="en-US" sz="1550" b="0" u="none" strike="noStrike">
                 <a:solidFill>
                   <a:srgbClr val="1A2E2B"/>
                 </a:solidFill>
@@ -3333,20 +3807,87 @@
                 <a:uFillTx/>
                 <a:latin typeface="Arial"/>
               </a:rPr>
-              <a:t>• Start/end + unpaid breaks, overnight split, no future work</a:t>
-            </a:r>
-            <a:endParaRPr lang="en-US" sz="1500" b="0" u="none" strike="noStrike">
-              <a:solidFill>
-                <a:srgbClr val="000000"/>
-              </a:solidFill>
-              <a:effectLst/>
-              <a:uFillTx/>
-              <a:latin typeface="Arial"/>
-            </a:endParaRPr>
-          </a:p>
-          <a:p>
-            <a:r>
-              <a:rPr lang="en-US" sz="1500" b="0" u="none" strike="noStrike">
+              <a:t>Reserve on submit → release on return/reject → settle on approve</a:t>
+            </a:r>
+            <a:endParaRPr lang="en-US" sz="1550" b="0" u="none" strike="noStrike">
+              <a:solidFill>
+                <a:srgbClr val="000000"/>
+              </a:solidFill>
+              <a:effectLst/>
+              <a:uFillTx/>
+              <a:latin typeface="Arial"/>
+            </a:endParaRPr>
+          </a:p>
+        </p:txBody>
+      </p:sp>
+      <p:sp>
+        <p:nvSpPr>
+          <p:cNvPr id="77" name=""/>
+          <p:cNvSpPr txBox="1"/>
+          <p:nvPr/>
+        </p:nvSpPr>
+        <p:spPr>
+          <a:xfrm>
+            <a:off x="540000" y="3319200"/>
+            <a:ext cx="50400" cy="342000"/>
+          </a:xfrm>
+          <a:prstGeom prst="rect">
+            <a:avLst/>
+          </a:prstGeom>
+          <a:solidFill>
+            <a:srgbClr val="E6BF71"/>
+          </a:solidFill>
+          <a:ln w="0">
+            <a:noFill/>
+          </a:ln>
+        </p:spPr>
+        <p:txBody>
+          <a:bodyPr lIns="90000" tIns="45000" rIns="90000" bIns="45000" anchor="t">
+            <a:spAutoFit/>
+          </a:bodyPr>
+          <a:p>
+            <a:endParaRPr lang="en-US" sz="1800" b="0" u="none" strike="noStrike">
+              <a:solidFill>
+                <a:srgbClr val="000000"/>
+              </a:solidFill>
+              <a:effectLst/>
+              <a:uFillTx/>
+              <a:latin typeface="Arial"/>
+            </a:endParaRPr>
+          </a:p>
+        </p:txBody>
+      </p:sp>
+      <p:sp>
+        <p:nvSpPr>
+          <p:cNvPr id="78" name=""/>
+          <p:cNvSpPr txBox="1"/>
+          <p:nvPr/>
+        </p:nvSpPr>
+        <p:spPr>
+          <a:xfrm>
+            <a:off x="540000" y="3264840"/>
+            <a:ext cx="9000000" cy="450360"/>
+          </a:xfrm>
+          <a:prstGeom prst="rect">
+            <a:avLst/>
+          </a:prstGeom>
+          <a:solidFill>
+            <a:srgbClr val="FFFFFF"/>
+          </a:solidFill>
+          <a:ln w="7200">
+            <a:solidFill>
+              <a:srgbClr val="DFE9E4"/>
+            </a:solidFill>
+            <a:round/>
+          </a:ln>
+        </p:spPr>
+        <p:txBody>
+          <a:bodyPr lIns="198000" tIns="115200" rIns="126000" bIns="115200" anchor="ctr">
+            <a:normAutofit/>
+          </a:bodyPr>
+          <a:p>
+            <a:r>
+              <a:rPr lang="en-US" sz="1550" b="0" u="none" strike="noStrike">
                 <a:solidFill>
                   <a:srgbClr val="1A2E2B"/>
                 </a:solidFill>
@@ -3354,20 +3895,87 @@
                 <a:uFillTx/>
                 <a:latin typeface="Arial"/>
               </a:rPr>
-              <a:t>• Outside-window entries flagged — employee reason required</a:t>
-            </a:r>
-            <a:endParaRPr lang="en-US" sz="1500" b="0" u="none" strike="noStrike">
-              <a:solidFill>
-                <a:srgbClr val="000000"/>
-              </a:solidFill>
-              <a:effectLst/>
-              <a:uFillTx/>
-              <a:latin typeface="Arial"/>
-            </a:endParaRPr>
-          </a:p>
-          <a:p>
-            <a:r>
-              <a:rPr lang="en-US" sz="1500" b="0" u="none" strike="noStrike">
+              <a:t>Balances always reconcile; no overlapping grants</a:t>
+            </a:r>
+            <a:endParaRPr lang="en-US" sz="1550" b="0" u="none" strike="noStrike">
+              <a:solidFill>
+                <a:srgbClr val="000000"/>
+              </a:solidFill>
+              <a:effectLst/>
+              <a:uFillTx/>
+              <a:latin typeface="Arial"/>
+            </a:endParaRPr>
+          </a:p>
+        </p:txBody>
+      </p:sp>
+      <p:sp>
+        <p:nvSpPr>
+          <p:cNvPr id="79" name=""/>
+          <p:cNvSpPr txBox="1"/>
+          <p:nvPr/>
+        </p:nvSpPr>
+        <p:spPr>
+          <a:xfrm>
+            <a:off x="540000" y="3812400"/>
+            <a:ext cx="50400" cy="493200"/>
+          </a:xfrm>
+          <a:prstGeom prst="rect">
+            <a:avLst/>
+          </a:prstGeom>
+          <a:solidFill>
+            <a:srgbClr val="E6BF71"/>
+          </a:solidFill>
+          <a:ln w="0">
+            <a:noFill/>
+          </a:ln>
+        </p:spPr>
+        <p:txBody>
+          <a:bodyPr lIns="90000" tIns="45000" rIns="90000" bIns="45000" anchor="t">
+            <a:spAutoFit/>
+          </a:bodyPr>
+          <a:p>
+            <a:endParaRPr lang="en-US" sz="1800" b="0" u="none" strike="noStrike">
+              <a:solidFill>
+                <a:srgbClr val="000000"/>
+              </a:solidFill>
+              <a:effectLst/>
+              <a:uFillTx/>
+              <a:latin typeface="Arial"/>
+            </a:endParaRPr>
+          </a:p>
+        </p:txBody>
+      </p:sp>
+      <p:sp>
+        <p:nvSpPr>
+          <p:cNvPr id="80" name=""/>
+          <p:cNvSpPr txBox="1"/>
+          <p:nvPr/>
+        </p:nvSpPr>
+        <p:spPr>
+          <a:xfrm>
+            <a:off x="540000" y="3812400"/>
+            <a:ext cx="9000000" cy="493200"/>
+          </a:xfrm>
+          <a:prstGeom prst="rect">
+            <a:avLst/>
+          </a:prstGeom>
+          <a:solidFill>
+            <a:srgbClr val="FFFFFF"/>
+          </a:solidFill>
+          <a:ln w="7200">
+            <a:solidFill>
+              <a:srgbClr val="DFE9E4"/>
+            </a:solidFill>
+            <a:round/>
+          </a:ln>
+        </p:spPr>
+        <p:txBody>
+          <a:bodyPr lIns="198000" tIns="115200" rIns="126000" bIns="115200" anchor="ctr">
+            <a:normAutofit/>
+          </a:bodyPr>
+          <a:p>
+            <a:r>
+              <a:rPr lang="en-US" sz="1550" b="0" u="none" strike="noStrike">
                 <a:solidFill>
                   <a:srgbClr val="1A2E2B"/>
                 </a:solidFill>
@@ -3375,30 +3983,9 @@
                 <a:uFillTx/>
                 <a:latin typeface="Arial"/>
               </a:rPr>
-              <a:t>• Two-stage review always: manager → HR; HR-only reopen</a:t>
-            </a:r>
-            <a:endParaRPr lang="en-US" sz="1500" b="0" u="none" strike="noStrike">
-              <a:solidFill>
-                <a:srgbClr val="000000"/>
-              </a:solidFill>
-              <a:effectLst/>
-              <a:uFillTx/>
-              <a:latin typeface="Arial"/>
-            </a:endParaRPr>
-          </a:p>
-          <a:p>
-            <a:r>
-              <a:rPr lang="en-US" sz="1500" b="0" u="none" strike="noStrike">
-                <a:solidFill>
-                  <a:srgbClr val="1A2E2B"/>
-                </a:solidFill>
-                <a:effectLst/>
-                <a:uFillTx/>
-                <a:latin typeface="Arial"/>
-              </a:rPr>
-              <a:t>• Punch widget: real check-in/out from the topbar</a:t>
-            </a:r>
-            <a:endParaRPr lang="en-US" sz="1500" b="0" u="none" strike="noStrike">
+              <a:t>Early-leave billing: 15-minute blocks, 30-minute minimum</a:t>
+            </a:r>
+            <a:endParaRPr lang="en-US" sz="1550" b="0" u="none" strike="noStrike">
               <a:solidFill>
                 <a:srgbClr val="000000"/>
               </a:solidFill>
@@ -3448,7 +4035,7 @@
       </p:grpSpPr>
       <p:sp>
         <p:nvSpPr>
-          <p:cNvPr id="51" name=""/>
+          <p:cNvPr id="81" name=""/>
           <p:cNvSpPr txBox="1"/>
           <p:nvPr/>
         </p:nvSpPr>
@@ -3479,7 +4066,7 @@
                 <a:uFillTx/>
                 <a:latin typeface="Arial"/>
               </a:rPr>
-              <a:t>The Week at a Glance</a:t>
+              <a:t>Allocation Grants</a:t>
             </a:r>
             <a:endParaRPr lang="en-US" sz="2600" b="0" u="none" strike="noStrike">
               <a:solidFill>
@@ -3494,7 +4081,7 @@
       </p:sp>
       <p:sp>
         <p:nvSpPr>
-          <p:cNvPr id="52" name=""/>
+          <p:cNvPr id="82" name=""/>
           <p:cNvSpPr txBox="1"/>
           <p:nvPr/>
         </p:nvSpPr>
@@ -3531,7 +4118,7 @@
       </p:sp>
       <p:pic>
         <p:nvPicPr>
-          <p:cNvPr id="53" name=""/>
+          <p:cNvPr id="83" name=""/>
           <p:cNvPicPr/>
           <p:nvPr/>
         </p:nvPicPr>
@@ -3555,7 +4142,7 @@
       </p:pic>
       <p:sp>
         <p:nvSpPr>
-          <p:cNvPr id="54" name=""/>
+          <p:cNvPr id="84" name=""/>
           <p:cNvSpPr txBox="1"/>
           <p:nvPr/>
         </p:nvSpPr>
@@ -3586,7 +4173,7 @@
                 <a:uFillTx/>
                 <a:latin typeface="Arial"/>
               </a:rPr>
-              <a:t>One row per day — status, entries, totals, actions; today highlighted.</a:t>
+              <a:t>Granted / reserved / used / remaining — visible per employee and type.</a:t>
             </a:r>
             <a:endParaRPr lang="en-US" sz="1100" b="0" u="none" strike="noStrike">
               <a:solidFill>
@@ -3638,14 +4225,14 @@
       </p:grpSpPr>
       <p:sp>
         <p:nvSpPr>
-          <p:cNvPr id="55" name=""/>
-          <p:cNvSpPr txBox="1"/>
-          <p:nvPr/>
-        </p:nvSpPr>
-        <p:spPr>
-          <a:xfrm>
-            <a:off x="540000" y="252000"/>
-            <a:ext cx="9000000" cy="504000"/>
+          <p:cNvPr id="85" name=""/>
+          <p:cNvSpPr txBox="1"/>
+          <p:nvPr/>
+        </p:nvSpPr>
+        <p:spPr>
+          <a:xfrm>
+            <a:off x="540000" y="324000"/>
+            <a:ext cx="9000000" cy="576000"/>
           </a:xfrm>
           <a:prstGeom prst="rect">
             <a:avLst/>
@@ -3669,7 +4256,7 @@
                 <a:uFillTx/>
                 <a:latin typeface="Arial"/>
               </a:rPr>
-              <a:t>Employee Dashboard</a:t>
+              <a:t>Timesheets — Per-Day Submission</a:t>
             </a:r>
             <a:endParaRPr lang="en-US" sz="2600" b="0" u="none" strike="noStrike">
               <a:solidFill>
@@ -3684,13 +4271,13 @@
       </p:sp>
       <p:sp>
         <p:nvSpPr>
-          <p:cNvPr id="56" name=""/>
-          <p:cNvSpPr txBox="1"/>
-          <p:nvPr/>
-        </p:nvSpPr>
-        <p:spPr>
-          <a:xfrm>
-            <a:off x="540000" y="774000"/>
+          <p:cNvPr id="86" name=""/>
+          <p:cNvSpPr txBox="1"/>
+          <p:nvPr/>
+        </p:nvSpPr>
+        <p:spPr>
+          <a:xfrm>
+            <a:off x="540000" y="900000"/>
             <a:ext cx="1440000" cy="43200"/>
           </a:xfrm>
           <a:prstGeom prst="rect">
@@ -3719,45 +4306,23 @@
           </a:p>
         </p:txBody>
       </p:sp>
-      <p:pic>
-        <p:nvPicPr>
-          <p:cNvPr id="57" name=""/>
-          <p:cNvPicPr/>
-          <p:nvPr/>
-        </p:nvPicPr>
-        <p:blipFill>
-          <a:blip r:embed="rId1"/>
-          <a:stretch/>
-        </p:blipFill>
-        <p:spPr>
-          <a:xfrm>
-            <a:off x="1814400" y="1008000"/>
-            <a:ext cx="6451200" cy="4032000"/>
-          </a:xfrm>
-          <a:prstGeom prst="rect">
-            <a:avLst/>
-          </a:prstGeom>
-          <a:noFill/>
-          <a:ln w="0">
-            <a:noFill/>
-          </a:ln>
-        </p:spPr>
-      </p:pic>
-      <p:sp>
-        <p:nvSpPr>
-          <p:cNvPr id="58" name=""/>
-          <p:cNvSpPr txBox="1"/>
-          <p:nvPr/>
-        </p:nvSpPr>
-        <p:spPr>
-          <a:xfrm>
-            <a:off x="540000" y="5148000"/>
-            <a:ext cx="9000000" cy="360000"/>
-          </a:xfrm>
-          <a:prstGeom prst="rect">
-            <a:avLst/>
-          </a:prstGeom>
-          <a:noFill/>
+      <p:sp>
+        <p:nvSpPr>
+          <p:cNvPr id="87" name=""/>
+          <p:cNvSpPr txBox="1"/>
+          <p:nvPr/>
+        </p:nvSpPr>
+        <p:spPr>
+          <a:xfrm>
+            <a:off x="540000" y="1859400"/>
+            <a:ext cx="50400" cy="342000"/>
+          </a:xfrm>
+          <a:prstGeom prst="rect">
+            <a:avLst/>
+          </a:prstGeom>
+          <a:solidFill>
+            <a:srgbClr val="E6BF71"/>
+          </a:solidFill>
           <a:ln w="0">
             <a:noFill/>
           </a:ln>
@@ -3767,18 +4332,410 @@
             <a:spAutoFit/>
           </a:bodyPr>
           <a:p>
-            <a:r>
-              <a:rPr lang="en-US" sz="1100" b="0" i="1" u="none" strike="noStrike">
-                <a:solidFill>
-                  <a:srgbClr val="4A7A6F"/>
-                </a:solidFill>
-                <a:effectLst/>
-                <a:uFillTx/>
-                <a:latin typeface="Arial"/>
-              </a:rPr>
-              <a:t>Clickable status chips → filtered lists; allocation balance visible.</a:t>
-            </a:r>
-            <a:endParaRPr lang="en-US" sz="1100" b="0" u="none" strike="noStrike">
+            <a:endParaRPr lang="en-US" sz="1800" b="0" u="none" strike="noStrike">
+              <a:solidFill>
+                <a:srgbClr val="000000"/>
+              </a:solidFill>
+              <a:effectLst/>
+              <a:uFillTx/>
+              <a:latin typeface="Arial"/>
+            </a:endParaRPr>
+          </a:p>
+        </p:txBody>
+      </p:sp>
+      <p:sp>
+        <p:nvSpPr>
+          <p:cNvPr id="88" name=""/>
+          <p:cNvSpPr txBox="1"/>
+          <p:nvPr/>
+        </p:nvSpPr>
+        <p:spPr>
+          <a:xfrm>
+            <a:off x="540000" y="1805040"/>
+            <a:ext cx="9000000" cy="450360"/>
+          </a:xfrm>
+          <a:prstGeom prst="rect">
+            <a:avLst/>
+          </a:prstGeom>
+          <a:solidFill>
+            <a:srgbClr val="FFFFFF"/>
+          </a:solidFill>
+          <a:ln w="7200">
+            <a:solidFill>
+              <a:srgbClr val="DFE9E4"/>
+            </a:solidFill>
+            <a:round/>
+          </a:ln>
+        </p:spPr>
+        <p:txBody>
+          <a:bodyPr lIns="198000" tIns="115200" rIns="126000" bIns="115200" anchor="ctr">
+            <a:normAutofit/>
+          </a:bodyPr>
+          <a:p>
+            <a:r>
+              <a:rPr lang="en-US" sz="1550" b="0" u="none" strike="noStrike">
+                <a:solidFill>
+                  <a:srgbClr val="1A2E2B"/>
+                </a:solidFill>
+                <a:effectLst/>
+                <a:uFillTx/>
+                <a:latin typeface="Arial"/>
+              </a:rPr>
+              <a:t>Weekly sheet; each day submitted independently</a:t>
+            </a:r>
+            <a:endParaRPr lang="en-US" sz="1550" b="0" u="none" strike="noStrike">
+              <a:solidFill>
+                <a:srgbClr val="000000"/>
+              </a:solidFill>
+              <a:effectLst/>
+              <a:uFillTx/>
+              <a:latin typeface="Arial"/>
+            </a:endParaRPr>
+          </a:p>
+        </p:txBody>
+      </p:sp>
+      <p:sp>
+        <p:nvSpPr>
+          <p:cNvPr id="89" name=""/>
+          <p:cNvSpPr txBox="1"/>
+          <p:nvPr/>
+        </p:nvSpPr>
+        <p:spPr>
+          <a:xfrm>
+            <a:off x="540000" y="2352600"/>
+            <a:ext cx="50400" cy="493200"/>
+          </a:xfrm>
+          <a:prstGeom prst="rect">
+            <a:avLst/>
+          </a:prstGeom>
+          <a:solidFill>
+            <a:srgbClr val="E6BF71"/>
+          </a:solidFill>
+          <a:ln w="0">
+            <a:noFill/>
+          </a:ln>
+        </p:spPr>
+        <p:txBody>
+          <a:bodyPr lIns="90000" tIns="45000" rIns="90000" bIns="45000" anchor="t">
+            <a:spAutoFit/>
+          </a:bodyPr>
+          <a:p>
+            <a:endParaRPr lang="en-US" sz="1800" b="0" u="none" strike="noStrike">
+              <a:solidFill>
+                <a:srgbClr val="000000"/>
+              </a:solidFill>
+              <a:effectLst/>
+              <a:uFillTx/>
+              <a:latin typeface="Arial"/>
+            </a:endParaRPr>
+          </a:p>
+        </p:txBody>
+      </p:sp>
+      <p:sp>
+        <p:nvSpPr>
+          <p:cNvPr id="90" name=""/>
+          <p:cNvSpPr txBox="1"/>
+          <p:nvPr/>
+        </p:nvSpPr>
+        <p:spPr>
+          <a:xfrm>
+            <a:off x="540000" y="2352600"/>
+            <a:ext cx="9000000" cy="493200"/>
+          </a:xfrm>
+          <a:prstGeom prst="rect">
+            <a:avLst/>
+          </a:prstGeom>
+          <a:solidFill>
+            <a:srgbClr val="FFFFFF"/>
+          </a:solidFill>
+          <a:ln w="7200">
+            <a:solidFill>
+              <a:srgbClr val="DFE9E4"/>
+            </a:solidFill>
+            <a:round/>
+          </a:ln>
+        </p:spPr>
+        <p:txBody>
+          <a:bodyPr lIns="198000" tIns="115200" rIns="126000" bIns="115200" anchor="ctr">
+            <a:normAutofit/>
+          </a:bodyPr>
+          <a:p>
+            <a:r>
+              <a:rPr lang="en-US" sz="1550" b="0" u="none" strike="noStrike">
+                <a:solidFill>
+                  <a:srgbClr val="1A2E2B"/>
+                </a:solidFill>
+                <a:effectLst/>
+                <a:uFillTx/>
+                <a:latin typeface="Arial"/>
+              </a:rPr>
+              <a:t>Start/end + unpaid breaks, overnight split, no future work</a:t>
+            </a:r>
+            <a:endParaRPr lang="en-US" sz="1550" b="0" u="none" strike="noStrike">
+              <a:solidFill>
+                <a:srgbClr val="000000"/>
+              </a:solidFill>
+              <a:effectLst/>
+              <a:uFillTx/>
+              <a:latin typeface="Arial"/>
+            </a:endParaRPr>
+          </a:p>
+        </p:txBody>
+      </p:sp>
+      <p:sp>
+        <p:nvSpPr>
+          <p:cNvPr id="91" name=""/>
+          <p:cNvSpPr txBox="1"/>
+          <p:nvPr/>
+        </p:nvSpPr>
+        <p:spPr>
+          <a:xfrm>
+            <a:off x="540000" y="2997000"/>
+            <a:ext cx="50400" cy="493200"/>
+          </a:xfrm>
+          <a:prstGeom prst="rect">
+            <a:avLst/>
+          </a:prstGeom>
+          <a:solidFill>
+            <a:srgbClr val="E6BF71"/>
+          </a:solidFill>
+          <a:ln w="0">
+            <a:noFill/>
+          </a:ln>
+        </p:spPr>
+        <p:txBody>
+          <a:bodyPr lIns="90000" tIns="45000" rIns="90000" bIns="45000" anchor="t">
+            <a:spAutoFit/>
+          </a:bodyPr>
+          <a:p>
+            <a:endParaRPr lang="en-US" sz="1800" b="0" u="none" strike="noStrike">
+              <a:solidFill>
+                <a:srgbClr val="000000"/>
+              </a:solidFill>
+              <a:effectLst/>
+              <a:uFillTx/>
+              <a:latin typeface="Arial"/>
+            </a:endParaRPr>
+          </a:p>
+        </p:txBody>
+      </p:sp>
+      <p:sp>
+        <p:nvSpPr>
+          <p:cNvPr id="92" name=""/>
+          <p:cNvSpPr txBox="1"/>
+          <p:nvPr/>
+        </p:nvSpPr>
+        <p:spPr>
+          <a:xfrm>
+            <a:off x="540000" y="2997000"/>
+            <a:ext cx="9000000" cy="493200"/>
+          </a:xfrm>
+          <a:prstGeom prst="rect">
+            <a:avLst/>
+          </a:prstGeom>
+          <a:solidFill>
+            <a:srgbClr val="FFFFFF"/>
+          </a:solidFill>
+          <a:ln w="7200">
+            <a:solidFill>
+              <a:srgbClr val="DFE9E4"/>
+            </a:solidFill>
+            <a:round/>
+          </a:ln>
+        </p:spPr>
+        <p:txBody>
+          <a:bodyPr lIns="198000" tIns="115200" rIns="126000" bIns="115200" anchor="ctr">
+            <a:normAutofit/>
+          </a:bodyPr>
+          <a:p>
+            <a:r>
+              <a:rPr lang="en-US" sz="1550" b="0" u="none" strike="noStrike">
+                <a:solidFill>
+                  <a:srgbClr val="1A2E2B"/>
+                </a:solidFill>
+                <a:effectLst/>
+                <a:uFillTx/>
+                <a:latin typeface="Arial"/>
+              </a:rPr>
+              <a:t>Outside-window entries flagged — employee reason required</a:t>
+            </a:r>
+            <a:endParaRPr lang="en-US" sz="1550" b="0" u="none" strike="noStrike">
+              <a:solidFill>
+                <a:srgbClr val="000000"/>
+              </a:solidFill>
+              <a:effectLst/>
+              <a:uFillTx/>
+              <a:latin typeface="Arial"/>
+            </a:endParaRPr>
+          </a:p>
+        </p:txBody>
+      </p:sp>
+      <p:sp>
+        <p:nvSpPr>
+          <p:cNvPr id="93" name=""/>
+          <p:cNvSpPr txBox="1"/>
+          <p:nvPr/>
+        </p:nvSpPr>
+        <p:spPr>
+          <a:xfrm>
+            <a:off x="540000" y="3641400"/>
+            <a:ext cx="50400" cy="342000"/>
+          </a:xfrm>
+          <a:prstGeom prst="rect">
+            <a:avLst/>
+          </a:prstGeom>
+          <a:solidFill>
+            <a:srgbClr val="E6BF71"/>
+          </a:solidFill>
+          <a:ln w="0">
+            <a:noFill/>
+          </a:ln>
+        </p:spPr>
+        <p:txBody>
+          <a:bodyPr lIns="90000" tIns="45000" rIns="90000" bIns="45000" anchor="t">
+            <a:spAutoFit/>
+          </a:bodyPr>
+          <a:p>
+            <a:endParaRPr lang="en-US" sz="1800" b="0" u="none" strike="noStrike">
+              <a:solidFill>
+                <a:srgbClr val="000000"/>
+              </a:solidFill>
+              <a:effectLst/>
+              <a:uFillTx/>
+              <a:latin typeface="Arial"/>
+            </a:endParaRPr>
+          </a:p>
+        </p:txBody>
+      </p:sp>
+      <p:sp>
+        <p:nvSpPr>
+          <p:cNvPr id="94" name=""/>
+          <p:cNvSpPr txBox="1"/>
+          <p:nvPr/>
+        </p:nvSpPr>
+        <p:spPr>
+          <a:xfrm>
+            <a:off x="540000" y="3587040"/>
+            <a:ext cx="9000000" cy="450360"/>
+          </a:xfrm>
+          <a:prstGeom prst="rect">
+            <a:avLst/>
+          </a:prstGeom>
+          <a:solidFill>
+            <a:srgbClr val="FFFFFF"/>
+          </a:solidFill>
+          <a:ln w="7200">
+            <a:solidFill>
+              <a:srgbClr val="DFE9E4"/>
+            </a:solidFill>
+            <a:round/>
+          </a:ln>
+        </p:spPr>
+        <p:txBody>
+          <a:bodyPr lIns="198000" tIns="115200" rIns="126000" bIns="115200" anchor="ctr">
+            <a:normAutofit/>
+          </a:bodyPr>
+          <a:p>
+            <a:r>
+              <a:rPr lang="en-US" sz="1550" b="0" u="none" strike="noStrike">
+                <a:solidFill>
+                  <a:srgbClr val="1A2E2B"/>
+                </a:solidFill>
+                <a:effectLst/>
+                <a:uFillTx/>
+                <a:latin typeface="Arial"/>
+              </a:rPr>
+              <a:t>Two-stage review always: manager → HR; HR-only reopen</a:t>
+            </a:r>
+            <a:endParaRPr lang="en-US" sz="1550" b="0" u="none" strike="noStrike">
+              <a:solidFill>
+                <a:srgbClr val="000000"/>
+              </a:solidFill>
+              <a:effectLst/>
+              <a:uFillTx/>
+              <a:latin typeface="Arial"/>
+            </a:endParaRPr>
+          </a:p>
+        </p:txBody>
+      </p:sp>
+      <p:sp>
+        <p:nvSpPr>
+          <p:cNvPr id="95" name=""/>
+          <p:cNvSpPr txBox="1"/>
+          <p:nvPr/>
+        </p:nvSpPr>
+        <p:spPr>
+          <a:xfrm>
+            <a:off x="540000" y="4134600"/>
+            <a:ext cx="50400" cy="342000"/>
+          </a:xfrm>
+          <a:prstGeom prst="rect">
+            <a:avLst/>
+          </a:prstGeom>
+          <a:solidFill>
+            <a:srgbClr val="E6BF71"/>
+          </a:solidFill>
+          <a:ln w="0">
+            <a:noFill/>
+          </a:ln>
+        </p:spPr>
+        <p:txBody>
+          <a:bodyPr lIns="90000" tIns="45000" rIns="90000" bIns="45000" anchor="t">
+            <a:spAutoFit/>
+          </a:bodyPr>
+          <a:p>
+            <a:endParaRPr lang="en-US" sz="1800" b="0" u="none" strike="noStrike">
+              <a:solidFill>
+                <a:srgbClr val="000000"/>
+              </a:solidFill>
+              <a:effectLst/>
+              <a:uFillTx/>
+              <a:latin typeface="Arial"/>
+            </a:endParaRPr>
+          </a:p>
+        </p:txBody>
+      </p:sp>
+      <p:sp>
+        <p:nvSpPr>
+          <p:cNvPr id="96" name=""/>
+          <p:cNvSpPr txBox="1"/>
+          <p:nvPr/>
+        </p:nvSpPr>
+        <p:spPr>
+          <a:xfrm>
+            <a:off x="540000" y="4080240"/>
+            <a:ext cx="9000000" cy="450360"/>
+          </a:xfrm>
+          <a:prstGeom prst="rect">
+            <a:avLst/>
+          </a:prstGeom>
+          <a:solidFill>
+            <a:srgbClr val="FFFFFF"/>
+          </a:solidFill>
+          <a:ln w="7200">
+            <a:solidFill>
+              <a:srgbClr val="DFE9E4"/>
+            </a:solidFill>
+            <a:round/>
+          </a:ln>
+        </p:spPr>
+        <p:txBody>
+          <a:bodyPr lIns="198000" tIns="115200" rIns="126000" bIns="115200" anchor="ctr">
+            <a:normAutofit/>
+          </a:bodyPr>
+          <a:p>
+            <a:r>
+              <a:rPr lang="en-US" sz="1550" b="0" u="none" strike="noStrike">
+                <a:solidFill>
+                  <a:srgbClr val="1A2E2B"/>
+                </a:solidFill>
+                <a:effectLst/>
+                <a:uFillTx/>
+                <a:latin typeface="Arial"/>
+              </a:rPr>
+              <a:t>Punch widget: real check-in/out from the topbar</a:t>
+            </a:r>
+            <a:endParaRPr lang="en-US" sz="1550" b="0" u="none" strike="noStrike">
               <a:solidFill>
                 <a:srgbClr val="000000"/>
               </a:solidFill>
@@ -3828,7 +4785,7 @@
       </p:grpSpPr>
       <p:sp>
         <p:nvSpPr>
-          <p:cNvPr id="59" name=""/>
+          <p:cNvPr id="97" name=""/>
           <p:cNvSpPr txBox="1"/>
           <p:nvPr/>
         </p:nvSpPr>
@@ -3859,7 +4816,7 @@
                 <a:uFillTx/>
                 <a:latin typeface="Arial"/>
               </a:rPr>
-              <a:t>Manager / HR Scoped Views</a:t>
+              <a:t>The Week at a Glance</a:t>
             </a:r>
             <a:endParaRPr lang="en-US" sz="2600" b="0" u="none" strike="noStrike">
               <a:solidFill>
@@ -3874,7 +4831,7 @@
       </p:sp>
       <p:sp>
         <p:nvSpPr>
-          <p:cNvPr id="60" name=""/>
+          <p:cNvPr id="98" name=""/>
           <p:cNvSpPr txBox="1"/>
           <p:nvPr/>
         </p:nvSpPr>
@@ -3911,7 +4868,7 @@
       </p:sp>
       <p:pic>
         <p:nvPicPr>
-          <p:cNvPr id="61" name=""/>
+          <p:cNvPr id="99" name=""/>
           <p:cNvPicPr/>
           <p:nvPr/>
         </p:nvPicPr>
@@ -3935,7 +4892,7 @@
       </p:pic>
       <p:sp>
         <p:nvSpPr>
-          <p:cNvPr id="62" name=""/>
+          <p:cNvPr id="100" name=""/>
           <p:cNvSpPr txBox="1"/>
           <p:nvPr/>
         </p:nvSpPr>
@@ -3966,7 +4923,7 @@
                 <a:uFillTx/>
                 <a:latin typeface="Arial"/>
               </a:rPr>
-              <a:t>Team and org queues; own rows highlighted with a "You" badge.</a:t>
+              <a:t>One row per day — status, entries, totals, actions; today highlighted.</a:t>
             </a:r>
             <a:endParaRPr lang="en-US" sz="1100" b="0" u="none" strike="noStrike">
               <a:solidFill>
@@ -4018,7 +4975,7 @@
       </p:grpSpPr>
       <p:sp>
         <p:nvSpPr>
-          <p:cNvPr id="63" name=""/>
+          <p:cNvPr id="101" name=""/>
           <p:cNvSpPr txBox="1"/>
           <p:nvPr/>
         </p:nvSpPr>
@@ -4049,7 +5006,7 @@
                 <a:uFillTx/>
                 <a:latin typeface="Arial"/>
               </a:rPr>
-              <a:t>Reports</a:t>
+              <a:t>Employee Dashboard</a:t>
             </a:r>
             <a:endParaRPr lang="en-US" sz="2600" b="0" u="none" strike="noStrike">
               <a:solidFill>
@@ -4064,7 +5021,7 @@
       </p:sp>
       <p:sp>
         <p:nvSpPr>
-          <p:cNvPr id="64" name=""/>
+          <p:cNvPr id="102" name=""/>
           <p:cNvSpPr txBox="1"/>
           <p:nvPr/>
         </p:nvSpPr>
@@ -4101,7 +5058,7 @@
       </p:sp>
       <p:pic>
         <p:nvPicPr>
-          <p:cNvPr id="65" name=""/>
+          <p:cNvPr id="103" name=""/>
           <p:cNvPicPr/>
           <p:nvPr/>
         </p:nvPicPr>
@@ -4125,7 +5082,7 @@
       </p:pic>
       <p:sp>
         <p:nvSpPr>
-          <p:cNvPr id="66" name=""/>
+          <p:cNvPr id="104" name=""/>
           <p:cNvSpPr txBox="1"/>
           <p:nvPr/>
         </p:nvSpPr>
@@ -4156,7 +5113,7 @@
                 <a:uFillTx/>
                 <a:latin typeface="Arial"/>
               </a:rPr>
-              <a:t>Working-hours and requests reports, date-ranged, CSV export.</a:t>
+              <a:t>Clickable status chips → filtered lists; allocation balance visible.</a:t>
             </a:r>
             <a:endParaRPr lang="en-US" sz="1100" b="0" u="none" strike="noStrike">
               <a:solidFill>
@@ -4208,7 +5165,7 @@
       </p:grpSpPr>
       <p:sp>
         <p:nvSpPr>
-          <p:cNvPr id="67" name=""/>
+          <p:cNvPr id="105" name=""/>
           <p:cNvSpPr txBox="1"/>
           <p:nvPr/>
         </p:nvSpPr>
@@ -4239,7 +5196,7 @@
                 <a:uFillTx/>
                 <a:latin typeface="Arial"/>
               </a:rPr>
-              <a:t>HR Administration</a:t>
+              <a:t>Manager / HR Scoped Views</a:t>
             </a:r>
             <a:endParaRPr lang="en-US" sz="2600" b="0" u="none" strike="noStrike">
               <a:solidFill>
@@ -4254,7 +5211,7 @@
       </p:sp>
       <p:sp>
         <p:nvSpPr>
-          <p:cNvPr id="68" name=""/>
+          <p:cNvPr id="106" name=""/>
           <p:cNvSpPr txBox="1"/>
           <p:nvPr/>
         </p:nvSpPr>
@@ -4291,7 +5248,7 @@
       </p:sp>
       <p:pic>
         <p:nvPicPr>
-          <p:cNvPr id="69" name=""/>
+          <p:cNvPr id="107" name=""/>
           <p:cNvPicPr/>
           <p:nvPr/>
         </p:nvPicPr>
@@ -4315,7 +5272,7 @@
       </p:pic>
       <p:sp>
         <p:nvSpPr>
-          <p:cNvPr id="70" name=""/>
+          <p:cNvPr id="108" name=""/>
           <p:cNvSpPr txBox="1"/>
           <p:nvPr/>
         </p:nvSpPr>
@@ -4346,7 +5303,7 @@
                 <a:uFillTx/>
                 <a:latin typeface="Arial"/>
               </a:rPr>
-              <a:t>Request types, review stages, allocations, departments, audit.</a:t>
+              <a:t>Team and org queues; own rows highlighted with a "You" badge.</a:t>
             </a:r>
             <a:endParaRPr lang="en-US" sz="1100" b="0" u="none" strike="noStrike">
               <a:solidFill>
@@ -4398,14 +5355,14 @@
       </p:grpSpPr>
       <p:sp>
         <p:nvSpPr>
-          <p:cNvPr id="71" name=""/>
-          <p:cNvSpPr txBox="1"/>
-          <p:nvPr/>
-        </p:nvSpPr>
-        <p:spPr>
-          <a:xfrm>
-            <a:off x="540000" y="324000"/>
-            <a:ext cx="9000000" cy="576000"/>
+          <p:cNvPr id="109" name=""/>
+          <p:cNvSpPr txBox="1"/>
+          <p:nvPr/>
+        </p:nvSpPr>
+        <p:spPr>
+          <a:xfrm>
+            <a:off x="540000" y="252000"/>
+            <a:ext cx="9000000" cy="504000"/>
           </a:xfrm>
           <a:prstGeom prst="rect">
             <a:avLst/>
@@ -4429,7 +5386,7 @@
                 <a:uFillTx/>
                 <a:latin typeface="Arial"/>
               </a:rPr>
-              <a:t>Architecture</a:t>
+              <a:t>Employee Directory</a:t>
             </a:r>
             <a:endParaRPr lang="en-US" sz="2600" b="0" u="none" strike="noStrike">
               <a:solidFill>
@@ -4444,13 +5401,13 @@
       </p:sp>
       <p:sp>
         <p:nvSpPr>
-          <p:cNvPr id="72" name=""/>
-          <p:cNvSpPr txBox="1"/>
-          <p:nvPr/>
-        </p:nvSpPr>
-        <p:spPr>
-          <a:xfrm>
-            <a:off x="540000" y="900000"/>
+          <p:cNvPr id="110" name=""/>
+          <p:cNvSpPr txBox="1"/>
+          <p:nvPr/>
+        </p:nvSpPr>
+        <p:spPr>
+          <a:xfrm>
+            <a:off x="540000" y="774000"/>
             <a:ext cx="1440000" cy="43200"/>
           </a:xfrm>
           <a:prstGeom prst="rect">
@@ -4479,16 +5436,20 @@
           </a:p>
         </p:txBody>
       </p:sp>
-      <p:sp>
-        <p:nvSpPr>
-          <p:cNvPr id="73" name=""/>
-          <p:cNvSpPr txBox="1"/>
-          <p:nvPr/>
-        </p:nvSpPr>
-        <p:spPr>
-          <a:xfrm>
-            <a:off x="540000" y="1152000"/>
-            <a:ext cx="9000000" cy="3960000"/>
+      <p:pic>
+        <p:nvPicPr>
+          <p:cNvPr id="111" name=""/>
+          <p:cNvPicPr/>
+          <p:nvPr/>
+        </p:nvPicPr>
+        <p:blipFill>
+          <a:blip r:embed="rId1"/>
+          <a:stretch/>
+        </p:blipFill>
+        <p:spPr>
+          <a:xfrm>
+            <a:off x="1814400" y="1008000"/>
+            <a:ext cx="6451200" cy="4032000"/>
           </a:xfrm>
           <a:prstGeom prst="rect">
             <a:avLst/>
@@ -4498,86 +5459,43 @@
             <a:noFill/>
           </a:ln>
         </p:spPr>
+      </p:pic>
+      <p:sp>
+        <p:nvSpPr>
+          <p:cNvPr id="112" name=""/>
+          <p:cNvSpPr txBox="1"/>
+          <p:nvPr/>
+        </p:nvSpPr>
+        <p:spPr>
+          <a:xfrm>
+            <a:off x="540000" y="5148000"/>
+            <a:ext cx="9000000" cy="360000"/>
+          </a:xfrm>
+          <a:prstGeom prst="rect">
+            <a:avLst/>
+          </a:prstGeom>
+          <a:noFill/>
+          <a:ln w="0">
+            <a:noFill/>
+          </a:ln>
+        </p:spPr>
         <p:txBody>
           <a:bodyPr lIns="90000" tIns="45000" rIns="90000" bIns="45000" anchor="t">
             <a:spAutoFit/>
           </a:bodyPr>
           <a:p>
             <a:r>
-              <a:rPr lang="en-US" sz="1500" b="0" u="none" strike="noStrike">
-                <a:solidFill>
-                  <a:srgbClr val="1A2E2B"/>
-                </a:solidFill>
-                <a:effectLst/>
-                <a:uFillTx/>
-                <a:latin typeface="Arial"/>
-              </a:rPr>
-              <a:t>• React + TypeScript SPA → same-origin Nginx → Django/DRF → PostgreSQL 17</a:t>
-            </a:r>
-            <a:endParaRPr lang="en-US" sz="1500" b="0" u="none" strike="noStrike">
-              <a:solidFill>
-                <a:srgbClr val="000000"/>
-              </a:solidFill>
-              <a:effectLst/>
-              <a:uFillTx/>
-              <a:latin typeface="Arial"/>
-            </a:endParaRPr>
-          </a:p>
-          <a:p>
-            <a:r>
-              <a:rPr lang="en-US" sz="1500" b="0" u="none" strike="noStrike">
-                <a:solidFill>
-                  <a:srgbClr val="1A2E2B"/>
-                </a:solidFill>
-                <a:effectLst/>
-                <a:uFillTx/>
-                <a:latin typeface="Arial"/>
-              </a:rPr>
-              <a:t>• Modular monolith: explicit services, scoped querysets, thin API layer</a:t>
-            </a:r>
-            <a:endParaRPr lang="en-US" sz="1500" b="0" u="none" strike="noStrike">
-              <a:solidFill>
-                <a:srgbClr val="000000"/>
-              </a:solidFill>
-              <a:effectLst/>
-              <a:uFillTx/>
-              <a:latin typeface="Arial"/>
-            </a:endParaRPr>
-          </a:p>
-          <a:p>
-            <a:r>
-              <a:rPr lang="en-US" sz="1500" b="0" u="none" strike="noStrike">
-                <a:solidFill>
-                  <a:srgbClr val="1A2E2B"/>
-                </a:solidFill>
-                <a:effectLst/>
-                <a:uFillTx/>
-                <a:latin typeface="Arial"/>
-              </a:rPr>
-              <a:t>• One org per deployment; database unreachable from outside Docker network</a:t>
-            </a:r>
-            <a:endParaRPr lang="en-US" sz="1500" b="0" u="none" strike="noStrike">
-              <a:solidFill>
-                <a:srgbClr val="000000"/>
-              </a:solidFill>
-              <a:effectLst/>
-              <a:uFillTx/>
-              <a:latin typeface="Arial"/>
-            </a:endParaRPr>
-          </a:p>
-          <a:p>
-            <a:r>
-              <a:rPr lang="en-US" sz="1500" b="0" u="none" strike="noStrike">
-                <a:solidFill>
-                  <a:srgbClr val="1A2E2B"/>
-                </a:solidFill>
-                <a:effectLst/>
-                <a:uFillTx/>
-                <a:latin typeface="Arial"/>
-              </a:rPr>
-              <a:t>• Documented: architecture/api.md + erd.md + OpenAPI schema</a:t>
-            </a:r>
-            <a:endParaRPr lang="en-US" sz="1500" b="0" u="none" strike="noStrike">
+              <a:rPr lang="en-US" sz="1100" b="0" i="1" u="none" strike="noStrike">
+                <a:solidFill>
+                  <a:srgbClr val="4A7A6F"/>
+                </a:solidFill>
+                <a:effectLst/>
+                <a:uFillTx/>
+                <a:latin typeface="Arial"/>
+              </a:rPr>
+              <a:t>Searchable, sortable directory — departments, roles, status.</a:t>
+            </a:r>
+            <a:endParaRPr lang="en-US" sz="1100" b="0" u="none" strike="noStrike">
               <a:solidFill>
                 <a:srgbClr val="000000"/>
               </a:solidFill>
@@ -4627,14 +5545,14 @@
       </p:grpSpPr>
       <p:sp>
         <p:nvSpPr>
-          <p:cNvPr id="74" name=""/>
-          <p:cNvSpPr txBox="1"/>
-          <p:nvPr/>
-        </p:nvSpPr>
-        <p:spPr>
-          <a:xfrm>
-            <a:off x="540000" y="324000"/>
-            <a:ext cx="9000000" cy="576000"/>
+          <p:cNvPr id="113" name=""/>
+          <p:cNvSpPr txBox="1"/>
+          <p:nvPr/>
+        </p:nvSpPr>
+        <p:spPr>
+          <a:xfrm>
+            <a:off x="540000" y="252000"/>
+            <a:ext cx="9000000" cy="504000"/>
           </a:xfrm>
           <a:prstGeom prst="rect">
             <a:avLst/>
@@ -4658,7 +5576,7 @@
                 <a:uFillTx/>
                 <a:latin typeface="Arial"/>
               </a:rPr>
-              <a:t>Security</a:t>
+              <a:t>Departments</a:t>
             </a:r>
             <a:endParaRPr lang="en-US" sz="2600" b="0" u="none" strike="noStrike">
               <a:solidFill>
@@ -4673,13 +5591,13 @@
       </p:sp>
       <p:sp>
         <p:nvSpPr>
-          <p:cNvPr id="75" name=""/>
-          <p:cNvSpPr txBox="1"/>
-          <p:nvPr/>
-        </p:nvSpPr>
-        <p:spPr>
-          <a:xfrm>
-            <a:off x="540000" y="900000"/>
+          <p:cNvPr id="114" name=""/>
+          <p:cNvSpPr txBox="1"/>
+          <p:nvPr/>
+        </p:nvSpPr>
+        <p:spPr>
+          <a:xfrm>
+            <a:off x="540000" y="774000"/>
             <a:ext cx="1440000" cy="43200"/>
           </a:xfrm>
           <a:prstGeom prst="rect">
@@ -4708,16 +5626,20 @@
           </a:p>
         </p:txBody>
       </p:sp>
-      <p:sp>
-        <p:nvSpPr>
-          <p:cNvPr id="76" name=""/>
-          <p:cNvSpPr txBox="1"/>
-          <p:nvPr/>
-        </p:nvSpPr>
-        <p:spPr>
-          <a:xfrm>
-            <a:off x="540000" y="1152000"/>
-            <a:ext cx="9000000" cy="3960000"/>
+      <p:pic>
+        <p:nvPicPr>
+          <p:cNvPr id="115" name=""/>
+          <p:cNvPicPr/>
+          <p:nvPr/>
+        </p:nvPicPr>
+        <p:blipFill>
+          <a:blip r:embed="rId1"/>
+          <a:stretch/>
+        </p:blipFill>
+        <p:spPr>
+          <a:xfrm>
+            <a:off x="1814400" y="1008000"/>
+            <a:ext cx="6451200" cy="4032000"/>
           </a:xfrm>
           <a:prstGeom prst="rect">
             <a:avLst/>
@@ -4727,86 +5649,43 @@
             <a:noFill/>
           </a:ln>
         </p:spPr>
+      </p:pic>
+      <p:sp>
+        <p:nvSpPr>
+          <p:cNvPr id="116" name=""/>
+          <p:cNvSpPr txBox="1"/>
+          <p:nvPr/>
+        </p:nvSpPr>
+        <p:spPr>
+          <a:xfrm>
+            <a:off x="540000" y="5148000"/>
+            <a:ext cx="9000000" cy="360000"/>
+          </a:xfrm>
+          <a:prstGeom prst="rect">
+            <a:avLst/>
+          </a:prstGeom>
+          <a:noFill/>
+          <a:ln w="0">
+            <a:noFill/>
+          </a:ln>
+        </p:spPr>
         <p:txBody>
           <a:bodyPr lIns="90000" tIns="45000" rIns="90000" bIns="45000" anchor="t">
             <a:spAutoFit/>
           </a:bodyPr>
           <a:p>
             <a:r>
-              <a:rPr lang="en-US" sz="1500" b="0" u="none" strike="noStrike">
-                <a:solidFill>
-                  <a:srgbClr val="1A2E2B"/>
-                </a:solidFill>
-                <a:effectLst/>
-                <a:uFillTx/>
-                <a:latin typeface="Arial"/>
-              </a:rPr>
-              <a:t>• Server-enforced RBAC + ownership scoping on every endpoint</a:t>
-            </a:r>
-            <a:endParaRPr lang="en-US" sz="1500" b="0" u="none" strike="noStrike">
-              <a:solidFill>
-                <a:srgbClr val="000000"/>
-              </a:solidFill>
-              <a:effectLst/>
-              <a:uFillTx/>
-              <a:latin typeface="Arial"/>
-            </a:endParaRPr>
-          </a:p>
-          <a:p>
-            <a:r>
-              <a:rPr lang="en-US" sz="1500" b="0" u="none" strike="noStrike">
-                <a:solidFill>
-                  <a:srgbClr val="1A2E2B"/>
-                </a:solidFill>
-                <a:effectLst/>
-                <a:uFillTx/>
-                <a:latin typeface="Arial"/>
-              </a:rPr>
-              <a:t>• Session auth + CSRF; throttling: 5/5min per account, 20/5min per IP</a:t>
-            </a:r>
-            <a:endParaRPr lang="en-US" sz="1500" b="0" u="none" strike="noStrike">
-              <a:solidFill>
-                <a:srgbClr val="000000"/>
-              </a:solidFill>
-              <a:effectLst/>
-              <a:uFillTx/>
-              <a:latin typeface="Arial"/>
-            </a:endParaRPr>
-          </a:p>
-          <a:p>
-            <a:r>
-              <a:rPr lang="en-US" sz="1500" b="0" u="none" strike="noStrike">
-                <a:solidFill>
-                  <a:srgbClr val="1A2E2B"/>
-                </a:solidFill>
-                <a:effectLst/>
-                <a:uFillTx/>
-                <a:latin typeface="Arial"/>
-              </a:rPr>
-              <a:t>• No secrets in git; encrypted-at-rest volumes, private DB network</a:t>
-            </a:r>
-            <a:endParaRPr lang="en-US" sz="1500" b="0" u="none" strike="noStrike">
-              <a:solidFill>
-                <a:srgbClr val="000000"/>
-              </a:solidFill>
-              <a:effectLst/>
-              <a:uFillTx/>
-              <a:latin typeface="Arial"/>
-            </a:endParaRPr>
-          </a:p>
-          <a:p>
-            <a:r>
-              <a:rPr lang="en-US" sz="1500" b="0" u="none" strike="noStrike">
-                <a:solidFill>
-                  <a:srgbClr val="1A2E2B"/>
-                </a:solidFill>
-                <a:effectLst/>
-                <a:uFillTx/>
-                <a:latin typeface="Arial"/>
-              </a:rPr>
-              <a:t>• Evidence: 31 security tests, negative tests per endpoint</a:t>
-            </a:r>
-            <a:endParaRPr lang="en-US" sz="1500" b="0" u="none" strike="noStrike">
+              <a:rPr lang="en-US" sz="1100" b="0" i="1" u="none" strike="noStrike">
+                <a:solidFill>
+                  <a:srgbClr val="4A7A6F"/>
+                </a:solidFill>
+                <a:effectLst/>
+                <a:uFillTx/>
+                <a:latin typeface="Arial"/>
+              </a:rPr>
+              <a:t>Org structure with manager assignment and member lists.</a:t>
+            </a:r>
+            <a:endParaRPr lang="en-US" sz="1100" b="0" u="none" strike="noStrike">
               <a:solidFill>
                 <a:srgbClr val="000000"/>
               </a:solidFill>
@@ -4856,14 +5735,14 @@
       </p:grpSpPr>
       <p:sp>
         <p:nvSpPr>
-          <p:cNvPr id="77" name=""/>
-          <p:cNvSpPr txBox="1"/>
-          <p:nvPr/>
-        </p:nvSpPr>
-        <p:spPr>
-          <a:xfrm>
-            <a:off x="540000" y="324000"/>
-            <a:ext cx="9000000" cy="576000"/>
+          <p:cNvPr id="117" name=""/>
+          <p:cNvSpPr txBox="1"/>
+          <p:nvPr/>
+        </p:nvSpPr>
+        <p:spPr>
+          <a:xfrm>
+            <a:off x="540000" y="252000"/>
+            <a:ext cx="9000000" cy="504000"/>
           </a:xfrm>
           <a:prstGeom prst="rect">
             <a:avLst/>
@@ -4887,7 +5766,7 @@
                 <a:uFillTx/>
                 <a:latin typeface="Arial"/>
               </a:rPr>
-              <a:t>Deployment &amp; Operations</a:t>
+              <a:t>Notifications</a:t>
             </a:r>
             <a:endParaRPr lang="en-US" sz="2600" b="0" u="none" strike="noStrike">
               <a:solidFill>
@@ -4902,13 +5781,13 @@
       </p:sp>
       <p:sp>
         <p:nvSpPr>
-          <p:cNvPr id="78" name=""/>
-          <p:cNvSpPr txBox="1"/>
-          <p:nvPr/>
-        </p:nvSpPr>
-        <p:spPr>
-          <a:xfrm>
-            <a:off x="540000" y="900000"/>
+          <p:cNvPr id="118" name=""/>
+          <p:cNvSpPr txBox="1"/>
+          <p:nvPr/>
+        </p:nvSpPr>
+        <p:spPr>
+          <a:xfrm>
+            <a:off x="540000" y="774000"/>
             <a:ext cx="1440000" cy="43200"/>
           </a:xfrm>
           <a:prstGeom prst="rect">
@@ -4937,16 +5816,20 @@
           </a:p>
         </p:txBody>
       </p:sp>
-      <p:sp>
-        <p:nvSpPr>
-          <p:cNvPr id="79" name=""/>
-          <p:cNvSpPr txBox="1"/>
-          <p:nvPr/>
-        </p:nvSpPr>
-        <p:spPr>
-          <a:xfrm>
-            <a:off x="540000" y="1152000"/>
-            <a:ext cx="9000000" cy="3960000"/>
+      <p:pic>
+        <p:nvPicPr>
+          <p:cNvPr id="119" name=""/>
+          <p:cNvPicPr/>
+          <p:nvPr/>
+        </p:nvPicPr>
+        <p:blipFill>
+          <a:blip r:embed="rId1"/>
+          <a:stretch/>
+        </p:blipFill>
+        <p:spPr>
+          <a:xfrm>
+            <a:off x="1814400" y="1008000"/>
+            <a:ext cx="6451200" cy="4032000"/>
           </a:xfrm>
           <a:prstGeom prst="rect">
             <a:avLst/>
@@ -4956,65 +5839,43 @@
             <a:noFill/>
           </a:ln>
         </p:spPr>
+      </p:pic>
+      <p:sp>
+        <p:nvSpPr>
+          <p:cNvPr id="120" name=""/>
+          <p:cNvSpPr txBox="1"/>
+          <p:nvPr/>
+        </p:nvSpPr>
+        <p:spPr>
+          <a:xfrm>
+            <a:off x="540000" y="5148000"/>
+            <a:ext cx="9000000" cy="360000"/>
+          </a:xfrm>
+          <a:prstGeom prst="rect">
+            <a:avLst/>
+          </a:prstGeom>
+          <a:noFill/>
+          <a:ln w="0">
+            <a:noFill/>
+          </a:ln>
+        </p:spPr>
         <p:txBody>
           <a:bodyPr lIns="90000" tIns="45000" rIns="90000" bIns="45000" anchor="t">
             <a:spAutoFit/>
           </a:bodyPr>
           <a:p>
             <a:r>
-              <a:rPr lang="en-US" sz="1500" b="0" u="none" strike="noStrike">
-                <a:solidFill>
-                  <a:srgbClr val="1A2E2B"/>
-                </a:solidFill>
-                <a:effectLst/>
-                <a:uFillTx/>
-                <a:latin typeface="Arial"/>
-              </a:rPr>
-              <a:t>• Docker Compose stack; Nginx Proxy Manager public edge</a:t>
-            </a:r>
-            <a:endParaRPr lang="en-US" sz="1500" b="0" u="none" strike="noStrike">
-              <a:solidFill>
-                <a:srgbClr val="000000"/>
-              </a:solidFill>
-              <a:effectLst/>
-              <a:uFillTx/>
-              <a:latin typeface="Arial"/>
-            </a:endParaRPr>
-          </a:p>
-          <a:p>
-            <a:r>
-              <a:rPr lang="en-US" sz="1500" b="0" u="none" strike="noStrike">
-                <a:solidFill>
-                  <a:srgbClr val="1A2E2B"/>
-                </a:solidFill>
-                <a:effectLst/>
-                <a:uFillTx/>
-                <a:latin typeface="Arial"/>
-              </a:rPr>
-              <a:t>• CI → deploy: push to main → test gate → rebuild → smoke check</a:t>
-            </a:r>
-            <a:endParaRPr lang="en-US" sz="1500" b="0" u="none" strike="noStrike">
-              <a:solidFill>
-                <a:srgbClr val="000000"/>
-              </a:solidFill>
-              <a:effectLst/>
-              <a:uFillTx/>
-              <a:latin typeface="Arial"/>
-            </a:endParaRPr>
-          </a:p>
-          <a:p>
-            <a:r>
-              <a:rPr lang="en-US" sz="1500" b="0" u="none" strike="noStrike">
-                <a:solidFill>
-                  <a:srgbClr val="1A2E2B"/>
-                </a:solidFill>
-                <a:effectLst/>
-                <a:uFillTx/>
-                <a:latin typeface="Arial"/>
-              </a:rPr>
-              <a:t>• Portainer for container ops; runbook: deploy/rollback/backup/triage</a:t>
-            </a:r>
-            <a:endParaRPr lang="en-US" sz="1500" b="0" u="none" strike="noStrike">
+              <a:rPr lang="en-US" sz="1100" b="0" i="1" u="none" strike="noStrike">
+                <a:solidFill>
+                  <a:srgbClr val="4A7A6F"/>
+                </a:solidFill>
+                <a:effectLst/>
+                <a:uFillTx/>
+                <a:latin typeface="Arial"/>
+              </a:rPr>
+              <a:t>Persistent inbox: unread badge, filters, click-through to the record.</a:t>
+            </a:r>
+            <a:endParaRPr lang="en-US" sz="1100" b="0" u="none" strike="noStrike">
               <a:solidFill>
                 <a:srgbClr val="000000"/>
               </a:solidFill>
@@ -5064,14 +5925,14 @@
       </p:grpSpPr>
       <p:sp>
         <p:nvSpPr>
-          <p:cNvPr id="80" name=""/>
-          <p:cNvSpPr txBox="1"/>
-          <p:nvPr/>
-        </p:nvSpPr>
-        <p:spPr>
-          <a:xfrm>
-            <a:off x="540000" y="324000"/>
-            <a:ext cx="9000000" cy="576000"/>
+          <p:cNvPr id="121" name=""/>
+          <p:cNvSpPr txBox="1"/>
+          <p:nvPr/>
+        </p:nvSpPr>
+        <p:spPr>
+          <a:xfrm>
+            <a:off x="540000" y="252000"/>
+            <a:ext cx="9000000" cy="504000"/>
           </a:xfrm>
           <a:prstGeom prst="rect">
             <a:avLst/>
@@ -5095,7 +5956,7 @@
                 <a:uFillTx/>
                 <a:latin typeface="Arial"/>
               </a:rPr>
-              <a:t>Spec Kit Process</a:t>
+              <a:t>Reports</a:t>
             </a:r>
             <a:endParaRPr lang="en-US" sz="2600" b="0" u="none" strike="noStrike">
               <a:solidFill>
@@ -5110,13 +5971,13 @@
       </p:sp>
       <p:sp>
         <p:nvSpPr>
-          <p:cNvPr id="81" name=""/>
-          <p:cNvSpPr txBox="1"/>
-          <p:nvPr/>
-        </p:nvSpPr>
-        <p:spPr>
-          <a:xfrm>
-            <a:off x="540000" y="900000"/>
+          <p:cNvPr id="122" name=""/>
+          <p:cNvSpPr txBox="1"/>
+          <p:nvPr/>
+        </p:nvSpPr>
+        <p:spPr>
+          <a:xfrm>
+            <a:off x="540000" y="774000"/>
             <a:ext cx="1440000" cy="43200"/>
           </a:xfrm>
           <a:prstGeom prst="rect">
@@ -5145,16 +6006,20 @@
           </a:p>
         </p:txBody>
       </p:sp>
-      <p:sp>
-        <p:nvSpPr>
-          <p:cNvPr id="82" name=""/>
-          <p:cNvSpPr txBox="1"/>
-          <p:nvPr/>
-        </p:nvSpPr>
-        <p:spPr>
-          <a:xfrm>
-            <a:off x="540000" y="1152000"/>
-            <a:ext cx="9000000" cy="3960000"/>
+      <p:pic>
+        <p:nvPicPr>
+          <p:cNvPr id="123" name=""/>
+          <p:cNvPicPr/>
+          <p:nvPr/>
+        </p:nvPicPr>
+        <p:blipFill>
+          <a:blip r:embed="rId1"/>
+          <a:stretch/>
+        </p:blipFill>
+        <p:spPr>
+          <a:xfrm>
+            <a:off x="1814400" y="1008000"/>
+            <a:ext cx="6451200" cy="4032000"/>
           </a:xfrm>
           <a:prstGeom prst="rect">
             <a:avLst/>
@@ -5164,86 +6029,43 @@
             <a:noFill/>
           </a:ln>
         </p:spPr>
+      </p:pic>
+      <p:sp>
+        <p:nvSpPr>
+          <p:cNvPr id="124" name=""/>
+          <p:cNvSpPr txBox="1"/>
+          <p:nvPr/>
+        </p:nvSpPr>
+        <p:spPr>
+          <a:xfrm>
+            <a:off x="540000" y="5148000"/>
+            <a:ext cx="9000000" cy="360000"/>
+          </a:xfrm>
+          <a:prstGeom prst="rect">
+            <a:avLst/>
+          </a:prstGeom>
+          <a:noFill/>
+          <a:ln w="0">
+            <a:noFill/>
+          </a:ln>
+        </p:spPr>
         <p:txBody>
           <a:bodyPr lIns="90000" tIns="45000" rIns="90000" bIns="45000" anchor="t">
             <a:spAutoFit/>
           </a:bodyPr>
           <a:p>
             <a:r>
-              <a:rPr lang="en-US" sz="1500" b="0" u="none" strike="noStrike">
-                <a:solidFill>
-                  <a:srgbClr val="1A2E2B"/>
-                </a:solidFill>
-                <a:effectLst/>
-                <a:uFillTx/>
-                <a:latin typeface="Arial"/>
-              </a:rPr>
-              <a:t>• Constitution ratified first (v1.0.0)</a:t>
-            </a:r>
-            <a:endParaRPr lang="en-US" sz="1500" b="0" u="none" strike="noStrike">
-              <a:solidFill>
-                <a:srgbClr val="000000"/>
-              </a:solidFill>
-              <a:effectLst/>
-              <a:uFillTx/>
-              <a:latin typeface="Arial"/>
-            </a:endParaRPr>
-          </a:p>
-          <a:p>
-            <a:r>
-              <a:rPr lang="en-US" sz="1500" b="0" u="none" strike="noStrike">
-                <a:solidFill>
-                  <a:srgbClr val="1A2E2B"/>
-                </a:solidFill>
-                <a:effectLst/>
-                <a:uFillTx/>
-                <a:latin typeface="Arial"/>
-              </a:rPr>
-              <a:t>• 8 features: spec → plan → tasks → implement → evidence → acceptance</a:t>
-            </a:r>
-            <a:endParaRPr lang="en-US" sz="1500" b="0" u="none" strike="noStrike">
-              <a:solidFill>
-                <a:srgbClr val="000000"/>
-              </a:solidFill>
-              <a:effectLst/>
-              <a:uFillTx/>
-              <a:latin typeface="Arial"/>
-            </a:endParaRPr>
-          </a:p>
-          <a:p>
-            <a:r>
-              <a:rPr lang="en-US" sz="1500" b="0" u="none" strike="noStrike">
-                <a:solidFill>
-                  <a:srgbClr val="1A2E2B"/>
-                </a:solidFill>
-                <a:effectLst/>
-                <a:uFillTx/>
-                <a:latin typeface="Arial"/>
-              </a:rPr>
-              <a:t>• 11 recorded decisions (D-001…D-011): asked, dated, traced</a:t>
-            </a:r>
-            <a:endParaRPr lang="en-US" sz="1500" b="0" u="none" strike="noStrike">
-              <a:solidFill>
-                <a:srgbClr val="000000"/>
-              </a:solidFill>
-              <a:effectLst/>
-              <a:uFillTx/>
-              <a:latin typeface="Arial"/>
-            </a:endParaRPr>
-          </a:p>
-          <a:p>
-            <a:r>
-              <a:rPr lang="en-US" sz="1500" b="0" u="none" strike="noStrike">
-                <a:solidFill>
-                  <a:srgbClr val="1A2E2B"/>
-                </a:solidFill>
-                <a:effectLst/>
-                <a:uFillTx/>
-                <a:latin typeface="Arial"/>
-              </a:rPr>
-              <a:t>• All phases owner-accepted — including the live deployment</a:t>
-            </a:r>
-            <a:endParaRPr lang="en-US" sz="1500" b="0" u="none" strike="noStrike">
+              <a:rPr lang="en-US" sz="1100" b="0" i="1" u="none" strike="noStrike">
+                <a:solidFill>
+                  <a:srgbClr val="4A7A6F"/>
+                </a:solidFill>
+                <a:effectLst/>
+                <a:uFillTx/>
+                <a:latin typeface="Arial"/>
+              </a:rPr>
+              <a:t>Working-hours and requests reports, date-ranged, CSV export.</a:t>
+            </a:r>
+            <a:endParaRPr lang="en-US" sz="1100" b="0" u="none" strike="noStrike">
               <a:solidFill>
                 <a:srgbClr val="000000"/>
               </a:solidFill>
@@ -5382,13 +6204,15 @@
         </p:nvSpPr>
         <p:spPr>
           <a:xfrm>
-            <a:off x="540000" y="1152000"/>
-            <a:ext cx="9000000" cy="3960000"/>
-          </a:xfrm>
-          <a:prstGeom prst="rect">
-            <a:avLst/>
-          </a:prstGeom>
-          <a:noFill/>
+            <a:off x="540000" y="2277000"/>
+            <a:ext cx="50400" cy="493200"/>
+          </a:xfrm>
+          <a:prstGeom prst="rect">
+            <a:avLst/>
+          </a:prstGeom>
+          <a:solidFill>
+            <a:srgbClr val="E6BF71"/>
+          </a:solidFill>
           <a:ln w="0">
             <a:noFill/>
           </a:ln>
@@ -5398,8 +6222,48 @@
             <a:spAutoFit/>
           </a:bodyPr>
           <a:p>
-            <a:r>
-              <a:rPr lang="en-US" sz="1500" b="0" u="none" strike="noStrike">
+            <a:endParaRPr lang="en-US" sz="1800" b="0" u="none" strike="noStrike">
+              <a:solidFill>
+                <a:srgbClr val="000000"/>
+              </a:solidFill>
+              <a:effectLst/>
+              <a:uFillTx/>
+              <a:latin typeface="Arial"/>
+            </a:endParaRPr>
+          </a:p>
+        </p:txBody>
+      </p:sp>
+      <p:sp>
+        <p:nvSpPr>
+          <p:cNvPr id="23" name=""/>
+          <p:cNvSpPr txBox="1"/>
+          <p:nvPr/>
+        </p:nvSpPr>
+        <p:spPr>
+          <a:xfrm>
+            <a:off x="540000" y="2277000"/>
+            <a:ext cx="9000000" cy="493200"/>
+          </a:xfrm>
+          <a:prstGeom prst="rect">
+            <a:avLst/>
+          </a:prstGeom>
+          <a:solidFill>
+            <a:srgbClr val="FFFFFF"/>
+          </a:solidFill>
+          <a:ln w="7200">
+            <a:solidFill>
+              <a:srgbClr val="DFE9E4"/>
+            </a:solidFill>
+            <a:round/>
+          </a:ln>
+        </p:spPr>
+        <p:txBody>
+          <a:bodyPr lIns="198000" tIns="115200" rIns="126000" bIns="115200" anchor="ctr">
+            <a:normAutofit/>
+          </a:bodyPr>
+          <a:p>
+            <a:r>
+              <a:rPr lang="en-US" sz="1550" b="0" u="none" strike="noStrike">
                 <a:solidFill>
                   <a:srgbClr val="1A2E2B"/>
                 </a:solidFill>
@@ -5407,20 +6271,87 @@
                 <a:uFillTx/>
                 <a:latin typeface="Arial"/>
               </a:rPr>
-              <a:t>• Requests and hours scattered across chat, paper, spreadsheets</a:t>
-            </a:r>
-            <a:endParaRPr lang="en-US" sz="1500" b="0" u="none" strike="noStrike">
-              <a:solidFill>
-                <a:srgbClr val="000000"/>
-              </a:solidFill>
-              <a:effectLst/>
-              <a:uFillTx/>
-              <a:latin typeface="Arial"/>
-            </a:endParaRPr>
-          </a:p>
-          <a:p>
-            <a:r>
-              <a:rPr lang="en-US" sz="1500" b="0" u="none" strike="noStrike">
+              <a:t>Requests and hours scattered across chat, paper, spreadsheets</a:t>
+            </a:r>
+            <a:endParaRPr lang="en-US" sz="1550" b="0" u="none" strike="noStrike">
+              <a:solidFill>
+                <a:srgbClr val="000000"/>
+              </a:solidFill>
+              <a:effectLst/>
+              <a:uFillTx/>
+              <a:latin typeface="Arial"/>
+            </a:endParaRPr>
+          </a:p>
+        </p:txBody>
+      </p:sp>
+      <p:sp>
+        <p:nvSpPr>
+          <p:cNvPr id="24" name=""/>
+          <p:cNvSpPr txBox="1"/>
+          <p:nvPr/>
+        </p:nvSpPr>
+        <p:spPr>
+          <a:xfrm>
+            <a:off x="540000" y="2921400"/>
+            <a:ext cx="50400" cy="493200"/>
+          </a:xfrm>
+          <a:prstGeom prst="rect">
+            <a:avLst/>
+          </a:prstGeom>
+          <a:solidFill>
+            <a:srgbClr val="E6BF71"/>
+          </a:solidFill>
+          <a:ln w="0">
+            <a:noFill/>
+          </a:ln>
+        </p:spPr>
+        <p:txBody>
+          <a:bodyPr lIns="90000" tIns="45000" rIns="90000" bIns="45000" anchor="t">
+            <a:spAutoFit/>
+          </a:bodyPr>
+          <a:p>
+            <a:endParaRPr lang="en-US" sz="1800" b="0" u="none" strike="noStrike">
+              <a:solidFill>
+                <a:srgbClr val="000000"/>
+              </a:solidFill>
+              <a:effectLst/>
+              <a:uFillTx/>
+              <a:latin typeface="Arial"/>
+            </a:endParaRPr>
+          </a:p>
+        </p:txBody>
+      </p:sp>
+      <p:sp>
+        <p:nvSpPr>
+          <p:cNvPr id="25" name=""/>
+          <p:cNvSpPr txBox="1"/>
+          <p:nvPr/>
+        </p:nvSpPr>
+        <p:spPr>
+          <a:xfrm>
+            <a:off x="540000" y="2921400"/>
+            <a:ext cx="9000000" cy="493200"/>
+          </a:xfrm>
+          <a:prstGeom prst="rect">
+            <a:avLst/>
+          </a:prstGeom>
+          <a:solidFill>
+            <a:srgbClr val="FFFFFF"/>
+          </a:solidFill>
+          <a:ln w="7200">
+            <a:solidFill>
+              <a:srgbClr val="DFE9E4"/>
+            </a:solidFill>
+            <a:round/>
+          </a:ln>
+        </p:spPr>
+        <p:txBody>
+          <a:bodyPr lIns="198000" tIns="115200" rIns="126000" bIns="115200" anchor="ctr">
+            <a:normAutofit/>
+          </a:bodyPr>
+          <a:p>
+            <a:r>
+              <a:rPr lang="en-US" sz="1550" b="0" u="none" strike="noStrike">
                 <a:solidFill>
                   <a:srgbClr val="1A2E2B"/>
                 </a:solidFill>
@@ -5428,20 +6359,87 @@
                 <a:uFillTx/>
                 <a:latin typeface="Arial"/>
               </a:rPr>
-              <a:t>• No answers to: who approved it? where did the hours go? what is pending?</a:t>
-            </a:r>
-            <a:endParaRPr lang="en-US" sz="1500" b="0" u="none" strike="noStrike">
-              <a:solidFill>
-                <a:srgbClr val="000000"/>
-              </a:solidFill>
-              <a:effectLst/>
-              <a:uFillTx/>
-              <a:latin typeface="Arial"/>
-            </a:endParaRPr>
-          </a:p>
-          <a:p>
-            <a:r>
-              <a:rPr lang="en-US" sz="1500" b="0" u="none" strike="noStrike">
+              <a:t>No answers to: who approved it? where did the hours go? what is pending?</a:t>
+            </a:r>
+            <a:endParaRPr lang="en-US" sz="1550" b="0" u="none" strike="noStrike">
+              <a:solidFill>
+                <a:srgbClr val="000000"/>
+              </a:solidFill>
+              <a:effectLst/>
+              <a:uFillTx/>
+              <a:latin typeface="Arial"/>
+            </a:endParaRPr>
+          </a:p>
+        </p:txBody>
+      </p:sp>
+      <p:sp>
+        <p:nvSpPr>
+          <p:cNvPr id="26" name=""/>
+          <p:cNvSpPr txBox="1"/>
+          <p:nvPr/>
+        </p:nvSpPr>
+        <p:spPr>
+          <a:xfrm>
+            <a:off x="540000" y="3565800"/>
+            <a:ext cx="50400" cy="493200"/>
+          </a:xfrm>
+          <a:prstGeom prst="rect">
+            <a:avLst/>
+          </a:prstGeom>
+          <a:solidFill>
+            <a:srgbClr val="E6BF71"/>
+          </a:solidFill>
+          <a:ln w="0">
+            <a:noFill/>
+          </a:ln>
+        </p:spPr>
+        <p:txBody>
+          <a:bodyPr lIns="90000" tIns="45000" rIns="90000" bIns="45000" anchor="t">
+            <a:spAutoFit/>
+          </a:bodyPr>
+          <a:p>
+            <a:endParaRPr lang="en-US" sz="1800" b="0" u="none" strike="noStrike">
+              <a:solidFill>
+                <a:srgbClr val="000000"/>
+              </a:solidFill>
+              <a:effectLst/>
+              <a:uFillTx/>
+              <a:latin typeface="Arial"/>
+            </a:endParaRPr>
+          </a:p>
+        </p:txBody>
+      </p:sp>
+      <p:sp>
+        <p:nvSpPr>
+          <p:cNvPr id="27" name=""/>
+          <p:cNvSpPr txBox="1"/>
+          <p:nvPr/>
+        </p:nvSpPr>
+        <p:spPr>
+          <a:xfrm>
+            <a:off x="540000" y="3565800"/>
+            <a:ext cx="9000000" cy="493200"/>
+          </a:xfrm>
+          <a:prstGeom prst="rect">
+            <a:avLst/>
+          </a:prstGeom>
+          <a:solidFill>
+            <a:srgbClr val="FFFFFF"/>
+          </a:solidFill>
+          <a:ln w="7200">
+            <a:solidFill>
+              <a:srgbClr val="DFE9E4"/>
+            </a:solidFill>
+            <a:round/>
+          </a:ln>
+        </p:spPr>
+        <p:txBody>
+          <a:bodyPr lIns="198000" tIns="115200" rIns="126000" bIns="115200" anchor="ctr">
+            <a:normAutofit/>
+          </a:bodyPr>
+          <a:p>
+            <a:r>
+              <a:rPr lang="en-US" sz="1550" b="0" u="none" strike="noStrike">
                 <a:solidFill>
                   <a:srgbClr val="1A2E2B"/>
                 </a:solidFill>
@@ -5449,9 +6447,9 @@
                 <a:uFillTx/>
                 <a:latin typeface="Arial"/>
               </a:rPr>
-              <a:t>• Result: lost requests, unverifiable timesheets, zero audit trail</a:t>
-            </a:r>
-            <a:endParaRPr lang="en-US" sz="1500" b="0" u="none" strike="noStrike">
+              <a:t>Result: lost requests, unverifiable timesheets, zero audit trail</a:t>
+            </a:r>
+            <a:endParaRPr lang="en-US" sz="1550" b="0" u="none" strike="noStrike">
               <a:solidFill>
                 <a:srgbClr val="000000"/>
               </a:solidFill>
@@ -5501,14 +6499,14 @@
       </p:grpSpPr>
       <p:sp>
         <p:nvSpPr>
-          <p:cNvPr id="83" name=""/>
-          <p:cNvSpPr txBox="1"/>
-          <p:nvPr/>
-        </p:nvSpPr>
-        <p:spPr>
-          <a:xfrm>
-            <a:off x="540000" y="324000"/>
-            <a:ext cx="9000000" cy="576000"/>
+          <p:cNvPr id="125" name=""/>
+          <p:cNvSpPr txBox="1"/>
+          <p:nvPr/>
+        </p:nvSpPr>
+        <p:spPr>
+          <a:xfrm>
+            <a:off x="540000" y="252000"/>
+            <a:ext cx="9000000" cy="504000"/>
           </a:xfrm>
           <a:prstGeom prst="rect">
             <a:avLst/>
@@ -5532,7 +6530,7 @@
                 <a:uFillTx/>
                 <a:latin typeface="Arial"/>
               </a:rPr>
-              <a:t>AI-Assisted Development — Disclosed</a:t>
+              <a:t>HR Administration</a:t>
             </a:r>
             <a:endParaRPr lang="en-US" sz="2600" b="0" u="none" strike="noStrike">
               <a:solidFill>
@@ -5547,13 +6545,13 @@
       </p:sp>
       <p:sp>
         <p:nvSpPr>
-          <p:cNvPr id="84" name=""/>
-          <p:cNvSpPr txBox="1"/>
-          <p:nvPr/>
-        </p:nvSpPr>
-        <p:spPr>
-          <a:xfrm>
-            <a:off x="540000" y="900000"/>
+          <p:cNvPr id="126" name=""/>
+          <p:cNvSpPr txBox="1"/>
+          <p:nvPr/>
+        </p:nvSpPr>
+        <p:spPr>
+          <a:xfrm>
+            <a:off x="540000" y="774000"/>
             <a:ext cx="1440000" cy="43200"/>
           </a:xfrm>
           <a:prstGeom prst="rect">
@@ -5582,16 +6580,20 @@
           </a:p>
         </p:txBody>
       </p:sp>
-      <p:sp>
-        <p:nvSpPr>
-          <p:cNvPr id="85" name=""/>
-          <p:cNvSpPr txBox="1"/>
-          <p:nvPr/>
-        </p:nvSpPr>
-        <p:spPr>
-          <a:xfrm>
-            <a:off x="540000" y="1152000"/>
-            <a:ext cx="9000000" cy="3960000"/>
+      <p:pic>
+        <p:nvPicPr>
+          <p:cNvPr id="127" name=""/>
+          <p:cNvPicPr/>
+          <p:nvPr/>
+        </p:nvPicPr>
+        <p:blipFill>
+          <a:blip r:embed="rId1"/>
+          <a:stretch/>
+        </p:blipFill>
+        <p:spPr>
+          <a:xfrm>
+            <a:off x="1814400" y="1008000"/>
+            <a:ext cx="6451200" cy="4032000"/>
           </a:xfrm>
           <a:prstGeom prst="rect">
             <a:avLst/>
@@ -5601,65 +6603,43 @@
             <a:noFill/>
           </a:ln>
         </p:spPr>
+      </p:pic>
+      <p:sp>
+        <p:nvSpPr>
+          <p:cNvPr id="128" name=""/>
+          <p:cNvSpPr txBox="1"/>
+          <p:nvPr/>
+        </p:nvSpPr>
+        <p:spPr>
+          <a:xfrm>
+            <a:off x="540000" y="5148000"/>
+            <a:ext cx="9000000" cy="360000"/>
+          </a:xfrm>
+          <a:prstGeom prst="rect">
+            <a:avLst/>
+          </a:prstGeom>
+          <a:noFill/>
+          <a:ln w="0">
+            <a:noFill/>
+          </a:ln>
+        </p:spPr>
         <p:txBody>
           <a:bodyPr lIns="90000" tIns="45000" rIns="90000" bIns="45000" anchor="t">
             <a:spAutoFit/>
           </a:bodyPr>
           <a:p>
             <a:r>
-              <a:rPr lang="en-US" sz="1500" b="0" u="none" strike="noStrike">
-                <a:solidFill>
-                  <a:srgbClr val="1A2E2B"/>
-                </a:solidFill>
-                <a:effectLst/>
-                <a:uFillTx/>
-                <a:latin typeface="Arial"/>
-              </a:rPr>
-              <a:t>• Built by Devin (Cognition) under spec-kit discipline</a:t>
-            </a:r>
-            <a:endParaRPr lang="en-US" sz="1500" b="0" u="none" strike="noStrike">
-              <a:solidFill>
-                <a:srgbClr val="000000"/>
-              </a:solidFill>
-              <a:effectLst/>
-              <a:uFillTx/>
-              <a:latin typeface="Arial"/>
-            </a:endParaRPr>
-          </a:p>
-          <a:p>
-            <a:r>
-              <a:rPr lang="en-US" sz="1500" b="0" u="none" strike="noStrike">
-                <a:solidFill>
-                  <a:srgbClr val="1A2E2B"/>
-                </a:solidFill>
-                <a:effectLst/>
-                <a:uFillTx/>
-                <a:latin typeface="Arial"/>
-              </a:rPr>
-              <a:t>• Humans approved every decision and every phase acceptance</a:t>
-            </a:r>
-            <a:endParaRPr lang="en-US" sz="1500" b="0" u="none" strike="noStrike">
-              <a:solidFill>
-                <a:srgbClr val="000000"/>
-              </a:solidFill>
-              <a:effectLst/>
-              <a:uFillTx/>
-              <a:latin typeface="Arial"/>
-            </a:endParaRPr>
-          </a:p>
-          <a:p>
-            <a:r>
-              <a:rPr lang="en-US" sz="1500" b="0" u="none" strike="noStrike">
-                <a:solidFill>
-                  <a:srgbClr val="1A2E2B"/>
-                </a:solidFill>
-                <a:effectLst/>
-                <a:uFillTx/>
-                <a:latin typeface="Arial"/>
-              </a:rPr>
-              <a:t>• Evidence separates verified checks from unrun ones — nothing fabricated</a:t>
-            </a:r>
-            <a:endParaRPr lang="en-US" sz="1500" b="0" u="none" strike="noStrike">
+              <a:rPr lang="en-US" sz="1100" b="0" i="1" u="none" strike="noStrike">
+                <a:solidFill>
+                  <a:srgbClr val="4A7A6F"/>
+                </a:solidFill>
+                <a:effectLst/>
+                <a:uFillTx/>
+                <a:latin typeface="Arial"/>
+              </a:rPr>
+              <a:t>Request types, review stages, allocations, departments, audit.</a:t>
+            </a:r>
+            <a:endParaRPr lang="en-US" sz="1100" b="0" u="none" strike="noStrike">
               <a:solidFill>
                 <a:srgbClr val="000000"/>
               </a:solidFill>
@@ -5709,7 +6689,7 @@
       </p:grpSpPr>
       <p:sp>
         <p:nvSpPr>
-          <p:cNvPr id="86" name=""/>
+          <p:cNvPr id="129" name=""/>
           <p:cNvSpPr txBox="1"/>
           <p:nvPr/>
         </p:nvSpPr>
@@ -5740,7 +6720,7 @@
                 <a:uFillTx/>
                 <a:latin typeface="Arial"/>
               </a:rPr>
-              <a:t>Quality Evidence</a:t>
+              <a:t>Architecture</a:t>
             </a:r>
             <a:endParaRPr lang="en-US" sz="2600" b="0" u="none" strike="noStrike">
               <a:solidFill>
@@ -5755,7 +6735,7 @@
       </p:sp>
       <p:sp>
         <p:nvSpPr>
-          <p:cNvPr id="87" name=""/>
+          <p:cNvPr id="130" name=""/>
           <p:cNvSpPr txBox="1"/>
           <p:nvPr/>
         </p:nvSpPr>
@@ -5792,19 +6772,21 @@
       </p:sp>
       <p:sp>
         <p:nvSpPr>
-          <p:cNvPr id="88" name=""/>
-          <p:cNvSpPr txBox="1"/>
-          <p:nvPr/>
-        </p:nvSpPr>
-        <p:spPr>
-          <a:xfrm>
-            <a:off x="540000" y="1152000"/>
-            <a:ext cx="9000000" cy="3960000"/>
-          </a:xfrm>
-          <a:prstGeom prst="rect">
-            <a:avLst/>
-          </a:prstGeom>
-          <a:noFill/>
+          <p:cNvPr id="131" name=""/>
+          <p:cNvSpPr txBox="1"/>
+          <p:nvPr/>
+        </p:nvSpPr>
+        <p:spPr>
+          <a:xfrm>
+            <a:off x="540000" y="1954800"/>
+            <a:ext cx="50400" cy="493200"/>
+          </a:xfrm>
+          <a:prstGeom prst="rect">
+            <a:avLst/>
+          </a:prstGeom>
+          <a:solidFill>
+            <a:srgbClr val="E6BF71"/>
+          </a:solidFill>
           <a:ln w="0">
             <a:noFill/>
           </a:ln>
@@ -5814,8 +6796,48 @@
             <a:spAutoFit/>
           </a:bodyPr>
           <a:p>
-            <a:r>
-              <a:rPr lang="en-US" sz="1500" b="0" u="none" strike="noStrike">
+            <a:endParaRPr lang="en-US" sz="1800" b="0" u="none" strike="noStrike">
+              <a:solidFill>
+                <a:srgbClr val="000000"/>
+              </a:solidFill>
+              <a:effectLst/>
+              <a:uFillTx/>
+              <a:latin typeface="Arial"/>
+            </a:endParaRPr>
+          </a:p>
+        </p:txBody>
+      </p:sp>
+      <p:sp>
+        <p:nvSpPr>
+          <p:cNvPr id="132" name=""/>
+          <p:cNvSpPr txBox="1"/>
+          <p:nvPr/>
+        </p:nvSpPr>
+        <p:spPr>
+          <a:xfrm>
+            <a:off x="540000" y="1954800"/>
+            <a:ext cx="9000000" cy="493200"/>
+          </a:xfrm>
+          <a:prstGeom prst="rect">
+            <a:avLst/>
+          </a:prstGeom>
+          <a:solidFill>
+            <a:srgbClr val="FFFFFF"/>
+          </a:solidFill>
+          <a:ln w="7200">
+            <a:solidFill>
+              <a:srgbClr val="DFE9E4"/>
+            </a:solidFill>
+            <a:round/>
+          </a:ln>
+        </p:spPr>
+        <p:txBody>
+          <a:bodyPr lIns="198000" tIns="115200" rIns="126000" bIns="115200" anchor="ctr">
+            <a:normAutofit/>
+          </a:bodyPr>
+          <a:p>
+            <a:r>
+              <a:rPr lang="en-US" sz="1550" b="0" u="none" strike="noStrike">
                 <a:solidFill>
                   <a:srgbClr val="1A2E2B"/>
                 </a:solidFill>
@@ -5823,20 +6845,87 @@
                 <a:uFillTx/>
                 <a:latin typeface="Arial"/>
               </a:rPr>
-              <a:t>• 427 backend tests · 45 frontend tests · 60 e2e (13 accessibility)</a:t>
-            </a:r>
-            <a:endParaRPr lang="en-US" sz="1500" b="0" u="none" strike="noStrike">
-              <a:solidFill>
-                <a:srgbClr val="000000"/>
-              </a:solidFill>
-              <a:effectLst/>
-              <a:uFillTx/>
-              <a:latin typeface="Arial"/>
-            </a:endParaRPr>
-          </a:p>
-          <a:p>
-            <a:r>
-              <a:rPr lang="en-US" sz="1500" b="0" u="none" strike="noStrike">
+              <a:t>React + TypeScript SPA → same-origin Nginx → Django/DRF → PostgreSQL 17</a:t>
+            </a:r>
+            <a:endParaRPr lang="en-US" sz="1550" b="0" u="none" strike="noStrike">
+              <a:solidFill>
+                <a:srgbClr val="000000"/>
+              </a:solidFill>
+              <a:effectLst/>
+              <a:uFillTx/>
+              <a:latin typeface="Arial"/>
+            </a:endParaRPr>
+          </a:p>
+        </p:txBody>
+      </p:sp>
+      <p:sp>
+        <p:nvSpPr>
+          <p:cNvPr id="133" name=""/>
+          <p:cNvSpPr txBox="1"/>
+          <p:nvPr/>
+        </p:nvSpPr>
+        <p:spPr>
+          <a:xfrm>
+            <a:off x="540000" y="2599200"/>
+            <a:ext cx="50400" cy="493200"/>
+          </a:xfrm>
+          <a:prstGeom prst="rect">
+            <a:avLst/>
+          </a:prstGeom>
+          <a:solidFill>
+            <a:srgbClr val="E6BF71"/>
+          </a:solidFill>
+          <a:ln w="0">
+            <a:noFill/>
+          </a:ln>
+        </p:spPr>
+        <p:txBody>
+          <a:bodyPr lIns="90000" tIns="45000" rIns="90000" bIns="45000" anchor="t">
+            <a:spAutoFit/>
+          </a:bodyPr>
+          <a:p>
+            <a:endParaRPr lang="en-US" sz="1800" b="0" u="none" strike="noStrike">
+              <a:solidFill>
+                <a:srgbClr val="000000"/>
+              </a:solidFill>
+              <a:effectLst/>
+              <a:uFillTx/>
+              <a:latin typeface="Arial"/>
+            </a:endParaRPr>
+          </a:p>
+        </p:txBody>
+      </p:sp>
+      <p:sp>
+        <p:nvSpPr>
+          <p:cNvPr id="134" name=""/>
+          <p:cNvSpPr txBox="1"/>
+          <p:nvPr/>
+        </p:nvSpPr>
+        <p:spPr>
+          <a:xfrm>
+            <a:off x="540000" y="2599200"/>
+            <a:ext cx="9000000" cy="493200"/>
+          </a:xfrm>
+          <a:prstGeom prst="rect">
+            <a:avLst/>
+          </a:prstGeom>
+          <a:solidFill>
+            <a:srgbClr val="FFFFFF"/>
+          </a:solidFill>
+          <a:ln w="7200">
+            <a:solidFill>
+              <a:srgbClr val="DFE9E4"/>
+            </a:solidFill>
+            <a:round/>
+          </a:ln>
+        </p:spPr>
+        <p:txBody>
+          <a:bodyPr lIns="198000" tIns="115200" rIns="126000" bIns="115200" anchor="ctr">
+            <a:normAutofit/>
+          </a:bodyPr>
+          <a:p>
+            <a:r>
+              <a:rPr lang="en-US" sz="1550" b="0" u="none" strike="noStrike">
                 <a:solidFill>
                   <a:srgbClr val="1A2E2B"/>
                 </a:solidFill>
@@ -5844,20 +6933,87 @@
                 <a:uFillTx/>
                 <a:latin typeface="Arial"/>
               </a:rPr>
-              <a:t>• Load: 500 employees, ~130k entries, 25 users — all p95 budgets pass</a:t>
-            </a:r>
-            <a:endParaRPr lang="en-US" sz="1500" b="0" u="none" strike="noStrike">
-              <a:solidFill>
-                <a:srgbClr val="000000"/>
-              </a:solidFill>
-              <a:effectLst/>
-              <a:uFillTx/>
-              <a:latin typeface="Arial"/>
-            </a:endParaRPr>
-          </a:p>
-          <a:p>
-            <a:r>
-              <a:rPr lang="en-US" sz="1500" b="0" u="none" strike="noStrike">
+              <a:t>Modular monolith: explicit services, scoped querysets, thin API layer</a:t>
+            </a:r>
+            <a:endParaRPr lang="en-US" sz="1550" b="0" u="none" strike="noStrike">
+              <a:solidFill>
+                <a:srgbClr val="000000"/>
+              </a:solidFill>
+              <a:effectLst/>
+              <a:uFillTx/>
+              <a:latin typeface="Arial"/>
+            </a:endParaRPr>
+          </a:p>
+        </p:txBody>
+      </p:sp>
+      <p:sp>
+        <p:nvSpPr>
+          <p:cNvPr id="135" name=""/>
+          <p:cNvSpPr txBox="1"/>
+          <p:nvPr/>
+        </p:nvSpPr>
+        <p:spPr>
+          <a:xfrm>
+            <a:off x="540000" y="3243600"/>
+            <a:ext cx="50400" cy="493200"/>
+          </a:xfrm>
+          <a:prstGeom prst="rect">
+            <a:avLst/>
+          </a:prstGeom>
+          <a:solidFill>
+            <a:srgbClr val="E6BF71"/>
+          </a:solidFill>
+          <a:ln w="0">
+            <a:noFill/>
+          </a:ln>
+        </p:spPr>
+        <p:txBody>
+          <a:bodyPr lIns="90000" tIns="45000" rIns="90000" bIns="45000" anchor="t">
+            <a:spAutoFit/>
+          </a:bodyPr>
+          <a:p>
+            <a:endParaRPr lang="en-US" sz="1800" b="0" u="none" strike="noStrike">
+              <a:solidFill>
+                <a:srgbClr val="000000"/>
+              </a:solidFill>
+              <a:effectLst/>
+              <a:uFillTx/>
+              <a:latin typeface="Arial"/>
+            </a:endParaRPr>
+          </a:p>
+        </p:txBody>
+      </p:sp>
+      <p:sp>
+        <p:nvSpPr>
+          <p:cNvPr id="136" name=""/>
+          <p:cNvSpPr txBox="1"/>
+          <p:nvPr/>
+        </p:nvSpPr>
+        <p:spPr>
+          <a:xfrm>
+            <a:off x="540000" y="3243600"/>
+            <a:ext cx="9000000" cy="493200"/>
+          </a:xfrm>
+          <a:prstGeom prst="rect">
+            <a:avLst/>
+          </a:prstGeom>
+          <a:solidFill>
+            <a:srgbClr val="FFFFFF"/>
+          </a:solidFill>
+          <a:ln w="7200">
+            <a:solidFill>
+              <a:srgbClr val="DFE9E4"/>
+            </a:solidFill>
+            <a:round/>
+          </a:ln>
+        </p:spPr>
+        <p:txBody>
+          <a:bodyPr lIns="198000" tIns="115200" rIns="126000" bIns="115200" anchor="ctr">
+            <a:normAutofit/>
+          </a:bodyPr>
+          <a:p>
+            <a:r>
+              <a:rPr lang="en-US" sz="1550" b="0" u="none" strike="noStrike">
                 <a:solidFill>
                   <a:srgbClr val="1A2E2B"/>
                 </a:solidFill>
@@ -5865,9 +7021,97 @@
                 <a:uFillTx/>
                 <a:latin typeface="Arial"/>
               </a:rPr>
-              <a:t>• Real N+1 found and fixed under load: 13.3 s → 0.2 s</a:t>
-            </a:r>
-            <a:endParaRPr lang="en-US" sz="1500" b="0" u="none" strike="noStrike">
+              <a:t>One org per deployment; database unreachable from outside Docker network</a:t>
+            </a:r>
+            <a:endParaRPr lang="en-US" sz="1550" b="0" u="none" strike="noStrike">
+              <a:solidFill>
+                <a:srgbClr val="000000"/>
+              </a:solidFill>
+              <a:effectLst/>
+              <a:uFillTx/>
+              <a:latin typeface="Arial"/>
+            </a:endParaRPr>
+          </a:p>
+        </p:txBody>
+      </p:sp>
+      <p:sp>
+        <p:nvSpPr>
+          <p:cNvPr id="137" name=""/>
+          <p:cNvSpPr txBox="1"/>
+          <p:nvPr/>
+        </p:nvSpPr>
+        <p:spPr>
+          <a:xfrm>
+            <a:off x="540000" y="3888000"/>
+            <a:ext cx="50400" cy="493200"/>
+          </a:xfrm>
+          <a:prstGeom prst="rect">
+            <a:avLst/>
+          </a:prstGeom>
+          <a:solidFill>
+            <a:srgbClr val="E6BF71"/>
+          </a:solidFill>
+          <a:ln w="0">
+            <a:noFill/>
+          </a:ln>
+        </p:spPr>
+        <p:txBody>
+          <a:bodyPr lIns="90000" tIns="45000" rIns="90000" bIns="45000" anchor="t">
+            <a:spAutoFit/>
+          </a:bodyPr>
+          <a:p>
+            <a:endParaRPr lang="en-US" sz="1800" b="0" u="none" strike="noStrike">
+              <a:solidFill>
+                <a:srgbClr val="000000"/>
+              </a:solidFill>
+              <a:effectLst/>
+              <a:uFillTx/>
+              <a:latin typeface="Arial"/>
+            </a:endParaRPr>
+          </a:p>
+        </p:txBody>
+      </p:sp>
+      <p:sp>
+        <p:nvSpPr>
+          <p:cNvPr id="138" name=""/>
+          <p:cNvSpPr txBox="1"/>
+          <p:nvPr/>
+        </p:nvSpPr>
+        <p:spPr>
+          <a:xfrm>
+            <a:off x="540000" y="3888000"/>
+            <a:ext cx="9000000" cy="493200"/>
+          </a:xfrm>
+          <a:prstGeom prst="rect">
+            <a:avLst/>
+          </a:prstGeom>
+          <a:solidFill>
+            <a:srgbClr val="FFFFFF"/>
+          </a:solidFill>
+          <a:ln w="7200">
+            <a:solidFill>
+              <a:srgbClr val="DFE9E4"/>
+            </a:solidFill>
+            <a:round/>
+          </a:ln>
+        </p:spPr>
+        <p:txBody>
+          <a:bodyPr lIns="198000" tIns="115200" rIns="126000" bIns="115200" anchor="ctr">
+            <a:normAutofit/>
+          </a:bodyPr>
+          <a:p>
+            <a:r>
+              <a:rPr lang="en-US" sz="1550" b="0" u="none" strike="noStrike">
+                <a:solidFill>
+                  <a:srgbClr val="1A2E2B"/>
+                </a:solidFill>
+                <a:effectLst/>
+                <a:uFillTx/>
+                <a:latin typeface="Arial"/>
+              </a:rPr>
+              <a:t>Documented: architecture/api.md + erd.md + OpenAPI schema</a:t>
+            </a:r>
+            <a:endParaRPr lang="en-US" sz="1550" b="0" u="none" strike="noStrike">
               <a:solidFill>
                 <a:srgbClr val="000000"/>
               </a:solidFill>
@@ -5917,7 +7161,7 @@
       </p:grpSpPr>
       <p:sp>
         <p:nvSpPr>
-          <p:cNvPr id="89" name=""/>
+          <p:cNvPr id="139" name=""/>
           <p:cNvSpPr txBox="1"/>
           <p:nvPr/>
         </p:nvSpPr>
@@ -5948,7 +7192,7 @@
                 <a:uFillTx/>
                 <a:latin typeface="Arial"/>
               </a:rPr>
-              <a:t>Honest Limitations</a:t>
+              <a:t>Security</a:t>
             </a:r>
             <a:endParaRPr lang="en-US" sz="2600" b="0" u="none" strike="noStrike">
               <a:solidFill>
@@ -5963,7 +7207,7 @@
       </p:sp>
       <p:sp>
         <p:nvSpPr>
-          <p:cNvPr id="90" name=""/>
+          <p:cNvPr id="140" name=""/>
           <p:cNvSpPr txBox="1"/>
           <p:nvPr/>
         </p:nvSpPr>
@@ -6000,19 +7244,21 @@
       </p:sp>
       <p:sp>
         <p:nvSpPr>
-          <p:cNvPr id="91" name=""/>
-          <p:cNvSpPr txBox="1"/>
-          <p:nvPr/>
-        </p:nvSpPr>
-        <p:spPr>
-          <a:xfrm>
-            <a:off x="540000" y="1152000"/>
-            <a:ext cx="9000000" cy="3960000"/>
-          </a:xfrm>
-          <a:prstGeom prst="rect">
-            <a:avLst/>
-          </a:prstGeom>
-          <a:noFill/>
+          <p:cNvPr id="141" name=""/>
+          <p:cNvSpPr txBox="1"/>
+          <p:nvPr/>
+        </p:nvSpPr>
+        <p:spPr>
+          <a:xfrm>
+            <a:off x="540000" y="1954800"/>
+            <a:ext cx="50400" cy="493200"/>
+          </a:xfrm>
+          <a:prstGeom prst="rect">
+            <a:avLst/>
+          </a:prstGeom>
+          <a:solidFill>
+            <a:srgbClr val="E6BF71"/>
+          </a:solidFill>
           <a:ln w="0">
             <a:noFill/>
           </a:ln>
@@ -6022,8 +7268,48 @@
             <a:spAutoFit/>
           </a:bodyPr>
           <a:p>
-            <a:r>
-              <a:rPr lang="en-US" sz="1500" b="0" u="none" strike="noStrike">
+            <a:endParaRPr lang="en-US" sz="1800" b="0" u="none" strike="noStrike">
+              <a:solidFill>
+                <a:srgbClr val="000000"/>
+              </a:solidFill>
+              <a:effectLst/>
+              <a:uFillTx/>
+              <a:latin typeface="Arial"/>
+            </a:endParaRPr>
+          </a:p>
+        </p:txBody>
+      </p:sp>
+      <p:sp>
+        <p:nvSpPr>
+          <p:cNvPr id="142" name=""/>
+          <p:cNvSpPr txBox="1"/>
+          <p:nvPr/>
+        </p:nvSpPr>
+        <p:spPr>
+          <a:xfrm>
+            <a:off x="540000" y="1954800"/>
+            <a:ext cx="9000000" cy="493200"/>
+          </a:xfrm>
+          <a:prstGeom prst="rect">
+            <a:avLst/>
+          </a:prstGeom>
+          <a:solidFill>
+            <a:srgbClr val="FFFFFF"/>
+          </a:solidFill>
+          <a:ln w="7200">
+            <a:solidFill>
+              <a:srgbClr val="DFE9E4"/>
+            </a:solidFill>
+            <a:round/>
+          </a:ln>
+        </p:spPr>
+        <p:txBody>
+          <a:bodyPr lIns="198000" tIns="115200" rIns="126000" bIns="115200" anchor="ctr">
+            <a:normAutofit/>
+          </a:bodyPr>
+          <a:p>
+            <a:r>
+              <a:rPr lang="en-US" sz="1550" b="0" u="none" strike="noStrike">
                 <a:solidFill>
                   <a:srgbClr val="1A2E2B"/>
                 </a:solidFill>
@@ -6031,20 +7317,87 @@
                 <a:uFillTx/>
                 <a:latin typeface="Arial"/>
               </a:rPr>
-              <a:t>• HTTP only — domain + TLS pending (one click once a domain exists)</a:t>
-            </a:r>
-            <a:endParaRPr lang="en-US" sz="1500" b="0" u="none" strike="noStrike">
-              <a:solidFill>
-                <a:srgbClr val="000000"/>
-              </a:solidFill>
-              <a:effectLst/>
-              <a:uFillTx/>
-              <a:latin typeface="Arial"/>
-            </a:endParaRPr>
-          </a:p>
-          <a:p>
-            <a:r>
-              <a:rPr lang="en-US" sz="1500" b="0" u="none" strike="noStrike">
+              <a:t>Server-enforced RBAC + ownership scoping on every endpoint</a:t>
+            </a:r>
+            <a:endParaRPr lang="en-US" sz="1550" b="0" u="none" strike="noStrike">
+              <a:solidFill>
+                <a:srgbClr val="000000"/>
+              </a:solidFill>
+              <a:effectLst/>
+              <a:uFillTx/>
+              <a:latin typeface="Arial"/>
+            </a:endParaRPr>
+          </a:p>
+        </p:txBody>
+      </p:sp>
+      <p:sp>
+        <p:nvSpPr>
+          <p:cNvPr id="143" name=""/>
+          <p:cNvSpPr txBox="1"/>
+          <p:nvPr/>
+        </p:nvSpPr>
+        <p:spPr>
+          <a:xfrm>
+            <a:off x="540000" y="2599200"/>
+            <a:ext cx="50400" cy="493200"/>
+          </a:xfrm>
+          <a:prstGeom prst="rect">
+            <a:avLst/>
+          </a:prstGeom>
+          <a:solidFill>
+            <a:srgbClr val="E6BF71"/>
+          </a:solidFill>
+          <a:ln w="0">
+            <a:noFill/>
+          </a:ln>
+        </p:spPr>
+        <p:txBody>
+          <a:bodyPr lIns="90000" tIns="45000" rIns="90000" bIns="45000" anchor="t">
+            <a:spAutoFit/>
+          </a:bodyPr>
+          <a:p>
+            <a:endParaRPr lang="en-US" sz="1800" b="0" u="none" strike="noStrike">
+              <a:solidFill>
+                <a:srgbClr val="000000"/>
+              </a:solidFill>
+              <a:effectLst/>
+              <a:uFillTx/>
+              <a:latin typeface="Arial"/>
+            </a:endParaRPr>
+          </a:p>
+        </p:txBody>
+      </p:sp>
+      <p:sp>
+        <p:nvSpPr>
+          <p:cNvPr id="144" name=""/>
+          <p:cNvSpPr txBox="1"/>
+          <p:nvPr/>
+        </p:nvSpPr>
+        <p:spPr>
+          <a:xfrm>
+            <a:off x="540000" y="2599200"/>
+            <a:ext cx="9000000" cy="493200"/>
+          </a:xfrm>
+          <a:prstGeom prst="rect">
+            <a:avLst/>
+          </a:prstGeom>
+          <a:solidFill>
+            <a:srgbClr val="FFFFFF"/>
+          </a:solidFill>
+          <a:ln w="7200">
+            <a:solidFill>
+              <a:srgbClr val="DFE9E4"/>
+            </a:solidFill>
+            <a:round/>
+          </a:ln>
+        </p:spPr>
+        <p:txBody>
+          <a:bodyPr lIns="198000" tIns="115200" rIns="126000" bIns="115200" anchor="ctr">
+            <a:normAutofit/>
+          </a:bodyPr>
+          <a:p>
+            <a:r>
+              <a:rPr lang="en-US" sz="1550" b="0" u="none" strike="noStrike">
                 <a:solidFill>
                   <a:srgbClr val="1A2E2B"/>
                 </a:solidFill>
@@ -6052,20 +7405,87 @@
                 <a:uFillTx/>
                 <a:latin typeface="Arial"/>
               </a:rPr>
-              <a:t>• Demo quick-login shares a password — demo mode, off before real data</a:t>
-            </a:r>
-            <a:endParaRPr lang="en-US" sz="1500" b="0" u="none" strike="noStrike">
-              <a:solidFill>
-                <a:srgbClr val="000000"/>
-              </a:solidFill>
-              <a:effectLst/>
-              <a:uFillTx/>
-              <a:latin typeface="Arial"/>
-            </a:endParaRPr>
-          </a:p>
-          <a:p>
-            <a:r>
-              <a:rPr lang="en-US" sz="1500" b="0" u="none" strike="noStrike">
+              <a:t>Session auth + CSRF; throttling: 5/5min per account, 20/5min per IP</a:t>
+            </a:r>
+            <a:endParaRPr lang="en-US" sz="1550" b="0" u="none" strike="noStrike">
+              <a:solidFill>
+                <a:srgbClr val="000000"/>
+              </a:solidFill>
+              <a:effectLst/>
+              <a:uFillTx/>
+              <a:latin typeface="Arial"/>
+            </a:endParaRPr>
+          </a:p>
+        </p:txBody>
+      </p:sp>
+      <p:sp>
+        <p:nvSpPr>
+          <p:cNvPr id="145" name=""/>
+          <p:cNvSpPr txBox="1"/>
+          <p:nvPr/>
+        </p:nvSpPr>
+        <p:spPr>
+          <a:xfrm>
+            <a:off x="540000" y="3243600"/>
+            <a:ext cx="50400" cy="493200"/>
+          </a:xfrm>
+          <a:prstGeom prst="rect">
+            <a:avLst/>
+          </a:prstGeom>
+          <a:solidFill>
+            <a:srgbClr val="E6BF71"/>
+          </a:solidFill>
+          <a:ln w="0">
+            <a:noFill/>
+          </a:ln>
+        </p:spPr>
+        <p:txBody>
+          <a:bodyPr lIns="90000" tIns="45000" rIns="90000" bIns="45000" anchor="t">
+            <a:spAutoFit/>
+          </a:bodyPr>
+          <a:p>
+            <a:endParaRPr lang="en-US" sz="1800" b="0" u="none" strike="noStrike">
+              <a:solidFill>
+                <a:srgbClr val="000000"/>
+              </a:solidFill>
+              <a:effectLst/>
+              <a:uFillTx/>
+              <a:latin typeface="Arial"/>
+            </a:endParaRPr>
+          </a:p>
+        </p:txBody>
+      </p:sp>
+      <p:sp>
+        <p:nvSpPr>
+          <p:cNvPr id="146" name=""/>
+          <p:cNvSpPr txBox="1"/>
+          <p:nvPr/>
+        </p:nvSpPr>
+        <p:spPr>
+          <a:xfrm>
+            <a:off x="540000" y="3243600"/>
+            <a:ext cx="9000000" cy="493200"/>
+          </a:xfrm>
+          <a:prstGeom prst="rect">
+            <a:avLst/>
+          </a:prstGeom>
+          <a:solidFill>
+            <a:srgbClr val="FFFFFF"/>
+          </a:solidFill>
+          <a:ln w="7200">
+            <a:solidFill>
+              <a:srgbClr val="DFE9E4"/>
+            </a:solidFill>
+            <a:round/>
+          </a:ln>
+        </p:spPr>
+        <p:txBody>
+          <a:bodyPr lIns="198000" tIns="115200" rIns="126000" bIns="115200" anchor="ctr">
+            <a:normAutofit/>
+          </a:bodyPr>
+          <a:p>
+            <a:r>
+              <a:rPr lang="en-US" sz="1550" b="0" u="none" strike="noStrike">
                 <a:solidFill>
                   <a:srgbClr val="1A2E2B"/>
                 </a:solidFill>
@@ -6073,9 +7493,97 @@
                 <a:uFillTx/>
                 <a:latin typeface="Arial"/>
               </a:rPr>
-              <a:t>• No automated backups (owner-waived); attachments deferred</a:t>
-            </a:r>
-            <a:endParaRPr lang="en-US" sz="1500" b="0" u="none" strike="noStrike">
+              <a:t>No secrets in git; database unreachable from outside the Docker network</a:t>
+            </a:r>
+            <a:endParaRPr lang="en-US" sz="1550" b="0" u="none" strike="noStrike">
+              <a:solidFill>
+                <a:srgbClr val="000000"/>
+              </a:solidFill>
+              <a:effectLst/>
+              <a:uFillTx/>
+              <a:latin typeface="Arial"/>
+            </a:endParaRPr>
+          </a:p>
+        </p:txBody>
+      </p:sp>
+      <p:sp>
+        <p:nvSpPr>
+          <p:cNvPr id="147" name=""/>
+          <p:cNvSpPr txBox="1"/>
+          <p:nvPr/>
+        </p:nvSpPr>
+        <p:spPr>
+          <a:xfrm>
+            <a:off x="540000" y="3888000"/>
+            <a:ext cx="50400" cy="493200"/>
+          </a:xfrm>
+          <a:prstGeom prst="rect">
+            <a:avLst/>
+          </a:prstGeom>
+          <a:solidFill>
+            <a:srgbClr val="E6BF71"/>
+          </a:solidFill>
+          <a:ln w="0">
+            <a:noFill/>
+          </a:ln>
+        </p:spPr>
+        <p:txBody>
+          <a:bodyPr lIns="90000" tIns="45000" rIns="90000" bIns="45000" anchor="t">
+            <a:spAutoFit/>
+          </a:bodyPr>
+          <a:p>
+            <a:endParaRPr lang="en-US" sz="1800" b="0" u="none" strike="noStrike">
+              <a:solidFill>
+                <a:srgbClr val="000000"/>
+              </a:solidFill>
+              <a:effectLst/>
+              <a:uFillTx/>
+              <a:latin typeface="Arial"/>
+            </a:endParaRPr>
+          </a:p>
+        </p:txBody>
+      </p:sp>
+      <p:sp>
+        <p:nvSpPr>
+          <p:cNvPr id="148" name=""/>
+          <p:cNvSpPr txBox="1"/>
+          <p:nvPr/>
+        </p:nvSpPr>
+        <p:spPr>
+          <a:xfrm>
+            <a:off x="540000" y="3888000"/>
+            <a:ext cx="9000000" cy="493200"/>
+          </a:xfrm>
+          <a:prstGeom prst="rect">
+            <a:avLst/>
+          </a:prstGeom>
+          <a:solidFill>
+            <a:srgbClr val="FFFFFF"/>
+          </a:solidFill>
+          <a:ln w="7200">
+            <a:solidFill>
+              <a:srgbClr val="DFE9E4"/>
+            </a:solidFill>
+            <a:round/>
+          </a:ln>
+        </p:spPr>
+        <p:txBody>
+          <a:bodyPr lIns="198000" tIns="115200" rIns="126000" bIns="115200" anchor="ctr">
+            <a:normAutofit/>
+          </a:bodyPr>
+          <a:p>
+            <a:r>
+              <a:rPr lang="en-US" sz="1550" b="0" u="none" strike="noStrike">
+                <a:solidFill>
+                  <a:srgbClr val="1A2E2B"/>
+                </a:solidFill>
+                <a:effectLst/>
+                <a:uFillTx/>
+                <a:latin typeface="Arial"/>
+              </a:rPr>
+              <a:t>Evidence: 31 security tests, negative tests per endpoint</a:t>
+            </a:r>
+            <a:endParaRPr lang="en-US" sz="1550" b="0" u="none" strike="noStrike">
               <a:solidFill>
                 <a:srgbClr val="000000"/>
               </a:solidFill>
@@ -6100,6 +7608,2014 @@
 </file>
 
 <file path=ppt/slides/slide23.xml><?xml version="1.0" encoding="utf-8"?>
+<p:sld xmlns:a="http://schemas.openxmlformats.org/drawingml/2006/main" xmlns:p="http://schemas.openxmlformats.org/presentationml/2006/main" xmlns:r="http://schemas.openxmlformats.org/officeDocument/2006/relationships" xmlns:p14="http://schemas.microsoft.com/office/powerpoint/2010/main" xmlns:p15="http://schemas.microsoft.com/office/powerpoint/2012/main" xmlns:mc="http://schemas.openxmlformats.org/markup-compatibility/2006">
+  <p:cSld>
+    <p:bg>
+      <p:bgPr>
+        <a:solidFill>
+          <a:srgbClr val="F4F8F5"/>
+        </a:solidFill>
+      </p:bgPr>
+    </p:bg>
+    <p:spTree>
+      <p:nvGrpSpPr>
+        <p:cNvPr id="1" name=""/>
+        <p:cNvGrpSpPr/>
+        <p:nvPr/>
+      </p:nvGrpSpPr>
+      <p:grpSpPr>
+        <a:xfrm>
+          <a:off x="0" y="0"/>
+          <a:ext cx="0" cy="0"/>
+          <a:chOff x="0" y="0"/>
+          <a:chExt cx="0" cy="0"/>
+        </a:xfrm>
+      </p:grpSpPr>
+      <p:sp>
+        <p:nvSpPr>
+          <p:cNvPr id="149" name=""/>
+          <p:cNvSpPr txBox="1"/>
+          <p:nvPr/>
+        </p:nvSpPr>
+        <p:spPr>
+          <a:xfrm>
+            <a:off x="540000" y="324000"/>
+            <a:ext cx="9000000" cy="576000"/>
+          </a:xfrm>
+          <a:prstGeom prst="rect">
+            <a:avLst/>
+          </a:prstGeom>
+          <a:noFill/>
+          <a:ln w="0">
+            <a:noFill/>
+          </a:ln>
+        </p:spPr>
+        <p:txBody>
+          <a:bodyPr lIns="90000" tIns="45000" rIns="90000" bIns="45000" anchor="t">
+            <a:spAutoFit/>
+          </a:bodyPr>
+          <a:p>
+            <a:r>
+              <a:rPr lang="en-US" sz="2600" b="1" u="none" strike="noStrike">
+                <a:solidFill>
+                  <a:srgbClr val="103E3A"/>
+                </a:solidFill>
+                <a:effectLst/>
+                <a:uFillTx/>
+                <a:latin typeface="Arial"/>
+              </a:rPr>
+              <a:t>Deployment &amp; Operations</a:t>
+            </a:r>
+            <a:endParaRPr lang="en-US" sz="2600" b="0" u="none" strike="noStrike">
+              <a:solidFill>
+                <a:srgbClr val="000000"/>
+              </a:solidFill>
+              <a:effectLst/>
+              <a:uFillTx/>
+              <a:latin typeface="Arial"/>
+            </a:endParaRPr>
+          </a:p>
+        </p:txBody>
+      </p:sp>
+      <p:sp>
+        <p:nvSpPr>
+          <p:cNvPr id="150" name=""/>
+          <p:cNvSpPr txBox="1"/>
+          <p:nvPr/>
+        </p:nvSpPr>
+        <p:spPr>
+          <a:xfrm>
+            <a:off x="540000" y="900000"/>
+            <a:ext cx="1440000" cy="43200"/>
+          </a:xfrm>
+          <a:prstGeom prst="rect">
+            <a:avLst/>
+          </a:prstGeom>
+          <a:solidFill>
+            <a:srgbClr val="E6BF71"/>
+          </a:solidFill>
+          <a:ln w="0">
+            <a:noFill/>
+          </a:ln>
+        </p:spPr>
+        <p:txBody>
+          <a:bodyPr lIns="90000" tIns="-1800" rIns="90000" bIns="-1800" anchor="t">
+            <a:spAutoFit/>
+          </a:bodyPr>
+          <a:p>
+            <a:endParaRPr lang="en-US" sz="1800" b="0" u="none" strike="noStrike">
+              <a:solidFill>
+                <a:srgbClr val="000000"/>
+              </a:solidFill>
+              <a:effectLst/>
+              <a:uFillTx/>
+              <a:latin typeface="Arial"/>
+            </a:endParaRPr>
+          </a:p>
+        </p:txBody>
+      </p:sp>
+      <p:sp>
+        <p:nvSpPr>
+          <p:cNvPr id="151" name=""/>
+          <p:cNvSpPr txBox="1"/>
+          <p:nvPr/>
+        </p:nvSpPr>
+        <p:spPr>
+          <a:xfrm>
+            <a:off x="540000" y="2352600"/>
+            <a:ext cx="50400" cy="342000"/>
+          </a:xfrm>
+          <a:prstGeom prst="rect">
+            <a:avLst/>
+          </a:prstGeom>
+          <a:solidFill>
+            <a:srgbClr val="E6BF71"/>
+          </a:solidFill>
+          <a:ln w="0">
+            <a:noFill/>
+          </a:ln>
+        </p:spPr>
+        <p:txBody>
+          <a:bodyPr lIns="90000" tIns="45000" rIns="90000" bIns="45000" anchor="t">
+            <a:spAutoFit/>
+          </a:bodyPr>
+          <a:p>
+            <a:endParaRPr lang="en-US" sz="1800" b="0" u="none" strike="noStrike">
+              <a:solidFill>
+                <a:srgbClr val="000000"/>
+              </a:solidFill>
+              <a:effectLst/>
+              <a:uFillTx/>
+              <a:latin typeface="Arial"/>
+            </a:endParaRPr>
+          </a:p>
+        </p:txBody>
+      </p:sp>
+      <p:sp>
+        <p:nvSpPr>
+          <p:cNvPr id="152" name=""/>
+          <p:cNvSpPr txBox="1"/>
+          <p:nvPr/>
+        </p:nvSpPr>
+        <p:spPr>
+          <a:xfrm>
+            <a:off x="540000" y="2298240"/>
+            <a:ext cx="9000000" cy="450360"/>
+          </a:xfrm>
+          <a:prstGeom prst="rect">
+            <a:avLst/>
+          </a:prstGeom>
+          <a:solidFill>
+            <a:srgbClr val="FFFFFF"/>
+          </a:solidFill>
+          <a:ln w="7200">
+            <a:solidFill>
+              <a:srgbClr val="DFE9E4"/>
+            </a:solidFill>
+            <a:round/>
+          </a:ln>
+        </p:spPr>
+        <p:txBody>
+          <a:bodyPr lIns="198000" tIns="115200" rIns="126000" bIns="115200" anchor="ctr">
+            <a:normAutofit/>
+          </a:bodyPr>
+          <a:p>
+            <a:r>
+              <a:rPr lang="en-US" sz="1550" b="0" u="none" strike="noStrike">
+                <a:solidFill>
+                  <a:srgbClr val="1A2E2B"/>
+                </a:solidFill>
+                <a:effectLst/>
+                <a:uFillTx/>
+                <a:latin typeface="Arial"/>
+              </a:rPr>
+              <a:t>Docker Compose stack; Nginx Proxy Manager public edge</a:t>
+            </a:r>
+            <a:endParaRPr lang="en-US" sz="1550" b="0" u="none" strike="noStrike">
+              <a:solidFill>
+                <a:srgbClr val="000000"/>
+              </a:solidFill>
+              <a:effectLst/>
+              <a:uFillTx/>
+              <a:latin typeface="Arial"/>
+            </a:endParaRPr>
+          </a:p>
+        </p:txBody>
+      </p:sp>
+      <p:sp>
+        <p:nvSpPr>
+          <p:cNvPr id="153" name=""/>
+          <p:cNvSpPr txBox="1"/>
+          <p:nvPr/>
+        </p:nvSpPr>
+        <p:spPr>
+          <a:xfrm>
+            <a:off x="540000" y="2845800"/>
+            <a:ext cx="50400" cy="493200"/>
+          </a:xfrm>
+          <a:prstGeom prst="rect">
+            <a:avLst/>
+          </a:prstGeom>
+          <a:solidFill>
+            <a:srgbClr val="E6BF71"/>
+          </a:solidFill>
+          <a:ln w="0">
+            <a:noFill/>
+          </a:ln>
+        </p:spPr>
+        <p:txBody>
+          <a:bodyPr lIns="90000" tIns="45000" rIns="90000" bIns="45000" anchor="t">
+            <a:spAutoFit/>
+          </a:bodyPr>
+          <a:p>
+            <a:endParaRPr lang="en-US" sz="1800" b="0" u="none" strike="noStrike">
+              <a:solidFill>
+                <a:srgbClr val="000000"/>
+              </a:solidFill>
+              <a:effectLst/>
+              <a:uFillTx/>
+              <a:latin typeface="Arial"/>
+            </a:endParaRPr>
+          </a:p>
+        </p:txBody>
+      </p:sp>
+      <p:sp>
+        <p:nvSpPr>
+          <p:cNvPr id="154" name=""/>
+          <p:cNvSpPr txBox="1"/>
+          <p:nvPr/>
+        </p:nvSpPr>
+        <p:spPr>
+          <a:xfrm>
+            <a:off x="540000" y="2845800"/>
+            <a:ext cx="9000000" cy="493200"/>
+          </a:xfrm>
+          <a:prstGeom prst="rect">
+            <a:avLst/>
+          </a:prstGeom>
+          <a:solidFill>
+            <a:srgbClr val="FFFFFF"/>
+          </a:solidFill>
+          <a:ln w="7200">
+            <a:solidFill>
+              <a:srgbClr val="DFE9E4"/>
+            </a:solidFill>
+            <a:round/>
+          </a:ln>
+        </p:spPr>
+        <p:txBody>
+          <a:bodyPr lIns="198000" tIns="115200" rIns="126000" bIns="115200" anchor="ctr">
+            <a:normAutofit/>
+          </a:bodyPr>
+          <a:p>
+            <a:r>
+              <a:rPr lang="en-US" sz="1550" b="0" u="none" strike="noStrike">
+                <a:solidFill>
+                  <a:srgbClr val="1A2E2B"/>
+                </a:solidFill>
+                <a:effectLst/>
+                <a:uFillTx/>
+                <a:latin typeface="Arial"/>
+              </a:rPr>
+              <a:t>CI → deploy: push to main → test gate → rebuild → smoke check</a:t>
+            </a:r>
+            <a:endParaRPr lang="en-US" sz="1550" b="0" u="none" strike="noStrike">
+              <a:solidFill>
+                <a:srgbClr val="000000"/>
+              </a:solidFill>
+              <a:effectLst/>
+              <a:uFillTx/>
+              <a:latin typeface="Arial"/>
+            </a:endParaRPr>
+          </a:p>
+        </p:txBody>
+      </p:sp>
+      <p:sp>
+        <p:nvSpPr>
+          <p:cNvPr id="155" name=""/>
+          <p:cNvSpPr txBox="1"/>
+          <p:nvPr/>
+        </p:nvSpPr>
+        <p:spPr>
+          <a:xfrm>
+            <a:off x="540000" y="3490200"/>
+            <a:ext cx="50400" cy="493200"/>
+          </a:xfrm>
+          <a:prstGeom prst="rect">
+            <a:avLst/>
+          </a:prstGeom>
+          <a:solidFill>
+            <a:srgbClr val="E6BF71"/>
+          </a:solidFill>
+          <a:ln w="0">
+            <a:noFill/>
+          </a:ln>
+        </p:spPr>
+        <p:txBody>
+          <a:bodyPr lIns="90000" tIns="45000" rIns="90000" bIns="45000" anchor="t">
+            <a:spAutoFit/>
+          </a:bodyPr>
+          <a:p>
+            <a:endParaRPr lang="en-US" sz="1800" b="0" u="none" strike="noStrike">
+              <a:solidFill>
+                <a:srgbClr val="000000"/>
+              </a:solidFill>
+              <a:effectLst/>
+              <a:uFillTx/>
+              <a:latin typeface="Arial"/>
+            </a:endParaRPr>
+          </a:p>
+        </p:txBody>
+      </p:sp>
+      <p:sp>
+        <p:nvSpPr>
+          <p:cNvPr id="156" name=""/>
+          <p:cNvSpPr txBox="1"/>
+          <p:nvPr/>
+        </p:nvSpPr>
+        <p:spPr>
+          <a:xfrm>
+            <a:off x="540000" y="3490200"/>
+            <a:ext cx="9000000" cy="493200"/>
+          </a:xfrm>
+          <a:prstGeom prst="rect">
+            <a:avLst/>
+          </a:prstGeom>
+          <a:solidFill>
+            <a:srgbClr val="FFFFFF"/>
+          </a:solidFill>
+          <a:ln w="7200">
+            <a:solidFill>
+              <a:srgbClr val="DFE9E4"/>
+            </a:solidFill>
+            <a:round/>
+          </a:ln>
+        </p:spPr>
+        <p:txBody>
+          <a:bodyPr lIns="198000" tIns="115200" rIns="126000" bIns="115200" anchor="ctr">
+            <a:normAutofit/>
+          </a:bodyPr>
+          <a:p>
+            <a:r>
+              <a:rPr lang="en-US" sz="1550" b="0" u="none" strike="noStrike">
+                <a:solidFill>
+                  <a:srgbClr val="1A2E2B"/>
+                </a:solidFill>
+                <a:effectLst/>
+                <a:uFillTx/>
+                <a:latin typeface="Arial"/>
+              </a:rPr>
+              <a:t>Portainer for container ops; runbook: deploy/rollback/backup/triage</a:t>
+            </a:r>
+            <a:endParaRPr lang="en-US" sz="1550" b="0" u="none" strike="noStrike">
+              <a:solidFill>
+                <a:srgbClr val="000000"/>
+              </a:solidFill>
+              <a:effectLst/>
+              <a:uFillTx/>
+              <a:latin typeface="Arial"/>
+            </a:endParaRPr>
+          </a:p>
+        </p:txBody>
+      </p:sp>
+    </p:spTree>
+  </p:cSld>
+  <mc:AlternateContent>
+    <mc:Choice Requires="p14">
+      <p:transition spd="slow" p14:dur="2000"/>
+    </mc:Choice>
+    <mc:Fallback>
+      <p:transition spd="slow"/>
+    </mc:Fallback>
+  </mc:AlternateContent>
+</p:sld>
+</file>
+
+<file path=ppt/slides/slide24.xml><?xml version="1.0" encoding="utf-8"?>
+<p:sld xmlns:a="http://schemas.openxmlformats.org/drawingml/2006/main" xmlns:p="http://schemas.openxmlformats.org/presentationml/2006/main" xmlns:r="http://schemas.openxmlformats.org/officeDocument/2006/relationships" xmlns:p14="http://schemas.microsoft.com/office/powerpoint/2010/main" xmlns:p15="http://schemas.microsoft.com/office/powerpoint/2012/main" xmlns:mc="http://schemas.openxmlformats.org/markup-compatibility/2006">
+  <p:cSld>
+    <p:bg>
+      <p:bgPr>
+        <a:solidFill>
+          <a:srgbClr val="F4F8F5"/>
+        </a:solidFill>
+      </p:bgPr>
+    </p:bg>
+    <p:spTree>
+      <p:nvGrpSpPr>
+        <p:cNvPr id="1" name=""/>
+        <p:cNvGrpSpPr/>
+        <p:nvPr/>
+      </p:nvGrpSpPr>
+      <p:grpSpPr>
+        <a:xfrm>
+          <a:off x="0" y="0"/>
+          <a:ext cx="0" cy="0"/>
+          <a:chOff x="0" y="0"/>
+          <a:chExt cx="0" cy="0"/>
+        </a:xfrm>
+      </p:grpSpPr>
+      <p:sp>
+        <p:nvSpPr>
+          <p:cNvPr id="157" name=""/>
+          <p:cNvSpPr txBox="1"/>
+          <p:nvPr/>
+        </p:nvSpPr>
+        <p:spPr>
+          <a:xfrm>
+            <a:off x="540000" y="324000"/>
+            <a:ext cx="9000000" cy="576000"/>
+          </a:xfrm>
+          <a:prstGeom prst="rect">
+            <a:avLst/>
+          </a:prstGeom>
+          <a:noFill/>
+          <a:ln w="0">
+            <a:noFill/>
+          </a:ln>
+        </p:spPr>
+        <p:txBody>
+          <a:bodyPr lIns="90000" tIns="45000" rIns="90000" bIns="45000" anchor="t">
+            <a:spAutoFit/>
+          </a:bodyPr>
+          <a:p>
+            <a:r>
+              <a:rPr lang="en-US" sz="2600" b="1" u="none" strike="noStrike">
+                <a:solidFill>
+                  <a:srgbClr val="103E3A"/>
+                </a:solidFill>
+                <a:effectLst/>
+                <a:uFillTx/>
+                <a:latin typeface="Arial"/>
+              </a:rPr>
+              <a:t>Spec Kit Process</a:t>
+            </a:r>
+            <a:endParaRPr lang="en-US" sz="2600" b="0" u="none" strike="noStrike">
+              <a:solidFill>
+                <a:srgbClr val="000000"/>
+              </a:solidFill>
+              <a:effectLst/>
+              <a:uFillTx/>
+              <a:latin typeface="Arial"/>
+            </a:endParaRPr>
+          </a:p>
+        </p:txBody>
+      </p:sp>
+      <p:sp>
+        <p:nvSpPr>
+          <p:cNvPr id="158" name=""/>
+          <p:cNvSpPr txBox="1"/>
+          <p:nvPr/>
+        </p:nvSpPr>
+        <p:spPr>
+          <a:xfrm>
+            <a:off x="540000" y="900000"/>
+            <a:ext cx="1440000" cy="43200"/>
+          </a:xfrm>
+          <a:prstGeom prst="rect">
+            <a:avLst/>
+          </a:prstGeom>
+          <a:solidFill>
+            <a:srgbClr val="E6BF71"/>
+          </a:solidFill>
+          <a:ln w="0">
+            <a:noFill/>
+          </a:ln>
+        </p:spPr>
+        <p:txBody>
+          <a:bodyPr lIns="90000" tIns="-1800" rIns="90000" bIns="-1800" anchor="t">
+            <a:spAutoFit/>
+          </a:bodyPr>
+          <a:p>
+            <a:endParaRPr lang="en-US" sz="1800" b="0" u="none" strike="noStrike">
+              <a:solidFill>
+                <a:srgbClr val="000000"/>
+              </a:solidFill>
+              <a:effectLst/>
+              <a:uFillTx/>
+              <a:latin typeface="Arial"/>
+            </a:endParaRPr>
+          </a:p>
+        </p:txBody>
+      </p:sp>
+      <p:sp>
+        <p:nvSpPr>
+          <p:cNvPr id="159" name=""/>
+          <p:cNvSpPr txBox="1"/>
+          <p:nvPr/>
+        </p:nvSpPr>
+        <p:spPr>
+          <a:xfrm>
+            <a:off x="540000" y="2030400"/>
+            <a:ext cx="50400" cy="342000"/>
+          </a:xfrm>
+          <a:prstGeom prst="rect">
+            <a:avLst/>
+          </a:prstGeom>
+          <a:solidFill>
+            <a:srgbClr val="E6BF71"/>
+          </a:solidFill>
+          <a:ln w="0">
+            <a:noFill/>
+          </a:ln>
+        </p:spPr>
+        <p:txBody>
+          <a:bodyPr lIns="90000" tIns="45000" rIns="90000" bIns="45000" anchor="t">
+            <a:spAutoFit/>
+          </a:bodyPr>
+          <a:p>
+            <a:endParaRPr lang="en-US" sz="1800" b="0" u="none" strike="noStrike">
+              <a:solidFill>
+                <a:srgbClr val="000000"/>
+              </a:solidFill>
+              <a:effectLst/>
+              <a:uFillTx/>
+              <a:latin typeface="Arial"/>
+            </a:endParaRPr>
+          </a:p>
+        </p:txBody>
+      </p:sp>
+      <p:sp>
+        <p:nvSpPr>
+          <p:cNvPr id="160" name=""/>
+          <p:cNvSpPr txBox="1"/>
+          <p:nvPr/>
+        </p:nvSpPr>
+        <p:spPr>
+          <a:xfrm>
+            <a:off x="540000" y="1976040"/>
+            <a:ext cx="9000000" cy="450360"/>
+          </a:xfrm>
+          <a:prstGeom prst="rect">
+            <a:avLst/>
+          </a:prstGeom>
+          <a:solidFill>
+            <a:srgbClr val="FFFFFF"/>
+          </a:solidFill>
+          <a:ln w="7200">
+            <a:solidFill>
+              <a:srgbClr val="DFE9E4"/>
+            </a:solidFill>
+            <a:round/>
+          </a:ln>
+        </p:spPr>
+        <p:txBody>
+          <a:bodyPr lIns="198000" tIns="115200" rIns="126000" bIns="115200" anchor="ctr">
+            <a:normAutofit/>
+          </a:bodyPr>
+          <a:p>
+            <a:r>
+              <a:rPr lang="en-US" sz="1550" b="0" u="none" strike="noStrike">
+                <a:solidFill>
+                  <a:srgbClr val="1A2E2B"/>
+                </a:solidFill>
+                <a:effectLst/>
+                <a:uFillTx/>
+                <a:latin typeface="Arial"/>
+              </a:rPr>
+              <a:t>Constitution ratified first (v1.0.0)</a:t>
+            </a:r>
+            <a:endParaRPr lang="en-US" sz="1550" b="0" u="none" strike="noStrike">
+              <a:solidFill>
+                <a:srgbClr val="000000"/>
+              </a:solidFill>
+              <a:effectLst/>
+              <a:uFillTx/>
+              <a:latin typeface="Arial"/>
+            </a:endParaRPr>
+          </a:p>
+        </p:txBody>
+      </p:sp>
+      <p:sp>
+        <p:nvSpPr>
+          <p:cNvPr id="161" name=""/>
+          <p:cNvSpPr txBox="1"/>
+          <p:nvPr/>
+        </p:nvSpPr>
+        <p:spPr>
+          <a:xfrm>
+            <a:off x="540000" y="2523600"/>
+            <a:ext cx="50400" cy="493200"/>
+          </a:xfrm>
+          <a:prstGeom prst="rect">
+            <a:avLst/>
+          </a:prstGeom>
+          <a:solidFill>
+            <a:srgbClr val="E6BF71"/>
+          </a:solidFill>
+          <a:ln w="0">
+            <a:noFill/>
+          </a:ln>
+        </p:spPr>
+        <p:txBody>
+          <a:bodyPr lIns="90000" tIns="45000" rIns="90000" bIns="45000" anchor="t">
+            <a:spAutoFit/>
+          </a:bodyPr>
+          <a:p>
+            <a:endParaRPr lang="en-US" sz="1800" b="0" u="none" strike="noStrike">
+              <a:solidFill>
+                <a:srgbClr val="000000"/>
+              </a:solidFill>
+              <a:effectLst/>
+              <a:uFillTx/>
+              <a:latin typeface="Arial"/>
+            </a:endParaRPr>
+          </a:p>
+        </p:txBody>
+      </p:sp>
+      <p:sp>
+        <p:nvSpPr>
+          <p:cNvPr id="162" name=""/>
+          <p:cNvSpPr txBox="1"/>
+          <p:nvPr/>
+        </p:nvSpPr>
+        <p:spPr>
+          <a:xfrm>
+            <a:off x="540000" y="2523600"/>
+            <a:ext cx="9000000" cy="493200"/>
+          </a:xfrm>
+          <a:prstGeom prst="rect">
+            <a:avLst/>
+          </a:prstGeom>
+          <a:solidFill>
+            <a:srgbClr val="FFFFFF"/>
+          </a:solidFill>
+          <a:ln w="7200">
+            <a:solidFill>
+              <a:srgbClr val="DFE9E4"/>
+            </a:solidFill>
+            <a:round/>
+          </a:ln>
+        </p:spPr>
+        <p:txBody>
+          <a:bodyPr lIns="198000" tIns="115200" rIns="126000" bIns="115200" anchor="ctr">
+            <a:normAutofit/>
+          </a:bodyPr>
+          <a:p>
+            <a:r>
+              <a:rPr lang="en-US" sz="1550" b="0" u="none" strike="noStrike">
+                <a:solidFill>
+                  <a:srgbClr val="1A2E2B"/>
+                </a:solidFill>
+                <a:effectLst/>
+                <a:uFillTx/>
+                <a:latin typeface="Arial"/>
+              </a:rPr>
+              <a:t>8 features: spec → plan → tasks → implement → evidence → acceptance</a:t>
+            </a:r>
+            <a:endParaRPr lang="en-US" sz="1550" b="0" u="none" strike="noStrike">
+              <a:solidFill>
+                <a:srgbClr val="000000"/>
+              </a:solidFill>
+              <a:effectLst/>
+              <a:uFillTx/>
+              <a:latin typeface="Arial"/>
+            </a:endParaRPr>
+          </a:p>
+        </p:txBody>
+      </p:sp>
+      <p:sp>
+        <p:nvSpPr>
+          <p:cNvPr id="163" name=""/>
+          <p:cNvSpPr txBox="1"/>
+          <p:nvPr/>
+        </p:nvSpPr>
+        <p:spPr>
+          <a:xfrm>
+            <a:off x="540000" y="3168000"/>
+            <a:ext cx="50400" cy="493200"/>
+          </a:xfrm>
+          <a:prstGeom prst="rect">
+            <a:avLst/>
+          </a:prstGeom>
+          <a:solidFill>
+            <a:srgbClr val="E6BF71"/>
+          </a:solidFill>
+          <a:ln w="0">
+            <a:noFill/>
+          </a:ln>
+        </p:spPr>
+        <p:txBody>
+          <a:bodyPr lIns="90000" tIns="45000" rIns="90000" bIns="45000" anchor="t">
+            <a:spAutoFit/>
+          </a:bodyPr>
+          <a:p>
+            <a:endParaRPr lang="en-US" sz="1800" b="0" u="none" strike="noStrike">
+              <a:solidFill>
+                <a:srgbClr val="000000"/>
+              </a:solidFill>
+              <a:effectLst/>
+              <a:uFillTx/>
+              <a:latin typeface="Arial"/>
+            </a:endParaRPr>
+          </a:p>
+        </p:txBody>
+      </p:sp>
+      <p:sp>
+        <p:nvSpPr>
+          <p:cNvPr id="164" name=""/>
+          <p:cNvSpPr txBox="1"/>
+          <p:nvPr/>
+        </p:nvSpPr>
+        <p:spPr>
+          <a:xfrm>
+            <a:off x="540000" y="3168000"/>
+            <a:ext cx="9000000" cy="493200"/>
+          </a:xfrm>
+          <a:prstGeom prst="rect">
+            <a:avLst/>
+          </a:prstGeom>
+          <a:solidFill>
+            <a:srgbClr val="FFFFFF"/>
+          </a:solidFill>
+          <a:ln w="7200">
+            <a:solidFill>
+              <a:srgbClr val="DFE9E4"/>
+            </a:solidFill>
+            <a:round/>
+          </a:ln>
+        </p:spPr>
+        <p:txBody>
+          <a:bodyPr lIns="198000" tIns="115200" rIns="126000" bIns="115200" anchor="ctr">
+            <a:normAutofit/>
+          </a:bodyPr>
+          <a:p>
+            <a:r>
+              <a:rPr lang="en-US" sz="1550" b="0" u="none" strike="noStrike">
+                <a:solidFill>
+                  <a:srgbClr val="1A2E2B"/>
+                </a:solidFill>
+                <a:effectLst/>
+                <a:uFillTx/>
+                <a:latin typeface="Arial"/>
+              </a:rPr>
+              <a:t>11 recorded decisions (D-001…D-011): asked, dated, traced</a:t>
+            </a:r>
+            <a:endParaRPr lang="en-US" sz="1550" b="0" u="none" strike="noStrike">
+              <a:solidFill>
+                <a:srgbClr val="000000"/>
+              </a:solidFill>
+              <a:effectLst/>
+              <a:uFillTx/>
+              <a:latin typeface="Arial"/>
+            </a:endParaRPr>
+          </a:p>
+        </p:txBody>
+      </p:sp>
+      <p:sp>
+        <p:nvSpPr>
+          <p:cNvPr id="165" name=""/>
+          <p:cNvSpPr txBox="1"/>
+          <p:nvPr/>
+        </p:nvSpPr>
+        <p:spPr>
+          <a:xfrm>
+            <a:off x="540000" y="3812400"/>
+            <a:ext cx="50400" cy="493200"/>
+          </a:xfrm>
+          <a:prstGeom prst="rect">
+            <a:avLst/>
+          </a:prstGeom>
+          <a:solidFill>
+            <a:srgbClr val="E6BF71"/>
+          </a:solidFill>
+          <a:ln w="0">
+            <a:noFill/>
+          </a:ln>
+        </p:spPr>
+        <p:txBody>
+          <a:bodyPr lIns="90000" tIns="45000" rIns="90000" bIns="45000" anchor="t">
+            <a:spAutoFit/>
+          </a:bodyPr>
+          <a:p>
+            <a:endParaRPr lang="en-US" sz="1800" b="0" u="none" strike="noStrike">
+              <a:solidFill>
+                <a:srgbClr val="000000"/>
+              </a:solidFill>
+              <a:effectLst/>
+              <a:uFillTx/>
+              <a:latin typeface="Arial"/>
+            </a:endParaRPr>
+          </a:p>
+        </p:txBody>
+      </p:sp>
+      <p:sp>
+        <p:nvSpPr>
+          <p:cNvPr id="166" name=""/>
+          <p:cNvSpPr txBox="1"/>
+          <p:nvPr/>
+        </p:nvSpPr>
+        <p:spPr>
+          <a:xfrm>
+            <a:off x="540000" y="3812400"/>
+            <a:ext cx="9000000" cy="493200"/>
+          </a:xfrm>
+          <a:prstGeom prst="rect">
+            <a:avLst/>
+          </a:prstGeom>
+          <a:solidFill>
+            <a:srgbClr val="FFFFFF"/>
+          </a:solidFill>
+          <a:ln w="7200">
+            <a:solidFill>
+              <a:srgbClr val="DFE9E4"/>
+            </a:solidFill>
+            <a:round/>
+          </a:ln>
+        </p:spPr>
+        <p:txBody>
+          <a:bodyPr lIns="198000" tIns="115200" rIns="126000" bIns="115200" anchor="ctr">
+            <a:normAutofit/>
+          </a:bodyPr>
+          <a:p>
+            <a:r>
+              <a:rPr lang="en-US" sz="1550" b="0" u="none" strike="noStrike">
+                <a:solidFill>
+                  <a:srgbClr val="1A2E2B"/>
+                </a:solidFill>
+                <a:effectLst/>
+                <a:uFillTx/>
+                <a:latin typeface="Arial"/>
+              </a:rPr>
+              <a:t>All phases owner-accepted — including the live deployment</a:t>
+            </a:r>
+            <a:endParaRPr lang="en-US" sz="1550" b="0" u="none" strike="noStrike">
+              <a:solidFill>
+                <a:srgbClr val="000000"/>
+              </a:solidFill>
+              <a:effectLst/>
+              <a:uFillTx/>
+              <a:latin typeface="Arial"/>
+            </a:endParaRPr>
+          </a:p>
+        </p:txBody>
+      </p:sp>
+    </p:spTree>
+  </p:cSld>
+  <mc:AlternateContent>
+    <mc:Choice Requires="p14">
+      <p:transition spd="slow" p14:dur="2000"/>
+    </mc:Choice>
+    <mc:Fallback>
+      <p:transition spd="slow"/>
+    </mc:Fallback>
+  </mc:AlternateContent>
+</p:sld>
+</file>
+
+<file path=ppt/slides/slide25.xml><?xml version="1.0" encoding="utf-8"?>
+<p:sld xmlns:a="http://schemas.openxmlformats.org/drawingml/2006/main" xmlns:p="http://schemas.openxmlformats.org/presentationml/2006/main" xmlns:r="http://schemas.openxmlformats.org/officeDocument/2006/relationships" xmlns:p14="http://schemas.microsoft.com/office/powerpoint/2010/main" xmlns:p15="http://schemas.microsoft.com/office/powerpoint/2012/main" xmlns:mc="http://schemas.openxmlformats.org/markup-compatibility/2006">
+  <p:cSld>
+    <p:bg>
+      <p:bgPr>
+        <a:solidFill>
+          <a:srgbClr val="F4F8F5"/>
+        </a:solidFill>
+      </p:bgPr>
+    </p:bg>
+    <p:spTree>
+      <p:nvGrpSpPr>
+        <p:cNvPr id="1" name=""/>
+        <p:cNvGrpSpPr/>
+        <p:nvPr/>
+      </p:nvGrpSpPr>
+      <p:grpSpPr>
+        <a:xfrm>
+          <a:off x="0" y="0"/>
+          <a:ext cx="0" cy="0"/>
+          <a:chOff x="0" y="0"/>
+          <a:chExt cx="0" cy="0"/>
+        </a:xfrm>
+      </p:grpSpPr>
+      <p:sp>
+        <p:nvSpPr>
+          <p:cNvPr id="167" name=""/>
+          <p:cNvSpPr txBox="1"/>
+          <p:nvPr/>
+        </p:nvSpPr>
+        <p:spPr>
+          <a:xfrm>
+            <a:off x="540000" y="324000"/>
+            <a:ext cx="9000000" cy="576000"/>
+          </a:xfrm>
+          <a:prstGeom prst="rect">
+            <a:avLst/>
+          </a:prstGeom>
+          <a:noFill/>
+          <a:ln w="0">
+            <a:noFill/>
+          </a:ln>
+        </p:spPr>
+        <p:txBody>
+          <a:bodyPr lIns="90000" tIns="45000" rIns="90000" bIns="45000" anchor="t">
+            <a:spAutoFit/>
+          </a:bodyPr>
+          <a:p>
+            <a:r>
+              <a:rPr lang="en-US" sz="2600" b="1" u="none" strike="noStrike">
+                <a:solidFill>
+                  <a:srgbClr val="103E3A"/>
+                </a:solidFill>
+                <a:effectLst/>
+                <a:uFillTx/>
+                <a:latin typeface="Arial"/>
+              </a:rPr>
+              <a:t>AI-Assisted Development — Disclosed</a:t>
+            </a:r>
+            <a:endParaRPr lang="en-US" sz="2600" b="0" u="none" strike="noStrike">
+              <a:solidFill>
+                <a:srgbClr val="000000"/>
+              </a:solidFill>
+              <a:effectLst/>
+              <a:uFillTx/>
+              <a:latin typeface="Arial"/>
+            </a:endParaRPr>
+          </a:p>
+        </p:txBody>
+      </p:sp>
+      <p:sp>
+        <p:nvSpPr>
+          <p:cNvPr id="168" name=""/>
+          <p:cNvSpPr txBox="1"/>
+          <p:nvPr/>
+        </p:nvSpPr>
+        <p:spPr>
+          <a:xfrm>
+            <a:off x="540000" y="900000"/>
+            <a:ext cx="1440000" cy="43200"/>
+          </a:xfrm>
+          <a:prstGeom prst="rect">
+            <a:avLst/>
+          </a:prstGeom>
+          <a:solidFill>
+            <a:srgbClr val="E6BF71"/>
+          </a:solidFill>
+          <a:ln w="0">
+            <a:noFill/>
+          </a:ln>
+        </p:spPr>
+        <p:txBody>
+          <a:bodyPr lIns="90000" tIns="-1800" rIns="90000" bIns="-1800" anchor="t">
+            <a:spAutoFit/>
+          </a:bodyPr>
+          <a:p>
+            <a:endParaRPr lang="en-US" sz="1800" b="0" u="none" strike="noStrike">
+              <a:solidFill>
+                <a:srgbClr val="000000"/>
+              </a:solidFill>
+              <a:effectLst/>
+              <a:uFillTx/>
+              <a:latin typeface="Arial"/>
+            </a:endParaRPr>
+          </a:p>
+        </p:txBody>
+      </p:sp>
+      <p:sp>
+        <p:nvSpPr>
+          <p:cNvPr id="169" name=""/>
+          <p:cNvSpPr txBox="1"/>
+          <p:nvPr/>
+        </p:nvSpPr>
+        <p:spPr>
+          <a:xfrm>
+            <a:off x="540000" y="2352600"/>
+            <a:ext cx="50400" cy="342000"/>
+          </a:xfrm>
+          <a:prstGeom prst="rect">
+            <a:avLst/>
+          </a:prstGeom>
+          <a:solidFill>
+            <a:srgbClr val="E6BF71"/>
+          </a:solidFill>
+          <a:ln w="0">
+            <a:noFill/>
+          </a:ln>
+        </p:spPr>
+        <p:txBody>
+          <a:bodyPr lIns="90000" tIns="45000" rIns="90000" bIns="45000" anchor="t">
+            <a:spAutoFit/>
+          </a:bodyPr>
+          <a:p>
+            <a:endParaRPr lang="en-US" sz="1800" b="0" u="none" strike="noStrike">
+              <a:solidFill>
+                <a:srgbClr val="000000"/>
+              </a:solidFill>
+              <a:effectLst/>
+              <a:uFillTx/>
+              <a:latin typeface="Arial"/>
+            </a:endParaRPr>
+          </a:p>
+        </p:txBody>
+      </p:sp>
+      <p:sp>
+        <p:nvSpPr>
+          <p:cNvPr id="170" name=""/>
+          <p:cNvSpPr txBox="1"/>
+          <p:nvPr/>
+        </p:nvSpPr>
+        <p:spPr>
+          <a:xfrm>
+            <a:off x="540000" y="2298240"/>
+            <a:ext cx="9000000" cy="450360"/>
+          </a:xfrm>
+          <a:prstGeom prst="rect">
+            <a:avLst/>
+          </a:prstGeom>
+          <a:solidFill>
+            <a:srgbClr val="FFFFFF"/>
+          </a:solidFill>
+          <a:ln w="7200">
+            <a:solidFill>
+              <a:srgbClr val="DFE9E4"/>
+            </a:solidFill>
+            <a:round/>
+          </a:ln>
+        </p:spPr>
+        <p:txBody>
+          <a:bodyPr lIns="198000" tIns="115200" rIns="126000" bIns="115200" anchor="ctr">
+            <a:normAutofit/>
+          </a:bodyPr>
+          <a:p>
+            <a:r>
+              <a:rPr lang="en-US" sz="1550" b="0" u="none" strike="noStrike">
+                <a:solidFill>
+                  <a:srgbClr val="1A2E2B"/>
+                </a:solidFill>
+                <a:effectLst/>
+                <a:uFillTx/>
+                <a:latin typeface="Arial"/>
+              </a:rPr>
+              <a:t>Built by Devin (Cognition) under spec-kit discipline</a:t>
+            </a:r>
+            <a:endParaRPr lang="en-US" sz="1550" b="0" u="none" strike="noStrike">
+              <a:solidFill>
+                <a:srgbClr val="000000"/>
+              </a:solidFill>
+              <a:effectLst/>
+              <a:uFillTx/>
+              <a:latin typeface="Arial"/>
+            </a:endParaRPr>
+          </a:p>
+        </p:txBody>
+      </p:sp>
+      <p:sp>
+        <p:nvSpPr>
+          <p:cNvPr id="171" name=""/>
+          <p:cNvSpPr txBox="1"/>
+          <p:nvPr/>
+        </p:nvSpPr>
+        <p:spPr>
+          <a:xfrm>
+            <a:off x="540000" y="2845800"/>
+            <a:ext cx="50400" cy="493200"/>
+          </a:xfrm>
+          <a:prstGeom prst="rect">
+            <a:avLst/>
+          </a:prstGeom>
+          <a:solidFill>
+            <a:srgbClr val="E6BF71"/>
+          </a:solidFill>
+          <a:ln w="0">
+            <a:noFill/>
+          </a:ln>
+        </p:spPr>
+        <p:txBody>
+          <a:bodyPr lIns="90000" tIns="45000" rIns="90000" bIns="45000" anchor="t">
+            <a:spAutoFit/>
+          </a:bodyPr>
+          <a:p>
+            <a:endParaRPr lang="en-US" sz="1800" b="0" u="none" strike="noStrike">
+              <a:solidFill>
+                <a:srgbClr val="000000"/>
+              </a:solidFill>
+              <a:effectLst/>
+              <a:uFillTx/>
+              <a:latin typeface="Arial"/>
+            </a:endParaRPr>
+          </a:p>
+        </p:txBody>
+      </p:sp>
+      <p:sp>
+        <p:nvSpPr>
+          <p:cNvPr id="172" name=""/>
+          <p:cNvSpPr txBox="1"/>
+          <p:nvPr/>
+        </p:nvSpPr>
+        <p:spPr>
+          <a:xfrm>
+            <a:off x="540000" y="2845800"/>
+            <a:ext cx="9000000" cy="493200"/>
+          </a:xfrm>
+          <a:prstGeom prst="rect">
+            <a:avLst/>
+          </a:prstGeom>
+          <a:solidFill>
+            <a:srgbClr val="FFFFFF"/>
+          </a:solidFill>
+          <a:ln w="7200">
+            <a:solidFill>
+              <a:srgbClr val="DFE9E4"/>
+            </a:solidFill>
+            <a:round/>
+          </a:ln>
+        </p:spPr>
+        <p:txBody>
+          <a:bodyPr lIns="198000" tIns="115200" rIns="126000" bIns="115200" anchor="ctr">
+            <a:normAutofit/>
+          </a:bodyPr>
+          <a:p>
+            <a:r>
+              <a:rPr lang="en-US" sz="1550" b="0" u="none" strike="noStrike">
+                <a:solidFill>
+                  <a:srgbClr val="1A2E2B"/>
+                </a:solidFill>
+                <a:effectLst/>
+                <a:uFillTx/>
+                <a:latin typeface="Arial"/>
+              </a:rPr>
+              <a:t>Humans approved every decision and every phase acceptance</a:t>
+            </a:r>
+            <a:endParaRPr lang="en-US" sz="1550" b="0" u="none" strike="noStrike">
+              <a:solidFill>
+                <a:srgbClr val="000000"/>
+              </a:solidFill>
+              <a:effectLst/>
+              <a:uFillTx/>
+              <a:latin typeface="Arial"/>
+            </a:endParaRPr>
+          </a:p>
+        </p:txBody>
+      </p:sp>
+      <p:sp>
+        <p:nvSpPr>
+          <p:cNvPr id="173" name=""/>
+          <p:cNvSpPr txBox="1"/>
+          <p:nvPr/>
+        </p:nvSpPr>
+        <p:spPr>
+          <a:xfrm>
+            <a:off x="540000" y="3490200"/>
+            <a:ext cx="50400" cy="493200"/>
+          </a:xfrm>
+          <a:prstGeom prst="rect">
+            <a:avLst/>
+          </a:prstGeom>
+          <a:solidFill>
+            <a:srgbClr val="E6BF71"/>
+          </a:solidFill>
+          <a:ln w="0">
+            <a:noFill/>
+          </a:ln>
+        </p:spPr>
+        <p:txBody>
+          <a:bodyPr lIns="90000" tIns="45000" rIns="90000" bIns="45000" anchor="t">
+            <a:spAutoFit/>
+          </a:bodyPr>
+          <a:p>
+            <a:endParaRPr lang="en-US" sz="1800" b="0" u="none" strike="noStrike">
+              <a:solidFill>
+                <a:srgbClr val="000000"/>
+              </a:solidFill>
+              <a:effectLst/>
+              <a:uFillTx/>
+              <a:latin typeface="Arial"/>
+            </a:endParaRPr>
+          </a:p>
+        </p:txBody>
+      </p:sp>
+      <p:sp>
+        <p:nvSpPr>
+          <p:cNvPr id="174" name=""/>
+          <p:cNvSpPr txBox="1"/>
+          <p:nvPr/>
+        </p:nvSpPr>
+        <p:spPr>
+          <a:xfrm>
+            <a:off x="540000" y="3490200"/>
+            <a:ext cx="9000000" cy="493200"/>
+          </a:xfrm>
+          <a:prstGeom prst="rect">
+            <a:avLst/>
+          </a:prstGeom>
+          <a:solidFill>
+            <a:srgbClr val="FFFFFF"/>
+          </a:solidFill>
+          <a:ln w="7200">
+            <a:solidFill>
+              <a:srgbClr val="DFE9E4"/>
+            </a:solidFill>
+            <a:round/>
+          </a:ln>
+        </p:spPr>
+        <p:txBody>
+          <a:bodyPr lIns="198000" tIns="115200" rIns="126000" bIns="115200" anchor="ctr">
+            <a:normAutofit/>
+          </a:bodyPr>
+          <a:p>
+            <a:r>
+              <a:rPr lang="en-US" sz="1550" b="0" u="none" strike="noStrike">
+                <a:solidFill>
+                  <a:srgbClr val="1A2E2B"/>
+                </a:solidFill>
+                <a:effectLst/>
+                <a:uFillTx/>
+                <a:latin typeface="Arial"/>
+              </a:rPr>
+              <a:t>Evidence separates verified checks from unrun ones — nothing fabricated</a:t>
+            </a:r>
+            <a:endParaRPr lang="en-US" sz="1550" b="0" u="none" strike="noStrike">
+              <a:solidFill>
+                <a:srgbClr val="000000"/>
+              </a:solidFill>
+              <a:effectLst/>
+              <a:uFillTx/>
+              <a:latin typeface="Arial"/>
+            </a:endParaRPr>
+          </a:p>
+        </p:txBody>
+      </p:sp>
+    </p:spTree>
+  </p:cSld>
+  <mc:AlternateContent>
+    <mc:Choice Requires="p14">
+      <p:transition spd="slow" p14:dur="2000"/>
+    </mc:Choice>
+    <mc:Fallback>
+      <p:transition spd="slow"/>
+    </mc:Fallback>
+  </mc:AlternateContent>
+</p:sld>
+</file>
+
+<file path=ppt/slides/slide26.xml><?xml version="1.0" encoding="utf-8"?>
+<p:sld xmlns:a="http://schemas.openxmlformats.org/drawingml/2006/main" xmlns:p="http://schemas.openxmlformats.org/presentationml/2006/main" xmlns:r="http://schemas.openxmlformats.org/officeDocument/2006/relationships" xmlns:p14="http://schemas.microsoft.com/office/powerpoint/2010/main" xmlns:p15="http://schemas.microsoft.com/office/powerpoint/2012/main" xmlns:mc="http://schemas.openxmlformats.org/markup-compatibility/2006">
+  <p:cSld>
+    <p:bg>
+      <p:bgPr>
+        <a:solidFill>
+          <a:srgbClr val="F4F8F5"/>
+        </a:solidFill>
+      </p:bgPr>
+    </p:bg>
+    <p:spTree>
+      <p:nvGrpSpPr>
+        <p:cNvPr id="1" name=""/>
+        <p:cNvGrpSpPr/>
+        <p:nvPr/>
+      </p:nvGrpSpPr>
+      <p:grpSpPr>
+        <a:xfrm>
+          <a:off x="0" y="0"/>
+          <a:ext cx="0" cy="0"/>
+          <a:chOff x="0" y="0"/>
+          <a:chExt cx="0" cy="0"/>
+        </a:xfrm>
+      </p:grpSpPr>
+      <p:sp>
+        <p:nvSpPr>
+          <p:cNvPr id="175" name=""/>
+          <p:cNvSpPr txBox="1"/>
+          <p:nvPr/>
+        </p:nvSpPr>
+        <p:spPr>
+          <a:xfrm>
+            <a:off x="540000" y="324000"/>
+            <a:ext cx="9000000" cy="576000"/>
+          </a:xfrm>
+          <a:prstGeom prst="rect">
+            <a:avLst/>
+          </a:prstGeom>
+          <a:noFill/>
+          <a:ln w="0">
+            <a:noFill/>
+          </a:ln>
+        </p:spPr>
+        <p:txBody>
+          <a:bodyPr lIns="90000" tIns="45000" rIns="90000" bIns="45000" anchor="t">
+            <a:spAutoFit/>
+          </a:bodyPr>
+          <a:p>
+            <a:r>
+              <a:rPr lang="en-US" sz="2600" b="1" u="none" strike="noStrike">
+                <a:solidFill>
+                  <a:srgbClr val="103E3A"/>
+                </a:solidFill>
+                <a:effectLst/>
+                <a:uFillTx/>
+                <a:latin typeface="Arial"/>
+              </a:rPr>
+              <a:t>Quality Evidence</a:t>
+            </a:r>
+            <a:endParaRPr lang="en-US" sz="2600" b="0" u="none" strike="noStrike">
+              <a:solidFill>
+                <a:srgbClr val="000000"/>
+              </a:solidFill>
+              <a:effectLst/>
+              <a:uFillTx/>
+              <a:latin typeface="Arial"/>
+            </a:endParaRPr>
+          </a:p>
+        </p:txBody>
+      </p:sp>
+      <p:sp>
+        <p:nvSpPr>
+          <p:cNvPr id="176" name=""/>
+          <p:cNvSpPr txBox="1"/>
+          <p:nvPr/>
+        </p:nvSpPr>
+        <p:spPr>
+          <a:xfrm>
+            <a:off x="540000" y="900000"/>
+            <a:ext cx="1440000" cy="43200"/>
+          </a:xfrm>
+          <a:prstGeom prst="rect">
+            <a:avLst/>
+          </a:prstGeom>
+          <a:solidFill>
+            <a:srgbClr val="E6BF71"/>
+          </a:solidFill>
+          <a:ln w="0">
+            <a:noFill/>
+          </a:ln>
+        </p:spPr>
+        <p:txBody>
+          <a:bodyPr lIns="90000" tIns="-1800" rIns="90000" bIns="-1800" anchor="t">
+            <a:spAutoFit/>
+          </a:bodyPr>
+          <a:p>
+            <a:endParaRPr lang="en-US" sz="1800" b="0" u="none" strike="noStrike">
+              <a:solidFill>
+                <a:srgbClr val="000000"/>
+              </a:solidFill>
+              <a:effectLst/>
+              <a:uFillTx/>
+              <a:latin typeface="Arial"/>
+            </a:endParaRPr>
+          </a:p>
+        </p:txBody>
+      </p:sp>
+      <p:sp>
+        <p:nvSpPr>
+          <p:cNvPr id="177" name=""/>
+          <p:cNvSpPr txBox="1"/>
+          <p:nvPr/>
+        </p:nvSpPr>
+        <p:spPr>
+          <a:xfrm>
+            <a:off x="540000" y="2352600"/>
+            <a:ext cx="50400" cy="493200"/>
+          </a:xfrm>
+          <a:prstGeom prst="rect">
+            <a:avLst/>
+          </a:prstGeom>
+          <a:solidFill>
+            <a:srgbClr val="E6BF71"/>
+          </a:solidFill>
+          <a:ln w="0">
+            <a:noFill/>
+          </a:ln>
+        </p:spPr>
+        <p:txBody>
+          <a:bodyPr lIns="90000" tIns="45000" rIns="90000" bIns="45000" anchor="t">
+            <a:spAutoFit/>
+          </a:bodyPr>
+          <a:p>
+            <a:endParaRPr lang="en-US" sz="1800" b="0" u="none" strike="noStrike">
+              <a:solidFill>
+                <a:srgbClr val="000000"/>
+              </a:solidFill>
+              <a:effectLst/>
+              <a:uFillTx/>
+              <a:latin typeface="Arial"/>
+            </a:endParaRPr>
+          </a:p>
+        </p:txBody>
+      </p:sp>
+      <p:sp>
+        <p:nvSpPr>
+          <p:cNvPr id="178" name=""/>
+          <p:cNvSpPr txBox="1"/>
+          <p:nvPr/>
+        </p:nvSpPr>
+        <p:spPr>
+          <a:xfrm>
+            <a:off x="540000" y="2352600"/>
+            <a:ext cx="9000000" cy="493200"/>
+          </a:xfrm>
+          <a:prstGeom prst="rect">
+            <a:avLst/>
+          </a:prstGeom>
+          <a:solidFill>
+            <a:srgbClr val="FFFFFF"/>
+          </a:solidFill>
+          <a:ln w="7200">
+            <a:solidFill>
+              <a:srgbClr val="DFE9E4"/>
+            </a:solidFill>
+            <a:round/>
+          </a:ln>
+        </p:spPr>
+        <p:txBody>
+          <a:bodyPr lIns="198000" tIns="115200" rIns="126000" bIns="115200" anchor="ctr">
+            <a:normAutofit/>
+          </a:bodyPr>
+          <a:p>
+            <a:r>
+              <a:rPr lang="en-US" sz="1550" b="0" u="none" strike="noStrike">
+                <a:solidFill>
+                  <a:srgbClr val="1A2E2B"/>
+                </a:solidFill>
+                <a:effectLst/>
+                <a:uFillTx/>
+                <a:latin typeface="Arial"/>
+              </a:rPr>
+              <a:t>427 backend tests · 45 frontend tests · 60 e2e (13 accessibility)</a:t>
+            </a:r>
+            <a:endParaRPr lang="en-US" sz="1550" b="0" u="none" strike="noStrike">
+              <a:solidFill>
+                <a:srgbClr val="000000"/>
+              </a:solidFill>
+              <a:effectLst/>
+              <a:uFillTx/>
+              <a:latin typeface="Arial"/>
+            </a:endParaRPr>
+          </a:p>
+        </p:txBody>
+      </p:sp>
+      <p:sp>
+        <p:nvSpPr>
+          <p:cNvPr id="179" name=""/>
+          <p:cNvSpPr txBox="1"/>
+          <p:nvPr/>
+        </p:nvSpPr>
+        <p:spPr>
+          <a:xfrm>
+            <a:off x="540000" y="2997000"/>
+            <a:ext cx="50400" cy="493200"/>
+          </a:xfrm>
+          <a:prstGeom prst="rect">
+            <a:avLst/>
+          </a:prstGeom>
+          <a:solidFill>
+            <a:srgbClr val="E6BF71"/>
+          </a:solidFill>
+          <a:ln w="0">
+            <a:noFill/>
+          </a:ln>
+        </p:spPr>
+        <p:txBody>
+          <a:bodyPr lIns="90000" tIns="45000" rIns="90000" bIns="45000" anchor="t">
+            <a:spAutoFit/>
+          </a:bodyPr>
+          <a:p>
+            <a:endParaRPr lang="en-US" sz="1800" b="0" u="none" strike="noStrike">
+              <a:solidFill>
+                <a:srgbClr val="000000"/>
+              </a:solidFill>
+              <a:effectLst/>
+              <a:uFillTx/>
+              <a:latin typeface="Arial"/>
+            </a:endParaRPr>
+          </a:p>
+        </p:txBody>
+      </p:sp>
+      <p:sp>
+        <p:nvSpPr>
+          <p:cNvPr id="180" name=""/>
+          <p:cNvSpPr txBox="1"/>
+          <p:nvPr/>
+        </p:nvSpPr>
+        <p:spPr>
+          <a:xfrm>
+            <a:off x="540000" y="2997000"/>
+            <a:ext cx="9000000" cy="493200"/>
+          </a:xfrm>
+          <a:prstGeom prst="rect">
+            <a:avLst/>
+          </a:prstGeom>
+          <a:solidFill>
+            <a:srgbClr val="FFFFFF"/>
+          </a:solidFill>
+          <a:ln w="7200">
+            <a:solidFill>
+              <a:srgbClr val="DFE9E4"/>
+            </a:solidFill>
+            <a:round/>
+          </a:ln>
+        </p:spPr>
+        <p:txBody>
+          <a:bodyPr lIns="198000" tIns="115200" rIns="126000" bIns="115200" anchor="ctr">
+            <a:normAutofit/>
+          </a:bodyPr>
+          <a:p>
+            <a:r>
+              <a:rPr lang="en-US" sz="1550" b="0" u="none" strike="noStrike">
+                <a:solidFill>
+                  <a:srgbClr val="1A2E2B"/>
+                </a:solidFill>
+                <a:effectLst/>
+                <a:uFillTx/>
+                <a:latin typeface="Arial"/>
+              </a:rPr>
+              <a:t>Load: 500 employees, ~130k entries, 25 users — all p95 budgets pass</a:t>
+            </a:r>
+            <a:endParaRPr lang="en-US" sz="1550" b="0" u="none" strike="noStrike">
+              <a:solidFill>
+                <a:srgbClr val="000000"/>
+              </a:solidFill>
+              <a:effectLst/>
+              <a:uFillTx/>
+              <a:latin typeface="Arial"/>
+            </a:endParaRPr>
+          </a:p>
+        </p:txBody>
+      </p:sp>
+      <p:sp>
+        <p:nvSpPr>
+          <p:cNvPr id="181" name=""/>
+          <p:cNvSpPr txBox="1"/>
+          <p:nvPr/>
+        </p:nvSpPr>
+        <p:spPr>
+          <a:xfrm>
+            <a:off x="540000" y="3641400"/>
+            <a:ext cx="50400" cy="342000"/>
+          </a:xfrm>
+          <a:prstGeom prst="rect">
+            <a:avLst/>
+          </a:prstGeom>
+          <a:solidFill>
+            <a:srgbClr val="E6BF71"/>
+          </a:solidFill>
+          <a:ln w="0">
+            <a:noFill/>
+          </a:ln>
+        </p:spPr>
+        <p:txBody>
+          <a:bodyPr lIns="90000" tIns="45000" rIns="90000" bIns="45000" anchor="t">
+            <a:spAutoFit/>
+          </a:bodyPr>
+          <a:p>
+            <a:endParaRPr lang="en-US" sz="1800" b="0" u="none" strike="noStrike">
+              <a:solidFill>
+                <a:srgbClr val="000000"/>
+              </a:solidFill>
+              <a:effectLst/>
+              <a:uFillTx/>
+              <a:latin typeface="Arial"/>
+            </a:endParaRPr>
+          </a:p>
+        </p:txBody>
+      </p:sp>
+      <p:sp>
+        <p:nvSpPr>
+          <p:cNvPr id="182" name=""/>
+          <p:cNvSpPr txBox="1"/>
+          <p:nvPr/>
+        </p:nvSpPr>
+        <p:spPr>
+          <a:xfrm>
+            <a:off x="540000" y="3587040"/>
+            <a:ext cx="9000000" cy="450360"/>
+          </a:xfrm>
+          <a:prstGeom prst="rect">
+            <a:avLst/>
+          </a:prstGeom>
+          <a:solidFill>
+            <a:srgbClr val="FFFFFF"/>
+          </a:solidFill>
+          <a:ln w="7200">
+            <a:solidFill>
+              <a:srgbClr val="DFE9E4"/>
+            </a:solidFill>
+            <a:round/>
+          </a:ln>
+        </p:spPr>
+        <p:txBody>
+          <a:bodyPr lIns="198000" tIns="115200" rIns="126000" bIns="115200" anchor="ctr">
+            <a:normAutofit/>
+          </a:bodyPr>
+          <a:p>
+            <a:r>
+              <a:rPr lang="en-US" sz="1550" b="0" u="none" strike="noStrike">
+                <a:solidFill>
+                  <a:srgbClr val="1A2E2B"/>
+                </a:solidFill>
+                <a:effectLst/>
+                <a:uFillTx/>
+                <a:latin typeface="Arial"/>
+              </a:rPr>
+              <a:t>Real N+1 found and fixed under load: 13.3 s → 0.2 s</a:t>
+            </a:r>
+            <a:endParaRPr lang="en-US" sz="1550" b="0" u="none" strike="noStrike">
+              <a:solidFill>
+                <a:srgbClr val="000000"/>
+              </a:solidFill>
+              <a:effectLst/>
+              <a:uFillTx/>
+              <a:latin typeface="Arial"/>
+            </a:endParaRPr>
+          </a:p>
+        </p:txBody>
+      </p:sp>
+    </p:spTree>
+  </p:cSld>
+  <mc:AlternateContent>
+    <mc:Choice Requires="p14">
+      <p:transition spd="slow" p14:dur="2000"/>
+    </mc:Choice>
+    <mc:Fallback>
+      <p:transition spd="slow"/>
+    </mc:Fallback>
+  </mc:AlternateContent>
+</p:sld>
+</file>
+
+<file path=ppt/slides/slide27.xml><?xml version="1.0" encoding="utf-8"?>
+<p:sld xmlns:a="http://schemas.openxmlformats.org/drawingml/2006/main" xmlns:p="http://schemas.openxmlformats.org/presentationml/2006/main" xmlns:r="http://schemas.openxmlformats.org/officeDocument/2006/relationships" xmlns:p14="http://schemas.microsoft.com/office/powerpoint/2010/main" xmlns:p15="http://schemas.microsoft.com/office/powerpoint/2012/main" xmlns:mc="http://schemas.openxmlformats.org/markup-compatibility/2006">
+  <p:cSld>
+    <p:bg>
+      <p:bgPr>
+        <a:solidFill>
+          <a:srgbClr val="F4F8F5"/>
+        </a:solidFill>
+      </p:bgPr>
+    </p:bg>
+    <p:spTree>
+      <p:nvGrpSpPr>
+        <p:cNvPr id="1" name=""/>
+        <p:cNvGrpSpPr/>
+        <p:nvPr/>
+      </p:nvGrpSpPr>
+      <p:grpSpPr>
+        <a:xfrm>
+          <a:off x="0" y="0"/>
+          <a:ext cx="0" cy="0"/>
+          <a:chOff x="0" y="0"/>
+          <a:chExt cx="0" cy="0"/>
+        </a:xfrm>
+      </p:grpSpPr>
+      <p:sp>
+        <p:nvSpPr>
+          <p:cNvPr id="183" name=""/>
+          <p:cNvSpPr txBox="1"/>
+          <p:nvPr/>
+        </p:nvSpPr>
+        <p:spPr>
+          <a:xfrm>
+            <a:off x="540000" y="324000"/>
+            <a:ext cx="9000000" cy="576000"/>
+          </a:xfrm>
+          <a:prstGeom prst="rect">
+            <a:avLst/>
+          </a:prstGeom>
+          <a:noFill/>
+          <a:ln w="0">
+            <a:noFill/>
+          </a:ln>
+        </p:spPr>
+        <p:txBody>
+          <a:bodyPr lIns="90000" tIns="45000" rIns="90000" bIns="45000" anchor="t">
+            <a:spAutoFit/>
+          </a:bodyPr>
+          <a:p>
+            <a:r>
+              <a:rPr lang="en-US" sz="2600" b="1" u="none" strike="noStrike">
+                <a:solidFill>
+                  <a:srgbClr val="103E3A"/>
+                </a:solidFill>
+                <a:effectLst/>
+                <a:uFillTx/>
+                <a:latin typeface="Arial"/>
+              </a:rPr>
+              <a:t>Honest Limitations</a:t>
+            </a:r>
+            <a:endParaRPr lang="en-US" sz="2600" b="0" u="none" strike="noStrike">
+              <a:solidFill>
+                <a:srgbClr val="000000"/>
+              </a:solidFill>
+              <a:effectLst/>
+              <a:uFillTx/>
+              <a:latin typeface="Arial"/>
+            </a:endParaRPr>
+          </a:p>
+        </p:txBody>
+      </p:sp>
+      <p:sp>
+        <p:nvSpPr>
+          <p:cNvPr id="184" name=""/>
+          <p:cNvSpPr txBox="1"/>
+          <p:nvPr/>
+        </p:nvSpPr>
+        <p:spPr>
+          <a:xfrm>
+            <a:off x="540000" y="900000"/>
+            <a:ext cx="1440000" cy="43200"/>
+          </a:xfrm>
+          <a:prstGeom prst="rect">
+            <a:avLst/>
+          </a:prstGeom>
+          <a:solidFill>
+            <a:srgbClr val="E6BF71"/>
+          </a:solidFill>
+          <a:ln w="0">
+            <a:noFill/>
+          </a:ln>
+        </p:spPr>
+        <p:txBody>
+          <a:bodyPr lIns="90000" tIns="-1800" rIns="90000" bIns="-1800" anchor="t">
+            <a:spAutoFit/>
+          </a:bodyPr>
+          <a:p>
+            <a:endParaRPr lang="en-US" sz="1800" b="0" u="none" strike="noStrike">
+              <a:solidFill>
+                <a:srgbClr val="000000"/>
+              </a:solidFill>
+              <a:effectLst/>
+              <a:uFillTx/>
+              <a:latin typeface="Arial"/>
+            </a:endParaRPr>
+          </a:p>
+        </p:txBody>
+      </p:sp>
+      <p:sp>
+        <p:nvSpPr>
+          <p:cNvPr id="185" name=""/>
+          <p:cNvSpPr txBox="1"/>
+          <p:nvPr/>
+        </p:nvSpPr>
+        <p:spPr>
+          <a:xfrm>
+            <a:off x="540000" y="2277000"/>
+            <a:ext cx="50400" cy="493200"/>
+          </a:xfrm>
+          <a:prstGeom prst="rect">
+            <a:avLst/>
+          </a:prstGeom>
+          <a:solidFill>
+            <a:srgbClr val="E6BF71"/>
+          </a:solidFill>
+          <a:ln w="0">
+            <a:noFill/>
+          </a:ln>
+        </p:spPr>
+        <p:txBody>
+          <a:bodyPr lIns="90000" tIns="45000" rIns="90000" bIns="45000" anchor="t">
+            <a:spAutoFit/>
+          </a:bodyPr>
+          <a:p>
+            <a:endParaRPr lang="en-US" sz="1800" b="0" u="none" strike="noStrike">
+              <a:solidFill>
+                <a:srgbClr val="000000"/>
+              </a:solidFill>
+              <a:effectLst/>
+              <a:uFillTx/>
+              <a:latin typeface="Arial"/>
+            </a:endParaRPr>
+          </a:p>
+        </p:txBody>
+      </p:sp>
+      <p:sp>
+        <p:nvSpPr>
+          <p:cNvPr id="186" name=""/>
+          <p:cNvSpPr txBox="1"/>
+          <p:nvPr/>
+        </p:nvSpPr>
+        <p:spPr>
+          <a:xfrm>
+            <a:off x="540000" y="2277000"/>
+            <a:ext cx="9000000" cy="493200"/>
+          </a:xfrm>
+          <a:prstGeom prst="rect">
+            <a:avLst/>
+          </a:prstGeom>
+          <a:solidFill>
+            <a:srgbClr val="FFFFFF"/>
+          </a:solidFill>
+          <a:ln w="7200">
+            <a:solidFill>
+              <a:srgbClr val="DFE9E4"/>
+            </a:solidFill>
+            <a:round/>
+          </a:ln>
+        </p:spPr>
+        <p:txBody>
+          <a:bodyPr lIns="198000" tIns="115200" rIns="126000" bIns="115200" anchor="ctr">
+            <a:normAutofit/>
+          </a:bodyPr>
+          <a:p>
+            <a:r>
+              <a:rPr lang="en-US" sz="1550" b="0" u="none" strike="noStrike">
+                <a:solidFill>
+                  <a:srgbClr val="1A2E2B"/>
+                </a:solidFill>
+                <a:effectLst/>
+                <a:uFillTx/>
+                <a:latin typeface="Arial"/>
+              </a:rPr>
+              <a:t>HTTP only — domain + TLS pending (one click once a domain exists)</a:t>
+            </a:r>
+            <a:endParaRPr lang="en-US" sz="1550" b="0" u="none" strike="noStrike">
+              <a:solidFill>
+                <a:srgbClr val="000000"/>
+              </a:solidFill>
+              <a:effectLst/>
+              <a:uFillTx/>
+              <a:latin typeface="Arial"/>
+            </a:endParaRPr>
+          </a:p>
+        </p:txBody>
+      </p:sp>
+      <p:sp>
+        <p:nvSpPr>
+          <p:cNvPr id="187" name=""/>
+          <p:cNvSpPr txBox="1"/>
+          <p:nvPr/>
+        </p:nvSpPr>
+        <p:spPr>
+          <a:xfrm>
+            <a:off x="540000" y="2921400"/>
+            <a:ext cx="50400" cy="493200"/>
+          </a:xfrm>
+          <a:prstGeom prst="rect">
+            <a:avLst/>
+          </a:prstGeom>
+          <a:solidFill>
+            <a:srgbClr val="E6BF71"/>
+          </a:solidFill>
+          <a:ln w="0">
+            <a:noFill/>
+          </a:ln>
+        </p:spPr>
+        <p:txBody>
+          <a:bodyPr lIns="90000" tIns="45000" rIns="90000" bIns="45000" anchor="t">
+            <a:spAutoFit/>
+          </a:bodyPr>
+          <a:p>
+            <a:endParaRPr lang="en-US" sz="1800" b="0" u="none" strike="noStrike">
+              <a:solidFill>
+                <a:srgbClr val="000000"/>
+              </a:solidFill>
+              <a:effectLst/>
+              <a:uFillTx/>
+              <a:latin typeface="Arial"/>
+            </a:endParaRPr>
+          </a:p>
+        </p:txBody>
+      </p:sp>
+      <p:sp>
+        <p:nvSpPr>
+          <p:cNvPr id="188" name=""/>
+          <p:cNvSpPr txBox="1"/>
+          <p:nvPr/>
+        </p:nvSpPr>
+        <p:spPr>
+          <a:xfrm>
+            <a:off x="540000" y="2921400"/>
+            <a:ext cx="9000000" cy="493200"/>
+          </a:xfrm>
+          <a:prstGeom prst="rect">
+            <a:avLst/>
+          </a:prstGeom>
+          <a:solidFill>
+            <a:srgbClr val="FFFFFF"/>
+          </a:solidFill>
+          <a:ln w="7200">
+            <a:solidFill>
+              <a:srgbClr val="DFE9E4"/>
+            </a:solidFill>
+            <a:round/>
+          </a:ln>
+        </p:spPr>
+        <p:txBody>
+          <a:bodyPr lIns="198000" tIns="115200" rIns="126000" bIns="115200" anchor="ctr">
+            <a:normAutofit/>
+          </a:bodyPr>
+          <a:p>
+            <a:r>
+              <a:rPr lang="en-US" sz="1550" b="0" u="none" strike="noStrike">
+                <a:solidFill>
+                  <a:srgbClr val="1A2E2B"/>
+                </a:solidFill>
+                <a:effectLst/>
+                <a:uFillTx/>
+                <a:latin typeface="Arial"/>
+              </a:rPr>
+              <a:t>Demo quick-login shares a password — demo mode, off before real data</a:t>
+            </a:r>
+            <a:endParaRPr lang="en-US" sz="1550" b="0" u="none" strike="noStrike">
+              <a:solidFill>
+                <a:srgbClr val="000000"/>
+              </a:solidFill>
+              <a:effectLst/>
+              <a:uFillTx/>
+              <a:latin typeface="Arial"/>
+            </a:endParaRPr>
+          </a:p>
+        </p:txBody>
+      </p:sp>
+      <p:sp>
+        <p:nvSpPr>
+          <p:cNvPr id="189" name=""/>
+          <p:cNvSpPr txBox="1"/>
+          <p:nvPr/>
+        </p:nvSpPr>
+        <p:spPr>
+          <a:xfrm>
+            <a:off x="540000" y="3565800"/>
+            <a:ext cx="50400" cy="493200"/>
+          </a:xfrm>
+          <a:prstGeom prst="rect">
+            <a:avLst/>
+          </a:prstGeom>
+          <a:solidFill>
+            <a:srgbClr val="E6BF71"/>
+          </a:solidFill>
+          <a:ln w="0">
+            <a:noFill/>
+          </a:ln>
+        </p:spPr>
+        <p:txBody>
+          <a:bodyPr lIns="90000" tIns="45000" rIns="90000" bIns="45000" anchor="t">
+            <a:spAutoFit/>
+          </a:bodyPr>
+          <a:p>
+            <a:endParaRPr lang="en-US" sz="1800" b="0" u="none" strike="noStrike">
+              <a:solidFill>
+                <a:srgbClr val="000000"/>
+              </a:solidFill>
+              <a:effectLst/>
+              <a:uFillTx/>
+              <a:latin typeface="Arial"/>
+            </a:endParaRPr>
+          </a:p>
+        </p:txBody>
+      </p:sp>
+      <p:sp>
+        <p:nvSpPr>
+          <p:cNvPr id="190" name=""/>
+          <p:cNvSpPr txBox="1"/>
+          <p:nvPr/>
+        </p:nvSpPr>
+        <p:spPr>
+          <a:xfrm>
+            <a:off x="540000" y="3565800"/>
+            <a:ext cx="9000000" cy="493200"/>
+          </a:xfrm>
+          <a:prstGeom prst="rect">
+            <a:avLst/>
+          </a:prstGeom>
+          <a:solidFill>
+            <a:srgbClr val="FFFFFF"/>
+          </a:solidFill>
+          <a:ln w="7200">
+            <a:solidFill>
+              <a:srgbClr val="DFE9E4"/>
+            </a:solidFill>
+            <a:round/>
+          </a:ln>
+        </p:spPr>
+        <p:txBody>
+          <a:bodyPr lIns="198000" tIns="115200" rIns="126000" bIns="115200" anchor="ctr">
+            <a:normAutofit/>
+          </a:bodyPr>
+          <a:p>
+            <a:r>
+              <a:rPr lang="en-US" sz="1550" b="0" u="none" strike="noStrike">
+                <a:solidFill>
+                  <a:srgbClr val="1A2E2B"/>
+                </a:solidFill>
+                <a:effectLst/>
+                <a:uFillTx/>
+                <a:latin typeface="Arial"/>
+              </a:rPr>
+              <a:t>No automated backups (owner-waived); attachments deferred</a:t>
+            </a:r>
+            <a:endParaRPr lang="en-US" sz="1550" b="0" u="none" strike="noStrike">
+              <a:solidFill>
+                <a:srgbClr val="000000"/>
+              </a:solidFill>
+              <a:effectLst/>
+              <a:uFillTx/>
+              <a:latin typeface="Arial"/>
+            </a:endParaRPr>
+          </a:p>
+        </p:txBody>
+      </p:sp>
+    </p:spTree>
+  </p:cSld>
+  <mc:AlternateContent>
+    <mc:Choice Requires="p14">
+      <p:transition spd="slow" p14:dur="2000"/>
+    </mc:Choice>
+    <mc:Fallback>
+      <p:transition spd="slow"/>
+    </mc:Fallback>
+  </mc:AlternateContent>
+</p:sld>
+</file>
+
+<file path=ppt/slides/slide28.xml><?xml version="1.0" encoding="utf-8"?>
 <p:sld xmlns:a="http://schemas.openxmlformats.org/drawingml/2006/main" xmlns:p="http://schemas.openxmlformats.org/presentationml/2006/main" xmlns:r="http://schemas.openxmlformats.org/officeDocument/2006/relationships" xmlns:p14="http://schemas.microsoft.com/office/powerpoint/2010/main" xmlns:p15="http://schemas.microsoft.com/office/powerpoint/2012/main" xmlns:mc="http://schemas.openxmlformats.org/markup-compatibility/2006">
   <p:cSld>
     <p:bg>
@@ -6125,7 +9641,7 @@
       </p:grpSpPr>
       <p:sp>
         <p:nvSpPr>
-          <p:cNvPr id="92" name=""/>
+          <p:cNvPr id="191" name=""/>
           <p:cNvSpPr txBox="1"/>
           <p:nvPr/>
         </p:nvSpPr>
@@ -6182,7 +9698,7 @@
       </p:sp>
       <p:sp>
         <p:nvSpPr>
-          <p:cNvPr id="93" name=""/>
+          <p:cNvPr id="192" name=""/>
           <p:cNvSpPr txBox="1"/>
           <p:nvPr/>
         </p:nvSpPr>
@@ -6219,7 +9735,7 @@
       </p:sp>
       <p:sp>
         <p:nvSpPr>
-          <p:cNvPr id="94" name=""/>
+          <p:cNvPr id="193" name=""/>
           <p:cNvSpPr txBox="1"/>
           <p:nvPr/>
         </p:nvSpPr>
@@ -6366,7 +9882,7 @@
       </p:grpSpPr>
       <p:sp>
         <p:nvSpPr>
-          <p:cNvPr id="23" name=""/>
+          <p:cNvPr id="28" name=""/>
           <p:cNvSpPr txBox="1"/>
           <p:nvPr/>
         </p:nvSpPr>
@@ -6412,7 +9928,7 @@
       </p:sp>
       <p:sp>
         <p:nvSpPr>
-          <p:cNvPr id="24" name=""/>
+          <p:cNvPr id="29" name=""/>
           <p:cNvSpPr txBox="1"/>
           <p:nvPr/>
         </p:nvSpPr>
@@ -6449,19 +9965,21 @@
       </p:sp>
       <p:sp>
         <p:nvSpPr>
-          <p:cNvPr id="25" name=""/>
-          <p:cNvSpPr txBox="1"/>
-          <p:nvPr/>
-        </p:nvSpPr>
-        <p:spPr>
-          <a:xfrm>
-            <a:off x="540000" y="1152000"/>
-            <a:ext cx="9000000" cy="3960000"/>
-          </a:xfrm>
-          <a:prstGeom prst="rect">
-            <a:avLst/>
-          </a:prstGeom>
-          <a:noFill/>
+          <p:cNvPr id="30" name=""/>
+          <p:cNvSpPr txBox="1"/>
+          <p:nvPr/>
+        </p:nvSpPr>
+        <p:spPr>
+          <a:xfrm>
+            <a:off x="540000" y="2352600"/>
+            <a:ext cx="50400" cy="493200"/>
+          </a:xfrm>
+          <a:prstGeom prst="rect">
+            <a:avLst/>
+          </a:prstGeom>
+          <a:solidFill>
+            <a:srgbClr val="E6BF71"/>
+          </a:solidFill>
           <a:ln w="0">
             <a:noFill/>
           </a:ln>
@@ -6471,8 +9989,48 @@
             <a:spAutoFit/>
           </a:bodyPr>
           <a:p>
-            <a:r>
-              <a:rPr lang="en-US" sz="1500" b="0" u="none" strike="noStrike">
+            <a:endParaRPr lang="en-US" sz="1800" b="0" u="none" strike="noStrike">
+              <a:solidFill>
+                <a:srgbClr val="000000"/>
+              </a:solidFill>
+              <a:effectLst/>
+              <a:uFillTx/>
+              <a:latin typeface="Arial"/>
+            </a:endParaRPr>
+          </a:p>
+        </p:txBody>
+      </p:sp>
+      <p:sp>
+        <p:nvSpPr>
+          <p:cNvPr id="31" name=""/>
+          <p:cNvSpPr txBox="1"/>
+          <p:nvPr/>
+        </p:nvSpPr>
+        <p:spPr>
+          <a:xfrm>
+            <a:off x="540000" y="2264040"/>
+            <a:ext cx="9000000" cy="669960"/>
+          </a:xfrm>
+          <a:prstGeom prst="rect">
+            <a:avLst/>
+          </a:prstGeom>
+          <a:solidFill>
+            <a:srgbClr val="FFFFFF"/>
+          </a:solidFill>
+          <a:ln w="7200">
+            <a:solidFill>
+              <a:srgbClr val="DFE9E4"/>
+            </a:solidFill>
+            <a:round/>
+          </a:ln>
+        </p:spPr>
+        <p:txBody>
+          <a:bodyPr lIns="198000" tIns="115200" rIns="126000" bIns="115200" anchor="ctr">
+            <a:normAutofit/>
+          </a:bodyPr>
+          <a:p>
+            <a:r>
+              <a:rPr lang="en-US" sz="1550" b="0" u="none" strike="noStrike">
                 <a:solidFill>
                   <a:srgbClr val="1A2E2B"/>
                 </a:solidFill>
@@ -6480,20 +10038,87 @@
                 <a:uFillTx/>
                 <a:latin typeface="Arial"/>
               </a:rPr>
-              <a:t>• One workspace: employees submit and track, managers review their team, HR runs the organization</a:t>
-            </a:r>
-            <a:endParaRPr lang="en-US" sz="1500" b="0" u="none" strike="noStrike">
-              <a:solidFill>
-                <a:srgbClr val="000000"/>
-              </a:solidFill>
-              <a:effectLst/>
-              <a:uFillTx/>
-              <a:latin typeface="Arial"/>
-            </a:endParaRPr>
-          </a:p>
-          <a:p>
-            <a:r>
-              <a:rPr lang="en-US" sz="1500" b="0" u="none" strike="noStrike">
+              <a:t>One workspace: employees submit and track, managers review their team, HR runs the organization</a:t>
+            </a:r>
+            <a:endParaRPr lang="en-US" sz="1550" b="0" u="none" strike="noStrike">
+              <a:solidFill>
+                <a:srgbClr val="000000"/>
+              </a:solidFill>
+              <a:effectLst/>
+              <a:uFillTx/>
+              <a:latin typeface="Arial"/>
+            </a:endParaRPr>
+          </a:p>
+        </p:txBody>
+      </p:sp>
+      <p:sp>
+        <p:nvSpPr>
+          <p:cNvPr id="32" name=""/>
+          <p:cNvSpPr txBox="1"/>
+          <p:nvPr/>
+        </p:nvSpPr>
+        <p:spPr>
+          <a:xfrm>
+            <a:off x="540000" y="2997000"/>
+            <a:ext cx="50400" cy="493200"/>
+          </a:xfrm>
+          <a:prstGeom prst="rect">
+            <a:avLst/>
+          </a:prstGeom>
+          <a:solidFill>
+            <a:srgbClr val="E6BF71"/>
+          </a:solidFill>
+          <a:ln w="0">
+            <a:noFill/>
+          </a:ln>
+        </p:spPr>
+        <p:txBody>
+          <a:bodyPr lIns="90000" tIns="45000" rIns="90000" bIns="45000" anchor="t">
+            <a:spAutoFit/>
+          </a:bodyPr>
+          <a:p>
+            <a:endParaRPr lang="en-US" sz="1800" b="0" u="none" strike="noStrike">
+              <a:solidFill>
+                <a:srgbClr val="000000"/>
+              </a:solidFill>
+              <a:effectLst/>
+              <a:uFillTx/>
+              <a:latin typeface="Arial"/>
+            </a:endParaRPr>
+          </a:p>
+        </p:txBody>
+      </p:sp>
+      <p:sp>
+        <p:nvSpPr>
+          <p:cNvPr id="33" name=""/>
+          <p:cNvSpPr txBox="1"/>
+          <p:nvPr/>
+        </p:nvSpPr>
+        <p:spPr>
+          <a:xfrm>
+            <a:off x="540000" y="2997000"/>
+            <a:ext cx="9000000" cy="493200"/>
+          </a:xfrm>
+          <a:prstGeom prst="rect">
+            <a:avLst/>
+          </a:prstGeom>
+          <a:solidFill>
+            <a:srgbClr val="FFFFFF"/>
+          </a:solidFill>
+          <a:ln w="7200">
+            <a:solidFill>
+              <a:srgbClr val="DFE9E4"/>
+            </a:solidFill>
+            <a:round/>
+          </a:ln>
+        </p:spPr>
+        <p:txBody>
+          <a:bodyPr lIns="198000" tIns="115200" rIns="126000" bIns="115200" anchor="ctr">
+            <a:normAutofit/>
+          </a:bodyPr>
+          <a:p>
+            <a:r>
+              <a:rPr lang="en-US" sz="1550" b="0" u="none" strike="noStrike">
                 <a:solidFill>
                   <a:srgbClr val="1A2E2B"/>
                 </a:solidFill>
@@ -6501,20 +10126,87 @@
                 <a:uFillTx/>
                 <a:latin typeface="Arial"/>
               </a:rPr>
-              <a:t>• Ownership and status always visible — nothing disappears into a queue</a:t>
-            </a:r>
-            <a:endParaRPr lang="en-US" sz="1500" b="0" u="none" strike="noStrike">
-              <a:solidFill>
-                <a:srgbClr val="000000"/>
-              </a:solidFill>
-              <a:effectLst/>
-              <a:uFillTx/>
-              <a:latin typeface="Arial"/>
-            </a:endParaRPr>
-          </a:p>
-          <a:p>
-            <a:r>
-              <a:rPr lang="en-US" sz="1500" b="0" u="none" strike="noStrike">
+              <a:t>Ownership and status always visible — nothing disappears into a queue</a:t>
+            </a:r>
+            <a:endParaRPr lang="en-US" sz="1550" b="0" u="none" strike="noStrike">
+              <a:solidFill>
+                <a:srgbClr val="000000"/>
+              </a:solidFill>
+              <a:effectLst/>
+              <a:uFillTx/>
+              <a:latin typeface="Arial"/>
+            </a:endParaRPr>
+          </a:p>
+        </p:txBody>
+      </p:sp>
+      <p:sp>
+        <p:nvSpPr>
+          <p:cNvPr id="34" name=""/>
+          <p:cNvSpPr txBox="1"/>
+          <p:nvPr/>
+        </p:nvSpPr>
+        <p:spPr>
+          <a:xfrm>
+            <a:off x="540000" y="3641400"/>
+            <a:ext cx="50400" cy="342000"/>
+          </a:xfrm>
+          <a:prstGeom prst="rect">
+            <a:avLst/>
+          </a:prstGeom>
+          <a:solidFill>
+            <a:srgbClr val="E6BF71"/>
+          </a:solidFill>
+          <a:ln w="0">
+            <a:noFill/>
+          </a:ln>
+        </p:spPr>
+        <p:txBody>
+          <a:bodyPr lIns="90000" tIns="45000" rIns="90000" bIns="45000" anchor="t">
+            <a:spAutoFit/>
+          </a:bodyPr>
+          <a:p>
+            <a:endParaRPr lang="en-US" sz="1800" b="0" u="none" strike="noStrike">
+              <a:solidFill>
+                <a:srgbClr val="000000"/>
+              </a:solidFill>
+              <a:effectLst/>
+              <a:uFillTx/>
+              <a:latin typeface="Arial"/>
+            </a:endParaRPr>
+          </a:p>
+        </p:txBody>
+      </p:sp>
+      <p:sp>
+        <p:nvSpPr>
+          <p:cNvPr id="35" name=""/>
+          <p:cNvSpPr txBox="1"/>
+          <p:nvPr/>
+        </p:nvSpPr>
+        <p:spPr>
+          <a:xfrm>
+            <a:off x="540000" y="3587040"/>
+            <a:ext cx="9000000" cy="450360"/>
+          </a:xfrm>
+          <a:prstGeom prst="rect">
+            <a:avLst/>
+          </a:prstGeom>
+          <a:solidFill>
+            <a:srgbClr val="FFFFFF"/>
+          </a:solidFill>
+          <a:ln w="7200">
+            <a:solidFill>
+              <a:srgbClr val="DFE9E4"/>
+            </a:solidFill>
+            <a:round/>
+          </a:ln>
+        </p:spPr>
+        <p:txBody>
+          <a:bodyPr lIns="198000" tIns="115200" rIns="126000" bIns="115200" anchor="ctr">
+            <a:normAutofit/>
+          </a:bodyPr>
+          <a:p>
+            <a:r>
+              <a:rPr lang="en-US" sz="1550" b="0" u="none" strike="noStrike">
                 <a:solidFill>
                   <a:srgbClr val="1A2E2B"/>
                 </a:solidFill>
@@ -6522,9 +10214,9 @@
                 <a:uFillTx/>
                 <a:latin typeface="Arial"/>
               </a:rPr>
-              <a:t>• Bilingual EN/AR, accessible, deployed and live</a:t>
-            </a:r>
-            <a:endParaRPr lang="en-US" sz="1500" b="0" u="none" strike="noStrike">
+              <a:t>Bilingual EN/AR, accessible, deployed and live</a:t>
+            </a:r>
+            <a:endParaRPr lang="en-US" sz="1550" b="0" u="none" strike="noStrike">
               <a:solidFill>
                 <a:srgbClr val="000000"/>
               </a:solidFill>
@@ -6574,7 +10266,7 @@
       </p:grpSpPr>
       <p:sp>
         <p:nvSpPr>
-          <p:cNvPr id="26" name=""/>
+          <p:cNvPr id="36" name=""/>
           <p:cNvSpPr txBox="1"/>
           <p:nvPr/>
         </p:nvSpPr>
@@ -6620,7 +10312,7 @@
       </p:sp>
       <p:sp>
         <p:nvSpPr>
-          <p:cNvPr id="27" name=""/>
+          <p:cNvPr id="37" name=""/>
           <p:cNvSpPr txBox="1"/>
           <p:nvPr/>
         </p:nvSpPr>
@@ -6657,19 +10349,21 @@
       </p:sp>
       <p:sp>
         <p:nvSpPr>
-          <p:cNvPr id="28" name=""/>
-          <p:cNvSpPr txBox="1"/>
-          <p:nvPr/>
-        </p:nvSpPr>
-        <p:spPr>
-          <a:xfrm>
-            <a:off x="540000" y="1152000"/>
-            <a:ext cx="9000000" cy="3960000"/>
-          </a:xfrm>
-          <a:prstGeom prst="rect">
-            <a:avLst/>
-          </a:prstGeom>
-          <a:noFill/>
+          <p:cNvPr id="38" name=""/>
+          <p:cNvSpPr txBox="1"/>
+          <p:nvPr/>
+        </p:nvSpPr>
+        <p:spPr>
+          <a:xfrm>
+            <a:off x="540000" y="2352600"/>
+            <a:ext cx="50400" cy="342000"/>
+          </a:xfrm>
+          <a:prstGeom prst="rect">
+            <a:avLst/>
+          </a:prstGeom>
+          <a:solidFill>
+            <a:srgbClr val="E6BF71"/>
+          </a:solidFill>
           <a:ln w="0">
             <a:noFill/>
           </a:ln>
@@ -6679,8 +10373,48 @@
             <a:spAutoFit/>
           </a:bodyPr>
           <a:p>
-            <a:r>
-              <a:rPr lang="en-US" sz="1500" b="0" u="none" strike="noStrike">
+            <a:endParaRPr lang="en-US" sz="1800" b="0" u="none" strike="noStrike">
+              <a:solidFill>
+                <a:srgbClr val="000000"/>
+              </a:solidFill>
+              <a:effectLst/>
+              <a:uFillTx/>
+              <a:latin typeface="Arial"/>
+            </a:endParaRPr>
+          </a:p>
+        </p:txBody>
+      </p:sp>
+      <p:sp>
+        <p:nvSpPr>
+          <p:cNvPr id="39" name=""/>
+          <p:cNvSpPr txBox="1"/>
+          <p:nvPr/>
+        </p:nvSpPr>
+        <p:spPr>
+          <a:xfrm>
+            <a:off x="540000" y="2298240"/>
+            <a:ext cx="9000000" cy="450360"/>
+          </a:xfrm>
+          <a:prstGeom prst="rect">
+            <a:avLst/>
+          </a:prstGeom>
+          <a:solidFill>
+            <a:srgbClr val="FFFFFF"/>
+          </a:solidFill>
+          <a:ln w="7200">
+            <a:solidFill>
+              <a:srgbClr val="DFE9E4"/>
+            </a:solidFill>
+            <a:round/>
+          </a:ln>
+        </p:spPr>
+        <p:txBody>
+          <a:bodyPr lIns="198000" tIns="115200" rIns="126000" bIns="115200" anchor="ctr">
+            <a:normAutofit/>
+          </a:bodyPr>
+          <a:p>
+            <a:r>
+              <a:rPr lang="en-US" sz="1550" b="0" u="none" strike="noStrike">
                 <a:solidFill>
                   <a:srgbClr val="1A2E2B"/>
                 </a:solidFill>
@@ -6688,20 +10422,87 @@
                 <a:uFillTx/>
                 <a:latin typeface="Arial"/>
               </a:rPr>
-              <a:t>• Employee — own requests, timesheets, balances</a:t>
-            </a:r>
-            <a:endParaRPr lang="en-US" sz="1500" b="0" u="none" strike="noStrike">
-              <a:solidFill>
-                <a:srgbClr val="000000"/>
-              </a:solidFill>
-              <a:effectLst/>
-              <a:uFillTx/>
-              <a:latin typeface="Arial"/>
-            </a:endParaRPr>
-          </a:p>
-          <a:p>
-            <a:r>
-              <a:rPr lang="en-US" sz="1500" b="0" u="none" strike="noStrike">
+              <a:t>Employee — own requests, timesheets, balances</a:t>
+            </a:r>
+            <a:endParaRPr lang="en-US" sz="1550" b="0" u="none" strike="noStrike">
+              <a:solidFill>
+                <a:srgbClr val="000000"/>
+              </a:solidFill>
+              <a:effectLst/>
+              <a:uFillTx/>
+              <a:latin typeface="Arial"/>
+            </a:endParaRPr>
+          </a:p>
+        </p:txBody>
+      </p:sp>
+      <p:sp>
+        <p:nvSpPr>
+          <p:cNvPr id="40" name=""/>
+          <p:cNvSpPr txBox="1"/>
+          <p:nvPr/>
+        </p:nvSpPr>
+        <p:spPr>
+          <a:xfrm>
+            <a:off x="540000" y="2845800"/>
+            <a:ext cx="50400" cy="493200"/>
+          </a:xfrm>
+          <a:prstGeom prst="rect">
+            <a:avLst/>
+          </a:prstGeom>
+          <a:solidFill>
+            <a:srgbClr val="E6BF71"/>
+          </a:solidFill>
+          <a:ln w="0">
+            <a:noFill/>
+          </a:ln>
+        </p:spPr>
+        <p:txBody>
+          <a:bodyPr lIns="90000" tIns="45000" rIns="90000" bIns="45000" anchor="t">
+            <a:spAutoFit/>
+          </a:bodyPr>
+          <a:p>
+            <a:endParaRPr lang="en-US" sz="1800" b="0" u="none" strike="noStrike">
+              <a:solidFill>
+                <a:srgbClr val="000000"/>
+              </a:solidFill>
+              <a:effectLst/>
+              <a:uFillTx/>
+              <a:latin typeface="Arial"/>
+            </a:endParaRPr>
+          </a:p>
+        </p:txBody>
+      </p:sp>
+      <p:sp>
+        <p:nvSpPr>
+          <p:cNvPr id="41" name=""/>
+          <p:cNvSpPr txBox="1"/>
+          <p:nvPr/>
+        </p:nvSpPr>
+        <p:spPr>
+          <a:xfrm>
+            <a:off x="540000" y="2845800"/>
+            <a:ext cx="9000000" cy="493200"/>
+          </a:xfrm>
+          <a:prstGeom prst="rect">
+            <a:avLst/>
+          </a:prstGeom>
+          <a:solidFill>
+            <a:srgbClr val="FFFFFF"/>
+          </a:solidFill>
+          <a:ln w="7200">
+            <a:solidFill>
+              <a:srgbClr val="DFE9E4"/>
+            </a:solidFill>
+            <a:round/>
+          </a:ln>
+        </p:spPr>
+        <p:txBody>
+          <a:bodyPr lIns="198000" tIns="115200" rIns="126000" bIns="115200" anchor="ctr">
+            <a:normAutofit/>
+          </a:bodyPr>
+          <a:p>
+            <a:r>
+              <a:rPr lang="en-US" sz="1550" b="0" u="none" strike="noStrike">
                 <a:solidFill>
                   <a:srgbClr val="1A2E2B"/>
                 </a:solidFill>
@@ -6709,20 +10510,87 @@
                 <a:uFillTx/>
                 <a:latin typeface="Arial"/>
               </a:rPr>
-              <a:t>• Manager — direct team's non-draft work + own employee view</a:t>
-            </a:r>
-            <a:endParaRPr lang="en-US" sz="1500" b="0" u="none" strike="noStrike">
-              <a:solidFill>
-                <a:srgbClr val="000000"/>
-              </a:solidFill>
-              <a:effectLst/>
-              <a:uFillTx/>
-              <a:latin typeface="Arial"/>
-            </a:endParaRPr>
-          </a:p>
-          <a:p>
-            <a:r>
-              <a:rPr lang="en-US" sz="1500" b="0" u="none" strike="noStrike">
+              <a:t>Manager — direct team's non-draft work + own employee view</a:t>
+            </a:r>
+            <a:endParaRPr lang="en-US" sz="1550" b="0" u="none" strike="noStrike">
+              <a:solidFill>
+                <a:srgbClr val="000000"/>
+              </a:solidFill>
+              <a:effectLst/>
+              <a:uFillTx/>
+              <a:latin typeface="Arial"/>
+            </a:endParaRPr>
+          </a:p>
+        </p:txBody>
+      </p:sp>
+      <p:sp>
+        <p:nvSpPr>
+          <p:cNvPr id="42" name=""/>
+          <p:cNvSpPr txBox="1"/>
+          <p:nvPr/>
+        </p:nvSpPr>
+        <p:spPr>
+          <a:xfrm>
+            <a:off x="540000" y="3490200"/>
+            <a:ext cx="50400" cy="493200"/>
+          </a:xfrm>
+          <a:prstGeom prst="rect">
+            <a:avLst/>
+          </a:prstGeom>
+          <a:solidFill>
+            <a:srgbClr val="E6BF71"/>
+          </a:solidFill>
+          <a:ln w="0">
+            <a:noFill/>
+          </a:ln>
+        </p:spPr>
+        <p:txBody>
+          <a:bodyPr lIns="90000" tIns="45000" rIns="90000" bIns="45000" anchor="t">
+            <a:spAutoFit/>
+          </a:bodyPr>
+          <a:p>
+            <a:endParaRPr lang="en-US" sz="1800" b="0" u="none" strike="noStrike">
+              <a:solidFill>
+                <a:srgbClr val="000000"/>
+              </a:solidFill>
+              <a:effectLst/>
+              <a:uFillTx/>
+              <a:latin typeface="Arial"/>
+            </a:endParaRPr>
+          </a:p>
+        </p:txBody>
+      </p:sp>
+      <p:sp>
+        <p:nvSpPr>
+          <p:cNvPr id="43" name=""/>
+          <p:cNvSpPr txBox="1"/>
+          <p:nvPr/>
+        </p:nvSpPr>
+        <p:spPr>
+          <a:xfrm>
+            <a:off x="540000" y="3490200"/>
+            <a:ext cx="9000000" cy="493200"/>
+          </a:xfrm>
+          <a:prstGeom prst="rect">
+            <a:avLst/>
+          </a:prstGeom>
+          <a:solidFill>
+            <a:srgbClr val="FFFFFF"/>
+          </a:solidFill>
+          <a:ln w="7200">
+            <a:solidFill>
+              <a:srgbClr val="DFE9E4"/>
+            </a:solidFill>
+            <a:round/>
+          </a:ln>
+        </p:spPr>
+        <p:txBody>
+          <a:bodyPr lIns="198000" tIns="115200" rIns="126000" bIns="115200" anchor="ctr">
+            <a:normAutofit/>
+          </a:bodyPr>
+          <a:p>
+            <a:r>
+              <a:rPr lang="en-US" sz="1550" b="0" u="none" strike="noStrike">
                 <a:solidFill>
                   <a:srgbClr val="1A2E2B"/>
                 </a:solidFill>
@@ -6730,9 +10598,9 @@
                 <a:uFillTx/>
                 <a:latin typeface="Arial"/>
               </a:rPr>
-              <a:t>• HR — organization-wide work, admin, request types, allocations</a:t>
-            </a:r>
-            <a:endParaRPr lang="en-US" sz="1500" b="0" u="none" strike="noStrike">
+              <a:t>HR — organization-wide work, admin, request types, allocations</a:t>
+            </a:r>
+            <a:endParaRPr lang="en-US" sz="1550" b="0" u="none" strike="noStrike">
               <a:solidFill>
                 <a:srgbClr val="000000"/>
               </a:solidFill>
@@ -6782,7 +10650,7 @@
       </p:grpSpPr>
       <p:sp>
         <p:nvSpPr>
-          <p:cNvPr id="29" name=""/>
+          <p:cNvPr id="44" name=""/>
           <p:cNvSpPr txBox="1"/>
           <p:nvPr/>
         </p:nvSpPr>
@@ -6828,7 +10696,7 @@
       </p:sp>
       <p:sp>
         <p:nvSpPr>
-          <p:cNvPr id="30" name=""/>
+          <p:cNvPr id="45" name=""/>
           <p:cNvSpPr txBox="1"/>
           <p:nvPr/>
         </p:nvSpPr>
@@ -6865,19 +10733,21 @@
       </p:sp>
       <p:sp>
         <p:nvSpPr>
-          <p:cNvPr id="31" name=""/>
-          <p:cNvSpPr txBox="1"/>
-          <p:nvPr/>
-        </p:nvSpPr>
-        <p:spPr>
-          <a:xfrm>
-            <a:off x="540000" y="1152000"/>
-            <a:ext cx="4140000" cy="3960000"/>
-          </a:xfrm>
-          <a:prstGeom prst="rect">
-            <a:avLst/>
-          </a:prstGeom>
-          <a:noFill/>
+          <p:cNvPr id="46" name=""/>
+          <p:cNvSpPr txBox="1"/>
+          <p:nvPr/>
+        </p:nvSpPr>
+        <p:spPr>
+          <a:xfrm>
+            <a:off x="540000" y="2257200"/>
+            <a:ext cx="50400" cy="342000"/>
+          </a:xfrm>
+          <a:prstGeom prst="rect">
+            <a:avLst/>
+          </a:prstGeom>
+          <a:solidFill>
+            <a:srgbClr val="E6BF71"/>
+          </a:solidFill>
           <a:ln w="0">
             <a:noFill/>
           </a:ln>
@@ -6887,8 +10757,48 @@
             <a:spAutoFit/>
           </a:bodyPr>
           <a:p>
-            <a:r>
-              <a:rPr lang="en-US" sz="1500" b="0" u="none" strike="noStrike">
+            <a:endParaRPr lang="en-US" sz="1800" b="0" u="none" strike="noStrike">
+              <a:solidFill>
+                <a:srgbClr val="000000"/>
+              </a:solidFill>
+              <a:effectLst/>
+              <a:uFillTx/>
+              <a:latin typeface="Arial"/>
+            </a:endParaRPr>
+          </a:p>
+        </p:txBody>
+      </p:sp>
+      <p:sp>
+        <p:nvSpPr>
+          <p:cNvPr id="47" name=""/>
+          <p:cNvSpPr txBox="1"/>
+          <p:nvPr/>
+        </p:nvSpPr>
+        <p:spPr>
+          <a:xfrm>
+            <a:off x="540000" y="2163960"/>
+            <a:ext cx="4140000" cy="528120"/>
+          </a:xfrm>
+          <a:prstGeom prst="rect">
+            <a:avLst/>
+          </a:prstGeom>
+          <a:solidFill>
+            <a:srgbClr val="FFFFFF"/>
+          </a:solidFill>
+          <a:ln w="7200">
+            <a:solidFill>
+              <a:srgbClr val="DFE9E4"/>
+            </a:solidFill>
+            <a:round/>
+          </a:ln>
+        </p:spPr>
+        <p:txBody>
+          <a:bodyPr lIns="198000" tIns="115200" rIns="126000" bIns="115200" anchor="ctr">
+            <a:normAutofit/>
+          </a:bodyPr>
+          <a:p>
+            <a:r>
+              <a:rPr lang="en-US" sz="1550" b="0" u="none" strike="noStrike">
                 <a:solidFill>
                   <a:srgbClr val="1A2E2B"/>
                 </a:solidFill>
@@ -6896,10 +10806,10 @@
                 <a:uFillTx/>
                 <a:latin typeface="Arial"/>
               </a:rPr>
-              <a:t>• Name: Daimoma — </a:t>
-            </a:r>
-            <a:r>
-              <a:rPr lang="hi-IN" sz="1500" b="0" u="none" strike="noStrike">
+              <a:t>Name: Daimoma — </a:t>
+            </a:r>
+            <a:r>
+              <a:rPr lang="hi-IN" sz="1550" b="0" u="none" strike="noStrike">
                 <a:solidFill>
                   <a:srgbClr val="1A2E2B"/>
                 </a:solidFill>
@@ -6910,7 +10820,7 @@
               <a:t>ديمومة</a:t>
             </a:r>
             <a:r>
-              <a:rPr lang="en-US" sz="1500" b="0" u="none" strike="noStrike">
+              <a:rPr lang="en-US" sz="1550" b="0" u="none" strike="noStrike">
                 <a:solidFill>
                   <a:srgbClr val="1A2E2B"/>
                 </a:solidFill>
@@ -6921,7 +10831,7 @@
               <a:t> </a:t>
             </a:r>
             <a:r>
-              <a:rPr lang="en-US" sz="1500" b="0" u="none" strike="noStrike">
+              <a:rPr lang="en-US" sz="1550" b="0" u="none" strike="noStrike">
                 <a:solidFill>
                   <a:srgbClr val="1A2E2B"/>
                 </a:solidFill>
@@ -6931,18 +10841,85 @@
               </a:rPr>
               <a:t>(continuity)</a:t>
             </a:r>
-            <a:endParaRPr lang="en-US" sz="1500" b="0" u="none" strike="noStrike">
-              <a:solidFill>
-                <a:srgbClr val="000000"/>
-              </a:solidFill>
-              <a:effectLst/>
-              <a:uFillTx/>
-              <a:latin typeface="Arial"/>
-            </a:endParaRPr>
-          </a:p>
-          <a:p>
-            <a:r>
-              <a:rPr lang="en-US" sz="1500" b="0" u="none" strike="noStrike">
+            <a:endParaRPr lang="en-US" sz="1550" b="0" u="none" strike="noStrike">
+              <a:solidFill>
+                <a:srgbClr val="000000"/>
+              </a:solidFill>
+              <a:effectLst/>
+              <a:uFillTx/>
+              <a:latin typeface="Arial"/>
+            </a:endParaRPr>
+          </a:p>
+        </p:txBody>
+      </p:sp>
+      <p:sp>
+        <p:nvSpPr>
+          <p:cNvPr id="48" name=""/>
+          <p:cNvSpPr txBox="1"/>
+          <p:nvPr/>
+        </p:nvSpPr>
+        <p:spPr>
+          <a:xfrm>
+            <a:off x="540000" y="2750400"/>
+            <a:ext cx="50400" cy="342000"/>
+          </a:xfrm>
+          <a:prstGeom prst="rect">
+            <a:avLst/>
+          </a:prstGeom>
+          <a:solidFill>
+            <a:srgbClr val="E6BF71"/>
+          </a:solidFill>
+          <a:ln w="0">
+            <a:noFill/>
+          </a:ln>
+        </p:spPr>
+        <p:txBody>
+          <a:bodyPr lIns="90000" tIns="45000" rIns="90000" bIns="45000" anchor="t">
+            <a:spAutoFit/>
+          </a:bodyPr>
+          <a:p>
+            <a:endParaRPr lang="en-US" sz="1800" b="0" u="none" strike="noStrike">
+              <a:solidFill>
+                <a:srgbClr val="000000"/>
+              </a:solidFill>
+              <a:effectLst/>
+              <a:uFillTx/>
+              <a:latin typeface="Arial"/>
+            </a:endParaRPr>
+          </a:p>
+        </p:txBody>
+      </p:sp>
+      <p:sp>
+        <p:nvSpPr>
+          <p:cNvPr id="49" name=""/>
+          <p:cNvSpPr txBox="1"/>
+          <p:nvPr/>
+        </p:nvSpPr>
+        <p:spPr>
+          <a:xfrm>
+            <a:off x="540000" y="2657160"/>
+            <a:ext cx="4140000" cy="528120"/>
+          </a:xfrm>
+          <a:prstGeom prst="rect">
+            <a:avLst/>
+          </a:prstGeom>
+          <a:solidFill>
+            <a:srgbClr val="FFFFFF"/>
+          </a:solidFill>
+          <a:ln w="7200">
+            <a:solidFill>
+              <a:srgbClr val="DFE9E4"/>
+            </a:solidFill>
+            <a:round/>
+          </a:ln>
+        </p:spPr>
+        <p:txBody>
+          <a:bodyPr lIns="198000" tIns="115200" rIns="126000" bIns="115200" anchor="ctr">
+            <a:normAutofit/>
+          </a:bodyPr>
+          <a:p>
+            <a:r>
+              <a:rPr lang="en-US" sz="1550" b="0" u="none" strike="noStrike">
                 <a:solidFill>
                   <a:srgbClr val="1A2E2B"/>
                 </a:solidFill>
@@ -6950,10 +10927,10 @@
                 <a:uFillTx/>
                 <a:latin typeface="Arial"/>
               </a:rPr>
-              <a:t>• Tagline: «</a:t>
-            </a:r>
-            <a:r>
-              <a:rPr lang="hi-IN" sz="1500" b="0" u="none" strike="noStrike">
+              <a:t>Tagline: «</a:t>
+            </a:r>
+            <a:r>
+              <a:rPr lang="hi-IN" sz="1550" b="0" u="none" strike="noStrike">
                 <a:solidFill>
                   <a:srgbClr val="1A2E2B"/>
                 </a:solidFill>
@@ -6964,7 +10941,7 @@
               <a:t>سجّل وانسَ — ديمومة مستمرة</a:t>
             </a:r>
             <a:r>
-              <a:rPr lang="en-US" sz="1500" b="0" u="none" strike="noStrike">
+              <a:rPr lang="en-US" sz="1550" b="0" u="none" strike="noStrike">
                 <a:solidFill>
                   <a:srgbClr val="1A2E2B"/>
                 </a:solidFill>
@@ -6974,18 +10951,85 @@
               </a:rPr>
               <a:t>»</a:t>
             </a:r>
-            <a:endParaRPr lang="en-US" sz="1500" b="0" u="none" strike="noStrike">
-              <a:solidFill>
-                <a:srgbClr val="000000"/>
-              </a:solidFill>
-              <a:effectLst/>
-              <a:uFillTx/>
-              <a:latin typeface="Arial"/>
-            </a:endParaRPr>
-          </a:p>
-          <a:p>
-            <a:r>
-              <a:rPr lang="en-US" sz="1500" b="0" u="none" strike="noStrike">
+            <a:endParaRPr lang="en-US" sz="1550" b="0" u="none" strike="noStrike">
+              <a:solidFill>
+                <a:srgbClr val="000000"/>
+              </a:solidFill>
+              <a:effectLst/>
+              <a:uFillTx/>
+              <a:latin typeface="Arial"/>
+            </a:endParaRPr>
+          </a:p>
+        </p:txBody>
+      </p:sp>
+      <p:sp>
+        <p:nvSpPr>
+          <p:cNvPr id="50" name=""/>
+          <p:cNvSpPr txBox="1"/>
+          <p:nvPr/>
+        </p:nvSpPr>
+        <p:spPr>
+          <a:xfrm>
+            <a:off x="540000" y="3243600"/>
+            <a:ext cx="50400" cy="342000"/>
+          </a:xfrm>
+          <a:prstGeom prst="rect">
+            <a:avLst/>
+          </a:prstGeom>
+          <a:solidFill>
+            <a:srgbClr val="E6BF71"/>
+          </a:solidFill>
+          <a:ln w="0">
+            <a:noFill/>
+          </a:ln>
+        </p:spPr>
+        <p:txBody>
+          <a:bodyPr lIns="90000" tIns="45000" rIns="90000" bIns="45000" anchor="t">
+            <a:spAutoFit/>
+          </a:bodyPr>
+          <a:p>
+            <a:endParaRPr lang="en-US" sz="1800" b="0" u="none" strike="noStrike">
+              <a:solidFill>
+                <a:srgbClr val="000000"/>
+              </a:solidFill>
+              <a:effectLst/>
+              <a:uFillTx/>
+              <a:latin typeface="Arial"/>
+            </a:endParaRPr>
+          </a:p>
+        </p:txBody>
+      </p:sp>
+      <p:sp>
+        <p:nvSpPr>
+          <p:cNvPr id="51" name=""/>
+          <p:cNvSpPr txBox="1"/>
+          <p:nvPr/>
+        </p:nvSpPr>
+        <p:spPr>
+          <a:xfrm>
+            <a:off x="540000" y="3079440"/>
+            <a:ext cx="4140000" cy="669960"/>
+          </a:xfrm>
+          <a:prstGeom prst="rect">
+            <a:avLst/>
+          </a:prstGeom>
+          <a:solidFill>
+            <a:srgbClr val="FFFFFF"/>
+          </a:solidFill>
+          <a:ln w="7200">
+            <a:solidFill>
+              <a:srgbClr val="DFE9E4"/>
+            </a:solidFill>
+            <a:round/>
+          </a:ln>
+        </p:spPr>
+        <p:txBody>
+          <a:bodyPr lIns="198000" tIns="115200" rIns="126000" bIns="115200" anchor="ctr">
+            <a:normAutofit/>
+          </a:bodyPr>
+          <a:p>
+            <a:r>
+              <a:rPr lang="en-US" sz="1550" b="0" u="none" strike="noStrike">
                 <a:solidFill>
                   <a:srgbClr val="1A2E2B"/>
                 </a:solidFill>
@@ -6993,20 +11037,87 @@
                 <a:uFillTx/>
                 <a:latin typeface="Arial"/>
               </a:rPr>
-              <a:t>• Teal/gold palette, light + dark themes, approved logos</a:t>
-            </a:r>
-            <a:endParaRPr lang="en-US" sz="1500" b="0" u="none" strike="noStrike">
-              <a:solidFill>
-                <a:srgbClr val="000000"/>
-              </a:solidFill>
-              <a:effectLst/>
-              <a:uFillTx/>
-              <a:latin typeface="Arial"/>
-            </a:endParaRPr>
-          </a:p>
-          <a:p>
-            <a:r>
-              <a:rPr lang="en-US" sz="1500" b="0" u="none" strike="noStrike">
+              <a:t>Teal/gold palette, light + dark themes, approved logos</a:t>
+            </a:r>
+            <a:endParaRPr lang="en-US" sz="1550" b="0" u="none" strike="noStrike">
+              <a:solidFill>
+                <a:srgbClr val="000000"/>
+              </a:solidFill>
+              <a:effectLst/>
+              <a:uFillTx/>
+              <a:latin typeface="Arial"/>
+            </a:endParaRPr>
+          </a:p>
+        </p:txBody>
+      </p:sp>
+      <p:sp>
+        <p:nvSpPr>
+          <p:cNvPr id="52" name=""/>
+          <p:cNvSpPr txBox="1"/>
+          <p:nvPr/>
+        </p:nvSpPr>
+        <p:spPr>
+          <a:xfrm>
+            <a:off x="540000" y="3736800"/>
+            <a:ext cx="50400" cy="342000"/>
+          </a:xfrm>
+          <a:prstGeom prst="rect">
+            <a:avLst/>
+          </a:prstGeom>
+          <a:solidFill>
+            <a:srgbClr val="E6BF71"/>
+          </a:solidFill>
+          <a:ln w="0">
+            <a:noFill/>
+          </a:ln>
+        </p:spPr>
+        <p:txBody>
+          <a:bodyPr lIns="90000" tIns="45000" rIns="90000" bIns="45000" anchor="t">
+            <a:spAutoFit/>
+          </a:bodyPr>
+          <a:p>
+            <a:endParaRPr lang="en-US" sz="1800" b="0" u="none" strike="noStrike">
+              <a:solidFill>
+                <a:srgbClr val="000000"/>
+              </a:solidFill>
+              <a:effectLst/>
+              <a:uFillTx/>
+              <a:latin typeface="Arial"/>
+            </a:endParaRPr>
+          </a:p>
+        </p:txBody>
+      </p:sp>
+      <p:sp>
+        <p:nvSpPr>
+          <p:cNvPr id="53" name=""/>
+          <p:cNvSpPr txBox="1"/>
+          <p:nvPr/>
+        </p:nvSpPr>
+        <p:spPr>
+          <a:xfrm>
+            <a:off x="540000" y="3682440"/>
+            <a:ext cx="4140000" cy="450360"/>
+          </a:xfrm>
+          <a:prstGeom prst="rect">
+            <a:avLst/>
+          </a:prstGeom>
+          <a:solidFill>
+            <a:srgbClr val="FFFFFF"/>
+          </a:solidFill>
+          <a:ln w="7200">
+            <a:solidFill>
+              <a:srgbClr val="DFE9E4"/>
+            </a:solidFill>
+            <a:round/>
+          </a:ln>
+        </p:spPr>
+        <p:txBody>
+          <a:bodyPr lIns="198000" tIns="115200" rIns="126000" bIns="115200" anchor="ctr">
+            <a:normAutofit/>
+          </a:bodyPr>
+          <a:p>
+            <a:r>
+              <a:rPr lang="en-US" sz="1550" b="0" u="none" strike="noStrike">
                 <a:solidFill>
                   <a:srgbClr val="1A2E2B"/>
                 </a:solidFill>
@@ -7014,9 +11125,9 @@
                 <a:uFillTx/>
                 <a:latin typeface="Arial"/>
               </a:rPr>
-              <a:t>• Full RTL Arabic — not a translation bolt-on</a:t>
-            </a:r>
-            <a:endParaRPr lang="en-US" sz="1500" b="0" u="none" strike="noStrike">
+              <a:t>Full RTL Arabic — not a translation bolt-on</a:t>
+            </a:r>
+            <a:endParaRPr lang="en-US" sz="1550" b="0" u="none" strike="noStrike">
               <a:solidFill>
                 <a:srgbClr val="000000"/>
               </a:solidFill>
@@ -7029,7 +11140,7 @@
       </p:sp>
       <p:pic>
         <p:nvPicPr>
-          <p:cNvPr id="32" name=""/>
+          <p:cNvPr id="54" name=""/>
           <p:cNvPicPr/>
           <p:nvPr/>
         </p:nvPicPr>
@@ -7090,7 +11201,7 @@
       </p:grpSpPr>
       <p:sp>
         <p:nvSpPr>
-          <p:cNvPr id="33" name=""/>
+          <p:cNvPr id="55" name=""/>
           <p:cNvSpPr txBox="1"/>
           <p:nvPr/>
         </p:nvSpPr>
@@ -7136,7 +11247,7 @@
       </p:sp>
       <p:sp>
         <p:nvSpPr>
-          <p:cNvPr id="34" name=""/>
+          <p:cNvPr id="56" name=""/>
           <p:cNvSpPr txBox="1"/>
           <p:nvPr/>
         </p:nvSpPr>
@@ -7173,7 +11284,7 @@
       </p:sp>
       <p:pic>
         <p:nvPicPr>
-          <p:cNvPr id="35" name=""/>
+          <p:cNvPr id="57" name=""/>
           <p:cNvPicPr/>
           <p:nvPr/>
         </p:nvPicPr>
@@ -7197,7 +11308,7 @@
       </p:pic>
       <p:sp>
         <p:nvSpPr>
-          <p:cNvPr id="36" name=""/>
+          <p:cNvPr id="58" name=""/>
           <p:cNvSpPr txBox="1"/>
           <p:nvPr/>
         </p:nvSpPr>
@@ -7280,7 +11391,7 @@
       </p:grpSpPr>
       <p:sp>
         <p:nvSpPr>
-          <p:cNvPr id="37" name=""/>
+          <p:cNvPr id="59" name=""/>
           <p:cNvSpPr txBox="1"/>
           <p:nvPr/>
         </p:nvSpPr>
@@ -7326,7 +11437,7 @@
       </p:sp>
       <p:sp>
         <p:nvSpPr>
-          <p:cNvPr id="38" name=""/>
+          <p:cNvPr id="60" name=""/>
           <p:cNvSpPr txBox="1"/>
           <p:nvPr/>
         </p:nvSpPr>
@@ -7363,7 +11474,7 @@
       </p:sp>
       <p:pic>
         <p:nvPicPr>
-          <p:cNvPr id="39" name=""/>
+          <p:cNvPr id="61" name=""/>
           <p:cNvPicPr/>
           <p:nvPr/>
         </p:nvPicPr>
@@ -7387,7 +11498,7 @@
       </p:pic>
       <p:sp>
         <p:nvSpPr>
-          <p:cNvPr id="40" name=""/>
+          <p:cNvPr id="62" name=""/>
           <p:cNvSpPr txBox="1"/>
           <p:nvPr/>
         </p:nvSpPr>
@@ -7470,7 +11581,7 @@
       </p:grpSpPr>
       <p:sp>
         <p:nvSpPr>
-          <p:cNvPr id="41" name=""/>
+          <p:cNvPr id="63" name=""/>
           <p:cNvSpPr txBox="1"/>
           <p:nvPr/>
         </p:nvSpPr>
@@ -7516,7 +11627,7 @@
       </p:sp>
       <p:sp>
         <p:nvSpPr>
-          <p:cNvPr id="42" name=""/>
+          <p:cNvPr id="64" name=""/>
           <p:cNvSpPr txBox="1"/>
           <p:nvPr/>
         </p:nvSpPr>
@@ -7553,7 +11664,7 @@
       </p:sp>
       <p:pic>
         <p:nvPicPr>
-          <p:cNvPr id="43" name=""/>
+          <p:cNvPr id="65" name=""/>
           <p:cNvPicPr/>
           <p:nvPr/>
         </p:nvPicPr>
@@ -7577,7 +11688,7 @@
       </p:pic>
       <p:sp>
         <p:nvSpPr>
-          <p:cNvPr id="44" name=""/>
+          <p:cNvPr id="66" name=""/>
           <p:cNvSpPr txBox="1"/>
           <p:nvPr/>
         </p:nvSpPr>
@@ -7660,14 +11771,14 @@
       </p:grpSpPr>
       <p:sp>
         <p:nvSpPr>
-          <p:cNvPr id="45" name=""/>
-          <p:cNvSpPr txBox="1"/>
-          <p:nvPr/>
-        </p:nvSpPr>
-        <p:spPr>
-          <a:xfrm>
-            <a:off x="540000" y="324000"/>
-            <a:ext cx="9000000" cy="576000"/>
+          <p:cNvPr id="67" name=""/>
+          <p:cNvSpPr txBox="1"/>
+          <p:nvPr/>
+        </p:nvSpPr>
+        <p:spPr>
+          <a:xfrm>
+            <a:off x="540000" y="252000"/>
+            <a:ext cx="9000000" cy="504000"/>
           </a:xfrm>
           <a:prstGeom prst="rect">
             <a:avLst/>
@@ -7691,7 +11802,7 @@
                 <a:uFillTx/>
                 <a:latin typeface="Arial"/>
               </a:rPr>
-              <a:t>Allocations — Controlled Allowances</a:t>
+              <a:t>Request Detail</a:t>
             </a:r>
             <a:endParaRPr lang="en-US" sz="2600" b="0" u="none" strike="noStrike">
               <a:solidFill>
@@ -7706,13 +11817,13 @@
       </p:sp>
       <p:sp>
         <p:nvSpPr>
-          <p:cNvPr id="46" name=""/>
-          <p:cNvSpPr txBox="1"/>
-          <p:nvPr/>
-        </p:nvSpPr>
-        <p:spPr>
-          <a:xfrm>
-            <a:off x="540000" y="900000"/>
+          <p:cNvPr id="68" name=""/>
+          <p:cNvSpPr txBox="1"/>
+          <p:nvPr/>
+        </p:nvSpPr>
+        <p:spPr>
+          <a:xfrm>
+            <a:off x="540000" y="774000"/>
             <a:ext cx="1440000" cy="43200"/>
           </a:xfrm>
           <a:prstGeom prst="rect">
@@ -7741,16 +11852,20 @@
           </a:p>
         </p:txBody>
       </p:sp>
-      <p:sp>
-        <p:nvSpPr>
-          <p:cNvPr id="47" name=""/>
-          <p:cNvSpPr txBox="1"/>
-          <p:nvPr/>
-        </p:nvSpPr>
-        <p:spPr>
-          <a:xfrm>
-            <a:off x="540000" y="1152000"/>
-            <a:ext cx="9000000" cy="3960000"/>
+      <p:pic>
+        <p:nvPicPr>
+          <p:cNvPr id="69" name=""/>
+          <p:cNvPicPr/>
+          <p:nvPr/>
+        </p:nvPicPr>
+        <p:blipFill>
+          <a:blip r:embed="rId1"/>
+          <a:stretch/>
+        </p:blipFill>
+        <p:spPr>
+          <a:xfrm>
+            <a:off x="1814400" y="1008000"/>
+            <a:ext cx="6451200" cy="4032000"/>
           </a:xfrm>
           <a:prstGeom prst="rect">
             <a:avLst/>
@@ -7760,86 +11875,43 @@
             <a:noFill/>
           </a:ln>
         </p:spPr>
+      </p:pic>
+      <p:sp>
+        <p:nvSpPr>
+          <p:cNvPr id="70" name=""/>
+          <p:cNvSpPr txBox="1"/>
+          <p:nvPr/>
+        </p:nvSpPr>
+        <p:spPr>
+          <a:xfrm>
+            <a:off x="540000" y="5148000"/>
+            <a:ext cx="9000000" cy="360000"/>
+          </a:xfrm>
+          <a:prstGeom prst="rect">
+            <a:avLst/>
+          </a:prstGeom>
+          <a:noFill/>
+          <a:ln w="0">
+            <a:noFill/>
+          </a:ln>
+        </p:spPr>
         <p:txBody>
           <a:bodyPr lIns="90000" tIns="45000" rIns="90000" bIns="45000" anchor="t">
             <a:spAutoFit/>
           </a:bodyPr>
           <a:p>
             <a:r>
-              <a:rPr lang="en-US" sz="1500" b="0" u="none" strike="noStrike">
-                <a:solidFill>
-                  <a:srgbClr val="1A2E2B"/>
-                </a:solidFill>
-                <a:effectLst/>
-                <a:uFillTx/>
-                <a:latin typeface="Arial"/>
-              </a:rPr>
-              <a:t>• HR grants dated allowances per employee per request type</a:t>
-            </a:r>
-            <a:endParaRPr lang="en-US" sz="1500" b="0" u="none" strike="noStrike">
-              <a:solidFill>
-                <a:srgbClr val="000000"/>
-              </a:solidFill>
-              <a:effectLst/>
-              <a:uFillTx/>
-              <a:latin typeface="Arial"/>
-            </a:endParaRPr>
-          </a:p>
-          <a:p>
-            <a:r>
-              <a:rPr lang="en-US" sz="1500" b="0" u="none" strike="noStrike">
-                <a:solidFill>
-                  <a:srgbClr val="1A2E2B"/>
-                </a:solidFill>
-                <a:effectLst/>
-                <a:uFillTx/>
-                <a:latin typeface="Arial"/>
-              </a:rPr>
-              <a:t>• Reserve on submit → release on return/reject → settle on approve</a:t>
-            </a:r>
-            <a:endParaRPr lang="en-US" sz="1500" b="0" u="none" strike="noStrike">
-              <a:solidFill>
-                <a:srgbClr val="000000"/>
-              </a:solidFill>
-              <a:effectLst/>
-              <a:uFillTx/>
-              <a:latin typeface="Arial"/>
-            </a:endParaRPr>
-          </a:p>
-          <a:p>
-            <a:r>
-              <a:rPr lang="en-US" sz="1500" b="0" u="none" strike="noStrike">
-                <a:solidFill>
-                  <a:srgbClr val="1A2E2B"/>
-                </a:solidFill>
-                <a:effectLst/>
-                <a:uFillTx/>
-                <a:latin typeface="Arial"/>
-              </a:rPr>
-              <a:t>• Balances always reconcile; no overlapping grants</a:t>
-            </a:r>
-            <a:endParaRPr lang="en-US" sz="1500" b="0" u="none" strike="noStrike">
-              <a:solidFill>
-                <a:srgbClr val="000000"/>
-              </a:solidFill>
-              <a:effectLst/>
-              <a:uFillTx/>
-              <a:latin typeface="Arial"/>
-            </a:endParaRPr>
-          </a:p>
-          <a:p>
-            <a:r>
-              <a:rPr lang="en-US" sz="1500" b="0" u="none" strike="noStrike">
-                <a:solidFill>
-                  <a:srgbClr val="1A2E2B"/>
-                </a:solidFill>
-                <a:effectLst/>
-                <a:uFillTx/>
-                <a:latin typeface="Arial"/>
-              </a:rPr>
-              <a:t>• Early-leave billing: 15-minute blocks, 30-minute minimum</a:t>
-            </a:r>
-            <a:endParaRPr lang="en-US" sz="1500" b="0" u="none" strike="noStrike">
+              <a:rPr lang="en-US" sz="1100" b="0" i="1" u="none" strike="noStrike">
+                <a:solidFill>
+                  <a:srgbClr val="4A7A6F"/>
+                </a:solidFill>
+                <a:effectLst/>
+                <a:uFillTx/>
+                <a:latin typeface="Arial"/>
+              </a:rPr>
+              <a:t>Full lifecycle view — state, history, and the decision actions.</a:t>
+            </a:r>
+            <a:endParaRPr lang="en-US" sz="1100" b="0" u="none" strike="noStrike">
               <a:solidFill>
                 <a:srgbClr val="000000"/>
               </a:solidFill>

--- a/docs/presentation/Daimoma-presentation.pptx
+++ b/docs/presentation/Daimoma-presentation.pptx
@@ -36,6 +36,8 @@
     <p:sldId id="281" r:id="rId29"/>
     <p:sldId id="282" r:id="rId30"/>
     <p:sldId id="283" r:id="rId31"/>
+    <p:sldId id="284" r:id="rId32"/>
+    <p:sldId id="285" r:id="rId33"/>
   </p:sldIdLst>
   <p:sldSz cx="10080625" cy="5670550"/>
   <p:notesSz cx="7559675" cy="10691813"/>
@@ -392,7 +394,7 @@
             <a:pPr indent="0" algn="r">
               <a:buNone/>
             </a:pPr>
-            <a:fld id="{B92E7D73-8602-478B-9388-E2FEB5F032AA}" type="slidenum">
+            <a:fld id="{C6A289D4-36F6-4EB2-9F70-3CE7FCE14FF0}" type="slidenum">
               <a:rPr lang="en-US" sz="1400" b="0" u="none" strike="noStrike">
                 <a:solidFill>
                   <a:srgbClr val="000000"/>
@@ -439,7 +441,7 @@
       </p:grpSpPr>
       <p:sp>
         <p:nvSpPr>
-          <p:cNvPr id="194" name=""/>
+          <p:cNvPr id="226" name=""/>
           <p:cNvSpPr txBox="1"/>
           <p:nvPr/>
         </p:nvSpPr>
@@ -566,7 +568,7 @@
       </p:grpSpPr>
       <p:sp>
         <p:nvSpPr>
-          <p:cNvPr id="203" name=""/>
+          <p:cNvPr id="235" name=""/>
           <p:cNvSpPr txBox="1"/>
           <p:nvPr/>
         </p:nvSpPr>
@@ -601,7 +603,7 @@
                 <a:uFillTx/>
                 <a:latin typeface="Arial"/>
               </a:rPr>
-              <a:t>Feature 008 — a full spec on its own.</a:t>
+              <a:t>Return/reject require a reason; decisions are audited.</a:t>
             </a:r>
             <a:endParaRPr lang="en-US" sz="1200" b="0" u="none" strike="noStrike">
               <a:solidFill>
@@ -638,7 +640,7 @@
       </p:grpSpPr>
       <p:sp>
         <p:nvSpPr>
-          <p:cNvPr id="204" name=""/>
+          <p:cNvPr id="236" name=""/>
           <p:cNvSpPr txBox="1"/>
           <p:nvPr/>
         </p:nvSpPr>
@@ -673,7 +675,7 @@
                 <a:uFillTx/>
                 <a:latin typeface="Arial"/>
               </a:rPr>
-              <a:t>Expired grants keep history while pending reservations stay reserved.</a:t>
+              <a:t>Feature 008 — a full spec on its own.</a:t>
             </a:r>
             <a:endParaRPr lang="en-US" sz="1200" b="0" u="none" strike="noStrike">
               <a:solidFill>
@@ -710,7 +712,7 @@
       </p:grpSpPr>
       <p:sp>
         <p:nvSpPr>
-          <p:cNvPr id="205" name=""/>
+          <p:cNvPr id="237" name=""/>
           <p:cNvSpPr txBox="1"/>
           <p:nvPr/>
         </p:nvSpPr>
@@ -745,7 +747,7 @@
                 <a:uFillTx/>
                 <a:latin typeface="Arial"/>
               </a:rPr>
-              <a:t>D-005 decisions — all recorded.</a:t>
+              <a:t>Expired grants keep history while pending reservations stay reserved.</a:t>
             </a:r>
             <a:endParaRPr lang="en-US" sz="1200" b="0" u="none" strike="noStrike">
               <a:solidFill>
@@ -782,7 +784,7 @@
       </p:grpSpPr>
       <p:sp>
         <p:nvSpPr>
-          <p:cNvPr id="206" name=""/>
+          <p:cNvPr id="238" name=""/>
           <p:cNvSpPr txBox="1"/>
           <p:nvPr/>
         </p:nvSpPr>
@@ -817,7 +819,7 @@
                 <a:uFillTx/>
                 <a:latin typeface="Arial"/>
               </a:rPr>
-              <a:t>Redesigned from stacked cards to this grid after live user feedback.</a:t>
+              <a:t>D-005 decisions — all recorded.</a:t>
             </a:r>
             <a:endParaRPr lang="en-US" sz="1200" b="0" u="none" strike="noStrike">
               <a:solidFill>
@@ -854,7 +856,7 @@
       </p:grpSpPr>
       <p:sp>
         <p:nvSpPr>
-          <p:cNvPr id="207" name=""/>
+          <p:cNvPr id="239" name=""/>
           <p:cNvSpPr txBox="1"/>
           <p:nvPr/>
         </p:nvSpPr>
@@ -889,7 +891,7 @@
                 <a:uFillTx/>
                 <a:latin typeface="Arial"/>
               </a:rPr>
-              <a:t>Role-scoped: this is Ahmed's personal view.</a:t>
+              <a:t>Redesigned from stacked cards to this grid after live user feedback.</a:t>
             </a:r>
             <a:endParaRPr lang="en-US" sz="1200" b="0" u="none" strike="noStrike">
               <a:solidFill>
@@ -926,7 +928,7 @@
       </p:grpSpPr>
       <p:sp>
         <p:nvSpPr>
-          <p:cNvPr id="208" name=""/>
+          <p:cNvPr id="240" name=""/>
           <p:cNvSpPr txBox="1"/>
           <p:nvPr/>
         </p:nvSpPr>
@@ -961,7 +963,7 @@
                 <a:uFillTx/>
                 <a:latin typeface="Arial"/>
               </a:rPr>
-              <a:t>Managers see non-draft team work only; HR sees the org.</a:t>
+              <a:t>Role-scoped: this is Ahmed's personal view.</a:t>
             </a:r>
             <a:endParaRPr lang="en-US" sz="1200" b="0" u="none" strike="noStrike">
               <a:solidFill>
@@ -998,7 +1000,7 @@
       </p:grpSpPr>
       <p:sp>
         <p:nvSpPr>
-          <p:cNvPr id="209" name=""/>
+          <p:cNvPr id="241" name=""/>
           <p:cNvSpPr txBox="1"/>
           <p:nvPr/>
         </p:nvSpPr>
@@ -1033,7 +1035,7 @@
                 <a:uFillTx/>
                 <a:latin typeface="Arial"/>
               </a:rPr>
-              <a:t>HR provisions accounts — no self-signup, per D-003.</a:t>
+              <a:t>Covers D-002 bilingual requirement and WCAG 2.2 AA dark-mode contrast checks.</a:t>
             </a:r>
             <a:endParaRPr lang="en-US" sz="1200" b="0" u="none" strike="noStrike">
               <a:solidFill>
@@ -1070,7 +1072,7 @@
       </p:grpSpPr>
       <p:sp>
         <p:nvSpPr>
-          <p:cNvPr id="210" name=""/>
+          <p:cNvPr id="242" name=""/>
           <p:cNvSpPr txBox="1"/>
           <p:nvPr/>
         </p:nvSpPr>
@@ -1105,7 +1107,7 @@
                 <a:uFillTx/>
                 <a:latin typeface="Arial"/>
               </a:rPr>
-              <a:t>Manager changes re-route pending reviews automatically (D-004).</a:t>
+              <a:t>Managers see non-draft team work only; HR sees the org.</a:t>
             </a:r>
             <a:endParaRPr lang="en-US" sz="1200" b="0" u="none" strike="noStrike">
               <a:solidFill>
@@ -1142,7 +1144,7 @@
       </p:grpSpPr>
       <p:sp>
         <p:nvSpPr>
-          <p:cNvPr id="211" name=""/>
+          <p:cNvPr id="243" name=""/>
           <p:cNvSpPr txBox="1"/>
           <p:nvPr/>
         </p:nvSpPr>
@@ -1177,7 +1179,7 @@
                 <a:uFillTx/>
                 <a:latin typeface="Arial"/>
               </a:rPr>
-              <a:t>60-second polling paused while hidden — per D-009.</a:t>
+              <a:t>HR provisions accounts — no self-signup, per D-003.</a:t>
             </a:r>
             <a:endParaRPr lang="en-US" sz="1200" b="0" u="none" strike="noStrike">
               <a:solidFill>
@@ -1214,7 +1216,7 @@
       </p:grpSpPr>
       <p:sp>
         <p:nvSpPr>
-          <p:cNvPr id="212" name=""/>
+          <p:cNvPr id="244" name=""/>
           <p:cNvSpPr txBox="1"/>
           <p:nvPr/>
         </p:nvSpPr>
@@ -1249,7 +1251,7 @@
                 <a:uFillTx/>
                 <a:latin typeface="Arial"/>
               </a:rPr>
-              <a:t>Requests tab is the default; 366-day cap, ≤10k rows, formula-injection neutralized.</a:t>
+              <a:t>Manager changes re-route pending reviews automatically (D-004).</a:t>
             </a:r>
             <a:endParaRPr lang="en-US" sz="1200" b="0" u="none" strike="noStrike">
               <a:solidFill>
@@ -1286,7 +1288,7 @@
       </p:grpSpPr>
       <p:sp>
         <p:nvSpPr>
-          <p:cNvPr id="195" name=""/>
+          <p:cNvPr id="227" name=""/>
           <p:cNvSpPr txBox="1"/>
           <p:nvPr/>
         </p:nvSpPr>
@@ -1358,7 +1360,7 @@
       </p:grpSpPr>
       <p:sp>
         <p:nvSpPr>
-          <p:cNvPr id="213" name=""/>
+          <p:cNvPr id="245" name=""/>
           <p:cNvSpPr txBox="1"/>
           <p:nvPr/>
         </p:nvSpPr>
@@ -1393,7 +1395,7 @@
                 <a:uFillTx/>
                 <a:latin typeface="Arial"/>
               </a:rPr>
-              <a:t>HR-only area — managers get a reduced settings menu.</a:t>
+              <a:t>60-second polling paused while hidden — per D-009.</a:t>
             </a:r>
             <a:endParaRPr lang="en-US" sz="1200" b="0" u="none" strike="noStrike">
               <a:solidFill>
@@ -1430,7 +1432,7 @@
       </p:grpSpPr>
       <p:sp>
         <p:nvSpPr>
-          <p:cNvPr id="214" name=""/>
+          <p:cNvPr id="246" name=""/>
           <p:cNvSpPr txBox="1"/>
           <p:nvPr/>
         </p:nvSpPr>
@@ -1465,7 +1467,79 @@
                 <a:uFillTx/>
                 <a:latin typeface="Arial"/>
               </a:rPr>
-              <a:t>Deliberate choice over microservices — right-sized for the brief.</a:t>
+              <a:t>Requests tab is the default; 366-day cap, ≤10k rows, formula-injection neutralized.</a:t>
+            </a:r>
+            <a:endParaRPr lang="en-US" sz="1200" b="0" u="none" strike="noStrike">
+              <a:solidFill>
+                <a:srgbClr val="000000"/>
+              </a:solidFill>
+              <a:effectLst/>
+              <a:uFillTx/>
+              <a:latin typeface="Arial"/>
+            </a:endParaRPr>
+          </a:p>
+        </p:txBody>
+      </p:sp>
+    </p:spTree>
+  </p:cSld>
+</p:notes>
+</file>
+
+<file path=ppt/notesSlides/notesSlide22.xml><?xml version="1.0" encoding="utf-8"?>
+<p:notes xmlns:a="http://schemas.openxmlformats.org/drawingml/2006/main" xmlns:p="http://schemas.openxmlformats.org/presentationml/2006/main" xmlns:r="http://schemas.openxmlformats.org/officeDocument/2006/relationships" xmlns:p14="http://schemas.microsoft.com/office/powerpoint/2010/main" xmlns:p15="http://schemas.microsoft.com/office/powerpoint/2012/main" xmlns:mc="http://schemas.openxmlformats.org/markup-compatibility/2006">
+  <p:cSld>
+    <p:spTree>
+      <p:nvGrpSpPr>
+        <p:cNvPr id="1" name=""/>
+        <p:cNvGrpSpPr/>
+        <p:nvPr/>
+      </p:nvGrpSpPr>
+      <p:grpSpPr>
+        <a:xfrm>
+          <a:off x="0" y="0"/>
+          <a:ext cx="0" cy="0"/>
+          <a:chOff x="0" y="0"/>
+          <a:chExt cx="0" cy="0"/>
+        </a:xfrm>
+      </p:grpSpPr>
+      <p:sp>
+        <p:nvSpPr>
+          <p:cNvPr id="247" name=""/>
+          <p:cNvSpPr txBox="1"/>
+          <p:nvPr/>
+        </p:nvSpPr>
+        <p:spPr>
+          <a:xfrm>
+            <a:off x="720000" y="5040000"/>
+            <a:ext cx="8640000" cy="2160000"/>
+          </a:xfrm>
+          <a:prstGeom prst="rect">
+            <a:avLst/>
+          </a:prstGeom>
+          <a:solidFill>
+            <a:srgbClr val="729FCF"/>
+          </a:solidFill>
+          <a:ln w="0">
+            <a:solidFill>
+              <a:srgbClr val="3465A4"/>
+            </a:solidFill>
+          </a:ln>
+        </p:spPr>
+        <p:txBody>
+          <a:bodyPr lIns="90000" tIns="45000" rIns="90000" bIns="45000" anchor="t">
+            <a:spAutoFit/>
+          </a:bodyPr>
+          <a:p>
+            <a:r>
+              <a:rPr lang="en-US" sz="1200" b="0" i="1" u="none" strike="noStrike">
+                <a:solidFill>
+                  <a:srgbClr val="555555"/>
+                </a:solidFill>
+                <a:effectLst/>
+                <a:uFillTx/>
+                <a:latin typeface="Arial"/>
+              </a:rPr>
+              <a:t>HR-only area — managers get a reduced settings menu.</a:t>
             </a:r>
             <a:endParaRPr lang="en-US" sz="1200" b="0" u="none" strike="noStrike">
               <a:solidFill>
@@ -1502,7 +1576,7 @@
       </p:grpSpPr>
       <p:sp>
         <p:nvSpPr>
-          <p:cNvPr id="215" name=""/>
+          <p:cNvPr id="248" name=""/>
           <p:cNvSpPr txBox="1"/>
           <p:nvPr/>
         </p:nvSpPr>
@@ -1537,7 +1611,7 @@
                 <a:uFillTx/>
                 <a:latin typeface="Arial"/>
               </a:rPr>
-              <a:t>The pipeline literally deployed itself during this project.</a:t>
+              <a:t>Deliberate choice over microservices — right-sized for the brief.</a:t>
             </a:r>
             <a:endParaRPr lang="en-US" sz="1200" b="0" u="none" strike="noStrike">
               <a:solidFill>
@@ -1574,7 +1648,7 @@
       </p:grpSpPr>
       <p:sp>
         <p:nvSpPr>
-          <p:cNvPr id="216" name=""/>
+          <p:cNvPr id="249" name=""/>
           <p:cNvSpPr txBox="1"/>
           <p:nvPr/>
         </p:nvSpPr>
@@ -1609,7 +1683,7 @@
                 <a:uFillTx/>
                 <a:latin typeface="Arial"/>
               </a:rPr>
-              <a:t>A strength: honest, reviewed AI work is what the rubric rewards.</a:t>
+              <a:t>The pipeline literally deployed itself during this project.</a:t>
             </a:r>
             <a:endParaRPr lang="en-US" sz="1200" b="0" u="none" strike="noStrike">
               <a:solidFill>
@@ -1646,7 +1720,7 @@
       </p:grpSpPr>
       <p:sp>
         <p:nvSpPr>
-          <p:cNvPr id="217" name=""/>
+          <p:cNvPr id="250" name=""/>
           <p:cNvSpPr txBox="1"/>
           <p:nvPr/>
         </p:nvSpPr>
@@ -1681,7 +1755,7 @@
                 <a:uFillTx/>
                 <a:latin typeface="Arial"/>
               </a:rPr>
-              <a:t>Owning limits builds trust — judges reward honest evidence.</a:t>
+              <a:t>A strength: honest, reviewed AI work is what the rubric rewards.</a:t>
             </a:r>
             <a:endParaRPr lang="en-US" sz="1200" b="0" u="none" strike="noStrike">
               <a:solidFill>
@@ -1699,7 +1773,7 @@
 </p:notes>
 </file>
 
-<file path=ppt/notesSlides/notesSlide28.xml><?xml version="1.0" encoding="utf-8"?>
+<file path=ppt/notesSlides/notesSlide29.xml><?xml version="1.0" encoding="utf-8"?>
 <p:notes xmlns:a="http://schemas.openxmlformats.org/drawingml/2006/main" xmlns:p="http://schemas.openxmlformats.org/presentationml/2006/main" xmlns:r="http://schemas.openxmlformats.org/officeDocument/2006/relationships" xmlns:p14="http://schemas.microsoft.com/office/powerpoint/2010/main" xmlns:p15="http://schemas.microsoft.com/office/powerpoint/2012/main" xmlns:mc="http://schemas.openxmlformats.org/markup-compatibility/2006">
   <p:cSld>
     <p:spTree>
@@ -1718,7 +1792,7 @@
       </p:grpSpPr>
       <p:sp>
         <p:nvSpPr>
-          <p:cNvPr id="218" name=""/>
+          <p:cNvPr id="251" name=""/>
           <p:cNvSpPr txBox="1"/>
           <p:nvPr/>
         </p:nvSpPr>
@@ -1753,7 +1827,7 @@
                 <a:uFillTx/>
                 <a:latin typeface="Arial"/>
               </a:rPr>
-              <a:t>Appendix: URL 13.53.139.255:8380 · repo github.com/Ahmed-Mahdyy/Daimoma</a:t>
+              <a:t>Owning limits builds trust — judges reward honest evidence.</a:t>
             </a:r>
             <a:endParaRPr lang="en-US" sz="1200" b="0" u="none" strike="noStrike">
               <a:solidFill>
@@ -1790,7 +1864,7 @@
       </p:grpSpPr>
       <p:sp>
         <p:nvSpPr>
-          <p:cNvPr id="196" name=""/>
+          <p:cNvPr id="228" name=""/>
           <p:cNvSpPr txBox="1"/>
           <p:nvPr/>
         </p:nvSpPr>
@@ -1826,6 +1900,78 @@
                 <a:latin typeface="Arial"/>
               </a:rPr>
               <a:t>One organization per deployment — deliberately scoped, not SaaS.</a:t>
+            </a:r>
+            <a:endParaRPr lang="en-US" sz="1200" b="0" u="none" strike="noStrike">
+              <a:solidFill>
+                <a:srgbClr val="000000"/>
+              </a:solidFill>
+              <a:effectLst/>
+              <a:uFillTx/>
+              <a:latin typeface="Arial"/>
+            </a:endParaRPr>
+          </a:p>
+        </p:txBody>
+      </p:sp>
+    </p:spTree>
+  </p:cSld>
+</p:notes>
+</file>
+
+<file path=ppt/notesSlides/notesSlide30.xml><?xml version="1.0" encoding="utf-8"?>
+<p:notes xmlns:a="http://schemas.openxmlformats.org/drawingml/2006/main" xmlns:p="http://schemas.openxmlformats.org/presentationml/2006/main" xmlns:r="http://schemas.openxmlformats.org/officeDocument/2006/relationships" xmlns:p14="http://schemas.microsoft.com/office/powerpoint/2010/main" xmlns:p15="http://schemas.microsoft.com/office/powerpoint/2012/main" xmlns:mc="http://schemas.openxmlformats.org/markup-compatibility/2006">
+  <p:cSld>
+    <p:spTree>
+      <p:nvGrpSpPr>
+        <p:cNvPr id="1" name=""/>
+        <p:cNvGrpSpPr/>
+        <p:nvPr/>
+      </p:nvGrpSpPr>
+      <p:grpSpPr>
+        <a:xfrm>
+          <a:off x="0" y="0"/>
+          <a:ext cx="0" cy="0"/>
+          <a:chOff x="0" y="0"/>
+          <a:chExt cx="0" cy="0"/>
+        </a:xfrm>
+      </p:grpSpPr>
+      <p:sp>
+        <p:nvSpPr>
+          <p:cNvPr id="252" name=""/>
+          <p:cNvSpPr txBox="1"/>
+          <p:nvPr/>
+        </p:nvSpPr>
+        <p:spPr>
+          <a:xfrm>
+            <a:off x="720000" y="5040000"/>
+            <a:ext cx="8640000" cy="2160000"/>
+          </a:xfrm>
+          <a:prstGeom prst="rect">
+            <a:avLst/>
+          </a:prstGeom>
+          <a:solidFill>
+            <a:srgbClr val="729FCF"/>
+          </a:solidFill>
+          <a:ln w="0">
+            <a:solidFill>
+              <a:srgbClr val="3465A4"/>
+            </a:solidFill>
+          </a:ln>
+        </p:spPr>
+        <p:txBody>
+          <a:bodyPr lIns="90000" tIns="45000" rIns="90000" bIns="45000" anchor="t">
+            <a:spAutoFit/>
+          </a:bodyPr>
+          <a:p>
+            <a:r>
+              <a:rPr lang="en-US" sz="1200" b="0" i="1" u="none" strike="noStrike">
+                <a:solidFill>
+                  <a:srgbClr val="555555"/>
+                </a:solidFill>
+                <a:effectLst/>
+                <a:uFillTx/>
+                <a:latin typeface="Arial"/>
+              </a:rPr>
+              <a:t>Appendix: URL 13.53.139.255:8380 · repo github.com/Ahmed-Mahdyy/Daimoma</a:t>
             </a:r>
             <a:endParaRPr lang="en-US" sz="1200" b="0" u="none" strike="noStrike">
               <a:solidFill>
@@ -1862,7 +2008,7 @@
       </p:grpSpPr>
       <p:sp>
         <p:nvSpPr>
-          <p:cNvPr id="197" name=""/>
+          <p:cNvPr id="229" name=""/>
           <p:cNvSpPr txBox="1"/>
           <p:nvPr/>
         </p:nvSpPr>
@@ -1934,7 +2080,7 @@
       </p:grpSpPr>
       <p:sp>
         <p:nvSpPr>
-          <p:cNvPr id="198" name=""/>
+          <p:cNvPr id="230" name=""/>
           <p:cNvSpPr txBox="1"/>
           <p:nvPr/>
         </p:nvSpPr>
@@ -2028,7 +2174,7 @@
       </p:grpSpPr>
       <p:sp>
         <p:nvSpPr>
-          <p:cNvPr id="199" name=""/>
+          <p:cNvPr id="231" name=""/>
           <p:cNvSpPr txBox="1"/>
           <p:nvPr/>
         </p:nvSpPr>
@@ -2100,7 +2246,7 @@
       </p:grpSpPr>
       <p:sp>
         <p:nvSpPr>
-          <p:cNvPr id="200" name=""/>
+          <p:cNvPr id="232" name=""/>
           <p:cNvSpPr txBox="1"/>
           <p:nvPr/>
         </p:nvSpPr>
@@ -2172,7 +2318,7 @@
       </p:grpSpPr>
       <p:sp>
         <p:nvSpPr>
-          <p:cNvPr id="201" name=""/>
+          <p:cNvPr id="233" name=""/>
           <p:cNvSpPr txBox="1"/>
           <p:nvPr/>
         </p:nvSpPr>
@@ -2244,7 +2390,7 @@
       </p:grpSpPr>
       <p:sp>
         <p:nvSpPr>
-          <p:cNvPr id="202" name=""/>
+          <p:cNvPr id="234" name=""/>
           <p:cNvSpPr txBox="1"/>
           <p:nvPr/>
         </p:nvSpPr>
@@ -2279,7 +2425,7 @@
                 <a:uFillTx/>
                 <a:latin typeface="Arial"/>
               </a:rPr>
-              <a:t>Return/reject require a reason; decisions are audited.</a:t>
+              <a:t>Dynamic routing per D-004/D-011: manager-only, HR-only, or two-stage Manager then HR.</a:t>
             </a:r>
             <a:endParaRPr lang="en-US" sz="1200" b="0" u="none" strike="noStrike">
               <a:solidFill>
@@ -2348,7 +2494,7 @@
         <p:txBody>
           <a:bodyPr/>
           <a:p>
-            <a:fld id="{F51B8770-EC9F-4881-8387-52527B10297D}" type="slidenum">
+            <a:fld id="{023B95B2-35E7-4269-9A68-C5C144E8F3AA}" type="slidenum">
               <a:t>&lt;#&gt;</a:t>
             </a:fld>
           </a:p>
@@ -2515,7 +2661,7 @@
         <p:txBody>
           <a:bodyPr/>
           <a:p>
-            <a:fld id="{DF43C1D7-CEAC-406A-A517-9D197F5F12BD}" type="slidenum">
+            <a:fld id="{7D54715A-6DC5-49C8-8F3C-1536B370A85C}" type="slidenum">
               <a:t>&lt;#&gt;</a:t>
             </a:fld>
           </a:p>
@@ -3194,7 +3340,7 @@
             <a:pPr indent="0" algn="r">
               <a:buNone/>
             </a:pPr>
-            <a:fld id="{66B7A874-B9AB-4106-A737-ECBD466B4DB9}" type="slidenum">
+            <a:fld id="{6E162645-1998-41F6-B8DF-328750413AC1}" type="slidenum">
               <a:rPr lang="en-US" sz="1400" b="0" u="none" strike="noStrike">
                 <a:solidFill>
                   <a:srgbClr val="000000"/>
@@ -3563,14 +3709,14 @@
       </p:grpSpPr>
       <p:sp>
         <p:nvSpPr>
-          <p:cNvPr id="71" name=""/>
-          <p:cNvSpPr txBox="1"/>
-          <p:nvPr/>
-        </p:nvSpPr>
-        <p:spPr>
-          <a:xfrm>
-            <a:off x="540000" y="324000"/>
-            <a:ext cx="9000000" cy="576000"/>
+          <p:cNvPr id="81" name=""/>
+          <p:cNvSpPr txBox="1"/>
+          <p:nvPr/>
+        </p:nvSpPr>
+        <p:spPr>
+          <a:xfrm>
+            <a:off x="540000" y="252000"/>
+            <a:ext cx="9000000" cy="504000"/>
           </a:xfrm>
           <a:prstGeom prst="rect">
             <a:avLst/>
@@ -3594,7 +3740,7 @@
                 <a:uFillTx/>
                 <a:latin typeface="Arial"/>
               </a:rPr>
-              <a:t>Allocations — Controlled Allowances</a:t>
+              <a:t>Request Detail</a:t>
             </a:r>
             <a:endParaRPr lang="en-US" sz="2600" b="0" u="none" strike="noStrike">
               <a:solidFill>
@@ -3609,13 +3755,13 @@
       </p:sp>
       <p:sp>
         <p:nvSpPr>
-          <p:cNvPr id="72" name=""/>
-          <p:cNvSpPr txBox="1"/>
-          <p:nvPr/>
-        </p:nvSpPr>
-        <p:spPr>
-          <a:xfrm>
-            <a:off x="540000" y="900000"/>
+          <p:cNvPr id="82" name=""/>
+          <p:cNvSpPr txBox="1"/>
+          <p:nvPr/>
+        </p:nvSpPr>
+        <p:spPr>
+          <a:xfrm>
+            <a:off x="540000" y="774000"/>
             <a:ext cx="1440000" cy="43200"/>
           </a:xfrm>
           <a:prstGeom prst="rect">
@@ -3644,23 +3790,45 @@
           </a:p>
         </p:txBody>
       </p:sp>
-      <p:sp>
-        <p:nvSpPr>
-          <p:cNvPr id="73" name=""/>
-          <p:cNvSpPr txBox="1"/>
-          <p:nvPr/>
-        </p:nvSpPr>
-        <p:spPr>
-          <a:xfrm>
-            <a:off x="540000" y="2030400"/>
-            <a:ext cx="50400" cy="493200"/>
-          </a:xfrm>
-          <a:prstGeom prst="rect">
-            <a:avLst/>
-          </a:prstGeom>
-          <a:solidFill>
-            <a:srgbClr val="E6BF71"/>
-          </a:solidFill>
+      <p:pic>
+        <p:nvPicPr>
+          <p:cNvPr id="83" name=""/>
+          <p:cNvPicPr/>
+          <p:nvPr/>
+        </p:nvPicPr>
+        <p:blipFill>
+          <a:blip r:embed="rId1"/>
+          <a:stretch/>
+        </p:blipFill>
+        <p:spPr>
+          <a:xfrm>
+            <a:off x="1814400" y="1008000"/>
+            <a:ext cx="6451200" cy="4032000"/>
+          </a:xfrm>
+          <a:prstGeom prst="rect">
+            <a:avLst/>
+          </a:prstGeom>
+          <a:noFill/>
+          <a:ln w="0">
+            <a:noFill/>
+          </a:ln>
+        </p:spPr>
+      </p:pic>
+      <p:sp>
+        <p:nvSpPr>
+          <p:cNvPr id="84" name=""/>
+          <p:cNvSpPr txBox="1"/>
+          <p:nvPr/>
+        </p:nvSpPr>
+        <p:spPr>
+          <a:xfrm>
+            <a:off x="540000" y="5148000"/>
+            <a:ext cx="9000000" cy="360000"/>
+          </a:xfrm>
+          <a:prstGeom prst="rect">
+            <a:avLst/>
+          </a:prstGeom>
+          <a:noFill/>
           <a:ln w="0">
             <a:noFill/>
           </a:ln>
@@ -3670,322 +3838,18 @@
             <a:spAutoFit/>
           </a:bodyPr>
           <a:p>
-            <a:endParaRPr lang="en-US" sz="1800" b="0" u="none" strike="noStrike">
-              <a:solidFill>
-                <a:srgbClr val="000000"/>
-              </a:solidFill>
-              <a:effectLst/>
-              <a:uFillTx/>
-              <a:latin typeface="Arial"/>
-            </a:endParaRPr>
-          </a:p>
-        </p:txBody>
-      </p:sp>
-      <p:sp>
-        <p:nvSpPr>
-          <p:cNvPr id="74" name=""/>
-          <p:cNvSpPr txBox="1"/>
-          <p:nvPr/>
-        </p:nvSpPr>
-        <p:spPr>
-          <a:xfrm>
-            <a:off x="540000" y="2030400"/>
-            <a:ext cx="9000000" cy="493200"/>
-          </a:xfrm>
-          <a:prstGeom prst="rect">
-            <a:avLst/>
-          </a:prstGeom>
-          <a:solidFill>
-            <a:srgbClr val="FFFFFF"/>
-          </a:solidFill>
-          <a:ln w="7200">
-            <a:solidFill>
-              <a:srgbClr val="DFE9E4"/>
-            </a:solidFill>
-            <a:round/>
-          </a:ln>
-        </p:spPr>
-        <p:txBody>
-          <a:bodyPr lIns="198000" tIns="115200" rIns="126000" bIns="115200" anchor="ctr">
-            <a:normAutofit/>
-          </a:bodyPr>
-          <a:p>
-            <a:r>
-              <a:rPr lang="en-US" sz="1550" b="0" u="none" strike="noStrike">
-                <a:solidFill>
-                  <a:srgbClr val="1A2E2B"/>
-                </a:solidFill>
-                <a:effectLst/>
-                <a:uFillTx/>
-                <a:latin typeface="Arial"/>
-              </a:rPr>
-              <a:t>HR grants dated allowances per employee per request type</a:t>
-            </a:r>
-            <a:endParaRPr lang="en-US" sz="1550" b="0" u="none" strike="noStrike">
-              <a:solidFill>
-                <a:srgbClr val="000000"/>
-              </a:solidFill>
-              <a:effectLst/>
-              <a:uFillTx/>
-              <a:latin typeface="Arial"/>
-            </a:endParaRPr>
-          </a:p>
-        </p:txBody>
-      </p:sp>
-      <p:sp>
-        <p:nvSpPr>
-          <p:cNvPr id="75" name=""/>
-          <p:cNvSpPr txBox="1"/>
-          <p:nvPr/>
-        </p:nvSpPr>
-        <p:spPr>
-          <a:xfrm>
-            <a:off x="540000" y="2674800"/>
-            <a:ext cx="50400" cy="493200"/>
-          </a:xfrm>
-          <a:prstGeom prst="rect">
-            <a:avLst/>
-          </a:prstGeom>
-          <a:solidFill>
-            <a:srgbClr val="E6BF71"/>
-          </a:solidFill>
-          <a:ln w="0">
-            <a:noFill/>
-          </a:ln>
-        </p:spPr>
-        <p:txBody>
-          <a:bodyPr lIns="90000" tIns="45000" rIns="90000" bIns="45000" anchor="t">
-            <a:spAutoFit/>
-          </a:bodyPr>
-          <a:p>
-            <a:endParaRPr lang="en-US" sz="1800" b="0" u="none" strike="noStrike">
-              <a:solidFill>
-                <a:srgbClr val="000000"/>
-              </a:solidFill>
-              <a:effectLst/>
-              <a:uFillTx/>
-              <a:latin typeface="Arial"/>
-            </a:endParaRPr>
-          </a:p>
-        </p:txBody>
-      </p:sp>
-      <p:sp>
-        <p:nvSpPr>
-          <p:cNvPr id="76" name=""/>
-          <p:cNvSpPr txBox="1"/>
-          <p:nvPr/>
-        </p:nvSpPr>
-        <p:spPr>
-          <a:xfrm>
-            <a:off x="540000" y="2674800"/>
-            <a:ext cx="9000000" cy="493200"/>
-          </a:xfrm>
-          <a:prstGeom prst="rect">
-            <a:avLst/>
-          </a:prstGeom>
-          <a:solidFill>
-            <a:srgbClr val="FFFFFF"/>
-          </a:solidFill>
-          <a:ln w="7200">
-            <a:solidFill>
-              <a:srgbClr val="DFE9E4"/>
-            </a:solidFill>
-            <a:round/>
-          </a:ln>
-        </p:spPr>
-        <p:txBody>
-          <a:bodyPr lIns="198000" tIns="115200" rIns="126000" bIns="115200" anchor="ctr">
-            <a:normAutofit/>
-          </a:bodyPr>
-          <a:p>
-            <a:r>
-              <a:rPr lang="en-US" sz="1550" b="0" u="none" strike="noStrike">
-                <a:solidFill>
-                  <a:srgbClr val="1A2E2B"/>
-                </a:solidFill>
-                <a:effectLst/>
-                <a:uFillTx/>
-                <a:latin typeface="Arial"/>
-              </a:rPr>
-              <a:t>Reserve on submit → release on return/reject → settle on approve</a:t>
-            </a:r>
-            <a:endParaRPr lang="en-US" sz="1550" b="0" u="none" strike="noStrike">
-              <a:solidFill>
-                <a:srgbClr val="000000"/>
-              </a:solidFill>
-              <a:effectLst/>
-              <a:uFillTx/>
-              <a:latin typeface="Arial"/>
-            </a:endParaRPr>
-          </a:p>
-        </p:txBody>
-      </p:sp>
-      <p:sp>
-        <p:nvSpPr>
-          <p:cNvPr id="77" name=""/>
-          <p:cNvSpPr txBox="1"/>
-          <p:nvPr/>
-        </p:nvSpPr>
-        <p:spPr>
-          <a:xfrm>
-            <a:off x="540000" y="3319200"/>
-            <a:ext cx="50400" cy="342000"/>
-          </a:xfrm>
-          <a:prstGeom prst="rect">
-            <a:avLst/>
-          </a:prstGeom>
-          <a:solidFill>
-            <a:srgbClr val="E6BF71"/>
-          </a:solidFill>
-          <a:ln w="0">
-            <a:noFill/>
-          </a:ln>
-        </p:spPr>
-        <p:txBody>
-          <a:bodyPr lIns="90000" tIns="45000" rIns="90000" bIns="45000" anchor="t">
-            <a:spAutoFit/>
-          </a:bodyPr>
-          <a:p>
-            <a:endParaRPr lang="en-US" sz="1800" b="0" u="none" strike="noStrike">
-              <a:solidFill>
-                <a:srgbClr val="000000"/>
-              </a:solidFill>
-              <a:effectLst/>
-              <a:uFillTx/>
-              <a:latin typeface="Arial"/>
-            </a:endParaRPr>
-          </a:p>
-        </p:txBody>
-      </p:sp>
-      <p:sp>
-        <p:nvSpPr>
-          <p:cNvPr id="78" name=""/>
-          <p:cNvSpPr txBox="1"/>
-          <p:nvPr/>
-        </p:nvSpPr>
-        <p:spPr>
-          <a:xfrm>
-            <a:off x="540000" y="3264840"/>
-            <a:ext cx="9000000" cy="450360"/>
-          </a:xfrm>
-          <a:prstGeom prst="rect">
-            <a:avLst/>
-          </a:prstGeom>
-          <a:solidFill>
-            <a:srgbClr val="FFFFFF"/>
-          </a:solidFill>
-          <a:ln w="7200">
-            <a:solidFill>
-              <a:srgbClr val="DFE9E4"/>
-            </a:solidFill>
-            <a:round/>
-          </a:ln>
-        </p:spPr>
-        <p:txBody>
-          <a:bodyPr lIns="198000" tIns="115200" rIns="126000" bIns="115200" anchor="ctr">
-            <a:normAutofit/>
-          </a:bodyPr>
-          <a:p>
-            <a:r>
-              <a:rPr lang="en-US" sz="1550" b="0" u="none" strike="noStrike">
-                <a:solidFill>
-                  <a:srgbClr val="1A2E2B"/>
-                </a:solidFill>
-                <a:effectLst/>
-                <a:uFillTx/>
-                <a:latin typeface="Arial"/>
-              </a:rPr>
-              <a:t>Balances always reconcile; no overlapping grants</a:t>
-            </a:r>
-            <a:endParaRPr lang="en-US" sz="1550" b="0" u="none" strike="noStrike">
-              <a:solidFill>
-                <a:srgbClr val="000000"/>
-              </a:solidFill>
-              <a:effectLst/>
-              <a:uFillTx/>
-              <a:latin typeface="Arial"/>
-            </a:endParaRPr>
-          </a:p>
-        </p:txBody>
-      </p:sp>
-      <p:sp>
-        <p:nvSpPr>
-          <p:cNvPr id="79" name=""/>
-          <p:cNvSpPr txBox="1"/>
-          <p:nvPr/>
-        </p:nvSpPr>
-        <p:spPr>
-          <a:xfrm>
-            <a:off x="540000" y="3812400"/>
-            <a:ext cx="50400" cy="493200"/>
-          </a:xfrm>
-          <a:prstGeom prst="rect">
-            <a:avLst/>
-          </a:prstGeom>
-          <a:solidFill>
-            <a:srgbClr val="E6BF71"/>
-          </a:solidFill>
-          <a:ln w="0">
-            <a:noFill/>
-          </a:ln>
-        </p:spPr>
-        <p:txBody>
-          <a:bodyPr lIns="90000" tIns="45000" rIns="90000" bIns="45000" anchor="t">
-            <a:spAutoFit/>
-          </a:bodyPr>
-          <a:p>
-            <a:endParaRPr lang="en-US" sz="1800" b="0" u="none" strike="noStrike">
-              <a:solidFill>
-                <a:srgbClr val="000000"/>
-              </a:solidFill>
-              <a:effectLst/>
-              <a:uFillTx/>
-              <a:latin typeface="Arial"/>
-            </a:endParaRPr>
-          </a:p>
-        </p:txBody>
-      </p:sp>
-      <p:sp>
-        <p:nvSpPr>
-          <p:cNvPr id="80" name=""/>
-          <p:cNvSpPr txBox="1"/>
-          <p:nvPr/>
-        </p:nvSpPr>
-        <p:spPr>
-          <a:xfrm>
-            <a:off x="540000" y="3812400"/>
-            <a:ext cx="9000000" cy="493200"/>
-          </a:xfrm>
-          <a:prstGeom prst="rect">
-            <a:avLst/>
-          </a:prstGeom>
-          <a:solidFill>
-            <a:srgbClr val="FFFFFF"/>
-          </a:solidFill>
-          <a:ln w="7200">
-            <a:solidFill>
-              <a:srgbClr val="DFE9E4"/>
-            </a:solidFill>
-            <a:round/>
-          </a:ln>
-        </p:spPr>
-        <p:txBody>
-          <a:bodyPr lIns="198000" tIns="115200" rIns="126000" bIns="115200" anchor="ctr">
-            <a:normAutofit/>
-          </a:bodyPr>
-          <a:p>
-            <a:r>
-              <a:rPr lang="en-US" sz="1550" b="0" u="none" strike="noStrike">
-                <a:solidFill>
-                  <a:srgbClr val="1A2E2B"/>
-                </a:solidFill>
-                <a:effectLst/>
-                <a:uFillTx/>
-                <a:latin typeface="Arial"/>
-              </a:rPr>
-              <a:t>Early-leave billing: 15-minute blocks, 30-minute minimum</a:t>
-            </a:r>
-            <a:endParaRPr lang="en-US" sz="1550" b="0" u="none" strike="noStrike">
+            <a:r>
+              <a:rPr lang="en-US" sz="1100" b="0" i="1" u="none" strike="noStrike">
+                <a:solidFill>
+                  <a:srgbClr val="4A7A6F"/>
+                </a:solidFill>
+                <a:effectLst/>
+                <a:uFillTx/>
+                <a:latin typeface="Arial"/>
+              </a:rPr>
+              <a:t>Full lifecycle view — state, history, and the decision actions.</a:t>
+            </a:r>
+            <a:endParaRPr lang="en-US" sz="1100" b="0" u="none" strike="noStrike">
               <a:solidFill>
                 <a:srgbClr val="000000"/>
               </a:solidFill>
@@ -4035,14 +3899,14 @@
       </p:grpSpPr>
       <p:sp>
         <p:nvSpPr>
-          <p:cNvPr id="81" name=""/>
-          <p:cNvSpPr txBox="1"/>
-          <p:nvPr/>
-        </p:nvSpPr>
-        <p:spPr>
-          <a:xfrm>
-            <a:off x="540000" y="252000"/>
-            <a:ext cx="9000000" cy="504000"/>
+          <p:cNvPr id="85" name=""/>
+          <p:cNvSpPr txBox="1"/>
+          <p:nvPr/>
+        </p:nvSpPr>
+        <p:spPr>
+          <a:xfrm>
+            <a:off x="540000" y="324000"/>
+            <a:ext cx="9000000" cy="576000"/>
           </a:xfrm>
           <a:prstGeom prst="rect">
             <a:avLst/>
@@ -4066,7 +3930,7 @@
                 <a:uFillTx/>
                 <a:latin typeface="Arial"/>
               </a:rPr>
-              <a:t>Allocation Grants</a:t>
+              <a:t>Allocations — Controlled Allowances</a:t>
             </a:r>
             <a:endParaRPr lang="en-US" sz="2600" b="0" u="none" strike="noStrike">
               <a:solidFill>
@@ -4081,13 +3945,13 @@
       </p:sp>
       <p:sp>
         <p:nvSpPr>
-          <p:cNvPr id="82" name=""/>
-          <p:cNvSpPr txBox="1"/>
-          <p:nvPr/>
-        </p:nvSpPr>
-        <p:spPr>
-          <a:xfrm>
-            <a:off x="540000" y="774000"/>
+          <p:cNvPr id="86" name=""/>
+          <p:cNvSpPr txBox="1"/>
+          <p:nvPr/>
+        </p:nvSpPr>
+        <p:spPr>
+          <a:xfrm>
+            <a:off x="540000" y="900000"/>
             <a:ext cx="1440000" cy="43200"/>
           </a:xfrm>
           <a:prstGeom prst="rect">
@@ -4116,45 +3980,23 @@
           </a:p>
         </p:txBody>
       </p:sp>
-      <p:pic>
-        <p:nvPicPr>
-          <p:cNvPr id="83" name=""/>
-          <p:cNvPicPr/>
-          <p:nvPr/>
-        </p:nvPicPr>
-        <p:blipFill>
-          <a:blip r:embed="rId1"/>
-          <a:stretch/>
-        </p:blipFill>
-        <p:spPr>
-          <a:xfrm>
-            <a:off x="1814400" y="1008000"/>
-            <a:ext cx="6451200" cy="4032000"/>
-          </a:xfrm>
-          <a:prstGeom prst="rect">
-            <a:avLst/>
-          </a:prstGeom>
-          <a:noFill/>
-          <a:ln w="0">
-            <a:noFill/>
-          </a:ln>
-        </p:spPr>
-      </p:pic>
-      <p:sp>
-        <p:nvSpPr>
-          <p:cNvPr id="84" name=""/>
-          <p:cNvSpPr txBox="1"/>
-          <p:nvPr/>
-        </p:nvSpPr>
-        <p:spPr>
-          <a:xfrm>
-            <a:off x="540000" y="5148000"/>
-            <a:ext cx="9000000" cy="360000"/>
-          </a:xfrm>
-          <a:prstGeom prst="rect">
-            <a:avLst/>
-          </a:prstGeom>
-          <a:noFill/>
+      <p:sp>
+        <p:nvSpPr>
+          <p:cNvPr id="87" name=""/>
+          <p:cNvSpPr txBox="1"/>
+          <p:nvPr/>
+        </p:nvSpPr>
+        <p:spPr>
+          <a:xfrm>
+            <a:off x="540000" y="2030400"/>
+            <a:ext cx="50400" cy="493200"/>
+          </a:xfrm>
+          <a:prstGeom prst="rect">
+            <a:avLst/>
+          </a:prstGeom>
+          <a:solidFill>
+            <a:srgbClr val="E6BF71"/>
+          </a:solidFill>
           <a:ln w="0">
             <a:noFill/>
           </a:ln>
@@ -4164,18 +4006,322 @@
             <a:spAutoFit/>
           </a:bodyPr>
           <a:p>
-            <a:r>
-              <a:rPr lang="en-US" sz="1100" b="0" i="1" u="none" strike="noStrike">
-                <a:solidFill>
-                  <a:srgbClr val="4A7A6F"/>
-                </a:solidFill>
-                <a:effectLst/>
-                <a:uFillTx/>
-                <a:latin typeface="Arial"/>
-              </a:rPr>
-              <a:t>Granted / reserved / used / remaining — visible per employee and type.</a:t>
-            </a:r>
-            <a:endParaRPr lang="en-US" sz="1100" b="0" u="none" strike="noStrike">
+            <a:endParaRPr lang="en-US" sz="1800" b="0" u="none" strike="noStrike">
+              <a:solidFill>
+                <a:srgbClr val="000000"/>
+              </a:solidFill>
+              <a:effectLst/>
+              <a:uFillTx/>
+              <a:latin typeface="Arial"/>
+            </a:endParaRPr>
+          </a:p>
+        </p:txBody>
+      </p:sp>
+      <p:sp>
+        <p:nvSpPr>
+          <p:cNvPr id="88" name=""/>
+          <p:cNvSpPr txBox="1"/>
+          <p:nvPr/>
+        </p:nvSpPr>
+        <p:spPr>
+          <a:xfrm>
+            <a:off x="540000" y="2030400"/>
+            <a:ext cx="9000000" cy="493200"/>
+          </a:xfrm>
+          <a:prstGeom prst="rect">
+            <a:avLst/>
+          </a:prstGeom>
+          <a:solidFill>
+            <a:srgbClr val="FFFFFF"/>
+          </a:solidFill>
+          <a:ln w="7200">
+            <a:solidFill>
+              <a:srgbClr val="DFE9E4"/>
+            </a:solidFill>
+            <a:round/>
+          </a:ln>
+        </p:spPr>
+        <p:txBody>
+          <a:bodyPr lIns="198000" tIns="115200" rIns="126000" bIns="115200" anchor="ctr">
+            <a:normAutofit/>
+          </a:bodyPr>
+          <a:p>
+            <a:r>
+              <a:rPr lang="en-US" sz="1550" b="0" u="none" strike="noStrike">
+                <a:solidFill>
+                  <a:srgbClr val="1A2E2B"/>
+                </a:solidFill>
+                <a:effectLst/>
+                <a:uFillTx/>
+                <a:latin typeface="Arial"/>
+              </a:rPr>
+              <a:t>HR grants dated allowances per employee per request type</a:t>
+            </a:r>
+            <a:endParaRPr lang="en-US" sz="1550" b="0" u="none" strike="noStrike">
+              <a:solidFill>
+                <a:srgbClr val="000000"/>
+              </a:solidFill>
+              <a:effectLst/>
+              <a:uFillTx/>
+              <a:latin typeface="Arial"/>
+            </a:endParaRPr>
+          </a:p>
+        </p:txBody>
+      </p:sp>
+      <p:sp>
+        <p:nvSpPr>
+          <p:cNvPr id="89" name=""/>
+          <p:cNvSpPr txBox="1"/>
+          <p:nvPr/>
+        </p:nvSpPr>
+        <p:spPr>
+          <a:xfrm>
+            <a:off x="540000" y="2674800"/>
+            <a:ext cx="50400" cy="493200"/>
+          </a:xfrm>
+          <a:prstGeom prst="rect">
+            <a:avLst/>
+          </a:prstGeom>
+          <a:solidFill>
+            <a:srgbClr val="E6BF71"/>
+          </a:solidFill>
+          <a:ln w="0">
+            <a:noFill/>
+          </a:ln>
+        </p:spPr>
+        <p:txBody>
+          <a:bodyPr lIns="90000" tIns="45000" rIns="90000" bIns="45000" anchor="t">
+            <a:spAutoFit/>
+          </a:bodyPr>
+          <a:p>
+            <a:endParaRPr lang="en-US" sz="1800" b="0" u="none" strike="noStrike">
+              <a:solidFill>
+                <a:srgbClr val="000000"/>
+              </a:solidFill>
+              <a:effectLst/>
+              <a:uFillTx/>
+              <a:latin typeface="Arial"/>
+            </a:endParaRPr>
+          </a:p>
+        </p:txBody>
+      </p:sp>
+      <p:sp>
+        <p:nvSpPr>
+          <p:cNvPr id="90" name=""/>
+          <p:cNvSpPr txBox="1"/>
+          <p:nvPr/>
+        </p:nvSpPr>
+        <p:spPr>
+          <a:xfrm>
+            <a:off x="540000" y="2674800"/>
+            <a:ext cx="9000000" cy="493200"/>
+          </a:xfrm>
+          <a:prstGeom prst="rect">
+            <a:avLst/>
+          </a:prstGeom>
+          <a:solidFill>
+            <a:srgbClr val="FFFFFF"/>
+          </a:solidFill>
+          <a:ln w="7200">
+            <a:solidFill>
+              <a:srgbClr val="DFE9E4"/>
+            </a:solidFill>
+            <a:round/>
+          </a:ln>
+        </p:spPr>
+        <p:txBody>
+          <a:bodyPr lIns="198000" tIns="115200" rIns="126000" bIns="115200" anchor="ctr">
+            <a:normAutofit/>
+          </a:bodyPr>
+          <a:p>
+            <a:r>
+              <a:rPr lang="en-US" sz="1550" b="0" u="none" strike="noStrike">
+                <a:solidFill>
+                  <a:srgbClr val="1A2E2B"/>
+                </a:solidFill>
+                <a:effectLst/>
+                <a:uFillTx/>
+                <a:latin typeface="Arial"/>
+              </a:rPr>
+              <a:t>Reserve on submit → release on return/reject → settle on approve</a:t>
+            </a:r>
+            <a:endParaRPr lang="en-US" sz="1550" b="0" u="none" strike="noStrike">
+              <a:solidFill>
+                <a:srgbClr val="000000"/>
+              </a:solidFill>
+              <a:effectLst/>
+              <a:uFillTx/>
+              <a:latin typeface="Arial"/>
+            </a:endParaRPr>
+          </a:p>
+        </p:txBody>
+      </p:sp>
+      <p:sp>
+        <p:nvSpPr>
+          <p:cNvPr id="91" name=""/>
+          <p:cNvSpPr txBox="1"/>
+          <p:nvPr/>
+        </p:nvSpPr>
+        <p:spPr>
+          <a:xfrm>
+            <a:off x="540000" y="3319200"/>
+            <a:ext cx="50400" cy="342000"/>
+          </a:xfrm>
+          <a:prstGeom prst="rect">
+            <a:avLst/>
+          </a:prstGeom>
+          <a:solidFill>
+            <a:srgbClr val="E6BF71"/>
+          </a:solidFill>
+          <a:ln w="0">
+            <a:noFill/>
+          </a:ln>
+        </p:spPr>
+        <p:txBody>
+          <a:bodyPr lIns="90000" tIns="45000" rIns="90000" bIns="45000" anchor="t">
+            <a:spAutoFit/>
+          </a:bodyPr>
+          <a:p>
+            <a:endParaRPr lang="en-US" sz="1800" b="0" u="none" strike="noStrike">
+              <a:solidFill>
+                <a:srgbClr val="000000"/>
+              </a:solidFill>
+              <a:effectLst/>
+              <a:uFillTx/>
+              <a:latin typeface="Arial"/>
+            </a:endParaRPr>
+          </a:p>
+        </p:txBody>
+      </p:sp>
+      <p:sp>
+        <p:nvSpPr>
+          <p:cNvPr id="92" name=""/>
+          <p:cNvSpPr txBox="1"/>
+          <p:nvPr/>
+        </p:nvSpPr>
+        <p:spPr>
+          <a:xfrm>
+            <a:off x="540000" y="3264840"/>
+            <a:ext cx="9000000" cy="450360"/>
+          </a:xfrm>
+          <a:prstGeom prst="rect">
+            <a:avLst/>
+          </a:prstGeom>
+          <a:solidFill>
+            <a:srgbClr val="FFFFFF"/>
+          </a:solidFill>
+          <a:ln w="7200">
+            <a:solidFill>
+              <a:srgbClr val="DFE9E4"/>
+            </a:solidFill>
+            <a:round/>
+          </a:ln>
+        </p:spPr>
+        <p:txBody>
+          <a:bodyPr lIns="198000" tIns="115200" rIns="126000" bIns="115200" anchor="ctr">
+            <a:normAutofit/>
+          </a:bodyPr>
+          <a:p>
+            <a:r>
+              <a:rPr lang="en-US" sz="1550" b="0" u="none" strike="noStrike">
+                <a:solidFill>
+                  <a:srgbClr val="1A2E2B"/>
+                </a:solidFill>
+                <a:effectLst/>
+                <a:uFillTx/>
+                <a:latin typeface="Arial"/>
+              </a:rPr>
+              <a:t>Balances always reconcile; no overlapping grants</a:t>
+            </a:r>
+            <a:endParaRPr lang="en-US" sz="1550" b="0" u="none" strike="noStrike">
+              <a:solidFill>
+                <a:srgbClr val="000000"/>
+              </a:solidFill>
+              <a:effectLst/>
+              <a:uFillTx/>
+              <a:latin typeface="Arial"/>
+            </a:endParaRPr>
+          </a:p>
+        </p:txBody>
+      </p:sp>
+      <p:sp>
+        <p:nvSpPr>
+          <p:cNvPr id="93" name=""/>
+          <p:cNvSpPr txBox="1"/>
+          <p:nvPr/>
+        </p:nvSpPr>
+        <p:spPr>
+          <a:xfrm>
+            <a:off x="540000" y="3812400"/>
+            <a:ext cx="50400" cy="493200"/>
+          </a:xfrm>
+          <a:prstGeom prst="rect">
+            <a:avLst/>
+          </a:prstGeom>
+          <a:solidFill>
+            <a:srgbClr val="E6BF71"/>
+          </a:solidFill>
+          <a:ln w="0">
+            <a:noFill/>
+          </a:ln>
+        </p:spPr>
+        <p:txBody>
+          <a:bodyPr lIns="90000" tIns="45000" rIns="90000" bIns="45000" anchor="t">
+            <a:spAutoFit/>
+          </a:bodyPr>
+          <a:p>
+            <a:endParaRPr lang="en-US" sz="1800" b="0" u="none" strike="noStrike">
+              <a:solidFill>
+                <a:srgbClr val="000000"/>
+              </a:solidFill>
+              <a:effectLst/>
+              <a:uFillTx/>
+              <a:latin typeface="Arial"/>
+            </a:endParaRPr>
+          </a:p>
+        </p:txBody>
+      </p:sp>
+      <p:sp>
+        <p:nvSpPr>
+          <p:cNvPr id="94" name=""/>
+          <p:cNvSpPr txBox="1"/>
+          <p:nvPr/>
+        </p:nvSpPr>
+        <p:spPr>
+          <a:xfrm>
+            <a:off x="540000" y="3812400"/>
+            <a:ext cx="9000000" cy="493200"/>
+          </a:xfrm>
+          <a:prstGeom prst="rect">
+            <a:avLst/>
+          </a:prstGeom>
+          <a:solidFill>
+            <a:srgbClr val="FFFFFF"/>
+          </a:solidFill>
+          <a:ln w="7200">
+            <a:solidFill>
+              <a:srgbClr val="DFE9E4"/>
+            </a:solidFill>
+            <a:round/>
+          </a:ln>
+        </p:spPr>
+        <p:txBody>
+          <a:bodyPr lIns="198000" tIns="115200" rIns="126000" bIns="115200" anchor="ctr">
+            <a:normAutofit/>
+          </a:bodyPr>
+          <a:p>
+            <a:r>
+              <a:rPr lang="en-US" sz="1550" b="0" u="none" strike="noStrike">
+                <a:solidFill>
+                  <a:srgbClr val="1A2E2B"/>
+                </a:solidFill>
+                <a:effectLst/>
+                <a:uFillTx/>
+                <a:latin typeface="Arial"/>
+              </a:rPr>
+              <a:t>Early-leave billing: 15-minute blocks, 30-minute minimum</a:t>
+            </a:r>
+            <a:endParaRPr lang="en-US" sz="1550" b="0" u="none" strike="noStrike">
               <a:solidFill>
                 <a:srgbClr val="000000"/>
               </a:solidFill>
@@ -4225,14 +4371,14 @@
       </p:grpSpPr>
       <p:sp>
         <p:nvSpPr>
-          <p:cNvPr id="85" name=""/>
-          <p:cNvSpPr txBox="1"/>
-          <p:nvPr/>
-        </p:nvSpPr>
-        <p:spPr>
-          <a:xfrm>
-            <a:off x="540000" y="324000"/>
-            <a:ext cx="9000000" cy="576000"/>
+          <p:cNvPr id="95" name=""/>
+          <p:cNvSpPr txBox="1"/>
+          <p:nvPr/>
+        </p:nvSpPr>
+        <p:spPr>
+          <a:xfrm>
+            <a:off x="540000" y="252000"/>
+            <a:ext cx="9000000" cy="504000"/>
           </a:xfrm>
           <a:prstGeom prst="rect">
             <a:avLst/>
@@ -4256,7 +4402,7 @@
                 <a:uFillTx/>
                 <a:latin typeface="Arial"/>
               </a:rPr>
-              <a:t>Timesheets — Per-Day Submission</a:t>
+              <a:t>Allocation Grants</a:t>
             </a:r>
             <a:endParaRPr lang="en-US" sz="2600" b="0" u="none" strike="noStrike">
               <a:solidFill>
@@ -4271,13 +4417,13 @@
       </p:sp>
       <p:sp>
         <p:nvSpPr>
-          <p:cNvPr id="86" name=""/>
-          <p:cNvSpPr txBox="1"/>
-          <p:nvPr/>
-        </p:nvSpPr>
-        <p:spPr>
-          <a:xfrm>
-            <a:off x="540000" y="900000"/>
+          <p:cNvPr id="96" name=""/>
+          <p:cNvSpPr txBox="1"/>
+          <p:nvPr/>
+        </p:nvSpPr>
+        <p:spPr>
+          <a:xfrm>
+            <a:off x="540000" y="774000"/>
             <a:ext cx="1440000" cy="43200"/>
           </a:xfrm>
           <a:prstGeom prst="rect">
@@ -4306,23 +4452,45 @@
           </a:p>
         </p:txBody>
       </p:sp>
-      <p:sp>
-        <p:nvSpPr>
-          <p:cNvPr id="87" name=""/>
-          <p:cNvSpPr txBox="1"/>
-          <p:nvPr/>
-        </p:nvSpPr>
-        <p:spPr>
-          <a:xfrm>
-            <a:off x="540000" y="1859400"/>
-            <a:ext cx="50400" cy="342000"/>
-          </a:xfrm>
-          <a:prstGeom prst="rect">
-            <a:avLst/>
-          </a:prstGeom>
-          <a:solidFill>
-            <a:srgbClr val="E6BF71"/>
-          </a:solidFill>
+      <p:pic>
+        <p:nvPicPr>
+          <p:cNvPr id="97" name=""/>
+          <p:cNvPicPr/>
+          <p:nvPr/>
+        </p:nvPicPr>
+        <p:blipFill>
+          <a:blip r:embed="rId1"/>
+          <a:stretch/>
+        </p:blipFill>
+        <p:spPr>
+          <a:xfrm>
+            <a:off x="1814400" y="1008000"/>
+            <a:ext cx="6451200" cy="4032000"/>
+          </a:xfrm>
+          <a:prstGeom prst="rect">
+            <a:avLst/>
+          </a:prstGeom>
+          <a:noFill/>
+          <a:ln w="0">
+            <a:noFill/>
+          </a:ln>
+        </p:spPr>
+      </p:pic>
+      <p:sp>
+        <p:nvSpPr>
+          <p:cNvPr id="98" name=""/>
+          <p:cNvSpPr txBox="1"/>
+          <p:nvPr/>
+        </p:nvSpPr>
+        <p:spPr>
+          <a:xfrm>
+            <a:off x="540000" y="5148000"/>
+            <a:ext cx="9000000" cy="360000"/>
+          </a:xfrm>
+          <a:prstGeom prst="rect">
+            <a:avLst/>
+          </a:prstGeom>
+          <a:noFill/>
           <a:ln w="0">
             <a:noFill/>
           </a:ln>
@@ -4332,410 +4500,18 @@
             <a:spAutoFit/>
           </a:bodyPr>
           <a:p>
-            <a:endParaRPr lang="en-US" sz="1800" b="0" u="none" strike="noStrike">
-              <a:solidFill>
-                <a:srgbClr val="000000"/>
-              </a:solidFill>
-              <a:effectLst/>
-              <a:uFillTx/>
-              <a:latin typeface="Arial"/>
-            </a:endParaRPr>
-          </a:p>
-        </p:txBody>
-      </p:sp>
-      <p:sp>
-        <p:nvSpPr>
-          <p:cNvPr id="88" name=""/>
-          <p:cNvSpPr txBox="1"/>
-          <p:nvPr/>
-        </p:nvSpPr>
-        <p:spPr>
-          <a:xfrm>
-            <a:off x="540000" y="1805040"/>
-            <a:ext cx="9000000" cy="450360"/>
-          </a:xfrm>
-          <a:prstGeom prst="rect">
-            <a:avLst/>
-          </a:prstGeom>
-          <a:solidFill>
-            <a:srgbClr val="FFFFFF"/>
-          </a:solidFill>
-          <a:ln w="7200">
-            <a:solidFill>
-              <a:srgbClr val="DFE9E4"/>
-            </a:solidFill>
-            <a:round/>
-          </a:ln>
-        </p:spPr>
-        <p:txBody>
-          <a:bodyPr lIns="198000" tIns="115200" rIns="126000" bIns="115200" anchor="ctr">
-            <a:normAutofit/>
-          </a:bodyPr>
-          <a:p>
-            <a:r>
-              <a:rPr lang="en-US" sz="1550" b="0" u="none" strike="noStrike">
-                <a:solidFill>
-                  <a:srgbClr val="1A2E2B"/>
-                </a:solidFill>
-                <a:effectLst/>
-                <a:uFillTx/>
-                <a:latin typeface="Arial"/>
-              </a:rPr>
-              <a:t>Weekly sheet; each day submitted independently</a:t>
-            </a:r>
-            <a:endParaRPr lang="en-US" sz="1550" b="0" u="none" strike="noStrike">
-              <a:solidFill>
-                <a:srgbClr val="000000"/>
-              </a:solidFill>
-              <a:effectLst/>
-              <a:uFillTx/>
-              <a:latin typeface="Arial"/>
-            </a:endParaRPr>
-          </a:p>
-        </p:txBody>
-      </p:sp>
-      <p:sp>
-        <p:nvSpPr>
-          <p:cNvPr id="89" name=""/>
-          <p:cNvSpPr txBox="1"/>
-          <p:nvPr/>
-        </p:nvSpPr>
-        <p:spPr>
-          <a:xfrm>
-            <a:off x="540000" y="2352600"/>
-            <a:ext cx="50400" cy="493200"/>
-          </a:xfrm>
-          <a:prstGeom prst="rect">
-            <a:avLst/>
-          </a:prstGeom>
-          <a:solidFill>
-            <a:srgbClr val="E6BF71"/>
-          </a:solidFill>
-          <a:ln w="0">
-            <a:noFill/>
-          </a:ln>
-        </p:spPr>
-        <p:txBody>
-          <a:bodyPr lIns="90000" tIns="45000" rIns="90000" bIns="45000" anchor="t">
-            <a:spAutoFit/>
-          </a:bodyPr>
-          <a:p>
-            <a:endParaRPr lang="en-US" sz="1800" b="0" u="none" strike="noStrike">
-              <a:solidFill>
-                <a:srgbClr val="000000"/>
-              </a:solidFill>
-              <a:effectLst/>
-              <a:uFillTx/>
-              <a:latin typeface="Arial"/>
-            </a:endParaRPr>
-          </a:p>
-        </p:txBody>
-      </p:sp>
-      <p:sp>
-        <p:nvSpPr>
-          <p:cNvPr id="90" name=""/>
-          <p:cNvSpPr txBox="1"/>
-          <p:nvPr/>
-        </p:nvSpPr>
-        <p:spPr>
-          <a:xfrm>
-            <a:off x="540000" y="2352600"/>
-            <a:ext cx="9000000" cy="493200"/>
-          </a:xfrm>
-          <a:prstGeom prst="rect">
-            <a:avLst/>
-          </a:prstGeom>
-          <a:solidFill>
-            <a:srgbClr val="FFFFFF"/>
-          </a:solidFill>
-          <a:ln w="7200">
-            <a:solidFill>
-              <a:srgbClr val="DFE9E4"/>
-            </a:solidFill>
-            <a:round/>
-          </a:ln>
-        </p:spPr>
-        <p:txBody>
-          <a:bodyPr lIns="198000" tIns="115200" rIns="126000" bIns="115200" anchor="ctr">
-            <a:normAutofit/>
-          </a:bodyPr>
-          <a:p>
-            <a:r>
-              <a:rPr lang="en-US" sz="1550" b="0" u="none" strike="noStrike">
-                <a:solidFill>
-                  <a:srgbClr val="1A2E2B"/>
-                </a:solidFill>
-                <a:effectLst/>
-                <a:uFillTx/>
-                <a:latin typeface="Arial"/>
-              </a:rPr>
-              <a:t>Start/end + unpaid breaks, overnight split, no future work</a:t>
-            </a:r>
-            <a:endParaRPr lang="en-US" sz="1550" b="0" u="none" strike="noStrike">
-              <a:solidFill>
-                <a:srgbClr val="000000"/>
-              </a:solidFill>
-              <a:effectLst/>
-              <a:uFillTx/>
-              <a:latin typeface="Arial"/>
-            </a:endParaRPr>
-          </a:p>
-        </p:txBody>
-      </p:sp>
-      <p:sp>
-        <p:nvSpPr>
-          <p:cNvPr id="91" name=""/>
-          <p:cNvSpPr txBox="1"/>
-          <p:nvPr/>
-        </p:nvSpPr>
-        <p:spPr>
-          <a:xfrm>
-            <a:off x="540000" y="2997000"/>
-            <a:ext cx="50400" cy="493200"/>
-          </a:xfrm>
-          <a:prstGeom prst="rect">
-            <a:avLst/>
-          </a:prstGeom>
-          <a:solidFill>
-            <a:srgbClr val="E6BF71"/>
-          </a:solidFill>
-          <a:ln w="0">
-            <a:noFill/>
-          </a:ln>
-        </p:spPr>
-        <p:txBody>
-          <a:bodyPr lIns="90000" tIns="45000" rIns="90000" bIns="45000" anchor="t">
-            <a:spAutoFit/>
-          </a:bodyPr>
-          <a:p>
-            <a:endParaRPr lang="en-US" sz="1800" b="0" u="none" strike="noStrike">
-              <a:solidFill>
-                <a:srgbClr val="000000"/>
-              </a:solidFill>
-              <a:effectLst/>
-              <a:uFillTx/>
-              <a:latin typeface="Arial"/>
-            </a:endParaRPr>
-          </a:p>
-        </p:txBody>
-      </p:sp>
-      <p:sp>
-        <p:nvSpPr>
-          <p:cNvPr id="92" name=""/>
-          <p:cNvSpPr txBox="1"/>
-          <p:nvPr/>
-        </p:nvSpPr>
-        <p:spPr>
-          <a:xfrm>
-            <a:off x="540000" y="2997000"/>
-            <a:ext cx="9000000" cy="493200"/>
-          </a:xfrm>
-          <a:prstGeom prst="rect">
-            <a:avLst/>
-          </a:prstGeom>
-          <a:solidFill>
-            <a:srgbClr val="FFFFFF"/>
-          </a:solidFill>
-          <a:ln w="7200">
-            <a:solidFill>
-              <a:srgbClr val="DFE9E4"/>
-            </a:solidFill>
-            <a:round/>
-          </a:ln>
-        </p:spPr>
-        <p:txBody>
-          <a:bodyPr lIns="198000" tIns="115200" rIns="126000" bIns="115200" anchor="ctr">
-            <a:normAutofit/>
-          </a:bodyPr>
-          <a:p>
-            <a:r>
-              <a:rPr lang="en-US" sz="1550" b="0" u="none" strike="noStrike">
-                <a:solidFill>
-                  <a:srgbClr val="1A2E2B"/>
-                </a:solidFill>
-                <a:effectLst/>
-                <a:uFillTx/>
-                <a:latin typeface="Arial"/>
-              </a:rPr>
-              <a:t>Outside-window entries flagged — employee reason required</a:t>
-            </a:r>
-            <a:endParaRPr lang="en-US" sz="1550" b="0" u="none" strike="noStrike">
-              <a:solidFill>
-                <a:srgbClr val="000000"/>
-              </a:solidFill>
-              <a:effectLst/>
-              <a:uFillTx/>
-              <a:latin typeface="Arial"/>
-            </a:endParaRPr>
-          </a:p>
-        </p:txBody>
-      </p:sp>
-      <p:sp>
-        <p:nvSpPr>
-          <p:cNvPr id="93" name=""/>
-          <p:cNvSpPr txBox="1"/>
-          <p:nvPr/>
-        </p:nvSpPr>
-        <p:spPr>
-          <a:xfrm>
-            <a:off x="540000" y="3641400"/>
-            <a:ext cx="50400" cy="342000"/>
-          </a:xfrm>
-          <a:prstGeom prst="rect">
-            <a:avLst/>
-          </a:prstGeom>
-          <a:solidFill>
-            <a:srgbClr val="E6BF71"/>
-          </a:solidFill>
-          <a:ln w="0">
-            <a:noFill/>
-          </a:ln>
-        </p:spPr>
-        <p:txBody>
-          <a:bodyPr lIns="90000" tIns="45000" rIns="90000" bIns="45000" anchor="t">
-            <a:spAutoFit/>
-          </a:bodyPr>
-          <a:p>
-            <a:endParaRPr lang="en-US" sz="1800" b="0" u="none" strike="noStrike">
-              <a:solidFill>
-                <a:srgbClr val="000000"/>
-              </a:solidFill>
-              <a:effectLst/>
-              <a:uFillTx/>
-              <a:latin typeface="Arial"/>
-            </a:endParaRPr>
-          </a:p>
-        </p:txBody>
-      </p:sp>
-      <p:sp>
-        <p:nvSpPr>
-          <p:cNvPr id="94" name=""/>
-          <p:cNvSpPr txBox="1"/>
-          <p:nvPr/>
-        </p:nvSpPr>
-        <p:spPr>
-          <a:xfrm>
-            <a:off x="540000" y="3587040"/>
-            <a:ext cx="9000000" cy="450360"/>
-          </a:xfrm>
-          <a:prstGeom prst="rect">
-            <a:avLst/>
-          </a:prstGeom>
-          <a:solidFill>
-            <a:srgbClr val="FFFFFF"/>
-          </a:solidFill>
-          <a:ln w="7200">
-            <a:solidFill>
-              <a:srgbClr val="DFE9E4"/>
-            </a:solidFill>
-            <a:round/>
-          </a:ln>
-        </p:spPr>
-        <p:txBody>
-          <a:bodyPr lIns="198000" tIns="115200" rIns="126000" bIns="115200" anchor="ctr">
-            <a:normAutofit/>
-          </a:bodyPr>
-          <a:p>
-            <a:r>
-              <a:rPr lang="en-US" sz="1550" b="0" u="none" strike="noStrike">
-                <a:solidFill>
-                  <a:srgbClr val="1A2E2B"/>
-                </a:solidFill>
-                <a:effectLst/>
-                <a:uFillTx/>
-                <a:latin typeface="Arial"/>
-              </a:rPr>
-              <a:t>Two-stage review always: manager → HR; HR-only reopen</a:t>
-            </a:r>
-            <a:endParaRPr lang="en-US" sz="1550" b="0" u="none" strike="noStrike">
-              <a:solidFill>
-                <a:srgbClr val="000000"/>
-              </a:solidFill>
-              <a:effectLst/>
-              <a:uFillTx/>
-              <a:latin typeface="Arial"/>
-            </a:endParaRPr>
-          </a:p>
-        </p:txBody>
-      </p:sp>
-      <p:sp>
-        <p:nvSpPr>
-          <p:cNvPr id="95" name=""/>
-          <p:cNvSpPr txBox="1"/>
-          <p:nvPr/>
-        </p:nvSpPr>
-        <p:spPr>
-          <a:xfrm>
-            <a:off x="540000" y="4134600"/>
-            <a:ext cx="50400" cy="342000"/>
-          </a:xfrm>
-          <a:prstGeom prst="rect">
-            <a:avLst/>
-          </a:prstGeom>
-          <a:solidFill>
-            <a:srgbClr val="E6BF71"/>
-          </a:solidFill>
-          <a:ln w="0">
-            <a:noFill/>
-          </a:ln>
-        </p:spPr>
-        <p:txBody>
-          <a:bodyPr lIns="90000" tIns="45000" rIns="90000" bIns="45000" anchor="t">
-            <a:spAutoFit/>
-          </a:bodyPr>
-          <a:p>
-            <a:endParaRPr lang="en-US" sz="1800" b="0" u="none" strike="noStrike">
-              <a:solidFill>
-                <a:srgbClr val="000000"/>
-              </a:solidFill>
-              <a:effectLst/>
-              <a:uFillTx/>
-              <a:latin typeface="Arial"/>
-            </a:endParaRPr>
-          </a:p>
-        </p:txBody>
-      </p:sp>
-      <p:sp>
-        <p:nvSpPr>
-          <p:cNvPr id="96" name=""/>
-          <p:cNvSpPr txBox="1"/>
-          <p:nvPr/>
-        </p:nvSpPr>
-        <p:spPr>
-          <a:xfrm>
-            <a:off x="540000" y="4080240"/>
-            <a:ext cx="9000000" cy="450360"/>
-          </a:xfrm>
-          <a:prstGeom prst="rect">
-            <a:avLst/>
-          </a:prstGeom>
-          <a:solidFill>
-            <a:srgbClr val="FFFFFF"/>
-          </a:solidFill>
-          <a:ln w="7200">
-            <a:solidFill>
-              <a:srgbClr val="DFE9E4"/>
-            </a:solidFill>
-            <a:round/>
-          </a:ln>
-        </p:spPr>
-        <p:txBody>
-          <a:bodyPr lIns="198000" tIns="115200" rIns="126000" bIns="115200" anchor="ctr">
-            <a:normAutofit/>
-          </a:bodyPr>
-          <a:p>
-            <a:r>
-              <a:rPr lang="en-US" sz="1550" b="0" u="none" strike="noStrike">
-                <a:solidFill>
-                  <a:srgbClr val="1A2E2B"/>
-                </a:solidFill>
-                <a:effectLst/>
-                <a:uFillTx/>
-                <a:latin typeface="Arial"/>
-              </a:rPr>
-              <a:t>Punch widget: real check-in/out from the topbar</a:t>
-            </a:r>
-            <a:endParaRPr lang="en-US" sz="1550" b="0" u="none" strike="noStrike">
+            <a:r>
+              <a:rPr lang="en-US" sz="1100" b="0" i="1" u="none" strike="noStrike">
+                <a:solidFill>
+                  <a:srgbClr val="4A7A6F"/>
+                </a:solidFill>
+                <a:effectLst/>
+                <a:uFillTx/>
+                <a:latin typeface="Arial"/>
+              </a:rPr>
+              <a:t>Granted / reserved / used / remaining — visible per employee and type.</a:t>
+            </a:r>
+            <a:endParaRPr lang="en-US" sz="1100" b="0" u="none" strike="noStrike">
               <a:solidFill>
                 <a:srgbClr val="000000"/>
               </a:solidFill>
@@ -4785,14 +4561,14 @@
       </p:grpSpPr>
       <p:sp>
         <p:nvSpPr>
-          <p:cNvPr id="97" name=""/>
-          <p:cNvSpPr txBox="1"/>
-          <p:nvPr/>
-        </p:nvSpPr>
-        <p:spPr>
-          <a:xfrm>
-            <a:off x="540000" y="252000"/>
-            <a:ext cx="9000000" cy="504000"/>
+          <p:cNvPr id="99" name=""/>
+          <p:cNvSpPr txBox="1"/>
+          <p:nvPr/>
+        </p:nvSpPr>
+        <p:spPr>
+          <a:xfrm>
+            <a:off x="540000" y="324000"/>
+            <a:ext cx="9000000" cy="576000"/>
           </a:xfrm>
           <a:prstGeom prst="rect">
             <a:avLst/>
@@ -4816,7 +4592,7 @@
                 <a:uFillTx/>
                 <a:latin typeface="Arial"/>
               </a:rPr>
-              <a:t>The Week at a Glance</a:t>
+              <a:t>Timesheets — Per-Day Submission</a:t>
             </a:r>
             <a:endParaRPr lang="en-US" sz="2600" b="0" u="none" strike="noStrike">
               <a:solidFill>
@@ -4831,13 +4607,13 @@
       </p:sp>
       <p:sp>
         <p:nvSpPr>
-          <p:cNvPr id="98" name=""/>
-          <p:cNvSpPr txBox="1"/>
-          <p:nvPr/>
-        </p:nvSpPr>
-        <p:spPr>
-          <a:xfrm>
-            <a:off x="540000" y="774000"/>
+          <p:cNvPr id="100" name=""/>
+          <p:cNvSpPr txBox="1"/>
+          <p:nvPr/>
+        </p:nvSpPr>
+        <p:spPr>
+          <a:xfrm>
+            <a:off x="540000" y="900000"/>
             <a:ext cx="1440000" cy="43200"/>
           </a:xfrm>
           <a:prstGeom prst="rect">
@@ -4866,45 +4642,23 @@
           </a:p>
         </p:txBody>
       </p:sp>
-      <p:pic>
-        <p:nvPicPr>
-          <p:cNvPr id="99" name=""/>
-          <p:cNvPicPr/>
-          <p:nvPr/>
-        </p:nvPicPr>
-        <p:blipFill>
-          <a:blip r:embed="rId1"/>
-          <a:stretch/>
-        </p:blipFill>
-        <p:spPr>
-          <a:xfrm>
-            <a:off x="1814400" y="1008000"/>
-            <a:ext cx="6451200" cy="4032000"/>
-          </a:xfrm>
-          <a:prstGeom prst="rect">
-            <a:avLst/>
-          </a:prstGeom>
-          <a:noFill/>
-          <a:ln w="0">
-            <a:noFill/>
-          </a:ln>
-        </p:spPr>
-      </p:pic>
-      <p:sp>
-        <p:nvSpPr>
-          <p:cNvPr id="100" name=""/>
-          <p:cNvSpPr txBox="1"/>
-          <p:nvPr/>
-        </p:nvSpPr>
-        <p:spPr>
-          <a:xfrm>
-            <a:off x="540000" y="5148000"/>
-            <a:ext cx="9000000" cy="360000"/>
-          </a:xfrm>
-          <a:prstGeom prst="rect">
-            <a:avLst/>
-          </a:prstGeom>
-          <a:noFill/>
+      <p:sp>
+        <p:nvSpPr>
+          <p:cNvPr id="101" name=""/>
+          <p:cNvSpPr txBox="1"/>
+          <p:nvPr/>
+        </p:nvSpPr>
+        <p:spPr>
+          <a:xfrm>
+            <a:off x="540000" y="1859400"/>
+            <a:ext cx="50400" cy="342000"/>
+          </a:xfrm>
+          <a:prstGeom prst="rect">
+            <a:avLst/>
+          </a:prstGeom>
+          <a:solidFill>
+            <a:srgbClr val="E6BF71"/>
+          </a:solidFill>
           <a:ln w="0">
             <a:noFill/>
           </a:ln>
@@ -4914,18 +4668,410 @@
             <a:spAutoFit/>
           </a:bodyPr>
           <a:p>
-            <a:r>
-              <a:rPr lang="en-US" sz="1100" b="0" i="1" u="none" strike="noStrike">
-                <a:solidFill>
-                  <a:srgbClr val="4A7A6F"/>
-                </a:solidFill>
-                <a:effectLst/>
-                <a:uFillTx/>
-                <a:latin typeface="Arial"/>
-              </a:rPr>
-              <a:t>One row per day — status, entries, totals, actions; today highlighted.</a:t>
-            </a:r>
-            <a:endParaRPr lang="en-US" sz="1100" b="0" u="none" strike="noStrike">
+            <a:endParaRPr lang="en-US" sz="1800" b="0" u="none" strike="noStrike">
+              <a:solidFill>
+                <a:srgbClr val="000000"/>
+              </a:solidFill>
+              <a:effectLst/>
+              <a:uFillTx/>
+              <a:latin typeface="Arial"/>
+            </a:endParaRPr>
+          </a:p>
+        </p:txBody>
+      </p:sp>
+      <p:sp>
+        <p:nvSpPr>
+          <p:cNvPr id="102" name=""/>
+          <p:cNvSpPr txBox="1"/>
+          <p:nvPr/>
+        </p:nvSpPr>
+        <p:spPr>
+          <a:xfrm>
+            <a:off x="540000" y="1805040"/>
+            <a:ext cx="9000000" cy="450360"/>
+          </a:xfrm>
+          <a:prstGeom prst="rect">
+            <a:avLst/>
+          </a:prstGeom>
+          <a:solidFill>
+            <a:srgbClr val="FFFFFF"/>
+          </a:solidFill>
+          <a:ln w="7200">
+            <a:solidFill>
+              <a:srgbClr val="DFE9E4"/>
+            </a:solidFill>
+            <a:round/>
+          </a:ln>
+        </p:spPr>
+        <p:txBody>
+          <a:bodyPr lIns="198000" tIns="115200" rIns="126000" bIns="115200" anchor="ctr">
+            <a:normAutofit/>
+          </a:bodyPr>
+          <a:p>
+            <a:r>
+              <a:rPr lang="en-US" sz="1550" b="0" u="none" strike="noStrike">
+                <a:solidFill>
+                  <a:srgbClr val="1A2E2B"/>
+                </a:solidFill>
+                <a:effectLst/>
+                <a:uFillTx/>
+                <a:latin typeface="Arial"/>
+              </a:rPr>
+              <a:t>Weekly sheet; each day submitted independently</a:t>
+            </a:r>
+            <a:endParaRPr lang="en-US" sz="1550" b="0" u="none" strike="noStrike">
+              <a:solidFill>
+                <a:srgbClr val="000000"/>
+              </a:solidFill>
+              <a:effectLst/>
+              <a:uFillTx/>
+              <a:latin typeface="Arial"/>
+            </a:endParaRPr>
+          </a:p>
+        </p:txBody>
+      </p:sp>
+      <p:sp>
+        <p:nvSpPr>
+          <p:cNvPr id="103" name=""/>
+          <p:cNvSpPr txBox="1"/>
+          <p:nvPr/>
+        </p:nvSpPr>
+        <p:spPr>
+          <a:xfrm>
+            <a:off x="540000" y="2352600"/>
+            <a:ext cx="50400" cy="493200"/>
+          </a:xfrm>
+          <a:prstGeom prst="rect">
+            <a:avLst/>
+          </a:prstGeom>
+          <a:solidFill>
+            <a:srgbClr val="E6BF71"/>
+          </a:solidFill>
+          <a:ln w="0">
+            <a:noFill/>
+          </a:ln>
+        </p:spPr>
+        <p:txBody>
+          <a:bodyPr lIns="90000" tIns="45000" rIns="90000" bIns="45000" anchor="t">
+            <a:spAutoFit/>
+          </a:bodyPr>
+          <a:p>
+            <a:endParaRPr lang="en-US" sz="1800" b="0" u="none" strike="noStrike">
+              <a:solidFill>
+                <a:srgbClr val="000000"/>
+              </a:solidFill>
+              <a:effectLst/>
+              <a:uFillTx/>
+              <a:latin typeface="Arial"/>
+            </a:endParaRPr>
+          </a:p>
+        </p:txBody>
+      </p:sp>
+      <p:sp>
+        <p:nvSpPr>
+          <p:cNvPr id="104" name=""/>
+          <p:cNvSpPr txBox="1"/>
+          <p:nvPr/>
+        </p:nvSpPr>
+        <p:spPr>
+          <a:xfrm>
+            <a:off x="540000" y="2352600"/>
+            <a:ext cx="9000000" cy="493200"/>
+          </a:xfrm>
+          <a:prstGeom prst="rect">
+            <a:avLst/>
+          </a:prstGeom>
+          <a:solidFill>
+            <a:srgbClr val="FFFFFF"/>
+          </a:solidFill>
+          <a:ln w="7200">
+            <a:solidFill>
+              <a:srgbClr val="DFE9E4"/>
+            </a:solidFill>
+            <a:round/>
+          </a:ln>
+        </p:spPr>
+        <p:txBody>
+          <a:bodyPr lIns="198000" tIns="115200" rIns="126000" bIns="115200" anchor="ctr">
+            <a:normAutofit/>
+          </a:bodyPr>
+          <a:p>
+            <a:r>
+              <a:rPr lang="en-US" sz="1550" b="0" u="none" strike="noStrike">
+                <a:solidFill>
+                  <a:srgbClr val="1A2E2B"/>
+                </a:solidFill>
+                <a:effectLst/>
+                <a:uFillTx/>
+                <a:latin typeface="Arial"/>
+              </a:rPr>
+              <a:t>Start/end + unpaid breaks, overnight split, no future work</a:t>
+            </a:r>
+            <a:endParaRPr lang="en-US" sz="1550" b="0" u="none" strike="noStrike">
+              <a:solidFill>
+                <a:srgbClr val="000000"/>
+              </a:solidFill>
+              <a:effectLst/>
+              <a:uFillTx/>
+              <a:latin typeface="Arial"/>
+            </a:endParaRPr>
+          </a:p>
+        </p:txBody>
+      </p:sp>
+      <p:sp>
+        <p:nvSpPr>
+          <p:cNvPr id="105" name=""/>
+          <p:cNvSpPr txBox="1"/>
+          <p:nvPr/>
+        </p:nvSpPr>
+        <p:spPr>
+          <a:xfrm>
+            <a:off x="540000" y="2997000"/>
+            <a:ext cx="50400" cy="493200"/>
+          </a:xfrm>
+          <a:prstGeom prst="rect">
+            <a:avLst/>
+          </a:prstGeom>
+          <a:solidFill>
+            <a:srgbClr val="E6BF71"/>
+          </a:solidFill>
+          <a:ln w="0">
+            <a:noFill/>
+          </a:ln>
+        </p:spPr>
+        <p:txBody>
+          <a:bodyPr lIns="90000" tIns="45000" rIns="90000" bIns="45000" anchor="t">
+            <a:spAutoFit/>
+          </a:bodyPr>
+          <a:p>
+            <a:endParaRPr lang="en-US" sz="1800" b="0" u="none" strike="noStrike">
+              <a:solidFill>
+                <a:srgbClr val="000000"/>
+              </a:solidFill>
+              <a:effectLst/>
+              <a:uFillTx/>
+              <a:latin typeface="Arial"/>
+            </a:endParaRPr>
+          </a:p>
+        </p:txBody>
+      </p:sp>
+      <p:sp>
+        <p:nvSpPr>
+          <p:cNvPr id="106" name=""/>
+          <p:cNvSpPr txBox="1"/>
+          <p:nvPr/>
+        </p:nvSpPr>
+        <p:spPr>
+          <a:xfrm>
+            <a:off x="540000" y="2997000"/>
+            <a:ext cx="9000000" cy="493200"/>
+          </a:xfrm>
+          <a:prstGeom prst="rect">
+            <a:avLst/>
+          </a:prstGeom>
+          <a:solidFill>
+            <a:srgbClr val="FFFFFF"/>
+          </a:solidFill>
+          <a:ln w="7200">
+            <a:solidFill>
+              <a:srgbClr val="DFE9E4"/>
+            </a:solidFill>
+            <a:round/>
+          </a:ln>
+        </p:spPr>
+        <p:txBody>
+          <a:bodyPr lIns="198000" tIns="115200" rIns="126000" bIns="115200" anchor="ctr">
+            <a:normAutofit/>
+          </a:bodyPr>
+          <a:p>
+            <a:r>
+              <a:rPr lang="en-US" sz="1550" b="0" u="none" strike="noStrike">
+                <a:solidFill>
+                  <a:srgbClr val="1A2E2B"/>
+                </a:solidFill>
+                <a:effectLst/>
+                <a:uFillTx/>
+                <a:latin typeface="Arial"/>
+              </a:rPr>
+              <a:t>Outside-window entries flagged — employee reason required</a:t>
+            </a:r>
+            <a:endParaRPr lang="en-US" sz="1550" b="0" u="none" strike="noStrike">
+              <a:solidFill>
+                <a:srgbClr val="000000"/>
+              </a:solidFill>
+              <a:effectLst/>
+              <a:uFillTx/>
+              <a:latin typeface="Arial"/>
+            </a:endParaRPr>
+          </a:p>
+        </p:txBody>
+      </p:sp>
+      <p:sp>
+        <p:nvSpPr>
+          <p:cNvPr id="107" name=""/>
+          <p:cNvSpPr txBox="1"/>
+          <p:nvPr/>
+        </p:nvSpPr>
+        <p:spPr>
+          <a:xfrm>
+            <a:off x="540000" y="3641400"/>
+            <a:ext cx="50400" cy="342000"/>
+          </a:xfrm>
+          <a:prstGeom prst="rect">
+            <a:avLst/>
+          </a:prstGeom>
+          <a:solidFill>
+            <a:srgbClr val="E6BF71"/>
+          </a:solidFill>
+          <a:ln w="0">
+            <a:noFill/>
+          </a:ln>
+        </p:spPr>
+        <p:txBody>
+          <a:bodyPr lIns="90000" tIns="45000" rIns="90000" bIns="45000" anchor="t">
+            <a:spAutoFit/>
+          </a:bodyPr>
+          <a:p>
+            <a:endParaRPr lang="en-US" sz="1800" b="0" u="none" strike="noStrike">
+              <a:solidFill>
+                <a:srgbClr val="000000"/>
+              </a:solidFill>
+              <a:effectLst/>
+              <a:uFillTx/>
+              <a:latin typeface="Arial"/>
+            </a:endParaRPr>
+          </a:p>
+        </p:txBody>
+      </p:sp>
+      <p:sp>
+        <p:nvSpPr>
+          <p:cNvPr id="108" name=""/>
+          <p:cNvSpPr txBox="1"/>
+          <p:nvPr/>
+        </p:nvSpPr>
+        <p:spPr>
+          <a:xfrm>
+            <a:off x="540000" y="3587040"/>
+            <a:ext cx="9000000" cy="450360"/>
+          </a:xfrm>
+          <a:prstGeom prst="rect">
+            <a:avLst/>
+          </a:prstGeom>
+          <a:solidFill>
+            <a:srgbClr val="FFFFFF"/>
+          </a:solidFill>
+          <a:ln w="7200">
+            <a:solidFill>
+              <a:srgbClr val="DFE9E4"/>
+            </a:solidFill>
+            <a:round/>
+          </a:ln>
+        </p:spPr>
+        <p:txBody>
+          <a:bodyPr lIns="198000" tIns="115200" rIns="126000" bIns="115200" anchor="ctr">
+            <a:normAutofit/>
+          </a:bodyPr>
+          <a:p>
+            <a:r>
+              <a:rPr lang="en-US" sz="1550" b="0" u="none" strike="noStrike">
+                <a:solidFill>
+                  <a:srgbClr val="1A2E2B"/>
+                </a:solidFill>
+                <a:effectLst/>
+                <a:uFillTx/>
+                <a:latin typeface="Arial"/>
+              </a:rPr>
+              <a:t>Two-stage review always: manager → HR; HR-only reopen</a:t>
+            </a:r>
+            <a:endParaRPr lang="en-US" sz="1550" b="0" u="none" strike="noStrike">
+              <a:solidFill>
+                <a:srgbClr val="000000"/>
+              </a:solidFill>
+              <a:effectLst/>
+              <a:uFillTx/>
+              <a:latin typeface="Arial"/>
+            </a:endParaRPr>
+          </a:p>
+        </p:txBody>
+      </p:sp>
+      <p:sp>
+        <p:nvSpPr>
+          <p:cNvPr id="109" name=""/>
+          <p:cNvSpPr txBox="1"/>
+          <p:nvPr/>
+        </p:nvSpPr>
+        <p:spPr>
+          <a:xfrm>
+            <a:off x="540000" y="4134600"/>
+            <a:ext cx="50400" cy="342000"/>
+          </a:xfrm>
+          <a:prstGeom prst="rect">
+            <a:avLst/>
+          </a:prstGeom>
+          <a:solidFill>
+            <a:srgbClr val="E6BF71"/>
+          </a:solidFill>
+          <a:ln w="0">
+            <a:noFill/>
+          </a:ln>
+        </p:spPr>
+        <p:txBody>
+          <a:bodyPr lIns="90000" tIns="45000" rIns="90000" bIns="45000" anchor="t">
+            <a:spAutoFit/>
+          </a:bodyPr>
+          <a:p>
+            <a:endParaRPr lang="en-US" sz="1800" b="0" u="none" strike="noStrike">
+              <a:solidFill>
+                <a:srgbClr val="000000"/>
+              </a:solidFill>
+              <a:effectLst/>
+              <a:uFillTx/>
+              <a:latin typeface="Arial"/>
+            </a:endParaRPr>
+          </a:p>
+        </p:txBody>
+      </p:sp>
+      <p:sp>
+        <p:nvSpPr>
+          <p:cNvPr id="110" name=""/>
+          <p:cNvSpPr txBox="1"/>
+          <p:nvPr/>
+        </p:nvSpPr>
+        <p:spPr>
+          <a:xfrm>
+            <a:off x="540000" y="4080240"/>
+            <a:ext cx="9000000" cy="450360"/>
+          </a:xfrm>
+          <a:prstGeom prst="rect">
+            <a:avLst/>
+          </a:prstGeom>
+          <a:solidFill>
+            <a:srgbClr val="FFFFFF"/>
+          </a:solidFill>
+          <a:ln w="7200">
+            <a:solidFill>
+              <a:srgbClr val="DFE9E4"/>
+            </a:solidFill>
+            <a:round/>
+          </a:ln>
+        </p:spPr>
+        <p:txBody>
+          <a:bodyPr lIns="198000" tIns="115200" rIns="126000" bIns="115200" anchor="ctr">
+            <a:normAutofit/>
+          </a:bodyPr>
+          <a:p>
+            <a:r>
+              <a:rPr lang="en-US" sz="1550" b="0" u="none" strike="noStrike">
+                <a:solidFill>
+                  <a:srgbClr val="1A2E2B"/>
+                </a:solidFill>
+                <a:effectLst/>
+                <a:uFillTx/>
+                <a:latin typeface="Arial"/>
+              </a:rPr>
+              <a:t>Punch widget: real check-in/out from the topbar</a:t>
+            </a:r>
+            <a:endParaRPr lang="en-US" sz="1550" b="0" u="none" strike="noStrike">
               <a:solidFill>
                 <a:srgbClr val="000000"/>
               </a:solidFill>
@@ -4975,7 +5121,7 @@
       </p:grpSpPr>
       <p:sp>
         <p:nvSpPr>
-          <p:cNvPr id="101" name=""/>
+          <p:cNvPr id="111" name=""/>
           <p:cNvSpPr txBox="1"/>
           <p:nvPr/>
         </p:nvSpPr>
@@ -5006,7 +5152,7 @@
                 <a:uFillTx/>
                 <a:latin typeface="Arial"/>
               </a:rPr>
-              <a:t>Employee Dashboard</a:t>
+              <a:t>The Week at a Glance</a:t>
             </a:r>
             <a:endParaRPr lang="en-US" sz="2600" b="0" u="none" strike="noStrike">
               <a:solidFill>
@@ -5021,7 +5167,7 @@
       </p:sp>
       <p:sp>
         <p:nvSpPr>
-          <p:cNvPr id="102" name=""/>
+          <p:cNvPr id="112" name=""/>
           <p:cNvSpPr txBox="1"/>
           <p:nvPr/>
         </p:nvSpPr>
@@ -5058,7 +5204,7 @@
       </p:sp>
       <p:pic>
         <p:nvPicPr>
-          <p:cNvPr id="103" name=""/>
+          <p:cNvPr id="113" name=""/>
           <p:cNvPicPr/>
           <p:nvPr/>
         </p:nvPicPr>
@@ -5082,7 +5228,96 @@
       </p:pic>
       <p:sp>
         <p:nvSpPr>
-          <p:cNvPr id="104" name=""/>
+          <p:cNvPr id="114" name=""/>
+          <p:cNvSpPr txBox="1"/>
+          <p:nvPr/>
+        </p:nvSpPr>
+        <p:spPr>
+          <a:xfrm>
+            <a:off x="3040200" y="2782080"/>
+            <a:ext cx="4967280" cy="1935360"/>
+          </a:xfrm>
+          <a:prstGeom prst="rect">
+            <a:avLst/>
+          </a:prstGeom>
+          <a:noFill/>
+          <a:ln w="28800">
+            <a:solidFill>
+              <a:srgbClr val="D97706"/>
+            </a:solidFill>
+            <a:round/>
+          </a:ln>
+        </p:spPr>
+        <p:txBody>
+          <a:bodyPr lIns="104400" tIns="59400" rIns="104400" bIns="59400" anchor="t">
+            <a:spAutoFit/>
+          </a:bodyPr>
+          <a:p>
+            <a:endParaRPr lang="en-US" sz="1800" b="0" u="none" strike="noStrike">
+              <a:solidFill>
+                <a:srgbClr val="000000"/>
+              </a:solidFill>
+              <a:effectLst/>
+              <a:uFillTx/>
+              <a:latin typeface="Arial"/>
+            </a:endParaRPr>
+          </a:p>
+        </p:txBody>
+      </p:sp>
+      <p:sp>
+        <p:nvSpPr>
+          <p:cNvPr id="115" name=""/>
+          <p:cNvSpPr txBox="1"/>
+          <p:nvPr/>
+        </p:nvSpPr>
+        <p:spPr>
+          <a:xfrm>
+            <a:off x="3040200" y="2558880"/>
+            <a:ext cx="3362400" cy="201600"/>
+          </a:xfrm>
+          <a:prstGeom prst="rect">
+            <a:avLst/>
+          </a:prstGeom>
+          <a:solidFill>
+            <a:srgbClr val="103E3A"/>
+          </a:solidFill>
+          <a:ln w="14400">
+            <a:solidFill>
+              <a:srgbClr val="E6BF71"/>
+            </a:solidFill>
+            <a:round/>
+          </a:ln>
+        </p:spPr>
+        <p:txBody>
+          <a:bodyPr lIns="79200" tIns="28800" rIns="79200" bIns="28800" anchor="t">
+            <a:spAutoFit/>
+          </a:bodyPr>
+          <a:p>
+            <a:r>
+              <a:rPr lang="en-US" sz="950" b="1" u="none" strike="noStrike">
+                <a:solidFill>
+                  <a:srgbClr val="FFFFFF"/>
+                </a:solidFill>
+                <a:effectLst/>
+                <a:uFillTx/>
+                <a:latin typeface="Arial"/>
+              </a:rPr>
+              <a:t>Compact 7-day table — entries &amp; actions inline</a:t>
+            </a:r>
+            <a:endParaRPr lang="en-US" sz="950" b="0" u="none" strike="noStrike">
+              <a:solidFill>
+                <a:srgbClr val="FFFFFF"/>
+              </a:solidFill>
+              <a:effectLst/>
+              <a:uFillTx/>
+              <a:latin typeface="Arial"/>
+            </a:endParaRPr>
+          </a:p>
+        </p:txBody>
+      </p:sp>
+      <p:sp>
+        <p:nvSpPr>
+          <p:cNvPr id="116" name=""/>
           <p:cNvSpPr txBox="1"/>
           <p:nvPr/>
         </p:nvSpPr>
@@ -5113,7 +5348,7 @@
                 <a:uFillTx/>
                 <a:latin typeface="Arial"/>
               </a:rPr>
-              <a:t>Clickable status chips → filtered lists; allocation balance visible.</a:t>
+              <a:t>One row per day — status, entries, totals, actions; today highlighted.</a:t>
             </a:r>
             <a:endParaRPr lang="en-US" sz="1100" b="0" u="none" strike="noStrike">
               <a:solidFill>
@@ -5165,7 +5400,7 @@
       </p:grpSpPr>
       <p:sp>
         <p:nvSpPr>
-          <p:cNvPr id="105" name=""/>
+          <p:cNvPr id="117" name=""/>
           <p:cNvSpPr txBox="1"/>
           <p:nvPr/>
         </p:nvSpPr>
@@ -5196,7 +5431,7 @@
                 <a:uFillTx/>
                 <a:latin typeface="Arial"/>
               </a:rPr>
-              <a:t>Manager / HR Scoped Views</a:t>
+              <a:t>Employee Dashboard &amp; Topbar Controls</a:t>
             </a:r>
             <a:endParaRPr lang="en-US" sz="2600" b="0" u="none" strike="noStrike">
               <a:solidFill>
@@ -5211,7 +5446,7 @@
       </p:sp>
       <p:sp>
         <p:nvSpPr>
-          <p:cNvPr id="106" name=""/>
+          <p:cNvPr id="118" name=""/>
           <p:cNvSpPr txBox="1"/>
           <p:nvPr/>
         </p:nvSpPr>
@@ -5248,7 +5483,7 @@
       </p:sp>
       <p:pic>
         <p:nvPicPr>
-          <p:cNvPr id="107" name=""/>
+          <p:cNvPr id="119" name=""/>
           <p:cNvPicPr/>
           <p:nvPr/>
         </p:nvPicPr>
@@ -5272,7 +5507,185 @@
       </p:pic>
       <p:sp>
         <p:nvSpPr>
-          <p:cNvPr id="108" name=""/>
+          <p:cNvPr id="120" name=""/>
+          <p:cNvSpPr txBox="1"/>
+          <p:nvPr/>
+        </p:nvSpPr>
+        <p:spPr>
+          <a:xfrm>
+            <a:off x="6781680" y="1088640"/>
+            <a:ext cx="1354680" cy="322560"/>
+          </a:xfrm>
+          <a:prstGeom prst="rect">
+            <a:avLst/>
+          </a:prstGeom>
+          <a:noFill/>
+          <a:ln w="28800">
+            <a:solidFill>
+              <a:srgbClr val="D97706"/>
+            </a:solidFill>
+            <a:round/>
+          </a:ln>
+        </p:spPr>
+        <p:txBody>
+          <a:bodyPr lIns="104400" tIns="59400" rIns="104400" bIns="59400" anchor="t">
+            <a:spAutoFit/>
+          </a:bodyPr>
+          <a:p>
+            <a:endParaRPr lang="en-US" sz="1800" b="0" u="none" strike="noStrike">
+              <a:solidFill>
+                <a:srgbClr val="000000"/>
+              </a:solidFill>
+              <a:effectLst/>
+              <a:uFillTx/>
+              <a:latin typeface="Arial"/>
+            </a:endParaRPr>
+          </a:p>
+        </p:txBody>
+      </p:sp>
+      <p:sp>
+        <p:nvSpPr>
+          <p:cNvPr id="121" name=""/>
+          <p:cNvSpPr txBox="1"/>
+          <p:nvPr/>
+        </p:nvSpPr>
+        <p:spPr>
+          <a:xfrm>
+            <a:off x="6781680" y="1440000"/>
+            <a:ext cx="3020400" cy="201600"/>
+          </a:xfrm>
+          <a:prstGeom prst="rect">
+            <a:avLst/>
+          </a:prstGeom>
+          <a:solidFill>
+            <a:srgbClr val="103E3A"/>
+          </a:solidFill>
+          <a:ln w="14400">
+            <a:solidFill>
+              <a:srgbClr val="E6BF71"/>
+            </a:solidFill>
+            <a:round/>
+          </a:ln>
+        </p:spPr>
+        <p:txBody>
+          <a:bodyPr lIns="79200" tIns="28800" rIns="79200" bIns="28800" anchor="t">
+            <a:spAutoFit/>
+          </a:bodyPr>
+          <a:p>
+            <a:r>
+              <a:rPr lang="en-US" sz="950" b="1" u="none" strike="noStrike">
+                <a:solidFill>
+                  <a:srgbClr val="FFFFFF"/>
+                </a:solidFill>
+                <a:effectLst/>
+                <a:uFillTx/>
+                <a:latin typeface="Arial"/>
+              </a:rPr>
+              <a:t>Check-in punch · EN/AR · Dark mode · Bell</a:t>
+            </a:r>
+            <a:endParaRPr lang="en-US" sz="950" b="0" u="none" strike="noStrike">
+              <a:solidFill>
+                <a:srgbClr val="FFFFFF"/>
+              </a:solidFill>
+              <a:effectLst/>
+              <a:uFillTx/>
+              <a:latin typeface="Arial"/>
+            </a:endParaRPr>
+          </a:p>
+        </p:txBody>
+      </p:sp>
+      <p:sp>
+        <p:nvSpPr>
+          <p:cNvPr id="122" name=""/>
+          <p:cNvSpPr txBox="1"/>
+          <p:nvPr/>
+        </p:nvSpPr>
+        <p:spPr>
+          <a:xfrm>
+            <a:off x="3104640" y="3507840"/>
+            <a:ext cx="3354480" cy="1370880"/>
+          </a:xfrm>
+          <a:prstGeom prst="rect">
+            <a:avLst/>
+          </a:prstGeom>
+          <a:noFill/>
+          <a:ln w="28800">
+            <a:solidFill>
+              <a:srgbClr val="D97706"/>
+            </a:solidFill>
+            <a:round/>
+          </a:ln>
+        </p:spPr>
+        <p:txBody>
+          <a:bodyPr lIns="104400" tIns="59400" rIns="104400" bIns="59400" anchor="t">
+            <a:spAutoFit/>
+          </a:bodyPr>
+          <a:p>
+            <a:endParaRPr lang="en-US" sz="1800" b="0" u="none" strike="noStrike">
+              <a:solidFill>
+                <a:srgbClr val="000000"/>
+              </a:solidFill>
+              <a:effectLst/>
+              <a:uFillTx/>
+              <a:latin typeface="Arial"/>
+            </a:endParaRPr>
+          </a:p>
+        </p:txBody>
+      </p:sp>
+      <p:sp>
+        <p:nvSpPr>
+          <p:cNvPr id="123" name=""/>
+          <p:cNvSpPr txBox="1"/>
+          <p:nvPr/>
+        </p:nvSpPr>
+        <p:spPr>
+          <a:xfrm>
+            <a:off x="3104640" y="3284640"/>
+            <a:ext cx="3020400" cy="201600"/>
+          </a:xfrm>
+          <a:prstGeom prst="rect">
+            <a:avLst/>
+          </a:prstGeom>
+          <a:solidFill>
+            <a:srgbClr val="103E3A"/>
+          </a:solidFill>
+          <a:ln w="14400">
+            <a:solidFill>
+              <a:srgbClr val="E6BF71"/>
+            </a:solidFill>
+            <a:round/>
+          </a:ln>
+        </p:spPr>
+        <p:txBody>
+          <a:bodyPr lIns="79200" tIns="28800" rIns="79200" bIns="28800" anchor="t">
+            <a:spAutoFit/>
+          </a:bodyPr>
+          <a:p>
+            <a:r>
+              <a:rPr lang="en-US" sz="950" b="1" u="none" strike="noStrike">
+                <a:solidFill>
+                  <a:srgbClr val="FFFFFF"/>
+                </a:solidFill>
+                <a:effectLst/>
+                <a:uFillTx/>
+                <a:latin typeface="Arial"/>
+              </a:rPr>
+              <a:t>Personal allocation balances (full cards)</a:t>
+            </a:r>
+            <a:endParaRPr lang="en-US" sz="950" b="0" u="none" strike="noStrike">
+              <a:solidFill>
+                <a:srgbClr val="FFFFFF"/>
+              </a:solidFill>
+              <a:effectLst/>
+              <a:uFillTx/>
+              <a:latin typeface="Arial"/>
+            </a:endParaRPr>
+          </a:p>
+        </p:txBody>
+      </p:sp>
+      <p:sp>
+        <p:nvSpPr>
+          <p:cNvPr id="124" name=""/>
           <p:cNvSpPr txBox="1"/>
           <p:nvPr/>
         </p:nvSpPr>
@@ -5303,7 +5716,7 @@
                 <a:uFillTx/>
                 <a:latin typeface="Arial"/>
               </a:rPr>
-              <a:t>Team and org queues; own rows highlighted with a "You" badge.</a:t>
+              <a:t>Live check-in punch, EN/AR switch, dark/light toggle, notifications — plus full allocation balance cards.</a:t>
             </a:r>
             <a:endParaRPr lang="en-US" sz="1100" b="0" u="none" strike="noStrike">
               <a:solidFill>
@@ -5355,7 +5768,7 @@
       </p:grpSpPr>
       <p:sp>
         <p:nvSpPr>
-          <p:cNvPr id="109" name=""/>
+          <p:cNvPr id="125" name=""/>
           <p:cNvSpPr txBox="1"/>
           <p:nvPr/>
         </p:nvSpPr>
@@ -5386,7 +5799,7 @@
                 <a:uFillTx/>
                 <a:latin typeface="Arial"/>
               </a:rPr>
-              <a:t>Employee Directory</a:t>
+              <a:t>Bilingual Arabic RTL &amp; Dark Mode</a:t>
             </a:r>
             <a:endParaRPr lang="en-US" sz="2600" b="0" u="none" strike="noStrike">
               <a:solidFill>
@@ -5401,7 +5814,7 @@
       </p:sp>
       <p:sp>
         <p:nvSpPr>
-          <p:cNvPr id="110" name=""/>
+          <p:cNvPr id="126" name=""/>
           <p:cNvSpPr txBox="1"/>
           <p:nvPr/>
         </p:nvSpPr>
@@ -5438,7 +5851,7 @@
       </p:sp>
       <p:pic>
         <p:nvPicPr>
-          <p:cNvPr id="111" name=""/>
+          <p:cNvPr id="127" name=""/>
           <p:cNvPicPr/>
           <p:nvPr/>
         </p:nvPicPr>
@@ -5462,7 +5875,185 @@
       </p:pic>
       <p:sp>
         <p:nvSpPr>
-          <p:cNvPr id="112" name=""/>
+          <p:cNvPr id="128" name=""/>
+          <p:cNvSpPr txBox="1"/>
+          <p:nvPr/>
+        </p:nvSpPr>
+        <p:spPr>
+          <a:xfrm>
+            <a:off x="1943280" y="1088640"/>
+            <a:ext cx="1548360" cy="322560"/>
+          </a:xfrm>
+          <a:prstGeom prst="rect">
+            <a:avLst/>
+          </a:prstGeom>
+          <a:noFill/>
+          <a:ln w="28800">
+            <a:solidFill>
+              <a:srgbClr val="D97706"/>
+            </a:solidFill>
+            <a:round/>
+          </a:ln>
+        </p:spPr>
+        <p:txBody>
+          <a:bodyPr lIns="104400" tIns="59400" rIns="104400" bIns="59400" anchor="t">
+            <a:spAutoFit/>
+          </a:bodyPr>
+          <a:p>
+            <a:endParaRPr lang="en-US" sz="1800" b="0" u="none" strike="noStrike">
+              <a:solidFill>
+                <a:srgbClr val="000000"/>
+              </a:solidFill>
+              <a:effectLst/>
+              <a:uFillTx/>
+              <a:latin typeface="Arial"/>
+            </a:endParaRPr>
+          </a:p>
+        </p:txBody>
+      </p:sp>
+      <p:sp>
+        <p:nvSpPr>
+          <p:cNvPr id="129" name=""/>
+          <p:cNvSpPr txBox="1"/>
+          <p:nvPr/>
+        </p:nvSpPr>
+        <p:spPr>
+          <a:xfrm>
+            <a:off x="1943280" y="1440000"/>
+            <a:ext cx="3294000" cy="201600"/>
+          </a:xfrm>
+          <a:prstGeom prst="rect">
+            <a:avLst/>
+          </a:prstGeom>
+          <a:solidFill>
+            <a:srgbClr val="103E3A"/>
+          </a:solidFill>
+          <a:ln w="14400">
+            <a:solidFill>
+              <a:srgbClr val="E6BF71"/>
+            </a:solidFill>
+            <a:round/>
+          </a:ln>
+        </p:spPr>
+        <p:txBody>
+          <a:bodyPr lIns="79200" tIns="28800" rIns="79200" bIns="28800" anchor="t">
+            <a:spAutoFit/>
+          </a:bodyPr>
+          <a:p>
+            <a:r>
+              <a:rPr lang="en-US" sz="950" b="1" u="none" strike="noStrike">
+                <a:solidFill>
+                  <a:srgbClr val="FFFFFF"/>
+                </a:solidFill>
+                <a:effectLst/>
+                <a:uFillTx/>
+                <a:latin typeface="Arial"/>
+              </a:rPr>
+              <a:t>Topbar flipped RTL · theme &amp; language toggles</a:t>
+            </a:r>
+            <a:endParaRPr lang="en-US" sz="950" b="0" u="none" strike="noStrike">
+              <a:solidFill>
+                <a:srgbClr val="FFFFFF"/>
+              </a:solidFill>
+              <a:effectLst/>
+              <a:uFillTx/>
+              <a:latin typeface="Arial"/>
+            </a:endParaRPr>
+          </a:p>
+        </p:txBody>
+      </p:sp>
+      <p:sp>
+        <p:nvSpPr>
+          <p:cNvPr id="130" name=""/>
+          <p:cNvSpPr txBox="1"/>
+          <p:nvPr/>
+        </p:nvSpPr>
+        <p:spPr>
+          <a:xfrm>
+            <a:off x="6975360" y="1088640"/>
+            <a:ext cx="1225800" cy="2016000"/>
+          </a:xfrm>
+          <a:prstGeom prst="rect">
+            <a:avLst/>
+          </a:prstGeom>
+          <a:noFill/>
+          <a:ln w="28800">
+            <a:solidFill>
+              <a:srgbClr val="D97706"/>
+            </a:solidFill>
+            <a:round/>
+          </a:ln>
+        </p:spPr>
+        <p:txBody>
+          <a:bodyPr lIns="104400" tIns="59400" rIns="104400" bIns="59400" anchor="t">
+            <a:spAutoFit/>
+          </a:bodyPr>
+          <a:p>
+            <a:endParaRPr lang="en-US" sz="1800" b="0" u="none" strike="noStrike">
+              <a:solidFill>
+                <a:srgbClr val="000000"/>
+              </a:solidFill>
+              <a:effectLst/>
+              <a:uFillTx/>
+              <a:latin typeface="Arial"/>
+            </a:endParaRPr>
+          </a:p>
+        </p:txBody>
+      </p:sp>
+      <p:sp>
+        <p:nvSpPr>
+          <p:cNvPr id="131" name=""/>
+          <p:cNvSpPr txBox="1"/>
+          <p:nvPr/>
+        </p:nvSpPr>
+        <p:spPr>
+          <a:xfrm>
+            <a:off x="6975360" y="3133440"/>
+            <a:ext cx="2678400" cy="201600"/>
+          </a:xfrm>
+          <a:prstGeom prst="rect">
+            <a:avLst/>
+          </a:prstGeom>
+          <a:solidFill>
+            <a:srgbClr val="103E3A"/>
+          </a:solidFill>
+          <a:ln w="14400">
+            <a:solidFill>
+              <a:srgbClr val="E6BF71"/>
+            </a:solidFill>
+            <a:round/>
+          </a:ln>
+        </p:spPr>
+        <p:txBody>
+          <a:bodyPr lIns="79200" tIns="28800" rIns="79200" bIns="28800" anchor="t">
+            <a:spAutoFit/>
+          </a:bodyPr>
+          <a:p>
+            <a:r>
+              <a:rPr lang="en-US" sz="950" b="1" u="none" strike="noStrike">
+                <a:solidFill>
+                  <a:srgbClr val="FFFFFF"/>
+                </a:solidFill>
+                <a:effectLst/>
+                <a:uFillTx/>
+                <a:latin typeface="Arial"/>
+              </a:rPr>
+              <a:t>Arabic RTL navigation &amp; dark palette</a:t>
+            </a:r>
+            <a:endParaRPr lang="en-US" sz="950" b="0" u="none" strike="noStrike">
+              <a:solidFill>
+                <a:srgbClr val="FFFFFF"/>
+              </a:solidFill>
+              <a:effectLst/>
+              <a:uFillTx/>
+              <a:latin typeface="Arial"/>
+            </a:endParaRPr>
+          </a:p>
+        </p:txBody>
+      </p:sp>
+      <p:sp>
+        <p:nvSpPr>
+          <p:cNvPr id="132" name=""/>
           <p:cNvSpPr txBox="1"/>
           <p:nvPr/>
         </p:nvSpPr>
@@ -5493,7 +6084,7 @@
                 <a:uFillTx/>
                 <a:latin typeface="Arial"/>
               </a:rPr>
-              <a:t>Searchable, sortable directory — departments, roles, status.</a:t>
+              <a:t>One-click switch to Arabic (full RTL layout) and dark theme — persisted per user.</a:t>
             </a:r>
             <a:endParaRPr lang="en-US" sz="1100" b="0" u="none" strike="noStrike">
               <a:solidFill>
@@ -5545,7 +6136,7 @@
       </p:grpSpPr>
       <p:sp>
         <p:nvSpPr>
-          <p:cNvPr id="113" name=""/>
+          <p:cNvPr id="133" name=""/>
           <p:cNvSpPr txBox="1"/>
           <p:nvPr/>
         </p:nvSpPr>
@@ -5576,7 +6167,7 @@
                 <a:uFillTx/>
                 <a:latin typeface="Arial"/>
               </a:rPr>
-              <a:t>Departments</a:t>
+              <a:t>Manager / HR Scoped Views</a:t>
             </a:r>
             <a:endParaRPr lang="en-US" sz="2600" b="0" u="none" strike="noStrike">
               <a:solidFill>
@@ -5591,7 +6182,7 @@
       </p:sp>
       <p:sp>
         <p:nvSpPr>
-          <p:cNvPr id="114" name=""/>
+          <p:cNvPr id="134" name=""/>
           <p:cNvSpPr txBox="1"/>
           <p:nvPr/>
         </p:nvSpPr>
@@ -5628,7 +6219,7 @@
       </p:sp>
       <p:pic>
         <p:nvPicPr>
-          <p:cNvPr id="115" name=""/>
+          <p:cNvPr id="135" name=""/>
           <p:cNvPicPr/>
           <p:nvPr/>
         </p:nvPicPr>
@@ -5652,7 +6243,96 @@
       </p:pic>
       <p:sp>
         <p:nvSpPr>
-          <p:cNvPr id="116" name=""/>
+          <p:cNvPr id="136" name=""/>
+          <p:cNvSpPr txBox="1"/>
+          <p:nvPr/>
+        </p:nvSpPr>
+        <p:spPr>
+          <a:xfrm>
+            <a:off x="3104640" y="2862720"/>
+            <a:ext cx="4838400" cy="645120"/>
+          </a:xfrm>
+          <a:prstGeom prst="rect">
+            <a:avLst/>
+          </a:prstGeom>
+          <a:noFill/>
+          <a:ln w="28800">
+            <a:solidFill>
+              <a:srgbClr val="D97706"/>
+            </a:solidFill>
+            <a:round/>
+          </a:ln>
+        </p:spPr>
+        <p:txBody>
+          <a:bodyPr lIns="104400" tIns="59400" rIns="104400" bIns="59400" anchor="t">
+            <a:spAutoFit/>
+          </a:bodyPr>
+          <a:p>
+            <a:endParaRPr lang="en-US" sz="1800" b="0" u="none" strike="noStrike">
+              <a:solidFill>
+                <a:srgbClr val="000000"/>
+              </a:solidFill>
+              <a:effectLst/>
+              <a:uFillTx/>
+              <a:latin typeface="Arial"/>
+            </a:endParaRPr>
+          </a:p>
+        </p:txBody>
+      </p:sp>
+      <p:sp>
+        <p:nvSpPr>
+          <p:cNvPr id="137" name=""/>
+          <p:cNvSpPr txBox="1"/>
+          <p:nvPr/>
+        </p:nvSpPr>
+        <p:spPr>
+          <a:xfrm>
+            <a:off x="3104640" y="2639520"/>
+            <a:ext cx="2199600" cy="201600"/>
+          </a:xfrm>
+          <a:prstGeom prst="rect">
+            <a:avLst/>
+          </a:prstGeom>
+          <a:solidFill>
+            <a:srgbClr val="103E3A"/>
+          </a:solidFill>
+          <a:ln w="14400">
+            <a:solidFill>
+              <a:srgbClr val="E6BF71"/>
+            </a:solidFill>
+            <a:round/>
+          </a:ln>
+        </p:spPr>
+        <p:txBody>
+          <a:bodyPr lIns="79200" tIns="28800" rIns="79200" bIns="28800" anchor="t">
+            <a:spAutoFit/>
+          </a:bodyPr>
+          <a:p>
+            <a:r>
+              <a:rPr lang="en-US" sz="950" b="1" u="none" strike="noStrike">
+                <a:solidFill>
+                  <a:srgbClr val="FFFFFF"/>
+                </a:solidFill>
+                <a:effectLst/>
+                <a:uFillTx/>
+                <a:latin typeface="Arial"/>
+              </a:rPr>
+              <a:t>Own rows tinted + 'You' badge</a:t>
+            </a:r>
+            <a:endParaRPr lang="en-US" sz="950" b="0" u="none" strike="noStrike">
+              <a:solidFill>
+                <a:srgbClr val="FFFFFF"/>
+              </a:solidFill>
+              <a:effectLst/>
+              <a:uFillTx/>
+              <a:latin typeface="Arial"/>
+            </a:endParaRPr>
+          </a:p>
+        </p:txBody>
+      </p:sp>
+      <p:sp>
+        <p:nvSpPr>
+          <p:cNvPr id="138" name=""/>
           <p:cNvSpPr txBox="1"/>
           <p:nvPr/>
         </p:nvSpPr>
@@ -5683,7 +6363,7 @@
                 <a:uFillTx/>
                 <a:latin typeface="Arial"/>
               </a:rPr>
-              <a:t>Org structure with manager assignment and member lists.</a:t>
+              <a:t>Team and org queues; own rows highlighted with a "You" badge.</a:t>
             </a:r>
             <a:endParaRPr lang="en-US" sz="1100" b="0" u="none" strike="noStrike">
               <a:solidFill>
@@ -5735,7 +6415,7 @@
       </p:grpSpPr>
       <p:sp>
         <p:nvSpPr>
-          <p:cNvPr id="117" name=""/>
+          <p:cNvPr id="139" name=""/>
           <p:cNvSpPr txBox="1"/>
           <p:nvPr/>
         </p:nvSpPr>
@@ -5766,7 +6446,7 @@
                 <a:uFillTx/>
                 <a:latin typeface="Arial"/>
               </a:rPr>
-              <a:t>Notifications</a:t>
+              <a:t>Employee Directory</a:t>
             </a:r>
             <a:endParaRPr lang="en-US" sz="2600" b="0" u="none" strike="noStrike">
               <a:solidFill>
@@ -5781,7 +6461,7 @@
       </p:sp>
       <p:sp>
         <p:nvSpPr>
-          <p:cNvPr id="118" name=""/>
+          <p:cNvPr id="140" name=""/>
           <p:cNvSpPr txBox="1"/>
           <p:nvPr/>
         </p:nvSpPr>
@@ -5818,7 +6498,7 @@
       </p:sp>
       <p:pic>
         <p:nvPicPr>
-          <p:cNvPr id="119" name=""/>
+          <p:cNvPr id="141" name=""/>
           <p:cNvPicPr/>
           <p:nvPr/>
         </p:nvPicPr>
@@ -5842,7 +6522,7 @@
       </p:pic>
       <p:sp>
         <p:nvSpPr>
-          <p:cNvPr id="120" name=""/>
+          <p:cNvPr id="142" name=""/>
           <p:cNvSpPr txBox="1"/>
           <p:nvPr/>
         </p:nvSpPr>
@@ -5873,7 +6553,7 @@
                 <a:uFillTx/>
                 <a:latin typeface="Arial"/>
               </a:rPr>
-              <a:t>Persistent inbox: unread badge, filters, click-through to the record.</a:t>
+              <a:t>Searchable, sortable directory — departments, roles, status.</a:t>
             </a:r>
             <a:endParaRPr lang="en-US" sz="1100" b="0" u="none" strike="noStrike">
               <a:solidFill>
@@ -5925,7 +6605,7 @@
       </p:grpSpPr>
       <p:sp>
         <p:nvSpPr>
-          <p:cNvPr id="121" name=""/>
+          <p:cNvPr id="143" name=""/>
           <p:cNvSpPr txBox="1"/>
           <p:nvPr/>
         </p:nvSpPr>
@@ -5956,7 +6636,7 @@
                 <a:uFillTx/>
                 <a:latin typeface="Arial"/>
               </a:rPr>
-              <a:t>Reports</a:t>
+              <a:t>Departments</a:t>
             </a:r>
             <a:endParaRPr lang="en-US" sz="2600" b="0" u="none" strike="noStrike">
               <a:solidFill>
@@ -5971,7 +6651,7 @@
       </p:sp>
       <p:sp>
         <p:nvSpPr>
-          <p:cNvPr id="122" name=""/>
+          <p:cNvPr id="144" name=""/>
           <p:cNvSpPr txBox="1"/>
           <p:nvPr/>
         </p:nvSpPr>
@@ -6008,7 +6688,7 @@
       </p:sp>
       <p:pic>
         <p:nvPicPr>
-          <p:cNvPr id="123" name=""/>
+          <p:cNvPr id="145" name=""/>
           <p:cNvPicPr/>
           <p:nvPr/>
         </p:nvPicPr>
@@ -6032,7 +6712,7 @@
       </p:pic>
       <p:sp>
         <p:nvSpPr>
-          <p:cNvPr id="124" name=""/>
+          <p:cNvPr id="146" name=""/>
           <p:cNvSpPr txBox="1"/>
           <p:nvPr/>
         </p:nvSpPr>
@@ -6063,7 +6743,7 @@
                 <a:uFillTx/>
                 <a:latin typeface="Arial"/>
               </a:rPr>
-              <a:t>Working-hours and requests reports, date-ranged, CSV export.</a:t>
+              <a:t>Org structure with manager assignment and member lists.</a:t>
             </a:r>
             <a:endParaRPr lang="en-US" sz="1100" b="0" u="none" strike="noStrike">
               <a:solidFill>
@@ -6499,7 +7179,7 @@
       </p:grpSpPr>
       <p:sp>
         <p:nvSpPr>
-          <p:cNvPr id="125" name=""/>
+          <p:cNvPr id="147" name=""/>
           <p:cNvSpPr txBox="1"/>
           <p:nvPr/>
         </p:nvSpPr>
@@ -6530,7 +7210,7 @@
                 <a:uFillTx/>
                 <a:latin typeface="Arial"/>
               </a:rPr>
-              <a:t>HR Administration</a:t>
+              <a:t>Notifications</a:t>
             </a:r>
             <a:endParaRPr lang="en-US" sz="2600" b="0" u="none" strike="noStrike">
               <a:solidFill>
@@ -6545,7 +7225,7 @@
       </p:sp>
       <p:sp>
         <p:nvSpPr>
-          <p:cNvPr id="126" name=""/>
+          <p:cNvPr id="148" name=""/>
           <p:cNvSpPr txBox="1"/>
           <p:nvPr/>
         </p:nvSpPr>
@@ -6582,7 +7262,7 @@
       </p:sp>
       <p:pic>
         <p:nvPicPr>
-          <p:cNvPr id="127" name=""/>
+          <p:cNvPr id="149" name=""/>
           <p:cNvPicPr/>
           <p:nvPr/>
         </p:nvPicPr>
@@ -6606,7 +7286,7 @@
       </p:pic>
       <p:sp>
         <p:nvSpPr>
-          <p:cNvPr id="128" name=""/>
+          <p:cNvPr id="150" name=""/>
           <p:cNvSpPr txBox="1"/>
           <p:nvPr/>
         </p:nvSpPr>
@@ -6637,7 +7317,7 @@
                 <a:uFillTx/>
                 <a:latin typeface="Arial"/>
               </a:rPr>
-              <a:t>Request types, review stages, allocations, departments, audit.</a:t>
+              <a:t>Persistent inbox: unread badge, filters, click-through to the record.</a:t>
             </a:r>
             <a:endParaRPr lang="en-US" sz="1100" b="0" u="none" strike="noStrike">
               <a:solidFill>
@@ -6689,14 +7369,14 @@
       </p:grpSpPr>
       <p:sp>
         <p:nvSpPr>
-          <p:cNvPr id="129" name=""/>
-          <p:cNvSpPr txBox="1"/>
-          <p:nvPr/>
-        </p:nvSpPr>
-        <p:spPr>
-          <a:xfrm>
-            <a:off x="540000" y="324000"/>
-            <a:ext cx="9000000" cy="576000"/>
+          <p:cNvPr id="151" name=""/>
+          <p:cNvSpPr txBox="1"/>
+          <p:nvPr/>
+        </p:nvSpPr>
+        <p:spPr>
+          <a:xfrm>
+            <a:off x="540000" y="252000"/>
+            <a:ext cx="9000000" cy="504000"/>
           </a:xfrm>
           <a:prstGeom prst="rect">
             <a:avLst/>
@@ -6720,7 +7400,7 @@
                 <a:uFillTx/>
                 <a:latin typeface="Arial"/>
               </a:rPr>
-              <a:t>Architecture</a:t>
+              <a:t>Reports</a:t>
             </a:r>
             <a:endParaRPr lang="en-US" sz="2600" b="0" u="none" strike="noStrike">
               <a:solidFill>
@@ -6735,13 +7415,13 @@
       </p:sp>
       <p:sp>
         <p:nvSpPr>
-          <p:cNvPr id="130" name=""/>
-          <p:cNvSpPr txBox="1"/>
-          <p:nvPr/>
-        </p:nvSpPr>
-        <p:spPr>
-          <a:xfrm>
-            <a:off x="540000" y="900000"/>
+          <p:cNvPr id="152" name=""/>
+          <p:cNvSpPr txBox="1"/>
+          <p:nvPr/>
+        </p:nvSpPr>
+        <p:spPr>
+          <a:xfrm>
+            <a:off x="540000" y="774000"/>
             <a:ext cx="1440000" cy="43200"/>
           </a:xfrm>
           <a:prstGeom prst="rect">
@@ -6770,117 +7450,54 @@
           </a:p>
         </p:txBody>
       </p:sp>
-      <p:sp>
-        <p:nvSpPr>
-          <p:cNvPr id="131" name=""/>
-          <p:cNvSpPr txBox="1"/>
-          <p:nvPr/>
-        </p:nvSpPr>
-        <p:spPr>
-          <a:xfrm>
-            <a:off x="540000" y="1954800"/>
-            <a:ext cx="50400" cy="493200"/>
-          </a:xfrm>
-          <a:prstGeom prst="rect">
-            <a:avLst/>
-          </a:prstGeom>
-          <a:solidFill>
-            <a:srgbClr val="E6BF71"/>
-          </a:solidFill>
-          <a:ln w="0">
-            <a:noFill/>
-          </a:ln>
-        </p:spPr>
-        <p:txBody>
-          <a:bodyPr lIns="90000" tIns="45000" rIns="90000" bIns="45000" anchor="t">
-            <a:spAutoFit/>
-          </a:bodyPr>
-          <a:p>
-            <a:endParaRPr lang="en-US" sz="1800" b="0" u="none" strike="noStrike">
-              <a:solidFill>
-                <a:srgbClr val="000000"/>
-              </a:solidFill>
-              <a:effectLst/>
-              <a:uFillTx/>
-              <a:latin typeface="Arial"/>
-            </a:endParaRPr>
-          </a:p>
-        </p:txBody>
-      </p:sp>
-      <p:sp>
-        <p:nvSpPr>
-          <p:cNvPr id="132" name=""/>
-          <p:cNvSpPr txBox="1"/>
-          <p:nvPr/>
-        </p:nvSpPr>
-        <p:spPr>
-          <a:xfrm>
-            <a:off x="540000" y="1954800"/>
-            <a:ext cx="9000000" cy="493200"/>
-          </a:xfrm>
-          <a:prstGeom prst="rect">
-            <a:avLst/>
-          </a:prstGeom>
-          <a:solidFill>
-            <a:srgbClr val="FFFFFF"/>
-          </a:solidFill>
-          <a:ln w="7200">
+      <p:pic>
+        <p:nvPicPr>
+          <p:cNvPr id="153" name=""/>
+          <p:cNvPicPr/>
+          <p:nvPr/>
+        </p:nvPicPr>
+        <p:blipFill>
+          <a:blip r:embed="rId1"/>
+          <a:stretch/>
+        </p:blipFill>
+        <p:spPr>
+          <a:xfrm>
+            <a:off x="1814400" y="1008000"/>
+            <a:ext cx="6451200" cy="4032000"/>
+          </a:xfrm>
+          <a:prstGeom prst="rect">
+            <a:avLst/>
+          </a:prstGeom>
+          <a:noFill/>
+          <a:ln w="0">
+            <a:noFill/>
+          </a:ln>
+        </p:spPr>
+      </p:pic>
+      <p:sp>
+        <p:nvSpPr>
+          <p:cNvPr id="154" name=""/>
+          <p:cNvSpPr txBox="1"/>
+          <p:nvPr/>
+        </p:nvSpPr>
+        <p:spPr>
+          <a:xfrm>
+            <a:off x="3104640" y="1854720"/>
+            <a:ext cx="1677240" cy="362880"/>
+          </a:xfrm>
+          <a:prstGeom prst="rect">
+            <a:avLst/>
+          </a:prstGeom>
+          <a:noFill/>
+          <a:ln w="28800">
             <a:solidFill>
-              <a:srgbClr val="DFE9E4"/>
+              <a:srgbClr val="D97706"/>
             </a:solidFill>
             <a:round/>
           </a:ln>
         </p:spPr>
         <p:txBody>
-          <a:bodyPr lIns="198000" tIns="115200" rIns="126000" bIns="115200" anchor="ctr">
-            <a:normAutofit/>
-          </a:bodyPr>
-          <a:p>
-            <a:r>
-              <a:rPr lang="en-US" sz="1550" b="0" u="none" strike="noStrike">
-                <a:solidFill>
-                  <a:srgbClr val="1A2E2B"/>
-                </a:solidFill>
-                <a:effectLst/>
-                <a:uFillTx/>
-                <a:latin typeface="Arial"/>
-              </a:rPr>
-              <a:t>React + TypeScript SPA → same-origin Nginx → Django/DRF → PostgreSQL 17</a:t>
-            </a:r>
-            <a:endParaRPr lang="en-US" sz="1550" b="0" u="none" strike="noStrike">
-              <a:solidFill>
-                <a:srgbClr val="000000"/>
-              </a:solidFill>
-              <a:effectLst/>
-              <a:uFillTx/>
-              <a:latin typeface="Arial"/>
-            </a:endParaRPr>
-          </a:p>
-        </p:txBody>
-      </p:sp>
-      <p:sp>
-        <p:nvSpPr>
-          <p:cNvPr id="133" name=""/>
-          <p:cNvSpPr txBox="1"/>
-          <p:nvPr/>
-        </p:nvSpPr>
-        <p:spPr>
-          <a:xfrm>
-            <a:off x="540000" y="2599200"/>
-            <a:ext cx="50400" cy="493200"/>
-          </a:xfrm>
-          <a:prstGeom prst="rect">
-            <a:avLst/>
-          </a:prstGeom>
-          <a:solidFill>
-            <a:srgbClr val="E6BF71"/>
-          </a:solidFill>
-          <a:ln w="0">
-            <a:noFill/>
-          </a:ln>
-        </p:spPr>
-        <p:txBody>
-          <a:bodyPr lIns="90000" tIns="45000" rIns="90000" bIns="45000" anchor="t">
+          <a:bodyPr lIns="104400" tIns="59400" rIns="104400" bIns="59400" anchor="t">
             <a:spAutoFit/>
           </a:bodyPr>
           <a:p>
@@ -6897,72 +7514,70 @@
       </p:sp>
       <p:sp>
         <p:nvSpPr>
-          <p:cNvPr id="134" name=""/>
-          <p:cNvSpPr txBox="1"/>
-          <p:nvPr/>
-        </p:nvSpPr>
-        <p:spPr>
-          <a:xfrm>
-            <a:off x="540000" y="2599200"/>
-            <a:ext cx="9000000" cy="493200"/>
-          </a:xfrm>
-          <a:prstGeom prst="rect">
-            <a:avLst/>
-          </a:prstGeom>
-          <a:solidFill>
-            <a:srgbClr val="FFFFFF"/>
-          </a:solidFill>
-          <a:ln w="7200">
+          <p:cNvPr id="155" name=""/>
+          <p:cNvSpPr txBox="1"/>
+          <p:nvPr/>
+        </p:nvSpPr>
+        <p:spPr>
+          <a:xfrm>
+            <a:off x="3104640" y="1631520"/>
+            <a:ext cx="2746800" cy="201600"/>
+          </a:xfrm>
+          <a:prstGeom prst="rect">
+            <a:avLst/>
+          </a:prstGeom>
+          <a:solidFill>
+            <a:srgbClr val="103E3A"/>
+          </a:solidFill>
+          <a:ln w="14400">
             <a:solidFill>
-              <a:srgbClr val="DFE9E4"/>
+              <a:srgbClr val="E6BF71"/>
             </a:solidFill>
             <a:round/>
           </a:ln>
         </p:spPr>
         <p:txBody>
-          <a:bodyPr lIns="198000" tIns="115200" rIns="126000" bIns="115200" anchor="ctr">
-            <a:normAutofit/>
-          </a:bodyPr>
-          <a:p>
-            <a:r>
-              <a:rPr lang="en-US" sz="1550" b="0" u="none" strike="noStrike">
-                <a:solidFill>
-                  <a:srgbClr val="1A2E2B"/>
-                </a:solidFill>
-                <a:effectLst/>
-                <a:uFillTx/>
-                <a:latin typeface="Arial"/>
-              </a:rPr>
-              <a:t>Modular monolith: explicit services, scoped querysets, thin API layer</a:t>
-            </a:r>
-            <a:endParaRPr lang="en-US" sz="1550" b="0" u="none" strike="noStrike">
-              <a:solidFill>
-                <a:srgbClr val="000000"/>
-              </a:solidFill>
-              <a:effectLst/>
-              <a:uFillTx/>
-              <a:latin typeface="Arial"/>
-            </a:endParaRPr>
-          </a:p>
-        </p:txBody>
-      </p:sp>
-      <p:sp>
-        <p:nvSpPr>
-          <p:cNvPr id="135" name=""/>
-          <p:cNvSpPr txBox="1"/>
-          <p:nvPr/>
-        </p:nvSpPr>
-        <p:spPr>
-          <a:xfrm>
-            <a:off x="540000" y="3243600"/>
-            <a:ext cx="50400" cy="493200"/>
-          </a:xfrm>
-          <a:prstGeom prst="rect">
-            <a:avLst/>
-          </a:prstGeom>
-          <a:solidFill>
-            <a:srgbClr val="E6BF71"/>
-          </a:solidFill>
+          <a:bodyPr lIns="79200" tIns="28800" rIns="79200" bIns="28800" anchor="t">
+            <a:spAutoFit/>
+          </a:bodyPr>
+          <a:p>
+            <a:r>
+              <a:rPr lang="en-US" sz="950" b="1" u="none" strike="noStrike">
+                <a:solidFill>
+                  <a:srgbClr val="FFFFFF"/>
+                </a:solidFill>
+                <a:effectLst/>
+                <a:uFillTx/>
+                <a:latin typeface="Arial"/>
+              </a:rPr>
+              <a:t>Defaults to Requests tab · CSV export</a:t>
+            </a:r>
+            <a:endParaRPr lang="en-US" sz="950" b="0" u="none" strike="noStrike">
+              <a:solidFill>
+                <a:srgbClr val="FFFFFF"/>
+              </a:solidFill>
+              <a:effectLst/>
+              <a:uFillTx/>
+              <a:latin typeface="Arial"/>
+            </a:endParaRPr>
+          </a:p>
+        </p:txBody>
+      </p:sp>
+      <p:sp>
+        <p:nvSpPr>
+          <p:cNvPr id="156" name=""/>
+          <p:cNvSpPr txBox="1"/>
+          <p:nvPr/>
+        </p:nvSpPr>
+        <p:spPr>
+          <a:xfrm>
+            <a:off x="540000" y="5148000"/>
+            <a:ext cx="9000000" cy="360000"/>
+          </a:xfrm>
+          <a:prstGeom prst="rect">
+            <a:avLst/>
+          </a:prstGeom>
+          <a:noFill/>
           <a:ln w="0">
             <a:noFill/>
           </a:ln>
@@ -6972,146 +7587,18 @@
             <a:spAutoFit/>
           </a:bodyPr>
           <a:p>
-            <a:endParaRPr lang="en-US" sz="1800" b="0" u="none" strike="noStrike">
-              <a:solidFill>
-                <a:srgbClr val="000000"/>
-              </a:solidFill>
-              <a:effectLst/>
-              <a:uFillTx/>
-              <a:latin typeface="Arial"/>
-            </a:endParaRPr>
-          </a:p>
-        </p:txBody>
-      </p:sp>
-      <p:sp>
-        <p:nvSpPr>
-          <p:cNvPr id="136" name=""/>
-          <p:cNvSpPr txBox="1"/>
-          <p:nvPr/>
-        </p:nvSpPr>
-        <p:spPr>
-          <a:xfrm>
-            <a:off x="540000" y="3243600"/>
-            <a:ext cx="9000000" cy="493200"/>
-          </a:xfrm>
-          <a:prstGeom prst="rect">
-            <a:avLst/>
-          </a:prstGeom>
-          <a:solidFill>
-            <a:srgbClr val="FFFFFF"/>
-          </a:solidFill>
-          <a:ln w="7200">
-            <a:solidFill>
-              <a:srgbClr val="DFE9E4"/>
-            </a:solidFill>
-            <a:round/>
-          </a:ln>
-        </p:spPr>
-        <p:txBody>
-          <a:bodyPr lIns="198000" tIns="115200" rIns="126000" bIns="115200" anchor="ctr">
-            <a:normAutofit/>
-          </a:bodyPr>
-          <a:p>
-            <a:r>
-              <a:rPr lang="en-US" sz="1550" b="0" u="none" strike="noStrike">
-                <a:solidFill>
-                  <a:srgbClr val="1A2E2B"/>
-                </a:solidFill>
-                <a:effectLst/>
-                <a:uFillTx/>
-                <a:latin typeface="Arial"/>
-              </a:rPr>
-              <a:t>One org per deployment; database unreachable from outside Docker network</a:t>
-            </a:r>
-            <a:endParaRPr lang="en-US" sz="1550" b="0" u="none" strike="noStrike">
-              <a:solidFill>
-                <a:srgbClr val="000000"/>
-              </a:solidFill>
-              <a:effectLst/>
-              <a:uFillTx/>
-              <a:latin typeface="Arial"/>
-            </a:endParaRPr>
-          </a:p>
-        </p:txBody>
-      </p:sp>
-      <p:sp>
-        <p:nvSpPr>
-          <p:cNvPr id="137" name=""/>
-          <p:cNvSpPr txBox="1"/>
-          <p:nvPr/>
-        </p:nvSpPr>
-        <p:spPr>
-          <a:xfrm>
-            <a:off x="540000" y="3888000"/>
-            <a:ext cx="50400" cy="493200"/>
-          </a:xfrm>
-          <a:prstGeom prst="rect">
-            <a:avLst/>
-          </a:prstGeom>
-          <a:solidFill>
-            <a:srgbClr val="E6BF71"/>
-          </a:solidFill>
-          <a:ln w="0">
-            <a:noFill/>
-          </a:ln>
-        </p:spPr>
-        <p:txBody>
-          <a:bodyPr lIns="90000" tIns="45000" rIns="90000" bIns="45000" anchor="t">
-            <a:spAutoFit/>
-          </a:bodyPr>
-          <a:p>
-            <a:endParaRPr lang="en-US" sz="1800" b="0" u="none" strike="noStrike">
-              <a:solidFill>
-                <a:srgbClr val="000000"/>
-              </a:solidFill>
-              <a:effectLst/>
-              <a:uFillTx/>
-              <a:latin typeface="Arial"/>
-            </a:endParaRPr>
-          </a:p>
-        </p:txBody>
-      </p:sp>
-      <p:sp>
-        <p:nvSpPr>
-          <p:cNvPr id="138" name=""/>
-          <p:cNvSpPr txBox="1"/>
-          <p:nvPr/>
-        </p:nvSpPr>
-        <p:spPr>
-          <a:xfrm>
-            <a:off x="540000" y="3888000"/>
-            <a:ext cx="9000000" cy="493200"/>
-          </a:xfrm>
-          <a:prstGeom prst="rect">
-            <a:avLst/>
-          </a:prstGeom>
-          <a:solidFill>
-            <a:srgbClr val="FFFFFF"/>
-          </a:solidFill>
-          <a:ln w="7200">
-            <a:solidFill>
-              <a:srgbClr val="DFE9E4"/>
-            </a:solidFill>
-            <a:round/>
-          </a:ln>
-        </p:spPr>
-        <p:txBody>
-          <a:bodyPr lIns="198000" tIns="115200" rIns="126000" bIns="115200" anchor="ctr">
-            <a:normAutofit/>
-          </a:bodyPr>
-          <a:p>
-            <a:r>
-              <a:rPr lang="en-US" sz="1550" b="0" u="none" strike="noStrike">
-                <a:solidFill>
-                  <a:srgbClr val="1A2E2B"/>
-                </a:solidFill>
-                <a:effectLst/>
-                <a:uFillTx/>
-                <a:latin typeface="Arial"/>
-              </a:rPr>
-              <a:t>Documented: architecture/api.md + erd.md + OpenAPI schema</a:t>
-            </a:r>
-            <a:endParaRPr lang="en-US" sz="1550" b="0" u="none" strike="noStrike">
+            <a:r>
+              <a:rPr lang="en-US" sz="1100" b="0" i="1" u="none" strike="noStrike">
+                <a:solidFill>
+                  <a:srgbClr val="4A7A6F"/>
+                </a:solidFill>
+                <a:effectLst/>
+                <a:uFillTx/>
+                <a:latin typeface="Arial"/>
+              </a:rPr>
+              <a:t>Working-hours and requests reports, date-ranged, CSV export.</a:t>
+            </a:r>
+            <a:endParaRPr lang="en-US" sz="1100" b="0" u="none" strike="noStrike">
               <a:solidFill>
                 <a:srgbClr val="000000"/>
               </a:solidFill>
@@ -7161,14 +7648,14 @@
       </p:grpSpPr>
       <p:sp>
         <p:nvSpPr>
-          <p:cNvPr id="139" name=""/>
-          <p:cNvSpPr txBox="1"/>
-          <p:nvPr/>
-        </p:nvSpPr>
-        <p:spPr>
-          <a:xfrm>
-            <a:off x="540000" y="324000"/>
-            <a:ext cx="9000000" cy="576000"/>
+          <p:cNvPr id="157" name=""/>
+          <p:cNvSpPr txBox="1"/>
+          <p:nvPr/>
+        </p:nvSpPr>
+        <p:spPr>
+          <a:xfrm>
+            <a:off x="540000" y="252000"/>
+            <a:ext cx="9000000" cy="504000"/>
           </a:xfrm>
           <a:prstGeom prst="rect">
             <a:avLst/>
@@ -7192,7 +7679,7 @@
                 <a:uFillTx/>
                 <a:latin typeface="Arial"/>
               </a:rPr>
-              <a:t>Security</a:t>
+              <a:t>HR Administration</a:t>
             </a:r>
             <a:endParaRPr lang="en-US" sz="2600" b="0" u="none" strike="noStrike">
               <a:solidFill>
@@ -7207,13 +7694,13 @@
       </p:sp>
       <p:sp>
         <p:nvSpPr>
-          <p:cNvPr id="140" name=""/>
-          <p:cNvSpPr txBox="1"/>
-          <p:nvPr/>
-        </p:nvSpPr>
-        <p:spPr>
-          <a:xfrm>
-            <a:off x="540000" y="900000"/>
+          <p:cNvPr id="158" name=""/>
+          <p:cNvSpPr txBox="1"/>
+          <p:nvPr/>
+        </p:nvSpPr>
+        <p:spPr>
+          <a:xfrm>
+            <a:off x="540000" y="774000"/>
             <a:ext cx="1440000" cy="43200"/>
           </a:xfrm>
           <a:prstGeom prst="rect">
@@ -7242,23 +7729,45 @@
           </a:p>
         </p:txBody>
       </p:sp>
-      <p:sp>
-        <p:nvSpPr>
-          <p:cNvPr id="141" name=""/>
-          <p:cNvSpPr txBox="1"/>
-          <p:nvPr/>
-        </p:nvSpPr>
-        <p:spPr>
-          <a:xfrm>
-            <a:off x="540000" y="1954800"/>
-            <a:ext cx="50400" cy="493200"/>
-          </a:xfrm>
-          <a:prstGeom prst="rect">
-            <a:avLst/>
-          </a:prstGeom>
-          <a:solidFill>
-            <a:srgbClr val="E6BF71"/>
-          </a:solidFill>
+      <p:pic>
+        <p:nvPicPr>
+          <p:cNvPr id="159" name=""/>
+          <p:cNvPicPr/>
+          <p:nvPr/>
+        </p:nvPicPr>
+        <p:blipFill>
+          <a:blip r:embed="rId1"/>
+          <a:stretch/>
+        </p:blipFill>
+        <p:spPr>
+          <a:xfrm>
+            <a:off x="1814400" y="1008000"/>
+            <a:ext cx="6451200" cy="4032000"/>
+          </a:xfrm>
+          <a:prstGeom prst="rect">
+            <a:avLst/>
+          </a:prstGeom>
+          <a:noFill/>
+          <a:ln w="0">
+            <a:noFill/>
+          </a:ln>
+        </p:spPr>
+      </p:pic>
+      <p:sp>
+        <p:nvSpPr>
+          <p:cNvPr id="160" name=""/>
+          <p:cNvSpPr txBox="1"/>
+          <p:nvPr/>
+        </p:nvSpPr>
+        <p:spPr>
+          <a:xfrm>
+            <a:off x="540000" y="5148000"/>
+            <a:ext cx="9000000" cy="360000"/>
+          </a:xfrm>
+          <a:prstGeom prst="rect">
+            <a:avLst/>
+          </a:prstGeom>
+          <a:noFill/>
           <a:ln w="0">
             <a:noFill/>
           </a:ln>
@@ -7268,322 +7777,18 @@
             <a:spAutoFit/>
           </a:bodyPr>
           <a:p>
-            <a:endParaRPr lang="en-US" sz="1800" b="0" u="none" strike="noStrike">
-              <a:solidFill>
-                <a:srgbClr val="000000"/>
-              </a:solidFill>
-              <a:effectLst/>
-              <a:uFillTx/>
-              <a:latin typeface="Arial"/>
-            </a:endParaRPr>
-          </a:p>
-        </p:txBody>
-      </p:sp>
-      <p:sp>
-        <p:nvSpPr>
-          <p:cNvPr id="142" name=""/>
-          <p:cNvSpPr txBox="1"/>
-          <p:nvPr/>
-        </p:nvSpPr>
-        <p:spPr>
-          <a:xfrm>
-            <a:off x="540000" y="1954800"/>
-            <a:ext cx="9000000" cy="493200"/>
-          </a:xfrm>
-          <a:prstGeom prst="rect">
-            <a:avLst/>
-          </a:prstGeom>
-          <a:solidFill>
-            <a:srgbClr val="FFFFFF"/>
-          </a:solidFill>
-          <a:ln w="7200">
-            <a:solidFill>
-              <a:srgbClr val="DFE9E4"/>
-            </a:solidFill>
-            <a:round/>
-          </a:ln>
-        </p:spPr>
-        <p:txBody>
-          <a:bodyPr lIns="198000" tIns="115200" rIns="126000" bIns="115200" anchor="ctr">
-            <a:normAutofit/>
-          </a:bodyPr>
-          <a:p>
-            <a:r>
-              <a:rPr lang="en-US" sz="1550" b="0" u="none" strike="noStrike">
-                <a:solidFill>
-                  <a:srgbClr val="1A2E2B"/>
-                </a:solidFill>
-                <a:effectLst/>
-                <a:uFillTx/>
-                <a:latin typeface="Arial"/>
-              </a:rPr>
-              <a:t>Server-enforced RBAC + ownership scoping on every endpoint</a:t>
-            </a:r>
-            <a:endParaRPr lang="en-US" sz="1550" b="0" u="none" strike="noStrike">
-              <a:solidFill>
-                <a:srgbClr val="000000"/>
-              </a:solidFill>
-              <a:effectLst/>
-              <a:uFillTx/>
-              <a:latin typeface="Arial"/>
-            </a:endParaRPr>
-          </a:p>
-        </p:txBody>
-      </p:sp>
-      <p:sp>
-        <p:nvSpPr>
-          <p:cNvPr id="143" name=""/>
-          <p:cNvSpPr txBox="1"/>
-          <p:nvPr/>
-        </p:nvSpPr>
-        <p:spPr>
-          <a:xfrm>
-            <a:off x="540000" y="2599200"/>
-            <a:ext cx="50400" cy="493200"/>
-          </a:xfrm>
-          <a:prstGeom prst="rect">
-            <a:avLst/>
-          </a:prstGeom>
-          <a:solidFill>
-            <a:srgbClr val="E6BF71"/>
-          </a:solidFill>
-          <a:ln w="0">
-            <a:noFill/>
-          </a:ln>
-        </p:spPr>
-        <p:txBody>
-          <a:bodyPr lIns="90000" tIns="45000" rIns="90000" bIns="45000" anchor="t">
-            <a:spAutoFit/>
-          </a:bodyPr>
-          <a:p>
-            <a:endParaRPr lang="en-US" sz="1800" b="0" u="none" strike="noStrike">
-              <a:solidFill>
-                <a:srgbClr val="000000"/>
-              </a:solidFill>
-              <a:effectLst/>
-              <a:uFillTx/>
-              <a:latin typeface="Arial"/>
-            </a:endParaRPr>
-          </a:p>
-        </p:txBody>
-      </p:sp>
-      <p:sp>
-        <p:nvSpPr>
-          <p:cNvPr id="144" name=""/>
-          <p:cNvSpPr txBox="1"/>
-          <p:nvPr/>
-        </p:nvSpPr>
-        <p:spPr>
-          <a:xfrm>
-            <a:off x="540000" y="2599200"/>
-            <a:ext cx="9000000" cy="493200"/>
-          </a:xfrm>
-          <a:prstGeom prst="rect">
-            <a:avLst/>
-          </a:prstGeom>
-          <a:solidFill>
-            <a:srgbClr val="FFFFFF"/>
-          </a:solidFill>
-          <a:ln w="7200">
-            <a:solidFill>
-              <a:srgbClr val="DFE9E4"/>
-            </a:solidFill>
-            <a:round/>
-          </a:ln>
-        </p:spPr>
-        <p:txBody>
-          <a:bodyPr lIns="198000" tIns="115200" rIns="126000" bIns="115200" anchor="ctr">
-            <a:normAutofit/>
-          </a:bodyPr>
-          <a:p>
-            <a:r>
-              <a:rPr lang="en-US" sz="1550" b="0" u="none" strike="noStrike">
-                <a:solidFill>
-                  <a:srgbClr val="1A2E2B"/>
-                </a:solidFill>
-                <a:effectLst/>
-                <a:uFillTx/>
-                <a:latin typeface="Arial"/>
-              </a:rPr>
-              <a:t>Session auth + CSRF; throttling: 5/5min per account, 20/5min per IP</a:t>
-            </a:r>
-            <a:endParaRPr lang="en-US" sz="1550" b="0" u="none" strike="noStrike">
-              <a:solidFill>
-                <a:srgbClr val="000000"/>
-              </a:solidFill>
-              <a:effectLst/>
-              <a:uFillTx/>
-              <a:latin typeface="Arial"/>
-            </a:endParaRPr>
-          </a:p>
-        </p:txBody>
-      </p:sp>
-      <p:sp>
-        <p:nvSpPr>
-          <p:cNvPr id="145" name=""/>
-          <p:cNvSpPr txBox="1"/>
-          <p:nvPr/>
-        </p:nvSpPr>
-        <p:spPr>
-          <a:xfrm>
-            <a:off x="540000" y="3243600"/>
-            <a:ext cx="50400" cy="493200"/>
-          </a:xfrm>
-          <a:prstGeom prst="rect">
-            <a:avLst/>
-          </a:prstGeom>
-          <a:solidFill>
-            <a:srgbClr val="E6BF71"/>
-          </a:solidFill>
-          <a:ln w="0">
-            <a:noFill/>
-          </a:ln>
-        </p:spPr>
-        <p:txBody>
-          <a:bodyPr lIns="90000" tIns="45000" rIns="90000" bIns="45000" anchor="t">
-            <a:spAutoFit/>
-          </a:bodyPr>
-          <a:p>
-            <a:endParaRPr lang="en-US" sz="1800" b="0" u="none" strike="noStrike">
-              <a:solidFill>
-                <a:srgbClr val="000000"/>
-              </a:solidFill>
-              <a:effectLst/>
-              <a:uFillTx/>
-              <a:latin typeface="Arial"/>
-            </a:endParaRPr>
-          </a:p>
-        </p:txBody>
-      </p:sp>
-      <p:sp>
-        <p:nvSpPr>
-          <p:cNvPr id="146" name=""/>
-          <p:cNvSpPr txBox="1"/>
-          <p:nvPr/>
-        </p:nvSpPr>
-        <p:spPr>
-          <a:xfrm>
-            <a:off x="540000" y="3243600"/>
-            <a:ext cx="9000000" cy="493200"/>
-          </a:xfrm>
-          <a:prstGeom prst="rect">
-            <a:avLst/>
-          </a:prstGeom>
-          <a:solidFill>
-            <a:srgbClr val="FFFFFF"/>
-          </a:solidFill>
-          <a:ln w="7200">
-            <a:solidFill>
-              <a:srgbClr val="DFE9E4"/>
-            </a:solidFill>
-            <a:round/>
-          </a:ln>
-        </p:spPr>
-        <p:txBody>
-          <a:bodyPr lIns="198000" tIns="115200" rIns="126000" bIns="115200" anchor="ctr">
-            <a:normAutofit/>
-          </a:bodyPr>
-          <a:p>
-            <a:r>
-              <a:rPr lang="en-US" sz="1550" b="0" u="none" strike="noStrike">
-                <a:solidFill>
-                  <a:srgbClr val="1A2E2B"/>
-                </a:solidFill>
-                <a:effectLst/>
-                <a:uFillTx/>
-                <a:latin typeface="Arial"/>
-              </a:rPr>
-              <a:t>No secrets in git; database unreachable from outside the Docker network</a:t>
-            </a:r>
-            <a:endParaRPr lang="en-US" sz="1550" b="0" u="none" strike="noStrike">
-              <a:solidFill>
-                <a:srgbClr val="000000"/>
-              </a:solidFill>
-              <a:effectLst/>
-              <a:uFillTx/>
-              <a:latin typeface="Arial"/>
-            </a:endParaRPr>
-          </a:p>
-        </p:txBody>
-      </p:sp>
-      <p:sp>
-        <p:nvSpPr>
-          <p:cNvPr id="147" name=""/>
-          <p:cNvSpPr txBox="1"/>
-          <p:nvPr/>
-        </p:nvSpPr>
-        <p:spPr>
-          <a:xfrm>
-            <a:off x="540000" y="3888000"/>
-            <a:ext cx="50400" cy="493200"/>
-          </a:xfrm>
-          <a:prstGeom prst="rect">
-            <a:avLst/>
-          </a:prstGeom>
-          <a:solidFill>
-            <a:srgbClr val="E6BF71"/>
-          </a:solidFill>
-          <a:ln w="0">
-            <a:noFill/>
-          </a:ln>
-        </p:spPr>
-        <p:txBody>
-          <a:bodyPr lIns="90000" tIns="45000" rIns="90000" bIns="45000" anchor="t">
-            <a:spAutoFit/>
-          </a:bodyPr>
-          <a:p>
-            <a:endParaRPr lang="en-US" sz="1800" b="0" u="none" strike="noStrike">
-              <a:solidFill>
-                <a:srgbClr val="000000"/>
-              </a:solidFill>
-              <a:effectLst/>
-              <a:uFillTx/>
-              <a:latin typeface="Arial"/>
-            </a:endParaRPr>
-          </a:p>
-        </p:txBody>
-      </p:sp>
-      <p:sp>
-        <p:nvSpPr>
-          <p:cNvPr id="148" name=""/>
-          <p:cNvSpPr txBox="1"/>
-          <p:nvPr/>
-        </p:nvSpPr>
-        <p:spPr>
-          <a:xfrm>
-            <a:off x="540000" y="3888000"/>
-            <a:ext cx="9000000" cy="493200"/>
-          </a:xfrm>
-          <a:prstGeom prst="rect">
-            <a:avLst/>
-          </a:prstGeom>
-          <a:solidFill>
-            <a:srgbClr val="FFFFFF"/>
-          </a:solidFill>
-          <a:ln w="7200">
-            <a:solidFill>
-              <a:srgbClr val="DFE9E4"/>
-            </a:solidFill>
-            <a:round/>
-          </a:ln>
-        </p:spPr>
-        <p:txBody>
-          <a:bodyPr lIns="198000" tIns="115200" rIns="126000" bIns="115200" anchor="ctr">
-            <a:normAutofit/>
-          </a:bodyPr>
-          <a:p>
-            <a:r>
-              <a:rPr lang="en-US" sz="1550" b="0" u="none" strike="noStrike">
-                <a:solidFill>
-                  <a:srgbClr val="1A2E2B"/>
-                </a:solidFill>
-                <a:effectLst/>
-                <a:uFillTx/>
-                <a:latin typeface="Arial"/>
-              </a:rPr>
-              <a:t>Evidence: 31 security tests, negative tests per endpoint</a:t>
-            </a:r>
-            <a:endParaRPr lang="en-US" sz="1550" b="0" u="none" strike="noStrike">
+            <a:r>
+              <a:rPr lang="en-US" sz="1100" b="0" i="1" u="none" strike="noStrike">
+                <a:solidFill>
+                  <a:srgbClr val="4A7A6F"/>
+                </a:solidFill>
+                <a:effectLst/>
+                <a:uFillTx/>
+                <a:latin typeface="Arial"/>
+              </a:rPr>
+              <a:t>Request types, review stages, allocations, departments, audit.</a:t>
+            </a:r>
+            <a:endParaRPr lang="en-US" sz="1100" b="0" u="none" strike="noStrike">
               <a:solidFill>
                 <a:srgbClr val="000000"/>
               </a:solidFill>
@@ -7633,7 +7838,7 @@
       </p:grpSpPr>
       <p:sp>
         <p:nvSpPr>
-          <p:cNvPr id="149" name=""/>
+          <p:cNvPr id="161" name=""/>
           <p:cNvSpPr txBox="1"/>
           <p:nvPr/>
         </p:nvSpPr>
@@ -7664,7 +7869,7 @@
                 <a:uFillTx/>
                 <a:latin typeface="Arial"/>
               </a:rPr>
-              <a:t>Deployment &amp; Operations</a:t>
+              <a:t>Architecture</a:t>
             </a:r>
             <a:endParaRPr lang="en-US" sz="2600" b="0" u="none" strike="noStrike">
               <a:solidFill>
@@ -7679,7 +7884,7 @@
       </p:sp>
       <p:sp>
         <p:nvSpPr>
-          <p:cNvPr id="150" name=""/>
+          <p:cNvPr id="162" name=""/>
           <p:cNvSpPr txBox="1"/>
           <p:nvPr/>
         </p:nvSpPr>
@@ -7716,14 +7921,14 @@
       </p:sp>
       <p:sp>
         <p:nvSpPr>
-          <p:cNvPr id="151" name=""/>
-          <p:cNvSpPr txBox="1"/>
-          <p:nvPr/>
-        </p:nvSpPr>
-        <p:spPr>
-          <a:xfrm>
-            <a:off x="540000" y="2352600"/>
-            <a:ext cx="50400" cy="342000"/>
+          <p:cNvPr id="163" name=""/>
+          <p:cNvSpPr txBox="1"/>
+          <p:nvPr/>
+        </p:nvSpPr>
+        <p:spPr>
+          <a:xfrm>
+            <a:off x="540000" y="1954800"/>
+            <a:ext cx="50400" cy="493200"/>
           </a:xfrm>
           <a:prstGeom prst="rect">
             <a:avLst/>
@@ -7753,14 +7958,14 @@
       </p:sp>
       <p:sp>
         <p:nvSpPr>
-          <p:cNvPr id="152" name=""/>
-          <p:cNvSpPr txBox="1"/>
-          <p:nvPr/>
-        </p:nvSpPr>
-        <p:spPr>
-          <a:xfrm>
-            <a:off x="540000" y="2298240"/>
-            <a:ext cx="9000000" cy="450360"/>
+          <p:cNvPr id="164" name=""/>
+          <p:cNvSpPr txBox="1"/>
+          <p:nvPr/>
+        </p:nvSpPr>
+        <p:spPr>
+          <a:xfrm>
+            <a:off x="540000" y="1954800"/>
+            <a:ext cx="9000000" cy="493200"/>
           </a:xfrm>
           <a:prstGeom prst="rect">
             <a:avLst/>
@@ -7789,7 +7994,7 @@
                 <a:uFillTx/>
                 <a:latin typeface="Arial"/>
               </a:rPr>
-              <a:t>Docker Compose stack; Nginx Proxy Manager public edge</a:t>
+              <a:t>React + TypeScript SPA → same-origin Nginx → Django/DRF → PostgreSQL 17</a:t>
             </a:r>
             <a:endParaRPr lang="en-US" sz="1550" b="0" u="none" strike="noStrike">
               <a:solidFill>
@@ -7804,13 +8009,13 @@
       </p:sp>
       <p:sp>
         <p:nvSpPr>
-          <p:cNvPr id="153" name=""/>
-          <p:cNvSpPr txBox="1"/>
-          <p:nvPr/>
-        </p:nvSpPr>
-        <p:spPr>
-          <a:xfrm>
-            <a:off x="540000" y="2845800"/>
+          <p:cNvPr id="165" name=""/>
+          <p:cNvSpPr txBox="1"/>
+          <p:nvPr/>
+        </p:nvSpPr>
+        <p:spPr>
+          <a:xfrm>
+            <a:off x="540000" y="2599200"/>
             <a:ext cx="50400" cy="493200"/>
           </a:xfrm>
           <a:prstGeom prst="rect">
@@ -7841,13 +8046,13 @@
       </p:sp>
       <p:sp>
         <p:nvSpPr>
-          <p:cNvPr id="154" name=""/>
-          <p:cNvSpPr txBox="1"/>
-          <p:nvPr/>
-        </p:nvSpPr>
-        <p:spPr>
-          <a:xfrm>
-            <a:off x="540000" y="2845800"/>
+          <p:cNvPr id="166" name=""/>
+          <p:cNvSpPr txBox="1"/>
+          <p:nvPr/>
+        </p:nvSpPr>
+        <p:spPr>
+          <a:xfrm>
+            <a:off x="540000" y="2599200"/>
             <a:ext cx="9000000" cy="493200"/>
           </a:xfrm>
           <a:prstGeom prst="rect">
@@ -7877,7 +8082,7 @@
                 <a:uFillTx/>
                 <a:latin typeface="Arial"/>
               </a:rPr>
-              <a:t>CI → deploy: push to main → test gate → rebuild → smoke check</a:t>
+              <a:t>Modular monolith: explicit services, scoped querysets, thin API layer</a:t>
             </a:r>
             <a:endParaRPr lang="en-US" sz="1550" b="0" u="none" strike="noStrike">
               <a:solidFill>
@@ -7892,13 +8097,13 @@
       </p:sp>
       <p:sp>
         <p:nvSpPr>
-          <p:cNvPr id="155" name=""/>
-          <p:cNvSpPr txBox="1"/>
-          <p:nvPr/>
-        </p:nvSpPr>
-        <p:spPr>
-          <a:xfrm>
-            <a:off x="540000" y="3490200"/>
+          <p:cNvPr id="167" name=""/>
+          <p:cNvSpPr txBox="1"/>
+          <p:nvPr/>
+        </p:nvSpPr>
+        <p:spPr>
+          <a:xfrm>
+            <a:off x="540000" y="3243600"/>
             <a:ext cx="50400" cy="493200"/>
           </a:xfrm>
           <a:prstGeom prst="rect">
@@ -7929,13 +8134,13 @@
       </p:sp>
       <p:sp>
         <p:nvSpPr>
-          <p:cNvPr id="156" name=""/>
-          <p:cNvSpPr txBox="1"/>
-          <p:nvPr/>
-        </p:nvSpPr>
-        <p:spPr>
-          <a:xfrm>
-            <a:off x="540000" y="3490200"/>
+          <p:cNvPr id="168" name=""/>
+          <p:cNvSpPr txBox="1"/>
+          <p:nvPr/>
+        </p:nvSpPr>
+        <p:spPr>
+          <a:xfrm>
+            <a:off x="540000" y="3243600"/>
             <a:ext cx="9000000" cy="493200"/>
           </a:xfrm>
           <a:prstGeom prst="rect">
@@ -7965,7 +8170,95 @@
                 <a:uFillTx/>
                 <a:latin typeface="Arial"/>
               </a:rPr>
-              <a:t>Portainer for container ops; runbook: deploy/rollback/backup/triage</a:t>
+              <a:t>One org per deployment; database unreachable from outside Docker network</a:t>
+            </a:r>
+            <a:endParaRPr lang="en-US" sz="1550" b="0" u="none" strike="noStrike">
+              <a:solidFill>
+                <a:srgbClr val="000000"/>
+              </a:solidFill>
+              <a:effectLst/>
+              <a:uFillTx/>
+              <a:latin typeface="Arial"/>
+            </a:endParaRPr>
+          </a:p>
+        </p:txBody>
+      </p:sp>
+      <p:sp>
+        <p:nvSpPr>
+          <p:cNvPr id="169" name=""/>
+          <p:cNvSpPr txBox="1"/>
+          <p:nvPr/>
+        </p:nvSpPr>
+        <p:spPr>
+          <a:xfrm>
+            <a:off x="540000" y="3888000"/>
+            <a:ext cx="50400" cy="493200"/>
+          </a:xfrm>
+          <a:prstGeom prst="rect">
+            <a:avLst/>
+          </a:prstGeom>
+          <a:solidFill>
+            <a:srgbClr val="E6BF71"/>
+          </a:solidFill>
+          <a:ln w="0">
+            <a:noFill/>
+          </a:ln>
+        </p:spPr>
+        <p:txBody>
+          <a:bodyPr lIns="90000" tIns="45000" rIns="90000" bIns="45000" anchor="t">
+            <a:spAutoFit/>
+          </a:bodyPr>
+          <a:p>
+            <a:endParaRPr lang="en-US" sz="1800" b="0" u="none" strike="noStrike">
+              <a:solidFill>
+                <a:srgbClr val="000000"/>
+              </a:solidFill>
+              <a:effectLst/>
+              <a:uFillTx/>
+              <a:latin typeface="Arial"/>
+            </a:endParaRPr>
+          </a:p>
+        </p:txBody>
+      </p:sp>
+      <p:sp>
+        <p:nvSpPr>
+          <p:cNvPr id="170" name=""/>
+          <p:cNvSpPr txBox="1"/>
+          <p:nvPr/>
+        </p:nvSpPr>
+        <p:spPr>
+          <a:xfrm>
+            <a:off x="540000" y="3888000"/>
+            <a:ext cx="9000000" cy="493200"/>
+          </a:xfrm>
+          <a:prstGeom prst="rect">
+            <a:avLst/>
+          </a:prstGeom>
+          <a:solidFill>
+            <a:srgbClr val="FFFFFF"/>
+          </a:solidFill>
+          <a:ln w="7200">
+            <a:solidFill>
+              <a:srgbClr val="DFE9E4"/>
+            </a:solidFill>
+            <a:round/>
+          </a:ln>
+        </p:spPr>
+        <p:txBody>
+          <a:bodyPr lIns="198000" tIns="115200" rIns="126000" bIns="115200" anchor="ctr">
+            <a:normAutofit/>
+          </a:bodyPr>
+          <a:p>
+            <a:r>
+              <a:rPr lang="en-US" sz="1550" b="0" u="none" strike="noStrike">
+                <a:solidFill>
+                  <a:srgbClr val="1A2E2B"/>
+                </a:solidFill>
+                <a:effectLst/>
+                <a:uFillTx/>
+                <a:latin typeface="Arial"/>
+              </a:rPr>
+              <a:t>Documented: architecture/api.md + erd.md + OpenAPI schema</a:t>
             </a:r>
             <a:endParaRPr lang="en-US" sz="1550" b="0" u="none" strike="noStrike">
               <a:solidFill>
@@ -8017,7 +8310,7 @@
       </p:grpSpPr>
       <p:sp>
         <p:nvSpPr>
-          <p:cNvPr id="157" name=""/>
+          <p:cNvPr id="171" name=""/>
           <p:cNvSpPr txBox="1"/>
           <p:nvPr/>
         </p:nvSpPr>
@@ -8048,7 +8341,7 @@
                 <a:uFillTx/>
                 <a:latin typeface="Arial"/>
               </a:rPr>
-              <a:t>Spec Kit Process</a:t>
+              <a:t>Security</a:t>
             </a:r>
             <a:endParaRPr lang="en-US" sz="2600" b="0" u="none" strike="noStrike">
               <a:solidFill>
@@ -8063,7 +8356,7 @@
       </p:sp>
       <p:sp>
         <p:nvSpPr>
-          <p:cNvPr id="158" name=""/>
+          <p:cNvPr id="172" name=""/>
           <p:cNvSpPr txBox="1"/>
           <p:nvPr/>
         </p:nvSpPr>
@@ -8100,14 +8393,14 @@
       </p:sp>
       <p:sp>
         <p:nvSpPr>
-          <p:cNvPr id="159" name=""/>
-          <p:cNvSpPr txBox="1"/>
-          <p:nvPr/>
-        </p:nvSpPr>
-        <p:spPr>
-          <a:xfrm>
-            <a:off x="540000" y="2030400"/>
-            <a:ext cx="50400" cy="342000"/>
+          <p:cNvPr id="173" name=""/>
+          <p:cNvSpPr txBox="1"/>
+          <p:nvPr/>
+        </p:nvSpPr>
+        <p:spPr>
+          <a:xfrm>
+            <a:off x="540000" y="1954800"/>
+            <a:ext cx="50400" cy="493200"/>
           </a:xfrm>
           <a:prstGeom prst="rect">
             <a:avLst/>
@@ -8137,14 +8430,14 @@
       </p:sp>
       <p:sp>
         <p:nvSpPr>
-          <p:cNvPr id="160" name=""/>
-          <p:cNvSpPr txBox="1"/>
-          <p:nvPr/>
-        </p:nvSpPr>
-        <p:spPr>
-          <a:xfrm>
-            <a:off x="540000" y="1976040"/>
-            <a:ext cx="9000000" cy="450360"/>
+          <p:cNvPr id="174" name=""/>
+          <p:cNvSpPr txBox="1"/>
+          <p:nvPr/>
+        </p:nvSpPr>
+        <p:spPr>
+          <a:xfrm>
+            <a:off x="540000" y="1954800"/>
+            <a:ext cx="9000000" cy="493200"/>
           </a:xfrm>
           <a:prstGeom prst="rect">
             <a:avLst/>
@@ -8173,7 +8466,7 @@
                 <a:uFillTx/>
                 <a:latin typeface="Arial"/>
               </a:rPr>
-              <a:t>Constitution ratified first (v1.0.0)</a:t>
+              <a:t>Server-enforced RBAC + ownership scoping on every endpoint</a:t>
             </a:r>
             <a:endParaRPr lang="en-US" sz="1550" b="0" u="none" strike="noStrike">
               <a:solidFill>
@@ -8188,13 +8481,13 @@
       </p:sp>
       <p:sp>
         <p:nvSpPr>
-          <p:cNvPr id="161" name=""/>
-          <p:cNvSpPr txBox="1"/>
-          <p:nvPr/>
-        </p:nvSpPr>
-        <p:spPr>
-          <a:xfrm>
-            <a:off x="540000" y="2523600"/>
+          <p:cNvPr id="175" name=""/>
+          <p:cNvSpPr txBox="1"/>
+          <p:nvPr/>
+        </p:nvSpPr>
+        <p:spPr>
+          <a:xfrm>
+            <a:off x="540000" y="2599200"/>
             <a:ext cx="50400" cy="493200"/>
           </a:xfrm>
           <a:prstGeom prst="rect">
@@ -8225,13 +8518,13 @@
       </p:sp>
       <p:sp>
         <p:nvSpPr>
-          <p:cNvPr id="162" name=""/>
-          <p:cNvSpPr txBox="1"/>
-          <p:nvPr/>
-        </p:nvSpPr>
-        <p:spPr>
-          <a:xfrm>
-            <a:off x="540000" y="2523600"/>
+          <p:cNvPr id="176" name=""/>
+          <p:cNvSpPr txBox="1"/>
+          <p:nvPr/>
+        </p:nvSpPr>
+        <p:spPr>
+          <a:xfrm>
+            <a:off x="540000" y="2599200"/>
             <a:ext cx="9000000" cy="493200"/>
           </a:xfrm>
           <a:prstGeom prst="rect">
@@ -8261,7 +8554,7 @@
                 <a:uFillTx/>
                 <a:latin typeface="Arial"/>
               </a:rPr>
-              <a:t>8 features: spec → plan → tasks → implement → evidence → acceptance</a:t>
+              <a:t>Session auth + CSRF; throttling: 5/5min per account, 20/5min per IP</a:t>
             </a:r>
             <a:endParaRPr lang="en-US" sz="1550" b="0" u="none" strike="noStrike">
               <a:solidFill>
@@ -8276,13 +8569,13 @@
       </p:sp>
       <p:sp>
         <p:nvSpPr>
-          <p:cNvPr id="163" name=""/>
-          <p:cNvSpPr txBox="1"/>
-          <p:nvPr/>
-        </p:nvSpPr>
-        <p:spPr>
-          <a:xfrm>
-            <a:off x="540000" y="3168000"/>
+          <p:cNvPr id="177" name=""/>
+          <p:cNvSpPr txBox="1"/>
+          <p:nvPr/>
+        </p:nvSpPr>
+        <p:spPr>
+          <a:xfrm>
+            <a:off x="540000" y="3243600"/>
             <a:ext cx="50400" cy="493200"/>
           </a:xfrm>
           <a:prstGeom prst="rect">
@@ -8313,13 +8606,13 @@
       </p:sp>
       <p:sp>
         <p:nvSpPr>
-          <p:cNvPr id="164" name=""/>
-          <p:cNvSpPr txBox="1"/>
-          <p:nvPr/>
-        </p:nvSpPr>
-        <p:spPr>
-          <a:xfrm>
-            <a:off x="540000" y="3168000"/>
+          <p:cNvPr id="178" name=""/>
+          <p:cNvSpPr txBox="1"/>
+          <p:nvPr/>
+        </p:nvSpPr>
+        <p:spPr>
+          <a:xfrm>
+            <a:off x="540000" y="3243600"/>
             <a:ext cx="9000000" cy="493200"/>
           </a:xfrm>
           <a:prstGeom prst="rect">
@@ -8349,7 +8642,7 @@
                 <a:uFillTx/>
                 <a:latin typeface="Arial"/>
               </a:rPr>
-              <a:t>11 recorded decisions (D-001…D-011): asked, dated, traced</a:t>
+              <a:t>No secrets in git; database unreachable from outside the Docker network</a:t>
             </a:r>
             <a:endParaRPr lang="en-US" sz="1550" b="0" u="none" strike="noStrike">
               <a:solidFill>
@@ -8364,13 +8657,13 @@
       </p:sp>
       <p:sp>
         <p:nvSpPr>
-          <p:cNvPr id="165" name=""/>
-          <p:cNvSpPr txBox="1"/>
-          <p:nvPr/>
-        </p:nvSpPr>
-        <p:spPr>
-          <a:xfrm>
-            <a:off x="540000" y="3812400"/>
+          <p:cNvPr id="179" name=""/>
+          <p:cNvSpPr txBox="1"/>
+          <p:nvPr/>
+        </p:nvSpPr>
+        <p:spPr>
+          <a:xfrm>
+            <a:off x="540000" y="3888000"/>
             <a:ext cx="50400" cy="493200"/>
           </a:xfrm>
           <a:prstGeom prst="rect">
@@ -8401,13 +8694,13 @@
       </p:sp>
       <p:sp>
         <p:nvSpPr>
-          <p:cNvPr id="166" name=""/>
-          <p:cNvSpPr txBox="1"/>
-          <p:nvPr/>
-        </p:nvSpPr>
-        <p:spPr>
-          <a:xfrm>
-            <a:off x="540000" y="3812400"/>
+          <p:cNvPr id="180" name=""/>
+          <p:cNvSpPr txBox="1"/>
+          <p:nvPr/>
+        </p:nvSpPr>
+        <p:spPr>
+          <a:xfrm>
+            <a:off x="540000" y="3888000"/>
             <a:ext cx="9000000" cy="493200"/>
           </a:xfrm>
           <a:prstGeom prst="rect">
@@ -8437,7 +8730,7 @@
                 <a:uFillTx/>
                 <a:latin typeface="Arial"/>
               </a:rPr>
-              <a:t>All phases owner-accepted — including the live deployment</a:t>
+              <a:t>Evidence: 31 security tests, negative tests per endpoint</a:t>
             </a:r>
             <a:endParaRPr lang="en-US" sz="1550" b="0" u="none" strike="noStrike">
               <a:solidFill>
@@ -8489,7 +8782,7 @@
       </p:grpSpPr>
       <p:sp>
         <p:nvSpPr>
-          <p:cNvPr id="167" name=""/>
+          <p:cNvPr id="181" name=""/>
           <p:cNvSpPr txBox="1"/>
           <p:nvPr/>
         </p:nvSpPr>
@@ -8520,7 +8813,7 @@
                 <a:uFillTx/>
                 <a:latin typeface="Arial"/>
               </a:rPr>
-              <a:t>AI-Assisted Development — Disclosed</a:t>
+              <a:t>Deployment &amp; Operations</a:t>
             </a:r>
             <a:endParaRPr lang="en-US" sz="2600" b="0" u="none" strike="noStrike">
               <a:solidFill>
@@ -8535,7 +8828,7 @@
       </p:sp>
       <p:sp>
         <p:nvSpPr>
-          <p:cNvPr id="168" name=""/>
+          <p:cNvPr id="182" name=""/>
           <p:cNvSpPr txBox="1"/>
           <p:nvPr/>
         </p:nvSpPr>
@@ -8572,7 +8865,7 @@
       </p:sp>
       <p:sp>
         <p:nvSpPr>
-          <p:cNvPr id="169" name=""/>
+          <p:cNvPr id="183" name=""/>
           <p:cNvSpPr txBox="1"/>
           <p:nvPr/>
         </p:nvSpPr>
@@ -8609,7 +8902,7 @@
       </p:sp>
       <p:sp>
         <p:nvSpPr>
-          <p:cNvPr id="170" name=""/>
+          <p:cNvPr id="184" name=""/>
           <p:cNvSpPr txBox="1"/>
           <p:nvPr/>
         </p:nvSpPr>
@@ -8645,7 +8938,7 @@
                 <a:uFillTx/>
                 <a:latin typeface="Arial"/>
               </a:rPr>
-              <a:t>Built by Devin (Cognition) under spec-kit discipline</a:t>
+              <a:t>Docker Compose stack; Nginx Proxy Manager public edge</a:t>
             </a:r>
             <a:endParaRPr lang="en-US" sz="1550" b="0" u="none" strike="noStrike">
               <a:solidFill>
@@ -8660,7 +8953,7 @@
       </p:sp>
       <p:sp>
         <p:nvSpPr>
-          <p:cNvPr id="171" name=""/>
+          <p:cNvPr id="185" name=""/>
           <p:cNvSpPr txBox="1"/>
           <p:nvPr/>
         </p:nvSpPr>
@@ -8697,7 +8990,7 @@
       </p:sp>
       <p:sp>
         <p:nvSpPr>
-          <p:cNvPr id="172" name=""/>
+          <p:cNvPr id="186" name=""/>
           <p:cNvSpPr txBox="1"/>
           <p:nvPr/>
         </p:nvSpPr>
@@ -8733,7 +9026,7 @@
                 <a:uFillTx/>
                 <a:latin typeface="Arial"/>
               </a:rPr>
-              <a:t>Humans approved every decision and every phase acceptance</a:t>
+              <a:t>CI → deploy: push to main → test gate → rebuild → smoke check</a:t>
             </a:r>
             <a:endParaRPr lang="en-US" sz="1550" b="0" u="none" strike="noStrike">
               <a:solidFill>
@@ -8748,7 +9041,7 @@
       </p:sp>
       <p:sp>
         <p:nvSpPr>
-          <p:cNvPr id="173" name=""/>
+          <p:cNvPr id="187" name=""/>
           <p:cNvSpPr txBox="1"/>
           <p:nvPr/>
         </p:nvSpPr>
@@ -8785,7 +9078,7 @@
       </p:sp>
       <p:sp>
         <p:nvSpPr>
-          <p:cNvPr id="174" name=""/>
+          <p:cNvPr id="188" name=""/>
           <p:cNvSpPr txBox="1"/>
           <p:nvPr/>
         </p:nvSpPr>
@@ -8821,7 +9114,7 @@
                 <a:uFillTx/>
                 <a:latin typeface="Arial"/>
               </a:rPr>
-              <a:t>Evidence separates verified checks from unrun ones — nothing fabricated</a:t>
+              <a:t>Portainer for container ops; runbook: deploy/rollback/backup/triage</a:t>
             </a:r>
             <a:endParaRPr lang="en-US" sz="1550" b="0" u="none" strike="noStrike">
               <a:solidFill>
@@ -8873,7 +9166,7 @@
       </p:grpSpPr>
       <p:sp>
         <p:nvSpPr>
-          <p:cNvPr id="175" name=""/>
+          <p:cNvPr id="189" name=""/>
           <p:cNvSpPr txBox="1"/>
           <p:nvPr/>
         </p:nvSpPr>
@@ -8904,7 +9197,7 @@
                 <a:uFillTx/>
                 <a:latin typeface="Arial"/>
               </a:rPr>
-              <a:t>Quality Evidence</a:t>
+              <a:t>Spec Kit Process</a:t>
             </a:r>
             <a:endParaRPr lang="en-US" sz="2600" b="0" u="none" strike="noStrike">
               <a:solidFill>
@@ -8919,7 +9212,7 @@
       </p:sp>
       <p:sp>
         <p:nvSpPr>
-          <p:cNvPr id="176" name=""/>
+          <p:cNvPr id="190" name=""/>
           <p:cNvSpPr txBox="1"/>
           <p:nvPr/>
         </p:nvSpPr>
@@ -8956,14 +9249,14 @@
       </p:sp>
       <p:sp>
         <p:nvSpPr>
-          <p:cNvPr id="177" name=""/>
-          <p:cNvSpPr txBox="1"/>
-          <p:nvPr/>
-        </p:nvSpPr>
-        <p:spPr>
-          <a:xfrm>
-            <a:off x="540000" y="2352600"/>
-            <a:ext cx="50400" cy="493200"/>
+          <p:cNvPr id="191" name=""/>
+          <p:cNvSpPr txBox="1"/>
+          <p:nvPr/>
+        </p:nvSpPr>
+        <p:spPr>
+          <a:xfrm>
+            <a:off x="540000" y="2030400"/>
+            <a:ext cx="50400" cy="342000"/>
           </a:xfrm>
           <a:prstGeom prst="rect">
             <a:avLst/>
@@ -8993,14 +9286,14 @@
       </p:sp>
       <p:sp>
         <p:nvSpPr>
-          <p:cNvPr id="178" name=""/>
-          <p:cNvSpPr txBox="1"/>
-          <p:nvPr/>
-        </p:nvSpPr>
-        <p:spPr>
-          <a:xfrm>
-            <a:off x="540000" y="2352600"/>
-            <a:ext cx="9000000" cy="493200"/>
+          <p:cNvPr id="192" name=""/>
+          <p:cNvSpPr txBox="1"/>
+          <p:nvPr/>
+        </p:nvSpPr>
+        <p:spPr>
+          <a:xfrm>
+            <a:off x="540000" y="1976040"/>
+            <a:ext cx="9000000" cy="450360"/>
           </a:xfrm>
           <a:prstGeom prst="rect">
             <a:avLst/>
@@ -9029,7 +9322,7 @@
                 <a:uFillTx/>
                 <a:latin typeface="Arial"/>
               </a:rPr>
-              <a:t>427 backend tests · 45 frontend tests · 60 e2e (13 accessibility)</a:t>
+              <a:t>Constitution ratified first (v1.0.0)</a:t>
             </a:r>
             <a:endParaRPr lang="en-US" sz="1550" b="0" u="none" strike="noStrike">
               <a:solidFill>
@@ -9044,13 +9337,13 @@
       </p:sp>
       <p:sp>
         <p:nvSpPr>
-          <p:cNvPr id="179" name=""/>
-          <p:cNvSpPr txBox="1"/>
-          <p:nvPr/>
-        </p:nvSpPr>
-        <p:spPr>
-          <a:xfrm>
-            <a:off x="540000" y="2997000"/>
+          <p:cNvPr id="193" name=""/>
+          <p:cNvSpPr txBox="1"/>
+          <p:nvPr/>
+        </p:nvSpPr>
+        <p:spPr>
+          <a:xfrm>
+            <a:off x="540000" y="2523600"/>
             <a:ext cx="50400" cy="493200"/>
           </a:xfrm>
           <a:prstGeom prst="rect">
@@ -9081,13 +9374,13 @@
       </p:sp>
       <p:sp>
         <p:nvSpPr>
-          <p:cNvPr id="180" name=""/>
-          <p:cNvSpPr txBox="1"/>
-          <p:nvPr/>
-        </p:nvSpPr>
-        <p:spPr>
-          <a:xfrm>
-            <a:off x="540000" y="2997000"/>
+          <p:cNvPr id="194" name=""/>
+          <p:cNvSpPr txBox="1"/>
+          <p:nvPr/>
+        </p:nvSpPr>
+        <p:spPr>
+          <a:xfrm>
+            <a:off x="540000" y="2523600"/>
             <a:ext cx="9000000" cy="493200"/>
           </a:xfrm>
           <a:prstGeom prst="rect">
@@ -9117,7 +9410,7 @@
                 <a:uFillTx/>
                 <a:latin typeface="Arial"/>
               </a:rPr>
-              <a:t>Load: 500 employees, ~130k entries, 25 users — all p95 budgets pass</a:t>
+              <a:t>8 features: spec → plan → tasks → implement → evidence → acceptance</a:t>
             </a:r>
             <a:endParaRPr lang="en-US" sz="1550" b="0" u="none" strike="noStrike">
               <a:solidFill>
@@ -9132,14 +9425,14 @@
       </p:sp>
       <p:sp>
         <p:nvSpPr>
-          <p:cNvPr id="181" name=""/>
-          <p:cNvSpPr txBox="1"/>
-          <p:nvPr/>
-        </p:nvSpPr>
-        <p:spPr>
-          <a:xfrm>
-            <a:off x="540000" y="3641400"/>
-            <a:ext cx="50400" cy="342000"/>
+          <p:cNvPr id="195" name=""/>
+          <p:cNvSpPr txBox="1"/>
+          <p:nvPr/>
+        </p:nvSpPr>
+        <p:spPr>
+          <a:xfrm>
+            <a:off x="540000" y="3168000"/>
+            <a:ext cx="50400" cy="493200"/>
           </a:xfrm>
           <a:prstGeom prst="rect">
             <a:avLst/>
@@ -9169,14 +9462,14 @@
       </p:sp>
       <p:sp>
         <p:nvSpPr>
-          <p:cNvPr id="182" name=""/>
-          <p:cNvSpPr txBox="1"/>
-          <p:nvPr/>
-        </p:nvSpPr>
-        <p:spPr>
-          <a:xfrm>
-            <a:off x="540000" y="3587040"/>
-            <a:ext cx="9000000" cy="450360"/>
+          <p:cNvPr id="196" name=""/>
+          <p:cNvSpPr txBox="1"/>
+          <p:nvPr/>
+        </p:nvSpPr>
+        <p:spPr>
+          <a:xfrm>
+            <a:off x="540000" y="3168000"/>
+            <a:ext cx="9000000" cy="493200"/>
           </a:xfrm>
           <a:prstGeom prst="rect">
             <a:avLst/>
@@ -9205,7 +9498,95 @@
                 <a:uFillTx/>
                 <a:latin typeface="Arial"/>
               </a:rPr>
-              <a:t>Real N+1 found and fixed under load: 13.3 s → 0.2 s</a:t>
+              <a:t>11 recorded decisions (D-001…D-011): asked, dated, traced</a:t>
+            </a:r>
+            <a:endParaRPr lang="en-US" sz="1550" b="0" u="none" strike="noStrike">
+              <a:solidFill>
+                <a:srgbClr val="000000"/>
+              </a:solidFill>
+              <a:effectLst/>
+              <a:uFillTx/>
+              <a:latin typeface="Arial"/>
+            </a:endParaRPr>
+          </a:p>
+        </p:txBody>
+      </p:sp>
+      <p:sp>
+        <p:nvSpPr>
+          <p:cNvPr id="197" name=""/>
+          <p:cNvSpPr txBox="1"/>
+          <p:nvPr/>
+        </p:nvSpPr>
+        <p:spPr>
+          <a:xfrm>
+            <a:off x="540000" y="3812400"/>
+            <a:ext cx="50400" cy="493200"/>
+          </a:xfrm>
+          <a:prstGeom prst="rect">
+            <a:avLst/>
+          </a:prstGeom>
+          <a:solidFill>
+            <a:srgbClr val="E6BF71"/>
+          </a:solidFill>
+          <a:ln w="0">
+            <a:noFill/>
+          </a:ln>
+        </p:spPr>
+        <p:txBody>
+          <a:bodyPr lIns="90000" tIns="45000" rIns="90000" bIns="45000" anchor="t">
+            <a:spAutoFit/>
+          </a:bodyPr>
+          <a:p>
+            <a:endParaRPr lang="en-US" sz="1800" b="0" u="none" strike="noStrike">
+              <a:solidFill>
+                <a:srgbClr val="000000"/>
+              </a:solidFill>
+              <a:effectLst/>
+              <a:uFillTx/>
+              <a:latin typeface="Arial"/>
+            </a:endParaRPr>
+          </a:p>
+        </p:txBody>
+      </p:sp>
+      <p:sp>
+        <p:nvSpPr>
+          <p:cNvPr id="198" name=""/>
+          <p:cNvSpPr txBox="1"/>
+          <p:nvPr/>
+        </p:nvSpPr>
+        <p:spPr>
+          <a:xfrm>
+            <a:off x="540000" y="3812400"/>
+            <a:ext cx="9000000" cy="493200"/>
+          </a:xfrm>
+          <a:prstGeom prst="rect">
+            <a:avLst/>
+          </a:prstGeom>
+          <a:solidFill>
+            <a:srgbClr val="FFFFFF"/>
+          </a:solidFill>
+          <a:ln w="7200">
+            <a:solidFill>
+              <a:srgbClr val="DFE9E4"/>
+            </a:solidFill>
+            <a:round/>
+          </a:ln>
+        </p:spPr>
+        <p:txBody>
+          <a:bodyPr lIns="198000" tIns="115200" rIns="126000" bIns="115200" anchor="ctr">
+            <a:normAutofit/>
+          </a:bodyPr>
+          <a:p>
+            <a:r>
+              <a:rPr lang="en-US" sz="1550" b="0" u="none" strike="noStrike">
+                <a:solidFill>
+                  <a:srgbClr val="1A2E2B"/>
+                </a:solidFill>
+                <a:effectLst/>
+                <a:uFillTx/>
+                <a:latin typeface="Arial"/>
+              </a:rPr>
+              <a:t>All phases owner-accepted — including the live deployment</a:t>
             </a:r>
             <a:endParaRPr lang="en-US" sz="1550" b="0" u="none" strike="noStrike">
               <a:solidFill>
@@ -9257,7 +9638,7 @@
       </p:grpSpPr>
       <p:sp>
         <p:nvSpPr>
-          <p:cNvPr id="183" name=""/>
+          <p:cNvPr id="199" name=""/>
           <p:cNvSpPr txBox="1"/>
           <p:nvPr/>
         </p:nvSpPr>
@@ -9288,7 +9669,7 @@
                 <a:uFillTx/>
                 <a:latin typeface="Arial"/>
               </a:rPr>
-              <a:t>Honest Limitations</a:t>
+              <a:t>AI-Assisted Development — Disclosed</a:t>
             </a:r>
             <a:endParaRPr lang="en-US" sz="2600" b="0" u="none" strike="noStrike">
               <a:solidFill>
@@ -9303,7 +9684,7 @@
       </p:sp>
       <p:sp>
         <p:nvSpPr>
-          <p:cNvPr id="184" name=""/>
+          <p:cNvPr id="200" name=""/>
           <p:cNvSpPr txBox="1"/>
           <p:nvPr/>
         </p:nvSpPr>
@@ -9340,14 +9721,14 @@
       </p:sp>
       <p:sp>
         <p:nvSpPr>
-          <p:cNvPr id="185" name=""/>
-          <p:cNvSpPr txBox="1"/>
-          <p:nvPr/>
-        </p:nvSpPr>
-        <p:spPr>
-          <a:xfrm>
-            <a:off x="540000" y="2277000"/>
-            <a:ext cx="50400" cy="493200"/>
+          <p:cNvPr id="201" name=""/>
+          <p:cNvSpPr txBox="1"/>
+          <p:nvPr/>
+        </p:nvSpPr>
+        <p:spPr>
+          <a:xfrm>
+            <a:off x="540000" y="2352600"/>
+            <a:ext cx="50400" cy="342000"/>
           </a:xfrm>
           <a:prstGeom prst="rect">
             <a:avLst/>
@@ -9377,14 +9758,14 @@
       </p:sp>
       <p:sp>
         <p:nvSpPr>
-          <p:cNvPr id="186" name=""/>
-          <p:cNvSpPr txBox="1"/>
-          <p:nvPr/>
-        </p:nvSpPr>
-        <p:spPr>
-          <a:xfrm>
-            <a:off x="540000" y="2277000"/>
-            <a:ext cx="9000000" cy="493200"/>
+          <p:cNvPr id="202" name=""/>
+          <p:cNvSpPr txBox="1"/>
+          <p:nvPr/>
+        </p:nvSpPr>
+        <p:spPr>
+          <a:xfrm>
+            <a:off x="540000" y="2298240"/>
+            <a:ext cx="9000000" cy="450360"/>
           </a:xfrm>
           <a:prstGeom prst="rect">
             <a:avLst/>
@@ -9413,7 +9794,7 @@
                 <a:uFillTx/>
                 <a:latin typeface="Arial"/>
               </a:rPr>
-              <a:t>HTTP only — domain + TLS pending (one click once a domain exists)</a:t>
+              <a:t>Built by Devin (Cognition) under spec-kit discipline</a:t>
             </a:r>
             <a:endParaRPr lang="en-US" sz="1550" b="0" u="none" strike="noStrike">
               <a:solidFill>
@@ -9428,13 +9809,13 @@
       </p:sp>
       <p:sp>
         <p:nvSpPr>
-          <p:cNvPr id="187" name=""/>
-          <p:cNvSpPr txBox="1"/>
-          <p:nvPr/>
-        </p:nvSpPr>
-        <p:spPr>
-          <a:xfrm>
-            <a:off x="540000" y="2921400"/>
+          <p:cNvPr id="203" name=""/>
+          <p:cNvSpPr txBox="1"/>
+          <p:nvPr/>
+        </p:nvSpPr>
+        <p:spPr>
+          <a:xfrm>
+            <a:off x="540000" y="2845800"/>
             <a:ext cx="50400" cy="493200"/>
           </a:xfrm>
           <a:prstGeom prst="rect">
@@ -9465,13 +9846,13 @@
       </p:sp>
       <p:sp>
         <p:nvSpPr>
-          <p:cNvPr id="188" name=""/>
-          <p:cNvSpPr txBox="1"/>
-          <p:nvPr/>
-        </p:nvSpPr>
-        <p:spPr>
-          <a:xfrm>
-            <a:off x="540000" y="2921400"/>
+          <p:cNvPr id="204" name=""/>
+          <p:cNvSpPr txBox="1"/>
+          <p:nvPr/>
+        </p:nvSpPr>
+        <p:spPr>
+          <a:xfrm>
+            <a:off x="540000" y="2845800"/>
             <a:ext cx="9000000" cy="493200"/>
           </a:xfrm>
           <a:prstGeom prst="rect">
@@ -9501,7 +9882,7 @@
                 <a:uFillTx/>
                 <a:latin typeface="Arial"/>
               </a:rPr>
-              <a:t>Demo quick-login shares a password — demo mode, off before real data</a:t>
+              <a:t>Humans approved every decision and every phase acceptance</a:t>
             </a:r>
             <a:endParaRPr lang="en-US" sz="1550" b="0" u="none" strike="noStrike">
               <a:solidFill>
@@ -9516,13 +9897,13 @@
       </p:sp>
       <p:sp>
         <p:nvSpPr>
-          <p:cNvPr id="189" name=""/>
-          <p:cNvSpPr txBox="1"/>
-          <p:nvPr/>
-        </p:nvSpPr>
-        <p:spPr>
-          <a:xfrm>
-            <a:off x="540000" y="3565800"/>
+          <p:cNvPr id="205" name=""/>
+          <p:cNvSpPr txBox="1"/>
+          <p:nvPr/>
+        </p:nvSpPr>
+        <p:spPr>
+          <a:xfrm>
+            <a:off x="540000" y="3490200"/>
             <a:ext cx="50400" cy="493200"/>
           </a:xfrm>
           <a:prstGeom prst="rect">
@@ -9553,13 +9934,13 @@
       </p:sp>
       <p:sp>
         <p:nvSpPr>
-          <p:cNvPr id="190" name=""/>
-          <p:cNvSpPr txBox="1"/>
-          <p:nvPr/>
-        </p:nvSpPr>
-        <p:spPr>
-          <a:xfrm>
-            <a:off x="540000" y="3565800"/>
+          <p:cNvPr id="206" name=""/>
+          <p:cNvSpPr txBox="1"/>
+          <p:nvPr/>
+        </p:nvSpPr>
+        <p:spPr>
+          <a:xfrm>
+            <a:off x="540000" y="3490200"/>
             <a:ext cx="9000000" cy="493200"/>
           </a:xfrm>
           <a:prstGeom prst="rect">
@@ -9589,7 +9970,7 @@
                 <a:uFillTx/>
                 <a:latin typeface="Arial"/>
               </a:rPr>
-              <a:t>No automated backups (owner-waived); attachments deferred</a:t>
+              <a:t>Evidence separates verified checks from unrun ones — nothing fabricated</a:t>
             </a:r>
             <a:endParaRPr lang="en-US" sz="1550" b="0" u="none" strike="noStrike">
               <a:solidFill>
@@ -9621,7 +10002,7 @@
     <p:bg>
       <p:bgPr>
         <a:solidFill>
-          <a:srgbClr val="103E3A"/>
+          <a:srgbClr val="F4F8F5"/>
         </a:solidFill>
       </p:bgPr>
     </p:bg>
@@ -9641,14 +10022,14 @@
       </p:grpSpPr>
       <p:sp>
         <p:nvSpPr>
-          <p:cNvPr id="191" name=""/>
-          <p:cNvSpPr txBox="1"/>
-          <p:nvPr/>
-        </p:nvSpPr>
-        <p:spPr>
-          <a:xfrm>
-            <a:off x="720000" y="1440000"/>
-            <a:ext cx="8640000" cy="1080000"/>
+          <p:cNvPr id="207" name=""/>
+          <p:cNvSpPr txBox="1"/>
+          <p:nvPr/>
+        </p:nvSpPr>
+        <p:spPr>
+          <a:xfrm>
+            <a:off x="540000" y="324000"/>
+            <a:ext cx="9000000" cy="576000"/>
           </a:xfrm>
           <a:prstGeom prst="rect">
             <a:avLst/>
@@ -9664,48 +10045,37 @@
           </a:bodyPr>
           <a:p>
             <a:r>
-              <a:rPr lang="en-US" sz="4400" b="1" u="none" strike="noStrike">
-                <a:solidFill>
-                  <a:srgbClr val="FFFFFF"/>
-                </a:solidFill>
-                <a:effectLst/>
-                <a:uFillTx/>
-                <a:latin typeface="Arial"/>
-              </a:rPr>
-              <a:t>Thank You — </a:t>
-            </a:r>
-            <a:r>
-              <a:rPr lang="hi-IN" sz="4400" b="0" u="none" strike="noStrike">
-                <a:solidFill>
-                  <a:srgbClr val="FFFFFF"/>
-                </a:solidFill>
-                <a:effectLst/>
-                <a:uFillTx/>
-                <a:latin typeface="Arial"/>
-              </a:rPr>
-              <a:t>شكراً</a:t>
-            </a:r>
-            <a:endParaRPr lang="en-US" sz="4400" b="0" u="none" strike="noStrike">
-              <a:solidFill>
-                <a:srgbClr val="FFFFFF"/>
-              </a:solidFill>
-              <a:effectLst/>
-              <a:uFillTx/>
-              <a:latin typeface="Arial"/>
-            </a:endParaRPr>
-          </a:p>
-        </p:txBody>
-      </p:sp>
-      <p:sp>
-        <p:nvSpPr>
-          <p:cNvPr id="192" name=""/>
-          <p:cNvSpPr txBox="1"/>
-          <p:nvPr/>
-        </p:nvSpPr>
-        <p:spPr>
-          <a:xfrm>
-            <a:off x="720000" y="2664000"/>
-            <a:ext cx="2160000" cy="50400"/>
+              <a:rPr lang="en-US" sz="2600" b="1" u="none" strike="noStrike">
+                <a:solidFill>
+                  <a:srgbClr val="103E3A"/>
+                </a:solidFill>
+                <a:effectLst/>
+                <a:uFillTx/>
+                <a:latin typeface="Arial"/>
+              </a:rPr>
+              <a:t>Quality Evidence</a:t>
+            </a:r>
+            <a:endParaRPr lang="en-US" sz="2600" b="0" u="none" strike="noStrike">
+              <a:solidFill>
+                <a:srgbClr val="000000"/>
+              </a:solidFill>
+              <a:effectLst/>
+              <a:uFillTx/>
+              <a:latin typeface="Arial"/>
+            </a:endParaRPr>
+          </a:p>
+        </p:txBody>
+      </p:sp>
+      <p:sp>
+        <p:nvSpPr>
+          <p:cNvPr id="208" name=""/>
+          <p:cNvSpPr txBox="1"/>
+          <p:nvPr/>
+        </p:nvSpPr>
+        <p:spPr>
+          <a:xfrm>
+            <a:off x="540000" y="900000"/>
+            <a:ext cx="1440000" cy="43200"/>
           </a:xfrm>
           <a:prstGeom prst="rect">
             <a:avLst/>
@@ -9718,7 +10088,7 @@
           </a:ln>
         </p:spPr>
         <p:txBody>
-          <a:bodyPr lIns="90000" tIns="5400" rIns="90000" bIns="5400" anchor="t">
+          <a:bodyPr lIns="90000" tIns="-1800" rIns="90000" bIns="-1800" anchor="t">
             <a:spAutoFit/>
           </a:bodyPr>
           <a:p>
@@ -9735,14 +10105,315 @@
       </p:sp>
       <p:sp>
         <p:nvSpPr>
-          <p:cNvPr id="193" name=""/>
-          <p:cNvSpPr txBox="1"/>
-          <p:nvPr/>
-        </p:nvSpPr>
-        <p:spPr>
-          <a:xfrm>
-            <a:off x="720000" y="3024000"/>
-            <a:ext cx="8640000" cy="1620000"/>
+          <p:cNvPr id="209" name=""/>
+          <p:cNvSpPr txBox="1"/>
+          <p:nvPr/>
+        </p:nvSpPr>
+        <p:spPr>
+          <a:xfrm>
+            <a:off x="540000" y="2352600"/>
+            <a:ext cx="50400" cy="493200"/>
+          </a:xfrm>
+          <a:prstGeom prst="rect">
+            <a:avLst/>
+          </a:prstGeom>
+          <a:solidFill>
+            <a:srgbClr val="E6BF71"/>
+          </a:solidFill>
+          <a:ln w="0">
+            <a:noFill/>
+          </a:ln>
+        </p:spPr>
+        <p:txBody>
+          <a:bodyPr lIns="90000" tIns="45000" rIns="90000" bIns="45000" anchor="t">
+            <a:spAutoFit/>
+          </a:bodyPr>
+          <a:p>
+            <a:endParaRPr lang="en-US" sz="1800" b="0" u="none" strike="noStrike">
+              <a:solidFill>
+                <a:srgbClr val="000000"/>
+              </a:solidFill>
+              <a:effectLst/>
+              <a:uFillTx/>
+              <a:latin typeface="Arial"/>
+            </a:endParaRPr>
+          </a:p>
+        </p:txBody>
+      </p:sp>
+      <p:sp>
+        <p:nvSpPr>
+          <p:cNvPr id="210" name=""/>
+          <p:cNvSpPr txBox="1"/>
+          <p:nvPr/>
+        </p:nvSpPr>
+        <p:spPr>
+          <a:xfrm>
+            <a:off x="540000" y="2352600"/>
+            <a:ext cx="9000000" cy="493200"/>
+          </a:xfrm>
+          <a:prstGeom prst="rect">
+            <a:avLst/>
+          </a:prstGeom>
+          <a:solidFill>
+            <a:srgbClr val="FFFFFF"/>
+          </a:solidFill>
+          <a:ln w="7200">
+            <a:solidFill>
+              <a:srgbClr val="DFE9E4"/>
+            </a:solidFill>
+            <a:round/>
+          </a:ln>
+        </p:spPr>
+        <p:txBody>
+          <a:bodyPr lIns="198000" tIns="115200" rIns="126000" bIns="115200" anchor="ctr">
+            <a:normAutofit/>
+          </a:bodyPr>
+          <a:p>
+            <a:r>
+              <a:rPr lang="en-US" sz="1550" b="0" u="none" strike="noStrike">
+                <a:solidFill>
+                  <a:srgbClr val="1A2E2B"/>
+                </a:solidFill>
+                <a:effectLst/>
+                <a:uFillTx/>
+                <a:latin typeface="Arial"/>
+              </a:rPr>
+              <a:t>427 backend tests · 45 frontend tests · 60 e2e (13 accessibility)</a:t>
+            </a:r>
+            <a:endParaRPr lang="en-US" sz="1550" b="0" u="none" strike="noStrike">
+              <a:solidFill>
+                <a:srgbClr val="000000"/>
+              </a:solidFill>
+              <a:effectLst/>
+              <a:uFillTx/>
+              <a:latin typeface="Arial"/>
+            </a:endParaRPr>
+          </a:p>
+        </p:txBody>
+      </p:sp>
+      <p:sp>
+        <p:nvSpPr>
+          <p:cNvPr id="211" name=""/>
+          <p:cNvSpPr txBox="1"/>
+          <p:nvPr/>
+        </p:nvSpPr>
+        <p:spPr>
+          <a:xfrm>
+            <a:off x="540000" y="2997000"/>
+            <a:ext cx="50400" cy="493200"/>
+          </a:xfrm>
+          <a:prstGeom prst="rect">
+            <a:avLst/>
+          </a:prstGeom>
+          <a:solidFill>
+            <a:srgbClr val="E6BF71"/>
+          </a:solidFill>
+          <a:ln w="0">
+            <a:noFill/>
+          </a:ln>
+        </p:spPr>
+        <p:txBody>
+          <a:bodyPr lIns="90000" tIns="45000" rIns="90000" bIns="45000" anchor="t">
+            <a:spAutoFit/>
+          </a:bodyPr>
+          <a:p>
+            <a:endParaRPr lang="en-US" sz="1800" b="0" u="none" strike="noStrike">
+              <a:solidFill>
+                <a:srgbClr val="000000"/>
+              </a:solidFill>
+              <a:effectLst/>
+              <a:uFillTx/>
+              <a:latin typeface="Arial"/>
+            </a:endParaRPr>
+          </a:p>
+        </p:txBody>
+      </p:sp>
+      <p:sp>
+        <p:nvSpPr>
+          <p:cNvPr id="212" name=""/>
+          <p:cNvSpPr txBox="1"/>
+          <p:nvPr/>
+        </p:nvSpPr>
+        <p:spPr>
+          <a:xfrm>
+            <a:off x="540000" y="2997000"/>
+            <a:ext cx="9000000" cy="493200"/>
+          </a:xfrm>
+          <a:prstGeom prst="rect">
+            <a:avLst/>
+          </a:prstGeom>
+          <a:solidFill>
+            <a:srgbClr val="FFFFFF"/>
+          </a:solidFill>
+          <a:ln w="7200">
+            <a:solidFill>
+              <a:srgbClr val="DFE9E4"/>
+            </a:solidFill>
+            <a:round/>
+          </a:ln>
+        </p:spPr>
+        <p:txBody>
+          <a:bodyPr lIns="198000" tIns="115200" rIns="126000" bIns="115200" anchor="ctr">
+            <a:normAutofit/>
+          </a:bodyPr>
+          <a:p>
+            <a:r>
+              <a:rPr lang="en-US" sz="1550" b="0" u="none" strike="noStrike">
+                <a:solidFill>
+                  <a:srgbClr val="1A2E2B"/>
+                </a:solidFill>
+                <a:effectLst/>
+                <a:uFillTx/>
+                <a:latin typeface="Arial"/>
+              </a:rPr>
+              <a:t>Load: 500 employees, ~130k entries, 25 users — all p95 budgets pass</a:t>
+            </a:r>
+            <a:endParaRPr lang="en-US" sz="1550" b="0" u="none" strike="noStrike">
+              <a:solidFill>
+                <a:srgbClr val="000000"/>
+              </a:solidFill>
+              <a:effectLst/>
+              <a:uFillTx/>
+              <a:latin typeface="Arial"/>
+            </a:endParaRPr>
+          </a:p>
+        </p:txBody>
+      </p:sp>
+      <p:sp>
+        <p:nvSpPr>
+          <p:cNvPr id="213" name=""/>
+          <p:cNvSpPr txBox="1"/>
+          <p:nvPr/>
+        </p:nvSpPr>
+        <p:spPr>
+          <a:xfrm>
+            <a:off x="540000" y="3641400"/>
+            <a:ext cx="50400" cy="342000"/>
+          </a:xfrm>
+          <a:prstGeom prst="rect">
+            <a:avLst/>
+          </a:prstGeom>
+          <a:solidFill>
+            <a:srgbClr val="E6BF71"/>
+          </a:solidFill>
+          <a:ln w="0">
+            <a:noFill/>
+          </a:ln>
+        </p:spPr>
+        <p:txBody>
+          <a:bodyPr lIns="90000" tIns="45000" rIns="90000" bIns="45000" anchor="t">
+            <a:spAutoFit/>
+          </a:bodyPr>
+          <a:p>
+            <a:endParaRPr lang="en-US" sz="1800" b="0" u="none" strike="noStrike">
+              <a:solidFill>
+                <a:srgbClr val="000000"/>
+              </a:solidFill>
+              <a:effectLst/>
+              <a:uFillTx/>
+              <a:latin typeface="Arial"/>
+            </a:endParaRPr>
+          </a:p>
+        </p:txBody>
+      </p:sp>
+      <p:sp>
+        <p:nvSpPr>
+          <p:cNvPr id="214" name=""/>
+          <p:cNvSpPr txBox="1"/>
+          <p:nvPr/>
+        </p:nvSpPr>
+        <p:spPr>
+          <a:xfrm>
+            <a:off x="540000" y="3587040"/>
+            <a:ext cx="9000000" cy="450360"/>
+          </a:xfrm>
+          <a:prstGeom prst="rect">
+            <a:avLst/>
+          </a:prstGeom>
+          <a:solidFill>
+            <a:srgbClr val="FFFFFF"/>
+          </a:solidFill>
+          <a:ln w="7200">
+            <a:solidFill>
+              <a:srgbClr val="DFE9E4"/>
+            </a:solidFill>
+            <a:round/>
+          </a:ln>
+        </p:spPr>
+        <p:txBody>
+          <a:bodyPr lIns="198000" tIns="115200" rIns="126000" bIns="115200" anchor="ctr">
+            <a:normAutofit/>
+          </a:bodyPr>
+          <a:p>
+            <a:r>
+              <a:rPr lang="en-US" sz="1550" b="0" u="none" strike="noStrike">
+                <a:solidFill>
+                  <a:srgbClr val="1A2E2B"/>
+                </a:solidFill>
+                <a:effectLst/>
+                <a:uFillTx/>
+                <a:latin typeface="Arial"/>
+              </a:rPr>
+              <a:t>Real N+1 found and fixed under load: 13.3 s → 0.2 s</a:t>
+            </a:r>
+            <a:endParaRPr lang="en-US" sz="1550" b="0" u="none" strike="noStrike">
+              <a:solidFill>
+                <a:srgbClr val="000000"/>
+              </a:solidFill>
+              <a:effectLst/>
+              <a:uFillTx/>
+              <a:latin typeface="Arial"/>
+            </a:endParaRPr>
+          </a:p>
+        </p:txBody>
+      </p:sp>
+    </p:spTree>
+  </p:cSld>
+  <mc:AlternateContent>
+    <mc:Choice Requires="p14">
+      <p:transition spd="slow" p14:dur="2000"/>
+    </mc:Choice>
+    <mc:Fallback>
+      <p:transition spd="slow"/>
+    </mc:Fallback>
+  </mc:AlternateContent>
+</p:sld>
+</file>
+
+<file path=ppt/slides/slide29.xml><?xml version="1.0" encoding="utf-8"?>
+<p:sld xmlns:a="http://schemas.openxmlformats.org/drawingml/2006/main" xmlns:p="http://schemas.openxmlformats.org/presentationml/2006/main" xmlns:r="http://schemas.openxmlformats.org/officeDocument/2006/relationships" xmlns:p14="http://schemas.microsoft.com/office/powerpoint/2010/main" xmlns:p15="http://schemas.microsoft.com/office/powerpoint/2012/main" xmlns:mc="http://schemas.openxmlformats.org/markup-compatibility/2006">
+  <p:cSld>
+    <p:bg>
+      <p:bgPr>
+        <a:solidFill>
+          <a:srgbClr val="F4F8F5"/>
+        </a:solidFill>
+      </p:bgPr>
+    </p:bg>
+    <p:spTree>
+      <p:nvGrpSpPr>
+        <p:cNvPr id="1" name=""/>
+        <p:cNvGrpSpPr/>
+        <p:nvPr/>
+      </p:nvGrpSpPr>
+      <p:grpSpPr>
+        <a:xfrm>
+          <a:off x="0" y="0"/>
+          <a:ext cx="0" cy="0"/>
+          <a:chOff x="0" y="0"/>
+          <a:chExt cx="0" cy="0"/>
+        </a:xfrm>
+      </p:grpSpPr>
+      <p:sp>
+        <p:nvSpPr>
+          <p:cNvPr id="215" name=""/>
+          <p:cNvSpPr txBox="1"/>
+          <p:nvPr/>
+        </p:nvSpPr>
+        <p:spPr>
+          <a:xfrm>
+            <a:off x="540000" y="324000"/>
+            <a:ext cx="9000000" cy="576000"/>
           </a:xfrm>
           <a:prstGeom prst="rect">
             <a:avLst/>
@@ -9758,83 +10429,320 @@
           </a:bodyPr>
           <a:p>
             <a:r>
-              <a:rPr lang="en-US" sz="1600" b="0" u="none" strike="noStrike">
-                <a:solidFill>
-                  <a:srgbClr val="C6DFD5"/>
-                </a:solidFill>
-                <a:effectLst/>
-                <a:uFillTx/>
-                <a:latin typeface="Arial"/>
-              </a:rPr>
-              <a:t>Complete, live, bilingual, accessible employee-operations product</a:t>
-            </a:r>
-            <a:endParaRPr lang="en-US" sz="1600" b="0" u="none" strike="noStrike">
-              <a:solidFill>
-                <a:srgbClr val="FFFFFF"/>
-              </a:solidFill>
-              <a:effectLst/>
-              <a:uFillTx/>
-              <a:latin typeface="Arial"/>
-            </a:endParaRPr>
-          </a:p>
-          <a:p>
-            <a:r>
-              <a:rPr lang="en-US" sz="1600" b="0" u="none" strike="noStrike">
-                <a:solidFill>
-                  <a:srgbClr val="C6DFD5"/>
-                </a:solidFill>
-                <a:effectLst/>
-                <a:uFillTx/>
-                <a:latin typeface="Arial"/>
-              </a:rPr>
-              <a:t>Spec-led · tested · deployed · operable</a:t>
-            </a:r>
-            <a:endParaRPr lang="en-US" sz="1600" b="0" u="none" strike="noStrike">
-              <a:solidFill>
-                <a:srgbClr val="FFFFFF"/>
-              </a:solidFill>
-              <a:effectLst/>
-              <a:uFillTx/>
-              <a:latin typeface="Arial"/>
-            </a:endParaRPr>
-          </a:p>
-          <a:p>
-            <a:r>
-              <a:rPr lang="en-US" sz="1600" b="0" u="none" strike="noStrike">
-                <a:solidFill>
-                  <a:srgbClr val="C6DFD5"/>
-                </a:solidFill>
-                <a:effectLst/>
-                <a:uFillTx/>
-                <a:latin typeface="Arial"/>
-              </a:rPr>
-              <a:t>«</a:t>
-            </a:r>
-            <a:r>
-              <a:rPr lang="hi-IN" sz="1600" b="0" u="none" strike="noStrike">
-                <a:solidFill>
-                  <a:srgbClr val="C6DFD5"/>
-                </a:solidFill>
-                <a:effectLst/>
-                <a:uFillTx/>
-                <a:latin typeface="Arial"/>
-              </a:rPr>
-              <a:t>سجّل وانسَ — ديمومة مستمرة</a:t>
-            </a:r>
-            <a:r>
-              <a:rPr lang="en-US" sz="1600" b="0" u="none" strike="noStrike">
-                <a:solidFill>
-                  <a:srgbClr val="C6DFD5"/>
-                </a:solidFill>
-                <a:effectLst/>
-                <a:uFillTx/>
-                <a:latin typeface="Arial"/>
-              </a:rPr>
-              <a:t>»</a:t>
-            </a:r>
-            <a:endParaRPr lang="en-US" sz="1600" b="0" u="none" strike="noStrike">
-              <a:solidFill>
-                <a:srgbClr val="FFFFFF"/>
+              <a:rPr lang="en-US" sz="2600" b="1" u="none" strike="noStrike">
+                <a:solidFill>
+                  <a:srgbClr val="103E3A"/>
+                </a:solidFill>
+                <a:effectLst/>
+                <a:uFillTx/>
+                <a:latin typeface="Arial"/>
+              </a:rPr>
+              <a:t>Honest Limitations</a:t>
+            </a:r>
+            <a:endParaRPr lang="en-US" sz="2600" b="0" u="none" strike="noStrike">
+              <a:solidFill>
+                <a:srgbClr val="000000"/>
+              </a:solidFill>
+              <a:effectLst/>
+              <a:uFillTx/>
+              <a:latin typeface="Arial"/>
+            </a:endParaRPr>
+          </a:p>
+        </p:txBody>
+      </p:sp>
+      <p:sp>
+        <p:nvSpPr>
+          <p:cNvPr id="216" name=""/>
+          <p:cNvSpPr txBox="1"/>
+          <p:nvPr/>
+        </p:nvSpPr>
+        <p:spPr>
+          <a:xfrm>
+            <a:off x="540000" y="900000"/>
+            <a:ext cx="1440000" cy="43200"/>
+          </a:xfrm>
+          <a:prstGeom prst="rect">
+            <a:avLst/>
+          </a:prstGeom>
+          <a:solidFill>
+            <a:srgbClr val="E6BF71"/>
+          </a:solidFill>
+          <a:ln w="0">
+            <a:noFill/>
+          </a:ln>
+        </p:spPr>
+        <p:txBody>
+          <a:bodyPr lIns="90000" tIns="-1800" rIns="90000" bIns="-1800" anchor="t">
+            <a:spAutoFit/>
+          </a:bodyPr>
+          <a:p>
+            <a:endParaRPr lang="en-US" sz="1800" b="0" u="none" strike="noStrike">
+              <a:solidFill>
+                <a:srgbClr val="000000"/>
+              </a:solidFill>
+              <a:effectLst/>
+              <a:uFillTx/>
+              <a:latin typeface="Arial"/>
+            </a:endParaRPr>
+          </a:p>
+        </p:txBody>
+      </p:sp>
+      <p:sp>
+        <p:nvSpPr>
+          <p:cNvPr id="217" name=""/>
+          <p:cNvSpPr txBox="1"/>
+          <p:nvPr/>
+        </p:nvSpPr>
+        <p:spPr>
+          <a:xfrm>
+            <a:off x="540000" y="2277000"/>
+            <a:ext cx="50400" cy="493200"/>
+          </a:xfrm>
+          <a:prstGeom prst="rect">
+            <a:avLst/>
+          </a:prstGeom>
+          <a:solidFill>
+            <a:srgbClr val="E6BF71"/>
+          </a:solidFill>
+          <a:ln w="0">
+            <a:noFill/>
+          </a:ln>
+        </p:spPr>
+        <p:txBody>
+          <a:bodyPr lIns="90000" tIns="45000" rIns="90000" bIns="45000" anchor="t">
+            <a:spAutoFit/>
+          </a:bodyPr>
+          <a:p>
+            <a:endParaRPr lang="en-US" sz="1800" b="0" u="none" strike="noStrike">
+              <a:solidFill>
+                <a:srgbClr val="000000"/>
+              </a:solidFill>
+              <a:effectLst/>
+              <a:uFillTx/>
+              <a:latin typeface="Arial"/>
+            </a:endParaRPr>
+          </a:p>
+        </p:txBody>
+      </p:sp>
+      <p:sp>
+        <p:nvSpPr>
+          <p:cNvPr id="218" name=""/>
+          <p:cNvSpPr txBox="1"/>
+          <p:nvPr/>
+        </p:nvSpPr>
+        <p:spPr>
+          <a:xfrm>
+            <a:off x="540000" y="2277000"/>
+            <a:ext cx="9000000" cy="493200"/>
+          </a:xfrm>
+          <a:prstGeom prst="rect">
+            <a:avLst/>
+          </a:prstGeom>
+          <a:solidFill>
+            <a:srgbClr val="FFFFFF"/>
+          </a:solidFill>
+          <a:ln w="7200">
+            <a:solidFill>
+              <a:srgbClr val="DFE9E4"/>
+            </a:solidFill>
+            <a:round/>
+          </a:ln>
+        </p:spPr>
+        <p:txBody>
+          <a:bodyPr lIns="198000" tIns="115200" rIns="126000" bIns="115200" anchor="ctr">
+            <a:normAutofit/>
+          </a:bodyPr>
+          <a:p>
+            <a:r>
+              <a:rPr lang="en-US" sz="1550" b="0" u="none" strike="noStrike">
+                <a:solidFill>
+                  <a:srgbClr val="1A2E2B"/>
+                </a:solidFill>
+                <a:effectLst/>
+                <a:uFillTx/>
+                <a:latin typeface="Arial"/>
+              </a:rPr>
+              <a:t>HTTP only — domain + TLS pending (one click once a domain exists)</a:t>
+            </a:r>
+            <a:endParaRPr lang="en-US" sz="1550" b="0" u="none" strike="noStrike">
+              <a:solidFill>
+                <a:srgbClr val="000000"/>
+              </a:solidFill>
+              <a:effectLst/>
+              <a:uFillTx/>
+              <a:latin typeface="Arial"/>
+            </a:endParaRPr>
+          </a:p>
+        </p:txBody>
+      </p:sp>
+      <p:sp>
+        <p:nvSpPr>
+          <p:cNvPr id="219" name=""/>
+          <p:cNvSpPr txBox="1"/>
+          <p:nvPr/>
+        </p:nvSpPr>
+        <p:spPr>
+          <a:xfrm>
+            <a:off x="540000" y="2921400"/>
+            <a:ext cx="50400" cy="493200"/>
+          </a:xfrm>
+          <a:prstGeom prst="rect">
+            <a:avLst/>
+          </a:prstGeom>
+          <a:solidFill>
+            <a:srgbClr val="E6BF71"/>
+          </a:solidFill>
+          <a:ln w="0">
+            <a:noFill/>
+          </a:ln>
+        </p:spPr>
+        <p:txBody>
+          <a:bodyPr lIns="90000" tIns="45000" rIns="90000" bIns="45000" anchor="t">
+            <a:spAutoFit/>
+          </a:bodyPr>
+          <a:p>
+            <a:endParaRPr lang="en-US" sz="1800" b="0" u="none" strike="noStrike">
+              <a:solidFill>
+                <a:srgbClr val="000000"/>
+              </a:solidFill>
+              <a:effectLst/>
+              <a:uFillTx/>
+              <a:latin typeface="Arial"/>
+            </a:endParaRPr>
+          </a:p>
+        </p:txBody>
+      </p:sp>
+      <p:sp>
+        <p:nvSpPr>
+          <p:cNvPr id="220" name=""/>
+          <p:cNvSpPr txBox="1"/>
+          <p:nvPr/>
+        </p:nvSpPr>
+        <p:spPr>
+          <a:xfrm>
+            <a:off x="540000" y="2921400"/>
+            <a:ext cx="9000000" cy="493200"/>
+          </a:xfrm>
+          <a:prstGeom prst="rect">
+            <a:avLst/>
+          </a:prstGeom>
+          <a:solidFill>
+            <a:srgbClr val="FFFFFF"/>
+          </a:solidFill>
+          <a:ln w="7200">
+            <a:solidFill>
+              <a:srgbClr val="DFE9E4"/>
+            </a:solidFill>
+            <a:round/>
+          </a:ln>
+        </p:spPr>
+        <p:txBody>
+          <a:bodyPr lIns="198000" tIns="115200" rIns="126000" bIns="115200" anchor="ctr">
+            <a:normAutofit/>
+          </a:bodyPr>
+          <a:p>
+            <a:r>
+              <a:rPr lang="en-US" sz="1550" b="0" u="none" strike="noStrike">
+                <a:solidFill>
+                  <a:srgbClr val="1A2E2B"/>
+                </a:solidFill>
+                <a:effectLst/>
+                <a:uFillTx/>
+                <a:latin typeface="Arial"/>
+              </a:rPr>
+              <a:t>Demo quick-login shares a password — demo mode, off before real data</a:t>
+            </a:r>
+            <a:endParaRPr lang="en-US" sz="1550" b="0" u="none" strike="noStrike">
+              <a:solidFill>
+                <a:srgbClr val="000000"/>
+              </a:solidFill>
+              <a:effectLst/>
+              <a:uFillTx/>
+              <a:latin typeface="Arial"/>
+            </a:endParaRPr>
+          </a:p>
+        </p:txBody>
+      </p:sp>
+      <p:sp>
+        <p:nvSpPr>
+          <p:cNvPr id="221" name=""/>
+          <p:cNvSpPr txBox="1"/>
+          <p:nvPr/>
+        </p:nvSpPr>
+        <p:spPr>
+          <a:xfrm>
+            <a:off x="540000" y="3565800"/>
+            <a:ext cx="50400" cy="493200"/>
+          </a:xfrm>
+          <a:prstGeom prst="rect">
+            <a:avLst/>
+          </a:prstGeom>
+          <a:solidFill>
+            <a:srgbClr val="E6BF71"/>
+          </a:solidFill>
+          <a:ln w="0">
+            <a:noFill/>
+          </a:ln>
+        </p:spPr>
+        <p:txBody>
+          <a:bodyPr lIns="90000" tIns="45000" rIns="90000" bIns="45000" anchor="t">
+            <a:spAutoFit/>
+          </a:bodyPr>
+          <a:p>
+            <a:endParaRPr lang="en-US" sz="1800" b="0" u="none" strike="noStrike">
+              <a:solidFill>
+                <a:srgbClr val="000000"/>
+              </a:solidFill>
+              <a:effectLst/>
+              <a:uFillTx/>
+              <a:latin typeface="Arial"/>
+            </a:endParaRPr>
+          </a:p>
+        </p:txBody>
+      </p:sp>
+      <p:sp>
+        <p:nvSpPr>
+          <p:cNvPr id="222" name=""/>
+          <p:cNvSpPr txBox="1"/>
+          <p:nvPr/>
+        </p:nvSpPr>
+        <p:spPr>
+          <a:xfrm>
+            <a:off x="540000" y="3565800"/>
+            <a:ext cx="9000000" cy="493200"/>
+          </a:xfrm>
+          <a:prstGeom prst="rect">
+            <a:avLst/>
+          </a:prstGeom>
+          <a:solidFill>
+            <a:srgbClr val="FFFFFF"/>
+          </a:solidFill>
+          <a:ln w="7200">
+            <a:solidFill>
+              <a:srgbClr val="DFE9E4"/>
+            </a:solidFill>
+            <a:round/>
+          </a:ln>
+        </p:spPr>
+        <p:txBody>
+          <a:bodyPr lIns="198000" tIns="115200" rIns="126000" bIns="115200" anchor="ctr">
+            <a:normAutofit/>
+          </a:bodyPr>
+          <a:p>
+            <a:r>
+              <a:rPr lang="en-US" sz="1550" b="0" u="none" strike="noStrike">
+                <a:solidFill>
+                  <a:srgbClr val="1A2E2B"/>
+                </a:solidFill>
+                <a:effectLst/>
+                <a:uFillTx/>
+                <a:latin typeface="Arial"/>
+              </a:rPr>
+              <a:t>No automated backups (owner-waived); attachments deferred</a:t>
+            </a:r>
+            <a:endParaRPr lang="en-US" sz="1550" b="0" u="none" strike="noStrike">
+              <a:solidFill>
+                <a:srgbClr val="000000"/>
               </a:solidFill>
               <a:effectLst/>
               <a:uFillTx/>
@@ -10219,6 +11127,247 @@
             <a:endParaRPr lang="en-US" sz="1550" b="0" u="none" strike="noStrike">
               <a:solidFill>
                 <a:srgbClr val="000000"/>
+              </a:solidFill>
+              <a:effectLst/>
+              <a:uFillTx/>
+              <a:latin typeface="Arial"/>
+            </a:endParaRPr>
+          </a:p>
+        </p:txBody>
+      </p:sp>
+    </p:spTree>
+  </p:cSld>
+  <mc:AlternateContent>
+    <mc:Choice Requires="p14">
+      <p:transition spd="slow" p14:dur="2000"/>
+    </mc:Choice>
+    <mc:Fallback>
+      <p:transition spd="slow"/>
+    </mc:Fallback>
+  </mc:AlternateContent>
+</p:sld>
+</file>
+
+<file path=ppt/slides/slide30.xml><?xml version="1.0" encoding="utf-8"?>
+<p:sld xmlns:a="http://schemas.openxmlformats.org/drawingml/2006/main" xmlns:p="http://schemas.openxmlformats.org/presentationml/2006/main" xmlns:r="http://schemas.openxmlformats.org/officeDocument/2006/relationships" xmlns:p14="http://schemas.microsoft.com/office/powerpoint/2010/main" xmlns:p15="http://schemas.microsoft.com/office/powerpoint/2012/main" xmlns:mc="http://schemas.openxmlformats.org/markup-compatibility/2006">
+  <p:cSld>
+    <p:bg>
+      <p:bgPr>
+        <a:solidFill>
+          <a:srgbClr val="103E3A"/>
+        </a:solidFill>
+      </p:bgPr>
+    </p:bg>
+    <p:spTree>
+      <p:nvGrpSpPr>
+        <p:cNvPr id="1" name=""/>
+        <p:cNvGrpSpPr/>
+        <p:nvPr/>
+      </p:nvGrpSpPr>
+      <p:grpSpPr>
+        <a:xfrm>
+          <a:off x="0" y="0"/>
+          <a:ext cx="0" cy="0"/>
+          <a:chOff x="0" y="0"/>
+          <a:chExt cx="0" cy="0"/>
+        </a:xfrm>
+      </p:grpSpPr>
+      <p:sp>
+        <p:nvSpPr>
+          <p:cNvPr id="223" name=""/>
+          <p:cNvSpPr txBox="1"/>
+          <p:nvPr/>
+        </p:nvSpPr>
+        <p:spPr>
+          <a:xfrm>
+            <a:off x="720000" y="1440000"/>
+            <a:ext cx="8640000" cy="1080000"/>
+          </a:xfrm>
+          <a:prstGeom prst="rect">
+            <a:avLst/>
+          </a:prstGeom>
+          <a:noFill/>
+          <a:ln w="0">
+            <a:noFill/>
+          </a:ln>
+        </p:spPr>
+        <p:txBody>
+          <a:bodyPr lIns="90000" tIns="45000" rIns="90000" bIns="45000" anchor="t">
+            <a:spAutoFit/>
+          </a:bodyPr>
+          <a:p>
+            <a:r>
+              <a:rPr lang="en-US" sz="4400" b="1" u="none" strike="noStrike">
+                <a:solidFill>
+                  <a:srgbClr val="FFFFFF"/>
+                </a:solidFill>
+                <a:effectLst/>
+                <a:uFillTx/>
+                <a:latin typeface="Arial"/>
+              </a:rPr>
+              <a:t>Thank You — </a:t>
+            </a:r>
+            <a:r>
+              <a:rPr lang="hi-IN" sz="4400" b="0" u="none" strike="noStrike">
+                <a:solidFill>
+                  <a:srgbClr val="FFFFFF"/>
+                </a:solidFill>
+                <a:effectLst/>
+                <a:uFillTx/>
+                <a:latin typeface="Arial"/>
+              </a:rPr>
+              <a:t>شكراً</a:t>
+            </a:r>
+            <a:endParaRPr lang="en-US" sz="4400" b="0" u="none" strike="noStrike">
+              <a:solidFill>
+                <a:srgbClr val="FFFFFF"/>
+              </a:solidFill>
+              <a:effectLst/>
+              <a:uFillTx/>
+              <a:latin typeface="Arial"/>
+            </a:endParaRPr>
+          </a:p>
+        </p:txBody>
+      </p:sp>
+      <p:sp>
+        <p:nvSpPr>
+          <p:cNvPr id="224" name=""/>
+          <p:cNvSpPr txBox="1"/>
+          <p:nvPr/>
+        </p:nvSpPr>
+        <p:spPr>
+          <a:xfrm>
+            <a:off x="720000" y="2664000"/>
+            <a:ext cx="2160000" cy="50400"/>
+          </a:xfrm>
+          <a:prstGeom prst="rect">
+            <a:avLst/>
+          </a:prstGeom>
+          <a:solidFill>
+            <a:srgbClr val="E6BF71"/>
+          </a:solidFill>
+          <a:ln w="0">
+            <a:noFill/>
+          </a:ln>
+        </p:spPr>
+        <p:txBody>
+          <a:bodyPr lIns="90000" tIns="5400" rIns="90000" bIns="5400" anchor="t">
+            <a:spAutoFit/>
+          </a:bodyPr>
+          <a:p>
+            <a:endParaRPr lang="en-US" sz="1800" b="0" u="none" strike="noStrike">
+              <a:solidFill>
+                <a:srgbClr val="000000"/>
+              </a:solidFill>
+              <a:effectLst/>
+              <a:uFillTx/>
+              <a:latin typeface="Arial"/>
+            </a:endParaRPr>
+          </a:p>
+        </p:txBody>
+      </p:sp>
+      <p:sp>
+        <p:nvSpPr>
+          <p:cNvPr id="225" name=""/>
+          <p:cNvSpPr txBox="1"/>
+          <p:nvPr/>
+        </p:nvSpPr>
+        <p:spPr>
+          <a:xfrm>
+            <a:off x="720000" y="3024000"/>
+            <a:ext cx="8640000" cy="1620000"/>
+          </a:xfrm>
+          <a:prstGeom prst="rect">
+            <a:avLst/>
+          </a:prstGeom>
+          <a:noFill/>
+          <a:ln w="0">
+            <a:noFill/>
+          </a:ln>
+        </p:spPr>
+        <p:txBody>
+          <a:bodyPr lIns="90000" tIns="45000" rIns="90000" bIns="45000" anchor="t">
+            <a:spAutoFit/>
+          </a:bodyPr>
+          <a:p>
+            <a:r>
+              <a:rPr lang="en-US" sz="1600" b="0" u="none" strike="noStrike">
+                <a:solidFill>
+                  <a:srgbClr val="C6DFD5"/>
+                </a:solidFill>
+                <a:effectLst/>
+                <a:uFillTx/>
+                <a:latin typeface="Arial"/>
+              </a:rPr>
+              <a:t>Complete, live, bilingual, accessible employee-operations product</a:t>
+            </a:r>
+            <a:endParaRPr lang="en-US" sz="1600" b="0" u="none" strike="noStrike">
+              <a:solidFill>
+                <a:srgbClr val="FFFFFF"/>
+              </a:solidFill>
+              <a:effectLst/>
+              <a:uFillTx/>
+              <a:latin typeface="Arial"/>
+            </a:endParaRPr>
+          </a:p>
+          <a:p>
+            <a:r>
+              <a:rPr lang="en-US" sz="1600" b="0" u="none" strike="noStrike">
+                <a:solidFill>
+                  <a:srgbClr val="C6DFD5"/>
+                </a:solidFill>
+                <a:effectLst/>
+                <a:uFillTx/>
+                <a:latin typeface="Arial"/>
+              </a:rPr>
+              <a:t>Spec-led · tested · deployed · operable</a:t>
+            </a:r>
+            <a:endParaRPr lang="en-US" sz="1600" b="0" u="none" strike="noStrike">
+              <a:solidFill>
+                <a:srgbClr val="FFFFFF"/>
+              </a:solidFill>
+              <a:effectLst/>
+              <a:uFillTx/>
+              <a:latin typeface="Arial"/>
+            </a:endParaRPr>
+          </a:p>
+          <a:p>
+            <a:r>
+              <a:rPr lang="en-US" sz="1600" b="0" u="none" strike="noStrike">
+                <a:solidFill>
+                  <a:srgbClr val="C6DFD5"/>
+                </a:solidFill>
+                <a:effectLst/>
+                <a:uFillTx/>
+                <a:latin typeface="Arial"/>
+              </a:rPr>
+              <a:t>«</a:t>
+            </a:r>
+            <a:r>
+              <a:rPr lang="hi-IN" sz="1600" b="0" u="none" strike="noStrike">
+                <a:solidFill>
+                  <a:srgbClr val="C6DFD5"/>
+                </a:solidFill>
+                <a:effectLst/>
+                <a:uFillTx/>
+                <a:latin typeface="Arial"/>
+              </a:rPr>
+              <a:t>سجّل وانسَ — ديمومة مستمرة</a:t>
+            </a:r>
+            <a:r>
+              <a:rPr lang="en-US" sz="1600" b="0" u="none" strike="noStrike">
+                <a:solidFill>
+                  <a:srgbClr val="C6DFD5"/>
+                </a:solidFill>
+                <a:effectLst/>
+                <a:uFillTx/>
+                <a:latin typeface="Arial"/>
+              </a:rPr>
+              <a:t>»</a:t>
+            </a:r>
+            <a:endParaRPr lang="en-US" sz="1600" b="0" u="none" strike="noStrike">
+              <a:solidFill>
+                <a:srgbClr val="FFFFFF"/>
               </a:solidFill>
               <a:effectLst/>
               <a:uFillTx/>
@@ -11314,6 +12463,184 @@
         </p:nvSpPr>
         <p:spPr>
           <a:xfrm>
+            <a:off x="5298120" y="1330560"/>
+            <a:ext cx="2193480" cy="887040"/>
+          </a:xfrm>
+          <a:prstGeom prst="rect">
+            <a:avLst/>
+          </a:prstGeom>
+          <a:noFill/>
+          <a:ln w="28800">
+            <a:solidFill>
+              <a:srgbClr val="D97706"/>
+            </a:solidFill>
+            <a:round/>
+          </a:ln>
+        </p:spPr>
+        <p:txBody>
+          <a:bodyPr lIns="104400" tIns="59400" rIns="104400" bIns="59400" anchor="t">
+            <a:spAutoFit/>
+          </a:bodyPr>
+          <a:p>
+            <a:endParaRPr lang="en-US" sz="1800" b="0" u="none" strike="noStrike">
+              <a:solidFill>
+                <a:srgbClr val="000000"/>
+              </a:solidFill>
+              <a:effectLst/>
+              <a:uFillTx/>
+              <a:latin typeface="Arial"/>
+            </a:endParaRPr>
+          </a:p>
+        </p:txBody>
+      </p:sp>
+      <p:sp>
+        <p:nvSpPr>
+          <p:cNvPr id="59" name=""/>
+          <p:cNvSpPr txBox="1"/>
+          <p:nvPr/>
+        </p:nvSpPr>
+        <p:spPr>
+          <a:xfrm>
+            <a:off x="5298120" y="1107360"/>
+            <a:ext cx="1584000" cy="201600"/>
+          </a:xfrm>
+          <a:prstGeom prst="rect">
+            <a:avLst/>
+          </a:prstGeom>
+          <a:solidFill>
+            <a:srgbClr val="103E3A"/>
+          </a:solidFill>
+          <a:ln w="14400">
+            <a:solidFill>
+              <a:srgbClr val="E6BF71"/>
+            </a:solidFill>
+            <a:round/>
+          </a:ln>
+        </p:spPr>
+        <p:txBody>
+          <a:bodyPr lIns="79200" tIns="28800" rIns="79200" bIns="28800" anchor="t">
+            <a:spAutoFit/>
+          </a:bodyPr>
+          <a:p>
+            <a:r>
+              <a:rPr lang="en-US" sz="950" b="1" u="none" strike="noStrike">
+                <a:solidFill>
+                  <a:srgbClr val="FFFFFF"/>
+                </a:solidFill>
+                <a:effectLst/>
+                <a:uFillTx/>
+                <a:latin typeface="Arial"/>
+              </a:rPr>
+              <a:t>One-click demo roles</a:t>
+            </a:r>
+            <a:endParaRPr lang="en-US" sz="950" b="0" u="none" strike="noStrike">
+              <a:solidFill>
+                <a:srgbClr val="FFFFFF"/>
+              </a:solidFill>
+              <a:effectLst/>
+              <a:uFillTx/>
+              <a:latin typeface="Arial"/>
+            </a:endParaRPr>
+          </a:p>
+        </p:txBody>
+      </p:sp>
+      <p:sp>
+        <p:nvSpPr>
+          <p:cNvPr id="60" name=""/>
+          <p:cNvSpPr txBox="1"/>
+          <p:nvPr/>
+        </p:nvSpPr>
+        <p:spPr>
+          <a:xfrm>
+            <a:off x="2201400" y="1895040"/>
+            <a:ext cx="2193480" cy="564480"/>
+          </a:xfrm>
+          <a:prstGeom prst="rect">
+            <a:avLst/>
+          </a:prstGeom>
+          <a:noFill/>
+          <a:ln w="28800">
+            <a:solidFill>
+              <a:srgbClr val="D97706"/>
+            </a:solidFill>
+            <a:round/>
+          </a:ln>
+        </p:spPr>
+        <p:txBody>
+          <a:bodyPr lIns="104400" tIns="59400" rIns="104400" bIns="59400" anchor="t">
+            <a:spAutoFit/>
+          </a:bodyPr>
+          <a:p>
+            <a:endParaRPr lang="en-US" sz="1800" b="0" u="none" strike="noStrike">
+              <a:solidFill>
+                <a:srgbClr val="000000"/>
+              </a:solidFill>
+              <a:effectLst/>
+              <a:uFillTx/>
+              <a:latin typeface="Arial"/>
+            </a:endParaRPr>
+          </a:p>
+        </p:txBody>
+      </p:sp>
+      <p:sp>
+        <p:nvSpPr>
+          <p:cNvPr id="61" name=""/>
+          <p:cNvSpPr txBox="1"/>
+          <p:nvPr/>
+        </p:nvSpPr>
+        <p:spPr>
+          <a:xfrm>
+            <a:off x="2201400" y="2488320"/>
+            <a:ext cx="1926000" cy="201600"/>
+          </a:xfrm>
+          <a:prstGeom prst="rect">
+            <a:avLst/>
+          </a:prstGeom>
+          <a:solidFill>
+            <a:srgbClr val="103E3A"/>
+          </a:solidFill>
+          <a:ln w="14400">
+            <a:solidFill>
+              <a:srgbClr val="E6BF71"/>
+            </a:solidFill>
+            <a:round/>
+          </a:ln>
+        </p:spPr>
+        <p:txBody>
+          <a:bodyPr lIns="79200" tIns="28800" rIns="79200" bIns="28800" anchor="t">
+            <a:spAutoFit/>
+          </a:bodyPr>
+          <a:p>
+            <a:r>
+              <a:rPr lang="en-US" sz="950" b="1" u="none" strike="noStrike">
+                <a:solidFill>
+                  <a:srgbClr val="FFFFFF"/>
+                </a:solidFill>
+                <a:effectLst/>
+                <a:uFillTx/>
+                <a:latin typeface="Arial"/>
+              </a:rPr>
+              <a:t>Approved bilingual slogan</a:t>
+            </a:r>
+            <a:endParaRPr lang="en-US" sz="950" b="0" u="none" strike="noStrike">
+              <a:solidFill>
+                <a:srgbClr val="FFFFFF"/>
+              </a:solidFill>
+              <a:effectLst/>
+              <a:uFillTx/>
+              <a:latin typeface="Arial"/>
+            </a:endParaRPr>
+          </a:p>
+        </p:txBody>
+      </p:sp>
+      <p:sp>
+        <p:nvSpPr>
+          <p:cNvPr id="62" name=""/>
+          <p:cNvSpPr txBox="1"/>
+          <p:nvPr/>
+        </p:nvSpPr>
+        <p:spPr>
+          <a:xfrm>
             <a:off x="540000" y="5148000"/>
             <a:ext cx="9000000" cy="360000"/>
           </a:xfrm>
@@ -11391,7 +12718,7 @@
       </p:grpSpPr>
       <p:sp>
         <p:nvSpPr>
-          <p:cNvPr id="59" name=""/>
+          <p:cNvPr id="63" name=""/>
           <p:cNvSpPr txBox="1"/>
           <p:nvPr/>
         </p:nvSpPr>
@@ -11437,7 +12764,7 @@
       </p:sp>
       <p:sp>
         <p:nvSpPr>
-          <p:cNvPr id="60" name=""/>
+          <p:cNvPr id="64" name=""/>
           <p:cNvSpPr txBox="1"/>
           <p:nvPr/>
         </p:nvSpPr>
@@ -11474,7 +12801,7 @@
       </p:sp>
       <p:pic>
         <p:nvPicPr>
-          <p:cNvPr id="61" name=""/>
+          <p:cNvPr id="65" name=""/>
           <p:cNvPicPr/>
           <p:nvPr/>
         </p:nvPicPr>
@@ -11498,7 +12825,96 @@
       </p:pic>
       <p:sp>
         <p:nvSpPr>
-          <p:cNvPr id="62" name=""/>
+          <p:cNvPr id="66" name=""/>
+          <p:cNvSpPr txBox="1"/>
+          <p:nvPr/>
+        </p:nvSpPr>
+        <p:spPr>
+          <a:xfrm>
+            <a:off x="6459120" y="2298240"/>
+            <a:ext cx="1483920" cy="362880"/>
+          </a:xfrm>
+          <a:prstGeom prst="rect">
+            <a:avLst/>
+          </a:prstGeom>
+          <a:noFill/>
+          <a:ln w="28800">
+            <a:solidFill>
+              <a:srgbClr val="D97706"/>
+            </a:solidFill>
+            <a:round/>
+          </a:ln>
+        </p:spPr>
+        <p:txBody>
+          <a:bodyPr lIns="104400" tIns="59400" rIns="104400" bIns="59400" anchor="t">
+            <a:spAutoFit/>
+          </a:bodyPr>
+          <a:p>
+            <a:endParaRPr lang="en-US" sz="1800" b="0" u="none" strike="noStrike">
+              <a:solidFill>
+                <a:srgbClr val="000000"/>
+              </a:solidFill>
+              <a:effectLst/>
+              <a:uFillTx/>
+              <a:latin typeface="Arial"/>
+            </a:endParaRPr>
+          </a:p>
+        </p:txBody>
+      </p:sp>
+      <p:sp>
+        <p:nvSpPr>
+          <p:cNvPr id="67" name=""/>
+          <p:cNvSpPr txBox="1"/>
+          <p:nvPr/>
+        </p:nvSpPr>
+        <p:spPr>
+          <a:xfrm>
+            <a:off x="6459120" y="2075040"/>
+            <a:ext cx="1994400" cy="201600"/>
+          </a:xfrm>
+          <a:prstGeom prst="rect">
+            <a:avLst/>
+          </a:prstGeom>
+          <a:solidFill>
+            <a:srgbClr val="103E3A"/>
+          </a:solidFill>
+          <a:ln w="14400">
+            <a:solidFill>
+              <a:srgbClr val="E6BF71"/>
+            </a:solidFill>
+            <a:round/>
+          </a:ln>
+        </p:spPr>
+        <p:txBody>
+          <a:bodyPr lIns="79200" tIns="28800" rIns="79200" bIns="28800" anchor="t">
+            <a:spAutoFit/>
+          </a:bodyPr>
+          <a:p>
+            <a:r>
+              <a:rPr lang="en-US" sz="950" b="1" u="none" strike="noStrike">
+                <a:solidFill>
+                  <a:srgbClr val="FFFFFF"/>
+                </a:solidFill>
+                <a:effectLst/>
+                <a:uFillTx/>
+                <a:latin typeface="Arial"/>
+              </a:rPr>
+              <a:t>Filters + Only-mine toggle</a:t>
+            </a:r>
+            <a:endParaRPr lang="en-US" sz="950" b="0" u="none" strike="noStrike">
+              <a:solidFill>
+                <a:srgbClr val="FFFFFF"/>
+              </a:solidFill>
+              <a:effectLst/>
+              <a:uFillTx/>
+              <a:latin typeface="Arial"/>
+            </a:endParaRPr>
+          </a:p>
+        </p:txBody>
+      </p:sp>
+      <p:sp>
+        <p:nvSpPr>
+          <p:cNvPr id="68" name=""/>
           <p:cNvSpPr txBox="1"/>
           <p:nvPr/>
         </p:nvSpPr>
@@ -11581,7 +12997,7 @@
       </p:grpSpPr>
       <p:sp>
         <p:nvSpPr>
-          <p:cNvPr id="63" name=""/>
+          <p:cNvPr id="69" name=""/>
           <p:cNvSpPr txBox="1"/>
           <p:nvPr/>
         </p:nvSpPr>
@@ -11627,7 +13043,7 @@
       </p:sp>
       <p:sp>
         <p:nvSpPr>
-          <p:cNvPr id="64" name=""/>
+          <p:cNvPr id="70" name=""/>
           <p:cNvSpPr txBox="1"/>
           <p:nvPr/>
         </p:nvSpPr>
@@ -11664,7 +13080,7 @@
       </p:sp>
       <p:pic>
         <p:nvPicPr>
-          <p:cNvPr id="65" name=""/>
+          <p:cNvPr id="71" name=""/>
           <p:cNvPicPr/>
           <p:nvPr/>
         </p:nvPicPr>
@@ -11688,7 +13104,7 @@
       </p:pic>
       <p:sp>
         <p:nvSpPr>
-          <p:cNvPr id="66" name=""/>
+          <p:cNvPr id="72" name=""/>
           <p:cNvSpPr txBox="1"/>
           <p:nvPr/>
         </p:nvSpPr>
@@ -11771,7 +13187,7 @@
       </p:grpSpPr>
       <p:sp>
         <p:nvSpPr>
-          <p:cNvPr id="67" name=""/>
+          <p:cNvPr id="73" name=""/>
           <p:cNvSpPr txBox="1"/>
           <p:nvPr/>
         </p:nvSpPr>
@@ -11802,7 +13218,7 @@
                 <a:uFillTx/>
                 <a:latin typeface="Arial"/>
               </a:rPr>
-              <a:t>Request Detail</a:t>
+              <a:t>Configurable Approval Cycles</a:t>
             </a:r>
             <a:endParaRPr lang="en-US" sz="2600" b="0" u="none" strike="noStrike">
               <a:solidFill>
@@ -11817,7 +13233,7 @@
       </p:sp>
       <p:sp>
         <p:nvSpPr>
-          <p:cNvPr id="68" name=""/>
+          <p:cNvPr id="74" name=""/>
           <p:cNvSpPr txBox="1"/>
           <p:nvPr/>
         </p:nvSpPr>
@@ -11854,7 +13270,7 @@
       </p:sp>
       <p:pic>
         <p:nvPicPr>
-          <p:cNvPr id="69" name=""/>
+          <p:cNvPr id="75" name=""/>
           <p:cNvPicPr/>
           <p:nvPr/>
         </p:nvPicPr>
@@ -11878,7 +13294,185 @@
       </p:pic>
       <p:sp>
         <p:nvSpPr>
-          <p:cNvPr id="70" name=""/>
+          <p:cNvPr id="76" name=""/>
+          <p:cNvSpPr txBox="1"/>
+          <p:nvPr/>
+        </p:nvSpPr>
+        <p:spPr>
+          <a:xfrm>
+            <a:off x="5168880" y="2580480"/>
+            <a:ext cx="2580480" cy="1128960"/>
+          </a:xfrm>
+          <a:prstGeom prst="rect">
+            <a:avLst/>
+          </a:prstGeom>
+          <a:noFill/>
+          <a:ln w="28800">
+            <a:solidFill>
+              <a:srgbClr val="D97706"/>
+            </a:solidFill>
+            <a:round/>
+          </a:ln>
+        </p:spPr>
+        <p:txBody>
+          <a:bodyPr lIns="104400" tIns="59400" rIns="104400" bIns="59400" anchor="t">
+            <a:spAutoFit/>
+          </a:bodyPr>
+          <a:p>
+            <a:endParaRPr lang="en-US" sz="1800" b="0" u="none" strike="noStrike">
+              <a:solidFill>
+                <a:srgbClr val="000000"/>
+              </a:solidFill>
+              <a:effectLst/>
+              <a:uFillTx/>
+              <a:latin typeface="Arial"/>
+            </a:endParaRPr>
+          </a:p>
+        </p:txBody>
+      </p:sp>
+      <p:sp>
+        <p:nvSpPr>
+          <p:cNvPr id="77" name=""/>
+          <p:cNvSpPr txBox="1"/>
+          <p:nvPr/>
+        </p:nvSpPr>
+        <p:spPr>
+          <a:xfrm>
+            <a:off x="5168880" y="2357280"/>
+            <a:ext cx="2815200" cy="201600"/>
+          </a:xfrm>
+          <a:prstGeom prst="rect">
+            <a:avLst/>
+          </a:prstGeom>
+          <a:solidFill>
+            <a:srgbClr val="103E3A"/>
+          </a:solidFill>
+          <a:ln w="14400">
+            <a:solidFill>
+              <a:srgbClr val="E6BF71"/>
+            </a:solidFill>
+            <a:round/>
+          </a:ln>
+        </p:spPr>
+        <p:txBody>
+          <a:bodyPr lIns="79200" tIns="28800" rIns="79200" bIns="28800" anchor="t">
+            <a:spAutoFit/>
+          </a:bodyPr>
+          <a:p>
+            <a:r>
+              <a:rPr lang="en-US" sz="950" b="1" u="none" strike="noStrike">
+                <a:solidFill>
+                  <a:srgbClr val="FFFFFF"/>
+                </a:solidFill>
+                <a:effectLst/>
+                <a:uFillTx/>
+                <a:latin typeface="Arial"/>
+              </a:rPr>
+              <a:t>Unit · dates · item · allocation flags</a:t>
+            </a:r>
+            <a:endParaRPr lang="en-US" sz="950" b="0" u="none" strike="noStrike">
+              <a:solidFill>
+                <a:srgbClr val="FFFFFF"/>
+              </a:solidFill>
+              <a:effectLst/>
+              <a:uFillTx/>
+              <a:latin typeface="Arial"/>
+            </a:endParaRPr>
+          </a:p>
+        </p:txBody>
+      </p:sp>
+      <p:sp>
+        <p:nvSpPr>
+          <p:cNvPr id="78" name=""/>
+          <p:cNvSpPr txBox="1"/>
+          <p:nvPr/>
+        </p:nvSpPr>
+        <p:spPr>
+          <a:xfrm>
+            <a:off x="3685320" y="4314240"/>
+            <a:ext cx="2451600" cy="443520"/>
+          </a:xfrm>
+          <a:prstGeom prst="rect">
+            <a:avLst/>
+          </a:prstGeom>
+          <a:noFill/>
+          <a:ln w="28800">
+            <a:solidFill>
+              <a:srgbClr val="D97706"/>
+            </a:solidFill>
+            <a:round/>
+          </a:ln>
+        </p:spPr>
+        <p:txBody>
+          <a:bodyPr lIns="104400" tIns="59400" rIns="104400" bIns="59400" anchor="t">
+            <a:spAutoFit/>
+          </a:bodyPr>
+          <a:p>
+            <a:endParaRPr lang="en-US" sz="1800" b="0" u="none" strike="noStrike">
+              <a:solidFill>
+                <a:srgbClr val="000000"/>
+              </a:solidFill>
+              <a:effectLst/>
+              <a:uFillTx/>
+              <a:latin typeface="Arial"/>
+            </a:endParaRPr>
+          </a:p>
+        </p:txBody>
+      </p:sp>
+      <p:sp>
+        <p:nvSpPr>
+          <p:cNvPr id="79" name=""/>
+          <p:cNvSpPr txBox="1"/>
+          <p:nvPr/>
+        </p:nvSpPr>
+        <p:spPr>
+          <a:xfrm>
+            <a:off x="3685320" y="4091040"/>
+            <a:ext cx="2404800" cy="201600"/>
+          </a:xfrm>
+          <a:prstGeom prst="rect">
+            <a:avLst/>
+          </a:prstGeom>
+          <a:solidFill>
+            <a:srgbClr val="103E3A"/>
+          </a:solidFill>
+          <a:ln w="14400">
+            <a:solidFill>
+              <a:srgbClr val="E6BF71"/>
+            </a:solidFill>
+            <a:round/>
+          </a:ln>
+        </p:spPr>
+        <p:txBody>
+          <a:bodyPr lIns="79200" tIns="28800" rIns="79200" bIns="28800" anchor="t">
+            <a:spAutoFit/>
+          </a:bodyPr>
+          <a:p>
+            <a:r>
+              <a:rPr lang="en-US" sz="950" b="1" u="none" strike="noStrike">
+                <a:solidFill>
+                  <a:srgbClr val="FFFFFF"/>
+                </a:solidFill>
+                <a:effectLst/>
+                <a:uFillTx/>
+                <a:latin typeface="Arial"/>
+              </a:rPr>
+              <a:t>Multi-stage cycle: Manager -&gt; HR</a:t>
+            </a:r>
+            <a:endParaRPr lang="en-US" sz="950" b="0" u="none" strike="noStrike">
+              <a:solidFill>
+                <a:srgbClr val="FFFFFF"/>
+              </a:solidFill>
+              <a:effectLst/>
+              <a:uFillTx/>
+              <a:latin typeface="Arial"/>
+            </a:endParaRPr>
+          </a:p>
+        </p:txBody>
+      </p:sp>
+      <p:sp>
+        <p:nvSpPr>
+          <p:cNvPr id="80" name=""/>
           <p:cNvSpPr txBox="1"/>
           <p:nvPr/>
         </p:nvSpPr>
@@ -11909,7 +13503,7 @@
                 <a:uFillTx/>
                 <a:latin typeface="Arial"/>
               </a:rPr>
-              <a:t>Full lifecycle view — state, history, and the decision actions.</a:t>
+              <a:t>HR configures each type: unit, dates/item/allocation flags, and Manager -&gt; HR review stages.</a:t>
             </a:r>
             <a:endParaRPr lang="en-US" sz="1100" b="0" u="none" strike="noStrike">
               <a:solidFill>

--- a/docs/presentation/Daimoma-presentation.pptx
+++ b/docs/presentation/Daimoma-presentation.pptx
@@ -394,7 +394,7 @@
             <a:pPr indent="0" algn="r">
               <a:buNone/>
             </a:pPr>
-            <a:fld id="{C6A289D4-36F6-4EB2-9F70-3CE7FCE14FF0}" type="slidenum">
+            <a:fld id="{ED787327-9879-41EB-A44F-BD2CDC38FD64}" type="slidenum">
               <a:rPr lang="en-US" sz="1400" b="0" u="none" strike="noStrike">
                 <a:solidFill>
                   <a:srgbClr val="000000"/>
@@ -441,7 +441,7 @@
       </p:grpSpPr>
       <p:sp>
         <p:nvSpPr>
-          <p:cNvPr id="226" name=""/>
+          <p:cNvPr id="202" name=""/>
           <p:cNvSpPr txBox="1"/>
           <p:nvPr/>
         </p:nvSpPr>
@@ -568,7 +568,7 @@
       </p:grpSpPr>
       <p:sp>
         <p:nvSpPr>
-          <p:cNvPr id="235" name=""/>
+          <p:cNvPr id="211" name=""/>
           <p:cNvSpPr txBox="1"/>
           <p:nvPr/>
         </p:nvSpPr>
@@ -640,7 +640,7 @@
       </p:grpSpPr>
       <p:sp>
         <p:nvSpPr>
-          <p:cNvPr id="236" name=""/>
+          <p:cNvPr id="212" name=""/>
           <p:cNvSpPr txBox="1"/>
           <p:nvPr/>
         </p:nvSpPr>
@@ -712,7 +712,7 @@
       </p:grpSpPr>
       <p:sp>
         <p:nvSpPr>
-          <p:cNvPr id="237" name=""/>
+          <p:cNvPr id="213" name=""/>
           <p:cNvSpPr txBox="1"/>
           <p:nvPr/>
         </p:nvSpPr>
@@ -784,7 +784,7 @@
       </p:grpSpPr>
       <p:sp>
         <p:nvSpPr>
-          <p:cNvPr id="238" name=""/>
+          <p:cNvPr id="214" name=""/>
           <p:cNvSpPr txBox="1"/>
           <p:nvPr/>
         </p:nvSpPr>
@@ -856,7 +856,7 @@
       </p:grpSpPr>
       <p:sp>
         <p:nvSpPr>
-          <p:cNvPr id="239" name=""/>
+          <p:cNvPr id="215" name=""/>
           <p:cNvSpPr txBox="1"/>
           <p:nvPr/>
         </p:nvSpPr>
@@ -928,7 +928,7 @@
       </p:grpSpPr>
       <p:sp>
         <p:nvSpPr>
-          <p:cNvPr id="240" name=""/>
+          <p:cNvPr id="216" name=""/>
           <p:cNvSpPr txBox="1"/>
           <p:nvPr/>
         </p:nvSpPr>
@@ -1000,7 +1000,7 @@
       </p:grpSpPr>
       <p:sp>
         <p:nvSpPr>
-          <p:cNvPr id="241" name=""/>
+          <p:cNvPr id="217" name=""/>
           <p:cNvSpPr txBox="1"/>
           <p:nvPr/>
         </p:nvSpPr>
@@ -1072,7 +1072,7 @@
       </p:grpSpPr>
       <p:sp>
         <p:nvSpPr>
-          <p:cNvPr id="242" name=""/>
+          <p:cNvPr id="218" name=""/>
           <p:cNvSpPr txBox="1"/>
           <p:nvPr/>
         </p:nvSpPr>
@@ -1144,7 +1144,7 @@
       </p:grpSpPr>
       <p:sp>
         <p:nvSpPr>
-          <p:cNvPr id="243" name=""/>
+          <p:cNvPr id="219" name=""/>
           <p:cNvSpPr txBox="1"/>
           <p:nvPr/>
         </p:nvSpPr>
@@ -1216,7 +1216,7 @@
       </p:grpSpPr>
       <p:sp>
         <p:nvSpPr>
-          <p:cNvPr id="244" name=""/>
+          <p:cNvPr id="220" name=""/>
           <p:cNvSpPr txBox="1"/>
           <p:nvPr/>
         </p:nvSpPr>
@@ -1288,7 +1288,7 @@
       </p:grpSpPr>
       <p:sp>
         <p:nvSpPr>
-          <p:cNvPr id="227" name=""/>
+          <p:cNvPr id="203" name=""/>
           <p:cNvSpPr txBox="1"/>
           <p:nvPr/>
         </p:nvSpPr>
@@ -1360,7 +1360,7 @@
       </p:grpSpPr>
       <p:sp>
         <p:nvSpPr>
-          <p:cNvPr id="245" name=""/>
+          <p:cNvPr id="221" name=""/>
           <p:cNvSpPr txBox="1"/>
           <p:nvPr/>
         </p:nvSpPr>
@@ -1432,7 +1432,7 @@
       </p:grpSpPr>
       <p:sp>
         <p:nvSpPr>
-          <p:cNvPr id="246" name=""/>
+          <p:cNvPr id="222" name=""/>
           <p:cNvSpPr txBox="1"/>
           <p:nvPr/>
         </p:nvSpPr>
@@ -1504,7 +1504,7 @@
       </p:grpSpPr>
       <p:sp>
         <p:nvSpPr>
-          <p:cNvPr id="247" name=""/>
+          <p:cNvPr id="223" name=""/>
           <p:cNvSpPr txBox="1"/>
           <p:nvPr/>
         </p:nvSpPr>
@@ -1576,7 +1576,7 @@
       </p:grpSpPr>
       <p:sp>
         <p:nvSpPr>
-          <p:cNvPr id="248" name=""/>
+          <p:cNvPr id="224" name=""/>
           <p:cNvSpPr txBox="1"/>
           <p:nvPr/>
         </p:nvSpPr>
@@ -1648,7 +1648,7 @@
       </p:grpSpPr>
       <p:sp>
         <p:nvSpPr>
-          <p:cNvPr id="249" name=""/>
+          <p:cNvPr id="225" name=""/>
           <p:cNvSpPr txBox="1"/>
           <p:nvPr/>
         </p:nvSpPr>
@@ -1720,7 +1720,7 @@
       </p:grpSpPr>
       <p:sp>
         <p:nvSpPr>
-          <p:cNvPr id="250" name=""/>
+          <p:cNvPr id="226" name=""/>
           <p:cNvSpPr txBox="1"/>
           <p:nvPr/>
         </p:nvSpPr>
@@ -1792,7 +1792,7 @@
       </p:grpSpPr>
       <p:sp>
         <p:nvSpPr>
-          <p:cNvPr id="251" name=""/>
+          <p:cNvPr id="227" name=""/>
           <p:cNvSpPr txBox="1"/>
           <p:nvPr/>
         </p:nvSpPr>
@@ -1864,7 +1864,7 @@
       </p:grpSpPr>
       <p:sp>
         <p:nvSpPr>
-          <p:cNvPr id="228" name=""/>
+          <p:cNvPr id="204" name=""/>
           <p:cNvSpPr txBox="1"/>
           <p:nvPr/>
         </p:nvSpPr>
@@ -1936,7 +1936,7 @@
       </p:grpSpPr>
       <p:sp>
         <p:nvSpPr>
-          <p:cNvPr id="252" name=""/>
+          <p:cNvPr id="228" name=""/>
           <p:cNvSpPr txBox="1"/>
           <p:nvPr/>
         </p:nvSpPr>
@@ -2008,7 +2008,7 @@
       </p:grpSpPr>
       <p:sp>
         <p:nvSpPr>
-          <p:cNvPr id="229" name=""/>
+          <p:cNvPr id="205" name=""/>
           <p:cNvSpPr txBox="1"/>
           <p:nvPr/>
         </p:nvSpPr>
@@ -2080,7 +2080,7 @@
       </p:grpSpPr>
       <p:sp>
         <p:nvSpPr>
-          <p:cNvPr id="230" name=""/>
+          <p:cNvPr id="206" name=""/>
           <p:cNvSpPr txBox="1"/>
           <p:nvPr/>
         </p:nvSpPr>
@@ -2174,7 +2174,7 @@
       </p:grpSpPr>
       <p:sp>
         <p:nvSpPr>
-          <p:cNvPr id="231" name=""/>
+          <p:cNvPr id="207" name=""/>
           <p:cNvSpPr txBox="1"/>
           <p:nvPr/>
         </p:nvSpPr>
@@ -2246,7 +2246,7 @@
       </p:grpSpPr>
       <p:sp>
         <p:nvSpPr>
-          <p:cNvPr id="232" name=""/>
+          <p:cNvPr id="208" name=""/>
           <p:cNvSpPr txBox="1"/>
           <p:nvPr/>
         </p:nvSpPr>
@@ -2318,7 +2318,7 @@
       </p:grpSpPr>
       <p:sp>
         <p:nvSpPr>
-          <p:cNvPr id="233" name=""/>
+          <p:cNvPr id="209" name=""/>
           <p:cNvSpPr txBox="1"/>
           <p:nvPr/>
         </p:nvSpPr>
@@ -2390,7 +2390,7 @@
       </p:grpSpPr>
       <p:sp>
         <p:nvSpPr>
-          <p:cNvPr id="234" name=""/>
+          <p:cNvPr id="210" name=""/>
           <p:cNvSpPr txBox="1"/>
           <p:nvPr/>
         </p:nvSpPr>
@@ -2494,7 +2494,7 @@
         <p:txBody>
           <a:bodyPr/>
           <a:p>
-            <a:fld id="{023B95B2-35E7-4269-9A68-C5C144E8F3AA}" type="slidenum">
+            <a:fld id="{BB9C5344-D35A-44E0-9D1B-632EE588BE33}" type="slidenum">
               <a:t>&lt;#&gt;</a:t>
             </a:fld>
           </a:p>
@@ -2661,7 +2661,7 @@
         <p:txBody>
           <a:bodyPr/>
           <a:p>
-            <a:fld id="{7D54715A-6DC5-49C8-8F3C-1536B370A85C}" type="slidenum">
+            <a:fld id="{9871163A-1FBE-4C37-A326-9C2CABA1B014}" type="slidenum">
               <a:t>&lt;#&gt;</a:t>
             </a:fld>
           </a:p>
@@ -3340,7 +3340,7 @@
             <a:pPr indent="0" algn="r">
               <a:buNone/>
             </a:pPr>
-            <a:fld id="{6E162645-1998-41F6-B8DF-328750413AC1}" type="slidenum">
+            <a:fld id="{3517EF3A-4620-40FE-8767-3EB628EE0922}" type="slidenum">
               <a:rPr lang="en-US" sz="1400" b="0" u="none" strike="noStrike">
                 <a:solidFill>
                   <a:srgbClr val="000000"/>
@@ -3709,7 +3709,7 @@
       </p:grpSpPr>
       <p:sp>
         <p:nvSpPr>
-          <p:cNvPr id="81" name=""/>
+          <p:cNvPr id="71" name=""/>
           <p:cNvSpPr txBox="1"/>
           <p:nvPr/>
         </p:nvSpPr>
@@ -3755,7 +3755,7 @@
       </p:sp>
       <p:sp>
         <p:nvSpPr>
-          <p:cNvPr id="82" name=""/>
+          <p:cNvPr id="72" name=""/>
           <p:cNvSpPr txBox="1"/>
           <p:nvPr/>
         </p:nvSpPr>
@@ -3792,7 +3792,7 @@
       </p:sp>
       <p:pic>
         <p:nvPicPr>
-          <p:cNvPr id="83" name=""/>
+          <p:cNvPr id="73" name=""/>
           <p:cNvPicPr/>
           <p:nvPr/>
         </p:nvPicPr>
@@ -3816,7 +3816,7 @@
       </p:pic>
       <p:sp>
         <p:nvSpPr>
-          <p:cNvPr id="84" name=""/>
+          <p:cNvPr id="74" name=""/>
           <p:cNvSpPr txBox="1"/>
           <p:nvPr/>
         </p:nvSpPr>
@@ -3899,7 +3899,7 @@
       </p:grpSpPr>
       <p:sp>
         <p:nvSpPr>
-          <p:cNvPr id="85" name=""/>
+          <p:cNvPr id="75" name=""/>
           <p:cNvSpPr txBox="1"/>
           <p:nvPr/>
         </p:nvSpPr>
@@ -3945,7 +3945,7 @@
       </p:sp>
       <p:sp>
         <p:nvSpPr>
-          <p:cNvPr id="86" name=""/>
+          <p:cNvPr id="76" name=""/>
           <p:cNvSpPr txBox="1"/>
           <p:nvPr/>
         </p:nvSpPr>
@@ -3982,7 +3982,7 @@
       </p:sp>
       <p:sp>
         <p:nvSpPr>
-          <p:cNvPr id="87" name=""/>
+          <p:cNvPr id="77" name=""/>
           <p:cNvSpPr txBox="1"/>
           <p:nvPr/>
         </p:nvSpPr>
@@ -4019,7 +4019,7 @@
       </p:sp>
       <p:sp>
         <p:nvSpPr>
-          <p:cNvPr id="88" name=""/>
+          <p:cNvPr id="78" name=""/>
           <p:cNvSpPr txBox="1"/>
           <p:nvPr/>
         </p:nvSpPr>
@@ -4070,7 +4070,7 @@
       </p:sp>
       <p:sp>
         <p:nvSpPr>
-          <p:cNvPr id="89" name=""/>
+          <p:cNvPr id="79" name=""/>
           <p:cNvSpPr txBox="1"/>
           <p:nvPr/>
         </p:nvSpPr>
@@ -4107,7 +4107,7 @@
       </p:sp>
       <p:sp>
         <p:nvSpPr>
-          <p:cNvPr id="90" name=""/>
+          <p:cNvPr id="80" name=""/>
           <p:cNvSpPr txBox="1"/>
           <p:nvPr/>
         </p:nvSpPr>
@@ -4158,7 +4158,7 @@
       </p:sp>
       <p:sp>
         <p:nvSpPr>
-          <p:cNvPr id="91" name=""/>
+          <p:cNvPr id="81" name=""/>
           <p:cNvSpPr txBox="1"/>
           <p:nvPr/>
         </p:nvSpPr>
@@ -4195,7 +4195,7 @@
       </p:sp>
       <p:sp>
         <p:nvSpPr>
-          <p:cNvPr id="92" name=""/>
+          <p:cNvPr id="82" name=""/>
           <p:cNvSpPr txBox="1"/>
           <p:nvPr/>
         </p:nvSpPr>
@@ -4246,7 +4246,7 @@
       </p:sp>
       <p:sp>
         <p:nvSpPr>
-          <p:cNvPr id="93" name=""/>
+          <p:cNvPr id="83" name=""/>
           <p:cNvSpPr txBox="1"/>
           <p:nvPr/>
         </p:nvSpPr>
@@ -4283,7 +4283,7 @@
       </p:sp>
       <p:sp>
         <p:nvSpPr>
-          <p:cNvPr id="94" name=""/>
+          <p:cNvPr id="84" name=""/>
           <p:cNvSpPr txBox="1"/>
           <p:nvPr/>
         </p:nvSpPr>
@@ -4371,7 +4371,7 @@
       </p:grpSpPr>
       <p:sp>
         <p:nvSpPr>
-          <p:cNvPr id="95" name=""/>
+          <p:cNvPr id="85" name=""/>
           <p:cNvSpPr txBox="1"/>
           <p:nvPr/>
         </p:nvSpPr>
@@ -4417,7 +4417,7 @@
       </p:sp>
       <p:sp>
         <p:nvSpPr>
-          <p:cNvPr id="96" name=""/>
+          <p:cNvPr id="86" name=""/>
           <p:cNvSpPr txBox="1"/>
           <p:nvPr/>
         </p:nvSpPr>
@@ -4454,7 +4454,7 @@
       </p:sp>
       <p:pic>
         <p:nvPicPr>
-          <p:cNvPr id="97" name=""/>
+          <p:cNvPr id="87" name=""/>
           <p:cNvPicPr/>
           <p:nvPr/>
         </p:nvPicPr>
@@ -4478,7 +4478,7 @@
       </p:pic>
       <p:sp>
         <p:nvSpPr>
-          <p:cNvPr id="98" name=""/>
+          <p:cNvPr id="88" name=""/>
           <p:cNvSpPr txBox="1"/>
           <p:nvPr/>
         </p:nvSpPr>
@@ -4561,7 +4561,7 @@
       </p:grpSpPr>
       <p:sp>
         <p:nvSpPr>
-          <p:cNvPr id="99" name=""/>
+          <p:cNvPr id="89" name=""/>
           <p:cNvSpPr txBox="1"/>
           <p:nvPr/>
         </p:nvSpPr>
@@ -4607,7 +4607,7 @@
       </p:sp>
       <p:sp>
         <p:nvSpPr>
-          <p:cNvPr id="100" name=""/>
+          <p:cNvPr id="90" name=""/>
           <p:cNvSpPr txBox="1"/>
           <p:nvPr/>
         </p:nvSpPr>
@@ -4644,7 +4644,7 @@
       </p:sp>
       <p:sp>
         <p:nvSpPr>
-          <p:cNvPr id="101" name=""/>
+          <p:cNvPr id="91" name=""/>
           <p:cNvSpPr txBox="1"/>
           <p:nvPr/>
         </p:nvSpPr>
@@ -4681,7 +4681,7 @@
       </p:sp>
       <p:sp>
         <p:nvSpPr>
-          <p:cNvPr id="102" name=""/>
+          <p:cNvPr id="92" name=""/>
           <p:cNvSpPr txBox="1"/>
           <p:nvPr/>
         </p:nvSpPr>
@@ -4732,7 +4732,7 @@
       </p:sp>
       <p:sp>
         <p:nvSpPr>
-          <p:cNvPr id="103" name=""/>
+          <p:cNvPr id="93" name=""/>
           <p:cNvSpPr txBox="1"/>
           <p:nvPr/>
         </p:nvSpPr>
@@ -4769,7 +4769,7 @@
       </p:sp>
       <p:sp>
         <p:nvSpPr>
-          <p:cNvPr id="104" name=""/>
+          <p:cNvPr id="94" name=""/>
           <p:cNvSpPr txBox="1"/>
           <p:nvPr/>
         </p:nvSpPr>
@@ -4820,7 +4820,7 @@
       </p:sp>
       <p:sp>
         <p:nvSpPr>
-          <p:cNvPr id="105" name=""/>
+          <p:cNvPr id="95" name=""/>
           <p:cNvSpPr txBox="1"/>
           <p:nvPr/>
         </p:nvSpPr>
@@ -4857,7 +4857,7 @@
       </p:sp>
       <p:sp>
         <p:nvSpPr>
-          <p:cNvPr id="106" name=""/>
+          <p:cNvPr id="96" name=""/>
           <p:cNvSpPr txBox="1"/>
           <p:nvPr/>
         </p:nvSpPr>
@@ -4908,7 +4908,7 @@
       </p:sp>
       <p:sp>
         <p:nvSpPr>
-          <p:cNvPr id="107" name=""/>
+          <p:cNvPr id="97" name=""/>
           <p:cNvSpPr txBox="1"/>
           <p:nvPr/>
         </p:nvSpPr>
@@ -4945,7 +4945,7 @@
       </p:sp>
       <p:sp>
         <p:nvSpPr>
-          <p:cNvPr id="108" name=""/>
+          <p:cNvPr id="98" name=""/>
           <p:cNvSpPr txBox="1"/>
           <p:nvPr/>
         </p:nvSpPr>
@@ -4996,7 +4996,7 @@
       </p:sp>
       <p:sp>
         <p:nvSpPr>
-          <p:cNvPr id="109" name=""/>
+          <p:cNvPr id="99" name=""/>
           <p:cNvSpPr txBox="1"/>
           <p:nvPr/>
         </p:nvSpPr>
@@ -5033,7 +5033,7 @@
       </p:sp>
       <p:sp>
         <p:nvSpPr>
-          <p:cNvPr id="110" name=""/>
+          <p:cNvPr id="100" name=""/>
           <p:cNvSpPr txBox="1"/>
           <p:nvPr/>
         </p:nvSpPr>
@@ -5121,7 +5121,7 @@
       </p:grpSpPr>
       <p:sp>
         <p:nvSpPr>
-          <p:cNvPr id="111" name=""/>
+          <p:cNvPr id="101" name=""/>
           <p:cNvSpPr txBox="1"/>
           <p:nvPr/>
         </p:nvSpPr>
@@ -5167,7 +5167,7 @@
       </p:sp>
       <p:sp>
         <p:nvSpPr>
-          <p:cNvPr id="112" name=""/>
+          <p:cNvPr id="102" name=""/>
           <p:cNvSpPr txBox="1"/>
           <p:nvPr/>
         </p:nvSpPr>
@@ -5204,7 +5204,7 @@
       </p:sp>
       <p:pic>
         <p:nvPicPr>
-          <p:cNvPr id="113" name=""/>
+          <p:cNvPr id="103" name=""/>
           <p:cNvPicPr/>
           <p:nvPr/>
         </p:nvPicPr>
@@ -5228,96 +5228,7 @@
       </p:pic>
       <p:sp>
         <p:nvSpPr>
-          <p:cNvPr id="114" name=""/>
-          <p:cNvSpPr txBox="1"/>
-          <p:nvPr/>
-        </p:nvSpPr>
-        <p:spPr>
-          <a:xfrm>
-            <a:off x="3040200" y="2782080"/>
-            <a:ext cx="4967280" cy="1935360"/>
-          </a:xfrm>
-          <a:prstGeom prst="rect">
-            <a:avLst/>
-          </a:prstGeom>
-          <a:noFill/>
-          <a:ln w="28800">
-            <a:solidFill>
-              <a:srgbClr val="D97706"/>
-            </a:solidFill>
-            <a:round/>
-          </a:ln>
-        </p:spPr>
-        <p:txBody>
-          <a:bodyPr lIns="104400" tIns="59400" rIns="104400" bIns="59400" anchor="t">
-            <a:spAutoFit/>
-          </a:bodyPr>
-          <a:p>
-            <a:endParaRPr lang="en-US" sz="1800" b="0" u="none" strike="noStrike">
-              <a:solidFill>
-                <a:srgbClr val="000000"/>
-              </a:solidFill>
-              <a:effectLst/>
-              <a:uFillTx/>
-              <a:latin typeface="Arial"/>
-            </a:endParaRPr>
-          </a:p>
-        </p:txBody>
-      </p:sp>
-      <p:sp>
-        <p:nvSpPr>
-          <p:cNvPr id="115" name=""/>
-          <p:cNvSpPr txBox="1"/>
-          <p:nvPr/>
-        </p:nvSpPr>
-        <p:spPr>
-          <a:xfrm>
-            <a:off x="3040200" y="2558880"/>
-            <a:ext cx="3362400" cy="201600"/>
-          </a:xfrm>
-          <a:prstGeom prst="rect">
-            <a:avLst/>
-          </a:prstGeom>
-          <a:solidFill>
-            <a:srgbClr val="103E3A"/>
-          </a:solidFill>
-          <a:ln w="14400">
-            <a:solidFill>
-              <a:srgbClr val="E6BF71"/>
-            </a:solidFill>
-            <a:round/>
-          </a:ln>
-        </p:spPr>
-        <p:txBody>
-          <a:bodyPr lIns="79200" tIns="28800" rIns="79200" bIns="28800" anchor="t">
-            <a:spAutoFit/>
-          </a:bodyPr>
-          <a:p>
-            <a:r>
-              <a:rPr lang="en-US" sz="950" b="1" u="none" strike="noStrike">
-                <a:solidFill>
-                  <a:srgbClr val="FFFFFF"/>
-                </a:solidFill>
-                <a:effectLst/>
-                <a:uFillTx/>
-                <a:latin typeface="Arial"/>
-              </a:rPr>
-              <a:t>Compact 7-day table — entries &amp; actions inline</a:t>
-            </a:r>
-            <a:endParaRPr lang="en-US" sz="950" b="0" u="none" strike="noStrike">
-              <a:solidFill>
-                <a:srgbClr val="FFFFFF"/>
-              </a:solidFill>
-              <a:effectLst/>
-              <a:uFillTx/>
-              <a:latin typeface="Arial"/>
-            </a:endParaRPr>
-          </a:p>
-        </p:txBody>
-      </p:sp>
-      <p:sp>
-        <p:nvSpPr>
-          <p:cNvPr id="116" name=""/>
+          <p:cNvPr id="104" name=""/>
           <p:cNvSpPr txBox="1"/>
           <p:nvPr/>
         </p:nvSpPr>
@@ -5400,7 +5311,7 @@
       </p:grpSpPr>
       <p:sp>
         <p:nvSpPr>
-          <p:cNvPr id="117" name=""/>
+          <p:cNvPr id="105" name=""/>
           <p:cNvSpPr txBox="1"/>
           <p:nvPr/>
         </p:nvSpPr>
@@ -5446,7 +5357,7 @@
       </p:sp>
       <p:sp>
         <p:nvSpPr>
-          <p:cNvPr id="118" name=""/>
+          <p:cNvPr id="106" name=""/>
           <p:cNvSpPr txBox="1"/>
           <p:nvPr/>
         </p:nvSpPr>
@@ -5483,7 +5394,7 @@
       </p:sp>
       <p:pic>
         <p:nvPicPr>
-          <p:cNvPr id="119" name=""/>
+          <p:cNvPr id="107" name=""/>
           <p:cNvPicPr/>
           <p:nvPr/>
         </p:nvPicPr>
@@ -5507,185 +5418,7 @@
       </p:pic>
       <p:sp>
         <p:nvSpPr>
-          <p:cNvPr id="120" name=""/>
-          <p:cNvSpPr txBox="1"/>
-          <p:nvPr/>
-        </p:nvSpPr>
-        <p:spPr>
-          <a:xfrm>
-            <a:off x="6781680" y="1088640"/>
-            <a:ext cx="1354680" cy="322560"/>
-          </a:xfrm>
-          <a:prstGeom prst="rect">
-            <a:avLst/>
-          </a:prstGeom>
-          <a:noFill/>
-          <a:ln w="28800">
-            <a:solidFill>
-              <a:srgbClr val="D97706"/>
-            </a:solidFill>
-            <a:round/>
-          </a:ln>
-        </p:spPr>
-        <p:txBody>
-          <a:bodyPr lIns="104400" tIns="59400" rIns="104400" bIns="59400" anchor="t">
-            <a:spAutoFit/>
-          </a:bodyPr>
-          <a:p>
-            <a:endParaRPr lang="en-US" sz="1800" b="0" u="none" strike="noStrike">
-              <a:solidFill>
-                <a:srgbClr val="000000"/>
-              </a:solidFill>
-              <a:effectLst/>
-              <a:uFillTx/>
-              <a:latin typeface="Arial"/>
-            </a:endParaRPr>
-          </a:p>
-        </p:txBody>
-      </p:sp>
-      <p:sp>
-        <p:nvSpPr>
-          <p:cNvPr id="121" name=""/>
-          <p:cNvSpPr txBox="1"/>
-          <p:nvPr/>
-        </p:nvSpPr>
-        <p:spPr>
-          <a:xfrm>
-            <a:off x="6781680" y="1440000"/>
-            <a:ext cx="3020400" cy="201600"/>
-          </a:xfrm>
-          <a:prstGeom prst="rect">
-            <a:avLst/>
-          </a:prstGeom>
-          <a:solidFill>
-            <a:srgbClr val="103E3A"/>
-          </a:solidFill>
-          <a:ln w="14400">
-            <a:solidFill>
-              <a:srgbClr val="E6BF71"/>
-            </a:solidFill>
-            <a:round/>
-          </a:ln>
-        </p:spPr>
-        <p:txBody>
-          <a:bodyPr lIns="79200" tIns="28800" rIns="79200" bIns="28800" anchor="t">
-            <a:spAutoFit/>
-          </a:bodyPr>
-          <a:p>
-            <a:r>
-              <a:rPr lang="en-US" sz="950" b="1" u="none" strike="noStrike">
-                <a:solidFill>
-                  <a:srgbClr val="FFFFFF"/>
-                </a:solidFill>
-                <a:effectLst/>
-                <a:uFillTx/>
-                <a:latin typeface="Arial"/>
-              </a:rPr>
-              <a:t>Check-in punch · EN/AR · Dark mode · Bell</a:t>
-            </a:r>
-            <a:endParaRPr lang="en-US" sz="950" b="0" u="none" strike="noStrike">
-              <a:solidFill>
-                <a:srgbClr val="FFFFFF"/>
-              </a:solidFill>
-              <a:effectLst/>
-              <a:uFillTx/>
-              <a:latin typeface="Arial"/>
-            </a:endParaRPr>
-          </a:p>
-        </p:txBody>
-      </p:sp>
-      <p:sp>
-        <p:nvSpPr>
-          <p:cNvPr id="122" name=""/>
-          <p:cNvSpPr txBox="1"/>
-          <p:nvPr/>
-        </p:nvSpPr>
-        <p:spPr>
-          <a:xfrm>
-            <a:off x="3104640" y="3507840"/>
-            <a:ext cx="3354480" cy="1370880"/>
-          </a:xfrm>
-          <a:prstGeom prst="rect">
-            <a:avLst/>
-          </a:prstGeom>
-          <a:noFill/>
-          <a:ln w="28800">
-            <a:solidFill>
-              <a:srgbClr val="D97706"/>
-            </a:solidFill>
-            <a:round/>
-          </a:ln>
-        </p:spPr>
-        <p:txBody>
-          <a:bodyPr lIns="104400" tIns="59400" rIns="104400" bIns="59400" anchor="t">
-            <a:spAutoFit/>
-          </a:bodyPr>
-          <a:p>
-            <a:endParaRPr lang="en-US" sz="1800" b="0" u="none" strike="noStrike">
-              <a:solidFill>
-                <a:srgbClr val="000000"/>
-              </a:solidFill>
-              <a:effectLst/>
-              <a:uFillTx/>
-              <a:latin typeface="Arial"/>
-            </a:endParaRPr>
-          </a:p>
-        </p:txBody>
-      </p:sp>
-      <p:sp>
-        <p:nvSpPr>
-          <p:cNvPr id="123" name=""/>
-          <p:cNvSpPr txBox="1"/>
-          <p:nvPr/>
-        </p:nvSpPr>
-        <p:spPr>
-          <a:xfrm>
-            <a:off x="3104640" y="3284640"/>
-            <a:ext cx="3020400" cy="201600"/>
-          </a:xfrm>
-          <a:prstGeom prst="rect">
-            <a:avLst/>
-          </a:prstGeom>
-          <a:solidFill>
-            <a:srgbClr val="103E3A"/>
-          </a:solidFill>
-          <a:ln w="14400">
-            <a:solidFill>
-              <a:srgbClr val="E6BF71"/>
-            </a:solidFill>
-            <a:round/>
-          </a:ln>
-        </p:spPr>
-        <p:txBody>
-          <a:bodyPr lIns="79200" tIns="28800" rIns="79200" bIns="28800" anchor="t">
-            <a:spAutoFit/>
-          </a:bodyPr>
-          <a:p>
-            <a:r>
-              <a:rPr lang="en-US" sz="950" b="1" u="none" strike="noStrike">
-                <a:solidFill>
-                  <a:srgbClr val="FFFFFF"/>
-                </a:solidFill>
-                <a:effectLst/>
-                <a:uFillTx/>
-                <a:latin typeface="Arial"/>
-              </a:rPr>
-              <a:t>Personal allocation balances (full cards)</a:t>
-            </a:r>
-            <a:endParaRPr lang="en-US" sz="950" b="0" u="none" strike="noStrike">
-              <a:solidFill>
-                <a:srgbClr val="FFFFFF"/>
-              </a:solidFill>
-              <a:effectLst/>
-              <a:uFillTx/>
-              <a:latin typeface="Arial"/>
-            </a:endParaRPr>
-          </a:p>
-        </p:txBody>
-      </p:sp>
-      <p:sp>
-        <p:nvSpPr>
-          <p:cNvPr id="124" name=""/>
+          <p:cNvPr id="108" name=""/>
           <p:cNvSpPr txBox="1"/>
           <p:nvPr/>
         </p:nvSpPr>
@@ -5768,7 +5501,7 @@
       </p:grpSpPr>
       <p:sp>
         <p:nvSpPr>
-          <p:cNvPr id="125" name=""/>
+          <p:cNvPr id="109" name=""/>
           <p:cNvSpPr txBox="1"/>
           <p:nvPr/>
         </p:nvSpPr>
@@ -5814,7 +5547,7 @@
       </p:sp>
       <p:sp>
         <p:nvSpPr>
-          <p:cNvPr id="126" name=""/>
+          <p:cNvPr id="110" name=""/>
           <p:cNvSpPr txBox="1"/>
           <p:nvPr/>
         </p:nvSpPr>
@@ -5851,7 +5584,7 @@
       </p:sp>
       <p:pic>
         <p:nvPicPr>
-          <p:cNvPr id="127" name=""/>
+          <p:cNvPr id="111" name=""/>
           <p:cNvPicPr/>
           <p:nvPr/>
         </p:nvPicPr>
@@ -5875,185 +5608,7 @@
       </p:pic>
       <p:sp>
         <p:nvSpPr>
-          <p:cNvPr id="128" name=""/>
-          <p:cNvSpPr txBox="1"/>
-          <p:nvPr/>
-        </p:nvSpPr>
-        <p:spPr>
-          <a:xfrm>
-            <a:off x="1943280" y="1088640"/>
-            <a:ext cx="1548360" cy="322560"/>
-          </a:xfrm>
-          <a:prstGeom prst="rect">
-            <a:avLst/>
-          </a:prstGeom>
-          <a:noFill/>
-          <a:ln w="28800">
-            <a:solidFill>
-              <a:srgbClr val="D97706"/>
-            </a:solidFill>
-            <a:round/>
-          </a:ln>
-        </p:spPr>
-        <p:txBody>
-          <a:bodyPr lIns="104400" tIns="59400" rIns="104400" bIns="59400" anchor="t">
-            <a:spAutoFit/>
-          </a:bodyPr>
-          <a:p>
-            <a:endParaRPr lang="en-US" sz="1800" b="0" u="none" strike="noStrike">
-              <a:solidFill>
-                <a:srgbClr val="000000"/>
-              </a:solidFill>
-              <a:effectLst/>
-              <a:uFillTx/>
-              <a:latin typeface="Arial"/>
-            </a:endParaRPr>
-          </a:p>
-        </p:txBody>
-      </p:sp>
-      <p:sp>
-        <p:nvSpPr>
-          <p:cNvPr id="129" name=""/>
-          <p:cNvSpPr txBox="1"/>
-          <p:nvPr/>
-        </p:nvSpPr>
-        <p:spPr>
-          <a:xfrm>
-            <a:off x="1943280" y="1440000"/>
-            <a:ext cx="3294000" cy="201600"/>
-          </a:xfrm>
-          <a:prstGeom prst="rect">
-            <a:avLst/>
-          </a:prstGeom>
-          <a:solidFill>
-            <a:srgbClr val="103E3A"/>
-          </a:solidFill>
-          <a:ln w="14400">
-            <a:solidFill>
-              <a:srgbClr val="E6BF71"/>
-            </a:solidFill>
-            <a:round/>
-          </a:ln>
-        </p:spPr>
-        <p:txBody>
-          <a:bodyPr lIns="79200" tIns="28800" rIns="79200" bIns="28800" anchor="t">
-            <a:spAutoFit/>
-          </a:bodyPr>
-          <a:p>
-            <a:r>
-              <a:rPr lang="en-US" sz="950" b="1" u="none" strike="noStrike">
-                <a:solidFill>
-                  <a:srgbClr val="FFFFFF"/>
-                </a:solidFill>
-                <a:effectLst/>
-                <a:uFillTx/>
-                <a:latin typeface="Arial"/>
-              </a:rPr>
-              <a:t>Topbar flipped RTL · theme &amp; language toggles</a:t>
-            </a:r>
-            <a:endParaRPr lang="en-US" sz="950" b="0" u="none" strike="noStrike">
-              <a:solidFill>
-                <a:srgbClr val="FFFFFF"/>
-              </a:solidFill>
-              <a:effectLst/>
-              <a:uFillTx/>
-              <a:latin typeface="Arial"/>
-            </a:endParaRPr>
-          </a:p>
-        </p:txBody>
-      </p:sp>
-      <p:sp>
-        <p:nvSpPr>
-          <p:cNvPr id="130" name=""/>
-          <p:cNvSpPr txBox="1"/>
-          <p:nvPr/>
-        </p:nvSpPr>
-        <p:spPr>
-          <a:xfrm>
-            <a:off x="6975360" y="1088640"/>
-            <a:ext cx="1225800" cy="2016000"/>
-          </a:xfrm>
-          <a:prstGeom prst="rect">
-            <a:avLst/>
-          </a:prstGeom>
-          <a:noFill/>
-          <a:ln w="28800">
-            <a:solidFill>
-              <a:srgbClr val="D97706"/>
-            </a:solidFill>
-            <a:round/>
-          </a:ln>
-        </p:spPr>
-        <p:txBody>
-          <a:bodyPr lIns="104400" tIns="59400" rIns="104400" bIns="59400" anchor="t">
-            <a:spAutoFit/>
-          </a:bodyPr>
-          <a:p>
-            <a:endParaRPr lang="en-US" sz="1800" b="0" u="none" strike="noStrike">
-              <a:solidFill>
-                <a:srgbClr val="000000"/>
-              </a:solidFill>
-              <a:effectLst/>
-              <a:uFillTx/>
-              <a:latin typeface="Arial"/>
-            </a:endParaRPr>
-          </a:p>
-        </p:txBody>
-      </p:sp>
-      <p:sp>
-        <p:nvSpPr>
-          <p:cNvPr id="131" name=""/>
-          <p:cNvSpPr txBox="1"/>
-          <p:nvPr/>
-        </p:nvSpPr>
-        <p:spPr>
-          <a:xfrm>
-            <a:off x="6975360" y="3133440"/>
-            <a:ext cx="2678400" cy="201600"/>
-          </a:xfrm>
-          <a:prstGeom prst="rect">
-            <a:avLst/>
-          </a:prstGeom>
-          <a:solidFill>
-            <a:srgbClr val="103E3A"/>
-          </a:solidFill>
-          <a:ln w="14400">
-            <a:solidFill>
-              <a:srgbClr val="E6BF71"/>
-            </a:solidFill>
-            <a:round/>
-          </a:ln>
-        </p:spPr>
-        <p:txBody>
-          <a:bodyPr lIns="79200" tIns="28800" rIns="79200" bIns="28800" anchor="t">
-            <a:spAutoFit/>
-          </a:bodyPr>
-          <a:p>
-            <a:r>
-              <a:rPr lang="en-US" sz="950" b="1" u="none" strike="noStrike">
-                <a:solidFill>
-                  <a:srgbClr val="FFFFFF"/>
-                </a:solidFill>
-                <a:effectLst/>
-                <a:uFillTx/>
-                <a:latin typeface="Arial"/>
-              </a:rPr>
-              <a:t>Arabic RTL navigation &amp; dark palette</a:t>
-            </a:r>
-            <a:endParaRPr lang="en-US" sz="950" b="0" u="none" strike="noStrike">
-              <a:solidFill>
-                <a:srgbClr val="FFFFFF"/>
-              </a:solidFill>
-              <a:effectLst/>
-              <a:uFillTx/>
-              <a:latin typeface="Arial"/>
-            </a:endParaRPr>
-          </a:p>
-        </p:txBody>
-      </p:sp>
-      <p:sp>
-        <p:nvSpPr>
-          <p:cNvPr id="132" name=""/>
+          <p:cNvPr id="112" name=""/>
           <p:cNvSpPr txBox="1"/>
           <p:nvPr/>
         </p:nvSpPr>
@@ -6136,7 +5691,7 @@
       </p:grpSpPr>
       <p:sp>
         <p:nvSpPr>
-          <p:cNvPr id="133" name=""/>
+          <p:cNvPr id="113" name=""/>
           <p:cNvSpPr txBox="1"/>
           <p:nvPr/>
         </p:nvSpPr>
@@ -6182,7 +5737,7 @@
       </p:sp>
       <p:sp>
         <p:nvSpPr>
-          <p:cNvPr id="134" name=""/>
+          <p:cNvPr id="114" name=""/>
           <p:cNvSpPr txBox="1"/>
           <p:nvPr/>
         </p:nvSpPr>
@@ -6219,7 +5774,7 @@
       </p:sp>
       <p:pic>
         <p:nvPicPr>
-          <p:cNvPr id="135" name=""/>
+          <p:cNvPr id="115" name=""/>
           <p:cNvPicPr/>
           <p:nvPr/>
         </p:nvPicPr>
@@ -6243,96 +5798,7 @@
       </p:pic>
       <p:sp>
         <p:nvSpPr>
-          <p:cNvPr id="136" name=""/>
-          <p:cNvSpPr txBox="1"/>
-          <p:nvPr/>
-        </p:nvSpPr>
-        <p:spPr>
-          <a:xfrm>
-            <a:off x="3104640" y="2862720"/>
-            <a:ext cx="4838400" cy="645120"/>
-          </a:xfrm>
-          <a:prstGeom prst="rect">
-            <a:avLst/>
-          </a:prstGeom>
-          <a:noFill/>
-          <a:ln w="28800">
-            <a:solidFill>
-              <a:srgbClr val="D97706"/>
-            </a:solidFill>
-            <a:round/>
-          </a:ln>
-        </p:spPr>
-        <p:txBody>
-          <a:bodyPr lIns="104400" tIns="59400" rIns="104400" bIns="59400" anchor="t">
-            <a:spAutoFit/>
-          </a:bodyPr>
-          <a:p>
-            <a:endParaRPr lang="en-US" sz="1800" b="0" u="none" strike="noStrike">
-              <a:solidFill>
-                <a:srgbClr val="000000"/>
-              </a:solidFill>
-              <a:effectLst/>
-              <a:uFillTx/>
-              <a:latin typeface="Arial"/>
-            </a:endParaRPr>
-          </a:p>
-        </p:txBody>
-      </p:sp>
-      <p:sp>
-        <p:nvSpPr>
-          <p:cNvPr id="137" name=""/>
-          <p:cNvSpPr txBox="1"/>
-          <p:nvPr/>
-        </p:nvSpPr>
-        <p:spPr>
-          <a:xfrm>
-            <a:off x="3104640" y="2639520"/>
-            <a:ext cx="2199600" cy="201600"/>
-          </a:xfrm>
-          <a:prstGeom prst="rect">
-            <a:avLst/>
-          </a:prstGeom>
-          <a:solidFill>
-            <a:srgbClr val="103E3A"/>
-          </a:solidFill>
-          <a:ln w="14400">
-            <a:solidFill>
-              <a:srgbClr val="E6BF71"/>
-            </a:solidFill>
-            <a:round/>
-          </a:ln>
-        </p:spPr>
-        <p:txBody>
-          <a:bodyPr lIns="79200" tIns="28800" rIns="79200" bIns="28800" anchor="t">
-            <a:spAutoFit/>
-          </a:bodyPr>
-          <a:p>
-            <a:r>
-              <a:rPr lang="en-US" sz="950" b="1" u="none" strike="noStrike">
-                <a:solidFill>
-                  <a:srgbClr val="FFFFFF"/>
-                </a:solidFill>
-                <a:effectLst/>
-                <a:uFillTx/>
-                <a:latin typeface="Arial"/>
-              </a:rPr>
-              <a:t>Own rows tinted + 'You' badge</a:t>
-            </a:r>
-            <a:endParaRPr lang="en-US" sz="950" b="0" u="none" strike="noStrike">
-              <a:solidFill>
-                <a:srgbClr val="FFFFFF"/>
-              </a:solidFill>
-              <a:effectLst/>
-              <a:uFillTx/>
-              <a:latin typeface="Arial"/>
-            </a:endParaRPr>
-          </a:p>
-        </p:txBody>
-      </p:sp>
-      <p:sp>
-        <p:nvSpPr>
-          <p:cNvPr id="138" name=""/>
+          <p:cNvPr id="116" name=""/>
           <p:cNvSpPr txBox="1"/>
           <p:nvPr/>
         </p:nvSpPr>
@@ -6415,7 +5881,7 @@
       </p:grpSpPr>
       <p:sp>
         <p:nvSpPr>
-          <p:cNvPr id="139" name=""/>
+          <p:cNvPr id="117" name=""/>
           <p:cNvSpPr txBox="1"/>
           <p:nvPr/>
         </p:nvSpPr>
@@ -6461,7 +5927,7 @@
       </p:sp>
       <p:sp>
         <p:nvSpPr>
-          <p:cNvPr id="140" name=""/>
+          <p:cNvPr id="118" name=""/>
           <p:cNvSpPr txBox="1"/>
           <p:nvPr/>
         </p:nvSpPr>
@@ -6498,7 +5964,7 @@
       </p:sp>
       <p:pic>
         <p:nvPicPr>
-          <p:cNvPr id="141" name=""/>
+          <p:cNvPr id="119" name=""/>
           <p:cNvPicPr/>
           <p:nvPr/>
         </p:nvPicPr>
@@ -6522,7 +5988,7 @@
       </p:pic>
       <p:sp>
         <p:nvSpPr>
-          <p:cNvPr id="142" name=""/>
+          <p:cNvPr id="120" name=""/>
           <p:cNvSpPr txBox="1"/>
           <p:nvPr/>
         </p:nvSpPr>
@@ -6605,7 +6071,7 @@
       </p:grpSpPr>
       <p:sp>
         <p:nvSpPr>
-          <p:cNvPr id="143" name=""/>
+          <p:cNvPr id="121" name=""/>
           <p:cNvSpPr txBox="1"/>
           <p:nvPr/>
         </p:nvSpPr>
@@ -6651,7 +6117,7 @@
       </p:sp>
       <p:sp>
         <p:nvSpPr>
-          <p:cNvPr id="144" name=""/>
+          <p:cNvPr id="122" name=""/>
           <p:cNvSpPr txBox="1"/>
           <p:nvPr/>
         </p:nvSpPr>
@@ -6688,7 +6154,7 @@
       </p:sp>
       <p:pic>
         <p:nvPicPr>
-          <p:cNvPr id="145" name=""/>
+          <p:cNvPr id="123" name=""/>
           <p:cNvPicPr/>
           <p:nvPr/>
         </p:nvPicPr>
@@ -6712,7 +6178,7 @@
       </p:pic>
       <p:sp>
         <p:nvSpPr>
-          <p:cNvPr id="146" name=""/>
+          <p:cNvPr id="124" name=""/>
           <p:cNvSpPr txBox="1"/>
           <p:nvPr/>
         </p:nvSpPr>
@@ -7179,7 +6645,7 @@
       </p:grpSpPr>
       <p:sp>
         <p:nvSpPr>
-          <p:cNvPr id="147" name=""/>
+          <p:cNvPr id="125" name=""/>
           <p:cNvSpPr txBox="1"/>
           <p:nvPr/>
         </p:nvSpPr>
@@ -7225,7 +6691,7 @@
       </p:sp>
       <p:sp>
         <p:nvSpPr>
-          <p:cNvPr id="148" name=""/>
+          <p:cNvPr id="126" name=""/>
           <p:cNvSpPr txBox="1"/>
           <p:nvPr/>
         </p:nvSpPr>
@@ -7262,7 +6728,7 @@
       </p:sp>
       <p:pic>
         <p:nvPicPr>
-          <p:cNvPr id="149" name=""/>
+          <p:cNvPr id="127" name=""/>
           <p:cNvPicPr/>
           <p:nvPr/>
         </p:nvPicPr>
@@ -7286,7 +6752,7 @@
       </p:pic>
       <p:sp>
         <p:nvSpPr>
-          <p:cNvPr id="150" name=""/>
+          <p:cNvPr id="128" name=""/>
           <p:cNvSpPr txBox="1"/>
           <p:nvPr/>
         </p:nvSpPr>
@@ -7369,7 +6835,7 @@
       </p:grpSpPr>
       <p:sp>
         <p:nvSpPr>
-          <p:cNvPr id="151" name=""/>
+          <p:cNvPr id="129" name=""/>
           <p:cNvSpPr txBox="1"/>
           <p:nvPr/>
         </p:nvSpPr>
@@ -7415,7 +6881,7 @@
       </p:sp>
       <p:sp>
         <p:nvSpPr>
-          <p:cNvPr id="152" name=""/>
+          <p:cNvPr id="130" name=""/>
           <p:cNvSpPr txBox="1"/>
           <p:nvPr/>
         </p:nvSpPr>
@@ -7452,7 +6918,7 @@
       </p:sp>
       <p:pic>
         <p:nvPicPr>
-          <p:cNvPr id="153" name=""/>
+          <p:cNvPr id="131" name=""/>
           <p:cNvPicPr/>
           <p:nvPr/>
         </p:nvPicPr>
@@ -7476,96 +6942,7 @@
       </p:pic>
       <p:sp>
         <p:nvSpPr>
-          <p:cNvPr id="154" name=""/>
-          <p:cNvSpPr txBox="1"/>
-          <p:nvPr/>
-        </p:nvSpPr>
-        <p:spPr>
-          <a:xfrm>
-            <a:off x="3104640" y="1854720"/>
-            <a:ext cx="1677240" cy="362880"/>
-          </a:xfrm>
-          <a:prstGeom prst="rect">
-            <a:avLst/>
-          </a:prstGeom>
-          <a:noFill/>
-          <a:ln w="28800">
-            <a:solidFill>
-              <a:srgbClr val="D97706"/>
-            </a:solidFill>
-            <a:round/>
-          </a:ln>
-        </p:spPr>
-        <p:txBody>
-          <a:bodyPr lIns="104400" tIns="59400" rIns="104400" bIns="59400" anchor="t">
-            <a:spAutoFit/>
-          </a:bodyPr>
-          <a:p>
-            <a:endParaRPr lang="en-US" sz="1800" b="0" u="none" strike="noStrike">
-              <a:solidFill>
-                <a:srgbClr val="000000"/>
-              </a:solidFill>
-              <a:effectLst/>
-              <a:uFillTx/>
-              <a:latin typeface="Arial"/>
-            </a:endParaRPr>
-          </a:p>
-        </p:txBody>
-      </p:sp>
-      <p:sp>
-        <p:nvSpPr>
-          <p:cNvPr id="155" name=""/>
-          <p:cNvSpPr txBox="1"/>
-          <p:nvPr/>
-        </p:nvSpPr>
-        <p:spPr>
-          <a:xfrm>
-            <a:off x="3104640" y="1631520"/>
-            <a:ext cx="2746800" cy="201600"/>
-          </a:xfrm>
-          <a:prstGeom prst="rect">
-            <a:avLst/>
-          </a:prstGeom>
-          <a:solidFill>
-            <a:srgbClr val="103E3A"/>
-          </a:solidFill>
-          <a:ln w="14400">
-            <a:solidFill>
-              <a:srgbClr val="E6BF71"/>
-            </a:solidFill>
-            <a:round/>
-          </a:ln>
-        </p:spPr>
-        <p:txBody>
-          <a:bodyPr lIns="79200" tIns="28800" rIns="79200" bIns="28800" anchor="t">
-            <a:spAutoFit/>
-          </a:bodyPr>
-          <a:p>
-            <a:r>
-              <a:rPr lang="en-US" sz="950" b="1" u="none" strike="noStrike">
-                <a:solidFill>
-                  <a:srgbClr val="FFFFFF"/>
-                </a:solidFill>
-                <a:effectLst/>
-                <a:uFillTx/>
-                <a:latin typeface="Arial"/>
-              </a:rPr>
-              <a:t>Defaults to Requests tab · CSV export</a:t>
-            </a:r>
-            <a:endParaRPr lang="en-US" sz="950" b="0" u="none" strike="noStrike">
-              <a:solidFill>
-                <a:srgbClr val="FFFFFF"/>
-              </a:solidFill>
-              <a:effectLst/>
-              <a:uFillTx/>
-              <a:latin typeface="Arial"/>
-            </a:endParaRPr>
-          </a:p>
-        </p:txBody>
-      </p:sp>
-      <p:sp>
-        <p:nvSpPr>
-          <p:cNvPr id="156" name=""/>
+          <p:cNvPr id="132" name=""/>
           <p:cNvSpPr txBox="1"/>
           <p:nvPr/>
         </p:nvSpPr>
@@ -7648,7 +7025,7 @@
       </p:grpSpPr>
       <p:sp>
         <p:nvSpPr>
-          <p:cNvPr id="157" name=""/>
+          <p:cNvPr id="133" name=""/>
           <p:cNvSpPr txBox="1"/>
           <p:nvPr/>
         </p:nvSpPr>
@@ -7694,7 +7071,7 @@
       </p:sp>
       <p:sp>
         <p:nvSpPr>
-          <p:cNvPr id="158" name=""/>
+          <p:cNvPr id="134" name=""/>
           <p:cNvSpPr txBox="1"/>
           <p:nvPr/>
         </p:nvSpPr>
@@ -7731,7 +7108,7 @@
       </p:sp>
       <p:pic>
         <p:nvPicPr>
-          <p:cNvPr id="159" name=""/>
+          <p:cNvPr id="135" name=""/>
           <p:cNvPicPr/>
           <p:nvPr/>
         </p:nvPicPr>
@@ -7755,7 +7132,7 @@
       </p:pic>
       <p:sp>
         <p:nvSpPr>
-          <p:cNvPr id="160" name=""/>
+          <p:cNvPr id="136" name=""/>
           <p:cNvSpPr txBox="1"/>
           <p:nvPr/>
         </p:nvSpPr>
@@ -7838,7 +7215,7 @@
       </p:grpSpPr>
       <p:sp>
         <p:nvSpPr>
-          <p:cNvPr id="161" name=""/>
+          <p:cNvPr id="137" name=""/>
           <p:cNvSpPr txBox="1"/>
           <p:nvPr/>
         </p:nvSpPr>
@@ -7884,7 +7261,7 @@
       </p:sp>
       <p:sp>
         <p:nvSpPr>
-          <p:cNvPr id="162" name=""/>
+          <p:cNvPr id="138" name=""/>
           <p:cNvSpPr txBox="1"/>
           <p:nvPr/>
         </p:nvSpPr>
@@ -7921,7 +7298,7 @@
       </p:sp>
       <p:sp>
         <p:nvSpPr>
-          <p:cNvPr id="163" name=""/>
+          <p:cNvPr id="139" name=""/>
           <p:cNvSpPr txBox="1"/>
           <p:nvPr/>
         </p:nvSpPr>
@@ -7958,7 +7335,7 @@
       </p:sp>
       <p:sp>
         <p:nvSpPr>
-          <p:cNvPr id="164" name=""/>
+          <p:cNvPr id="140" name=""/>
           <p:cNvSpPr txBox="1"/>
           <p:nvPr/>
         </p:nvSpPr>
@@ -8009,7 +7386,7 @@
       </p:sp>
       <p:sp>
         <p:nvSpPr>
-          <p:cNvPr id="165" name=""/>
+          <p:cNvPr id="141" name=""/>
           <p:cNvSpPr txBox="1"/>
           <p:nvPr/>
         </p:nvSpPr>
@@ -8046,7 +7423,7 @@
       </p:sp>
       <p:sp>
         <p:nvSpPr>
-          <p:cNvPr id="166" name=""/>
+          <p:cNvPr id="142" name=""/>
           <p:cNvSpPr txBox="1"/>
           <p:nvPr/>
         </p:nvSpPr>
@@ -8097,7 +7474,7 @@
       </p:sp>
       <p:sp>
         <p:nvSpPr>
-          <p:cNvPr id="167" name=""/>
+          <p:cNvPr id="143" name=""/>
           <p:cNvSpPr txBox="1"/>
           <p:nvPr/>
         </p:nvSpPr>
@@ -8134,7 +7511,7 @@
       </p:sp>
       <p:sp>
         <p:nvSpPr>
-          <p:cNvPr id="168" name=""/>
+          <p:cNvPr id="144" name=""/>
           <p:cNvSpPr txBox="1"/>
           <p:nvPr/>
         </p:nvSpPr>
@@ -8185,7 +7562,7 @@
       </p:sp>
       <p:sp>
         <p:nvSpPr>
-          <p:cNvPr id="169" name=""/>
+          <p:cNvPr id="145" name=""/>
           <p:cNvSpPr txBox="1"/>
           <p:nvPr/>
         </p:nvSpPr>
@@ -8222,7 +7599,7 @@
       </p:sp>
       <p:sp>
         <p:nvSpPr>
-          <p:cNvPr id="170" name=""/>
+          <p:cNvPr id="146" name=""/>
           <p:cNvSpPr txBox="1"/>
           <p:nvPr/>
         </p:nvSpPr>
@@ -8310,7 +7687,7 @@
       </p:grpSpPr>
       <p:sp>
         <p:nvSpPr>
-          <p:cNvPr id="171" name=""/>
+          <p:cNvPr id="147" name=""/>
           <p:cNvSpPr txBox="1"/>
           <p:nvPr/>
         </p:nvSpPr>
@@ -8356,7 +7733,7 @@
       </p:sp>
       <p:sp>
         <p:nvSpPr>
-          <p:cNvPr id="172" name=""/>
+          <p:cNvPr id="148" name=""/>
           <p:cNvSpPr txBox="1"/>
           <p:nvPr/>
         </p:nvSpPr>
@@ -8393,7 +7770,7 @@
       </p:sp>
       <p:sp>
         <p:nvSpPr>
-          <p:cNvPr id="173" name=""/>
+          <p:cNvPr id="149" name=""/>
           <p:cNvSpPr txBox="1"/>
           <p:nvPr/>
         </p:nvSpPr>
@@ -8430,7 +7807,7 @@
       </p:sp>
       <p:sp>
         <p:nvSpPr>
-          <p:cNvPr id="174" name=""/>
+          <p:cNvPr id="150" name=""/>
           <p:cNvSpPr txBox="1"/>
           <p:nvPr/>
         </p:nvSpPr>
@@ -8481,7 +7858,7 @@
       </p:sp>
       <p:sp>
         <p:nvSpPr>
-          <p:cNvPr id="175" name=""/>
+          <p:cNvPr id="151" name=""/>
           <p:cNvSpPr txBox="1"/>
           <p:nvPr/>
         </p:nvSpPr>
@@ -8518,7 +7895,7 @@
       </p:sp>
       <p:sp>
         <p:nvSpPr>
-          <p:cNvPr id="176" name=""/>
+          <p:cNvPr id="152" name=""/>
           <p:cNvSpPr txBox="1"/>
           <p:nvPr/>
         </p:nvSpPr>
@@ -8569,7 +7946,7 @@
       </p:sp>
       <p:sp>
         <p:nvSpPr>
-          <p:cNvPr id="177" name=""/>
+          <p:cNvPr id="153" name=""/>
           <p:cNvSpPr txBox="1"/>
           <p:nvPr/>
         </p:nvSpPr>
@@ -8606,7 +7983,7 @@
       </p:sp>
       <p:sp>
         <p:nvSpPr>
-          <p:cNvPr id="178" name=""/>
+          <p:cNvPr id="154" name=""/>
           <p:cNvSpPr txBox="1"/>
           <p:nvPr/>
         </p:nvSpPr>
@@ -8657,7 +8034,7 @@
       </p:sp>
       <p:sp>
         <p:nvSpPr>
-          <p:cNvPr id="179" name=""/>
+          <p:cNvPr id="155" name=""/>
           <p:cNvSpPr txBox="1"/>
           <p:nvPr/>
         </p:nvSpPr>
@@ -8694,7 +8071,7 @@
       </p:sp>
       <p:sp>
         <p:nvSpPr>
-          <p:cNvPr id="180" name=""/>
+          <p:cNvPr id="156" name=""/>
           <p:cNvSpPr txBox="1"/>
           <p:nvPr/>
         </p:nvSpPr>
@@ -8782,7 +8159,7 @@
       </p:grpSpPr>
       <p:sp>
         <p:nvSpPr>
-          <p:cNvPr id="181" name=""/>
+          <p:cNvPr id="157" name=""/>
           <p:cNvSpPr txBox="1"/>
           <p:nvPr/>
         </p:nvSpPr>
@@ -8828,7 +8205,7 @@
       </p:sp>
       <p:sp>
         <p:nvSpPr>
-          <p:cNvPr id="182" name=""/>
+          <p:cNvPr id="158" name=""/>
           <p:cNvSpPr txBox="1"/>
           <p:nvPr/>
         </p:nvSpPr>
@@ -8865,7 +8242,7 @@
       </p:sp>
       <p:sp>
         <p:nvSpPr>
-          <p:cNvPr id="183" name=""/>
+          <p:cNvPr id="159" name=""/>
           <p:cNvSpPr txBox="1"/>
           <p:nvPr/>
         </p:nvSpPr>
@@ -8902,7 +8279,7 @@
       </p:sp>
       <p:sp>
         <p:nvSpPr>
-          <p:cNvPr id="184" name=""/>
+          <p:cNvPr id="160" name=""/>
           <p:cNvSpPr txBox="1"/>
           <p:nvPr/>
         </p:nvSpPr>
@@ -8953,7 +8330,7 @@
       </p:sp>
       <p:sp>
         <p:nvSpPr>
-          <p:cNvPr id="185" name=""/>
+          <p:cNvPr id="161" name=""/>
           <p:cNvSpPr txBox="1"/>
           <p:nvPr/>
         </p:nvSpPr>
@@ -8990,7 +8367,7 @@
       </p:sp>
       <p:sp>
         <p:nvSpPr>
-          <p:cNvPr id="186" name=""/>
+          <p:cNvPr id="162" name=""/>
           <p:cNvSpPr txBox="1"/>
           <p:nvPr/>
         </p:nvSpPr>
@@ -9041,7 +8418,7 @@
       </p:sp>
       <p:sp>
         <p:nvSpPr>
-          <p:cNvPr id="187" name=""/>
+          <p:cNvPr id="163" name=""/>
           <p:cNvSpPr txBox="1"/>
           <p:nvPr/>
         </p:nvSpPr>
@@ -9078,7 +8455,7 @@
       </p:sp>
       <p:sp>
         <p:nvSpPr>
-          <p:cNvPr id="188" name=""/>
+          <p:cNvPr id="164" name=""/>
           <p:cNvSpPr txBox="1"/>
           <p:nvPr/>
         </p:nvSpPr>
@@ -9166,7 +8543,7 @@
       </p:grpSpPr>
       <p:sp>
         <p:nvSpPr>
-          <p:cNvPr id="189" name=""/>
+          <p:cNvPr id="165" name=""/>
           <p:cNvSpPr txBox="1"/>
           <p:nvPr/>
         </p:nvSpPr>
@@ -9212,7 +8589,7 @@
       </p:sp>
       <p:sp>
         <p:nvSpPr>
-          <p:cNvPr id="190" name=""/>
+          <p:cNvPr id="166" name=""/>
           <p:cNvSpPr txBox="1"/>
           <p:nvPr/>
         </p:nvSpPr>
@@ -9249,7 +8626,7 @@
       </p:sp>
       <p:sp>
         <p:nvSpPr>
-          <p:cNvPr id="191" name=""/>
+          <p:cNvPr id="167" name=""/>
           <p:cNvSpPr txBox="1"/>
           <p:nvPr/>
         </p:nvSpPr>
@@ -9286,7 +8663,7 @@
       </p:sp>
       <p:sp>
         <p:nvSpPr>
-          <p:cNvPr id="192" name=""/>
+          <p:cNvPr id="168" name=""/>
           <p:cNvSpPr txBox="1"/>
           <p:nvPr/>
         </p:nvSpPr>
@@ -9337,7 +8714,7 @@
       </p:sp>
       <p:sp>
         <p:nvSpPr>
-          <p:cNvPr id="193" name=""/>
+          <p:cNvPr id="169" name=""/>
           <p:cNvSpPr txBox="1"/>
           <p:nvPr/>
         </p:nvSpPr>
@@ -9374,7 +8751,7 @@
       </p:sp>
       <p:sp>
         <p:nvSpPr>
-          <p:cNvPr id="194" name=""/>
+          <p:cNvPr id="170" name=""/>
           <p:cNvSpPr txBox="1"/>
           <p:nvPr/>
         </p:nvSpPr>
@@ -9425,7 +8802,7 @@
       </p:sp>
       <p:sp>
         <p:nvSpPr>
-          <p:cNvPr id="195" name=""/>
+          <p:cNvPr id="171" name=""/>
           <p:cNvSpPr txBox="1"/>
           <p:nvPr/>
         </p:nvSpPr>
@@ -9462,7 +8839,7 @@
       </p:sp>
       <p:sp>
         <p:nvSpPr>
-          <p:cNvPr id="196" name=""/>
+          <p:cNvPr id="172" name=""/>
           <p:cNvSpPr txBox="1"/>
           <p:nvPr/>
         </p:nvSpPr>
@@ -9513,7 +8890,7 @@
       </p:sp>
       <p:sp>
         <p:nvSpPr>
-          <p:cNvPr id="197" name=""/>
+          <p:cNvPr id="173" name=""/>
           <p:cNvSpPr txBox="1"/>
           <p:nvPr/>
         </p:nvSpPr>
@@ -9550,7 +8927,7 @@
       </p:sp>
       <p:sp>
         <p:nvSpPr>
-          <p:cNvPr id="198" name=""/>
+          <p:cNvPr id="174" name=""/>
           <p:cNvSpPr txBox="1"/>
           <p:nvPr/>
         </p:nvSpPr>
@@ -9638,7 +9015,7 @@
       </p:grpSpPr>
       <p:sp>
         <p:nvSpPr>
-          <p:cNvPr id="199" name=""/>
+          <p:cNvPr id="175" name=""/>
           <p:cNvSpPr txBox="1"/>
           <p:nvPr/>
         </p:nvSpPr>
@@ -9684,7 +9061,7 @@
       </p:sp>
       <p:sp>
         <p:nvSpPr>
-          <p:cNvPr id="200" name=""/>
+          <p:cNvPr id="176" name=""/>
           <p:cNvSpPr txBox="1"/>
           <p:nvPr/>
         </p:nvSpPr>
@@ -9721,7 +9098,7 @@
       </p:sp>
       <p:sp>
         <p:nvSpPr>
-          <p:cNvPr id="201" name=""/>
+          <p:cNvPr id="177" name=""/>
           <p:cNvSpPr txBox="1"/>
           <p:nvPr/>
         </p:nvSpPr>
@@ -9758,7 +9135,7 @@
       </p:sp>
       <p:sp>
         <p:nvSpPr>
-          <p:cNvPr id="202" name=""/>
+          <p:cNvPr id="178" name=""/>
           <p:cNvSpPr txBox="1"/>
           <p:nvPr/>
         </p:nvSpPr>
@@ -9809,7 +9186,7 @@
       </p:sp>
       <p:sp>
         <p:nvSpPr>
-          <p:cNvPr id="203" name=""/>
+          <p:cNvPr id="179" name=""/>
           <p:cNvSpPr txBox="1"/>
           <p:nvPr/>
         </p:nvSpPr>
@@ -9846,7 +9223,7 @@
       </p:sp>
       <p:sp>
         <p:nvSpPr>
-          <p:cNvPr id="204" name=""/>
+          <p:cNvPr id="180" name=""/>
           <p:cNvSpPr txBox="1"/>
           <p:nvPr/>
         </p:nvSpPr>
@@ -9897,7 +9274,7 @@
       </p:sp>
       <p:sp>
         <p:nvSpPr>
-          <p:cNvPr id="205" name=""/>
+          <p:cNvPr id="181" name=""/>
           <p:cNvSpPr txBox="1"/>
           <p:nvPr/>
         </p:nvSpPr>
@@ -9934,7 +9311,7 @@
       </p:sp>
       <p:sp>
         <p:nvSpPr>
-          <p:cNvPr id="206" name=""/>
+          <p:cNvPr id="182" name=""/>
           <p:cNvSpPr txBox="1"/>
           <p:nvPr/>
         </p:nvSpPr>
@@ -10022,7 +9399,7 @@
       </p:grpSpPr>
       <p:sp>
         <p:nvSpPr>
-          <p:cNvPr id="207" name=""/>
+          <p:cNvPr id="183" name=""/>
           <p:cNvSpPr txBox="1"/>
           <p:nvPr/>
         </p:nvSpPr>
@@ -10068,7 +9445,7 @@
       </p:sp>
       <p:sp>
         <p:nvSpPr>
-          <p:cNvPr id="208" name=""/>
+          <p:cNvPr id="184" name=""/>
           <p:cNvSpPr txBox="1"/>
           <p:nvPr/>
         </p:nvSpPr>
@@ -10105,7 +9482,7 @@
       </p:sp>
       <p:sp>
         <p:nvSpPr>
-          <p:cNvPr id="209" name=""/>
+          <p:cNvPr id="185" name=""/>
           <p:cNvSpPr txBox="1"/>
           <p:nvPr/>
         </p:nvSpPr>
@@ -10142,7 +9519,7 @@
       </p:sp>
       <p:sp>
         <p:nvSpPr>
-          <p:cNvPr id="210" name=""/>
+          <p:cNvPr id="186" name=""/>
           <p:cNvSpPr txBox="1"/>
           <p:nvPr/>
         </p:nvSpPr>
@@ -10193,7 +9570,7 @@
       </p:sp>
       <p:sp>
         <p:nvSpPr>
-          <p:cNvPr id="211" name=""/>
+          <p:cNvPr id="187" name=""/>
           <p:cNvSpPr txBox="1"/>
           <p:nvPr/>
         </p:nvSpPr>
@@ -10230,7 +9607,7 @@
       </p:sp>
       <p:sp>
         <p:nvSpPr>
-          <p:cNvPr id="212" name=""/>
+          <p:cNvPr id="188" name=""/>
           <p:cNvSpPr txBox="1"/>
           <p:nvPr/>
         </p:nvSpPr>
@@ -10281,7 +9658,7 @@
       </p:sp>
       <p:sp>
         <p:nvSpPr>
-          <p:cNvPr id="213" name=""/>
+          <p:cNvPr id="189" name=""/>
           <p:cNvSpPr txBox="1"/>
           <p:nvPr/>
         </p:nvSpPr>
@@ -10318,7 +9695,7 @@
       </p:sp>
       <p:sp>
         <p:nvSpPr>
-          <p:cNvPr id="214" name=""/>
+          <p:cNvPr id="190" name=""/>
           <p:cNvSpPr txBox="1"/>
           <p:nvPr/>
         </p:nvSpPr>
@@ -10406,7 +9783,7 @@
       </p:grpSpPr>
       <p:sp>
         <p:nvSpPr>
-          <p:cNvPr id="215" name=""/>
+          <p:cNvPr id="191" name=""/>
           <p:cNvSpPr txBox="1"/>
           <p:nvPr/>
         </p:nvSpPr>
@@ -10452,7 +9829,7 @@
       </p:sp>
       <p:sp>
         <p:nvSpPr>
-          <p:cNvPr id="216" name=""/>
+          <p:cNvPr id="192" name=""/>
           <p:cNvSpPr txBox="1"/>
           <p:nvPr/>
         </p:nvSpPr>
@@ -10489,7 +9866,7 @@
       </p:sp>
       <p:sp>
         <p:nvSpPr>
-          <p:cNvPr id="217" name=""/>
+          <p:cNvPr id="193" name=""/>
           <p:cNvSpPr txBox="1"/>
           <p:nvPr/>
         </p:nvSpPr>
@@ -10526,7 +9903,7 @@
       </p:sp>
       <p:sp>
         <p:nvSpPr>
-          <p:cNvPr id="218" name=""/>
+          <p:cNvPr id="194" name=""/>
           <p:cNvSpPr txBox="1"/>
           <p:nvPr/>
         </p:nvSpPr>
@@ -10577,7 +9954,7 @@
       </p:sp>
       <p:sp>
         <p:nvSpPr>
-          <p:cNvPr id="219" name=""/>
+          <p:cNvPr id="195" name=""/>
           <p:cNvSpPr txBox="1"/>
           <p:nvPr/>
         </p:nvSpPr>
@@ -10614,7 +9991,7 @@
       </p:sp>
       <p:sp>
         <p:nvSpPr>
-          <p:cNvPr id="220" name=""/>
+          <p:cNvPr id="196" name=""/>
           <p:cNvSpPr txBox="1"/>
           <p:nvPr/>
         </p:nvSpPr>
@@ -10665,7 +10042,7 @@
       </p:sp>
       <p:sp>
         <p:nvSpPr>
-          <p:cNvPr id="221" name=""/>
+          <p:cNvPr id="197" name=""/>
           <p:cNvSpPr txBox="1"/>
           <p:nvPr/>
         </p:nvSpPr>
@@ -10702,7 +10079,7 @@
       </p:sp>
       <p:sp>
         <p:nvSpPr>
-          <p:cNvPr id="222" name=""/>
+          <p:cNvPr id="198" name=""/>
           <p:cNvSpPr txBox="1"/>
           <p:nvPr/>
         </p:nvSpPr>
@@ -11174,7 +10551,7 @@
       </p:grpSpPr>
       <p:sp>
         <p:nvSpPr>
-          <p:cNvPr id="223" name=""/>
+          <p:cNvPr id="199" name=""/>
           <p:cNvSpPr txBox="1"/>
           <p:nvPr/>
         </p:nvSpPr>
@@ -11231,7 +10608,7 @@
       </p:sp>
       <p:sp>
         <p:nvSpPr>
-          <p:cNvPr id="224" name=""/>
+          <p:cNvPr id="200" name=""/>
           <p:cNvSpPr txBox="1"/>
           <p:nvPr/>
         </p:nvSpPr>
@@ -11268,7 +10645,7 @@
       </p:sp>
       <p:sp>
         <p:nvSpPr>
-          <p:cNvPr id="225" name=""/>
+          <p:cNvPr id="201" name=""/>
           <p:cNvSpPr txBox="1"/>
           <p:nvPr/>
         </p:nvSpPr>
@@ -12463,184 +11840,6 @@
         </p:nvSpPr>
         <p:spPr>
           <a:xfrm>
-            <a:off x="5298120" y="1330560"/>
-            <a:ext cx="2193480" cy="887040"/>
-          </a:xfrm>
-          <a:prstGeom prst="rect">
-            <a:avLst/>
-          </a:prstGeom>
-          <a:noFill/>
-          <a:ln w="28800">
-            <a:solidFill>
-              <a:srgbClr val="D97706"/>
-            </a:solidFill>
-            <a:round/>
-          </a:ln>
-        </p:spPr>
-        <p:txBody>
-          <a:bodyPr lIns="104400" tIns="59400" rIns="104400" bIns="59400" anchor="t">
-            <a:spAutoFit/>
-          </a:bodyPr>
-          <a:p>
-            <a:endParaRPr lang="en-US" sz="1800" b="0" u="none" strike="noStrike">
-              <a:solidFill>
-                <a:srgbClr val="000000"/>
-              </a:solidFill>
-              <a:effectLst/>
-              <a:uFillTx/>
-              <a:latin typeface="Arial"/>
-            </a:endParaRPr>
-          </a:p>
-        </p:txBody>
-      </p:sp>
-      <p:sp>
-        <p:nvSpPr>
-          <p:cNvPr id="59" name=""/>
-          <p:cNvSpPr txBox="1"/>
-          <p:nvPr/>
-        </p:nvSpPr>
-        <p:spPr>
-          <a:xfrm>
-            <a:off x="5298120" y="1107360"/>
-            <a:ext cx="1584000" cy="201600"/>
-          </a:xfrm>
-          <a:prstGeom prst="rect">
-            <a:avLst/>
-          </a:prstGeom>
-          <a:solidFill>
-            <a:srgbClr val="103E3A"/>
-          </a:solidFill>
-          <a:ln w="14400">
-            <a:solidFill>
-              <a:srgbClr val="E6BF71"/>
-            </a:solidFill>
-            <a:round/>
-          </a:ln>
-        </p:spPr>
-        <p:txBody>
-          <a:bodyPr lIns="79200" tIns="28800" rIns="79200" bIns="28800" anchor="t">
-            <a:spAutoFit/>
-          </a:bodyPr>
-          <a:p>
-            <a:r>
-              <a:rPr lang="en-US" sz="950" b="1" u="none" strike="noStrike">
-                <a:solidFill>
-                  <a:srgbClr val="FFFFFF"/>
-                </a:solidFill>
-                <a:effectLst/>
-                <a:uFillTx/>
-                <a:latin typeface="Arial"/>
-              </a:rPr>
-              <a:t>One-click demo roles</a:t>
-            </a:r>
-            <a:endParaRPr lang="en-US" sz="950" b="0" u="none" strike="noStrike">
-              <a:solidFill>
-                <a:srgbClr val="FFFFFF"/>
-              </a:solidFill>
-              <a:effectLst/>
-              <a:uFillTx/>
-              <a:latin typeface="Arial"/>
-            </a:endParaRPr>
-          </a:p>
-        </p:txBody>
-      </p:sp>
-      <p:sp>
-        <p:nvSpPr>
-          <p:cNvPr id="60" name=""/>
-          <p:cNvSpPr txBox="1"/>
-          <p:nvPr/>
-        </p:nvSpPr>
-        <p:spPr>
-          <a:xfrm>
-            <a:off x="2201400" y="1895040"/>
-            <a:ext cx="2193480" cy="564480"/>
-          </a:xfrm>
-          <a:prstGeom prst="rect">
-            <a:avLst/>
-          </a:prstGeom>
-          <a:noFill/>
-          <a:ln w="28800">
-            <a:solidFill>
-              <a:srgbClr val="D97706"/>
-            </a:solidFill>
-            <a:round/>
-          </a:ln>
-        </p:spPr>
-        <p:txBody>
-          <a:bodyPr lIns="104400" tIns="59400" rIns="104400" bIns="59400" anchor="t">
-            <a:spAutoFit/>
-          </a:bodyPr>
-          <a:p>
-            <a:endParaRPr lang="en-US" sz="1800" b="0" u="none" strike="noStrike">
-              <a:solidFill>
-                <a:srgbClr val="000000"/>
-              </a:solidFill>
-              <a:effectLst/>
-              <a:uFillTx/>
-              <a:latin typeface="Arial"/>
-            </a:endParaRPr>
-          </a:p>
-        </p:txBody>
-      </p:sp>
-      <p:sp>
-        <p:nvSpPr>
-          <p:cNvPr id="61" name=""/>
-          <p:cNvSpPr txBox="1"/>
-          <p:nvPr/>
-        </p:nvSpPr>
-        <p:spPr>
-          <a:xfrm>
-            <a:off x="2201400" y="2488320"/>
-            <a:ext cx="1926000" cy="201600"/>
-          </a:xfrm>
-          <a:prstGeom prst="rect">
-            <a:avLst/>
-          </a:prstGeom>
-          <a:solidFill>
-            <a:srgbClr val="103E3A"/>
-          </a:solidFill>
-          <a:ln w="14400">
-            <a:solidFill>
-              <a:srgbClr val="E6BF71"/>
-            </a:solidFill>
-            <a:round/>
-          </a:ln>
-        </p:spPr>
-        <p:txBody>
-          <a:bodyPr lIns="79200" tIns="28800" rIns="79200" bIns="28800" anchor="t">
-            <a:spAutoFit/>
-          </a:bodyPr>
-          <a:p>
-            <a:r>
-              <a:rPr lang="en-US" sz="950" b="1" u="none" strike="noStrike">
-                <a:solidFill>
-                  <a:srgbClr val="FFFFFF"/>
-                </a:solidFill>
-                <a:effectLst/>
-                <a:uFillTx/>
-                <a:latin typeface="Arial"/>
-              </a:rPr>
-              <a:t>Approved bilingual slogan</a:t>
-            </a:r>
-            <a:endParaRPr lang="en-US" sz="950" b="0" u="none" strike="noStrike">
-              <a:solidFill>
-                <a:srgbClr val="FFFFFF"/>
-              </a:solidFill>
-              <a:effectLst/>
-              <a:uFillTx/>
-              <a:latin typeface="Arial"/>
-            </a:endParaRPr>
-          </a:p>
-        </p:txBody>
-      </p:sp>
-      <p:sp>
-        <p:nvSpPr>
-          <p:cNvPr id="62" name=""/>
-          <p:cNvSpPr txBox="1"/>
-          <p:nvPr/>
-        </p:nvSpPr>
-        <p:spPr>
-          <a:xfrm>
             <a:off x="540000" y="5148000"/>
             <a:ext cx="9000000" cy="360000"/>
           </a:xfrm>
@@ -12718,7 +11917,7 @@
       </p:grpSpPr>
       <p:sp>
         <p:nvSpPr>
-          <p:cNvPr id="63" name=""/>
+          <p:cNvPr id="59" name=""/>
           <p:cNvSpPr txBox="1"/>
           <p:nvPr/>
         </p:nvSpPr>
@@ -12764,7 +11963,7 @@
       </p:sp>
       <p:sp>
         <p:nvSpPr>
-          <p:cNvPr id="64" name=""/>
+          <p:cNvPr id="60" name=""/>
           <p:cNvSpPr txBox="1"/>
           <p:nvPr/>
         </p:nvSpPr>
@@ -12801,7 +12000,7 @@
       </p:sp>
       <p:pic>
         <p:nvPicPr>
-          <p:cNvPr id="65" name=""/>
+          <p:cNvPr id="61" name=""/>
           <p:cNvPicPr/>
           <p:nvPr/>
         </p:nvPicPr>
@@ -12825,96 +12024,7 @@
       </p:pic>
       <p:sp>
         <p:nvSpPr>
-          <p:cNvPr id="66" name=""/>
-          <p:cNvSpPr txBox="1"/>
-          <p:nvPr/>
-        </p:nvSpPr>
-        <p:spPr>
-          <a:xfrm>
-            <a:off x="6459120" y="2298240"/>
-            <a:ext cx="1483920" cy="362880"/>
-          </a:xfrm>
-          <a:prstGeom prst="rect">
-            <a:avLst/>
-          </a:prstGeom>
-          <a:noFill/>
-          <a:ln w="28800">
-            <a:solidFill>
-              <a:srgbClr val="D97706"/>
-            </a:solidFill>
-            <a:round/>
-          </a:ln>
-        </p:spPr>
-        <p:txBody>
-          <a:bodyPr lIns="104400" tIns="59400" rIns="104400" bIns="59400" anchor="t">
-            <a:spAutoFit/>
-          </a:bodyPr>
-          <a:p>
-            <a:endParaRPr lang="en-US" sz="1800" b="0" u="none" strike="noStrike">
-              <a:solidFill>
-                <a:srgbClr val="000000"/>
-              </a:solidFill>
-              <a:effectLst/>
-              <a:uFillTx/>
-              <a:latin typeface="Arial"/>
-            </a:endParaRPr>
-          </a:p>
-        </p:txBody>
-      </p:sp>
-      <p:sp>
-        <p:nvSpPr>
-          <p:cNvPr id="67" name=""/>
-          <p:cNvSpPr txBox="1"/>
-          <p:nvPr/>
-        </p:nvSpPr>
-        <p:spPr>
-          <a:xfrm>
-            <a:off x="6459120" y="2075040"/>
-            <a:ext cx="1994400" cy="201600"/>
-          </a:xfrm>
-          <a:prstGeom prst="rect">
-            <a:avLst/>
-          </a:prstGeom>
-          <a:solidFill>
-            <a:srgbClr val="103E3A"/>
-          </a:solidFill>
-          <a:ln w="14400">
-            <a:solidFill>
-              <a:srgbClr val="E6BF71"/>
-            </a:solidFill>
-            <a:round/>
-          </a:ln>
-        </p:spPr>
-        <p:txBody>
-          <a:bodyPr lIns="79200" tIns="28800" rIns="79200" bIns="28800" anchor="t">
-            <a:spAutoFit/>
-          </a:bodyPr>
-          <a:p>
-            <a:r>
-              <a:rPr lang="en-US" sz="950" b="1" u="none" strike="noStrike">
-                <a:solidFill>
-                  <a:srgbClr val="FFFFFF"/>
-                </a:solidFill>
-                <a:effectLst/>
-                <a:uFillTx/>
-                <a:latin typeface="Arial"/>
-              </a:rPr>
-              <a:t>Filters + Only-mine toggle</a:t>
-            </a:r>
-            <a:endParaRPr lang="en-US" sz="950" b="0" u="none" strike="noStrike">
-              <a:solidFill>
-                <a:srgbClr val="FFFFFF"/>
-              </a:solidFill>
-              <a:effectLst/>
-              <a:uFillTx/>
-              <a:latin typeface="Arial"/>
-            </a:endParaRPr>
-          </a:p>
-        </p:txBody>
-      </p:sp>
-      <p:sp>
-        <p:nvSpPr>
-          <p:cNvPr id="68" name=""/>
+          <p:cNvPr id="62" name=""/>
           <p:cNvSpPr txBox="1"/>
           <p:nvPr/>
         </p:nvSpPr>
@@ -12997,7 +12107,7 @@
       </p:grpSpPr>
       <p:sp>
         <p:nvSpPr>
-          <p:cNvPr id="69" name=""/>
+          <p:cNvPr id="63" name=""/>
           <p:cNvSpPr txBox="1"/>
           <p:nvPr/>
         </p:nvSpPr>
@@ -13043,7 +12153,7 @@
       </p:sp>
       <p:sp>
         <p:nvSpPr>
-          <p:cNvPr id="70" name=""/>
+          <p:cNvPr id="64" name=""/>
           <p:cNvSpPr txBox="1"/>
           <p:nvPr/>
         </p:nvSpPr>
@@ -13080,7 +12190,7 @@
       </p:sp>
       <p:pic>
         <p:nvPicPr>
-          <p:cNvPr id="71" name=""/>
+          <p:cNvPr id="65" name=""/>
           <p:cNvPicPr/>
           <p:nvPr/>
         </p:nvPicPr>
@@ -13104,7 +12214,7 @@
       </p:pic>
       <p:sp>
         <p:nvSpPr>
-          <p:cNvPr id="72" name=""/>
+          <p:cNvPr id="66" name=""/>
           <p:cNvSpPr txBox="1"/>
           <p:nvPr/>
         </p:nvSpPr>
@@ -13187,7 +12297,7 @@
       </p:grpSpPr>
       <p:sp>
         <p:nvSpPr>
-          <p:cNvPr id="73" name=""/>
+          <p:cNvPr id="67" name=""/>
           <p:cNvSpPr txBox="1"/>
           <p:nvPr/>
         </p:nvSpPr>
@@ -13233,7 +12343,7 @@
       </p:sp>
       <p:sp>
         <p:nvSpPr>
-          <p:cNvPr id="74" name=""/>
+          <p:cNvPr id="68" name=""/>
           <p:cNvSpPr txBox="1"/>
           <p:nvPr/>
         </p:nvSpPr>
@@ -13270,7 +12380,7 @@
       </p:sp>
       <p:pic>
         <p:nvPicPr>
-          <p:cNvPr id="75" name=""/>
+          <p:cNvPr id="69" name=""/>
           <p:cNvPicPr/>
           <p:nvPr/>
         </p:nvPicPr>
@@ -13294,185 +12404,7 @@
       </p:pic>
       <p:sp>
         <p:nvSpPr>
-          <p:cNvPr id="76" name=""/>
-          <p:cNvSpPr txBox="1"/>
-          <p:nvPr/>
-        </p:nvSpPr>
-        <p:spPr>
-          <a:xfrm>
-            <a:off x="5168880" y="2580480"/>
-            <a:ext cx="2580480" cy="1128960"/>
-          </a:xfrm>
-          <a:prstGeom prst="rect">
-            <a:avLst/>
-          </a:prstGeom>
-          <a:noFill/>
-          <a:ln w="28800">
-            <a:solidFill>
-              <a:srgbClr val="D97706"/>
-            </a:solidFill>
-            <a:round/>
-          </a:ln>
-        </p:spPr>
-        <p:txBody>
-          <a:bodyPr lIns="104400" tIns="59400" rIns="104400" bIns="59400" anchor="t">
-            <a:spAutoFit/>
-          </a:bodyPr>
-          <a:p>
-            <a:endParaRPr lang="en-US" sz="1800" b="0" u="none" strike="noStrike">
-              <a:solidFill>
-                <a:srgbClr val="000000"/>
-              </a:solidFill>
-              <a:effectLst/>
-              <a:uFillTx/>
-              <a:latin typeface="Arial"/>
-            </a:endParaRPr>
-          </a:p>
-        </p:txBody>
-      </p:sp>
-      <p:sp>
-        <p:nvSpPr>
-          <p:cNvPr id="77" name=""/>
-          <p:cNvSpPr txBox="1"/>
-          <p:nvPr/>
-        </p:nvSpPr>
-        <p:spPr>
-          <a:xfrm>
-            <a:off x="5168880" y="2357280"/>
-            <a:ext cx="2815200" cy="201600"/>
-          </a:xfrm>
-          <a:prstGeom prst="rect">
-            <a:avLst/>
-          </a:prstGeom>
-          <a:solidFill>
-            <a:srgbClr val="103E3A"/>
-          </a:solidFill>
-          <a:ln w="14400">
-            <a:solidFill>
-              <a:srgbClr val="E6BF71"/>
-            </a:solidFill>
-            <a:round/>
-          </a:ln>
-        </p:spPr>
-        <p:txBody>
-          <a:bodyPr lIns="79200" tIns="28800" rIns="79200" bIns="28800" anchor="t">
-            <a:spAutoFit/>
-          </a:bodyPr>
-          <a:p>
-            <a:r>
-              <a:rPr lang="en-US" sz="950" b="1" u="none" strike="noStrike">
-                <a:solidFill>
-                  <a:srgbClr val="FFFFFF"/>
-                </a:solidFill>
-                <a:effectLst/>
-                <a:uFillTx/>
-                <a:latin typeface="Arial"/>
-              </a:rPr>
-              <a:t>Unit · dates · item · allocation flags</a:t>
-            </a:r>
-            <a:endParaRPr lang="en-US" sz="950" b="0" u="none" strike="noStrike">
-              <a:solidFill>
-                <a:srgbClr val="FFFFFF"/>
-              </a:solidFill>
-              <a:effectLst/>
-              <a:uFillTx/>
-              <a:latin typeface="Arial"/>
-            </a:endParaRPr>
-          </a:p>
-        </p:txBody>
-      </p:sp>
-      <p:sp>
-        <p:nvSpPr>
-          <p:cNvPr id="78" name=""/>
-          <p:cNvSpPr txBox="1"/>
-          <p:nvPr/>
-        </p:nvSpPr>
-        <p:spPr>
-          <a:xfrm>
-            <a:off x="3685320" y="4314240"/>
-            <a:ext cx="2451600" cy="443520"/>
-          </a:xfrm>
-          <a:prstGeom prst="rect">
-            <a:avLst/>
-          </a:prstGeom>
-          <a:noFill/>
-          <a:ln w="28800">
-            <a:solidFill>
-              <a:srgbClr val="D97706"/>
-            </a:solidFill>
-            <a:round/>
-          </a:ln>
-        </p:spPr>
-        <p:txBody>
-          <a:bodyPr lIns="104400" tIns="59400" rIns="104400" bIns="59400" anchor="t">
-            <a:spAutoFit/>
-          </a:bodyPr>
-          <a:p>
-            <a:endParaRPr lang="en-US" sz="1800" b="0" u="none" strike="noStrike">
-              <a:solidFill>
-                <a:srgbClr val="000000"/>
-              </a:solidFill>
-              <a:effectLst/>
-              <a:uFillTx/>
-              <a:latin typeface="Arial"/>
-            </a:endParaRPr>
-          </a:p>
-        </p:txBody>
-      </p:sp>
-      <p:sp>
-        <p:nvSpPr>
-          <p:cNvPr id="79" name=""/>
-          <p:cNvSpPr txBox="1"/>
-          <p:nvPr/>
-        </p:nvSpPr>
-        <p:spPr>
-          <a:xfrm>
-            <a:off x="3685320" y="4091040"/>
-            <a:ext cx="2404800" cy="201600"/>
-          </a:xfrm>
-          <a:prstGeom prst="rect">
-            <a:avLst/>
-          </a:prstGeom>
-          <a:solidFill>
-            <a:srgbClr val="103E3A"/>
-          </a:solidFill>
-          <a:ln w="14400">
-            <a:solidFill>
-              <a:srgbClr val="E6BF71"/>
-            </a:solidFill>
-            <a:round/>
-          </a:ln>
-        </p:spPr>
-        <p:txBody>
-          <a:bodyPr lIns="79200" tIns="28800" rIns="79200" bIns="28800" anchor="t">
-            <a:spAutoFit/>
-          </a:bodyPr>
-          <a:p>
-            <a:r>
-              <a:rPr lang="en-US" sz="950" b="1" u="none" strike="noStrike">
-                <a:solidFill>
-                  <a:srgbClr val="FFFFFF"/>
-                </a:solidFill>
-                <a:effectLst/>
-                <a:uFillTx/>
-                <a:latin typeface="Arial"/>
-              </a:rPr>
-              <a:t>Multi-stage cycle: Manager -&gt; HR</a:t>
-            </a:r>
-            <a:endParaRPr lang="en-US" sz="950" b="0" u="none" strike="noStrike">
-              <a:solidFill>
-                <a:srgbClr val="FFFFFF"/>
-              </a:solidFill>
-              <a:effectLst/>
-              <a:uFillTx/>
-              <a:latin typeface="Arial"/>
-            </a:endParaRPr>
-          </a:p>
-        </p:txBody>
-      </p:sp>
-      <p:sp>
-        <p:nvSpPr>
-          <p:cNvPr id="80" name=""/>
+          <p:cNvPr id="70" name=""/>
           <p:cNvSpPr txBox="1"/>
           <p:nvPr/>
         </p:nvSpPr>
